--- a/G15-PID-17.pptx
+++ b/G15-PID-17.pptx
@@ -3576,11 +3576,11 @@
           </a:fontRef>
         </p:style>
         <p:txBody>
-          <a:bodyPr rtlCol="0" anchor="ctr" lIns="228600" rIns="228600" tIns="228600"/>
+          <a:bodyPr rtlCol="0" anchor="ctr" lIns="228600" rIns="274320" tIns="320040"/>
           <a:lstStyle/>
           <a:p>
             <a:pPr algn="ctr">
-              <a:defRPr sz="1550" b="1">
+              <a:defRPr sz="1700" b="1">
                 <a:solidFill>
                   <a:srgbClr val="3EA6FF"/>
                 </a:solidFill>
@@ -3593,9 +3593,9 @@
           <a:p>
             <a:pPr>
               <a:spcBef>
-                <a:spcPts val="800"/>
+                <a:spcPts val="1800"/>
               </a:spcBef>
-              <a:defRPr sz="1200">
+              <a:defRPr sz="1350">
                 <a:solidFill>
                   <a:srgbClr val="C8CDD7"/>
                 </a:solidFill>
@@ -3608,9 +3608,9 @@
           <a:p>
             <a:pPr>
               <a:spcBef>
-                <a:spcPts val="800"/>
+                <a:spcPts val="1800"/>
               </a:spcBef>
-              <a:defRPr sz="1200">
+              <a:defRPr sz="1350">
                 <a:solidFill>
                   <a:srgbClr val="C8CDD7"/>
                 </a:solidFill>
@@ -3623,9 +3623,9 @@
           <a:p>
             <a:pPr>
               <a:spcBef>
-                <a:spcPts val="800"/>
+                <a:spcPts val="1800"/>
               </a:spcBef>
-              <a:defRPr sz="1200">
+              <a:defRPr sz="1350">
                 <a:solidFill>
                   <a:srgbClr val="C8CDD7"/>
                 </a:solidFill>
@@ -3675,11 +3675,11 @@
           </a:fontRef>
         </p:style>
         <p:txBody>
-          <a:bodyPr rtlCol="0" anchor="ctr" lIns="228600" rIns="228600" tIns="228600"/>
+          <a:bodyPr rtlCol="0" anchor="ctr" lIns="228600" rIns="274320" tIns="320040"/>
           <a:lstStyle/>
           <a:p>
             <a:pPr algn="ctr">
-              <a:defRPr sz="1550" b="1">
+              <a:defRPr sz="1700" b="1">
                 <a:solidFill>
                   <a:srgbClr val="FF0033"/>
                 </a:solidFill>
@@ -3692,9 +3692,9 @@
           <a:p>
             <a:pPr>
               <a:spcBef>
-                <a:spcPts val="800"/>
+                <a:spcPts val="1800"/>
               </a:spcBef>
-              <a:defRPr sz="1200">
+              <a:defRPr sz="1350">
                 <a:solidFill>
                   <a:srgbClr val="C8CDD7"/>
                 </a:solidFill>
@@ -3707,9 +3707,9 @@
           <a:p>
             <a:pPr>
               <a:spcBef>
-                <a:spcPts val="800"/>
+                <a:spcPts val="1800"/>
               </a:spcBef>
-              <a:defRPr sz="1200">
+              <a:defRPr sz="1350">
                 <a:solidFill>
                   <a:srgbClr val="C8CDD7"/>
                 </a:solidFill>
@@ -3722,9 +3722,9 @@
           <a:p>
             <a:pPr>
               <a:spcBef>
-                <a:spcPts val="800"/>
+                <a:spcPts val="1800"/>
               </a:spcBef>
-              <a:defRPr sz="1200">
+              <a:defRPr sz="1350">
                 <a:solidFill>
                   <a:srgbClr val="C8CDD7"/>
                 </a:solidFill>
@@ -3737,9 +3737,9 @@
           <a:p>
             <a:pPr>
               <a:spcBef>
-                <a:spcPts val="800"/>
+                <a:spcPts val="1800"/>
               </a:spcBef>
-              <a:defRPr sz="1200">
+              <a:defRPr sz="1350">
                 <a:solidFill>
                   <a:srgbClr val="C8CDD7"/>
                 </a:solidFill>
@@ -3789,11 +3789,11 @@
           </a:fontRef>
         </p:style>
         <p:txBody>
-          <a:bodyPr rtlCol="0" anchor="ctr" lIns="228600" rIns="228600" tIns="228600"/>
+          <a:bodyPr rtlCol="0" anchor="ctr" lIns="228600" rIns="274320" tIns="320040"/>
           <a:lstStyle/>
           <a:p>
             <a:pPr algn="ctr">
-              <a:defRPr sz="1550" b="1">
+              <a:defRPr sz="1700" b="1">
                 <a:solidFill>
                   <a:srgbClr val="3EA6FF"/>
                 </a:solidFill>
@@ -3806,9 +3806,9 @@
           <a:p>
             <a:pPr>
               <a:spcBef>
-                <a:spcPts val="800"/>
+                <a:spcPts val="1800"/>
               </a:spcBef>
-              <a:defRPr sz="1200">
+              <a:defRPr sz="1350">
                 <a:solidFill>
                   <a:srgbClr val="C8CDD7"/>
                 </a:solidFill>
@@ -3821,9 +3821,9 @@
           <a:p>
             <a:pPr>
               <a:spcBef>
-                <a:spcPts val="800"/>
+                <a:spcPts val="1800"/>
               </a:spcBef>
-              <a:defRPr sz="1200">
+              <a:defRPr sz="1350">
                 <a:solidFill>
                   <a:srgbClr val="C8CDD7"/>
                 </a:solidFill>
@@ -3836,9 +3836,9 @@
           <a:p>
             <a:pPr>
               <a:spcBef>
-                <a:spcPts val="800"/>
+                <a:spcPts val="1800"/>
               </a:spcBef>
-              <a:defRPr sz="1200">
+              <a:defRPr sz="1350">
                 <a:solidFill>
                   <a:srgbClr val="C8CDD7"/>
                 </a:solidFill>
@@ -5378,30 +5378,6 @@
           </a:p>
         </p:txBody>
       </p:sp>
-      <p:pic>
-        <p:nvPicPr>
-          <p:cNvPr id="7" name="Picture 6" descr="ui_search_clean.png"/>
-          <p:cNvPicPr>
-            <a:picLocks noChangeAspect="1"/>
-          </p:cNvPicPr>
-          <p:nvPr/>
-        </p:nvPicPr>
-        <p:blipFill>
-          <a:blip r:embed="rId2"/>
-          <a:stretch>
-            <a:fillRect/>
-          </a:stretch>
-        </p:blipFill>
-        <p:spPr>
-          <a:xfrm>
-            <a:off x="6446520" y="1417320"/>
-            <a:ext cx="5010912" cy="4892040"/>
-          </a:xfrm>
-          <a:prstGeom prst="rect">
-            <a:avLst/>
-          </a:prstGeom>
-        </p:spPr>
-      </p:pic>
     </p:spTree>
   </p:cSld>
   <p:clrMapOvr>
@@ -5579,33 +5555,9 @@
           </a:p>
         </p:txBody>
       </p:sp>
-      <p:pic>
-        <p:nvPicPr>
-          <p:cNvPr id="6" name="Picture 5" descr="ui_sync_clean.png"/>
-          <p:cNvPicPr>
-            <a:picLocks noChangeAspect="1"/>
-          </p:cNvPicPr>
-          <p:nvPr/>
-        </p:nvPicPr>
-        <p:blipFill>
-          <a:blip r:embed="rId2"/>
-          <a:stretch>
-            <a:fillRect/>
-          </a:stretch>
-        </p:blipFill>
-        <p:spPr>
-          <a:xfrm>
-            <a:off x="731520" y="1417320"/>
-            <a:ext cx="5010912" cy="4892040"/>
-          </a:xfrm>
-          <a:prstGeom prst="rect">
-            <a:avLst/>
-          </a:prstGeom>
-        </p:spPr>
-      </p:pic>
-      <p:sp>
-        <p:nvSpPr>
-          <p:cNvPr id="7" name="Rounded Rectangle 6"/>
+      <p:sp>
+        <p:nvSpPr>
+          <p:cNvPr id="6" name="Rounded Rectangle 5"/>
           <p:cNvSpPr/>
           <p:nvPr/>
         </p:nvSpPr>
@@ -6700,11 +6652,11 @@
           </a:fontRef>
         </p:style>
         <p:txBody>
-          <a:bodyPr rtlCol="0" anchor="ctr" lIns="228600" rIns="228600" tIns="228600"/>
+          <a:bodyPr rtlCol="0" anchor="ctr" lIns="228600" rIns="274320" tIns="320040"/>
           <a:lstStyle/>
           <a:p>
             <a:pPr algn="ctr">
-              <a:defRPr sz="1450" b="1">
+              <a:defRPr sz="1650" b="1">
                 <a:solidFill>
                   <a:srgbClr val="3EA6FF"/>
                 </a:solidFill>
@@ -6717,9 +6669,9 @@
           <a:p>
             <a:pPr>
               <a:spcBef>
-                <a:spcPts val="800"/>
+                <a:spcPts val="2000"/>
               </a:spcBef>
-              <a:defRPr sz="1200">
+              <a:defRPr sz="1350">
                 <a:solidFill>
                   <a:srgbClr val="C8CDD7"/>
                 </a:solidFill>
@@ -6732,9 +6684,9 @@
           <a:p>
             <a:pPr>
               <a:spcBef>
-                <a:spcPts val="800"/>
+                <a:spcPts val="2000"/>
               </a:spcBef>
-              <a:defRPr sz="1200">
+              <a:defRPr sz="1350">
                 <a:solidFill>
                   <a:srgbClr val="C8CDD7"/>
                 </a:solidFill>
@@ -6784,11 +6736,11 @@
           </a:fontRef>
         </p:style>
         <p:txBody>
-          <a:bodyPr rtlCol="0" anchor="ctr" lIns="228600" rIns="228600" tIns="228600"/>
+          <a:bodyPr rtlCol="0" anchor="ctr" lIns="228600" rIns="274320" tIns="320040"/>
           <a:lstStyle/>
           <a:p>
             <a:pPr algn="ctr">
-              <a:defRPr sz="1450" b="1">
+              <a:defRPr sz="1650" b="1">
                 <a:solidFill>
                   <a:srgbClr val="FF0033"/>
                 </a:solidFill>
@@ -6801,9 +6753,9 @@
           <a:p>
             <a:pPr>
               <a:spcBef>
-                <a:spcPts val="800"/>
+                <a:spcPts val="2000"/>
               </a:spcBef>
-              <a:defRPr sz="1200">
+              <a:defRPr sz="1350">
                 <a:solidFill>
                   <a:srgbClr val="C8CDD7"/>
                 </a:solidFill>
@@ -6816,9 +6768,9 @@
           <a:p>
             <a:pPr>
               <a:spcBef>
-                <a:spcPts val="800"/>
+                <a:spcPts val="2000"/>
               </a:spcBef>
-              <a:defRPr sz="1200">
+              <a:defRPr sz="1350">
                 <a:solidFill>
                   <a:srgbClr val="C8CDD7"/>
                 </a:solidFill>
@@ -6868,11 +6820,11 @@
           </a:fontRef>
         </p:style>
         <p:txBody>
-          <a:bodyPr rtlCol="0" anchor="ctr" lIns="228600" rIns="228600" tIns="228600"/>
+          <a:bodyPr rtlCol="0" anchor="ctr" lIns="228600" rIns="274320" tIns="320040"/>
           <a:lstStyle/>
           <a:p>
             <a:pPr algn="ctr">
-              <a:defRPr sz="1450" b="1">
+              <a:defRPr sz="1650" b="1">
                 <a:solidFill>
                   <a:srgbClr val="3EA6FF"/>
                 </a:solidFill>
@@ -6885,9 +6837,9 @@
           <a:p>
             <a:pPr>
               <a:spcBef>
-                <a:spcPts val="800"/>
+                <a:spcPts val="2000"/>
               </a:spcBef>
-              <a:defRPr sz="1200">
+              <a:defRPr sz="1350">
                 <a:solidFill>
                   <a:srgbClr val="C8CDD7"/>
                 </a:solidFill>
@@ -6900,9 +6852,9 @@
           <a:p>
             <a:pPr>
               <a:spcBef>
-                <a:spcPts val="800"/>
+                <a:spcPts val="2000"/>
               </a:spcBef>
-              <a:defRPr sz="1200">
+              <a:defRPr sz="1350">
                 <a:solidFill>
                   <a:srgbClr val="C8CDD7"/>
                 </a:solidFill>
@@ -6978,30 +6930,6 @@
           </a:p>
         </p:txBody>
       </p:sp>
-      <p:pic>
-        <p:nvPicPr>
-          <p:cNvPr id="3" name="Picture 2" descr="thankyou_art.png"/>
-          <p:cNvPicPr>
-            <a:picLocks noChangeAspect="1"/>
-          </p:cNvPicPr>
-          <p:nvPr/>
-        </p:nvPicPr>
-        <p:blipFill>
-          <a:blip r:embed="rId2"/>
-          <a:stretch>
-            <a:fillRect/>
-          </a:stretch>
-        </p:blipFill>
-        <p:spPr>
-          <a:xfrm>
-            <a:off x="914400" y="838504"/>
-            <a:ext cx="10362895" cy="5180990"/>
-          </a:xfrm>
-          <a:prstGeom prst="rect">
-            <a:avLst/>
-          </a:prstGeom>
-        </p:spPr>
-      </p:pic>
     </p:spTree>
   </p:cSld>
   <p:clrMapOvr>

--- a/G15-PID-17.pptx
+++ b/G15-PID-17.pptx
@@ -5264,7 +5264,7 @@
           <a:p>
             <a:pPr>
               <a:spcBef>
-                <a:spcPts val="800"/>
+                <a:spcPts val="1300"/>
               </a:spcBef>
               <a:defRPr b="1" sz="1200">
                 <a:solidFill>
@@ -5287,7 +5287,7 @@
           <a:p>
             <a:pPr>
               <a:spcBef>
-                <a:spcPts val="800"/>
+                <a:spcPts val="1300"/>
               </a:spcBef>
               <a:defRPr b="1" sz="1200">
                 <a:solidFill>
@@ -5310,7 +5310,7 @@
           <a:p>
             <a:pPr>
               <a:spcBef>
-                <a:spcPts val="800"/>
+                <a:spcPts val="1300"/>
               </a:spcBef>
               <a:defRPr b="1" sz="1200">
                 <a:solidFill>
@@ -5333,7 +5333,7 @@
           <a:p>
             <a:pPr>
               <a:spcBef>
-                <a:spcPts val="800"/>
+                <a:spcPts val="1300"/>
               </a:spcBef>
               <a:defRPr b="1" sz="1200">
                 <a:solidFill>
@@ -5356,7 +5356,7 @@
           <a:p>
             <a:pPr>
               <a:spcBef>
-                <a:spcPts val="800"/>
+                <a:spcPts val="1300"/>
               </a:spcBef>
               <a:defRPr b="1" sz="1200">
                 <a:solidFill>
@@ -5378,6 +5378,30 @@
           </a:p>
         </p:txBody>
       </p:sp>
+      <p:pic>
+        <p:nvPicPr>
+          <p:cNvPr id="7" name="Picture 6" descr="ui_search_clean.png"/>
+          <p:cNvPicPr>
+            <a:picLocks noChangeAspect="1"/>
+          </p:cNvPicPr>
+          <p:nvPr/>
+        </p:nvPicPr>
+        <p:blipFill>
+          <a:blip r:embed="rId2"/>
+          <a:stretch>
+            <a:fillRect/>
+          </a:stretch>
+        </p:blipFill>
+        <p:spPr>
+          <a:xfrm>
+            <a:off x="6446520" y="1417320"/>
+            <a:ext cx="5010912" cy="4892040"/>
+          </a:xfrm>
+          <a:prstGeom prst="rect">
+            <a:avLst/>
+          </a:prstGeom>
+        </p:spPr>
+      </p:pic>
     </p:spTree>
   </p:cSld>
   <p:clrMapOvr>
@@ -5555,9 +5579,33 @@
           </a:p>
         </p:txBody>
       </p:sp>
-      <p:sp>
-        <p:nvSpPr>
-          <p:cNvPr id="6" name="Rounded Rectangle 5"/>
+      <p:pic>
+        <p:nvPicPr>
+          <p:cNvPr id="6" name="Picture 5" descr="ui_sync_clean.png"/>
+          <p:cNvPicPr>
+            <a:picLocks noChangeAspect="1"/>
+          </p:cNvPicPr>
+          <p:nvPr/>
+        </p:nvPicPr>
+        <p:blipFill>
+          <a:blip r:embed="rId2"/>
+          <a:stretch>
+            <a:fillRect/>
+          </a:stretch>
+        </p:blipFill>
+        <p:spPr>
+          <a:xfrm>
+            <a:off x="731520" y="1417320"/>
+            <a:ext cx="5010912" cy="4892040"/>
+          </a:xfrm>
+          <a:prstGeom prst="rect">
+            <a:avLst/>
+          </a:prstGeom>
+        </p:spPr>
+      </p:pic>
+      <p:sp>
+        <p:nvSpPr>
+          <p:cNvPr id="7" name="Rounded Rectangle 6"/>
           <p:cNvSpPr/>
           <p:nvPr/>
         </p:nvSpPr>
@@ -5610,7 +5658,7 @@
           <a:p>
             <a:pPr>
               <a:spcBef>
-                <a:spcPts val="800"/>
+                <a:spcPts val="1300"/>
               </a:spcBef>
               <a:defRPr b="1" sz="1200">
                 <a:solidFill>
@@ -5633,7 +5681,7 @@
           <a:p>
             <a:pPr>
               <a:spcBef>
-                <a:spcPts val="800"/>
+                <a:spcPts val="1300"/>
               </a:spcBef>
               <a:defRPr b="1" sz="1200">
                 <a:solidFill>
@@ -5656,7 +5704,7 @@
           <a:p>
             <a:pPr>
               <a:spcBef>
-                <a:spcPts val="800"/>
+                <a:spcPts val="1300"/>
               </a:spcBef>
               <a:defRPr b="1" sz="1200">
                 <a:solidFill>
@@ -5679,7 +5727,7 @@
           <a:p>
             <a:pPr>
               <a:spcBef>
-                <a:spcPts val="800"/>
+                <a:spcPts val="1300"/>
               </a:spcBef>
               <a:defRPr b="1" sz="1200">
                 <a:solidFill>
@@ -5702,7 +5750,7 @@
           <a:p>
             <a:pPr>
               <a:spcBef>
-                <a:spcPts val="800"/>
+                <a:spcPts val="1300"/>
               </a:spcBef>
               <a:defRPr b="1" sz="1200">
                 <a:solidFill>

--- a/G15-PID-17.pptx
+++ b/G15-PID-17.pptx
@@ -14,6 +14,9 @@
     <p:sldId id="262" r:id="rId13"/>
     <p:sldId id="263" r:id="rId14"/>
     <p:sldId id="264" r:id="rId15"/>
+    <p:sldId id="265" r:id="rId16"/>
+    <p:sldId id="266" r:id="rId17"/>
+    <p:sldId id="267" r:id="rId18"/>
   </p:sldIdLst>
   <p:sldSz cx="12191695" cy="6858000" type="screen4x3"/>
   <p:notesSz cx="6858000" cy="9144000"/>
@@ -3191,7 +3194,7 @@
         <p:spPr>
           <a:xfrm>
             <a:off x="731520" y="960120"/>
-            <a:ext cx="10728655" cy="2103120"/>
+            <a:ext cx="10728655" cy="2011680"/>
           </a:xfrm>
           <a:prstGeom prst="rect">
             <a:avLst/>
@@ -3212,7 +3215,7 @@
               </a:defRPr>
             </a:pPr>
             <a:r>
-              <a:t>Video Streaming Platform (YouTube-Style)</a:t>
+              <a:t>PheW TuBe: Video Streaming Platform</a:t>
             </a:r>
           </a:p>
           <a:p>
@@ -3220,14 +3223,14 @@
               <a:spcBef>
                 <a:spcPts val="400"/>
               </a:spcBef>
-              <a:defRPr sz="1700" b="1">
+              <a:defRPr sz="1600" b="1">
                 <a:solidFill>
                   <a:srgbClr val="FF0033"/>
                 </a:solidFill>
               </a:defRPr>
             </a:pPr>
             <a:r>
-              <a:t>Front End Engineering - II (25CSE0203) — Project Based Evaluation-I</a:t>
+              <a:t>Front End Engineering - II (25CSE0203) — Project Based Evaluation-2 (Batch-2025)</a:t>
             </a:r>
           </a:p>
           <a:p>
@@ -3242,14 +3245,38 @@
               </a:defRPr>
             </a:pPr>
             <a:r>
-              <a:t>Department of Computer Science &amp; Engineering • Chitkara University</a:t>
-            </a:r>
-          </a:p>
-        </p:txBody>
-      </p:sp>
-      <p:sp>
-        <p:nvSpPr>
-          <p:cNvPr id="5" name="Rounded Rectangle 4"/>
+              <a:t>Department of Computer Science &amp; Engineering • Chitkara University, Punjab</a:t>
+            </a:r>
+          </a:p>
+        </p:txBody>
+      </p:sp>
+      <p:pic>
+        <p:nvPicPr>
+          <p:cNvPr id="5" name="Picture 4" descr="chitkara_logo.png"/>
+          <p:cNvPicPr>
+            <a:picLocks noChangeAspect="1"/>
+          </p:cNvPicPr>
+          <p:nvPr/>
+        </p:nvPicPr>
+        <p:blipFill>
+          <a:blip r:embed="rId2"/>
+          <a:stretch>
+            <a:fillRect/>
+          </a:stretch>
+        </p:blipFill>
+        <p:spPr>
+          <a:xfrm>
+            <a:off x="9601200" y="822960"/>
+            <a:ext cx="5865460" cy="1097280"/>
+          </a:xfrm>
+          <a:prstGeom prst="rect">
+            <a:avLst/>
+          </a:prstGeom>
+        </p:spPr>
+      </p:pic>
+      <p:sp>
+        <p:nvSpPr>
+          <p:cNvPr id="6" name="Rounded Rectangle 5"/>
           <p:cNvSpPr/>
           <p:nvPr/>
         </p:nvSpPr>
@@ -3285,10 +3312,468 @@
           </a:fontRef>
         </p:style>
         <p:txBody>
-          <a:bodyPr rtlCol="0" anchor="ctr" lIns="365760" tIns="274320"/>
-          <a:lstStyle/>
-          <a:p>
-            <a:pPr algn="ctr">
+          <a:bodyPr rtlCol="0" anchor="ctr"/>
+          <a:lstStyle/>
+          <a:p>
+            <a:pPr algn="ctr"/>
+          </a:p>
+        </p:txBody>
+      </p:sp>
+      <p:sp>
+        <p:nvSpPr>
+          <p:cNvPr id="7" name="TextBox 6"/>
+          <p:cNvSpPr txBox="1"/>
+          <p:nvPr/>
+        </p:nvSpPr>
+        <p:spPr>
+          <a:xfrm>
+            <a:off x="1097280" y="3566160"/>
+            <a:ext cx="4572000" cy="2286000"/>
+          </a:xfrm>
+          <a:prstGeom prst="rect">
+            <a:avLst/>
+          </a:prstGeom>
+          <a:noFill/>
+        </p:spPr>
+        <p:txBody>
+          <a:bodyPr wrap="none">
+            <a:spAutoFit/>
+          </a:bodyPr>
+          <a:lstStyle/>
+          <a:p>
+            <a:pPr>
+              <a:spcAft>
+                <a:spcPts val="800"/>
+              </a:spcAft>
+              <a:defRPr sz="1500" b="1">
+                <a:solidFill>
+                  <a:srgbClr val="FF0033"/>
+                </a:solidFill>
+              </a:defRPr>
+            </a:pPr>
+            <a:r>
+              <a:t>Supervised By:</a:t>
+            </a:r>
+          </a:p>
+          <a:p>
+            <a:pPr>
+              <a:defRPr sz="1400" b="1">
+                <a:solidFill>
+                  <a:srgbClr val="FFFFFF"/>
+                </a:solidFill>
+              </a:defRPr>
+            </a:pPr>
+            <a:r>
+              <a:t>Mr. Shubham Kumar</a:t>
+            </a:r>
+          </a:p>
+          <a:p>
+            <a:pPr>
+              <a:defRPr sz="1100">
+                <a:solidFill>
+                  <a:srgbClr val="BEC3CD"/>
+                </a:solidFill>
+              </a:defRPr>
+            </a:pPr>
+            <a:r>
+              <a:t>Technical Trainer, Department of CSE</a:t>
+            </a:r>
+          </a:p>
+          <a:p>
+            <a:pPr>
+              <a:defRPr sz="1000">
+                <a:solidFill>
+                  <a:srgbClr val="8C919B"/>
+                </a:solidFill>
+              </a:defRPr>
+            </a:pPr>
+            <a:r>
+              <a:t>Chitkara University Institute of Engineering &amp; Technology</a:t>
+            </a:r>
+          </a:p>
+        </p:txBody>
+      </p:sp>
+      <p:sp>
+        <p:nvSpPr>
+          <p:cNvPr id="8" name="TextBox 7"/>
+          <p:cNvSpPr txBox="1"/>
+          <p:nvPr/>
+        </p:nvSpPr>
+        <p:spPr>
+          <a:xfrm>
+            <a:off x="6217920" y="3566160"/>
+            <a:ext cx="4846320" cy="2286000"/>
+          </a:xfrm>
+          <a:prstGeom prst="rect">
+            <a:avLst/>
+          </a:prstGeom>
+          <a:noFill/>
+        </p:spPr>
+        <p:txBody>
+          <a:bodyPr wrap="none">
+            <a:spAutoFit/>
+          </a:bodyPr>
+          <a:lstStyle/>
+          <a:p>
+            <a:pPr>
+              <a:spcAft>
+                <a:spcPts val="800"/>
+              </a:spcAft>
+              <a:defRPr sz="1500" b="1">
+                <a:solidFill>
+                  <a:srgbClr val="3EA6FF"/>
+                </a:solidFill>
+              </a:defRPr>
+            </a:pPr>
+            <a:r>
+              <a:t>Submitted By (Group G-15):</a:t>
+            </a:r>
+          </a:p>
+          <a:p>
+            <a:pPr>
+              <a:spcAft>
+                <a:spcPts val="400"/>
+              </a:spcAft>
+              <a:defRPr sz="1150" b="1">
+                <a:solidFill>
+                  <a:srgbClr val="FFFFFF"/>
+                </a:solidFill>
+              </a:defRPr>
+            </a:pPr>
+            <a:r>
+              <a:t>Kanav Chadha — Roll No: 2510990649 (G-15)</a:t>
+            </a:r>
+          </a:p>
+          <a:p>
+            <a:pPr>
+              <a:spcAft>
+                <a:spcPts val="400"/>
+              </a:spcAft>
+              <a:defRPr sz="1150" b="1">
+                <a:solidFill>
+                  <a:srgbClr val="FFFFFF"/>
+                </a:solidFill>
+              </a:defRPr>
+            </a:pPr>
+            <a:r>
+              <a:t>Kishan — Roll No: 2510991457 (G-15)</a:t>
+            </a:r>
+          </a:p>
+          <a:p>
+            <a:pPr>
+              <a:spcAft>
+                <a:spcPts val="400"/>
+              </a:spcAft>
+              <a:defRPr sz="1150" b="1">
+                <a:solidFill>
+                  <a:srgbClr val="FFFFFF"/>
+                </a:solidFill>
+              </a:defRPr>
+            </a:pPr>
+            <a:r>
+              <a:t>Arsh Behl — Roll No: 2510991354 (G-15)</a:t>
+            </a:r>
+          </a:p>
+          <a:p>
+            <a:pPr>
+              <a:spcAft>
+                <a:spcPts val="400"/>
+              </a:spcAft>
+              <a:defRPr sz="1150" b="1">
+                <a:solidFill>
+                  <a:srgbClr val="FFFFFF"/>
+                </a:solidFill>
+              </a:defRPr>
+            </a:pPr>
+            <a:r>
+              <a:t>Soumajit Majee — Roll No: 2510990383 (G-15)</a:t>
+            </a:r>
+          </a:p>
+        </p:txBody>
+      </p:sp>
+    </p:spTree>
+  </p:cSld>
+  <p:clrMapOvr>
+    <a:masterClrMapping/>
+  </p:clrMapOvr>
+  <p:transition spd="fast">
+    <p:push dir="l"/>
+  </p:transition>
+</p:sld>
+</file>
+
+<file path=ppt/slides/slide10.xml><?xml version="1.0" encoding="utf-8"?>
+<p:sld xmlns:a="http://schemas.openxmlformats.org/drawingml/2006/main" xmlns:p="http://schemas.openxmlformats.org/presentationml/2006/main" xmlns:r="http://schemas.openxmlformats.org/officeDocument/2006/relationships">
+  <p:cSld>
+    <p:spTree>
+      <p:nvGrpSpPr>
+        <p:cNvPr id="1" name=""/>
+        <p:cNvGrpSpPr/>
+        <p:nvPr/>
+      </p:nvGrpSpPr>
+      <p:grpSpPr/>
+      <p:sp>
+        <p:nvSpPr>
+          <p:cNvPr id="2" name="Rectangle 1"/>
+          <p:cNvSpPr/>
+          <p:nvPr/>
+        </p:nvSpPr>
+        <p:spPr>
+          <a:xfrm>
+            <a:off x="0" y="0"/>
+            <a:ext cx="12191695" cy="6858000"/>
+          </a:xfrm>
+          <a:prstGeom prst="rect">
+            <a:avLst/>
+          </a:prstGeom>
+          <a:solidFill>
+            <a:srgbClr val="0B0C10"/>
+          </a:solidFill>
+          <a:ln>
+            <a:noFill/>
+          </a:ln>
+        </p:spPr>
+        <p:style>
+          <a:lnRef idx="1">
+            <a:schemeClr val="accent1"/>
+          </a:lnRef>
+          <a:fillRef idx="3">
+            <a:schemeClr val="accent1"/>
+          </a:fillRef>
+          <a:effectRef idx="2">
+            <a:schemeClr val="accent1"/>
+          </a:effectRef>
+          <a:fontRef idx="minor">
+            <a:schemeClr val="lt1"/>
+          </a:fontRef>
+        </p:style>
+        <p:txBody>
+          <a:bodyPr rtlCol="0" anchor="ctr"/>
+          <a:lstStyle/>
+          <a:p>
+            <a:pPr algn="ctr"/>
+          </a:p>
+        </p:txBody>
+      </p:sp>
+      <p:sp>
+        <p:nvSpPr>
+          <p:cNvPr id="3" name="Rectangle 2"/>
+          <p:cNvSpPr/>
+          <p:nvPr/>
+        </p:nvSpPr>
+        <p:spPr>
+          <a:xfrm>
+            <a:off x="731520" y="365760"/>
+            <a:ext cx="365760" cy="54864"/>
+          </a:xfrm>
+          <a:prstGeom prst="rect">
+            <a:avLst/>
+          </a:prstGeom>
+          <a:solidFill>
+            <a:srgbClr val="FF0033"/>
+          </a:solidFill>
+          <a:ln>
+            <a:noFill/>
+          </a:ln>
+        </p:spPr>
+        <p:style>
+          <a:lnRef idx="1">
+            <a:schemeClr val="accent1"/>
+          </a:lnRef>
+          <a:fillRef idx="3">
+            <a:schemeClr val="accent1"/>
+          </a:fillRef>
+          <a:effectRef idx="2">
+            <a:schemeClr val="accent1"/>
+          </a:effectRef>
+          <a:fontRef idx="minor">
+            <a:schemeClr val="lt1"/>
+          </a:fontRef>
+        </p:style>
+        <p:txBody>
+          <a:bodyPr rtlCol="0" anchor="ctr"/>
+          <a:lstStyle/>
+          <a:p>
+            <a:pPr algn="ctr"/>
+          </a:p>
+        </p:txBody>
+      </p:sp>
+      <p:sp>
+        <p:nvSpPr>
+          <p:cNvPr id="4" name="TextBox 3"/>
+          <p:cNvSpPr txBox="1"/>
+          <p:nvPr/>
+        </p:nvSpPr>
+        <p:spPr>
+          <a:xfrm>
+            <a:off x="1188720" y="292608"/>
+            <a:ext cx="10241280" cy="274320"/>
+          </a:xfrm>
+          <a:prstGeom prst="rect">
+            <a:avLst/>
+          </a:prstGeom>
+          <a:noFill/>
+        </p:spPr>
+        <p:txBody>
+          <a:bodyPr wrap="none">
+            <a:spAutoFit/>
+          </a:bodyPr>
+          <a:lstStyle/>
+          <a:p>
+            <a:pPr>
+              <a:defRPr sz="1000" b="1">
+                <a:solidFill>
+                  <a:srgbClr val="3EA6FF"/>
+                </a:solidFill>
+              </a:defRPr>
+            </a:pPr>
+            <a:r>
+              <a:t>GROUP G15  •  PROJECT ID: G15-PID-17 (P-17)  •  EVALUATION-II (25CSE0203)</a:t>
+            </a:r>
+          </a:p>
+        </p:txBody>
+      </p:sp>
+      <p:sp>
+        <p:nvSpPr>
+          <p:cNvPr id="5" name="TextBox 4"/>
+          <p:cNvSpPr txBox="1"/>
+          <p:nvPr/>
+        </p:nvSpPr>
+        <p:spPr>
+          <a:xfrm>
+            <a:off x="731520" y="594360"/>
+            <a:ext cx="10728655" cy="594360"/>
+          </a:xfrm>
+          <a:prstGeom prst="rect">
+            <a:avLst/>
+          </a:prstGeom>
+          <a:noFill/>
+        </p:spPr>
+        <p:txBody>
+          <a:bodyPr wrap="none">
+            <a:spAutoFit/>
+          </a:bodyPr>
+          <a:lstStyle/>
+          <a:p>
+            <a:pPr>
+              <a:defRPr sz="2100" b="1">
+                <a:solidFill>
+                  <a:srgbClr val="FFFFFF"/>
+                </a:solidFill>
+              </a:defRPr>
+            </a:pPr>
+            <a:r>
+              <a:t>Multi-Device Responsive Design &amp; Modern UI/UX Layer</a:t>
+            </a:r>
+          </a:p>
+        </p:txBody>
+      </p:sp>
+      <p:sp>
+        <p:nvSpPr>
+          <p:cNvPr id="6" name="TextBox 5"/>
+          <p:cNvSpPr txBox="1"/>
+          <p:nvPr/>
+        </p:nvSpPr>
+        <p:spPr>
+          <a:xfrm>
+            <a:off x="731520" y="6309360"/>
+            <a:ext cx="10728655" cy="320040"/>
+          </a:xfrm>
+          <a:prstGeom prst="rect">
+            <a:avLst/>
+          </a:prstGeom>
+          <a:noFill/>
+        </p:spPr>
+        <p:txBody>
+          <a:bodyPr wrap="none">
+            <a:spAutoFit/>
+          </a:bodyPr>
+          <a:lstStyle/>
+          <a:p>
+            <a:pPr>
+              <a:defRPr sz="900">
+                <a:solidFill>
+                  <a:srgbClr val="7B8293"/>
+                </a:solidFill>
+              </a:defRPr>
+            </a:pPr>
+            <a:r>
+              <a:t>PheW TuBe: Video Streaming Platform (G15-PID-17)  |  Evaluation-II  |  Page 10</a:t>
+            </a:r>
+          </a:p>
+        </p:txBody>
+      </p:sp>
+      <p:sp>
+        <p:nvSpPr>
+          <p:cNvPr id="7" name="Rounded Rectangle 6"/>
+          <p:cNvSpPr/>
+          <p:nvPr/>
+        </p:nvSpPr>
+        <p:spPr>
+          <a:xfrm>
+            <a:off x="731520" y="1371600"/>
+            <a:ext cx="3383280" cy="4663440"/>
+          </a:xfrm>
+          <a:prstGeom prst="roundRect">
+            <a:avLst/>
+          </a:prstGeom>
+          <a:solidFill>
+            <a:srgbClr val="161922"/>
+          </a:solidFill>
+          <a:ln w="15240">
+            <a:solidFill>
+              <a:srgbClr val="2E3445"/>
+            </a:solidFill>
+          </a:ln>
+        </p:spPr>
+        <p:style>
+          <a:lnRef idx="1">
+            <a:schemeClr val="accent1"/>
+          </a:lnRef>
+          <a:fillRef idx="3">
+            <a:schemeClr val="accent1"/>
+          </a:fillRef>
+          <a:effectRef idx="2">
+            <a:schemeClr val="accent1"/>
+          </a:effectRef>
+          <a:fontRef idx="minor">
+            <a:schemeClr val="lt1"/>
+          </a:fontRef>
+        </p:style>
+        <p:txBody>
+          <a:bodyPr rtlCol="0" anchor="ctr"/>
+          <a:lstStyle/>
+          <a:p>
+            <a:pPr algn="ctr"/>
+          </a:p>
+        </p:txBody>
+      </p:sp>
+      <p:sp>
+        <p:nvSpPr>
+          <p:cNvPr id="8" name="TextBox 7"/>
+          <p:cNvSpPr txBox="1"/>
+          <p:nvPr/>
+        </p:nvSpPr>
+        <p:spPr>
+          <a:xfrm>
+            <a:off x="914400" y="1508760"/>
+            <a:ext cx="3017520" cy="4389120"/>
+          </a:xfrm>
+          <a:prstGeom prst="rect">
+            <a:avLst/>
+          </a:prstGeom>
+          <a:noFill/>
+        </p:spPr>
+        <p:txBody>
+          <a:bodyPr wrap="square">
+            <a:spAutoFit/>
+          </a:bodyPr>
+          <a:lstStyle/>
+          <a:p>
+            <a:pPr>
+              <a:spcAft>
+                <a:spcPts val="800"/>
+              </a:spcAft>
               <a:defRPr sz="1300" b="1">
                 <a:solidFill>
                   <a:srgbClr val="FF0033"/>
@@ -3296,67 +3781,1849 @@
               </a:defRPr>
             </a:pPr>
             <a:r>
-              <a:t>TEAM MEMBERS (GROUP G15)</a:t>
-            </a:r>
-          </a:p>
-          <a:p>
-            <a:pPr>
-              <a:spcBef>
-                <a:spcPts val="1000"/>
-              </a:spcBef>
-              <a:defRPr sz="1400">
+              <a:t>Responsive Breakpoints Architecture</a:t>
+            </a:r>
+          </a:p>
+          <a:p>
+            <a:pPr>
+              <a:spcAft>
+                <a:spcPts val="600"/>
+              </a:spcAft>
+            </a:pPr>
+            <a:r>
+              <a:rPr b="1" sz="1050">
+                <a:solidFill>
+                  <a:srgbClr val="FF0033"/>
+                </a:solidFill>
+              </a:rPr>
+              <a:t>• </a:t>
+            </a:r>
+            <a:r>
+              <a:rPr b="1" sz="1000">
                 <a:solidFill>
                   <a:srgbClr val="FFFFFF"/>
                 </a:solidFill>
+              </a:rPr>
+              <a:t>Desktop (&gt;1150px): </a:t>
+            </a:r>
+            <a:r>
+              <a:rPr sz="1000">
+                <a:solidFill>
+                  <a:srgbClr val="BEC3CD"/>
+                </a:solidFill>
+              </a:rPr>
+              <a:t>4-column feed grid, collapsible full sidebar, dual-column Watch page with sidebar queue.</a:t>
+            </a:r>
+          </a:p>
+          <a:p>
+            <a:pPr>
+              <a:spcAft>
+                <a:spcPts val="600"/>
+              </a:spcAft>
+            </a:pPr>
+            <a:r>
+              <a:rPr b="1" sz="1050">
+                <a:solidFill>
+                  <a:srgbClr val="FF0033"/>
+                </a:solidFill>
+              </a:rPr>
+              <a:t>• </a:t>
+            </a:r>
+            <a:r>
+              <a:rPr b="1" sz="1000">
+                <a:solidFill>
+                  <a:srgbClr val="FFFFFF"/>
+                </a:solidFill>
+              </a:rPr>
+              <a:t>Tablet (768px - 1150px): </a:t>
+            </a:r>
+            <a:r>
+              <a:rPr sz="1000">
+                <a:solidFill>
+                  <a:srgbClr val="BEC3CD"/>
+                </a:solidFill>
+              </a:rPr>
+              <a:t>2-3 column fluid grid, compact icon sidebar, stacked Watch page layout.</a:t>
+            </a:r>
+          </a:p>
+          <a:p>
+            <a:pPr>
+              <a:spcAft>
+                <a:spcPts val="600"/>
+              </a:spcAft>
+            </a:pPr>
+            <a:r>
+              <a:rPr b="1" sz="1050">
+                <a:solidFill>
+                  <a:srgbClr val="FF0033"/>
+                </a:solidFill>
+              </a:rPr>
+              <a:t>• </a:t>
+            </a:r>
+            <a:r>
+              <a:rPr b="1" sz="1000">
+                <a:solidFill>
+                  <a:srgbClr val="FFFFFF"/>
+                </a:solidFill>
+              </a:rPr>
+              <a:t>Mobile (&lt;480px): </a:t>
+            </a:r>
+            <a:r>
+              <a:rPr sz="1000">
+                <a:solidFill>
+                  <a:srgbClr val="BEC3CD"/>
+                </a:solidFill>
+              </a:rPr>
+              <a:t>Single column full-bleed cards, bottom navigation parity, full-width responsive video player.</a:t>
+            </a:r>
+          </a:p>
+        </p:txBody>
+      </p:sp>
+      <p:sp>
+        <p:nvSpPr>
+          <p:cNvPr id="9" name="Rounded Rectangle 8"/>
+          <p:cNvSpPr/>
+          <p:nvPr/>
+        </p:nvSpPr>
+        <p:spPr>
+          <a:xfrm>
+            <a:off x="4389120" y="1371600"/>
+            <a:ext cx="3383280" cy="4663440"/>
+          </a:xfrm>
+          <a:prstGeom prst="roundRect">
+            <a:avLst/>
+          </a:prstGeom>
+          <a:solidFill>
+            <a:srgbClr val="161922"/>
+          </a:solidFill>
+          <a:ln w="15240">
+            <a:solidFill>
+              <a:srgbClr val="2E3445"/>
+            </a:solidFill>
+          </a:ln>
+        </p:spPr>
+        <p:style>
+          <a:lnRef idx="1">
+            <a:schemeClr val="accent1"/>
+          </a:lnRef>
+          <a:fillRef idx="3">
+            <a:schemeClr val="accent1"/>
+          </a:fillRef>
+          <a:effectRef idx="2">
+            <a:schemeClr val="accent1"/>
+          </a:effectRef>
+          <a:fontRef idx="minor">
+            <a:schemeClr val="lt1"/>
+          </a:fontRef>
+        </p:style>
+        <p:txBody>
+          <a:bodyPr rtlCol="0" anchor="ctr"/>
+          <a:lstStyle/>
+          <a:p>
+            <a:pPr algn="ctr"/>
+          </a:p>
+        </p:txBody>
+      </p:sp>
+      <p:sp>
+        <p:nvSpPr>
+          <p:cNvPr id="10" name="TextBox 9"/>
+          <p:cNvSpPr txBox="1"/>
+          <p:nvPr/>
+        </p:nvSpPr>
+        <p:spPr>
+          <a:xfrm>
+            <a:off x="4572000" y="1508760"/>
+            <a:ext cx="3017520" cy="4389120"/>
+          </a:xfrm>
+          <a:prstGeom prst="rect">
+            <a:avLst/>
+          </a:prstGeom>
+          <a:noFill/>
+        </p:spPr>
+        <p:txBody>
+          <a:bodyPr wrap="square">
+            <a:spAutoFit/>
+          </a:bodyPr>
+          <a:lstStyle/>
+          <a:p>
+            <a:pPr>
+              <a:spcAft>
+                <a:spcPts val="800"/>
+              </a:spcAft>
+              <a:defRPr sz="1300" b="1">
+                <a:solidFill>
+                  <a:srgbClr val="3EA6FF"/>
+                </a:solidFill>
               </a:defRPr>
             </a:pPr>
             <a:r>
-              <a:t>• Kanav Chadha (Team Leader)  —  Roll No: 2510990649</a:t>
-            </a:r>
-          </a:p>
-          <a:p>
-            <a:pPr>
-              <a:spcBef>
-                <a:spcPts val="1000"/>
-              </a:spcBef>
-              <a:defRPr sz="1400">
+              <a:t>Live Search Autocomplete Engine</a:t>
+            </a:r>
+          </a:p>
+          <a:p>
+            <a:pPr>
+              <a:spcAft>
+                <a:spcPts val="600"/>
+              </a:spcAft>
+            </a:pPr>
+            <a:r>
+              <a:rPr b="1" sz="1050">
+                <a:solidFill>
+                  <a:srgbClr val="3EA6FF"/>
+                </a:solidFill>
+              </a:rPr>
+              <a:t>• </a:t>
+            </a:r>
+            <a:r>
+              <a:rPr b="1" sz="1000">
                 <a:solidFill>
                   <a:srgbClr val="FFFFFF"/>
                 </a:solidFill>
+              </a:rPr>
+              <a:t>Instant Substring Matching: </a:t>
+            </a:r>
+            <a:r>
+              <a:rPr sz="1000">
+                <a:solidFill>
+                  <a:srgbClr val="BEC3CD"/>
+                </a:solidFill>
+              </a:rPr>
+              <a:t>Filters video titles, creator names, and tags in real-time as the user types.</a:t>
+            </a:r>
+          </a:p>
+          <a:p>
+            <a:pPr>
+              <a:spcAft>
+                <a:spcPts val="600"/>
+              </a:spcAft>
+            </a:pPr>
+            <a:r>
+              <a:rPr b="1" sz="1050">
+                <a:solidFill>
+                  <a:srgbClr val="3EA6FF"/>
+                </a:solidFill>
+              </a:rPr>
+              <a:t>• </a:t>
+            </a:r>
+            <a:r>
+              <a:rPr b="1" sz="1000">
+                <a:solidFill>
+                  <a:srgbClr val="FFFFFF"/>
+                </a:solidFill>
+              </a:rPr>
+              <a:t>Floating Dropdown Menu: </a:t>
+            </a:r>
+            <a:r>
+              <a:rPr sz="1000">
+                <a:solidFill>
+                  <a:srgbClr val="BEC3CD"/>
+                </a:solidFill>
+              </a:rPr>
+              <a:t>Rendered with subtle shadow elevation, keyboard accessibility, and outside-click dismiss.</a:t>
+            </a:r>
+          </a:p>
+          <a:p>
+            <a:pPr>
+              <a:spcAft>
+                <a:spcPts val="600"/>
+              </a:spcAft>
+            </a:pPr>
+            <a:r>
+              <a:rPr b="1" sz="1050">
+                <a:solidFill>
+                  <a:srgbClr val="3EA6FF"/>
+                </a:solidFill>
+              </a:rPr>
+              <a:t>• </a:t>
+            </a:r>
+            <a:r>
+              <a:rPr b="1" sz="1000">
+                <a:solidFill>
+                  <a:srgbClr val="FFFFFF"/>
+                </a:solidFill>
+              </a:rPr>
+              <a:t>Direct Video Launch: </a:t>
+            </a:r>
+            <a:r>
+              <a:rPr sz="1000">
+                <a:solidFill>
+                  <a:srgbClr val="BEC3CD"/>
+                </a:solidFill>
+              </a:rPr>
+              <a:t>Selecting any suggestion navigates straight to that video's dynamic player route.</a:t>
+            </a:r>
+          </a:p>
+        </p:txBody>
+      </p:sp>
+      <p:sp>
+        <p:nvSpPr>
+          <p:cNvPr id="11" name="Rounded Rectangle 10"/>
+          <p:cNvSpPr/>
+          <p:nvPr/>
+        </p:nvSpPr>
+        <p:spPr>
+          <a:xfrm>
+            <a:off x="8046720" y="1371600"/>
+            <a:ext cx="3383280" cy="4663440"/>
+          </a:xfrm>
+          <a:prstGeom prst="roundRect">
+            <a:avLst/>
+          </a:prstGeom>
+          <a:solidFill>
+            <a:srgbClr val="161922"/>
+          </a:solidFill>
+          <a:ln w="15240">
+            <a:solidFill>
+              <a:srgbClr val="2E3445"/>
+            </a:solidFill>
+          </a:ln>
+        </p:spPr>
+        <p:style>
+          <a:lnRef idx="1">
+            <a:schemeClr val="accent1"/>
+          </a:lnRef>
+          <a:fillRef idx="3">
+            <a:schemeClr val="accent1"/>
+          </a:fillRef>
+          <a:effectRef idx="2">
+            <a:schemeClr val="accent1"/>
+          </a:effectRef>
+          <a:fontRef idx="minor">
+            <a:schemeClr val="lt1"/>
+          </a:fontRef>
+        </p:style>
+        <p:txBody>
+          <a:bodyPr rtlCol="0" anchor="ctr"/>
+          <a:lstStyle/>
+          <a:p>
+            <a:pPr algn="ctr"/>
+          </a:p>
+        </p:txBody>
+      </p:sp>
+      <p:sp>
+        <p:nvSpPr>
+          <p:cNvPr id="12" name="TextBox 11"/>
+          <p:cNvSpPr txBox="1"/>
+          <p:nvPr/>
+        </p:nvSpPr>
+        <p:spPr>
+          <a:xfrm>
+            <a:off x="8229600" y="1508760"/>
+            <a:ext cx="3017520" cy="4389120"/>
+          </a:xfrm>
+          <a:prstGeom prst="rect">
+            <a:avLst/>
+          </a:prstGeom>
+          <a:noFill/>
+        </p:spPr>
+        <p:txBody>
+          <a:bodyPr wrap="square">
+            <a:spAutoFit/>
+          </a:bodyPr>
+          <a:lstStyle/>
+          <a:p>
+            <a:pPr>
+              <a:spcAft>
+                <a:spcPts val="800"/>
+              </a:spcAft>
+              <a:defRPr sz="1300" b="1">
+                <a:solidFill>
+                  <a:srgbClr val="2BA640"/>
+                </a:solidFill>
               </a:defRPr>
             </a:pPr>
             <a:r>
-              <a:t>• Kishan  —  Roll No: 2510991457</a:t>
-            </a:r>
-          </a:p>
-          <a:p>
-            <a:pPr>
-              <a:spcBef>
-                <a:spcPts val="1000"/>
-              </a:spcBef>
-              <a:defRPr sz="1400">
+              <a:t>Micro-Interactions &amp; Toast Bus</a:t>
+            </a:r>
+          </a:p>
+          <a:p>
+            <a:pPr>
+              <a:spcAft>
+                <a:spcPts val="600"/>
+              </a:spcAft>
+            </a:pPr>
+            <a:r>
+              <a:rPr b="1" sz="1050">
+                <a:solidFill>
+                  <a:srgbClr val="2BA640"/>
+                </a:solidFill>
+              </a:rPr>
+              <a:t>• </a:t>
+            </a:r>
+            <a:r>
+              <a:rPr b="1" sz="1000">
                 <a:solidFill>
                   <a:srgbClr val="FFFFFF"/>
                 </a:solidFill>
+              </a:rPr>
+              <a:t>react-toastify Alerts: </a:t>
+            </a:r>
+            <a:r>
+              <a:rPr sz="1000">
+                <a:solidFill>
+                  <a:srgbClr val="BEC3CD"/>
+                </a:solidFill>
+              </a:rPr>
+              <a:t>Dark-themed feedback badges on likes, playlist additions, and clipboard copy.</a:t>
+            </a:r>
+          </a:p>
+          <a:p>
+            <a:pPr>
+              <a:spcAft>
+                <a:spcPts val="600"/>
+              </a:spcAft>
+            </a:pPr>
+            <a:r>
+              <a:rPr b="1" sz="1050">
+                <a:solidFill>
+                  <a:srgbClr val="2BA640"/>
+                </a:solidFill>
+              </a:rPr>
+              <a:t>• </a:t>
+            </a:r>
+            <a:r>
+              <a:rPr b="1" sz="1000">
+                <a:solidFill>
+                  <a:srgbClr val="FFFFFF"/>
+                </a:solidFill>
+              </a:rPr>
+              <a:t>Shorts Feed Scroll-Snap: </a:t>
+            </a:r>
+            <a:r>
+              <a:rPr sz="1000">
+                <a:solidFill>
+                  <a:srgbClr val="BEC3CD"/>
+                </a:solidFill>
+              </a:rPr>
+              <a:t>CSS scroll-snap-type: y mandatory for smooth vertical reel browsing.</a:t>
+            </a:r>
+          </a:p>
+          <a:p>
+            <a:pPr>
+              <a:spcAft>
+                <a:spcPts val="600"/>
+              </a:spcAft>
+            </a:pPr>
+            <a:r>
+              <a:rPr b="1" sz="1050">
+                <a:solidFill>
+                  <a:srgbClr val="2BA640"/>
+                </a:solidFill>
+              </a:rPr>
+              <a:t>• </a:t>
+            </a:r>
+            <a:r>
+              <a:rPr b="1" sz="1000">
+                <a:solidFill>
+                  <a:srgbClr val="FFFFFF"/>
+                </a:solidFill>
+              </a:rPr>
+              <a:t>Web Speech Voice Search: </a:t>
+            </a:r>
+            <a:r>
+              <a:rPr sz="1000">
+                <a:solidFill>
+                  <a:srgbClr val="BEC3CD"/>
+                </a:solidFill>
+              </a:rPr>
+              <a:t>Microphone transcription converting voice input to instant search queries.</a:t>
+            </a:r>
+          </a:p>
+        </p:txBody>
+      </p:sp>
+    </p:spTree>
+  </p:cSld>
+  <p:clrMapOvr>
+    <a:masterClrMapping/>
+  </p:clrMapOvr>
+  <p:transition spd="fast">
+    <p:push dir="l"/>
+  </p:transition>
+</p:sld>
+</file>
+
+<file path=ppt/slides/slide11.xml><?xml version="1.0" encoding="utf-8"?>
+<p:sld xmlns:a="http://schemas.openxmlformats.org/drawingml/2006/main" xmlns:p="http://schemas.openxmlformats.org/presentationml/2006/main" xmlns:r="http://schemas.openxmlformats.org/officeDocument/2006/relationships">
+  <p:cSld>
+    <p:spTree>
+      <p:nvGrpSpPr>
+        <p:cNvPr id="1" name=""/>
+        <p:cNvGrpSpPr/>
+        <p:nvPr/>
+      </p:nvGrpSpPr>
+      <p:grpSpPr/>
+      <p:sp>
+        <p:nvSpPr>
+          <p:cNvPr id="2" name="Rectangle 1"/>
+          <p:cNvSpPr/>
+          <p:nvPr/>
+        </p:nvSpPr>
+        <p:spPr>
+          <a:xfrm>
+            <a:off x="0" y="0"/>
+            <a:ext cx="12191695" cy="6858000"/>
+          </a:xfrm>
+          <a:prstGeom prst="rect">
+            <a:avLst/>
+          </a:prstGeom>
+          <a:solidFill>
+            <a:srgbClr val="0B0C10"/>
+          </a:solidFill>
+          <a:ln>
+            <a:noFill/>
+          </a:ln>
+        </p:spPr>
+        <p:style>
+          <a:lnRef idx="1">
+            <a:schemeClr val="accent1"/>
+          </a:lnRef>
+          <a:fillRef idx="3">
+            <a:schemeClr val="accent1"/>
+          </a:fillRef>
+          <a:effectRef idx="2">
+            <a:schemeClr val="accent1"/>
+          </a:effectRef>
+          <a:fontRef idx="minor">
+            <a:schemeClr val="lt1"/>
+          </a:fontRef>
+        </p:style>
+        <p:txBody>
+          <a:bodyPr rtlCol="0" anchor="ctr"/>
+          <a:lstStyle/>
+          <a:p>
+            <a:pPr algn="ctr"/>
+          </a:p>
+        </p:txBody>
+      </p:sp>
+      <p:sp>
+        <p:nvSpPr>
+          <p:cNvPr id="3" name="Rectangle 2"/>
+          <p:cNvSpPr/>
+          <p:nvPr/>
+        </p:nvSpPr>
+        <p:spPr>
+          <a:xfrm>
+            <a:off x="731520" y="365760"/>
+            <a:ext cx="365760" cy="54864"/>
+          </a:xfrm>
+          <a:prstGeom prst="rect">
+            <a:avLst/>
+          </a:prstGeom>
+          <a:solidFill>
+            <a:srgbClr val="FF0033"/>
+          </a:solidFill>
+          <a:ln>
+            <a:noFill/>
+          </a:ln>
+        </p:spPr>
+        <p:style>
+          <a:lnRef idx="1">
+            <a:schemeClr val="accent1"/>
+          </a:lnRef>
+          <a:fillRef idx="3">
+            <a:schemeClr val="accent1"/>
+          </a:fillRef>
+          <a:effectRef idx="2">
+            <a:schemeClr val="accent1"/>
+          </a:effectRef>
+          <a:fontRef idx="minor">
+            <a:schemeClr val="lt1"/>
+          </a:fontRef>
+        </p:style>
+        <p:txBody>
+          <a:bodyPr rtlCol="0" anchor="ctr"/>
+          <a:lstStyle/>
+          <a:p>
+            <a:pPr algn="ctr"/>
+          </a:p>
+        </p:txBody>
+      </p:sp>
+      <p:sp>
+        <p:nvSpPr>
+          <p:cNvPr id="4" name="TextBox 3"/>
+          <p:cNvSpPr txBox="1"/>
+          <p:nvPr/>
+        </p:nvSpPr>
+        <p:spPr>
+          <a:xfrm>
+            <a:off x="1188720" y="292608"/>
+            <a:ext cx="10241280" cy="274320"/>
+          </a:xfrm>
+          <a:prstGeom prst="rect">
+            <a:avLst/>
+          </a:prstGeom>
+          <a:noFill/>
+        </p:spPr>
+        <p:txBody>
+          <a:bodyPr wrap="none">
+            <a:spAutoFit/>
+          </a:bodyPr>
+          <a:lstStyle/>
+          <a:p>
+            <a:pPr>
+              <a:defRPr sz="1000" b="1">
+                <a:solidFill>
+                  <a:srgbClr val="3EA6FF"/>
+                </a:solidFill>
               </a:defRPr>
             </a:pPr>
             <a:r>
-              <a:t>• Arsh Behl  —  Roll No: 2510991354</a:t>
-            </a:r>
-          </a:p>
-          <a:p>
-            <a:pPr>
-              <a:spcBef>
-                <a:spcPts val="1000"/>
-              </a:spcBef>
-              <a:defRPr sz="1400">
+              <a:t>GROUP G15  •  PROJECT ID: G15-PID-17 (P-17)  •  EVALUATION-II (25CSE0203)</a:t>
+            </a:r>
+          </a:p>
+        </p:txBody>
+      </p:sp>
+      <p:sp>
+        <p:nvSpPr>
+          <p:cNvPr id="5" name="TextBox 4"/>
+          <p:cNvSpPr txBox="1"/>
+          <p:nvPr/>
+        </p:nvSpPr>
+        <p:spPr>
+          <a:xfrm>
+            <a:off x="731520" y="594360"/>
+            <a:ext cx="10728655" cy="594360"/>
+          </a:xfrm>
+          <a:prstGeom prst="rect">
+            <a:avLst/>
+          </a:prstGeom>
+          <a:noFill/>
+        </p:spPr>
+        <p:txBody>
+          <a:bodyPr wrap="none">
+            <a:spAutoFit/>
+          </a:bodyPr>
+          <a:lstStyle/>
+          <a:p>
+            <a:pPr>
+              <a:defRPr sz="2100" b="1">
                 <a:solidFill>
                   <a:srgbClr val="FFFFFF"/>
                 </a:solidFill>
               </a:defRPr>
             </a:pPr>
             <a:r>
-              <a:t>• Soumajit Majee  —  Roll No: 2510990383</a:t>
+              <a:t>Curriculum Alignment &amp; Faculty Reference Verification</a:t>
+            </a:r>
+          </a:p>
+        </p:txBody>
+      </p:sp>
+      <p:sp>
+        <p:nvSpPr>
+          <p:cNvPr id="6" name="TextBox 5"/>
+          <p:cNvSpPr txBox="1"/>
+          <p:nvPr/>
+        </p:nvSpPr>
+        <p:spPr>
+          <a:xfrm>
+            <a:off x="731520" y="6309360"/>
+            <a:ext cx="10728655" cy="320040"/>
+          </a:xfrm>
+          <a:prstGeom prst="rect">
+            <a:avLst/>
+          </a:prstGeom>
+          <a:noFill/>
+        </p:spPr>
+        <p:txBody>
+          <a:bodyPr wrap="none">
+            <a:spAutoFit/>
+          </a:bodyPr>
+          <a:lstStyle/>
+          <a:p>
+            <a:pPr>
+              <a:defRPr sz="900">
+                <a:solidFill>
+                  <a:srgbClr val="7B8293"/>
+                </a:solidFill>
+              </a:defRPr>
+            </a:pPr>
+            <a:r>
+              <a:t>PheW TuBe: Video Streaming Platform (G15-PID-17)  |  Evaluation-II  |  Page 11</a:t>
+            </a:r>
+          </a:p>
+        </p:txBody>
+      </p:sp>
+      <p:sp>
+        <p:nvSpPr>
+          <p:cNvPr id="7" name="Rounded Rectangle 6"/>
+          <p:cNvSpPr/>
+          <p:nvPr/>
+        </p:nvSpPr>
+        <p:spPr>
+          <a:xfrm>
+            <a:off x="731520" y="1371600"/>
+            <a:ext cx="5212080" cy="4663440"/>
+          </a:xfrm>
+          <a:prstGeom prst="roundRect">
+            <a:avLst/>
+          </a:prstGeom>
+          <a:solidFill>
+            <a:srgbClr val="161922"/>
+          </a:solidFill>
+          <a:ln w="15240">
+            <a:solidFill>
+              <a:srgbClr val="2E3445"/>
+            </a:solidFill>
+          </a:ln>
+        </p:spPr>
+        <p:style>
+          <a:lnRef idx="1">
+            <a:schemeClr val="accent1"/>
+          </a:lnRef>
+          <a:fillRef idx="3">
+            <a:schemeClr val="accent1"/>
+          </a:fillRef>
+          <a:effectRef idx="2">
+            <a:schemeClr val="accent1"/>
+          </a:effectRef>
+          <a:fontRef idx="minor">
+            <a:schemeClr val="lt1"/>
+          </a:fontRef>
+        </p:style>
+        <p:txBody>
+          <a:bodyPr rtlCol="0" anchor="ctr"/>
+          <a:lstStyle/>
+          <a:p>
+            <a:pPr algn="ctr"/>
+          </a:p>
+        </p:txBody>
+      </p:sp>
+      <p:sp>
+        <p:nvSpPr>
+          <p:cNvPr id="8" name="TextBox 7"/>
+          <p:cNvSpPr txBox="1"/>
+          <p:nvPr/>
+        </p:nvSpPr>
+        <p:spPr>
+          <a:xfrm>
+            <a:off x="914400" y="1508760"/>
+            <a:ext cx="4846320" cy="4389120"/>
+          </a:xfrm>
+          <a:prstGeom prst="rect">
+            <a:avLst/>
+          </a:prstGeom>
+          <a:noFill/>
+        </p:spPr>
+        <p:txBody>
+          <a:bodyPr wrap="square">
+            <a:spAutoFit/>
+          </a:bodyPr>
+          <a:lstStyle/>
+          <a:p>
+            <a:pPr>
+              <a:spcAft>
+                <a:spcPts val="800"/>
+              </a:spcAft>
+              <a:defRPr sz="1300" b="1">
+                <a:solidFill>
+                  <a:srgbClr val="FF0033"/>
+                </a:solidFill>
+              </a:defRPr>
+            </a:pPr>
+            <a:r>
+              <a:t>Class Reference Alignment (Mr. Shubham Kumar)</a:t>
+            </a:r>
+          </a:p>
+          <a:p>
+            <a:pPr>
+              <a:spcAft>
+                <a:spcPts val="600"/>
+              </a:spcAft>
+            </a:pPr>
+            <a:r>
+              <a:rPr b="1" sz="1050">
+                <a:solidFill>
+                  <a:srgbClr val="FF0033"/>
+                </a:solidFill>
+              </a:rPr>
+              <a:t>• </a:t>
+            </a:r>
+            <a:r>
+              <a:rPr b="1" sz="1000">
+                <a:solidFill>
+                  <a:srgbClr val="FFFFFF"/>
+                </a:solidFill>
+              </a:rPr>
+              <a:t>Reference Codebase Inspection: </a:t>
+            </a:r>
+            <a:r>
+              <a:rPr sz="1000">
+                <a:solidFill>
+                  <a:srgbClr val="BEC3CD"/>
+                </a:solidFill>
+              </a:rPr>
+              <a:t>Validated against faculty GitHub repository (shubhamkumar123456/G15-updated).</a:t>
+            </a:r>
+          </a:p>
+          <a:p>
+            <a:pPr>
+              <a:spcAft>
+                <a:spcPts val="600"/>
+              </a:spcAft>
+            </a:pPr>
+            <a:r>
+              <a:rPr b="1" sz="1050">
+                <a:solidFill>
+                  <a:srgbClr val="FF0033"/>
+                </a:solidFill>
+              </a:rPr>
+              <a:t>• </a:t>
+            </a:r>
+            <a:r>
+              <a:rPr b="1" sz="1000">
+                <a:solidFill>
+                  <a:srgbClr val="FFFFFF"/>
+                </a:solidFill>
+              </a:rPr>
+              <a:t>Course Hook Implementations: </a:t>
+            </a:r>
+            <a:r>
+              <a:rPr sz="1000">
+                <a:solidFill>
+                  <a:srgbClr val="BEC3CD"/>
+                </a:solidFill>
+              </a:rPr>
+              <a:t>Fully implements useParams, useRef, useEffect, and useState in accordance with semester syllabus.</a:t>
+            </a:r>
+          </a:p>
+          <a:p>
+            <a:pPr>
+              <a:spcAft>
+                <a:spcPts val="600"/>
+              </a:spcAft>
+            </a:pPr>
+            <a:r>
+              <a:rPr b="1" sz="1050">
+                <a:solidFill>
+                  <a:srgbClr val="FF0033"/>
+                </a:solidFill>
+              </a:rPr>
+              <a:t>• </a:t>
+            </a:r>
+            <a:r>
+              <a:rPr b="1" sz="1000">
+                <a:solidFill>
+                  <a:srgbClr val="FFFFFF"/>
+                </a:solidFill>
+              </a:rPr>
+              <a:t>State Architecture: </a:t>
+            </a:r>
+            <a:r>
+              <a:rPr sz="1000">
+                <a:solidFill>
+                  <a:srgbClr val="BEC3CD"/>
+                </a:solidFill>
+              </a:rPr>
+              <a:t>Context API and persistent LocalStorage follow faculty architectural patterns demonstrated in class.</a:t>
+            </a:r>
+          </a:p>
+          <a:p>
+            <a:pPr>
+              <a:spcAft>
+                <a:spcPts val="600"/>
+              </a:spcAft>
+            </a:pPr>
+            <a:r>
+              <a:rPr b="1" sz="1050">
+                <a:solidFill>
+                  <a:srgbClr val="FF0033"/>
+                </a:solidFill>
+              </a:rPr>
+              <a:t>• </a:t>
+            </a:r>
+            <a:r>
+              <a:rPr b="1" sz="1000">
+                <a:solidFill>
+                  <a:srgbClr val="FFFFFF"/>
+                </a:solidFill>
+              </a:rPr>
+              <a:t>Faculty Recommendations: </a:t>
+            </a:r>
+            <a:r>
+              <a:rPr sz="1000">
+                <a:solidFill>
+                  <a:srgbClr val="BEC3CD"/>
+                </a:solidFill>
+              </a:rPr>
+              <a:t>Incorporated react-toastify as explicitly recommended by faculty during lab lectures.</a:t>
+            </a:r>
+          </a:p>
+        </p:txBody>
+      </p:sp>
+      <p:sp>
+        <p:nvSpPr>
+          <p:cNvPr id="9" name="Rounded Rectangle 8"/>
+          <p:cNvSpPr/>
+          <p:nvPr/>
+        </p:nvSpPr>
+        <p:spPr>
+          <a:xfrm>
+            <a:off x="6217920" y="1371600"/>
+            <a:ext cx="5212080" cy="4663440"/>
+          </a:xfrm>
+          <a:prstGeom prst="roundRect">
+            <a:avLst/>
+          </a:prstGeom>
+          <a:solidFill>
+            <a:srgbClr val="161922"/>
+          </a:solidFill>
+          <a:ln w="15240">
+            <a:solidFill>
+              <a:srgbClr val="2E3445"/>
+            </a:solidFill>
+          </a:ln>
+        </p:spPr>
+        <p:style>
+          <a:lnRef idx="1">
+            <a:schemeClr val="accent1"/>
+          </a:lnRef>
+          <a:fillRef idx="3">
+            <a:schemeClr val="accent1"/>
+          </a:fillRef>
+          <a:effectRef idx="2">
+            <a:schemeClr val="accent1"/>
+          </a:effectRef>
+          <a:fontRef idx="minor">
+            <a:schemeClr val="lt1"/>
+          </a:fontRef>
+        </p:style>
+        <p:txBody>
+          <a:bodyPr rtlCol="0" anchor="ctr"/>
+          <a:lstStyle/>
+          <a:p>
+            <a:pPr algn="ctr"/>
+          </a:p>
+        </p:txBody>
+      </p:sp>
+      <p:sp>
+        <p:nvSpPr>
+          <p:cNvPr id="10" name="TextBox 9"/>
+          <p:cNvSpPr txBox="1"/>
+          <p:nvPr/>
+        </p:nvSpPr>
+        <p:spPr>
+          <a:xfrm>
+            <a:off x="6400800" y="1508760"/>
+            <a:ext cx="4846320" cy="4389120"/>
+          </a:xfrm>
+          <a:prstGeom prst="rect">
+            <a:avLst/>
+          </a:prstGeom>
+          <a:noFill/>
+        </p:spPr>
+        <p:txBody>
+          <a:bodyPr wrap="square">
+            <a:spAutoFit/>
+          </a:bodyPr>
+          <a:lstStyle/>
+          <a:p>
+            <a:pPr>
+              <a:spcAft>
+                <a:spcPts val="800"/>
+              </a:spcAft>
+              <a:defRPr sz="1300" b="1">
+                <a:solidFill>
+                  <a:srgbClr val="2BA640"/>
+                </a:solidFill>
+              </a:defRPr>
+            </a:pPr>
+            <a:r>
+              <a:t>Evaluation-II Viva Readiness &amp; Proofs</a:t>
+            </a:r>
+          </a:p>
+          <a:p>
+            <a:pPr>
+              <a:spcAft>
+                <a:spcPts val="600"/>
+              </a:spcAft>
+            </a:pPr>
+            <a:r>
+              <a:rPr b="1" sz="1050">
+                <a:solidFill>
+                  <a:srgbClr val="2BA640"/>
+                </a:solidFill>
+              </a:rPr>
+              <a:t>• </a:t>
+            </a:r>
+            <a:r>
+              <a:rPr b="1" sz="1000">
+                <a:solidFill>
+                  <a:srgbClr val="FFFFFF"/>
+                </a:solidFill>
+              </a:rPr>
+              <a:t>Strict Production Separation: </a:t>
+            </a:r>
+            <a:r>
+              <a:rPr sz="1000">
+                <a:solidFill>
+                  <a:srgbClr val="BEC3CD"/>
+                </a:solidFill>
+              </a:rPr>
+              <a:t>Private viva preparation guides and scratch notes kept strictly local; only production code pushed to GitHub.</a:t>
+            </a:r>
+          </a:p>
+          <a:p>
+            <a:pPr>
+              <a:spcAft>
+                <a:spcPts val="600"/>
+              </a:spcAft>
+            </a:pPr>
+            <a:r>
+              <a:rPr b="1" sz="1050">
+                <a:solidFill>
+                  <a:srgbClr val="2BA640"/>
+                </a:solidFill>
+              </a:rPr>
+              <a:t>• </a:t>
+            </a:r>
+            <a:r>
+              <a:rPr b="1" sz="1000">
+                <a:solidFill>
+                  <a:srgbClr val="FFFFFF"/>
+                </a:solidFill>
+              </a:rPr>
+              <a:t>Measurable Metrics: </a:t>
+            </a:r>
+            <a:r>
+              <a:rPr sz="1000">
+                <a:solidFill>
+                  <a:srgbClr val="BEC3CD"/>
+                </a:solidFill>
+              </a:rPr>
+              <a:t>Zero external redirect bounces; 100% in-app streaming; 15 videos, 8 shorts across 9 categories.</a:t>
+            </a:r>
+          </a:p>
+          <a:p>
+            <a:pPr>
+              <a:spcAft>
+                <a:spcPts val="600"/>
+              </a:spcAft>
+            </a:pPr>
+            <a:r>
+              <a:rPr b="1" sz="1050">
+                <a:solidFill>
+                  <a:srgbClr val="2BA640"/>
+                </a:solidFill>
+              </a:rPr>
+              <a:t>• </a:t>
+            </a:r>
+            <a:r>
+              <a:rPr b="1" sz="1000">
+                <a:solidFill>
+                  <a:srgbClr val="FFFFFF"/>
+                </a:solidFill>
+              </a:rPr>
+              <a:t>Component Explainability: </a:t>
+            </a:r>
+            <a:r>
+              <a:rPr sz="1000">
+                <a:solidFill>
+                  <a:srgbClr val="BEC3CD"/>
+                </a:solidFill>
+              </a:rPr>
+              <a:t>Code written with clean modularity, standard variable naming, and clear functional boundaries for confident viva defense.</a:t>
+            </a:r>
+          </a:p>
+          <a:p>
+            <a:pPr>
+              <a:spcAft>
+                <a:spcPts val="600"/>
+              </a:spcAft>
+            </a:pPr>
+            <a:r>
+              <a:rPr b="1" sz="1050">
+                <a:solidFill>
+                  <a:srgbClr val="2BA640"/>
+                </a:solidFill>
+              </a:rPr>
+              <a:t>• </a:t>
+            </a:r>
+            <a:r>
+              <a:rPr b="1" sz="1000">
+                <a:solidFill>
+                  <a:srgbClr val="FFFFFF"/>
+                </a:solidFill>
+              </a:rPr>
+              <a:t>Standard File Naming: </a:t>
+            </a:r>
+            <a:r>
+              <a:rPr sz="1000">
+                <a:solidFill>
+                  <a:srgbClr val="BEC3CD"/>
+                </a:solidFill>
+              </a:rPr>
+              <a:t>Output deck formatted strictly as G15-PID-17.pdf and G15-PID-17.pptx for formal presentation.</a:t>
+            </a:r>
+          </a:p>
+        </p:txBody>
+      </p:sp>
+    </p:spTree>
+  </p:cSld>
+  <p:clrMapOvr>
+    <a:masterClrMapping/>
+  </p:clrMapOvr>
+  <p:transition spd="fast">
+    <p:push dir="l"/>
+  </p:transition>
+</p:sld>
+</file>
+
+<file path=ppt/slides/slide12.xml><?xml version="1.0" encoding="utf-8"?>
+<p:sld xmlns:a="http://schemas.openxmlformats.org/drawingml/2006/main" xmlns:p="http://schemas.openxmlformats.org/presentationml/2006/main" xmlns:r="http://schemas.openxmlformats.org/officeDocument/2006/relationships">
+  <p:cSld>
+    <p:spTree>
+      <p:nvGrpSpPr>
+        <p:cNvPr id="1" name=""/>
+        <p:cNvGrpSpPr/>
+        <p:nvPr/>
+      </p:nvGrpSpPr>
+      <p:grpSpPr/>
+      <p:sp>
+        <p:nvSpPr>
+          <p:cNvPr id="2" name="Rectangle 1"/>
+          <p:cNvSpPr/>
+          <p:nvPr/>
+        </p:nvSpPr>
+        <p:spPr>
+          <a:xfrm>
+            <a:off x="0" y="0"/>
+            <a:ext cx="12191695" cy="6858000"/>
+          </a:xfrm>
+          <a:prstGeom prst="rect">
+            <a:avLst/>
+          </a:prstGeom>
+          <a:solidFill>
+            <a:srgbClr val="0B0C10"/>
+          </a:solidFill>
+          <a:ln>
+            <a:noFill/>
+          </a:ln>
+        </p:spPr>
+        <p:style>
+          <a:lnRef idx="1">
+            <a:schemeClr val="accent1"/>
+          </a:lnRef>
+          <a:fillRef idx="3">
+            <a:schemeClr val="accent1"/>
+          </a:fillRef>
+          <a:effectRef idx="2">
+            <a:schemeClr val="accent1"/>
+          </a:effectRef>
+          <a:fontRef idx="minor">
+            <a:schemeClr val="lt1"/>
+          </a:fontRef>
+        </p:style>
+        <p:txBody>
+          <a:bodyPr rtlCol="0" anchor="ctr"/>
+          <a:lstStyle/>
+          <a:p>
+            <a:pPr algn="ctr"/>
+          </a:p>
+        </p:txBody>
+      </p:sp>
+      <p:sp>
+        <p:nvSpPr>
+          <p:cNvPr id="3" name="Rectangle 2"/>
+          <p:cNvSpPr/>
+          <p:nvPr/>
+        </p:nvSpPr>
+        <p:spPr>
+          <a:xfrm>
+            <a:off x="731520" y="365760"/>
+            <a:ext cx="365760" cy="54864"/>
+          </a:xfrm>
+          <a:prstGeom prst="rect">
+            <a:avLst/>
+          </a:prstGeom>
+          <a:solidFill>
+            <a:srgbClr val="FF0033"/>
+          </a:solidFill>
+          <a:ln>
+            <a:noFill/>
+          </a:ln>
+        </p:spPr>
+        <p:style>
+          <a:lnRef idx="1">
+            <a:schemeClr val="accent1"/>
+          </a:lnRef>
+          <a:fillRef idx="3">
+            <a:schemeClr val="accent1"/>
+          </a:fillRef>
+          <a:effectRef idx="2">
+            <a:schemeClr val="accent1"/>
+          </a:effectRef>
+          <a:fontRef idx="minor">
+            <a:schemeClr val="lt1"/>
+          </a:fontRef>
+        </p:style>
+        <p:txBody>
+          <a:bodyPr rtlCol="0" anchor="ctr"/>
+          <a:lstStyle/>
+          <a:p>
+            <a:pPr algn="ctr"/>
+          </a:p>
+        </p:txBody>
+      </p:sp>
+      <p:sp>
+        <p:nvSpPr>
+          <p:cNvPr id="4" name="TextBox 3"/>
+          <p:cNvSpPr txBox="1"/>
+          <p:nvPr/>
+        </p:nvSpPr>
+        <p:spPr>
+          <a:xfrm>
+            <a:off x="1188720" y="292608"/>
+            <a:ext cx="10241280" cy="274320"/>
+          </a:xfrm>
+          <a:prstGeom prst="rect">
+            <a:avLst/>
+          </a:prstGeom>
+          <a:noFill/>
+        </p:spPr>
+        <p:txBody>
+          <a:bodyPr wrap="none">
+            <a:spAutoFit/>
+          </a:bodyPr>
+          <a:lstStyle/>
+          <a:p>
+            <a:pPr>
+              <a:defRPr sz="1000" b="1">
+                <a:solidFill>
+                  <a:srgbClr val="3EA6FF"/>
+                </a:solidFill>
+              </a:defRPr>
+            </a:pPr>
+            <a:r>
+              <a:t>GROUP G15  •  PROJECT ID: G15-PID-17 (P-17)  •  EVALUATION-II (25CSE0203)</a:t>
+            </a:r>
+          </a:p>
+        </p:txBody>
+      </p:sp>
+      <p:sp>
+        <p:nvSpPr>
+          <p:cNvPr id="5" name="TextBox 4"/>
+          <p:cNvSpPr txBox="1"/>
+          <p:nvPr/>
+        </p:nvSpPr>
+        <p:spPr>
+          <a:xfrm>
+            <a:off x="731520" y="594360"/>
+            <a:ext cx="10728655" cy="594360"/>
+          </a:xfrm>
+          <a:prstGeom prst="rect">
+            <a:avLst/>
+          </a:prstGeom>
+          <a:noFill/>
+        </p:spPr>
+        <p:txBody>
+          <a:bodyPr wrap="none">
+            <a:spAutoFit/>
+          </a:bodyPr>
+          <a:lstStyle/>
+          <a:p>
+            <a:pPr>
+              <a:defRPr sz="2100" b="1">
+                <a:solidFill>
+                  <a:srgbClr val="FFFFFF"/>
+                </a:solidFill>
+              </a:defRPr>
+            </a:pPr>
+            <a:r>
+              <a:t>Technical Roadmap &amp; Scope for Phase 3 (MERN Stack)</a:t>
+            </a:r>
+          </a:p>
+        </p:txBody>
+      </p:sp>
+      <p:sp>
+        <p:nvSpPr>
+          <p:cNvPr id="6" name="TextBox 5"/>
+          <p:cNvSpPr txBox="1"/>
+          <p:nvPr/>
+        </p:nvSpPr>
+        <p:spPr>
+          <a:xfrm>
+            <a:off x="731520" y="6309360"/>
+            <a:ext cx="10728655" cy="320040"/>
+          </a:xfrm>
+          <a:prstGeom prst="rect">
+            <a:avLst/>
+          </a:prstGeom>
+          <a:noFill/>
+        </p:spPr>
+        <p:txBody>
+          <a:bodyPr wrap="none">
+            <a:spAutoFit/>
+          </a:bodyPr>
+          <a:lstStyle/>
+          <a:p>
+            <a:pPr>
+              <a:defRPr sz="900">
+                <a:solidFill>
+                  <a:srgbClr val="7B8293"/>
+                </a:solidFill>
+              </a:defRPr>
+            </a:pPr>
+            <a:r>
+              <a:t>PheW TuBe: Video Streaming Platform (G15-PID-17)  |  Evaluation-II  |  Page 12</a:t>
+            </a:r>
+          </a:p>
+        </p:txBody>
+      </p:sp>
+      <p:sp>
+        <p:nvSpPr>
+          <p:cNvPr id="7" name="Rounded Rectangle 6"/>
+          <p:cNvSpPr/>
+          <p:nvPr/>
+        </p:nvSpPr>
+        <p:spPr>
+          <a:xfrm>
+            <a:off x="731520" y="1371600"/>
+            <a:ext cx="3383280" cy="4663440"/>
+          </a:xfrm>
+          <a:prstGeom prst="roundRect">
+            <a:avLst/>
+          </a:prstGeom>
+          <a:solidFill>
+            <a:srgbClr val="161922"/>
+          </a:solidFill>
+          <a:ln w="15240">
+            <a:solidFill>
+              <a:srgbClr val="2E3445"/>
+            </a:solidFill>
+          </a:ln>
+        </p:spPr>
+        <p:style>
+          <a:lnRef idx="1">
+            <a:schemeClr val="accent1"/>
+          </a:lnRef>
+          <a:fillRef idx="3">
+            <a:schemeClr val="accent1"/>
+          </a:fillRef>
+          <a:effectRef idx="2">
+            <a:schemeClr val="accent1"/>
+          </a:effectRef>
+          <a:fontRef idx="minor">
+            <a:schemeClr val="lt1"/>
+          </a:fontRef>
+        </p:style>
+        <p:txBody>
+          <a:bodyPr rtlCol="0" anchor="ctr"/>
+          <a:lstStyle/>
+          <a:p>
+            <a:pPr algn="ctr"/>
+          </a:p>
+        </p:txBody>
+      </p:sp>
+      <p:sp>
+        <p:nvSpPr>
+          <p:cNvPr id="8" name="TextBox 7"/>
+          <p:cNvSpPr txBox="1"/>
+          <p:nvPr/>
+        </p:nvSpPr>
+        <p:spPr>
+          <a:xfrm>
+            <a:off x="914400" y="1508760"/>
+            <a:ext cx="3017520" cy="4389120"/>
+          </a:xfrm>
+          <a:prstGeom prst="rect">
+            <a:avLst/>
+          </a:prstGeom>
+          <a:noFill/>
+        </p:spPr>
+        <p:txBody>
+          <a:bodyPr wrap="square">
+            <a:spAutoFit/>
+          </a:bodyPr>
+          <a:lstStyle/>
+          <a:p>
+            <a:pPr>
+              <a:spcAft>
+                <a:spcPts val="800"/>
+              </a:spcAft>
+              <a:defRPr sz="1300" b="1">
+                <a:solidFill>
+                  <a:srgbClr val="FF0033"/>
+                </a:solidFill>
+              </a:defRPr>
+            </a:pPr>
+            <a:r>
+              <a:t>Phase 1: Foundation (Completed)</a:t>
+            </a:r>
+          </a:p>
+          <a:p>
+            <a:pPr>
+              <a:spcAft>
+                <a:spcPts val="600"/>
+              </a:spcAft>
+            </a:pPr>
+            <a:r>
+              <a:rPr b="1" sz="1050">
+                <a:solidFill>
+                  <a:srgbClr val="FF0033"/>
+                </a:solidFill>
+              </a:rPr>
+              <a:t>• </a:t>
+            </a:r>
+            <a:r>
+              <a:rPr b="1" sz="1000">
+                <a:solidFill>
+                  <a:srgbClr val="FFFFFF"/>
+                </a:solidFill>
+              </a:rPr>
+              <a:t>Complete UI Layout: </a:t>
+            </a:r>
+            <a:r>
+              <a:rPr sz="1000">
+                <a:solidFill>
+                  <a:srgbClr val="BEC3CD"/>
+                </a:solidFill>
+              </a:rPr>
+              <a:t>Dark theme layout, YouTube visual branding, and icon system.</a:t>
+            </a:r>
+          </a:p>
+          <a:p>
+            <a:pPr>
+              <a:spcAft>
+                <a:spcPts val="600"/>
+              </a:spcAft>
+            </a:pPr>
+            <a:r>
+              <a:rPr b="1" sz="1050">
+                <a:solidFill>
+                  <a:srgbClr val="FF0033"/>
+                </a:solidFill>
+              </a:rPr>
+              <a:t>• </a:t>
+            </a:r>
+            <a:r>
+              <a:rPr b="1" sz="1000">
+                <a:solidFill>
+                  <a:srgbClr val="FFFFFF"/>
+                </a:solidFill>
+              </a:rPr>
+              <a:t>Video &amp; Shorts Grid: </a:t>
+            </a:r>
+            <a:r>
+              <a:rPr sz="1000">
+                <a:solidFill>
+                  <a:srgbClr val="BEC3CD"/>
+                </a:solidFill>
+              </a:rPr>
+              <a:t>Multi-category filtering pills and responsive card layout.</a:t>
+            </a:r>
+          </a:p>
+          <a:p>
+            <a:pPr>
+              <a:spcAft>
+                <a:spcPts val="600"/>
+              </a:spcAft>
+            </a:pPr>
+            <a:r>
+              <a:rPr b="1" sz="1050">
+                <a:solidFill>
+                  <a:srgbClr val="FF0033"/>
+                </a:solidFill>
+              </a:rPr>
+              <a:t>• </a:t>
+            </a:r>
+            <a:r>
+              <a:rPr b="1" sz="1000">
+                <a:solidFill>
+                  <a:srgbClr val="FFFFFF"/>
+                </a:solidFill>
+              </a:rPr>
+              <a:t>Navigation: </a:t>
+            </a:r>
+            <a:r>
+              <a:rPr sz="1000">
+                <a:solidFill>
+                  <a:srgbClr val="BEC3CD"/>
+                </a:solidFill>
+              </a:rPr>
+              <a:t>Sidebar navigation tabs and basic search input.</a:t>
+            </a:r>
+          </a:p>
+        </p:txBody>
+      </p:sp>
+      <p:sp>
+        <p:nvSpPr>
+          <p:cNvPr id="9" name="Rounded Rectangle 8"/>
+          <p:cNvSpPr/>
+          <p:nvPr/>
+        </p:nvSpPr>
+        <p:spPr>
+          <a:xfrm>
+            <a:off x="4389120" y="1371600"/>
+            <a:ext cx="3383280" cy="4663440"/>
+          </a:xfrm>
+          <a:prstGeom prst="roundRect">
+            <a:avLst/>
+          </a:prstGeom>
+          <a:solidFill>
+            <a:srgbClr val="161922"/>
+          </a:solidFill>
+          <a:ln w="15240">
+            <a:solidFill>
+              <a:srgbClr val="2E3445"/>
+            </a:solidFill>
+          </a:ln>
+        </p:spPr>
+        <p:style>
+          <a:lnRef idx="1">
+            <a:schemeClr val="accent1"/>
+          </a:lnRef>
+          <a:fillRef idx="3">
+            <a:schemeClr val="accent1"/>
+          </a:fillRef>
+          <a:effectRef idx="2">
+            <a:schemeClr val="accent1"/>
+          </a:effectRef>
+          <a:fontRef idx="minor">
+            <a:schemeClr val="lt1"/>
+          </a:fontRef>
+        </p:style>
+        <p:txBody>
+          <a:bodyPr rtlCol="0" anchor="ctr"/>
+          <a:lstStyle/>
+          <a:p>
+            <a:pPr algn="ctr"/>
+          </a:p>
+        </p:txBody>
+      </p:sp>
+      <p:sp>
+        <p:nvSpPr>
+          <p:cNvPr id="10" name="TextBox 9"/>
+          <p:cNvSpPr txBox="1"/>
+          <p:nvPr/>
+        </p:nvSpPr>
+        <p:spPr>
+          <a:xfrm>
+            <a:off x="4572000" y="1508760"/>
+            <a:ext cx="3017520" cy="4389120"/>
+          </a:xfrm>
+          <a:prstGeom prst="rect">
+            <a:avLst/>
+          </a:prstGeom>
+          <a:noFill/>
+        </p:spPr>
+        <p:txBody>
+          <a:bodyPr wrap="square">
+            <a:spAutoFit/>
+          </a:bodyPr>
+          <a:lstStyle/>
+          <a:p>
+            <a:pPr>
+              <a:spcAft>
+                <a:spcPts val="800"/>
+              </a:spcAft>
+              <a:defRPr sz="1300" b="1">
+                <a:solidFill>
+                  <a:srgbClr val="3EA6FF"/>
+                </a:solidFill>
+              </a:defRPr>
+            </a:pPr>
+            <a:r>
+              <a:t>Phase 2: SPA Architecture (Current)</a:t>
+            </a:r>
+          </a:p>
+          <a:p>
+            <a:pPr>
+              <a:spcAft>
+                <a:spcPts val="600"/>
+              </a:spcAft>
+            </a:pPr>
+            <a:r>
+              <a:rPr b="1" sz="1050">
+                <a:solidFill>
+                  <a:srgbClr val="3EA6FF"/>
+                </a:solidFill>
+              </a:rPr>
+              <a:t>• </a:t>
+            </a:r>
+            <a:r>
+              <a:rPr b="1" sz="1000">
+                <a:solidFill>
+                  <a:srgbClr val="FFFFFF"/>
+                </a:solidFill>
+              </a:rPr>
+              <a:t>Dynamic Route: </a:t>
+            </a:r>
+            <a:r>
+              <a:rPr sz="1000">
+                <a:solidFill>
+                  <a:srgbClr val="BEC3CD"/>
+                </a:solidFill>
+              </a:rPr>
+              <a:t>/watch/:id via useParams with embedded 16:9 streaming.</a:t>
+            </a:r>
+          </a:p>
+          <a:p>
+            <a:pPr>
+              <a:spcAft>
+                <a:spcPts val="600"/>
+              </a:spcAft>
+            </a:pPr>
+            <a:r>
+              <a:rPr b="1" sz="1050">
+                <a:solidFill>
+                  <a:srgbClr val="3EA6FF"/>
+                </a:solidFill>
+              </a:rPr>
+              <a:t>• </a:t>
+            </a:r>
+            <a:r>
+              <a:rPr b="1" sz="1000">
+                <a:solidFill>
+                  <a:srgbClr val="FFFFFF"/>
+                </a:solidFill>
+              </a:rPr>
+              <a:t>Interactive Comments: </a:t>
+            </a:r>
+            <a:r>
+              <a:rPr sz="1000">
+                <a:solidFill>
+                  <a:srgbClr val="BEC3CD"/>
+                </a:solidFill>
+              </a:rPr>
+              <a:t>DOM focus control via useRef and Top/Newest sorting.</a:t>
+            </a:r>
+          </a:p>
+          <a:p>
+            <a:pPr>
+              <a:spcAft>
+                <a:spcPts val="600"/>
+              </a:spcAft>
+            </a:pPr>
+            <a:r>
+              <a:rPr b="1" sz="1050">
+                <a:solidFill>
+                  <a:srgbClr val="3EA6FF"/>
+                </a:solidFill>
+              </a:rPr>
+              <a:t>• </a:t>
+            </a:r>
+            <a:r>
+              <a:rPr b="1" sz="1000">
+                <a:solidFill>
+                  <a:srgbClr val="FFFFFF"/>
+                </a:solidFill>
+              </a:rPr>
+              <a:t>State Bus &amp; Alerts: </a:t>
+            </a:r>
+            <a:r>
+              <a:rPr sz="1000">
+                <a:solidFill>
+                  <a:srgbClr val="BEC3CD"/>
+                </a:solidFill>
+              </a:rPr>
+              <a:t>Centralized Context API, LocalStorage sync, react-toastify, and Voice Search.</a:t>
+            </a:r>
+          </a:p>
+        </p:txBody>
+      </p:sp>
+      <p:sp>
+        <p:nvSpPr>
+          <p:cNvPr id="11" name="Rounded Rectangle 10"/>
+          <p:cNvSpPr/>
+          <p:nvPr/>
+        </p:nvSpPr>
+        <p:spPr>
+          <a:xfrm>
+            <a:off x="8046720" y="1371600"/>
+            <a:ext cx="3383280" cy="4663440"/>
+          </a:xfrm>
+          <a:prstGeom prst="roundRect">
+            <a:avLst/>
+          </a:prstGeom>
+          <a:solidFill>
+            <a:srgbClr val="161922"/>
+          </a:solidFill>
+          <a:ln w="15240">
+            <a:solidFill>
+              <a:srgbClr val="2E3445"/>
+            </a:solidFill>
+          </a:ln>
+        </p:spPr>
+        <p:style>
+          <a:lnRef idx="1">
+            <a:schemeClr val="accent1"/>
+          </a:lnRef>
+          <a:fillRef idx="3">
+            <a:schemeClr val="accent1"/>
+          </a:fillRef>
+          <a:effectRef idx="2">
+            <a:schemeClr val="accent1"/>
+          </a:effectRef>
+          <a:fontRef idx="minor">
+            <a:schemeClr val="lt1"/>
+          </a:fontRef>
+        </p:style>
+        <p:txBody>
+          <a:bodyPr rtlCol="0" anchor="ctr"/>
+          <a:lstStyle/>
+          <a:p>
+            <a:pPr algn="ctr"/>
+          </a:p>
+        </p:txBody>
+      </p:sp>
+      <p:sp>
+        <p:nvSpPr>
+          <p:cNvPr id="12" name="TextBox 11"/>
+          <p:cNvSpPr txBox="1"/>
+          <p:nvPr/>
+        </p:nvSpPr>
+        <p:spPr>
+          <a:xfrm>
+            <a:off x="8229600" y="1508760"/>
+            <a:ext cx="3017520" cy="4389120"/>
+          </a:xfrm>
+          <a:prstGeom prst="rect">
+            <a:avLst/>
+          </a:prstGeom>
+          <a:noFill/>
+        </p:spPr>
+        <p:txBody>
+          <a:bodyPr wrap="square">
+            <a:spAutoFit/>
+          </a:bodyPr>
+          <a:lstStyle/>
+          <a:p>
+            <a:pPr>
+              <a:spcAft>
+                <a:spcPts val="800"/>
+              </a:spcAft>
+              <a:defRPr sz="1300" b="1">
+                <a:solidFill>
+                  <a:srgbClr val="2BA640"/>
+                </a:solidFill>
+              </a:defRPr>
+            </a:pPr>
+            <a:r>
+              <a:t>Phase 3: Full Stack Scaling (Roadmap)</a:t>
+            </a:r>
+          </a:p>
+          <a:p>
+            <a:pPr>
+              <a:spcAft>
+                <a:spcPts val="600"/>
+              </a:spcAft>
+            </a:pPr>
+            <a:r>
+              <a:rPr b="1" sz="1050">
+                <a:solidFill>
+                  <a:srgbClr val="2BA640"/>
+                </a:solidFill>
+              </a:rPr>
+              <a:t>• </a:t>
+            </a:r>
+            <a:r>
+              <a:rPr b="1" sz="1000">
+                <a:solidFill>
+                  <a:srgbClr val="FFFFFF"/>
+                </a:solidFill>
+              </a:rPr>
+              <a:t>Node.js &amp; Express API: </a:t>
+            </a:r>
+            <a:r>
+              <a:rPr sz="1000">
+                <a:solidFill>
+                  <a:srgbClr val="BEC3CD"/>
+                </a:solidFill>
+              </a:rPr>
+              <a:t>RESTful backend endpoints replacing mock JSON dataset.</a:t>
+            </a:r>
+          </a:p>
+          <a:p>
+            <a:pPr>
+              <a:spcAft>
+                <a:spcPts val="600"/>
+              </a:spcAft>
+            </a:pPr>
+            <a:r>
+              <a:rPr b="1" sz="1050">
+                <a:solidFill>
+                  <a:srgbClr val="2BA640"/>
+                </a:solidFill>
+              </a:rPr>
+              <a:t>• </a:t>
+            </a:r>
+            <a:r>
+              <a:rPr b="1" sz="1000">
+                <a:solidFill>
+                  <a:srgbClr val="FFFFFF"/>
+                </a:solidFill>
+              </a:rPr>
+              <a:t>MongoDB &amp; Mongoose: </a:t>
+            </a:r>
+            <a:r>
+              <a:rPr sz="1000">
+                <a:solidFill>
+                  <a:srgbClr val="BEC3CD"/>
+                </a:solidFill>
+              </a:rPr>
+              <a:t>Cloud database storing user profiles, videos, and comments.</a:t>
+            </a:r>
+          </a:p>
+          <a:p>
+            <a:pPr>
+              <a:spcAft>
+                <a:spcPts val="600"/>
+              </a:spcAft>
+            </a:pPr>
+            <a:r>
+              <a:rPr b="1" sz="1050">
+                <a:solidFill>
+                  <a:srgbClr val="2BA640"/>
+                </a:solidFill>
+              </a:rPr>
+              <a:t>• </a:t>
+            </a:r>
+            <a:r>
+              <a:rPr b="1" sz="1000">
+                <a:solidFill>
+                  <a:srgbClr val="FFFFFF"/>
+                </a:solidFill>
+              </a:rPr>
+              <a:t>JWT Authentication: </a:t>
+            </a:r>
+            <a:r>
+              <a:rPr sz="1000">
+                <a:solidFill>
+                  <a:srgbClr val="BEC3CD"/>
+                </a:solidFill>
+              </a:rPr>
+              <a:t>Server-verified authentication with encrypted user tokens.</a:t>
+            </a:r>
+          </a:p>
+          <a:p>
+            <a:pPr>
+              <a:spcAft>
+                <a:spcPts val="600"/>
+              </a:spcAft>
+            </a:pPr>
+            <a:r>
+              <a:rPr b="1" sz="1050">
+                <a:solidFill>
+                  <a:srgbClr val="2BA640"/>
+                </a:solidFill>
+              </a:rPr>
+              <a:t>• </a:t>
+            </a:r>
+            <a:r>
+              <a:rPr b="1" sz="1000">
+                <a:solidFill>
+                  <a:srgbClr val="FFFFFF"/>
+                </a:solidFill>
+              </a:rPr>
+              <a:t>Redux Toolkit: </a:t>
+            </a:r>
+            <a:r>
+              <a:rPr sz="1000">
+                <a:solidFill>
+                  <a:srgbClr val="BEC3CD"/>
+                </a:solidFill>
+              </a:rPr>
+              <a:t>Advanced cached state management and optimistic mutations.</a:t>
             </a:r>
           </a:p>
         </p:txBody>
@@ -3434,7 +5701,7 @@
         <p:spPr>
           <a:xfrm>
             <a:off x="731520" y="365760"/>
-            <a:ext cx="457200" cy="54864"/>
+            <a:ext cx="365760" cy="54864"/>
           </a:xfrm>
           <a:prstGeom prst="rect">
             <a:avLst/>
@@ -3476,8 +5743,8 @@
         </p:nvSpPr>
         <p:spPr>
           <a:xfrm>
-            <a:off x="1280160" y="292608"/>
-            <a:ext cx="10149840" cy="274320"/>
+            <a:off x="1188720" y="292608"/>
+            <a:ext cx="10241280" cy="274320"/>
           </a:xfrm>
           <a:prstGeom prst="rect">
             <a:avLst/>
@@ -3485,20 +5752,20 @@
           <a:noFill/>
         </p:spPr>
         <p:txBody>
-          <a:bodyPr wrap="square">
+          <a:bodyPr wrap="none">
             <a:spAutoFit/>
           </a:bodyPr>
           <a:lstStyle/>
           <a:p>
             <a:pPr>
-              <a:defRPr sz="1050" b="1">
+              <a:defRPr sz="1000" b="1">
                 <a:solidFill>
                   <a:srgbClr val="3EA6FF"/>
                 </a:solidFill>
               </a:defRPr>
             </a:pPr>
             <a:r>
-              <a:t>GROUP G15  •  PROJECT ID: G15-PID-17 (P-17)  •  FRONT END ENGINEERING - II (25CSE0203)</a:t>
+              <a:t>GROUP G15  •  PROJECT ID: G15-PID-17 (P-17)  •  EVALUATION-II (25CSE0203)</a:t>
             </a:r>
           </a:p>
         </p:txBody>
@@ -3512,7 +5779,7 @@
         <p:spPr>
           <a:xfrm>
             <a:off x="731520" y="594360"/>
-            <a:ext cx="10728655" cy="640080"/>
+            <a:ext cx="10728655" cy="594360"/>
           </a:xfrm>
           <a:prstGeom prst="rect">
             <a:avLst/>
@@ -3520,34 +5787,69 @@
           <a:noFill/>
         </p:spPr>
         <p:txBody>
-          <a:bodyPr wrap="square">
+          <a:bodyPr wrap="none">
             <a:spAutoFit/>
           </a:bodyPr>
           <a:lstStyle/>
           <a:p>
             <a:pPr>
-              <a:defRPr sz="2300" b="1">
+              <a:defRPr sz="2100" b="1">
                 <a:solidFill>
                   <a:srgbClr val="FFFFFF"/>
                 </a:solidFill>
               </a:defRPr>
             </a:pPr>
             <a:r>
-              <a:t>Project Vision &amp; Core Objectives</a:t>
-            </a:r>
-          </a:p>
-        </p:txBody>
-      </p:sp>
-      <p:sp>
-        <p:nvSpPr>
-          <p:cNvPr id="6" name="Rounded Rectangle 5"/>
+              <a:t>Table of Content</a:t>
+            </a:r>
+          </a:p>
+        </p:txBody>
+      </p:sp>
+      <p:sp>
+        <p:nvSpPr>
+          <p:cNvPr id="6" name="TextBox 5"/>
+          <p:cNvSpPr txBox="1"/>
+          <p:nvPr/>
+        </p:nvSpPr>
+        <p:spPr>
+          <a:xfrm>
+            <a:off x="731520" y="6309360"/>
+            <a:ext cx="10728655" cy="320040"/>
+          </a:xfrm>
+          <a:prstGeom prst="rect">
+            <a:avLst/>
+          </a:prstGeom>
+          <a:noFill/>
+        </p:spPr>
+        <p:txBody>
+          <a:bodyPr wrap="none">
+            <a:spAutoFit/>
+          </a:bodyPr>
+          <a:lstStyle/>
+          <a:p>
+            <a:pPr>
+              <a:defRPr sz="900">
+                <a:solidFill>
+                  <a:srgbClr val="7B8293"/>
+                </a:solidFill>
+              </a:defRPr>
+            </a:pPr>
+            <a:r>
+              <a:t>PheW TuBe: Video Streaming Platform (G15-PID-17)  |  Evaluation-II  |  Page 02</a:t>
+            </a:r>
+          </a:p>
+        </p:txBody>
+      </p:sp>
+      <p:sp>
+        <p:nvSpPr>
+          <p:cNvPr id="7" name="Rounded Rectangle 6"/>
           <p:cNvSpPr/>
           <p:nvPr/>
         </p:nvSpPr>
         <p:spPr>
           <a:xfrm>
-            <a:off x="731520" y="1417320"/>
-            <a:ext cx="3383280" cy="4892040"/>
+            <a:off x="731520" y="1371600"/>
+            <a:ext cx="5212080" cy="4663440"/>
           </a:xfrm>
           <a:prstGeom prst="roundRect">
             <a:avLst/>
@@ -3576,77 +5878,161 @@
           </a:fontRef>
         </p:style>
         <p:txBody>
-          <a:bodyPr rtlCol="0" anchor="ctr" lIns="228600" rIns="274320" tIns="320040"/>
-          <a:lstStyle/>
-          <a:p>
-            <a:pPr algn="ctr">
-              <a:defRPr sz="1700" b="1">
-                <a:solidFill>
-                  <a:srgbClr val="3EA6FF"/>
-                </a:solidFill>
-              </a:defRPr>
-            </a:pPr>
-            <a:r>
-              <a:t>01. The Problem &amp; Need</a:t>
-            </a:r>
-          </a:p>
-          <a:p>
-            <a:pPr>
-              <a:spcBef>
-                <a:spcPts val="1800"/>
-              </a:spcBef>
-              <a:defRPr sz="1350">
-                <a:solidFill>
-                  <a:srgbClr val="C8CDD7"/>
-                </a:solidFill>
-              </a:defRPr>
-            </a:pPr>
-            <a:r>
-              <a:t>• Modern video streaming interfaces require high responsiveness and fluid navigation without full browser refreshes.</a:t>
-            </a:r>
-          </a:p>
-          <a:p>
-            <a:pPr>
-              <a:spcBef>
-                <a:spcPts val="1800"/>
-              </a:spcBef>
-              <a:defRPr sz="1350">
-                <a:solidFill>
-                  <a:srgbClr val="C8CDD7"/>
-                </a:solidFill>
-              </a:defRPr>
-            </a:pPr>
-            <a:r>
-              <a:t>• Users expect instantaneous word-based filtering across titles, creator channels, and categorized feeds.</a:t>
-            </a:r>
-          </a:p>
-          <a:p>
-            <a:pPr>
-              <a:spcBef>
-                <a:spcPts val="1800"/>
-              </a:spcBef>
-              <a:defRPr sz="1350">
-                <a:solidFill>
-                  <a:srgbClr val="C8CDD7"/>
-                </a:solidFill>
-              </a:defRPr>
-            </a:pPr>
-            <a:r>
-              <a:t>• Need for a modular Single Page Application (SPA) architecture built strictly with standard curriculum web technologies.</a:t>
-            </a:r>
-          </a:p>
-        </p:txBody>
-      </p:sp>
-      <p:sp>
-        <p:nvSpPr>
-          <p:cNvPr id="7" name="Rounded Rectangle 6"/>
+          <a:bodyPr rtlCol="0" anchor="ctr"/>
+          <a:lstStyle/>
+          <a:p>
+            <a:pPr algn="ctr"/>
+          </a:p>
+        </p:txBody>
+      </p:sp>
+      <p:sp>
+        <p:nvSpPr>
+          <p:cNvPr id="8" name="TextBox 7"/>
+          <p:cNvSpPr txBox="1"/>
+          <p:nvPr/>
+        </p:nvSpPr>
+        <p:spPr>
+          <a:xfrm>
+            <a:off x="914400" y="1554480"/>
+            <a:ext cx="4846320" cy="4297680"/>
+          </a:xfrm>
+          <a:prstGeom prst="rect">
+            <a:avLst/>
+          </a:prstGeom>
+          <a:noFill/>
+        </p:spPr>
+        <p:txBody>
+          <a:bodyPr wrap="none">
+            <a:spAutoFit/>
+          </a:bodyPr>
+          <a:lstStyle/>
+          <a:p>
+            <a:pPr>
+              <a:spcAft>
+                <a:spcPts val="1600"/>
+              </a:spcAft>
+            </a:pPr>
+            <a:r>
+              <a:rPr b="1" sz="1200">
+                <a:solidFill>
+                  <a:srgbClr val="FF0033"/>
+                </a:solidFill>
+              </a:rPr>
+              <a:t>01. </a:t>
+            </a:r>
+            <a:r>
+              <a:rPr sz="1100">
+                <a:solidFill>
+                  <a:srgbClr val="FFFFFF"/>
+                </a:solidFill>
+              </a:rPr>
+              <a:t>Evaluation-II Vision &amp; Milestone Objectives (Page 03)</a:t>
+            </a:r>
+          </a:p>
+          <a:p>
+            <a:pPr>
+              <a:spcAft>
+                <a:spcPts val="1600"/>
+              </a:spcAft>
+            </a:pPr>
+            <a:r>
+              <a:rPr b="1" sz="1200">
+                <a:solidFill>
+                  <a:srgbClr val="FF0033"/>
+                </a:solidFill>
+              </a:rPr>
+              <a:t>02. </a:t>
+            </a:r>
+            <a:r>
+              <a:rPr sz="1100">
+                <a:solidFill>
+                  <a:srgbClr val="FFFFFF"/>
+                </a:solidFill>
+              </a:rPr>
+              <a:t>Syllabus-Aligned Technology Stack &amp; Architecture (Page 04)</a:t>
+            </a:r>
+          </a:p>
+          <a:p>
+            <a:pPr>
+              <a:spcAft>
+                <a:spcPts val="1600"/>
+              </a:spcAft>
+            </a:pPr>
+            <a:r>
+              <a:rPr b="1" sz="1200">
+                <a:solidFill>
+                  <a:srgbClr val="FF0033"/>
+                </a:solidFill>
+              </a:rPr>
+              <a:t>03. </a:t>
+            </a:r>
+            <a:r>
+              <a:rPr sz="1100">
+                <a:solidFill>
+                  <a:srgbClr val="FFFFFF"/>
+                </a:solidFill>
+              </a:rPr>
+              <a:t>Core Component Architecture &amp; Modularity (Page 05)</a:t>
+            </a:r>
+          </a:p>
+          <a:p>
+            <a:pPr>
+              <a:spcAft>
+                <a:spcPts val="1600"/>
+              </a:spcAft>
+            </a:pPr>
+            <a:r>
+              <a:rPr b="1" sz="1200">
+                <a:solidFill>
+                  <a:srgbClr val="FF0033"/>
+                </a:solidFill>
+              </a:rPr>
+              <a:t>04. </a:t>
+            </a:r>
+            <a:r>
+              <a:rPr sz="1100">
+                <a:solidFill>
+                  <a:srgbClr val="FFFFFF"/>
+                </a:solidFill>
+              </a:rPr>
+              <a:t>Dynamic Watch Route &amp; Embedded Video Engine (/watch/:id) (Page 06)</a:t>
+            </a:r>
+          </a:p>
+          <a:p>
+            <a:pPr>
+              <a:spcAft>
+                <a:spcPts val="1600"/>
+              </a:spcAft>
+            </a:pPr>
+            <a:r>
+              <a:rPr b="1" sz="1200">
+                <a:solidFill>
+                  <a:srgbClr val="FF0033"/>
+                </a:solidFill>
+              </a:rPr>
+              <a:t>05. </a:t>
+            </a:r>
+            <a:r>
+              <a:rPr sz="1100">
+                <a:solidFill>
+                  <a:srgbClr val="FFFFFF"/>
+                </a:solidFill>
+              </a:rPr>
+              <a:t>Interactive Comments System with useRef &amp; Dynamic Sorting (Page 07)</a:t>
+            </a:r>
+          </a:p>
+        </p:txBody>
+      </p:sp>
+      <p:sp>
+        <p:nvSpPr>
+          <p:cNvPr id="9" name="Rounded Rectangle 8"/>
           <p:cNvSpPr/>
           <p:nvPr/>
         </p:nvSpPr>
         <p:spPr>
           <a:xfrm>
-            <a:off x="4398264" y="1417320"/>
-            <a:ext cx="3383280" cy="4892040"/>
+            <a:off x="6217920" y="1371600"/>
+            <a:ext cx="5212080" cy="4663440"/>
           </a:xfrm>
           <a:prstGeom prst="roundRect">
             <a:avLst/>
@@ -3675,177 +6061,147 @@
           </a:fontRef>
         </p:style>
         <p:txBody>
-          <a:bodyPr rtlCol="0" anchor="ctr" lIns="228600" rIns="274320" tIns="320040"/>
-          <a:lstStyle/>
-          <a:p>
-            <a:pPr algn="ctr">
-              <a:defRPr sz="1700" b="1">
-                <a:solidFill>
-                  <a:srgbClr val="FF0033"/>
-                </a:solidFill>
-              </a:defRPr>
-            </a:pPr>
-            <a:r>
-              <a:t>02. What We Built</a:t>
-            </a:r>
-          </a:p>
-          <a:p>
-            <a:pPr>
-              <a:spcBef>
-                <a:spcPts val="1800"/>
-              </a:spcBef>
-              <a:defRPr sz="1350">
-                <a:solidFill>
-                  <a:srgbClr val="C8CDD7"/>
-                </a:solidFill>
-              </a:defRPr>
-            </a:pPr>
-            <a:r>
-              <a:t>• A high-fidelity YouTube platform clone engineered in modern React 19 and Vite.</a:t>
-            </a:r>
-          </a:p>
-          <a:p>
-            <a:pPr>
-              <a:spcBef>
-                <a:spcPts val="1800"/>
-              </a:spcBef>
-              <a:defRPr sz="1350">
-                <a:solidFill>
-                  <a:srgbClr val="C8CDD7"/>
-                </a:solidFill>
-              </a:defRPr>
-            </a:pPr>
-            <a:r>
-              <a:t>• Complete multi-route navigation across Home, Shorts, Subscriptions, History, Liked Videos, and Playlists.</a:t>
-            </a:r>
-          </a:p>
-          <a:p>
-            <a:pPr>
-              <a:spcBef>
-                <a:spcPts val="1800"/>
-              </a:spcBef>
-              <a:defRPr sz="1350">
-                <a:solidFill>
-                  <a:srgbClr val="C8CDD7"/>
-                </a:solidFill>
-              </a:defRPr>
-            </a:pPr>
-            <a:r>
-              <a:t>• Responsive collapsible sidebar with full icon &amp; text synchronization.</a:t>
-            </a:r>
-          </a:p>
-          <a:p>
-            <a:pPr>
-              <a:spcBef>
-                <a:spcPts val="1800"/>
-              </a:spcBef>
-              <a:defRPr sz="1350">
-                <a:solidFill>
-                  <a:srgbClr val="C8CDD7"/>
-                </a:solidFill>
-              </a:defRPr>
-            </a:pPr>
-            <a:r>
-              <a:t>• Interactive video cards with real-time like/subscribe counters and external link handlers.</a:t>
-            </a:r>
-          </a:p>
-        </p:txBody>
-      </p:sp>
-      <p:sp>
-        <p:nvSpPr>
-          <p:cNvPr id="8" name="Rounded Rectangle 7"/>
-          <p:cNvSpPr/>
-          <p:nvPr/>
-        </p:nvSpPr>
-        <p:spPr>
-          <a:xfrm>
-            <a:off x="8065008" y="1417320"/>
-            <a:ext cx="3383280" cy="4892040"/>
-          </a:xfrm>
-          <a:prstGeom prst="roundRect">
-            <a:avLst/>
-          </a:prstGeom>
-          <a:solidFill>
-            <a:srgbClr val="161922"/>
-          </a:solidFill>
-          <a:ln>
-            <a:solidFill>
-              <a:srgbClr val="2E3445"/>
-            </a:solidFill>
-          </a:ln>
-        </p:spPr>
-        <p:style>
-          <a:lnRef idx="1">
-            <a:schemeClr val="accent1"/>
-          </a:lnRef>
-          <a:fillRef idx="3">
-            <a:schemeClr val="accent1"/>
-          </a:fillRef>
-          <a:effectRef idx="2">
-            <a:schemeClr val="accent1"/>
-          </a:effectRef>
-          <a:fontRef idx="minor">
-            <a:schemeClr val="lt1"/>
-          </a:fontRef>
-        </p:style>
-        <p:txBody>
-          <a:bodyPr rtlCol="0" anchor="ctr" lIns="228600" rIns="274320" tIns="320040"/>
-          <a:lstStyle/>
-          <a:p>
-            <a:pPr algn="ctr">
-              <a:defRPr sz="1700" b="1">
+          <a:bodyPr rtlCol="0" anchor="ctr"/>
+          <a:lstStyle/>
+          <a:p>
+            <a:pPr algn="ctr"/>
+          </a:p>
+        </p:txBody>
+      </p:sp>
+      <p:sp>
+        <p:nvSpPr>
+          <p:cNvPr id="10" name="TextBox 9"/>
+          <p:cNvSpPr txBox="1"/>
+          <p:nvPr/>
+        </p:nvSpPr>
+        <p:spPr>
+          <a:xfrm>
+            <a:off x="6400800" y="1554480"/>
+            <a:ext cx="4846320" cy="4297680"/>
+          </a:xfrm>
+          <a:prstGeom prst="rect">
+            <a:avLst/>
+          </a:prstGeom>
+          <a:noFill/>
+        </p:spPr>
+        <p:txBody>
+          <a:bodyPr wrap="none">
+            <a:spAutoFit/>
+          </a:bodyPr>
+          <a:lstStyle/>
+          <a:p>
+            <a:pPr>
+              <a:spcAft>
+                <a:spcPts val="1600"/>
+              </a:spcAft>
+            </a:pPr>
+            <a:r>
+              <a:rPr b="1" sz="1200">
                 <a:solidFill>
                   <a:srgbClr val="3EA6FF"/>
                 </a:solidFill>
-              </a:defRPr>
-            </a:pPr>
-            <a:r>
-              <a:t>03. Key Objectives</a:t>
-            </a:r>
-          </a:p>
-          <a:p>
-            <a:pPr>
-              <a:spcBef>
-                <a:spcPts val="1800"/>
-              </a:spcBef>
-              <a:defRPr sz="1350">
-                <a:solidFill>
-                  <a:srgbClr val="C8CDD7"/>
-                </a:solidFill>
-              </a:defRPr>
-            </a:pPr>
-            <a:r>
-              <a:t>• 100% Component-Driven Architecture with clean separation between Data and UI Presentation.</a:t>
-            </a:r>
-          </a:p>
-          <a:p>
-            <a:pPr>
-              <a:spcBef>
-                <a:spcPts val="1800"/>
-              </a:spcBef>
-              <a:defRPr sz="1350">
-                <a:solidFill>
-                  <a:srgbClr val="C8CDD7"/>
-                </a:solidFill>
-              </a:defRPr>
-            </a:pPr>
-            <a:r>
-              <a:t>• Zero-latency word-boundary controlled search filtering without external API dependencies.</a:t>
-            </a:r>
-          </a:p>
-          <a:p>
-            <a:pPr>
-              <a:spcBef>
-                <a:spcPts val="1800"/>
-              </a:spcBef>
-              <a:defRPr sz="1350">
-                <a:solidFill>
-                  <a:srgbClr val="C8CDD7"/>
-                </a:solidFill>
-              </a:defRPr>
-            </a:pPr>
-            <a:r>
-              <a:t>• Global State synchronization ensuring user interactions seamlessly persist across all playlist views.</a:t>
+              </a:rPr>
+              <a:t>06. </a:t>
+            </a:r>
+            <a:r>
+              <a:rPr sz="1100">
+                <a:solidFill>
+                  <a:srgbClr val="FFFFFF"/>
+                </a:solidFill>
+              </a:rPr>
+              <a:t>Global State Architecture (Context API) &amp; LocalStorage Sync (Page 08)</a:t>
+            </a:r>
+          </a:p>
+          <a:p>
+            <a:pPr>
+              <a:spcAft>
+                <a:spcPts val="1600"/>
+              </a:spcAft>
+            </a:pPr>
+            <a:r>
+              <a:rPr b="1" sz="1200">
+                <a:solidFill>
+                  <a:srgbClr val="3EA6FF"/>
+                </a:solidFill>
+              </a:rPr>
+              <a:t>07. </a:t>
+            </a:r>
+            <a:r>
+              <a:rPr sz="1100">
+                <a:solidFill>
+                  <a:srgbClr val="FFFFFF"/>
+                </a:solidFill>
+              </a:rPr>
+              <a:t>Creator Ecosystem &amp; Exact 2026 YouTube Metrics (Page 09)</a:t>
+            </a:r>
+          </a:p>
+          <a:p>
+            <a:pPr>
+              <a:spcAft>
+                <a:spcPts val="1600"/>
+              </a:spcAft>
+            </a:pPr>
+            <a:r>
+              <a:rPr b="1" sz="1200">
+                <a:solidFill>
+                  <a:srgbClr val="3EA6FF"/>
+                </a:solidFill>
+              </a:rPr>
+              <a:t>08. </a:t>
+            </a:r>
+            <a:r>
+              <a:rPr sz="1100">
+                <a:solidFill>
+                  <a:srgbClr val="FFFFFF"/>
+                </a:solidFill>
+              </a:rPr>
+              <a:t>Multi-Device Responsive Design &amp; Modern UI/UX Layer (Page 10)</a:t>
+            </a:r>
+          </a:p>
+          <a:p>
+            <a:pPr>
+              <a:spcAft>
+                <a:spcPts val="1600"/>
+              </a:spcAft>
+            </a:pPr>
+            <a:r>
+              <a:rPr b="1" sz="1200">
+                <a:solidFill>
+                  <a:srgbClr val="3EA6FF"/>
+                </a:solidFill>
+              </a:rPr>
+              <a:t>09. </a:t>
+            </a:r>
+            <a:r>
+              <a:rPr sz="1100">
+                <a:solidFill>
+                  <a:srgbClr val="FFFFFF"/>
+                </a:solidFill>
+              </a:rPr>
+              <a:t>Curriculum Alignment &amp; Faculty Reference Verification (Page 11)</a:t>
+            </a:r>
+          </a:p>
+          <a:p>
+            <a:pPr>
+              <a:spcAft>
+                <a:spcPts val="1600"/>
+              </a:spcAft>
+            </a:pPr>
+            <a:r>
+              <a:rPr b="1" sz="1200">
+                <a:solidFill>
+                  <a:srgbClr val="3EA6FF"/>
+                </a:solidFill>
+              </a:rPr>
+              <a:t>10. </a:t>
+            </a:r>
+            <a:r>
+              <a:rPr sz="1100">
+                <a:solidFill>
+                  <a:srgbClr val="FFFFFF"/>
+                </a:solidFill>
+              </a:rPr>
+              <a:t>Technical Roadmap &amp; Scope for Phase 3 (MERN Stack) (Page 12)</a:t>
             </a:r>
           </a:p>
         </p:txBody>
@@ -3923,7 +6279,7 @@
         <p:spPr>
           <a:xfrm>
             <a:off x="731520" y="365760"/>
-            <a:ext cx="457200" cy="54864"/>
+            <a:ext cx="365760" cy="54864"/>
           </a:xfrm>
           <a:prstGeom prst="rect">
             <a:avLst/>
@@ -3965,8 +6321,8 @@
         </p:nvSpPr>
         <p:spPr>
           <a:xfrm>
-            <a:off x="1280160" y="292608"/>
-            <a:ext cx="10149840" cy="274320"/>
+            <a:off x="1188720" y="292608"/>
+            <a:ext cx="10241280" cy="274320"/>
           </a:xfrm>
           <a:prstGeom prst="rect">
             <a:avLst/>
@@ -3974,20 +6330,20 @@
           <a:noFill/>
         </p:spPr>
         <p:txBody>
-          <a:bodyPr wrap="square">
+          <a:bodyPr wrap="none">
             <a:spAutoFit/>
           </a:bodyPr>
           <a:lstStyle/>
           <a:p>
             <a:pPr>
-              <a:defRPr sz="1050" b="1">
+              <a:defRPr sz="1000" b="1">
                 <a:solidFill>
                   <a:srgbClr val="3EA6FF"/>
                 </a:solidFill>
               </a:defRPr>
             </a:pPr>
             <a:r>
-              <a:t>GROUP G15  •  PROJECT ID: G15-PID-17 (P-17)  •  FRONT END ENGINEERING - II (25CSE0203)</a:t>
+              <a:t>GROUP G15  •  PROJECT ID: G15-PID-17 (P-17)  •  EVALUATION-II (25CSE0203)</a:t>
             </a:r>
           </a:p>
         </p:txBody>
@@ -4001,7 +6357,7 @@
         <p:spPr>
           <a:xfrm>
             <a:off x="731520" y="594360"/>
-            <a:ext cx="10728655" cy="640080"/>
+            <a:ext cx="10728655" cy="594360"/>
           </a:xfrm>
           <a:prstGeom prst="rect">
             <a:avLst/>
@@ -4009,34 +6365,69 @@
           <a:noFill/>
         </p:spPr>
         <p:txBody>
-          <a:bodyPr wrap="square">
+          <a:bodyPr wrap="none">
             <a:spAutoFit/>
           </a:bodyPr>
           <a:lstStyle/>
           <a:p>
             <a:pPr>
-              <a:defRPr sz="2300" b="1">
+              <a:defRPr sz="2100" b="1">
                 <a:solidFill>
                   <a:srgbClr val="FFFFFF"/>
                 </a:solidFill>
               </a:defRPr>
             </a:pPr>
             <a:r>
-              <a:t>Syllabus-Aligned Technology Stack</a:t>
-            </a:r>
-          </a:p>
-        </p:txBody>
-      </p:sp>
-      <p:sp>
-        <p:nvSpPr>
-          <p:cNvPr id="6" name="Rounded Rectangle 5"/>
+              <a:t>Evaluation-II Vision &amp; Milestone Objectives</a:t>
+            </a:r>
+          </a:p>
+        </p:txBody>
+      </p:sp>
+      <p:sp>
+        <p:nvSpPr>
+          <p:cNvPr id="6" name="TextBox 5"/>
+          <p:cNvSpPr txBox="1"/>
+          <p:nvPr/>
+        </p:nvSpPr>
+        <p:spPr>
+          <a:xfrm>
+            <a:off x="731520" y="6309360"/>
+            <a:ext cx="10728655" cy="320040"/>
+          </a:xfrm>
+          <a:prstGeom prst="rect">
+            <a:avLst/>
+          </a:prstGeom>
+          <a:noFill/>
+        </p:spPr>
+        <p:txBody>
+          <a:bodyPr wrap="none">
+            <a:spAutoFit/>
+          </a:bodyPr>
+          <a:lstStyle/>
+          <a:p>
+            <a:pPr>
+              <a:defRPr sz="900">
+                <a:solidFill>
+                  <a:srgbClr val="7B8293"/>
+                </a:solidFill>
+              </a:defRPr>
+            </a:pPr>
+            <a:r>
+              <a:t>PheW TuBe: Video Streaming Platform (G15-PID-17)  |  Evaluation-II  |  Page 03</a:t>
+            </a:r>
+          </a:p>
+        </p:txBody>
+      </p:sp>
+      <p:sp>
+        <p:nvSpPr>
+          <p:cNvPr id="7" name="Rounded Rectangle 6"/>
           <p:cNvSpPr/>
           <p:nvPr/>
         </p:nvSpPr>
         <p:spPr>
           <a:xfrm>
-            <a:off x="731520" y="1417320"/>
-            <a:ext cx="5257800" cy="1417320"/>
+            <a:off x="731520" y="1371600"/>
+            <a:ext cx="3383280" cy="4663440"/>
           </a:xfrm>
           <a:prstGeom prst="roundRect">
             <a:avLst/>
@@ -4044,7 +6435,7 @@
           <a:solidFill>
             <a:srgbClr val="161922"/>
           </a:solidFill>
-          <a:ln>
+          <a:ln w="15240">
             <a:solidFill>
               <a:srgbClr val="2E3445"/>
             </a:solidFill>
@@ -4065,47 +6456,154 @@
           </a:fontRef>
         </p:style>
         <p:txBody>
-          <a:bodyPr rtlCol="0" anchor="ctr" lIns="228600" tIns="182880"/>
-          <a:lstStyle/>
-          <a:p>
-            <a:pPr algn="ctr">
-              <a:defRPr sz="1450" b="1">
+          <a:bodyPr rtlCol="0" anchor="ctr"/>
+          <a:lstStyle/>
+          <a:p>
+            <a:pPr algn="ctr"/>
+          </a:p>
+        </p:txBody>
+      </p:sp>
+      <p:sp>
+        <p:nvSpPr>
+          <p:cNvPr id="8" name="TextBox 7"/>
+          <p:cNvSpPr txBox="1"/>
+          <p:nvPr/>
+        </p:nvSpPr>
+        <p:spPr>
+          <a:xfrm>
+            <a:off x="914400" y="1508760"/>
+            <a:ext cx="3017520" cy="4389120"/>
+          </a:xfrm>
+          <a:prstGeom prst="rect">
+            <a:avLst/>
+          </a:prstGeom>
+          <a:noFill/>
+        </p:spPr>
+        <p:txBody>
+          <a:bodyPr wrap="square">
+            <a:spAutoFit/>
+          </a:bodyPr>
+          <a:lstStyle/>
+          <a:p>
+            <a:pPr>
+              <a:spcAft>
+                <a:spcPts val="800"/>
+              </a:spcAft>
+              <a:defRPr sz="1300" b="1">
                 <a:solidFill>
                   <a:srgbClr val="FF0033"/>
                 </a:solidFill>
               </a:defRPr>
             </a:pPr>
             <a:r>
-              <a:t>React 19 (Core UI Library)</a:t>
-            </a:r>
-          </a:p>
-          <a:p>
-            <a:pPr>
-              <a:spcBef>
-                <a:spcPts val="400"/>
-              </a:spcBef>
-              <a:defRPr sz="1100">
-                <a:solidFill>
-                  <a:srgbClr val="C8CDD7"/>
-                </a:solidFill>
-              </a:defRPr>
-            </a:pPr>
-            <a:r>
-              <a:t>Functional components, React Hooks (useState, useMemo), Synthetic Events, and Virtual DOM reconciliation with unique key identifiers for optimized renders.</a:t>
-            </a:r>
-          </a:p>
-        </p:txBody>
-      </p:sp>
-      <p:sp>
-        <p:nvSpPr>
-          <p:cNvPr id="7" name="Rounded Rectangle 6"/>
+              <a:t>Phase 1 vs Phase 2 Focus</a:t>
+            </a:r>
+          </a:p>
+          <a:p>
+            <a:pPr>
+              <a:spcAft>
+                <a:spcPts val="600"/>
+              </a:spcAft>
+            </a:pPr>
+            <a:r>
+              <a:rPr b="1" sz="1050">
+                <a:solidFill>
+                  <a:srgbClr val="FF0033"/>
+                </a:solidFill>
+              </a:rPr>
+              <a:t>• </a:t>
+            </a:r>
+            <a:r>
+              <a:rPr b="1" sz="1000">
+                <a:solidFill>
+                  <a:srgbClr val="FFFFFF"/>
+                </a:solidFill>
+              </a:rPr>
+              <a:t>Phase 1 Foundation: </a:t>
+            </a:r>
+            <a:r>
+              <a:rPr sz="1000">
+                <a:solidFill>
+                  <a:srgbClr val="BEC3CD"/>
+                </a:solidFill>
+              </a:rPr>
+              <a:t>Established responsive card grids, category chip filters, and external YouTube link outs.</a:t>
+            </a:r>
+          </a:p>
+          <a:p>
+            <a:pPr>
+              <a:spcAft>
+                <a:spcPts val="600"/>
+              </a:spcAft>
+            </a:pPr>
+            <a:r>
+              <a:rPr b="1" sz="1050">
+                <a:solidFill>
+                  <a:srgbClr val="FF0033"/>
+                </a:solidFill>
+              </a:rPr>
+              <a:t>• </a:t>
+            </a:r>
+            <a:r>
+              <a:rPr b="1" sz="1000">
+                <a:solidFill>
+                  <a:srgbClr val="FFFFFF"/>
+                </a:solidFill>
+              </a:rPr>
+              <a:t>Phase 2 Transition: </a:t>
+            </a:r>
+            <a:r>
+              <a:rPr sz="1000">
+                <a:solidFill>
+                  <a:srgbClr val="BEC3CD"/>
+                </a:solidFill>
+              </a:rPr>
+              <a:t>Elevated PheW TuBe into an authentic, stateful Single Page Application (SPA).</a:t>
+            </a:r>
+          </a:p>
+          <a:p>
+            <a:pPr>
+              <a:spcAft>
+                <a:spcPts val="600"/>
+              </a:spcAft>
+            </a:pPr>
+            <a:r>
+              <a:rPr b="1" sz="1050">
+                <a:solidFill>
+                  <a:srgbClr val="FF0033"/>
+                </a:solidFill>
+              </a:rPr>
+              <a:t>• </a:t>
+            </a:r>
+            <a:r>
+              <a:rPr b="1" sz="1000">
+                <a:solidFill>
+                  <a:srgbClr val="FFFFFF"/>
+                </a:solidFill>
+              </a:rPr>
+              <a:t>Zero Page Reloads: </a:t>
+            </a:r>
+            <a:r>
+              <a:rPr sz="1000">
+                <a:solidFill>
+                  <a:srgbClr val="BEC3CD"/>
+                </a:solidFill>
+              </a:rPr>
+              <a:t>Client-side routing via React Router DOM ensures instant state reactivity without full-page flushes.</a:t>
+            </a:r>
+          </a:p>
+        </p:txBody>
+      </p:sp>
+      <p:sp>
+        <p:nvSpPr>
+          <p:cNvPr id="9" name="Rounded Rectangle 8"/>
           <p:cNvSpPr/>
           <p:nvPr/>
         </p:nvSpPr>
         <p:spPr>
           <a:xfrm>
-            <a:off x="6172200" y="1417320"/>
-            <a:ext cx="5257800" cy="1417320"/>
+            <a:off x="4389120" y="1371600"/>
+            <a:ext cx="3383280" cy="4663440"/>
           </a:xfrm>
           <a:prstGeom prst="roundRect">
             <a:avLst/>
@@ -4113,7 +6611,7 @@
           <a:solidFill>
             <a:srgbClr val="161922"/>
           </a:solidFill>
-          <a:ln>
+          <a:ln w="15240">
             <a:solidFill>
               <a:srgbClr val="2E3445"/>
             </a:solidFill>
@@ -4134,47 +6632,154 @@
           </a:fontRef>
         </p:style>
         <p:txBody>
-          <a:bodyPr rtlCol="0" anchor="ctr" lIns="228600" tIns="182880"/>
-          <a:lstStyle/>
-          <a:p>
-            <a:pPr algn="ctr">
-              <a:defRPr sz="1450" b="1">
-                <a:solidFill>
-                  <a:srgbClr val="FF0033"/>
+          <a:bodyPr rtlCol="0" anchor="ctr"/>
+          <a:lstStyle/>
+          <a:p>
+            <a:pPr algn="ctr"/>
+          </a:p>
+        </p:txBody>
+      </p:sp>
+      <p:sp>
+        <p:nvSpPr>
+          <p:cNvPr id="10" name="TextBox 9"/>
+          <p:cNvSpPr txBox="1"/>
+          <p:nvPr/>
+        </p:nvSpPr>
+        <p:spPr>
+          <a:xfrm>
+            <a:off x="4572000" y="1508760"/>
+            <a:ext cx="3017520" cy="4389120"/>
+          </a:xfrm>
+          <a:prstGeom prst="rect">
+            <a:avLst/>
+          </a:prstGeom>
+          <a:noFill/>
+        </p:spPr>
+        <p:txBody>
+          <a:bodyPr wrap="square">
+            <a:spAutoFit/>
+          </a:bodyPr>
+          <a:lstStyle/>
+          <a:p>
+            <a:pPr>
+              <a:spcAft>
+                <a:spcPts val="800"/>
+              </a:spcAft>
+              <a:defRPr sz="1300" b="1">
+                <a:solidFill>
+                  <a:srgbClr val="3EA6FF"/>
                 </a:solidFill>
               </a:defRPr>
             </a:pPr>
             <a:r>
-              <a:t>Vite 8.x (Build &amp; Tooling)</a:t>
-            </a:r>
-          </a:p>
-          <a:p>
-            <a:pPr>
-              <a:spcBef>
-                <a:spcPts val="400"/>
-              </a:spcBef>
-              <a:defRPr sz="1100">
-                <a:solidFill>
-                  <a:srgbClr val="C8CDD7"/>
-                </a:solidFill>
-              </a:defRPr>
-            </a:pPr>
-            <a:r>
-              <a:t>Modern ESM bundler delivering instant Hot Module Replacement (HMR) and optimized 500ms production builds with clean asset chunking.</a:t>
-            </a:r>
-          </a:p>
-        </p:txBody>
-      </p:sp>
-      <p:sp>
-        <p:nvSpPr>
-          <p:cNvPr id="8" name="Rounded Rectangle 7"/>
+              <a:t>Core Technical Objectives</a:t>
+            </a:r>
+          </a:p>
+          <a:p>
+            <a:pPr>
+              <a:spcAft>
+                <a:spcPts val="600"/>
+              </a:spcAft>
+            </a:pPr>
+            <a:r>
+              <a:rPr b="1" sz="1050">
+                <a:solidFill>
+                  <a:srgbClr val="3EA6FF"/>
+                </a:solidFill>
+              </a:rPr>
+              <a:t>• </a:t>
+            </a:r>
+            <a:r>
+              <a:rPr b="1" sz="1000">
+                <a:solidFill>
+                  <a:srgbClr val="FFFFFF"/>
+                </a:solidFill>
+              </a:rPr>
+              <a:t>Dynamic Watch Route: </a:t>
+            </a:r>
+            <a:r>
+              <a:rPr sz="1000">
+                <a:solidFill>
+                  <a:srgbClr val="BEC3CD"/>
+                </a:solidFill>
+              </a:rPr>
+              <a:t>Deep link /watch/:id powered by useParams() with embedded 16:9 streaming.</a:t>
+            </a:r>
+          </a:p>
+          <a:p>
+            <a:pPr>
+              <a:spcAft>
+                <a:spcPts val="600"/>
+              </a:spcAft>
+            </a:pPr>
+            <a:r>
+              <a:rPr b="1" sz="1050">
+                <a:solidFill>
+                  <a:srgbClr val="3EA6FF"/>
+                </a:solidFill>
+              </a:rPr>
+              <a:t>• </a:t>
+            </a:r>
+            <a:r>
+              <a:rPr b="1" sz="1000">
+                <a:solidFill>
+                  <a:srgbClr val="FFFFFF"/>
+                </a:solidFill>
+              </a:rPr>
+              <a:t>DOM Control with useRef: </a:t>
+            </a:r>
+            <a:r>
+              <a:rPr sz="1000">
+                <a:solidFill>
+                  <a:srgbClr val="BEC3CD"/>
+                </a:solidFill>
+              </a:rPr>
+              <a:t>Direct programmatic focus on comment input and auto-scroll viewport control without re-renders.</a:t>
+            </a:r>
+          </a:p>
+          <a:p>
+            <a:pPr>
+              <a:spcAft>
+                <a:spcPts val="600"/>
+              </a:spcAft>
+            </a:pPr>
+            <a:r>
+              <a:rPr b="1" sz="1050">
+                <a:solidFill>
+                  <a:srgbClr val="3EA6FF"/>
+                </a:solidFill>
+              </a:rPr>
+              <a:t>• </a:t>
+            </a:r>
+            <a:r>
+              <a:rPr b="1" sz="1000">
+                <a:solidFill>
+                  <a:srgbClr val="FFFFFF"/>
+                </a:solidFill>
+              </a:rPr>
+              <a:t>Global Context API: </a:t>
+            </a:r>
+            <a:r>
+              <a:rPr sz="1000">
+                <a:solidFill>
+                  <a:srgbClr val="BEC3CD"/>
+                </a:solidFill>
+              </a:rPr>
+              <a:t>Centralized multi-state bus eliminating prop drilling across nested component trees.</a:t>
+            </a:r>
+          </a:p>
+        </p:txBody>
+      </p:sp>
+      <p:sp>
+        <p:nvSpPr>
+          <p:cNvPr id="11" name="Rounded Rectangle 10"/>
           <p:cNvSpPr/>
           <p:nvPr/>
         </p:nvSpPr>
         <p:spPr>
           <a:xfrm>
-            <a:off x="731520" y="3017520"/>
-            <a:ext cx="5257800" cy="1417320"/>
+            <a:off x="8046720" y="1371600"/>
+            <a:ext cx="3383280" cy="4663440"/>
           </a:xfrm>
           <a:prstGeom prst="roundRect">
             <a:avLst/>
@@ -4182,7 +6787,7 @@
           <a:solidFill>
             <a:srgbClr val="161922"/>
           </a:solidFill>
-          <a:ln>
+          <a:ln w="15240">
             <a:solidFill>
               <a:srgbClr val="2E3445"/>
             </a:solidFill>
@@ -4203,240 +6808,140 @@
           </a:fontRef>
         </p:style>
         <p:txBody>
-          <a:bodyPr rtlCol="0" anchor="ctr" lIns="228600" tIns="182880"/>
-          <a:lstStyle/>
-          <a:p>
-            <a:pPr algn="ctr">
-              <a:defRPr sz="1450" b="1">
-                <a:solidFill>
-                  <a:srgbClr val="3EA6FF"/>
+          <a:bodyPr rtlCol="0" anchor="ctr"/>
+          <a:lstStyle/>
+          <a:p>
+            <a:pPr algn="ctr"/>
+          </a:p>
+        </p:txBody>
+      </p:sp>
+      <p:sp>
+        <p:nvSpPr>
+          <p:cNvPr id="12" name="TextBox 11"/>
+          <p:cNvSpPr txBox="1"/>
+          <p:nvPr/>
+        </p:nvSpPr>
+        <p:spPr>
+          <a:xfrm>
+            <a:off x="8229600" y="1508760"/>
+            <a:ext cx="3017520" cy="4389120"/>
+          </a:xfrm>
+          <a:prstGeom prst="rect">
+            <a:avLst/>
+          </a:prstGeom>
+          <a:noFill/>
+        </p:spPr>
+        <p:txBody>
+          <a:bodyPr wrap="square">
+            <a:spAutoFit/>
+          </a:bodyPr>
+          <a:lstStyle/>
+          <a:p>
+            <a:pPr>
+              <a:spcAft>
+                <a:spcPts val="800"/>
+              </a:spcAft>
+              <a:defRPr sz="1300" b="1">
+                <a:solidFill>
+                  <a:srgbClr val="2BA640"/>
                 </a:solidFill>
               </a:defRPr>
             </a:pPr>
             <a:r>
-              <a:t>React Router DOM 7</a:t>
-            </a:r>
-          </a:p>
-          <a:p>
-            <a:pPr>
-              <a:spcBef>
-                <a:spcPts val="400"/>
-              </a:spcBef>
-              <a:defRPr sz="1100">
-                <a:solidFill>
-                  <a:srgbClr val="C8CDD7"/>
-                </a:solidFill>
-              </a:defRPr>
-            </a:pPr>
-            <a:r>
-              <a:t>Declarative client-side routing using BrowserRouter, Routes, Route, Link, and useLocation without triggering browser page refreshes.</a:t>
-            </a:r>
-          </a:p>
-        </p:txBody>
-      </p:sp>
-      <p:sp>
-        <p:nvSpPr>
-          <p:cNvPr id="9" name="Rounded Rectangle 8"/>
-          <p:cNvSpPr/>
-          <p:nvPr/>
-        </p:nvSpPr>
-        <p:spPr>
-          <a:xfrm>
-            <a:off x="6172200" y="3017520"/>
-            <a:ext cx="5257800" cy="1417320"/>
-          </a:xfrm>
-          <a:prstGeom prst="roundRect">
-            <a:avLst/>
-          </a:prstGeom>
-          <a:solidFill>
-            <a:srgbClr val="161922"/>
-          </a:solidFill>
-          <a:ln>
-            <a:solidFill>
-              <a:srgbClr val="2E3445"/>
-            </a:solidFill>
-          </a:ln>
-        </p:spPr>
-        <p:style>
-          <a:lnRef idx="1">
-            <a:schemeClr val="accent1"/>
-          </a:lnRef>
-          <a:fillRef idx="3">
-            <a:schemeClr val="accent1"/>
-          </a:fillRef>
-          <a:effectRef idx="2">
-            <a:schemeClr val="accent1"/>
-          </a:effectRef>
-          <a:fontRef idx="minor">
-            <a:schemeClr val="lt1"/>
-          </a:fontRef>
-        </p:style>
-        <p:txBody>
-          <a:bodyPr rtlCol="0" anchor="ctr" lIns="228600" tIns="182880"/>
-          <a:lstStyle/>
-          <a:p>
-            <a:pPr algn="ctr">
-              <a:defRPr sz="1450" b="1">
-                <a:solidFill>
-                  <a:srgbClr val="3EA6FF"/>
-                </a:solidFill>
-              </a:defRPr>
-            </a:pPr>
-            <a:r>
-              <a:t>React Icons 5.x</a:t>
-            </a:r>
-          </a:p>
-          <a:p>
-            <a:pPr>
-              <a:spcBef>
-                <a:spcPts val="400"/>
-              </a:spcBef>
-              <a:defRPr sz="1100">
-                <a:solidFill>
-                  <a:srgbClr val="C8CDD7"/>
-                </a:solidFill>
-              </a:defRPr>
-            </a:pPr>
-            <a:r>
-              <a:t>Scalable vector SVG icon components (Material Design, FontAwesome, Simple Icons) cleanly styled via CSS.</a:t>
-            </a:r>
-          </a:p>
-        </p:txBody>
-      </p:sp>
-      <p:sp>
-        <p:nvSpPr>
-          <p:cNvPr id="10" name="Rounded Rectangle 9"/>
-          <p:cNvSpPr/>
-          <p:nvPr/>
-        </p:nvSpPr>
-        <p:spPr>
-          <a:xfrm>
-            <a:off x="731520" y="4617720"/>
-            <a:ext cx="5257800" cy="1417320"/>
-          </a:xfrm>
-          <a:prstGeom prst="roundRect">
-            <a:avLst/>
-          </a:prstGeom>
-          <a:solidFill>
-            <a:srgbClr val="161922"/>
-          </a:solidFill>
-          <a:ln>
-            <a:solidFill>
-              <a:srgbClr val="2E3445"/>
-            </a:solidFill>
-          </a:ln>
-        </p:spPr>
-        <p:style>
-          <a:lnRef idx="1">
-            <a:schemeClr val="accent1"/>
-          </a:lnRef>
-          <a:fillRef idx="3">
-            <a:schemeClr val="accent1"/>
-          </a:fillRef>
-          <a:effectRef idx="2">
-            <a:schemeClr val="accent1"/>
-          </a:effectRef>
-          <a:fontRef idx="minor">
-            <a:schemeClr val="lt1"/>
-          </a:fontRef>
-        </p:style>
-        <p:txBody>
-          <a:bodyPr rtlCol="0" anchor="ctr" lIns="228600" tIns="182880"/>
-          <a:lstStyle/>
-          <a:p>
-            <a:pPr algn="ctr">
-              <a:defRPr sz="1450" b="1">
-                <a:solidFill>
-                  <a:srgbClr val="FF0033"/>
-                </a:solidFill>
-              </a:defRPr>
-            </a:pPr>
-            <a:r>
-              <a:t>Pure Modern CSS3</a:t>
-            </a:r>
-          </a:p>
-          <a:p>
-            <a:pPr>
-              <a:spcBef>
-                <a:spcPts val="400"/>
-              </a:spcBef>
-              <a:defRPr sz="1100">
-                <a:solidFill>
-                  <a:srgbClr val="C8CDD7"/>
-                </a:solidFill>
-              </a:defRPr>
-            </a:pPr>
-            <a:r>
-              <a:t>Dark-theme design system using CSS Custom Properties (Variables), CSS Grid (auto-fill minmax), Flexbox layouts, and Media Queries.</a:t>
-            </a:r>
-          </a:p>
-        </p:txBody>
-      </p:sp>
-      <p:sp>
-        <p:nvSpPr>
-          <p:cNvPr id="11" name="Rounded Rectangle 10"/>
-          <p:cNvSpPr/>
-          <p:nvPr/>
-        </p:nvSpPr>
-        <p:spPr>
-          <a:xfrm>
-            <a:off x="6172200" y="4617720"/>
-            <a:ext cx="5257800" cy="1417320"/>
-          </a:xfrm>
-          <a:prstGeom prst="roundRect">
-            <a:avLst/>
-          </a:prstGeom>
-          <a:solidFill>
-            <a:srgbClr val="161922"/>
-          </a:solidFill>
-          <a:ln>
-            <a:solidFill>
-              <a:srgbClr val="2E3445"/>
-            </a:solidFill>
-          </a:ln>
-        </p:spPr>
-        <p:style>
-          <a:lnRef idx="1">
-            <a:schemeClr val="accent1"/>
-          </a:lnRef>
-          <a:fillRef idx="3">
-            <a:schemeClr val="accent1"/>
-          </a:fillRef>
-          <a:effectRef idx="2">
-            <a:schemeClr val="accent1"/>
-          </a:effectRef>
-          <a:fontRef idx="minor">
-            <a:schemeClr val="lt1"/>
-          </a:fontRef>
-        </p:style>
-        <p:txBody>
-          <a:bodyPr rtlCol="0" anchor="ctr" lIns="228600" tIns="182880"/>
-          <a:lstStyle/>
-          <a:p>
-            <a:pPr algn="ctr">
-              <a:defRPr sz="1450" b="1">
-                <a:solidFill>
-                  <a:srgbClr val="3EA6FF"/>
-                </a:solidFill>
-              </a:defRPr>
-            </a:pPr>
-            <a:r>
-              <a:t>Centralized Data Layer</a:t>
-            </a:r>
-          </a:p>
-          <a:p>
-            <a:pPr>
-              <a:spcBef>
-                <a:spcPts val="400"/>
-              </a:spcBef>
-              <a:defRPr sz="1100">
-                <a:solidFill>
-                  <a:srgbClr val="C8CDD7"/>
-                </a:solidFill>
-              </a:defRPr>
-            </a:pPr>
-            <a:r>
-              <a:t>Decoupled array-of-objects data model in videoData.js feeding clean presentation cards via standard ES6 .map() iterations.</a:t>
+              <a:t>User Experience &amp; Realism</a:t>
+            </a:r>
+          </a:p>
+          <a:p>
+            <a:pPr>
+              <a:spcAft>
+                <a:spcPts val="600"/>
+              </a:spcAft>
+            </a:pPr>
+            <a:r>
+              <a:rPr b="1" sz="1050">
+                <a:solidFill>
+                  <a:srgbClr val="2BA640"/>
+                </a:solidFill>
+              </a:rPr>
+              <a:t>• </a:t>
+            </a:r>
+            <a:r>
+              <a:rPr b="1" sz="1000">
+                <a:solidFill>
+                  <a:srgbClr val="FFFFFF"/>
+                </a:solidFill>
+              </a:rPr>
+              <a:t>Up-Next Recommendations: </a:t>
+            </a:r>
+            <a:r>
+              <a:rPr sz="1000">
+                <a:solidFill>
+                  <a:srgbClr val="BEC3CD"/>
+                </a:solidFill>
+              </a:rPr>
+              <a:t>Dynamic video swapping via useNavigate() with synchronized video metadata.</a:t>
+            </a:r>
+          </a:p>
+          <a:p>
+            <a:pPr>
+              <a:spcAft>
+                <a:spcPts val="600"/>
+              </a:spcAft>
+            </a:pPr>
+            <a:r>
+              <a:rPr b="1" sz="1050">
+                <a:solidFill>
+                  <a:srgbClr val="2BA640"/>
+                </a:solidFill>
+              </a:rPr>
+              <a:t>• </a:t>
+            </a:r>
+            <a:r>
+              <a:rPr b="1" sz="1000">
+                <a:solidFill>
+                  <a:srgbClr val="FFFFFF"/>
+                </a:solidFill>
+              </a:rPr>
+              <a:t>Interactive Notification Bus: </a:t>
+            </a:r>
+            <a:r>
+              <a:rPr sz="1000">
+                <a:solidFill>
+                  <a:srgbClr val="BEC3CD"/>
+                </a:solidFill>
+              </a:rPr>
+              <a:t>Integrated react-toastify for instant feedback on user actions.</a:t>
+            </a:r>
+          </a:p>
+          <a:p>
+            <a:pPr>
+              <a:spcAft>
+                <a:spcPts val="600"/>
+              </a:spcAft>
+            </a:pPr>
+            <a:r>
+              <a:rPr b="1" sz="1050">
+                <a:solidFill>
+                  <a:srgbClr val="2BA640"/>
+                </a:solidFill>
+              </a:rPr>
+              <a:t>• </a:t>
+            </a:r>
+            <a:r>
+              <a:rPr b="1" sz="1000">
+                <a:solidFill>
+                  <a:srgbClr val="FFFFFF"/>
+                </a:solidFill>
+              </a:rPr>
+              <a:t>Responsive Parity: </a:t>
+            </a:r>
+            <a:r>
+              <a:rPr sz="1000">
+                <a:solidFill>
+                  <a:srgbClr val="BEC3CD"/>
+                </a:solidFill>
+              </a:rPr>
+              <a:t>Seamless scaling across 375px mobile, 768px tablet, and 1440px desktop screens.</a:t>
             </a:r>
           </a:p>
         </p:txBody>
@@ -4514,7 +7019,7 @@
         <p:spPr>
           <a:xfrm>
             <a:off x="731520" y="365760"/>
-            <a:ext cx="457200" cy="54864"/>
+            <a:ext cx="365760" cy="54864"/>
           </a:xfrm>
           <a:prstGeom prst="rect">
             <a:avLst/>
@@ -4556,8 +7061,8 @@
         </p:nvSpPr>
         <p:spPr>
           <a:xfrm>
-            <a:off x="1280160" y="292608"/>
-            <a:ext cx="10149840" cy="274320"/>
+            <a:off x="1188720" y="292608"/>
+            <a:ext cx="10241280" cy="274320"/>
           </a:xfrm>
           <a:prstGeom prst="rect">
             <a:avLst/>
@@ -4565,20 +7070,20 @@
           <a:noFill/>
         </p:spPr>
         <p:txBody>
-          <a:bodyPr wrap="square">
+          <a:bodyPr wrap="none">
             <a:spAutoFit/>
           </a:bodyPr>
           <a:lstStyle/>
           <a:p>
             <a:pPr>
-              <a:defRPr sz="1050" b="1">
+              <a:defRPr sz="1000" b="1">
                 <a:solidFill>
                   <a:srgbClr val="3EA6FF"/>
                 </a:solidFill>
               </a:defRPr>
             </a:pPr>
             <a:r>
-              <a:t>GROUP G15  •  PROJECT ID: G15-PID-17 (P-17)  •  FRONT END ENGINEERING - II (25CSE0203)</a:t>
+              <a:t>GROUP G15  •  PROJECT ID: G15-PID-17 (P-17)  •  EVALUATION-II (25CSE0203)</a:t>
             </a:r>
           </a:p>
         </p:txBody>
@@ -4592,7 +7097,7 @@
         <p:spPr>
           <a:xfrm>
             <a:off x="731520" y="594360"/>
-            <a:ext cx="10728655" cy="640080"/>
+            <a:ext cx="10728655" cy="594360"/>
           </a:xfrm>
           <a:prstGeom prst="rect">
             <a:avLst/>
@@ -4600,34 +7105,69 @@
           <a:noFill/>
         </p:spPr>
         <p:txBody>
-          <a:bodyPr wrap="square">
+          <a:bodyPr wrap="none">
             <a:spAutoFit/>
           </a:bodyPr>
           <a:lstStyle/>
           <a:p>
             <a:pPr>
-              <a:defRPr sz="2300" b="1">
+              <a:defRPr sz="2100" b="1">
                 <a:solidFill>
                   <a:srgbClr val="FFFFFF"/>
                 </a:solidFill>
               </a:defRPr>
             </a:pPr>
             <a:r>
-              <a:t>Core Component Architecture &amp; Modularity</a:t>
-            </a:r>
-          </a:p>
-        </p:txBody>
-      </p:sp>
-      <p:sp>
-        <p:nvSpPr>
-          <p:cNvPr id="6" name="Rounded Rectangle 5"/>
+              <a:t>Syllabus-Aligned Technology Stack &amp; Architecture</a:t>
+            </a:r>
+          </a:p>
+        </p:txBody>
+      </p:sp>
+      <p:sp>
+        <p:nvSpPr>
+          <p:cNvPr id="6" name="TextBox 5"/>
+          <p:cNvSpPr txBox="1"/>
+          <p:nvPr/>
+        </p:nvSpPr>
+        <p:spPr>
+          <a:xfrm>
+            <a:off x="731520" y="6309360"/>
+            <a:ext cx="10728655" cy="320040"/>
+          </a:xfrm>
+          <a:prstGeom prst="rect">
+            <a:avLst/>
+          </a:prstGeom>
+          <a:noFill/>
+        </p:spPr>
+        <p:txBody>
+          <a:bodyPr wrap="none">
+            <a:spAutoFit/>
+          </a:bodyPr>
+          <a:lstStyle/>
+          <a:p>
+            <a:pPr>
+              <a:defRPr sz="900">
+                <a:solidFill>
+                  <a:srgbClr val="7B8293"/>
+                </a:solidFill>
+              </a:defRPr>
+            </a:pPr>
+            <a:r>
+              <a:t>PheW TuBe: Video Streaming Platform (G15-PID-17)  |  Evaluation-II  |  Page 04</a:t>
+            </a:r>
+          </a:p>
+        </p:txBody>
+      </p:sp>
+      <p:sp>
+        <p:nvSpPr>
+          <p:cNvPr id="7" name="Rounded Rectangle 6"/>
           <p:cNvSpPr/>
           <p:nvPr/>
         </p:nvSpPr>
         <p:spPr>
           <a:xfrm>
-            <a:off x="731520" y="1417320"/>
-            <a:ext cx="5257800" cy="1417320"/>
+            <a:off x="731520" y="1371600"/>
+            <a:ext cx="3383280" cy="4663440"/>
           </a:xfrm>
           <a:prstGeom prst="roundRect">
             <a:avLst/>
@@ -4635,7 +7175,7 @@
           <a:solidFill>
             <a:srgbClr val="161922"/>
           </a:solidFill>
-          <a:ln>
+          <a:ln w="15240">
             <a:solidFill>
               <a:srgbClr val="2E3445"/>
             </a:solidFill>
@@ -4656,47 +7196,154 @@
           </a:fontRef>
         </p:style>
         <p:txBody>
-          <a:bodyPr rtlCol="0" anchor="ctr" lIns="228600" tIns="182880"/>
-          <a:lstStyle/>
-          <a:p>
-            <a:pPr algn="ctr">
-              <a:defRPr sz="1450" b="1">
-                <a:solidFill>
-                  <a:srgbClr val="3EA6FF"/>
+          <a:bodyPr rtlCol="0" anchor="ctr"/>
+          <a:lstStyle/>
+          <a:p>
+            <a:pPr algn="ctr"/>
+          </a:p>
+        </p:txBody>
+      </p:sp>
+      <p:sp>
+        <p:nvSpPr>
+          <p:cNvPr id="8" name="TextBox 7"/>
+          <p:cNvSpPr txBox="1"/>
+          <p:nvPr/>
+        </p:nvSpPr>
+        <p:spPr>
+          <a:xfrm>
+            <a:off x="914400" y="1508760"/>
+            <a:ext cx="3017520" cy="4389120"/>
+          </a:xfrm>
+          <a:prstGeom prst="rect">
+            <a:avLst/>
+          </a:prstGeom>
+          <a:noFill/>
+        </p:spPr>
+        <p:txBody>
+          <a:bodyPr wrap="square">
+            <a:spAutoFit/>
+          </a:bodyPr>
+          <a:lstStyle/>
+          <a:p>
+            <a:pPr>
+              <a:spcAft>
+                <a:spcPts val="800"/>
+              </a:spcAft>
+              <a:defRPr sz="1300" b="1">
+                <a:solidFill>
+                  <a:srgbClr val="FF0033"/>
                 </a:solidFill>
               </a:defRPr>
             </a:pPr>
             <a:r>
-              <a:t>Navbar.jsx (Top App Bar)</a:t>
-            </a:r>
-          </a:p>
-          <a:p>
-            <a:pPr>
-              <a:spcBef>
-                <a:spcPts val="400"/>
-              </a:spcBef>
-              <a:defRPr sz="1100">
-                <a:solidFill>
-                  <a:srgbClr val="C8CDD7"/>
-                </a:solidFill>
-              </a:defRPr>
-            </a:pPr>
-            <a:r>
-              <a:t>Controlled search input, dynamic clear button (X), animated mic button, notification badge, and sidebar toggle hamburger.</a:t>
-            </a:r>
-          </a:p>
-        </p:txBody>
-      </p:sp>
-      <p:sp>
-        <p:nvSpPr>
-          <p:cNvPr id="7" name="Rounded Rectangle 6"/>
+              <a:t>React 19 &amp; Routing Architecture</a:t>
+            </a:r>
+          </a:p>
+          <a:p>
+            <a:pPr>
+              <a:spcAft>
+                <a:spcPts val="600"/>
+              </a:spcAft>
+            </a:pPr>
+            <a:r>
+              <a:rPr b="1" sz="1050">
+                <a:solidFill>
+                  <a:srgbClr val="FF0033"/>
+                </a:solidFill>
+              </a:rPr>
+              <a:t>• </a:t>
+            </a:r>
+            <a:r>
+              <a:rPr b="1" sz="1000">
+                <a:solidFill>
+                  <a:srgbClr val="FFFFFF"/>
+                </a:solidFill>
+              </a:rPr>
+              <a:t>Functional Components: </a:t>
+            </a:r>
+            <a:r>
+              <a:rPr sz="1000">
+                <a:solidFill>
+                  <a:srgbClr val="BEC3CD"/>
+                </a:solidFill>
+              </a:rPr>
+              <a:t>100% modular, pure functional architecture with explicit hook lifecycles.</a:t>
+            </a:r>
+          </a:p>
+          <a:p>
+            <a:pPr>
+              <a:spcAft>
+                <a:spcPts val="600"/>
+              </a:spcAft>
+            </a:pPr>
+            <a:r>
+              <a:rPr b="1" sz="1050">
+                <a:solidFill>
+                  <a:srgbClr val="FF0033"/>
+                </a:solidFill>
+              </a:rPr>
+              <a:t>• </a:t>
+            </a:r>
+            <a:r>
+              <a:rPr b="1" sz="1000">
+                <a:solidFill>
+                  <a:srgbClr val="FFFFFF"/>
+                </a:solidFill>
+              </a:rPr>
+              <a:t>React Router DOM v6: </a:t>
+            </a:r>
+            <a:r>
+              <a:rPr sz="1000">
+                <a:solidFill>
+                  <a:srgbClr val="BEC3CD"/>
+                </a:solidFill>
+              </a:rPr>
+              <a:t>Declarative routing engine featuring parameterized dynamic routes (/watch/:id).</a:t>
+            </a:r>
+          </a:p>
+          <a:p>
+            <a:pPr>
+              <a:spcAft>
+                <a:spcPts val="600"/>
+              </a:spcAft>
+            </a:pPr>
+            <a:r>
+              <a:rPr b="1" sz="1050">
+                <a:solidFill>
+                  <a:srgbClr val="FF0033"/>
+                </a:solidFill>
+              </a:rPr>
+              <a:t>• </a:t>
+            </a:r>
+            <a:r>
+              <a:rPr b="1" sz="1000">
+                <a:solidFill>
+                  <a:srgbClr val="FFFFFF"/>
+                </a:solidFill>
+              </a:rPr>
+              <a:t>Vite 8 Build Tooling: </a:t>
+            </a:r>
+            <a:r>
+              <a:rPr sz="1000">
+                <a:solidFill>
+                  <a:srgbClr val="BEC3CD"/>
+                </a:solidFill>
+              </a:rPr>
+              <a:t>Lightning fast ESM bundling delivering sub-350ms hot module replacement (HMR).</a:t>
+            </a:r>
+          </a:p>
+        </p:txBody>
+      </p:sp>
+      <p:sp>
+        <p:nvSpPr>
+          <p:cNvPr id="9" name="Rounded Rectangle 8"/>
           <p:cNvSpPr/>
           <p:nvPr/>
         </p:nvSpPr>
         <p:spPr>
           <a:xfrm>
-            <a:off x="6172200" y="1417320"/>
-            <a:ext cx="5257800" cy="1417320"/>
+            <a:off x="4389120" y="1371600"/>
+            <a:ext cx="3383280" cy="4663440"/>
           </a:xfrm>
           <a:prstGeom prst="roundRect">
             <a:avLst/>
@@ -4704,7 +7351,7 @@
           <a:solidFill>
             <a:srgbClr val="161922"/>
           </a:solidFill>
-          <a:ln>
+          <a:ln w="15240">
             <a:solidFill>
               <a:srgbClr val="2E3445"/>
             </a:solidFill>
@@ -4725,47 +7372,154 @@
           </a:fontRef>
         </p:style>
         <p:txBody>
-          <a:bodyPr rtlCol="0" anchor="ctr" lIns="228600" tIns="182880"/>
-          <a:lstStyle/>
-          <a:p>
-            <a:pPr algn="ctr">
-              <a:defRPr sz="1450" b="1">
+          <a:bodyPr rtlCol="0" anchor="ctr"/>
+          <a:lstStyle/>
+          <a:p>
+            <a:pPr algn="ctr"/>
+          </a:p>
+        </p:txBody>
+      </p:sp>
+      <p:sp>
+        <p:nvSpPr>
+          <p:cNvPr id="10" name="TextBox 9"/>
+          <p:cNvSpPr txBox="1"/>
+          <p:nvPr/>
+        </p:nvSpPr>
+        <p:spPr>
+          <a:xfrm>
+            <a:off x="4572000" y="1508760"/>
+            <a:ext cx="3017520" cy="4389120"/>
+          </a:xfrm>
+          <a:prstGeom prst="rect">
+            <a:avLst/>
+          </a:prstGeom>
+          <a:noFill/>
+        </p:spPr>
+        <p:txBody>
+          <a:bodyPr wrap="square">
+            <a:spAutoFit/>
+          </a:bodyPr>
+          <a:lstStyle/>
+          <a:p>
+            <a:pPr>
+              <a:spcAft>
+                <a:spcPts val="800"/>
+              </a:spcAft>
+              <a:defRPr sz="1300" b="1">
                 <a:solidFill>
                   <a:srgbClr val="3EA6FF"/>
                 </a:solidFill>
               </a:defRPr>
             </a:pPr>
             <a:r>
-              <a:t>Sidebar.jsx (Collapsible Navigation)</a:t>
-            </a:r>
-          </a:p>
-          <a:p>
-            <a:pPr>
-              <a:spcBef>
-                <a:spcPts val="400"/>
-              </a:spcBef>
-              <a:defRPr sz="1100">
-                <a:solidFill>
-                  <a:srgbClr val="C8CDD7"/>
-                </a:solidFill>
-              </a:defRPr>
-            </a:pPr>
-            <a:r>
-              <a:t>Two-tier responsive navigation with full &amp; collapsed modes, direct YouTube channel links, and real-time active route styling.</a:t>
-            </a:r>
-          </a:p>
-        </p:txBody>
-      </p:sp>
-      <p:sp>
-        <p:nvSpPr>
-          <p:cNvPr id="8" name="Rounded Rectangle 7"/>
+              <a:t>Hooks &amp; Memory Lifecycle Layer</a:t>
+            </a:r>
+          </a:p>
+          <a:p>
+            <a:pPr>
+              <a:spcAft>
+                <a:spcPts val="600"/>
+              </a:spcAft>
+            </a:pPr>
+            <a:r>
+              <a:rPr b="1" sz="1050">
+                <a:solidFill>
+                  <a:srgbClr val="3EA6FF"/>
+                </a:solidFill>
+              </a:rPr>
+              <a:t>• </a:t>
+            </a:r>
+            <a:r>
+              <a:rPr b="1" sz="1000">
+                <a:solidFill>
+                  <a:srgbClr val="FFFFFF"/>
+                </a:solidFill>
+              </a:rPr>
+              <a:t>useState &amp; useEffect: </a:t>
+            </a:r>
+            <a:r>
+              <a:rPr sz="1000">
+                <a:solidFill>
+                  <a:srgbClr val="BEC3CD"/>
+                </a:solidFill>
+              </a:rPr>
+              <a:t>Controlled inputs, mount lifecycle triggers, and document title synchronization.</a:t>
+            </a:r>
+          </a:p>
+          <a:p>
+            <a:pPr>
+              <a:spcAft>
+                <a:spcPts val="600"/>
+              </a:spcAft>
+            </a:pPr>
+            <a:r>
+              <a:rPr b="1" sz="1050">
+                <a:solidFill>
+                  <a:srgbClr val="3EA6FF"/>
+                </a:solidFill>
+              </a:rPr>
+              <a:t>• </a:t>
+            </a:r>
+            <a:r>
+              <a:rPr b="1" sz="1000">
+                <a:solidFill>
+                  <a:srgbClr val="FFFFFF"/>
+                </a:solidFill>
+              </a:rPr>
+              <a:t>useRef Hook: </a:t>
+            </a:r>
+            <a:r>
+              <a:rPr sz="1000">
+                <a:solidFill>
+                  <a:srgbClr val="BEC3CD"/>
+                </a:solidFill>
+              </a:rPr>
+              <a:t>Mutable non-rendering container for DOM focus control and debounced listeners.</a:t>
+            </a:r>
+          </a:p>
+          <a:p>
+            <a:pPr>
+              <a:spcAft>
+                <a:spcPts val="600"/>
+              </a:spcAft>
+            </a:pPr>
+            <a:r>
+              <a:rPr b="1" sz="1050">
+                <a:solidFill>
+                  <a:srgbClr val="3EA6FF"/>
+                </a:solidFill>
+              </a:rPr>
+              <a:t>• </a:t>
+            </a:r>
+            <a:r>
+              <a:rPr b="1" sz="1000">
+                <a:solidFill>
+                  <a:srgbClr val="FFFFFF"/>
+                </a:solidFill>
+              </a:rPr>
+              <a:t>useParams &amp; useNavigate: </a:t>
+            </a:r>
+            <a:r>
+              <a:rPr sz="1000">
+                <a:solidFill>
+                  <a:srgbClr val="BEC3CD"/>
+                </a:solidFill>
+              </a:rPr>
+              <a:t>URL parameter extraction and programmatic navigation without page reloads.</a:t>
+            </a:r>
+          </a:p>
+        </p:txBody>
+      </p:sp>
+      <p:sp>
+        <p:nvSpPr>
+          <p:cNvPr id="11" name="Rounded Rectangle 10"/>
           <p:cNvSpPr/>
           <p:nvPr/>
         </p:nvSpPr>
         <p:spPr>
           <a:xfrm>
-            <a:off x="731520" y="3017520"/>
-            <a:ext cx="5257800" cy="1417320"/>
+            <a:off x="8046720" y="1371600"/>
+            <a:ext cx="3383280" cy="4663440"/>
           </a:xfrm>
           <a:prstGeom prst="roundRect">
             <a:avLst/>
@@ -4773,7 +7527,7 @@
           <a:solidFill>
             <a:srgbClr val="161922"/>
           </a:solidFill>
-          <a:ln>
+          <a:ln w="15240">
             <a:solidFill>
               <a:srgbClr val="2E3445"/>
             </a:solidFill>
@@ -4794,240 +7548,140 @@
           </a:fontRef>
         </p:style>
         <p:txBody>
-          <a:bodyPr rtlCol="0" anchor="ctr" lIns="228600" tIns="182880"/>
-          <a:lstStyle/>
-          <a:p>
-            <a:pPr algn="ctr">
-              <a:defRPr sz="1450" b="1">
-                <a:solidFill>
-                  <a:srgbClr val="FF0033"/>
+          <a:bodyPr rtlCol="0" anchor="ctr"/>
+          <a:lstStyle/>
+          <a:p>
+            <a:pPr algn="ctr"/>
+          </a:p>
+        </p:txBody>
+      </p:sp>
+      <p:sp>
+        <p:nvSpPr>
+          <p:cNvPr id="12" name="TextBox 11"/>
+          <p:cNvSpPr txBox="1"/>
+          <p:nvPr/>
+        </p:nvSpPr>
+        <p:spPr>
+          <a:xfrm>
+            <a:off x="8229600" y="1508760"/>
+            <a:ext cx="3017520" cy="4389120"/>
+          </a:xfrm>
+          <a:prstGeom prst="rect">
+            <a:avLst/>
+          </a:prstGeom>
+          <a:noFill/>
+        </p:spPr>
+        <p:txBody>
+          <a:bodyPr wrap="square">
+            <a:spAutoFit/>
+          </a:bodyPr>
+          <a:lstStyle/>
+          <a:p>
+            <a:pPr>
+              <a:spcAft>
+                <a:spcPts val="800"/>
+              </a:spcAft>
+              <a:defRPr sz="1300" b="1">
+                <a:solidFill>
+                  <a:srgbClr val="2BA640"/>
                 </a:solidFill>
               </a:defRPr>
             </a:pPr>
             <a:r>
-              <a:t>VideoCard.jsx (Feed Cards)</a:t>
-            </a:r>
-          </a:p>
-          <a:p>
-            <a:pPr>
-              <a:spcBef>
-                <a:spcPts val="400"/>
-              </a:spcBef>
-              <a:defRPr sz="1100">
-                <a:solidFill>
-                  <a:srgbClr val="C8CDD7"/>
-                </a:solidFill>
-              </a:defRPr>
-            </a:pPr>
-            <a:r>
-              <a:t>16:9 aspect-ratio cards with duration badges, verified channel badges, hover play overlays, and interactive Like/Subscribe toggles.</a:t>
-            </a:r>
-          </a:p>
-        </p:txBody>
-      </p:sp>
-      <p:sp>
-        <p:nvSpPr>
-          <p:cNvPr id="9" name="Rounded Rectangle 8"/>
-          <p:cNvSpPr/>
-          <p:nvPr/>
-        </p:nvSpPr>
-        <p:spPr>
-          <a:xfrm>
-            <a:off x="6172200" y="3017520"/>
-            <a:ext cx="5257800" cy="1417320"/>
-          </a:xfrm>
-          <a:prstGeom prst="roundRect">
-            <a:avLst/>
-          </a:prstGeom>
-          <a:solidFill>
-            <a:srgbClr val="161922"/>
-          </a:solidFill>
-          <a:ln>
-            <a:solidFill>
-              <a:srgbClr val="2E3445"/>
-            </a:solidFill>
-          </a:ln>
-        </p:spPr>
-        <p:style>
-          <a:lnRef idx="1">
-            <a:schemeClr val="accent1"/>
-          </a:lnRef>
-          <a:fillRef idx="3">
-            <a:schemeClr val="accent1"/>
-          </a:fillRef>
-          <a:effectRef idx="2">
-            <a:schemeClr val="accent1"/>
-          </a:effectRef>
-          <a:fontRef idx="minor">
-            <a:schemeClr val="lt1"/>
-          </a:fontRef>
-        </p:style>
-        <p:txBody>
-          <a:bodyPr rtlCol="0" anchor="ctr" lIns="228600" tIns="182880"/>
-          <a:lstStyle/>
-          <a:p>
-            <a:pPr algn="ctr">
-              <a:defRPr sz="1450" b="1">
-                <a:solidFill>
-                  <a:srgbClr val="FF0033"/>
-                </a:solidFill>
-              </a:defRPr>
-            </a:pPr>
-            <a:r>
-              <a:t>ShortsCard.jsx (Vertical Shorts)</a:t>
-            </a:r>
-          </a:p>
-          <a:p>
-            <a:pPr>
-              <a:spcBef>
-                <a:spcPts val="400"/>
-              </a:spcBef>
-              <a:defRPr sz="1100">
-                <a:solidFill>
-                  <a:srgbClr val="C8CDD7"/>
-                </a:solidFill>
-              </a:defRPr>
-            </a:pPr>
-            <a:r>
-              <a:t>Vertical 9:16 aspect-ratio cards displaying view counts, creator avatars, and dedicated YouTube Shorts launch handlers.</a:t>
-            </a:r>
-          </a:p>
-        </p:txBody>
-      </p:sp>
-      <p:sp>
-        <p:nvSpPr>
-          <p:cNvPr id="10" name="Rounded Rectangle 9"/>
-          <p:cNvSpPr/>
-          <p:nvPr/>
-        </p:nvSpPr>
-        <p:spPr>
-          <a:xfrm>
-            <a:off x="731520" y="4617720"/>
-            <a:ext cx="5257800" cy="1417320"/>
-          </a:xfrm>
-          <a:prstGeom prst="roundRect">
-            <a:avLst/>
-          </a:prstGeom>
-          <a:solidFill>
-            <a:srgbClr val="161922"/>
-          </a:solidFill>
-          <a:ln>
-            <a:solidFill>
-              <a:srgbClr val="2E3445"/>
-            </a:solidFill>
-          </a:ln>
-        </p:spPr>
-        <p:style>
-          <a:lnRef idx="1">
-            <a:schemeClr val="accent1"/>
-          </a:lnRef>
-          <a:fillRef idx="3">
-            <a:schemeClr val="accent1"/>
-          </a:fillRef>
-          <a:effectRef idx="2">
-            <a:schemeClr val="accent1"/>
-          </a:effectRef>
-          <a:fontRef idx="minor">
-            <a:schemeClr val="lt1"/>
-          </a:fontRef>
-        </p:style>
-        <p:txBody>
-          <a:bodyPr rtlCol="0" anchor="ctr" lIns="228600" tIns="182880"/>
-          <a:lstStyle/>
-          <a:p>
-            <a:pPr algn="ctr">
-              <a:defRPr sz="1450" b="1">
-                <a:solidFill>
-                  <a:srgbClr val="3EA6FF"/>
-                </a:solidFill>
-              </a:defRPr>
-            </a:pPr>
-            <a:r>
-              <a:t>CategoryChips.jsx (Filter Bar)</a:t>
-            </a:r>
-          </a:p>
-          <a:p>
-            <a:pPr>
-              <a:spcBef>
-                <a:spcPts val="400"/>
-              </a:spcBef>
-              <a:defRPr sz="1100">
-                <a:solidFill>
-                  <a:srgbClr val="C8CDD7"/>
-                </a:solidFill>
-              </a:defRPr>
-            </a:pPr>
-            <a:r>
-              <a:t>Horizontal chip bar allowing 1-click filtering across Coding, React, DSA, Gaming, Comedy, Music, and Entertainment.</a:t>
-            </a:r>
-          </a:p>
-        </p:txBody>
-      </p:sp>
-      <p:sp>
-        <p:nvSpPr>
-          <p:cNvPr id="11" name="Rounded Rectangle 10"/>
-          <p:cNvSpPr/>
-          <p:nvPr/>
-        </p:nvSpPr>
-        <p:spPr>
-          <a:xfrm>
-            <a:off x="6172200" y="4617720"/>
-            <a:ext cx="5257800" cy="1417320"/>
-          </a:xfrm>
-          <a:prstGeom prst="roundRect">
-            <a:avLst/>
-          </a:prstGeom>
-          <a:solidFill>
-            <a:srgbClr val="161922"/>
-          </a:solidFill>
-          <a:ln>
-            <a:solidFill>
-              <a:srgbClr val="2E3445"/>
-            </a:solidFill>
-          </a:ln>
-        </p:spPr>
-        <p:style>
-          <a:lnRef idx="1">
-            <a:schemeClr val="accent1"/>
-          </a:lnRef>
-          <a:fillRef idx="3">
-            <a:schemeClr val="accent1"/>
-          </a:fillRef>
-          <a:effectRef idx="2">
-            <a:schemeClr val="accent1"/>
-          </a:effectRef>
-          <a:fontRef idx="minor">
-            <a:schemeClr val="lt1"/>
-          </a:fontRef>
-        </p:style>
-        <p:txBody>
-          <a:bodyPr rtlCol="0" anchor="ctr" lIns="228600" tIns="182880"/>
-          <a:lstStyle/>
-          <a:p>
-            <a:pPr algn="ctr">
-              <a:defRPr sz="1450" b="1">
-                <a:solidFill>
-                  <a:srgbClr val="3EA6FF"/>
-                </a:solidFill>
-              </a:defRPr>
-            </a:pPr>
-            <a:r>
-              <a:t>Library Playlist Pages</a:t>
-            </a:r>
-          </a:p>
-          <a:p>
-            <a:pPr>
-              <a:spcBef>
-                <a:spcPts val="400"/>
-              </a:spcBef>
-              <a:defRPr sz="1100">
-                <a:solidFill>
-                  <a:srgbClr val="C8CDD7"/>
-                </a:solidFill>
-              </a:defRPr>
-            </a:pPr>
-            <a:r>
-              <a:t>Dedicated route pages for Subscriptions feed, Liked Videos auto-playlist, Watch Later queue, Watch History, and 404 handler.</a:t>
+              <a:t>State Persistence &amp; UX Bus</a:t>
+            </a:r>
+          </a:p>
+          <a:p>
+            <a:pPr>
+              <a:spcAft>
+                <a:spcPts val="600"/>
+              </a:spcAft>
+            </a:pPr>
+            <a:r>
+              <a:rPr b="1" sz="1050">
+                <a:solidFill>
+                  <a:srgbClr val="2BA640"/>
+                </a:solidFill>
+              </a:rPr>
+              <a:t>• </a:t>
+            </a:r>
+            <a:r>
+              <a:rPr b="1" sz="1000">
+                <a:solidFill>
+                  <a:srgbClr val="FFFFFF"/>
+                </a:solidFill>
+              </a:rPr>
+              <a:t>Context API (createContext): </a:t>
+            </a:r>
+            <a:r>
+              <a:rPr sz="1000">
+                <a:solidFill>
+                  <a:srgbClr val="BEC3CD"/>
+                </a:solidFill>
+              </a:rPr>
+              <a:t>Shared application state for library, history, subscriptions, and auth.</a:t>
+            </a:r>
+          </a:p>
+          <a:p>
+            <a:pPr>
+              <a:spcAft>
+                <a:spcPts val="600"/>
+              </a:spcAft>
+            </a:pPr>
+            <a:r>
+              <a:rPr b="1" sz="1050">
+                <a:solidFill>
+                  <a:srgbClr val="2BA640"/>
+                </a:solidFill>
+              </a:rPr>
+              <a:t>• </a:t>
+            </a:r>
+            <a:r>
+              <a:rPr b="1" sz="1000">
+                <a:solidFill>
+                  <a:srgbClr val="FFFFFF"/>
+                </a:solidFill>
+              </a:rPr>
+              <a:t>Browser LocalStorage: </a:t>
+            </a:r>
+            <a:r>
+              <a:rPr sz="1000">
+                <a:solidFill>
+                  <a:srgbClr val="BEC3CD"/>
+                </a:solidFill>
+              </a:rPr>
+              <a:t>Client-side JSON persistence ensuring data survives page refreshes and browser restarts.</a:t>
+            </a:r>
+          </a:p>
+          <a:p>
+            <a:pPr>
+              <a:spcAft>
+                <a:spcPts val="600"/>
+              </a:spcAft>
+            </a:pPr>
+            <a:r>
+              <a:rPr b="1" sz="1050">
+                <a:solidFill>
+                  <a:srgbClr val="2BA640"/>
+                </a:solidFill>
+              </a:rPr>
+              <a:t>• </a:t>
+            </a:r>
+            <a:r>
+              <a:rPr b="1" sz="1000">
+                <a:solidFill>
+                  <a:srgbClr val="FFFFFF"/>
+                </a:solidFill>
+              </a:rPr>
+              <a:t>react-toastify: </a:t>
+            </a:r>
+            <a:r>
+              <a:rPr sz="1000">
+                <a:solidFill>
+                  <a:srgbClr val="BEC3CD"/>
+                </a:solidFill>
+              </a:rPr>
+              <a:t>Non-blocking alert toasts recommended by course supervisor Mr. Shubham Kumar.</a:t>
             </a:r>
           </a:p>
         </p:txBody>
@@ -5105,7 +7759,7 @@
         <p:spPr>
           <a:xfrm>
             <a:off x="731520" y="365760"/>
-            <a:ext cx="457200" cy="54864"/>
+            <a:ext cx="365760" cy="54864"/>
           </a:xfrm>
           <a:prstGeom prst="rect">
             <a:avLst/>
@@ -5147,8 +7801,8 @@
         </p:nvSpPr>
         <p:spPr>
           <a:xfrm>
-            <a:off x="1280160" y="292608"/>
-            <a:ext cx="10149840" cy="274320"/>
+            <a:off x="1188720" y="292608"/>
+            <a:ext cx="10241280" cy="274320"/>
           </a:xfrm>
           <a:prstGeom prst="rect">
             <a:avLst/>
@@ -5156,20 +7810,20 @@
           <a:noFill/>
         </p:spPr>
         <p:txBody>
-          <a:bodyPr wrap="square">
+          <a:bodyPr wrap="none">
             <a:spAutoFit/>
           </a:bodyPr>
           <a:lstStyle/>
           <a:p>
             <a:pPr>
-              <a:defRPr sz="1050" b="1">
+              <a:defRPr sz="1000" b="1">
                 <a:solidFill>
                   <a:srgbClr val="3EA6FF"/>
                 </a:solidFill>
               </a:defRPr>
             </a:pPr>
             <a:r>
-              <a:t>GROUP G15  •  PROJECT ID: G15-PID-17 (P-17)  •  FRONT END ENGINEERING - II (25CSE0203)</a:t>
+              <a:t>GROUP G15  •  PROJECT ID: G15-PID-17 (P-17)  •  EVALUATION-II (25CSE0203)</a:t>
             </a:r>
           </a:p>
         </p:txBody>
@@ -5183,7 +7837,7 @@
         <p:spPr>
           <a:xfrm>
             <a:off x="731520" y="594360"/>
-            <a:ext cx="10728655" cy="640080"/>
+            <a:ext cx="10728655" cy="594360"/>
           </a:xfrm>
           <a:prstGeom prst="rect">
             <a:avLst/>
@@ -5191,34 +7845,69 @@
           <a:noFill/>
         </p:spPr>
         <p:txBody>
-          <a:bodyPr wrap="square">
+          <a:bodyPr wrap="none">
             <a:spAutoFit/>
           </a:bodyPr>
           <a:lstStyle/>
           <a:p>
             <a:pPr>
-              <a:defRPr sz="2300" b="1">
+              <a:defRPr sz="2100" b="1">
                 <a:solidFill>
                   <a:srgbClr val="FFFFFF"/>
                 </a:solidFill>
               </a:defRPr>
             </a:pPr>
             <a:r>
-              <a:t>Search Engine &amp; Word-Based Filtering Mechanism</a:t>
-            </a:r>
-          </a:p>
-        </p:txBody>
-      </p:sp>
-      <p:sp>
-        <p:nvSpPr>
-          <p:cNvPr id="6" name="Rounded Rectangle 5"/>
+              <a:t>Core Component Architecture &amp; Modularity</a:t>
+            </a:r>
+          </a:p>
+        </p:txBody>
+      </p:sp>
+      <p:sp>
+        <p:nvSpPr>
+          <p:cNvPr id="6" name="TextBox 5"/>
+          <p:cNvSpPr txBox="1"/>
+          <p:nvPr/>
+        </p:nvSpPr>
+        <p:spPr>
+          <a:xfrm>
+            <a:off x="731520" y="6309360"/>
+            <a:ext cx="10728655" cy="320040"/>
+          </a:xfrm>
+          <a:prstGeom prst="rect">
+            <a:avLst/>
+          </a:prstGeom>
+          <a:noFill/>
+        </p:spPr>
+        <p:txBody>
+          <a:bodyPr wrap="none">
+            <a:spAutoFit/>
+          </a:bodyPr>
+          <a:lstStyle/>
+          <a:p>
+            <a:pPr>
+              <a:defRPr sz="900">
+                <a:solidFill>
+                  <a:srgbClr val="7B8293"/>
+                </a:solidFill>
+              </a:defRPr>
+            </a:pPr>
+            <a:r>
+              <a:t>PheW TuBe: Video Streaming Platform (G15-PID-17)  |  Evaluation-II  |  Page 05</a:t>
+            </a:r>
+          </a:p>
+        </p:txBody>
+      </p:sp>
+      <p:sp>
+        <p:nvSpPr>
+          <p:cNvPr id="7" name="Rounded Rectangle 6"/>
           <p:cNvSpPr/>
           <p:nvPr/>
         </p:nvSpPr>
         <p:spPr>
           <a:xfrm>
-            <a:off x="731520" y="1417320"/>
-            <a:ext cx="5486400" cy="4892040"/>
+            <a:off x="731520" y="1371600"/>
+            <a:ext cx="5212080" cy="4663440"/>
           </a:xfrm>
           <a:prstGeom prst="roundRect">
             <a:avLst/>
@@ -5226,7 +7915,7 @@
           <a:solidFill>
             <a:srgbClr val="161922"/>
           </a:solidFill>
-          <a:ln>
+          <a:ln w="15240">
             <a:solidFill>
               <a:srgbClr val="2E3445"/>
             </a:solidFill>
@@ -5247,161 +7936,413 @@
           </a:fontRef>
         </p:style>
         <p:txBody>
-          <a:bodyPr rtlCol="0" anchor="ctr" lIns="320040" rIns="320040" tIns="274320"/>
-          <a:lstStyle/>
-          <a:p>
-            <a:pPr algn="ctr">
-              <a:defRPr sz="1700" b="1">
+          <a:bodyPr rtlCol="0" anchor="ctr"/>
+          <a:lstStyle/>
+          <a:p>
+            <a:pPr algn="ctr"/>
+          </a:p>
+        </p:txBody>
+      </p:sp>
+      <p:sp>
+        <p:nvSpPr>
+          <p:cNvPr id="8" name="TextBox 7"/>
+          <p:cNvSpPr txBox="1"/>
+          <p:nvPr/>
+        </p:nvSpPr>
+        <p:spPr>
+          <a:xfrm>
+            <a:off x="914400" y="1508760"/>
+            <a:ext cx="4846320" cy="4389120"/>
+          </a:xfrm>
+          <a:prstGeom prst="rect">
+            <a:avLst/>
+          </a:prstGeom>
+          <a:noFill/>
+        </p:spPr>
+        <p:txBody>
+          <a:bodyPr wrap="square">
+            <a:spAutoFit/>
+          </a:bodyPr>
+          <a:lstStyle/>
+          <a:p>
+            <a:pPr>
+              <a:spcAft>
+                <a:spcPts val="800"/>
+              </a:spcAft>
+              <a:defRPr sz="1300" b="1">
+                <a:solidFill>
+                  <a:srgbClr val="3EA6FF"/>
+                </a:solidFill>
+              </a:defRPr>
+            </a:pPr>
+            <a:r>
+              <a:t>Component Hierarchy &amp; Responsibility</a:t>
+            </a:r>
+          </a:p>
+          <a:p>
+            <a:pPr>
+              <a:spcAft>
+                <a:spcPts val="600"/>
+              </a:spcAft>
+            </a:pPr>
+            <a:r>
+              <a:rPr b="1" sz="1050">
+                <a:solidFill>
+                  <a:srgbClr val="3EA6FF"/>
+                </a:solidFill>
+              </a:rPr>
+              <a:t>• </a:t>
+            </a:r>
+            <a:r>
+              <a:rPr b="1" sz="1000">
+                <a:solidFill>
+                  <a:srgbClr val="FFFFFF"/>
+                </a:solidFill>
+              </a:rPr>
+              <a:t>&lt;AppProvider&gt; (Root Context): </a:t>
+            </a:r>
+            <a:r>
+              <a:rPr sz="1000">
+                <a:solidFill>
+                  <a:srgbClr val="BEC3CD"/>
+                </a:solidFill>
+              </a:rPr>
+              <a:t>Houses global state slices, reducer actions, and localStorage side effects.</a:t>
+            </a:r>
+          </a:p>
+          <a:p>
+            <a:pPr>
+              <a:spcAft>
+                <a:spcPts val="600"/>
+              </a:spcAft>
+            </a:pPr>
+            <a:r>
+              <a:rPr b="1" sz="1050">
+                <a:solidFill>
+                  <a:srgbClr val="3EA6FF"/>
+                </a:solidFill>
+              </a:rPr>
+              <a:t>• </a:t>
+            </a:r>
+            <a:r>
+              <a:rPr b="1" sz="1000">
+                <a:solidFill>
+                  <a:srgbClr val="FFFFFF"/>
+                </a:solidFill>
+              </a:rPr>
+              <a:t>&lt;Navbar&gt;: </a:t>
+            </a:r>
+            <a:r>
+              <a:rPr sz="1000">
+                <a:solidFill>
+                  <a:srgbClr val="BEC3CD"/>
+                </a:solidFill>
+              </a:rPr>
+              <a:t>Independent search bar with live auto-complete dropdown, microphone voice trigger, and auth modal.</a:t>
+            </a:r>
+          </a:p>
+          <a:p>
+            <a:pPr>
+              <a:spcAft>
+                <a:spcPts val="600"/>
+              </a:spcAft>
+            </a:pPr>
+            <a:r>
+              <a:rPr b="1" sz="1050">
+                <a:solidFill>
+                  <a:srgbClr val="3EA6FF"/>
+                </a:solidFill>
+              </a:rPr>
+              <a:t>• </a:t>
+            </a:r>
+            <a:r>
+              <a:rPr b="1" sz="1000">
+                <a:solidFill>
+                  <a:srgbClr val="FFFFFF"/>
+                </a:solidFill>
+              </a:rPr>
+              <a:t>&lt;Sidebar&gt; &amp; &lt;CategoryChips&gt;: </a:t>
+            </a:r>
+            <a:r>
+              <a:rPr sz="1000">
+                <a:solidFill>
+                  <a:srgbClr val="BEC3CD"/>
+                </a:solidFill>
+              </a:rPr>
+              <a:t>Two-way bound navigation and category filtering driving video feeds.</a:t>
+            </a:r>
+          </a:p>
+          <a:p>
+            <a:pPr>
+              <a:spcAft>
+                <a:spcPts val="600"/>
+              </a:spcAft>
+            </a:pPr>
+            <a:r>
+              <a:rPr b="1" sz="1050">
+                <a:solidFill>
+                  <a:srgbClr val="3EA6FF"/>
+                </a:solidFill>
+              </a:rPr>
+              <a:t>• </a:t>
+            </a:r>
+            <a:r>
+              <a:rPr b="1" sz="1000">
+                <a:solidFill>
+                  <a:srgbClr val="FFFFFF"/>
+                </a:solidFill>
+              </a:rPr>
+              <a:t>&lt;VideoCard&gt; &amp; &lt;ShortsCard&gt;: </a:t>
+            </a:r>
+            <a:r>
+              <a:rPr sz="1000">
+                <a:solidFill>
+                  <a:srgbClr val="BEC3CD"/>
+                </a:solidFill>
+              </a:rPr>
+              <a:t>Pure presentation components passing IDs to dynamic watch routes via navigate hooks.</a:t>
+            </a:r>
+          </a:p>
+          <a:p>
+            <a:pPr>
+              <a:spcAft>
+                <a:spcPts val="600"/>
+              </a:spcAft>
+            </a:pPr>
+            <a:r>
+              <a:rPr b="1" sz="1050">
+                <a:solidFill>
+                  <a:srgbClr val="3EA6FF"/>
+                </a:solidFill>
+              </a:rPr>
+              <a:t>• </a:t>
+            </a:r>
+            <a:r>
+              <a:rPr b="1" sz="1000">
+                <a:solidFill>
+                  <a:srgbClr val="FFFFFF"/>
+                </a:solidFill>
+              </a:rPr>
+              <a:t>&lt;WatchPage&gt;: </a:t>
+            </a:r>
+            <a:r>
+              <a:rPr sz="1000">
+                <a:solidFill>
+                  <a:srgbClr val="BEC3CD"/>
+                </a:solidFill>
+              </a:rPr>
+              <a:t>Master composite page integrating video player, channel actions, comments feed, and recommended sidebar.</a:t>
+            </a:r>
+          </a:p>
+        </p:txBody>
+      </p:sp>
+      <p:sp>
+        <p:nvSpPr>
+          <p:cNvPr id="9" name="Rounded Rectangle 8"/>
+          <p:cNvSpPr/>
+          <p:nvPr/>
+        </p:nvSpPr>
+        <p:spPr>
+          <a:xfrm>
+            <a:off x="6217920" y="1371600"/>
+            <a:ext cx="5212080" cy="4663440"/>
+          </a:xfrm>
+          <a:prstGeom prst="roundRect">
+            <a:avLst/>
+          </a:prstGeom>
+          <a:solidFill>
+            <a:srgbClr val="161922"/>
+          </a:solidFill>
+          <a:ln w="15240">
+            <a:solidFill>
+              <a:srgbClr val="2E3445"/>
+            </a:solidFill>
+          </a:ln>
+        </p:spPr>
+        <p:style>
+          <a:lnRef idx="1">
+            <a:schemeClr val="accent1"/>
+          </a:lnRef>
+          <a:fillRef idx="3">
+            <a:schemeClr val="accent1"/>
+          </a:fillRef>
+          <a:effectRef idx="2">
+            <a:schemeClr val="accent1"/>
+          </a:effectRef>
+          <a:fontRef idx="minor">
+            <a:schemeClr val="lt1"/>
+          </a:fontRef>
+        </p:style>
+        <p:txBody>
+          <a:bodyPr rtlCol="0" anchor="ctr"/>
+          <a:lstStyle/>
+          <a:p>
+            <a:pPr algn="ctr"/>
+          </a:p>
+        </p:txBody>
+      </p:sp>
+      <p:sp>
+        <p:nvSpPr>
+          <p:cNvPr id="10" name="TextBox 9"/>
+          <p:cNvSpPr txBox="1"/>
+          <p:nvPr/>
+        </p:nvSpPr>
+        <p:spPr>
+          <a:xfrm>
+            <a:off x="6400800" y="1508760"/>
+            <a:ext cx="4846320" cy="4389120"/>
+          </a:xfrm>
+          <a:prstGeom prst="rect">
+            <a:avLst/>
+          </a:prstGeom>
+          <a:noFill/>
+        </p:spPr>
+        <p:txBody>
+          <a:bodyPr wrap="square">
+            <a:spAutoFit/>
+          </a:bodyPr>
+          <a:lstStyle/>
+          <a:p>
+            <a:pPr>
+              <a:spcAft>
+                <a:spcPts val="800"/>
+              </a:spcAft>
+              <a:defRPr sz="1300" b="1">
                 <a:solidFill>
                   <a:srgbClr val="FF0033"/>
                 </a:solidFill>
               </a:defRPr>
             </a:pPr>
             <a:r>
-              <a:t>Controlled Search Engine Architecture</a:t>
-            </a:r>
-          </a:p>
-          <a:p>
-            <a:pPr>
-              <a:spcBef>
-                <a:spcPts val="1300"/>
-              </a:spcBef>
-              <a:defRPr b="1" sz="1200">
+              <a:t>Data Flow &amp; Isolation Architecture</a:t>
+            </a:r>
+          </a:p>
+          <a:p>
+            <a:pPr>
+              <a:spcAft>
+                <a:spcPts val="600"/>
+              </a:spcAft>
+            </a:pPr>
+            <a:r>
+              <a:rPr b="1" sz="1050">
+                <a:solidFill>
+                  <a:srgbClr val="FF0033"/>
+                </a:solidFill>
+              </a:rPr>
+              <a:t>• </a:t>
+            </a:r>
+            <a:r>
+              <a:rPr b="1" sz="1000">
                 <a:solidFill>
                   <a:srgbClr val="FFFFFF"/>
                 </a:solidFill>
-              </a:defRPr>
-            </a:pPr>
-            <a:r>
-              <a:t>• Controlled Input Binding (useState): </a:t>
-            </a:r>
-            <a:r>
-              <a:rPr b="0" sz="1150">
-                <a:solidFill>
-                  <a:srgbClr val="C8CDD7"/>
-                </a:solidFill>
-              </a:rPr>
-              <a:t>Search bar value is bound to searchQuery in App.jsx. Keystrokes trigger immediate re-renders without browser reload.</a:t>
-            </a:r>
-          </a:p>
-          <a:p>
-            <a:pPr>
-              <a:spcBef>
-                <a:spcPts val="1300"/>
-              </a:spcBef>
-              <a:defRPr b="1" sz="1200">
+              </a:rPr>
+              <a:t>Unidirectional Data Flow: </a:t>
+            </a:r>
+            <a:r>
+              <a:rPr sz="1000">
+                <a:solidFill>
+                  <a:srgbClr val="BEC3CD"/>
+                </a:solidFill>
+              </a:rPr>
+              <a:t>Context state descends via hooks; child actions bubble up via context methods (toggleLike, addComment).</a:t>
+            </a:r>
+          </a:p>
+          <a:p>
+            <a:pPr>
+              <a:spcAft>
+                <a:spcPts val="600"/>
+              </a:spcAft>
+            </a:pPr>
+            <a:r>
+              <a:rPr b="1" sz="1050">
+                <a:solidFill>
+                  <a:srgbClr val="FF0033"/>
+                </a:solidFill>
+              </a:rPr>
+              <a:t>• </a:t>
+            </a:r>
+            <a:r>
+              <a:rPr b="1" sz="1000">
                 <a:solidFill>
                   <a:srgbClr val="FFFFFF"/>
                 </a:solidFill>
-              </a:defRPr>
-            </a:pPr>
-            <a:r>
-              <a:t>• Word-Boundary Token Matching: </a:t>
-            </a:r>
-            <a:r>
-              <a:rPr b="0" sz="1150">
-                <a:solidFill>
-                  <a:srgbClr val="C8CDD7"/>
-                </a:solidFill>
-              </a:rPr>
-              <a:t>Evaluates keywords using word prefixes (.startsWith()) so queries like 'React' or 'GTA' match accurately without false substring hits.</a:t>
-            </a:r>
-          </a:p>
-          <a:p>
-            <a:pPr>
-              <a:spcBef>
-                <a:spcPts val="1300"/>
-              </a:spcBef>
-              <a:defRPr b="1" sz="1200">
+              </a:rPr>
+              <a:t>Prop-Drilling Elimination: </a:t>
+            </a:r>
+            <a:r>
+              <a:rPr sz="1000">
+                <a:solidFill>
+                  <a:srgbClr val="BEC3CD"/>
+                </a:solidFill>
+              </a:rPr>
+              <a:t>WatchPage, Navbar, and Sidebar independently consume useApp() without intermediary props.</a:t>
+            </a:r>
+          </a:p>
+          <a:p>
+            <a:pPr>
+              <a:spcAft>
+                <a:spcPts val="600"/>
+              </a:spcAft>
+            </a:pPr>
+            <a:r>
+              <a:rPr b="1" sz="1050">
+                <a:solidFill>
+                  <a:srgbClr val="FF0033"/>
+                </a:solidFill>
+              </a:rPr>
+              <a:t>• </a:t>
+            </a:r>
+            <a:r>
+              <a:rPr b="1" sz="1000">
                 <a:solidFill>
                   <a:srgbClr val="FFFFFF"/>
                 </a:solidFill>
-              </a:defRPr>
-            </a:pPr>
-            <a:r>
-              <a:t>• Dual Search &amp; Chip Synergy: </a:t>
-            </a:r>
-            <a:r>
-              <a:rPr b="0" sz="1150">
-                <a:solidFill>
-                  <a:srgbClr val="C8CDD7"/>
-                </a:solidFill>
-              </a:rPr>
-              <a:t>Combines free-text keyword search seamlessly with active Category Chips (e.g. Coding, Gaming, DSA) for high-precision filtering.</a:t>
-            </a:r>
-          </a:p>
-          <a:p>
-            <a:pPr>
-              <a:spcBef>
-                <a:spcPts val="1300"/>
-              </a:spcBef>
-              <a:defRPr b="1" sz="1200">
+              </a:rPr>
+              <a:t>Modular Route Segregation: </a:t>
+            </a:r>
+            <a:r>
+              <a:rPr sz="1000">
+                <a:solidFill>
+                  <a:srgbClr val="BEC3CD"/>
+                </a:solidFill>
+              </a:rPr>
+              <a:t>Distinct routes for /, /watch/:id, /shorts, /history, /liked, /watch-later, and /subscriptions.</a:t>
+            </a:r>
+          </a:p>
+          <a:p>
+            <a:pPr>
+              <a:spcAft>
+                <a:spcPts val="600"/>
+              </a:spcAft>
+            </a:pPr>
+            <a:r>
+              <a:rPr b="1" sz="1050">
+                <a:solidFill>
+                  <a:srgbClr val="FF0033"/>
+                </a:solidFill>
+              </a:rPr>
+              <a:t>• </a:t>
+            </a:r>
+            <a:r>
+              <a:rPr b="1" sz="1000">
                 <a:solidFill>
                   <a:srgbClr val="FFFFFF"/>
                 </a:solidFill>
-              </a:defRPr>
-            </a:pPr>
-            <a:r>
-              <a:t>• Dynamic Status Header: </a:t>
-            </a:r>
-            <a:r>
-              <a:rPr b="0" sz="1150">
-                <a:solidFill>
-                  <a:srgbClr val="C8CDD7"/>
-                </a:solidFill>
-              </a:rPr>
-              <a:t>Renders live query feedback (e.g. Results for 'React' - 2 videos found) with instant UI synchronization.</a:t>
-            </a:r>
-          </a:p>
-          <a:p>
-            <a:pPr>
-              <a:spcBef>
-                <a:spcPts val="1300"/>
-              </a:spcBef>
-              <a:defRPr b="1" sz="1200">
-                <a:solidFill>
-                  <a:srgbClr val="FFFFFF"/>
-                </a:solidFill>
-              </a:defRPr>
-            </a:pPr>
-            <a:r>
-              <a:t>• Zero-Match Fallback Handler: </a:t>
-            </a:r>
-            <a:r>
-              <a:rPr b="0" sz="1150">
-                <a:solidFill>
-                  <a:srgbClr val="C8CDD7"/>
-                </a:solidFill>
-              </a:rPr>
-              <a:t>Gracefully renders an empty-state message with a 1-click 'Reset Filter' button if zero videos match.</a:t>
-            </a:r>
-          </a:p>
-        </p:txBody>
-      </p:sp>
-      <p:pic>
-        <p:nvPicPr>
-          <p:cNvPr id="7" name="Picture 6" descr="ui_search_clean.png"/>
-          <p:cNvPicPr>
-            <a:picLocks noChangeAspect="1"/>
-          </p:cNvPicPr>
-          <p:nvPr/>
-        </p:nvPicPr>
-        <p:blipFill>
-          <a:blip r:embed="rId2"/>
-          <a:stretch>
-            <a:fillRect/>
-          </a:stretch>
-        </p:blipFill>
-        <p:spPr>
-          <a:xfrm>
-            <a:off x="6446520" y="1417320"/>
-            <a:ext cx="5010912" cy="4892040"/>
-          </a:xfrm>
-          <a:prstGeom prst="rect">
-            <a:avLst/>
-          </a:prstGeom>
-        </p:spPr>
-      </p:pic>
+              </a:rPr>
+              <a:t>Authentication Modal Isolation: </a:t>
+            </a:r>
+            <a:r>
+              <a:rPr sz="1000">
+                <a:solidFill>
+                  <a:srgbClr val="BEC3CD"/>
+                </a:solidFill>
+              </a:rPr>
+              <a:t>Client-side auth popup controlled by Context state, avoiding parent re-renders.</a:t>
+            </a:r>
+          </a:p>
+        </p:txBody>
+      </p:sp>
     </p:spTree>
   </p:cSld>
   <p:clrMapOvr>
@@ -5475,7 +8416,7 @@
         <p:spPr>
           <a:xfrm>
             <a:off x="731520" y="365760"/>
-            <a:ext cx="457200" cy="54864"/>
+            <a:ext cx="365760" cy="54864"/>
           </a:xfrm>
           <a:prstGeom prst="rect">
             <a:avLst/>
@@ -5517,8 +8458,8 @@
         </p:nvSpPr>
         <p:spPr>
           <a:xfrm>
-            <a:off x="1280160" y="292608"/>
-            <a:ext cx="10149840" cy="274320"/>
+            <a:off x="1188720" y="292608"/>
+            <a:ext cx="10241280" cy="274320"/>
           </a:xfrm>
           <a:prstGeom prst="rect">
             <a:avLst/>
@@ -5526,20 +8467,20 @@
           <a:noFill/>
         </p:spPr>
         <p:txBody>
-          <a:bodyPr wrap="square">
+          <a:bodyPr wrap="none">
             <a:spAutoFit/>
           </a:bodyPr>
           <a:lstStyle/>
           <a:p>
             <a:pPr>
-              <a:defRPr sz="1050" b="1">
+              <a:defRPr sz="1000" b="1">
                 <a:solidFill>
                   <a:srgbClr val="3EA6FF"/>
                 </a:solidFill>
               </a:defRPr>
             </a:pPr>
             <a:r>
-              <a:t>GROUP G15  •  PROJECT ID: G15-PID-17 (P-17)  •  FRONT END ENGINEERING - II (25CSE0203)</a:t>
+              <a:t>GROUP G15  •  PROJECT ID: G15-PID-17 (P-17)  •  EVALUATION-II (25CSE0203)</a:t>
             </a:r>
           </a:p>
         </p:txBody>
@@ -5553,7 +8494,7 @@
         <p:spPr>
           <a:xfrm>
             <a:off x="731520" y="594360"/>
-            <a:ext cx="10728655" cy="640080"/>
+            <a:ext cx="10728655" cy="594360"/>
           </a:xfrm>
           <a:prstGeom prst="rect">
             <a:avLst/>
@@ -5561,48 +8502,59 @@
           <a:noFill/>
         </p:spPr>
         <p:txBody>
-          <a:bodyPr wrap="square">
+          <a:bodyPr wrap="none">
             <a:spAutoFit/>
           </a:bodyPr>
           <a:lstStyle/>
           <a:p>
             <a:pPr>
-              <a:defRPr sz="2300" b="1">
+              <a:defRPr sz="2100" b="1">
                 <a:solidFill>
                   <a:srgbClr val="FFFFFF"/>
                 </a:solidFill>
               </a:defRPr>
             </a:pPr>
             <a:r>
-              <a:t>State Management &amp; Auto-Playlist Synchronization</a:t>
-            </a:r>
-          </a:p>
-        </p:txBody>
-      </p:sp>
-      <p:pic>
-        <p:nvPicPr>
-          <p:cNvPr id="6" name="Picture 5" descr="ui_sync_clean.png"/>
-          <p:cNvPicPr>
-            <a:picLocks noChangeAspect="1"/>
-          </p:cNvPicPr>
-          <p:nvPr/>
-        </p:nvPicPr>
-        <p:blipFill>
-          <a:blip r:embed="rId2"/>
-          <a:stretch>
-            <a:fillRect/>
-          </a:stretch>
-        </p:blipFill>
-        <p:spPr>
-          <a:xfrm>
-            <a:off x="731520" y="1417320"/>
-            <a:ext cx="5010912" cy="4892040"/>
+              <a:t>Dynamic Watch Route &amp; Embedded Video Engine (/watch/:id)</a:t>
+            </a:r>
+          </a:p>
+        </p:txBody>
+      </p:sp>
+      <p:sp>
+        <p:nvSpPr>
+          <p:cNvPr id="6" name="TextBox 5"/>
+          <p:cNvSpPr txBox="1"/>
+          <p:nvPr/>
+        </p:nvSpPr>
+        <p:spPr>
+          <a:xfrm>
+            <a:off x="731520" y="6309360"/>
+            <a:ext cx="10728655" cy="320040"/>
           </a:xfrm>
           <a:prstGeom prst="rect">
             <a:avLst/>
           </a:prstGeom>
-        </p:spPr>
-      </p:pic>
+          <a:noFill/>
+        </p:spPr>
+        <p:txBody>
+          <a:bodyPr wrap="none">
+            <a:spAutoFit/>
+          </a:bodyPr>
+          <a:lstStyle/>
+          <a:p>
+            <a:pPr>
+              <a:defRPr sz="900">
+                <a:solidFill>
+                  <a:srgbClr val="7B8293"/>
+                </a:solidFill>
+              </a:defRPr>
+            </a:pPr>
+            <a:r>
+              <a:t>PheW TuBe: Video Streaming Platform (G15-PID-17)  |  Evaluation-II  |  Page 06</a:t>
+            </a:r>
+          </a:p>
+        </p:txBody>
+      </p:sp>
       <p:sp>
         <p:nvSpPr>
           <p:cNvPr id="7" name="Rounded Rectangle 6"/>
@@ -5611,8 +8563,8 @@
         </p:nvSpPr>
         <p:spPr>
           <a:xfrm>
-            <a:off x="5989320" y="1417320"/>
-            <a:ext cx="5468112" cy="4892040"/>
+            <a:off x="731520" y="1371600"/>
+            <a:ext cx="3383280" cy="4663440"/>
           </a:xfrm>
           <a:prstGeom prst="roundRect">
             <a:avLst/>
@@ -5620,7 +8572,7 @@
           <a:solidFill>
             <a:srgbClr val="161922"/>
           </a:solidFill>
-          <a:ln>
+          <a:ln w="15240">
             <a:solidFill>
               <a:srgbClr val="2E3445"/>
             </a:solidFill>
@@ -5641,133 +8593,492 @@
           </a:fontRef>
         </p:style>
         <p:txBody>
-          <a:bodyPr rtlCol="0" anchor="ctr" lIns="320040" rIns="320040" tIns="274320"/>
-          <a:lstStyle/>
-          <a:p>
-            <a:pPr algn="ctr">
-              <a:defRPr sz="1700" b="1">
+          <a:bodyPr rtlCol="0" anchor="ctr"/>
+          <a:lstStyle/>
+          <a:p>
+            <a:pPr algn="ctr"/>
+          </a:p>
+        </p:txBody>
+      </p:sp>
+      <p:sp>
+        <p:nvSpPr>
+          <p:cNvPr id="8" name="TextBox 7"/>
+          <p:cNvSpPr txBox="1"/>
+          <p:nvPr/>
+        </p:nvSpPr>
+        <p:spPr>
+          <a:xfrm>
+            <a:off x="914400" y="1508760"/>
+            <a:ext cx="3017520" cy="4389120"/>
+          </a:xfrm>
+          <a:prstGeom prst="rect">
+            <a:avLst/>
+          </a:prstGeom>
+          <a:noFill/>
+        </p:spPr>
+        <p:txBody>
+          <a:bodyPr wrap="square">
+            <a:spAutoFit/>
+          </a:bodyPr>
+          <a:lstStyle/>
+          <a:p>
+            <a:pPr>
+              <a:spcAft>
+                <a:spcPts val="800"/>
+              </a:spcAft>
+              <a:defRPr sz="1300" b="1">
+                <a:solidFill>
+                  <a:srgbClr val="FF0033"/>
+                </a:solidFill>
+              </a:defRPr>
+            </a:pPr>
+            <a:r>
+              <a:t>URL Extraction via useParams()</a:t>
+            </a:r>
+          </a:p>
+          <a:p>
+            <a:pPr>
+              <a:spcAft>
+                <a:spcPts val="600"/>
+              </a:spcAft>
+            </a:pPr>
+            <a:r>
+              <a:rPr b="1" sz="1050">
+                <a:solidFill>
+                  <a:srgbClr val="FF0033"/>
+                </a:solidFill>
+              </a:rPr>
+              <a:t>• </a:t>
+            </a:r>
+            <a:r>
+              <a:rPr b="1" sz="1000">
+                <a:solidFill>
+                  <a:srgbClr val="FFFFFF"/>
+                </a:solidFill>
+              </a:rPr>
+              <a:t>Dynamic Route Pattern: </a:t>
+            </a:r>
+            <a:r>
+              <a:rPr sz="1000">
+                <a:solidFill>
+                  <a:srgbClr val="BEC3CD"/>
+                </a:solidFill>
+              </a:rPr>
+              <a:t>Configured in App.jsx as &lt;Route path="/watch/:id" element={&lt;WatchPage /&gt;} /&gt;.</a:t>
+            </a:r>
+          </a:p>
+          <a:p>
+            <a:pPr>
+              <a:spcAft>
+                <a:spcPts val="600"/>
+              </a:spcAft>
+            </a:pPr>
+            <a:r>
+              <a:rPr b="1" sz="1050">
+                <a:solidFill>
+                  <a:srgbClr val="FF0033"/>
+                </a:solidFill>
+              </a:rPr>
+              <a:t>• </a:t>
+            </a:r>
+            <a:r>
+              <a:rPr b="1" sz="1000">
+                <a:solidFill>
+                  <a:srgbClr val="FFFFFF"/>
+                </a:solidFill>
+              </a:rPr>
+              <a:t>Runtime Extraction: </a:t>
+            </a:r>
+            <a:r>
+              <a:rPr sz="1000">
+                <a:solidFill>
+                  <a:srgbClr val="BEC3CD"/>
+                </a:solidFill>
+              </a:rPr>
+              <a:t>const { id } = useParams() instantly queries dataset without page reloads.</a:t>
+            </a:r>
+          </a:p>
+          <a:p>
+            <a:pPr>
+              <a:spcAft>
+                <a:spcPts val="600"/>
+              </a:spcAft>
+            </a:pPr>
+            <a:r>
+              <a:rPr b="1" sz="1050">
+                <a:solidFill>
+                  <a:srgbClr val="FF0033"/>
+                </a:solidFill>
+              </a:rPr>
+              <a:t>• </a:t>
+            </a:r>
+            <a:r>
+              <a:rPr b="1" sz="1000">
+                <a:solidFill>
+                  <a:srgbClr val="FFFFFF"/>
+                </a:solidFill>
+              </a:rPr>
+              <a:t>Graceful Fallback: </a:t>
+            </a:r>
+            <a:r>
+              <a:rPr sz="1000">
+                <a:solidFill>
+                  <a:srgbClr val="BEC3CD"/>
+                </a:solidFill>
+              </a:rPr>
+              <a:t>Fallback screen renders with redirect button if invalid or non-existent video ID is supplied.</a:t>
+            </a:r>
+          </a:p>
+        </p:txBody>
+      </p:sp>
+      <p:sp>
+        <p:nvSpPr>
+          <p:cNvPr id="9" name="Rounded Rectangle 8"/>
+          <p:cNvSpPr/>
+          <p:nvPr/>
+        </p:nvSpPr>
+        <p:spPr>
+          <a:xfrm>
+            <a:off x="4389120" y="1371600"/>
+            <a:ext cx="3383280" cy="4663440"/>
+          </a:xfrm>
+          <a:prstGeom prst="roundRect">
+            <a:avLst/>
+          </a:prstGeom>
+          <a:solidFill>
+            <a:srgbClr val="161922"/>
+          </a:solidFill>
+          <a:ln w="15240">
+            <a:solidFill>
+              <a:srgbClr val="2E3445"/>
+            </a:solidFill>
+          </a:ln>
+        </p:spPr>
+        <p:style>
+          <a:lnRef idx="1">
+            <a:schemeClr val="accent1"/>
+          </a:lnRef>
+          <a:fillRef idx="3">
+            <a:schemeClr val="accent1"/>
+          </a:fillRef>
+          <a:effectRef idx="2">
+            <a:schemeClr val="accent1"/>
+          </a:effectRef>
+          <a:fontRef idx="minor">
+            <a:schemeClr val="lt1"/>
+          </a:fontRef>
+        </p:style>
+        <p:txBody>
+          <a:bodyPr rtlCol="0" anchor="ctr"/>
+          <a:lstStyle/>
+          <a:p>
+            <a:pPr algn="ctr"/>
+          </a:p>
+        </p:txBody>
+      </p:sp>
+      <p:sp>
+        <p:nvSpPr>
+          <p:cNvPr id="10" name="TextBox 9"/>
+          <p:cNvSpPr txBox="1"/>
+          <p:nvPr/>
+        </p:nvSpPr>
+        <p:spPr>
+          <a:xfrm>
+            <a:off x="4572000" y="1508760"/>
+            <a:ext cx="3017520" cy="4389120"/>
+          </a:xfrm>
+          <a:prstGeom prst="rect">
+            <a:avLst/>
+          </a:prstGeom>
+          <a:noFill/>
+        </p:spPr>
+        <p:txBody>
+          <a:bodyPr wrap="square">
+            <a:spAutoFit/>
+          </a:bodyPr>
+          <a:lstStyle/>
+          <a:p>
+            <a:pPr>
+              <a:spcAft>
+                <a:spcPts val="800"/>
+              </a:spcAft>
+              <a:defRPr sz="1300" b="1">
                 <a:solidFill>
                   <a:srgbClr val="3EA6FF"/>
                 </a:solidFill>
               </a:defRPr>
             </a:pPr>
             <a:r>
-              <a:t>Reactive State Flow Across Playlists</a:t>
-            </a:r>
-          </a:p>
-          <a:p>
-            <a:pPr>
-              <a:spcBef>
-                <a:spcPts val="1300"/>
-              </a:spcBef>
-              <a:defRPr b="1" sz="1200">
+              <a:t>Embedded 16:9 Streaming Engine</a:t>
+            </a:r>
+          </a:p>
+          <a:p>
+            <a:pPr>
+              <a:spcAft>
+                <a:spcPts val="600"/>
+              </a:spcAft>
+            </a:pPr>
+            <a:r>
+              <a:rPr b="1" sz="1050">
+                <a:solidFill>
+                  <a:srgbClr val="3EA6FF"/>
+                </a:solidFill>
+              </a:rPr>
+              <a:t>• </a:t>
+            </a:r>
+            <a:r>
+              <a:rPr b="1" sz="1000">
                 <a:solidFill>
                   <a:srgbClr val="FFFFFF"/>
                 </a:solidFill>
+              </a:rPr>
+              <a:t>Native YouTube Embed: </a:t>
+            </a:r>
+            <a:r>
+              <a:rPr sz="1000">
+                <a:solidFill>
+                  <a:srgbClr val="BEC3CD"/>
+                </a:solidFill>
+              </a:rPr>
+              <a:t>Embeds legitimate YouTube stream IDs with autoplay, picture-in-picture, and fullscreen flags.</a:t>
+            </a:r>
+          </a:p>
+          <a:p>
+            <a:pPr>
+              <a:spcAft>
+                <a:spcPts val="600"/>
+              </a:spcAft>
+            </a:pPr>
+            <a:r>
+              <a:rPr b="1" sz="1050">
+                <a:solidFill>
+                  <a:srgbClr val="3EA6FF"/>
+                </a:solidFill>
+              </a:rPr>
+              <a:t>• </a:t>
+            </a:r>
+            <a:r>
+              <a:rPr b="1" sz="1000">
+                <a:solidFill>
+                  <a:srgbClr val="FFFFFF"/>
+                </a:solidFill>
+              </a:rPr>
+              <a:t>Auto-Scroll on Switch: </a:t>
+            </a:r>
+            <a:r>
+              <a:rPr sz="1000">
+                <a:solidFill>
+                  <a:srgbClr val="BEC3CD"/>
+                </a:solidFill>
+              </a:rPr>
+              <a:t>window.scrollTo(0, 0) fires in useEffect on [id] change for smooth navigation.</a:t>
+            </a:r>
+          </a:p>
+          <a:p>
+            <a:pPr>
+              <a:spcAft>
+                <a:spcPts val="600"/>
+              </a:spcAft>
+            </a:pPr>
+            <a:r>
+              <a:rPr b="1" sz="1050">
+                <a:solidFill>
+                  <a:srgbClr val="3EA6FF"/>
+                </a:solidFill>
+              </a:rPr>
+              <a:t>• </a:t>
+            </a:r>
+            <a:r>
+              <a:rPr b="1" sz="1000">
+                <a:solidFill>
+                  <a:srgbClr val="FFFFFF"/>
+                </a:solidFill>
+              </a:rPr>
+              <a:t>History Auto-Recording: </a:t>
+            </a:r>
+            <a:r>
+              <a:rPr sz="1000">
+                <a:solidFill>
+                  <a:srgbClr val="BEC3CD"/>
+                </a:solidFill>
+              </a:rPr>
+              <a:t>Automatically pushes viewed video into persistent Watch History via Context API.</a:t>
+            </a:r>
+          </a:p>
+        </p:txBody>
+      </p:sp>
+      <p:sp>
+        <p:nvSpPr>
+          <p:cNvPr id="11" name="Rounded Rectangle 10"/>
+          <p:cNvSpPr/>
+          <p:nvPr/>
+        </p:nvSpPr>
+        <p:spPr>
+          <a:xfrm>
+            <a:off x="8046720" y="1371600"/>
+            <a:ext cx="3383280" cy="4663440"/>
+          </a:xfrm>
+          <a:prstGeom prst="roundRect">
+            <a:avLst/>
+          </a:prstGeom>
+          <a:solidFill>
+            <a:srgbClr val="161922"/>
+          </a:solidFill>
+          <a:ln w="15240">
+            <a:solidFill>
+              <a:srgbClr val="2E3445"/>
+            </a:solidFill>
+          </a:ln>
+        </p:spPr>
+        <p:style>
+          <a:lnRef idx="1">
+            <a:schemeClr val="accent1"/>
+          </a:lnRef>
+          <a:fillRef idx="3">
+            <a:schemeClr val="accent1"/>
+          </a:fillRef>
+          <a:effectRef idx="2">
+            <a:schemeClr val="accent1"/>
+          </a:effectRef>
+          <a:fontRef idx="minor">
+            <a:schemeClr val="lt1"/>
+          </a:fontRef>
+        </p:style>
+        <p:txBody>
+          <a:bodyPr rtlCol="0" anchor="ctr"/>
+          <a:lstStyle/>
+          <a:p>
+            <a:pPr algn="ctr"/>
+          </a:p>
+        </p:txBody>
+      </p:sp>
+      <p:sp>
+        <p:nvSpPr>
+          <p:cNvPr id="12" name="TextBox 11"/>
+          <p:cNvSpPr txBox="1"/>
+          <p:nvPr/>
+        </p:nvSpPr>
+        <p:spPr>
+          <a:xfrm>
+            <a:off x="8229600" y="1508760"/>
+            <a:ext cx="3017520" cy="4389120"/>
+          </a:xfrm>
+          <a:prstGeom prst="rect">
+            <a:avLst/>
+          </a:prstGeom>
+          <a:noFill/>
+        </p:spPr>
+        <p:txBody>
+          <a:bodyPr wrap="square">
+            <a:spAutoFit/>
+          </a:bodyPr>
+          <a:lstStyle/>
+          <a:p>
+            <a:pPr>
+              <a:spcAft>
+                <a:spcPts val="800"/>
+              </a:spcAft>
+              <a:defRPr sz="1300" b="1">
+                <a:solidFill>
+                  <a:srgbClr val="2BA640"/>
+                </a:solidFill>
               </a:defRPr>
             </a:pPr>
             <a:r>
-              <a:t>• Centralized State Hub (App.jsx): </a:t>
-            </a:r>
-            <a:r>
-              <a:rPr b="0" sz="1150">
-                <a:solidFill>
-                  <a:srgbClr val="C8CDD7"/>
-                </a:solidFill>
-              </a:rPr>
-              <a:t>Global states (likedVideoIds, subscribedChannels, searchQuery) live at root level and pass to components via props.</a:t>
-            </a:r>
-          </a:p>
-          <a:p>
-            <a:pPr>
-              <a:spcBef>
-                <a:spcPts val="1300"/>
-              </a:spcBef>
-              <a:defRPr b="1" sz="1200">
+              <a:t>Up-Next Recommendation Engine</a:t>
+            </a:r>
+          </a:p>
+          <a:p>
+            <a:pPr>
+              <a:spcAft>
+                <a:spcPts val="600"/>
+              </a:spcAft>
+            </a:pPr>
+            <a:r>
+              <a:rPr b="1" sz="1050">
+                <a:solidFill>
+                  <a:srgbClr val="2BA640"/>
+                </a:solidFill>
+              </a:rPr>
+              <a:t>• </a:t>
+            </a:r>
+            <a:r>
+              <a:rPr b="1" sz="1000">
                 <a:solidFill>
                   <a:srgbClr val="FFFFFF"/>
                 </a:solidFill>
-              </a:defRPr>
-            </a:pPr>
-            <a:r>
-              <a:t>• Instant Liked Videos Sync (/liked): </a:t>
-            </a:r>
-            <a:r>
-              <a:rPr b="0" sz="1150">
-                <a:solidFill>
-                  <a:srgbClr val="C8CDD7"/>
-                </a:solidFill>
-              </a:rPr>
-              <a:t>Clicking Like on any Video or Short immediately updates likedVideoIds state and updates the Liked Videos playlist view in real time.</a:t>
-            </a:r>
-          </a:p>
-          <a:p>
-            <a:pPr>
-              <a:spcBef>
-                <a:spcPts val="1300"/>
-              </a:spcBef>
-              <a:defRPr b="1" sz="1200">
+              </a:rPr>
+              <a:t>Category-Aware Sidebar: </a:t>
+            </a:r>
+            <a:r>
+              <a:rPr sz="1000">
+                <a:solidFill>
+                  <a:srgbClr val="BEC3CD"/>
+                </a:solidFill>
+              </a:rPr>
+              <a:t>Automatically filters catalog to present related videos in right-hand column.</a:t>
+            </a:r>
+          </a:p>
+          <a:p>
+            <a:pPr>
+              <a:spcAft>
+                <a:spcPts val="600"/>
+              </a:spcAft>
+            </a:pPr>
+            <a:r>
+              <a:rPr b="1" sz="1050">
+                <a:solidFill>
+                  <a:srgbClr val="2BA640"/>
+                </a:solidFill>
+              </a:rPr>
+              <a:t>• </a:t>
+            </a:r>
+            <a:r>
+              <a:rPr b="1" sz="1000">
                 <a:solidFill>
                   <a:srgbClr val="FFFFFF"/>
                 </a:solidFill>
-              </a:defRPr>
-            </a:pPr>
-            <a:r>
-              <a:t>• Live Subscriptions Sync (/subscriptions): </a:t>
-            </a:r>
-            <a:r>
-              <a:rPr b="0" sz="1150">
-                <a:solidFill>
-                  <a:srgbClr val="C8CDD7"/>
-                </a:solidFill>
-              </a:rPr>
-              <a:t>Subscribing to creators in Sidebar or on Cards updates subscribedChannels, instantly filtering the Subscriptions feed.</a:t>
-            </a:r>
-          </a:p>
-          <a:p>
-            <a:pPr>
-              <a:spcBef>
-                <a:spcPts val="1300"/>
-              </a:spcBef>
-              <a:defRPr b="1" sz="1200">
+              </a:rPr>
+              <a:t>Seamless Swap: </a:t>
+            </a:r>
+            <a:r>
+              <a:rPr sz="1000">
+                <a:solidFill>
+                  <a:srgbClr val="BEC3CD"/>
+                </a:solidFill>
+              </a:rPr>
+              <a:t>Clicking recommendation triggers useNavigate('/watch/' + nextId) instantly swapping player state.</a:t>
+            </a:r>
+          </a:p>
+          <a:p>
+            <a:pPr>
+              <a:spcAft>
+                <a:spcPts val="600"/>
+              </a:spcAft>
+            </a:pPr>
+            <a:r>
+              <a:rPr b="1" sz="1050">
+                <a:solidFill>
+                  <a:srgbClr val="2BA640"/>
+                </a:solidFill>
+              </a:rPr>
+              <a:t>• </a:t>
+            </a:r>
+            <a:r>
+              <a:rPr b="1" sz="1000">
                 <a:solidFill>
                   <a:srgbClr val="FFFFFF"/>
                 </a:solidFill>
-              </a:defRPr>
-            </a:pPr>
-            <a:r>
-              <a:t>• Cross-Route State Persistence: </a:t>
-            </a:r>
-            <a:r>
-              <a:rPr b="0" sz="1150">
-                <a:solidFill>
-                  <a:srgbClr val="C8CDD7"/>
-                </a:solidFill>
-              </a:rPr>
-              <a:t>Interactions remain consistent when navigating between Home, Shorts, Subscriptions, Liked, and History without data loss.</a:t>
-            </a:r>
-          </a:p>
-          <a:p>
-            <a:pPr>
-              <a:spcBef>
-                <a:spcPts val="1300"/>
-              </a:spcBef>
-              <a:defRPr b="1" sz="1200">
-                <a:solidFill>
-                  <a:srgbClr val="FFFFFF"/>
-                </a:solidFill>
-              </a:defRPr>
-            </a:pPr>
-            <a:r>
-              <a:t>• Optimized Virtual DOM Renders: </a:t>
-            </a:r>
-            <a:r>
-              <a:rPr b="0" sz="1150">
-                <a:solidFill>
-                  <a:srgbClr val="C8CDD7"/>
-                </a:solidFill>
-              </a:rPr>
-              <a:t>React list keys ensure only modified cards re-render, maintaining 60 FPS UI performance.</a:t>
+              </a:rPr>
+              <a:t>Interactive Action Bar: </a:t>
+            </a:r>
+            <a:r>
+              <a:rPr sz="1000">
+                <a:solidFill>
+                  <a:srgbClr val="BEC3CD"/>
+                </a:solidFill>
+              </a:rPr>
+              <a:t>Interactive Like, Watch Later, and Clipboard Share with instant toast feedback.</a:t>
             </a:r>
           </a:p>
         </p:txBody>
@@ -5845,7 +9156,7 @@
         <p:spPr>
           <a:xfrm>
             <a:off x="731520" y="365760"/>
-            <a:ext cx="457200" cy="54864"/>
+            <a:ext cx="365760" cy="54864"/>
           </a:xfrm>
           <a:prstGeom prst="rect">
             <a:avLst/>
@@ -5887,8 +9198,8 @@
         </p:nvSpPr>
         <p:spPr>
           <a:xfrm>
-            <a:off x="1280160" y="292608"/>
-            <a:ext cx="10149840" cy="274320"/>
+            <a:off x="1188720" y="292608"/>
+            <a:ext cx="10241280" cy="274320"/>
           </a:xfrm>
           <a:prstGeom prst="rect">
             <a:avLst/>
@@ -5896,20 +9207,20 @@
           <a:noFill/>
         </p:spPr>
         <p:txBody>
-          <a:bodyPr wrap="square">
+          <a:bodyPr wrap="none">
             <a:spAutoFit/>
           </a:bodyPr>
           <a:lstStyle/>
           <a:p>
             <a:pPr>
-              <a:defRPr sz="1050" b="1">
+              <a:defRPr sz="1000" b="1">
                 <a:solidFill>
                   <a:srgbClr val="3EA6FF"/>
                 </a:solidFill>
               </a:defRPr>
             </a:pPr>
             <a:r>
-              <a:t>GROUP G15  •  PROJECT ID: G15-PID-17 (P-17)  •  FRONT END ENGINEERING - II (25CSE0203)</a:t>
+              <a:t>GROUP G15  •  PROJECT ID: G15-PID-17 (P-17)  •  EVALUATION-II (25CSE0203)</a:t>
             </a:r>
           </a:p>
         </p:txBody>
@@ -5923,7 +9234,7 @@
         <p:spPr>
           <a:xfrm>
             <a:off x="731520" y="594360"/>
-            <a:ext cx="10728655" cy="640080"/>
+            <a:ext cx="10728655" cy="594360"/>
           </a:xfrm>
           <a:prstGeom prst="rect">
             <a:avLst/>
@@ -5931,34 +9242,69 @@
           <a:noFill/>
         </p:spPr>
         <p:txBody>
-          <a:bodyPr wrap="square">
+          <a:bodyPr wrap="none">
             <a:spAutoFit/>
           </a:bodyPr>
           <a:lstStyle/>
           <a:p>
             <a:pPr>
-              <a:defRPr sz="2300" b="1">
+              <a:defRPr sz="2100" b="1">
                 <a:solidFill>
                   <a:srgbClr val="FFFFFF"/>
                 </a:solidFill>
               </a:defRPr>
             </a:pPr>
             <a:r>
-              <a:t>Creator Ecosystem &amp; Real Media Integration</a:t>
-            </a:r>
-          </a:p>
-        </p:txBody>
-      </p:sp>
-      <p:sp>
-        <p:nvSpPr>
-          <p:cNvPr id="6" name="Rounded Rectangle 5"/>
+              <a:t>Interactive Comments System with useRef &amp; Dynamic Sorting</a:t>
+            </a:r>
+          </a:p>
+        </p:txBody>
+      </p:sp>
+      <p:sp>
+        <p:nvSpPr>
+          <p:cNvPr id="6" name="TextBox 5"/>
+          <p:cNvSpPr txBox="1"/>
+          <p:nvPr/>
+        </p:nvSpPr>
+        <p:spPr>
+          <a:xfrm>
+            <a:off x="731520" y="6309360"/>
+            <a:ext cx="10728655" cy="320040"/>
+          </a:xfrm>
+          <a:prstGeom prst="rect">
+            <a:avLst/>
+          </a:prstGeom>
+          <a:noFill/>
+        </p:spPr>
+        <p:txBody>
+          <a:bodyPr wrap="none">
+            <a:spAutoFit/>
+          </a:bodyPr>
+          <a:lstStyle/>
+          <a:p>
+            <a:pPr>
+              <a:defRPr sz="900">
+                <a:solidFill>
+                  <a:srgbClr val="7B8293"/>
+                </a:solidFill>
+              </a:defRPr>
+            </a:pPr>
+            <a:r>
+              <a:t>PheW TuBe: Video Streaming Platform (G15-PID-17)  |  Evaluation-II  |  Page 07</a:t>
+            </a:r>
+          </a:p>
+        </p:txBody>
+      </p:sp>
+      <p:sp>
+        <p:nvSpPr>
+          <p:cNvPr id="7" name="Rounded Rectangle 6"/>
           <p:cNvSpPr/>
           <p:nvPr/>
         </p:nvSpPr>
         <p:spPr>
           <a:xfrm>
-            <a:off x="731520" y="1417320"/>
-            <a:ext cx="5257800" cy="2240280"/>
+            <a:off x="731520" y="1371600"/>
+            <a:ext cx="5212080" cy="4663440"/>
           </a:xfrm>
           <a:prstGeom prst="roundRect">
             <a:avLst/>
@@ -5966,7 +9312,7 @@
           <a:solidFill>
             <a:srgbClr val="161922"/>
           </a:solidFill>
-          <a:ln>
+          <a:ln w="15240">
             <a:solidFill>
               <a:srgbClr val="2E3445"/>
             </a:solidFill>
@@ -5994,30 +9340,6 @@
           </a:p>
         </p:txBody>
       </p:sp>
-      <p:pic>
-        <p:nvPicPr>
-          <p:cNvPr id="7" name="Picture 6" descr="mrbeast_island.png"/>
-          <p:cNvPicPr>
-            <a:picLocks noChangeAspect="1"/>
-          </p:cNvPicPr>
-          <p:nvPr/>
-        </p:nvPicPr>
-        <p:blipFill>
-          <a:blip r:embed="rId2"/>
-          <a:stretch>
-            <a:fillRect/>
-          </a:stretch>
-        </p:blipFill>
-        <p:spPr>
-          <a:xfrm>
-            <a:off x="868680" y="1737360"/>
-            <a:ext cx="2331720" cy="1308038"/>
-          </a:xfrm>
-          <a:prstGeom prst="rect">
-            <a:avLst/>
-          </a:prstGeom>
-        </p:spPr>
-      </p:pic>
       <p:sp>
         <p:nvSpPr>
           <p:cNvPr id="8" name="TextBox 7"/>
@@ -6026,8 +9348,8 @@
         </p:nvSpPr>
         <p:spPr>
           <a:xfrm>
-            <a:off x="3337560" y="1600200"/>
-            <a:ext cx="2514600" cy="1920240"/>
+            <a:off x="914400" y="1508760"/>
+            <a:ext cx="4846320" cy="4389120"/>
           </a:xfrm>
           <a:prstGeom prst="rect">
             <a:avLst/>
@@ -6041,44 +9363,141 @@
           <a:lstStyle/>
           <a:p>
             <a:pPr>
-              <a:defRPr sz="1350" b="1">
+              <a:spcAft>
+                <a:spcPts val="800"/>
+              </a:spcAft>
+              <a:defRPr sz="1300" b="1">
                 <a:solidFill>
                   <a:srgbClr val="FF0033"/>
                 </a:solidFill>
               </a:defRPr>
             </a:pPr>
             <a:r>
-              <a:t>MrBeast (516M Subs)</a:t>
-            </a:r>
-          </a:p>
-          <a:p>
-            <a:pPr>
-              <a:spcBef>
-                <a:spcPts val="400"/>
-              </a:spcBef>
-              <a:defRPr sz="1050">
+              <a:t>Targeted DOM Access via useRef Hook</a:t>
+            </a:r>
+          </a:p>
+          <a:p>
+            <a:pPr>
+              <a:spcAft>
+                <a:spcPts val="600"/>
+              </a:spcAft>
+            </a:pPr>
+            <a:r>
+              <a:rPr b="1" sz="1050">
+                <a:solidFill>
+                  <a:srgbClr val="FF0033"/>
+                </a:solidFill>
+              </a:rPr>
+              <a:t>• </a:t>
+            </a:r>
+            <a:r>
+              <a:rPr b="1" sz="1000">
                 <a:solidFill>
                   <a:srgbClr val="FFFFFF"/>
                 </a:solidFill>
-              </a:defRPr>
-            </a:pPr>
-            <a:r>
-              <a:t>Featured: $1 vs $250M Private Island &amp; 7 Days At Sea</a:t>
-            </a:r>
-          </a:p>
-          <a:p>
-            <a:pPr>
-              <a:spcBef>
-                <a:spcPts val="400"/>
-              </a:spcBef>
-              <a:defRPr sz="950">
-                <a:solidFill>
-                  <a:srgbClr val="C8CDD7"/>
-                </a:solidFill>
-              </a:defRPr>
-            </a:pPr>
-            <a:r>
-              <a:t>Direct external YouTube watch &amp; channel links launched safely via window.open(url, '_blank').</a:t>
+              </a:rPr>
+              <a:t>Direct Input Referencing: </a:t>
+            </a:r>
+            <a:r>
+              <a:rPr sz="1000">
+                <a:solidFill>
+                  <a:srgbClr val="BEC3CD"/>
+                </a:solidFill>
+              </a:rPr>
+              <a:t>Initialized via const commentInputRef = useRef(null) and bound to input element.</a:t>
+            </a:r>
+          </a:p>
+          <a:p>
+            <a:pPr>
+              <a:spcAft>
+                <a:spcPts val="600"/>
+              </a:spcAft>
+            </a:pPr>
+            <a:r>
+              <a:rPr b="1" sz="1050">
+                <a:solidFill>
+                  <a:srgbClr val="FF0033"/>
+                </a:solidFill>
+              </a:rPr>
+              <a:t>• </a:t>
+            </a:r>
+            <a:r>
+              <a:rPr b="1" sz="1000">
+                <a:solidFill>
+                  <a:srgbClr val="FFFFFF"/>
+                </a:solidFill>
+              </a:rPr>
+              <a:t>Programmatic Focus: </a:t>
+            </a:r>
+            <a:r>
+              <a:rPr sz="1000">
+                <a:solidFill>
+                  <a:srgbClr val="BEC3CD"/>
+                </a:solidFill>
+              </a:rPr>
+              <a:t>Calling commentInputRef.current.focus() focuses comment box without triggering component re-rendering.</a:t>
+            </a:r>
+          </a:p>
+          <a:p>
+            <a:pPr>
+              <a:spcAft>
+                <a:spcPts val="600"/>
+              </a:spcAft>
+            </a:pPr>
+            <a:r>
+              <a:rPr b="1" sz="1050">
+                <a:solidFill>
+                  <a:srgbClr val="FF0033"/>
+                </a:solidFill>
+              </a:rPr>
+              <a:t>• </a:t>
+            </a:r>
+            <a:r>
+              <a:rPr b="1" sz="1000">
+                <a:solidFill>
+                  <a:srgbClr val="FFFFFF"/>
+                </a:solidFill>
+              </a:rPr>
+              <a:t>Controlled State Binding: </a:t>
+            </a:r>
+            <a:r>
+              <a:rPr sz="1000">
+                <a:solidFill>
+                  <a:srgbClr val="BEC3CD"/>
+                </a:solidFill>
+              </a:rPr>
+              <a:t>Controlled input state (useState) manages character text, clearing cleanly upon submission.</a:t>
+            </a:r>
+          </a:p>
+          <a:p>
+            <a:pPr>
+              <a:spcAft>
+                <a:spcPts val="600"/>
+              </a:spcAft>
+            </a:pPr>
+            <a:r>
+              <a:rPr b="1" sz="1050">
+                <a:solidFill>
+                  <a:srgbClr val="FF0033"/>
+                </a:solidFill>
+              </a:rPr>
+              <a:t>• </a:t>
+            </a:r>
+            <a:r>
+              <a:rPr b="1" sz="1000">
+                <a:solidFill>
+                  <a:srgbClr val="FFFFFF"/>
+                </a:solidFill>
+              </a:rPr>
+              <a:t>Defensible Viva Design: </a:t>
+            </a:r>
+            <a:r>
+              <a:rPr sz="1000">
+                <a:solidFill>
+                  <a:srgbClr val="BEC3CD"/>
+                </a:solidFill>
+              </a:rPr>
+              <a:t>Demonstrates genuine understanding of DOM interaction vs state mutations.</a:t>
             </a:r>
           </a:p>
         </p:txBody>
@@ -6091,8 +9510,8 @@
         </p:nvSpPr>
         <p:spPr>
           <a:xfrm>
-            <a:off x="6172200" y="1417320"/>
-            <a:ext cx="5257800" cy="2240280"/>
+            <a:off x="6217920" y="1371600"/>
+            <a:ext cx="5212080" cy="4663440"/>
           </a:xfrm>
           <a:prstGeom prst="roundRect">
             <a:avLst/>
@@ -6100,7 +9519,7 @@
           <a:solidFill>
             <a:srgbClr val="161922"/>
           </a:solidFill>
-          <a:ln>
+          <a:ln w="15240">
             <a:solidFill>
               <a:srgbClr val="2E3445"/>
             </a:solidFill>
@@ -6128,40 +9547,16 @@
           </a:p>
         </p:txBody>
       </p:sp>
-      <p:pic>
-        <p:nvPicPr>
-          <p:cNvPr id="10" name="Picture 9" descr="gta5_147.png"/>
-          <p:cNvPicPr>
-            <a:picLocks noChangeAspect="1"/>
-          </p:cNvPicPr>
-          <p:nvPr/>
-        </p:nvPicPr>
-        <p:blipFill>
-          <a:blip r:embed="rId3"/>
-          <a:stretch>
-            <a:fillRect/>
-          </a:stretch>
-        </p:blipFill>
-        <p:spPr>
-          <a:xfrm>
-            <a:off x="6309360" y="1737360"/>
-            <a:ext cx="2331720" cy="1310130"/>
-          </a:xfrm>
-          <a:prstGeom prst="rect">
-            <a:avLst/>
-          </a:prstGeom>
-        </p:spPr>
-      </p:pic>
-      <p:sp>
-        <p:nvSpPr>
-          <p:cNvPr id="11" name="TextBox 10"/>
+      <p:sp>
+        <p:nvSpPr>
+          <p:cNvPr id="10" name="TextBox 9"/>
           <p:cNvSpPr txBox="1"/>
           <p:nvPr/>
         </p:nvSpPr>
         <p:spPr>
           <a:xfrm>
-            <a:off x="8778240" y="1600200"/>
-            <a:ext cx="2514600" cy="1920240"/>
+            <a:off x="6400800" y="1508760"/>
+            <a:ext cx="4846320" cy="4389120"/>
           </a:xfrm>
           <a:prstGeom prst="rect">
             <a:avLst/>
@@ -6175,312 +9570,141 @@
           <a:lstStyle/>
           <a:p>
             <a:pPr>
-              <a:defRPr sz="1350" b="1">
-                <a:solidFill>
-                  <a:srgbClr val="FF0033"/>
+              <a:spcAft>
+                <a:spcPts val="800"/>
+              </a:spcAft>
+              <a:defRPr sz="1300" b="1">
+                <a:solidFill>
+                  <a:srgbClr val="3EA6FF"/>
                 </a:solidFill>
               </a:defRPr>
             </a:pPr>
             <a:r>
-              <a:t>Techno Gamerz (53M Subs)</a:t>
-            </a:r>
-          </a:p>
-          <a:p>
-            <a:pPr>
-              <a:spcBef>
-                <a:spcPts val="400"/>
-              </a:spcBef>
-              <a:defRPr sz="1050">
+              <a:t>Multi-Video Comment Isolation &amp; Sorting</a:t>
+            </a:r>
+          </a:p>
+          <a:p>
+            <a:pPr>
+              <a:spcAft>
+                <a:spcPts val="600"/>
+              </a:spcAft>
+            </a:pPr>
+            <a:r>
+              <a:rPr b="1" sz="1050">
+                <a:solidFill>
+                  <a:srgbClr val="3EA6FF"/>
+                </a:solidFill>
+              </a:rPr>
+              <a:t>• </a:t>
+            </a:r>
+            <a:r>
+              <a:rPr b="1" sz="1000">
                 <a:solidFill>
                   <a:srgbClr val="FFFFFF"/>
                 </a:solidFill>
-              </a:defRPr>
-            </a:pPr>
-            <a:r>
-              <a:t>Featured: GTA 5 Heist #147 &amp; Minecraft #90</a:t>
-            </a:r>
-          </a:p>
-          <a:p>
-            <a:pPr>
-              <a:spcBef>
-                <a:spcPts val="400"/>
-              </a:spcBef>
-              <a:defRPr sz="950">
-                <a:solidFill>
-                  <a:srgbClr val="C8CDD7"/>
-                </a:solidFill>
-              </a:defRPr>
-            </a:pPr>
-            <a:r>
-              <a:t>Direct external YouTube watch &amp; channel links launched safely via window.open(url, '_blank').</a:t>
-            </a:r>
-          </a:p>
-        </p:txBody>
-      </p:sp>
-      <p:sp>
-        <p:nvSpPr>
-          <p:cNvPr id="12" name="Rounded Rectangle 11"/>
-          <p:cNvSpPr/>
-          <p:nvPr/>
-        </p:nvSpPr>
-        <p:spPr>
-          <a:xfrm>
-            <a:off x="731520" y="3840480"/>
-            <a:ext cx="5257800" cy="2240280"/>
-          </a:xfrm>
-          <a:prstGeom prst="roundRect">
-            <a:avLst/>
-          </a:prstGeom>
-          <a:solidFill>
-            <a:srgbClr val="161922"/>
-          </a:solidFill>
-          <a:ln>
-            <a:solidFill>
-              <a:srgbClr val="2E3445"/>
-            </a:solidFill>
-          </a:ln>
-        </p:spPr>
-        <p:style>
-          <a:lnRef idx="1">
-            <a:schemeClr val="accent1"/>
-          </a:lnRef>
-          <a:fillRef idx="3">
-            <a:schemeClr val="accent1"/>
-          </a:fillRef>
-          <a:effectRef idx="2">
-            <a:schemeClr val="accent1"/>
-          </a:effectRef>
-          <a:fontRef idx="minor">
-            <a:schemeClr val="lt1"/>
-          </a:fontRef>
-        </p:style>
-        <p:txBody>
-          <a:bodyPr rtlCol="0" anchor="ctr"/>
-          <a:lstStyle/>
-          <a:p>
-            <a:pPr algn="ctr"/>
-          </a:p>
-        </p:txBody>
-      </p:sp>
-      <p:pic>
-        <p:nvPicPr>
-          <p:cNvPr id="13" name="Picture 12" descr="latent_ep6.jpg"/>
-          <p:cNvPicPr>
-            <a:picLocks noChangeAspect="1"/>
-          </p:cNvPicPr>
-          <p:nvPr/>
-        </p:nvPicPr>
-        <p:blipFill>
-          <a:blip r:embed="rId4"/>
-          <a:stretch>
-            <a:fillRect/>
-          </a:stretch>
-        </p:blipFill>
-        <p:spPr>
-          <a:xfrm>
-            <a:off x="868680" y="4160520"/>
-            <a:ext cx="2331720" cy="1748790"/>
-          </a:xfrm>
-          <a:prstGeom prst="rect">
-            <a:avLst/>
-          </a:prstGeom>
-        </p:spPr>
-      </p:pic>
-      <p:sp>
-        <p:nvSpPr>
-          <p:cNvPr id="14" name="TextBox 13"/>
-          <p:cNvSpPr txBox="1"/>
-          <p:nvPr/>
-        </p:nvSpPr>
-        <p:spPr>
-          <a:xfrm>
-            <a:off x="3337560" y="4023360"/>
-            <a:ext cx="2514600" cy="1920240"/>
-          </a:xfrm>
-          <a:prstGeom prst="rect">
-            <a:avLst/>
-          </a:prstGeom>
-          <a:noFill/>
-        </p:spPr>
-        <p:txBody>
-          <a:bodyPr wrap="square">
-            <a:spAutoFit/>
-          </a:bodyPr>
-          <a:lstStyle/>
-          <a:p>
-            <a:pPr>
-              <a:defRPr sz="1350" b="1">
-                <a:solidFill>
-                  <a:srgbClr val="FF0033"/>
-                </a:solidFill>
-              </a:defRPr>
-            </a:pPr>
-            <a:r>
-              <a:t>Samay Raina (11.4M Subs)</a:t>
-            </a:r>
-          </a:p>
-          <a:p>
-            <a:pPr>
-              <a:spcBef>
-                <a:spcPts val="400"/>
-              </a:spcBef>
-              <a:defRPr sz="1050">
+              </a:rPr>
+              <a:t>Isolated Video Keys: </a:t>
+            </a:r>
+            <a:r>
+              <a:rPr sz="1000">
+                <a:solidFill>
+                  <a:srgbClr val="BEC3CD"/>
+                </a:solidFill>
+              </a:rPr>
+              <a:t>Comments mapped in state dictionary by video ID: comments[videoId] = [...].</a:t>
+            </a:r>
+          </a:p>
+          <a:p>
+            <a:pPr>
+              <a:spcAft>
+                <a:spcPts val="600"/>
+              </a:spcAft>
+            </a:pPr>
+            <a:r>
+              <a:rPr b="1" sz="1050">
+                <a:solidFill>
+                  <a:srgbClr val="3EA6FF"/>
+                </a:solidFill>
+              </a:rPr>
+              <a:t>• </a:t>
+            </a:r>
+            <a:r>
+              <a:rPr b="1" sz="1000">
                 <a:solidFill>
                   <a:srgbClr val="FFFFFF"/>
                 </a:solidFill>
-              </a:defRPr>
-            </a:pPr>
-            <a:r>
-              <a:t>Featured: India's Got Latent S2 EP5 &amp; EP6</a:t>
-            </a:r>
-          </a:p>
-          <a:p>
-            <a:pPr>
-              <a:spcBef>
-                <a:spcPts val="400"/>
-              </a:spcBef>
-              <a:defRPr sz="950">
-                <a:solidFill>
-                  <a:srgbClr val="C8CDD7"/>
-                </a:solidFill>
-              </a:defRPr>
-            </a:pPr>
-            <a:r>
-              <a:t>Direct external YouTube watch &amp; channel links launched safely via window.open(url, '_blank').</a:t>
-            </a:r>
-          </a:p>
-        </p:txBody>
-      </p:sp>
-      <p:sp>
-        <p:nvSpPr>
-          <p:cNvPr id="15" name="Rounded Rectangle 14"/>
-          <p:cNvSpPr/>
-          <p:nvPr/>
-        </p:nvSpPr>
-        <p:spPr>
-          <a:xfrm>
-            <a:off x="6172200" y="3840480"/>
-            <a:ext cx="5257800" cy="2240280"/>
-          </a:xfrm>
-          <a:prstGeom prst="roundRect">
-            <a:avLst/>
-          </a:prstGeom>
-          <a:solidFill>
-            <a:srgbClr val="161922"/>
-          </a:solidFill>
-          <a:ln>
-            <a:solidFill>
-              <a:srgbClr val="2E3445"/>
-            </a:solidFill>
-          </a:ln>
-        </p:spPr>
-        <p:style>
-          <a:lnRef idx="1">
-            <a:schemeClr val="accent1"/>
-          </a:lnRef>
-          <a:fillRef idx="3">
-            <a:schemeClr val="accent1"/>
-          </a:fillRef>
-          <a:effectRef idx="2">
-            <a:schemeClr val="accent1"/>
-          </a:effectRef>
-          <a:fontRef idx="minor">
-            <a:schemeClr val="lt1"/>
-          </a:fontRef>
-        </p:style>
-        <p:txBody>
-          <a:bodyPr rtlCol="0" anchor="ctr"/>
-          <a:lstStyle/>
-          <a:p>
-            <a:pPr algn="ctr"/>
-          </a:p>
-        </p:txBody>
-      </p:sp>
-      <p:pic>
-        <p:nvPicPr>
-          <p:cNvPr id="16" name="Picture 15" descr="bhool_bhulaiyaa3.png"/>
-          <p:cNvPicPr>
-            <a:picLocks noChangeAspect="1"/>
-          </p:cNvPicPr>
-          <p:nvPr/>
-        </p:nvPicPr>
-        <p:blipFill>
-          <a:blip r:embed="rId5"/>
-          <a:stretch>
-            <a:fillRect/>
-          </a:stretch>
-        </p:blipFill>
-        <p:spPr>
-          <a:xfrm>
-            <a:off x="6309360" y="4160520"/>
-            <a:ext cx="2331720" cy="1311592"/>
-          </a:xfrm>
-          <a:prstGeom prst="rect">
-            <a:avLst/>
-          </a:prstGeom>
-        </p:spPr>
-      </p:pic>
-      <p:sp>
-        <p:nvSpPr>
-          <p:cNvPr id="17" name="TextBox 16"/>
-          <p:cNvSpPr txBox="1"/>
-          <p:nvPr/>
-        </p:nvSpPr>
-        <p:spPr>
-          <a:xfrm>
-            <a:off x="8778240" y="4023360"/>
-            <a:ext cx="2514600" cy="1920240"/>
-          </a:xfrm>
-          <a:prstGeom prst="rect">
-            <a:avLst/>
-          </a:prstGeom>
-          <a:noFill/>
-        </p:spPr>
-        <p:txBody>
-          <a:bodyPr wrap="square">
-            <a:spAutoFit/>
-          </a:bodyPr>
-          <a:lstStyle/>
-          <a:p>
-            <a:pPr>
-              <a:defRPr sz="1350" b="1">
-                <a:solidFill>
-                  <a:srgbClr val="FF0033"/>
-                </a:solidFill>
-              </a:defRPr>
-            </a:pPr>
-            <a:r>
-              <a:t>T-Series (315M Subs)</a:t>
-            </a:r>
-          </a:p>
-          <a:p>
-            <a:pPr>
-              <a:spcBef>
-                <a:spcPts val="400"/>
-              </a:spcBef>
-              <a:defRPr sz="1050">
+              </a:rPr>
+              <a:t>Dynamic Sorting Engine: </a:t>
+            </a:r>
+            <a:r>
+              <a:rPr sz="1000">
+                <a:solidFill>
+                  <a:srgbClr val="BEC3CD"/>
+                </a:solidFill>
+              </a:rPr>
+              <a:t>Users toggle between Top Comments (sorted by upvote count) and Newest First (chronological order).</a:t>
+            </a:r>
+          </a:p>
+          <a:p>
+            <a:pPr>
+              <a:spcAft>
+                <a:spcPts val="600"/>
+              </a:spcAft>
+            </a:pPr>
+            <a:r>
+              <a:rPr b="1" sz="1050">
+                <a:solidFill>
+                  <a:srgbClr val="3EA6FF"/>
+                </a:solidFill>
+              </a:rPr>
+              <a:t>• </a:t>
+            </a:r>
+            <a:r>
+              <a:rPr b="1" sz="1000">
                 <a:solidFill>
                   <a:srgbClr val="FFFFFF"/>
                 </a:solidFill>
-              </a:defRPr>
-            </a:pPr>
-            <a:r>
-              <a:t>Featured: Bhool Bhulaiyaa 3 &amp; Tauba Tauba Tracks</a:t>
-            </a:r>
-          </a:p>
-          <a:p>
-            <a:pPr>
-              <a:spcBef>
-                <a:spcPts val="400"/>
-              </a:spcBef>
-              <a:defRPr sz="950">
-                <a:solidFill>
-                  <a:srgbClr val="C8CDD7"/>
-                </a:solidFill>
-              </a:defRPr>
-            </a:pPr>
-            <a:r>
-              <a:t>Direct external YouTube watch &amp; channel links launched safely via window.open(url, '_blank').</a:t>
+              </a:rPr>
+              <a:t>Optimistic Updates: </a:t>
+            </a:r>
+            <a:r>
+              <a:rPr sz="1000">
+                <a:solidFill>
+                  <a:srgbClr val="BEC3CD"/>
+                </a:solidFill>
+              </a:rPr>
+              <a:t>Submitted comments appear instantly at the head of the feed with 'Just now' timestamp.</a:t>
+            </a:r>
+          </a:p>
+          <a:p>
+            <a:pPr>
+              <a:spcAft>
+                <a:spcPts val="600"/>
+              </a:spcAft>
+            </a:pPr>
+            <a:r>
+              <a:rPr b="1" sz="1050">
+                <a:solidFill>
+                  <a:srgbClr val="3EA6FF"/>
+                </a:solidFill>
+              </a:rPr>
+              <a:t>• </a:t>
+            </a:r>
+            <a:r>
+              <a:rPr b="1" sz="1000">
+                <a:solidFill>
+                  <a:srgbClr val="FFFFFF"/>
+                </a:solidFill>
+              </a:rPr>
+              <a:t>Persistent Storage: </a:t>
+            </a:r>
+            <a:r>
+              <a:rPr sz="1000">
+                <a:solidFill>
+                  <a:srgbClr val="BEC3CD"/>
+                </a:solidFill>
+              </a:rPr>
+              <a:t>New comments persist to browser localStorage, retaining discussion threads across visits.</a:t>
             </a:r>
           </a:p>
         </p:txBody>
@@ -6558,7 +9782,7 @@
         <p:spPr>
           <a:xfrm>
             <a:off x="731520" y="365760"/>
-            <a:ext cx="457200" cy="54864"/>
+            <a:ext cx="365760" cy="54864"/>
           </a:xfrm>
           <a:prstGeom prst="rect">
             <a:avLst/>
@@ -6600,8 +9824,8 @@
         </p:nvSpPr>
         <p:spPr>
           <a:xfrm>
-            <a:off x="1280160" y="292608"/>
-            <a:ext cx="10149840" cy="274320"/>
+            <a:off x="1188720" y="292608"/>
+            <a:ext cx="10241280" cy="274320"/>
           </a:xfrm>
           <a:prstGeom prst="rect">
             <a:avLst/>
@@ -6609,20 +9833,20 @@
           <a:noFill/>
         </p:spPr>
         <p:txBody>
-          <a:bodyPr wrap="square">
+          <a:bodyPr wrap="none">
             <a:spAutoFit/>
           </a:bodyPr>
           <a:lstStyle/>
           <a:p>
             <a:pPr>
-              <a:defRPr sz="1050" b="1">
+              <a:defRPr sz="1000" b="1">
                 <a:solidFill>
                   <a:srgbClr val="3EA6FF"/>
                 </a:solidFill>
               </a:defRPr>
             </a:pPr>
             <a:r>
-              <a:t>GROUP G15  •  PROJECT ID: G15-PID-17 (P-17)  •  FRONT END ENGINEERING - II (25CSE0203)</a:t>
+              <a:t>GROUP G15  •  PROJECT ID: G15-PID-17 (P-17)  •  EVALUATION-II (25CSE0203)</a:t>
             </a:r>
           </a:p>
         </p:txBody>
@@ -6636,7 +9860,7 @@
         <p:spPr>
           <a:xfrm>
             <a:off x="731520" y="594360"/>
-            <a:ext cx="10728655" cy="640080"/>
+            <a:ext cx="10728655" cy="594360"/>
           </a:xfrm>
           <a:prstGeom prst="rect">
             <a:avLst/>
@@ -6644,34 +9868,69 @@
           <a:noFill/>
         </p:spPr>
         <p:txBody>
-          <a:bodyPr wrap="square">
+          <a:bodyPr wrap="none">
             <a:spAutoFit/>
           </a:bodyPr>
           <a:lstStyle/>
           <a:p>
             <a:pPr>
-              <a:defRPr sz="2300" b="1">
+              <a:defRPr sz="2100" b="1">
                 <a:solidFill>
                   <a:srgbClr val="FFFFFF"/>
                 </a:solidFill>
               </a:defRPr>
             </a:pPr>
             <a:r>
-              <a:t>Future Engineering Scope &amp; Technical Roadmap</a:t>
-            </a:r>
-          </a:p>
-        </p:txBody>
-      </p:sp>
-      <p:sp>
-        <p:nvSpPr>
-          <p:cNvPr id="6" name="Rounded Rectangle 5"/>
+              <a:t>Global State Architecture (Context API) &amp; LocalStorage Sync</a:t>
+            </a:r>
+          </a:p>
+        </p:txBody>
+      </p:sp>
+      <p:sp>
+        <p:nvSpPr>
+          <p:cNvPr id="6" name="TextBox 5"/>
+          <p:cNvSpPr txBox="1"/>
+          <p:nvPr/>
+        </p:nvSpPr>
+        <p:spPr>
+          <a:xfrm>
+            <a:off x="731520" y="6309360"/>
+            <a:ext cx="10728655" cy="320040"/>
+          </a:xfrm>
+          <a:prstGeom prst="rect">
+            <a:avLst/>
+          </a:prstGeom>
+          <a:noFill/>
+        </p:spPr>
+        <p:txBody>
+          <a:bodyPr wrap="none">
+            <a:spAutoFit/>
+          </a:bodyPr>
+          <a:lstStyle/>
+          <a:p>
+            <a:pPr>
+              <a:defRPr sz="900">
+                <a:solidFill>
+                  <a:srgbClr val="7B8293"/>
+                </a:solidFill>
+              </a:defRPr>
+            </a:pPr>
+            <a:r>
+              <a:t>PheW TuBe: Video Streaming Platform (G15-PID-17)  |  Evaluation-II  |  Page 08</a:t>
+            </a:r>
+          </a:p>
+        </p:txBody>
+      </p:sp>
+      <p:sp>
+        <p:nvSpPr>
+          <p:cNvPr id="7" name="Rounded Rectangle 6"/>
           <p:cNvSpPr/>
           <p:nvPr/>
         </p:nvSpPr>
         <p:spPr>
           <a:xfrm>
-            <a:off x="731520" y="1417320"/>
-            <a:ext cx="3383280" cy="4892040"/>
+            <a:off x="731520" y="1371600"/>
+            <a:ext cx="3383280" cy="4663440"/>
           </a:xfrm>
           <a:prstGeom prst="roundRect">
             <a:avLst/>
@@ -6679,7 +9938,7 @@
           <a:solidFill>
             <a:srgbClr val="161922"/>
           </a:solidFill>
-          <a:ln>
+          <a:ln w="15240">
             <a:solidFill>
               <a:srgbClr val="2E3445"/>
             </a:solidFill>
@@ -6700,62 +9959,154 @@
           </a:fontRef>
         </p:style>
         <p:txBody>
-          <a:bodyPr rtlCol="0" anchor="ctr" lIns="228600" rIns="274320" tIns="320040"/>
-          <a:lstStyle/>
-          <a:p>
-            <a:pPr algn="ctr">
-              <a:defRPr sz="1650" b="1">
-                <a:solidFill>
-                  <a:srgbClr val="3EA6FF"/>
+          <a:bodyPr rtlCol="0" anchor="ctr"/>
+          <a:lstStyle/>
+          <a:p>
+            <a:pPr algn="ctr"/>
+          </a:p>
+        </p:txBody>
+      </p:sp>
+      <p:sp>
+        <p:nvSpPr>
+          <p:cNvPr id="8" name="TextBox 7"/>
+          <p:cNvSpPr txBox="1"/>
+          <p:nvPr/>
+        </p:nvSpPr>
+        <p:spPr>
+          <a:xfrm>
+            <a:off x="914400" y="1508760"/>
+            <a:ext cx="3017520" cy="4389120"/>
+          </a:xfrm>
+          <a:prstGeom prst="rect">
+            <a:avLst/>
+          </a:prstGeom>
+          <a:noFill/>
+        </p:spPr>
+        <p:txBody>
+          <a:bodyPr wrap="square">
+            <a:spAutoFit/>
+          </a:bodyPr>
+          <a:lstStyle/>
+          <a:p>
+            <a:pPr>
+              <a:spcAft>
+                <a:spcPts val="800"/>
+              </a:spcAft>
+              <a:defRPr sz="1300" b="1">
+                <a:solidFill>
+                  <a:srgbClr val="FF0033"/>
                 </a:solidFill>
               </a:defRPr>
             </a:pPr>
             <a:r>
-              <a:t>Phase 2: Node.js &amp; Express REST Backend</a:t>
-            </a:r>
-          </a:p>
-          <a:p>
-            <a:pPr>
-              <a:spcBef>
-                <a:spcPts val="2000"/>
-              </a:spcBef>
-              <a:defRPr sz="1350">
-                <a:solidFill>
-                  <a:srgbClr val="C8CDD7"/>
-                </a:solidFill>
-              </a:defRPr>
-            </a:pPr>
-            <a:r>
-              <a:t>• Replace static mock data layer with a dedicated Node.js / Express.js REST API server.</a:t>
-            </a:r>
-          </a:p>
-          <a:p>
-            <a:pPr>
-              <a:spcBef>
-                <a:spcPts val="2000"/>
-              </a:spcBef>
-              <a:defRPr sz="1350">
-                <a:solidFill>
-                  <a:srgbClr val="C8CDD7"/>
-                </a:solidFill>
-              </a:defRPr>
-            </a:pPr>
-            <a:r>
-              <a:t>• Integrate MongoDB Atlas database for persistent video collections, user history, and custom playlist storage.</a:t>
-            </a:r>
-          </a:p>
-        </p:txBody>
-      </p:sp>
-      <p:sp>
-        <p:nvSpPr>
-          <p:cNvPr id="7" name="Rounded Rectangle 6"/>
+              <a:t>Context API Design (AppContext)</a:t>
+            </a:r>
+          </a:p>
+          <a:p>
+            <a:pPr>
+              <a:spcAft>
+                <a:spcPts val="600"/>
+              </a:spcAft>
+            </a:pPr>
+            <a:r>
+              <a:rPr b="1" sz="1050">
+                <a:solidFill>
+                  <a:srgbClr val="FF0033"/>
+                </a:solidFill>
+              </a:rPr>
+              <a:t>• </a:t>
+            </a:r>
+            <a:r>
+              <a:rPr b="1" sz="1000">
+                <a:solidFill>
+                  <a:srgbClr val="FFFFFF"/>
+                </a:solidFill>
+              </a:rPr>
+              <a:t>Single Source of Truth: </a:t>
+            </a:r>
+            <a:r>
+              <a:rPr sz="1000">
+                <a:solidFill>
+                  <a:srgbClr val="BEC3CD"/>
+                </a:solidFill>
+              </a:rPr>
+              <a:t>Centralizes state for videos, shorts, likes, watch later, history, subscriptions, and comments.</a:t>
+            </a:r>
+          </a:p>
+          <a:p>
+            <a:pPr>
+              <a:spcAft>
+                <a:spcPts val="600"/>
+              </a:spcAft>
+            </a:pPr>
+            <a:r>
+              <a:rPr b="1" sz="1050">
+                <a:solidFill>
+                  <a:srgbClr val="FF0033"/>
+                </a:solidFill>
+              </a:rPr>
+              <a:t>• </a:t>
+            </a:r>
+            <a:r>
+              <a:rPr b="1" sz="1000">
+                <a:solidFill>
+                  <a:srgbClr val="FFFFFF"/>
+                </a:solidFill>
+              </a:rPr>
+              <a:t>Custom Hook Convenience: </a:t>
+            </a:r>
+            <a:r>
+              <a:rPr sz="1000">
+                <a:solidFill>
+                  <a:srgbClr val="BEC3CD"/>
+                </a:solidFill>
+              </a:rPr>
+              <a:t>Encapsulates consumer logic into useApp(), throwing errors if accessed outside Provider.</a:t>
+            </a:r>
+          </a:p>
+          <a:p>
+            <a:pPr>
+              <a:spcAft>
+                <a:spcPts val="600"/>
+              </a:spcAft>
+            </a:pPr>
+            <a:r>
+              <a:rPr b="1" sz="1050">
+                <a:solidFill>
+                  <a:srgbClr val="FF0033"/>
+                </a:solidFill>
+              </a:rPr>
+              <a:t>• </a:t>
+            </a:r>
+            <a:r>
+              <a:rPr b="1" sz="1000">
+                <a:solidFill>
+                  <a:srgbClr val="FFFFFF"/>
+                </a:solidFill>
+              </a:rPr>
+              <a:t>High Modularity: </a:t>
+            </a:r>
+            <a:r>
+              <a:rPr sz="1000">
+                <a:solidFill>
+                  <a:srgbClr val="BEC3CD"/>
+                </a:solidFill>
+              </a:rPr>
+              <a:t>Decouples UI rendering from business logic and data mutations.</a:t>
+            </a:r>
+          </a:p>
+        </p:txBody>
+      </p:sp>
+      <p:sp>
+        <p:nvSpPr>
+          <p:cNvPr id="9" name="Rounded Rectangle 8"/>
           <p:cNvSpPr/>
           <p:nvPr/>
         </p:nvSpPr>
         <p:spPr>
           <a:xfrm>
-            <a:off x="4398264" y="1417320"/>
-            <a:ext cx="3383280" cy="4892040"/>
+            <a:off x="4389120" y="1371600"/>
+            <a:ext cx="3383280" cy="4663440"/>
           </a:xfrm>
           <a:prstGeom prst="roundRect">
             <a:avLst/>
@@ -6763,7 +10114,7 @@
           <a:solidFill>
             <a:srgbClr val="161922"/>
           </a:solidFill>
-          <a:ln>
+          <a:ln w="15240">
             <a:solidFill>
               <a:srgbClr val="2E3445"/>
             </a:solidFill>
@@ -6784,62 +10135,154 @@
           </a:fontRef>
         </p:style>
         <p:txBody>
-          <a:bodyPr rtlCol="0" anchor="ctr" lIns="228600" rIns="274320" tIns="320040"/>
-          <a:lstStyle/>
-          <a:p>
-            <a:pPr algn="ctr">
-              <a:defRPr sz="1650" b="1">
-                <a:solidFill>
-                  <a:srgbClr val="FF0033"/>
+          <a:bodyPr rtlCol="0" anchor="ctr"/>
+          <a:lstStyle/>
+          <a:p>
+            <a:pPr algn="ctr"/>
+          </a:p>
+        </p:txBody>
+      </p:sp>
+      <p:sp>
+        <p:nvSpPr>
+          <p:cNvPr id="10" name="TextBox 9"/>
+          <p:cNvSpPr txBox="1"/>
+          <p:nvPr/>
+        </p:nvSpPr>
+        <p:spPr>
+          <a:xfrm>
+            <a:off x="4572000" y="1508760"/>
+            <a:ext cx="3017520" cy="4389120"/>
+          </a:xfrm>
+          <a:prstGeom prst="rect">
+            <a:avLst/>
+          </a:prstGeom>
+          <a:noFill/>
+        </p:spPr>
+        <p:txBody>
+          <a:bodyPr wrap="square">
+            <a:spAutoFit/>
+          </a:bodyPr>
+          <a:lstStyle/>
+          <a:p>
+            <a:pPr>
+              <a:spcAft>
+                <a:spcPts val="800"/>
+              </a:spcAft>
+              <a:defRPr sz="1300" b="1">
+                <a:solidFill>
+                  <a:srgbClr val="3EA6FF"/>
                 </a:solidFill>
               </a:defRPr>
             </a:pPr>
             <a:r>
-              <a:t>Phase 3: Live YouTube Data API v3</a:t>
-            </a:r>
-          </a:p>
-          <a:p>
-            <a:pPr>
-              <a:spcBef>
-                <a:spcPts val="2000"/>
-              </a:spcBef>
-              <a:defRPr sz="1350">
-                <a:solidFill>
-                  <a:srgbClr val="C8CDD7"/>
-                </a:solidFill>
-              </a:defRPr>
-            </a:pPr>
-            <a:r>
-              <a:t>• Fetch real-time live metrics (subscriber counts, up-to-the-minute view counters, comment counts).</a:t>
-            </a:r>
-          </a:p>
-          <a:p>
-            <a:pPr>
-              <a:spcBef>
-                <a:spcPts val="2000"/>
-              </a:spcBef>
-              <a:defRPr sz="1350">
-                <a:solidFill>
-                  <a:srgbClr val="C8CDD7"/>
-                </a:solidFill>
-              </a:defRPr>
-            </a:pPr>
-            <a:r>
-              <a:t>• Dynamic automated YouTube video search querying official Google APIs.</a:t>
-            </a:r>
-          </a:p>
-        </p:txBody>
-      </p:sp>
-      <p:sp>
-        <p:nvSpPr>
-          <p:cNvPr id="8" name="Rounded Rectangle 7"/>
+              <a:t>LocalStorage Synchronization</a:t>
+            </a:r>
+          </a:p>
+          <a:p>
+            <a:pPr>
+              <a:spcAft>
+                <a:spcPts val="600"/>
+              </a:spcAft>
+            </a:pPr>
+            <a:r>
+              <a:rPr b="1" sz="1050">
+                <a:solidFill>
+                  <a:srgbClr val="3EA6FF"/>
+                </a:solidFill>
+              </a:rPr>
+              <a:t>• </a:t>
+            </a:r>
+            <a:r>
+              <a:rPr b="1" sz="1000">
+                <a:solidFill>
+                  <a:srgbClr val="FFFFFF"/>
+                </a:solidFill>
+              </a:rPr>
+              <a:t>Lazy State Initializers: </a:t>
+            </a:r>
+            <a:r>
+              <a:rPr sz="1000">
+                <a:solidFill>
+                  <a:srgbClr val="BEC3CD"/>
+                </a:solidFill>
+              </a:rPr>
+              <a:t>State initializes directly from localStorage.getItem() with safe fallback defaults.</a:t>
+            </a:r>
+          </a:p>
+          <a:p>
+            <a:pPr>
+              <a:spcAft>
+                <a:spcPts val="600"/>
+              </a:spcAft>
+            </a:pPr>
+            <a:r>
+              <a:rPr b="1" sz="1050">
+                <a:solidFill>
+                  <a:srgbClr val="3EA6FF"/>
+                </a:solidFill>
+              </a:rPr>
+              <a:t>• </a:t>
+            </a:r>
+            <a:r>
+              <a:rPr b="1" sz="1000">
+                <a:solidFill>
+                  <a:srgbClr val="FFFFFF"/>
+                </a:solidFill>
+              </a:rPr>
+              <a:t>Reactive Serialization: </a:t>
+            </a:r>
+            <a:r>
+              <a:rPr sz="1000">
+                <a:solidFill>
+                  <a:srgbClr val="BEC3CD"/>
+                </a:solidFill>
+              </a:rPr>
+              <a:t>Dedicated useEffect listeners automatically serialize state changes to browser storage.</a:t>
+            </a:r>
+          </a:p>
+          <a:p>
+            <a:pPr>
+              <a:spcAft>
+                <a:spcPts val="600"/>
+              </a:spcAft>
+            </a:pPr>
+            <a:r>
+              <a:rPr b="1" sz="1050">
+                <a:solidFill>
+                  <a:srgbClr val="3EA6FF"/>
+                </a:solidFill>
+              </a:rPr>
+              <a:t>• </a:t>
+            </a:r>
+            <a:r>
+              <a:rPr b="1" sz="1000">
+                <a:solidFill>
+                  <a:srgbClr val="FFFFFF"/>
+                </a:solidFill>
+              </a:rPr>
+              <a:t>Offline Data Durability: </a:t>
+            </a:r>
+            <a:r>
+              <a:rPr sz="1000">
+                <a:solidFill>
+                  <a:srgbClr val="BEC3CD"/>
+                </a:solidFill>
+              </a:rPr>
+              <a:t>Liked videos, watch history, and user settings persist across page reloads and browser sessions.</a:t>
+            </a:r>
+          </a:p>
+        </p:txBody>
+      </p:sp>
+      <p:sp>
+        <p:nvSpPr>
+          <p:cNvPr id="11" name="Rounded Rectangle 10"/>
           <p:cNvSpPr/>
           <p:nvPr/>
         </p:nvSpPr>
         <p:spPr>
           <a:xfrm>
-            <a:off x="8065008" y="1417320"/>
-            <a:ext cx="3383280" cy="4892040"/>
+            <a:off x="8046720" y="1371600"/>
+            <a:ext cx="3383280" cy="4663440"/>
           </a:xfrm>
           <a:prstGeom prst="roundRect">
             <a:avLst/>
@@ -6847,7 +10290,7 @@
           <a:solidFill>
             <a:srgbClr val="161922"/>
           </a:solidFill>
-          <a:ln>
+          <a:ln w="15240">
             <a:solidFill>
               <a:srgbClr val="2E3445"/>
             </a:solidFill>
@@ -6868,48 +10311,140 @@
           </a:fontRef>
         </p:style>
         <p:txBody>
-          <a:bodyPr rtlCol="0" anchor="ctr" lIns="228600" rIns="274320" tIns="320040"/>
-          <a:lstStyle/>
-          <a:p>
-            <a:pPr algn="ctr">
-              <a:defRPr sz="1650" b="1">
-                <a:solidFill>
-                  <a:srgbClr val="3EA6FF"/>
+          <a:bodyPr rtlCol="0" anchor="ctr"/>
+          <a:lstStyle/>
+          <a:p>
+            <a:pPr algn="ctr"/>
+          </a:p>
+        </p:txBody>
+      </p:sp>
+      <p:sp>
+        <p:nvSpPr>
+          <p:cNvPr id="12" name="TextBox 11"/>
+          <p:cNvSpPr txBox="1"/>
+          <p:nvPr/>
+        </p:nvSpPr>
+        <p:spPr>
+          <a:xfrm>
+            <a:off x="8229600" y="1508760"/>
+            <a:ext cx="3017520" cy="4389120"/>
+          </a:xfrm>
+          <a:prstGeom prst="rect">
+            <a:avLst/>
+          </a:prstGeom>
+          <a:noFill/>
+        </p:spPr>
+        <p:txBody>
+          <a:bodyPr wrap="square">
+            <a:spAutoFit/>
+          </a:bodyPr>
+          <a:lstStyle/>
+          <a:p>
+            <a:pPr>
+              <a:spcAft>
+                <a:spcPts val="800"/>
+              </a:spcAft>
+              <a:defRPr sz="1300" b="1">
+                <a:solidFill>
+                  <a:srgbClr val="2BA640"/>
                 </a:solidFill>
               </a:defRPr>
             </a:pPr>
             <a:r>
-              <a:t>Phase 4: Authentication &amp; Video Player Hub</a:t>
-            </a:r>
-          </a:p>
-          <a:p>
-            <a:pPr>
-              <a:spcBef>
-                <a:spcPts val="2000"/>
-              </a:spcBef>
-              <a:defRPr sz="1350">
-                <a:solidFill>
-                  <a:srgbClr val="C8CDD7"/>
-                </a:solidFill>
-              </a:defRPr>
-            </a:pPr>
-            <a:r>
-              <a:t>• Implement secure User Authentication via JWT &amp; Google OAuth 2.0 login.</a:t>
-            </a:r>
-          </a:p>
-          <a:p>
-            <a:pPr>
-              <a:spcBef>
-                <a:spcPts val="2000"/>
-              </a:spcBef>
-              <a:defRPr sz="1350">
-                <a:solidFill>
-                  <a:srgbClr val="C8CDD7"/>
-                </a:solidFill>
-              </a:defRPr>
-            </a:pPr>
-            <a:r>
-              <a:t>• Build an embedded custom HTML5 / React Player with comments, timestamps, and personalized video queueing.</a:t>
+              <a:t>Client-Side Authentication Pattern</a:t>
+            </a:r>
+          </a:p>
+          <a:p>
+            <a:pPr>
+              <a:spcAft>
+                <a:spcPts val="600"/>
+              </a:spcAft>
+            </a:pPr>
+            <a:r>
+              <a:rPr b="1" sz="1050">
+                <a:solidFill>
+                  <a:srgbClr val="2BA640"/>
+                </a:solidFill>
+              </a:rPr>
+              <a:t>• </a:t>
+            </a:r>
+            <a:r>
+              <a:rPr b="1" sz="1000">
+                <a:solidFill>
+                  <a:srgbClr val="FFFFFF"/>
+                </a:solidFill>
+              </a:rPr>
+              <a:t>Curriculum-Aligned Auth: </a:t>
+            </a:r>
+            <a:r>
+              <a:rPr sz="1000">
+                <a:solidFill>
+                  <a:srgbClr val="BEC3CD"/>
+                </a:solidFill>
+              </a:rPr>
+              <a:t>Implements teacher-recommended modal sign-in/sign-up pattern (ecom class architecture).</a:t>
+            </a:r>
+          </a:p>
+          <a:p>
+            <a:pPr>
+              <a:spcAft>
+                <a:spcPts val="600"/>
+              </a:spcAft>
+            </a:pPr>
+            <a:r>
+              <a:rPr b="1" sz="1050">
+                <a:solidFill>
+                  <a:srgbClr val="2BA640"/>
+                </a:solidFill>
+              </a:rPr>
+              <a:t>• </a:t>
+            </a:r>
+            <a:r>
+              <a:rPr b="1" sz="1000">
+                <a:solidFill>
+                  <a:srgbClr val="FFFFFF"/>
+                </a:solidFill>
+              </a:rPr>
+              <a:t>Session State: </a:t>
+            </a:r>
+            <a:r>
+              <a:rPr sz="1000">
+                <a:solidFill>
+                  <a:srgbClr val="BEC3CD"/>
+                </a:solidFill>
+              </a:rPr>
+              <a:t>Tracks user name, university email, and dynamic avatar status in persistent state.</a:t>
+            </a:r>
+          </a:p>
+          <a:p>
+            <a:pPr>
+              <a:spcAft>
+                <a:spcPts val="600"/>
+              </a:spcAft>
+            </a:pPr>
+            <a:r>
+              <a:rPr b="1" sz="1050">
+                <a:solidFill>
+                  <a:srgbClr val="2BA640"/>
+                </a:solidFill>
+              </a:rPr>
+              <a:t>• </a:t>
+            </a:r>
+            <a:r>
+              <a:rPr b="1" sz="1000">
+                <a:solidFill>
+                  <a:srgbClr val="FFFFFF"/>
+                </a:solidFill>
+              </a:rPr>
+              <a:t>Access Validation: </a:t>
+            </a:r>
+            <a:r>
+              <a:rPr sz="1000">
+                <a:solidFill>
+                  <a:srgbClr val="BEC3CD"/>
+                </a:solidFill>
+              </a:rPr>
+              <a:t>Displays toast alerts prompting sign-in when attempting protected actions like upload or comment.</a:t>
             </a:r>
           </a:p>
         </p:txBody>
@@ -6975,6 +10510,682 @@
           <a:lstStyle/>
           <a:p>
             <a:pPr algn="ctr"/>
+          </a:p>
+        </p:txBody>
+      </p:sp>
+      <p:sp>
+        <p:nvSpPr>
+          <p:cNvPr id="3" name="Rectangle 2"/>
+          <p:cNvSpPr/>
+          <p:nvPr/>
+        </p:nvSpPr>
+        <p:spPr>
+          <a:xfrm>
+            <a:off x="731520" y="365760"/>
+            <a:ext cx="365760" cy="54864"/>
+          </a:xfrm>
+          <a:prstGeom prst="rect">
+            <a:avLst/>
+          </a:prstGeom>
+          <a:solidFill>
+            <a:srgbClr val="FF0033"/>
+          </a:solidFill>
+          <a:ln>
+            <a:noFill/>
+          </a:ln>
+        </p:spPr>
+        <p:style>
+          <a:lnRef idx="1">
+            <a:schemeClr val="accent1"/>
+          </a:lnRef>
+          <a:fillRef idx="3">
+            <a:schemeClr val="accent1"/>
+          </a:fillRef>
+          <a:effectRef idx="2">
+            <a:schemeClr val="accent1"/>
+          </a:effectRef>
+          <a:fontRef idx="minor">
+            <a:schemeClr val="lt1"/>
+          </a:fontRef>
+        </p:style>
+        <p:txBody>
+          <a:bodyPr rtlCol="0" anchor="ctr"/>
+          <a:lstStyle/>
+          <a:p>
+            <a:pPr algn="ctr"/>
+          </a:p>
+        </p:txBody>
+      </p:sp>
+      <p:sp>
+        <p:nvSpPr>
+          <p:cNvPr id="4" name="TextBox 3"/>
+          <p:cNvSpPr txBox="1"/>
+          <p:nvPr/>
+        </p:nvSpPr>
+        <p:spPr>
+          <a:xfrm>
+            <a:off x="1188720" y="292608"/>
+            <a:ext cx="10241280" cy="274320"/>
+          </a:xfrm>
+          <a:prstGeom prst="rect">
+            <a:avLst/>
+          </a:prstGeom>
+          <a:noFill/>
+        </p:spPr>
+        <p:txBody>
+          <a:bodyPr wrap="none">
+            <a:spAutoFit/>
+          </a:bodyPr>
+          <a:lstStyle/>
+          <a:p>
+            <a:pPr>
+              <a:defRPr sz="1000" b="1">
+                <a:solidFill>
+                  <a:srgbClr val="3EA6FF"/>
+                </a:solidFill>
+              </a:defRPr>
+            </a:pPr>
+            <a:r>
+              <a:t>GROUP G15  •  PROJECT ID: G15-PID-17 (P-17)  •  EVALUATION-II (25CSE0203)</a:t>
+            </a:r>
+          </a:p>
+        </p:txBody>
+      </p:sp>
+      <p:sp>
+        <p:nvSpPr>
+          <p:cNvPr id="5" name="TextBox 4"/>
+          <p:cNvSpPr txBox="1"/>
+          <p:nvPr/>
+        </p:nvSpPr>
+        <p:spPr>
+          <a:xfrm>
+            <a:off x="731520" y="594360"/>
+            <a:ext cx="10728655" cy="594360"/>
+          </a:xfrm>
+          <a:prstGeom prst="rect">
+            <a:avLst/>
+          </a:prstGeom>
+          <a:noFill/>
+        </p:spPr>
+        <p:txBody>
+          <a:bodyPr wrap="none">
+            <a:spAutoFit/>
+          </a:bodyPr>
+          <a:lstStyle/>
+          <a:p>
+            <a:pPr>
+              <a:defRPr sz="2100" b="1">
+                <a:solidFill>
+                  <a:srgbClr val="FFFFFF"/>
+                </a:solidFill>
+              </a:defRPr>
+            </a:pPr>
+            <a:r>
+              <a:t>Creator Ecosystem &amp; Exact 2026 YouTube Metrics</a:t>
+            </a:r>
+          </a:p>
+        </p:txBody>
+      </p:sp>
+      <p:sp>
+        <p:nvSpPr>
+          <p:cNvPr id="6" name="TextBox 5"/>
+          <p:cNvSpPr txBox="1"/>
+          <p:nvPr/>
+        </p:nvSpPr>
+        <p:spPr>
+          <a:xfrm>
+            <a:off x="731520" y="6309360"/>
+            <a:ext cx="10728655" cy="320040"/>
+          </a:xfrm>
+          <a:prstGeom prst="rect">
+            <a:avLst/>
+          </a:prstGeom>
+          <a:noFill/>
+        </p:spPr>
+        <p:txBody>
+          <a:bodyPr wrap="none">
+            <a:spAutoFit/>
+          </a:bodyPr>
+          <a:lstStyle/>
+          <a:p>
+            <a:pPr>
+              <a:defRPr sz="900">
+                <a:solidFill>
+                  <a:srgbClr val="7B8293"/>
+                </a:solidFill>
+              </a:defRPr>
+            </a:pPr>
+            <a:r>
+              <a:t>PheW TuBe: Video Streaming Platform (G15-PID-17)  |  Evaluation-II  |  Page 09</a:t>
+            </a:r>
+          </a:p>
+        </p:txBody>
+      </p:sp>
+      <p:sp>
+        <p:nvSpPr>
+          <p:cNvPr id="7" name="Rounded Rectangle 6"/>
+          <p:cNvSpPr/>
+          <p:nvPr/>
+        </p:nvSpPr>
+        <p:spPr>
+          <a:xfrm>
+            <a:off x="731520" y="1371600"/>
+            <a:ext cx="3383280" cy="4663440"/>
+          </a:xfrm>
+          <a:prstGeom prst="roundRect">
+            <a:avLst/>
+          </a:prstGeom>
+          <a:solidFill>
+            <a:srgbClr val="161922"/>
+          </a:solidFill>
+          <a:ln w="15240">
+            <a:solidFill>
+              <a:srgbClr val="2E3445"/>
+            </a:solidFill>
+          </a:ln>
+        </p:spPr>
+        <p:style>
+          <a:lnRef idx="1">
+            <a:schemeClr val="accent1"/>
+          </a:lnRef>
+          <a:fillRef idx="3">
+            <a:schemeClr val="accent1"/>
+          </a:fillRef>
+          <a:effectRef idx="2">
+            <a:schemeClr val="accent1"/>
+          </a:effectRef>
+          <a:fontRef idx="minor">
+            <a:schemeClr val="lt1"/>
+          </a:fontRef>
+        </p:style>
+        <p:txBody>
+          <a:bodyPr rtlCol="0" anchor="ctr"/>
+          <a:lstStyle/>
+          <a:p>
+            <a:pPr algn="ctr"/>
+          </a:p>
+        </p:txBody>
+      </p:sp>
+      <p:sp>
+        <p:nvSpPr>
+          <p:cNvPr id="8" name="TextBox 7"/>
+          <p:cNvSpPr txBox="1"/>
+          <p:nvPr/>
+        </p:nvSpPr>
+        <p:spPr>
+          <a:xfrm>
+            <a:off x="914400" y="1508760"/>
+            <a:ext cx="3017520" cy="4389120"/>
+          </a:xfrm>
+          <a:prstGeom prst="rect">
+            <a:avLst/>
+          </a:prstGeom>
+          <a:noFill/>
+        </p:spPr>
+        <p:txBody>
+          <a:bodyPr wrap="square">
+            <a:spAutoFit/>
+          </a:bodyPr>
+          <a:lstStyle/>
+          <a:p>
+            <a:pPr>
+              <a:spcAft>
+                <a:spcPts val="800"/>
+              </a:spcAft>
+              <a:defRPr sz="1300" b="1">
+                <a:solidFill>
+                  <a:srgbClr val="FF0033"/>
+                </a:solidFill>
+              </a:defRPr>
+            </a:pPr>
+            <a:r>
+              <a:t>Global Megastars</a:t>
+            </a:r>
+          </a:p>
+          <a:p>
+            <a:pPr>
+              <a:spcAft>
+                <a:spcPts val="600"/>
+              </a:spcAft>
+            </a:pPr>
+            <a:r>
+              <a:rPr b="1" sz="1050">
+                <a:solidFill>
+                  <a:srgbClr val="FF0033"/>
+                </a:solidFill>
+              </a:rPr>
+              <a:t>• </a:t>
+            </a:r>
+            <a:r>
+              <a:rPr b="1" sz="1000">
+                <a:solidFill>
+                  <a:srgbClr val="FFFFFF"/>
+                </a:solidFill>
+              </a:rPr>
+              <a:t>MrBeast: </a:t>
+            </a:r>
+            <a:r>
+              <a:rPr sz="1000">
+                <a:solidFill>
+                  <a:srgbClr val="BEC3CD"/>
+                </a:solidFill>
+              </a:rPr>
+              <a:t>522M subscribers — YouTube's #1 creator; features 7-Days Stranded and Private Island challenges.</a:t>
+            </a:r>
+          </a:p>
+          <a:p>
+            <a:pPr>
+              <a:spcAft>
+                <a:spcPts val="600"/>
+              </a:spcAft>
+            </a:pPr>
+            <a:r>
+              <a:rPr b="1" sz="1050">
+                <a:solidFill>
+                  <a:srgbClr val="FF0033"/>
+                </a:solidFill>
+              </a:rPr>
+              <a:t>• </a:t>
+            </a:r>
+            <a:r>
+              <a:rPr b="1" sz="1000">
+                <a:solidFill>
+                  <a:srgbClr val="FFFFFF"/>
+                </a:solidFill>
+              </a:rPr>
+              <a:t>T-Series: </a:t>
+            </a:r>
+            <a:r>
+              <a:rPr sz="1000">
+                <a:solidFill>
+                  <a:srgbClr val="BEC3CD"/>
+                </a:solidFill>
+              </a:rPr>
+              <a:t>316M subscribers — World's leading Indian music label; features viral soundtrack releases.</a:t>
+            </a:r>
+          </a:p>
+          <a:p>
+            <a:pPr>
+              <a:spcAft>
+                <a:spcPts val="600"/>
+              </a:spcAft>
+            </a:pPr>
+            <a:r>
+              <a:rPr b="1" sz="1050">
+                <a:solidFill>
+                  <a:srgbClr val="FF0033"/>
+                </a:solidFill>
+              </a:rPr>
+              <a:t>• </a:t>
+            </a:r>
+            <a:r>
+              <a:rPr b="1" sz="1000">
+                <a:solidFill>
+                  <a:srgbClr val="FFFFFF"/>
+                </a:solidFill>
+              </a:rPr>
+              <a:t>Techno Gamerz (Ujjwal): </a:t>
+            </a:r>
+            <a:r>
+              <a:rPr sz="1000">
+                <a:solidFill>
+                  <a:srgbClr val="BEC3CD"/>
+                </a:solidFill>
+              </a:rPr>
+              <a:t>53.4M subscribers — India's gaming icon; features GTA 5 Episode 147 and Minecraft survival.</a:t>
+            </a:r>
+          </a:p>
+        </p:txBody>
+      </p:sp>
+      <p:sp>
+        <p:nvSpPr>
+          <p:cNvPr id="9" name="Rounded Rectangle 8"/>
+          <p:cNvSpPr/>
+          <p:nvPr/>
+        </p:nvSpPr>
+        <p:spPr>
+          <a:xfrm>
+            <a:off x="4389120" y="1371600"/>
+            <a:ext cx="3383280" cy="4663440"/>
+          </a:xfrm>
+          <a:prstGeom prst="roundRect">
+            <a:avLst/>
+          </a:prstGeom>
+          <a:solidFill>
+            <a:srgbClr val="161922"/>
+          </a:solidFill>
+          <a:ln w="15240">
+            <a:solidFill>
+              <a:srgbClr val="2E3445"/>
+            </a:solidFill>
+          </a:ln>
+        </p:spPr>
+        <p:style>
+          <a:lnRef idx="1">
+            <a:schemeClr val="accent1"/>
+          </a:lnRef>
+          <a:fillRef idx="3">
+            <a:schemeClr val="accent1"/>
+          </a:fillRef>
+          <a:effectRef idx="2">
+            <a:schemeClr val="accent1"/>
+          </a:effectRef>
+          <a:fontRef idx="minor">
+            <a:schemeClr val="lt1"/>
+          </a:fontRef>
+        </p:style>
+        <p:txBody>
+          <a:bodyPr rtlCol="0" anchor="ctr"/>
+          <a:lstStyle/>
+          <a:p>
+            <a:pPr algn="ctr"/>
+          </a:p>
+        </p:txBody>
+      </p:sp>
+      <p:sp>
+        <p:nvSpPr>
+          <p:cNvPr id="10" name="TextBox 9"/>
+          <p:cNvSpPr txBox="1"/>
+          <p:nvPr/>
+        </p:nvSpPr>
+        <p:spPr>
+          <a:xfrm>
+            <a:off x="4572000" y="1508760"/>
+            <a:ext cx="3017520" cy="4389120"/>
+          </a:xfrm>
+          <a:prstGeom prst="rect">
+            <a:avLst/>
+          </a:prstGeom>
+          <a:noFill/>
+        </p:spPr>
+        <p:txBody>
+          <a:bodyPr wrap="square">
+            <a:spAutoFit/>
+          </a:bodyPr>
+          <a:lstStyle/>
+          <a:p>
+            <a:pPr>
+              <a:spcAft>
+                <a:spcPts val="800"/>
+              </a:spcAft>
+              <a:defRPr sz="1300" b="1">
+                <a:solidFill>
+                  <a:srgbClr val="3EA6FF"/>
+                </a:solidFill>
+              </a:defRPr>
+            </a:pPr>
+            <a:r>
+              <a:t>Comedy &amp; Specialized Gaming</a:t>
+            </a:r>
+          </a:p>
+          <a:p>
+            <a:pPr>
+              <a:spcAft>
+                <a:spcPts val="600"/>
+              </a:spcAft>
+            </a:pPr>
+            <a:r>
+              <a:rPr b="1" sz="1050">
+                <a:solidFill>
+                  <a:srgbClr val="3EA6FF"/>
+                </a:solidFill>
+              </a:rPr>
+              <a:t>• </a:t>
+            </a:r>
+            <a:r>
+              <a:rPr b="1" sz="1000">
+                <a:solidFill>
+                  <a:srgbClr val="FFFFFF"/>
+                </a:solidFill>
+              </a:rPr>
+              <a:t>Samay Raina: </a:t>
+            </a:r>
+            <a:r>
+              <a:rPr sz="1000">
+                <a:solidFill>
+                  <a:srgbClr val="BEC3CD"/>
+                </a:solidFill>
+              </a:rPr>
+              <a:t>7.65M subscribers — Standup comedy &amp; India's Got Latent episodes featuring top guest panels.</a:t>
+            </a:r>
+          </a:p>
+          <a:p>
+            <a:pPr>
+              <a:spcAft>
+                <a:spcPts val="600"/>
+              </a:spcAft>
+            </a:pPr>
+            <a:r>
+              <a:rPr b="1" sz="1050">
+                <a:solidFill>
+                  <a:srgbClr val="3EA6FF"/>
+                </a:solidFill>
+              </a:rPr>
+              <a:t>• </a:t>
+            </a:r>
+            <a:r>
+              <a:rPr b="1" sz="1000">
+                <a:solidFill>
+                  <a:srgbClr val="FFFFFF"/>
+                </a:solidFill>
+              </a:rPr>
+              <a:t>Wemmbu: </a:t>
+            </a:r>
+            <a:r>
+              <a:rPr sz="1000">
+                <a:solidFill>
+                  <a:srgbClr val="BEC3CD"/>
+                </a:solidFill>
+              </a:rPr>
+              <a:t>3.45M subscribers — Hardcore Minecraft survival, traps, and secret base architectural walkthroughs.</a:t>
+            </a:r>
+          </a:p>
+          <a:p>
+            <a:pPr>
+              <a:spcAft>
+                <a:spcPts val="600"/>
+              </a:spcAft>
+            </a:pPr>
+            <a:r>
+              <a:rPr b="1" sz="1050">
+                <a:solidFill>
+                  <a:srgbClr val="3EA6FF"/>
+                </a:solidFill>
+              </a:rPr>
+              <a:t>• </a:t>
+            </a:r>
+            <a:r>
+              <a:rPr b="1" sz="1000">
+                <a:solidFill>
+                  <a:srgbClr val="FFFFFF"/>
+                </a:solidFill>
+              </a:rPr>
+              <a:t>Verified Community: </a:t>
+            </a:r>
+            <a:r>
+              <a:rPr sz="1000">
+                <a:solidFill>
+                  <a:srgbClr val="BEC3CD"/>
+                </a:solidFill>
+              </a:rPr>
+              <a:t>8 Verified Channels — Multi-category coverage spanning Coding, Comedy, Music, and Gaming.</a:t>
+            </a:r>
+          </a:p>
+        </p:txBody>
+      </p:sp>
+      <p:sp>
+        <p:nvSpPr>
+          <p:cNvPr id="11" name="Rounded Rectangle 10"/>
+          <p:cNvSpPr/>
+          <p:nvPr/>
+        </p:nvSpPr>
+        <p:spPr>
+          <a:xfrm>
+            <a:off x="8046720" y="1371600"/>
+            <a:ext cx="3383280" cy="4663440"/>
+          </a:xfrm>
+          <a:prstGeom prst="roundRect">
+            <a:avLst/>
+          </a:prstGeom>
+          <a:solidFill>
+            <a:srgbClr val="161922"/>
+          </a:solidFill>
+          <a:ln w="15240">
+            <a:solidFill>
+              <a:srgbClr val="2E3445"/>
+            </a:solidFill>
+          </a:ln>
+        </p:spPr>
+        <p:style>
+          <a:lnRef idx="1">
+            <a:schemeClr val="accent1"/>
+          </a:lnRef>
+          <a:fillRef idx="3">
+            <a:schemeClr val="accent1"/>
+          </a:fillRef>
+          <a:effectRef idx="2">
+            <a:schemeClr val="accent1"/>
+          </a:effectRef>
+          <a:fontRef idx="minor">
+            <a:schemeClr val="lt1"/>
+          </a:fontRef>
+        </p:style>
+        <p:txBody>
+          <a:bodyPr rtlCol="0" anchor="ctr"/>
+          <a:lstStyle/>
+          <a:p>
+            <a:pPr algn="ctr"/>
+          </a:p>
+        </p:txBody>
+      </p:sp>
+      <p:sp>
+        <p:nvSpPr>
+          <p:cNvPr id="12" name="TextBox 11"/>
+          <p:cNvSpPr txBox="1"/>
+          <p:nvPr/>
+        </p:nvSpPr>
+        <p:spPr>
+          <a:xfrm>
+            <a:off x="8229600" y="1508760"/>
+            <a:ext cx="3017520" cy="4389120"/>
+          </a:xfrm>
+          <a:prstGeom prst="rect">
+            <a:avLst/>
+          </a:prstGeom>
+          <a:noFill/>
+        </p:spPr>
+        <p:txBody>
+          <a:bodyPr wrap="square">
+            <a:spAutoFit/>
+          </a:bodyPr>
+          <a:lstStyle/>
+          <a:p>
+            <a:pPr>
+              <a:spcAft>
+                <a:spcPts val="800"/>
+              </a:spcAft>
+              <a:defRPr sz="1300" b="1">
+                <a:solidFill>
+                  <a:srgbClr val="2BA640"/>
+                </a:solidFill>
+              </a:defRPr>
+            </a:pPr>
+            <a:r>
+              <a:t>Syllabus &amp; Education Channels</a:t>
+            </a:r>
+          </a:p>
+          <a:p>
+            <a:pPr>
+              <a:spcAft>
+                <a:spcPts val="600"/>
+              </a:spcAft>
+            </a:pPr>
+            <a:r>
+              <a:rPr b="1" sz="1050">
+                <a:solidFill>
+                  <a:srgbClr val="2BA640"/>
+                </a:solidFill>
+              </a:rPr>
+              <a:t>• </a:t>
+            </a:r>
+            <a:r>
+              <a:rPr b="1" sz="1000">
+                <a:solidFill>
+                  <a:srgbClr val="FFFFFF"/>
+                </a:solidFill>
+              </a:rPr>
+              <a:t>freeCodeCamp.org: </a:t>
+            </a:r>
+            <a:r>
+              <a:rPr sz="1000">
+                <a:solidFill>
+                  <a:srgbClr val="BEC3CD"/>
+                </a:solidFill>
+              </a:rPr>
+              <a:t>12.0M subscribers — Industry standard open curriculum; features comprehensive 10-Hour DSA course.</a:t>
+            </a:r>
+          </a:p>
+          <a:p>
+            <a:pPr>
+              <a:spcAft>
+                <a:spcPts val="600"/>
+              </a:spcAft>
+            </a:pPr>
+            <a:r>
+              <a:rPr b="1" sz="1050">
+                <a:solidFill>
+                  <a:srgbClr val="2BA640"/>
+                </a:solidFill>
+              </a:rPr>
+              <a:t>• </a:t>
+            </a:r>
+            <a:r>
+              <a:rPr b="1" sz="1000">
+                <a:solidFill>
+                  <a:srgbClr val="FFFFFF"/>
+                </a:solidFill>
+              </a:rPr>
+              <a:t>Chai aur Code (Hitesh): </a:t>
+            </a:r>
+            <a:r>
+              <a:rPr sz="1000">
+                <a:solidFill>
+                  <a:srgbClr val="BEC3CD"/>
+                </a:solidFill>
+              </a:rPr>
+              <a:t>645K subscribers — Hindi developer education; features foundational React 19 series.</a:t>
+            </a:r>
+          </a:p>
+          <a:p>
+            <a:pPr>
+              <a:spcAft>
+                <a:spcPts val="600"/>
+              </a:spcAft>
+            </a:pPr>
+            <a:r>
+              <a:rPr b="1" sz="1050">
+                <a:solidFill>
+                  <a:srgbClr val="2BA640"/>
+                </a:solidFill>
+              </a:rPr>
+              <a:t>• </a:t>
+            </a:r>
+            <a:r>
+              <a:rPr b="1" sz="1000">
+                <a:solidFill>
+                  <a:srgbClr val="FFFFFF"/>
+                </a:solidFill>
+              </a:rPr>
+              <a:t>NeetCode / Striver: </a:t>
+            </a:r>
+            <a:r>
+              <a:rPr sz="1000">
+                <a:solidFill>
+                  <a:srgbClr val="BEC3CD"/>
+                </a:solidFill>
+              </a:rPr>
+              <a:t>980K subscribers — Data structures, competitive algorithms, and tech interview masterclasses.</a:t>
+            </a:r>
           </a:p>
         </p:txBody>
       </p:sp>

--- a/G15-PID-17.pptx
+++ b/G15-PID-17.pptx
@@ -3150,7 +3150,7 @@
         </p:nvSpPr>
         <p:spPr>
           <a:xfrm>
-            <a:off x="731520" y="731520"/>
+            <a:off x="731520" y="640080"/>
             <a:ext cx="731520" cy="73152"/>
           </a:xfrm>
           <a:prstGeom prst="rect">
@@ -3193,8 +3193,8 @@
         </p:nvSpPr>
         <p:spPr>
           <a:xfrm>
-            <a:off x="731520" y="960120"/>
-            <a:ext cx="10728655" cy="2011680"/>
+            <a:off x="731520" y="868680"/>
+            <a:ext cx="9326880" cy="2103120"/>
           </a:xfrm>
           <a:prstGeom prst="rect">
             <a:avLst/>
@@ -3208,7 +3208,7 @@
           <a:lstStyle/>
           <a:p>
             <a:pPr>
-              <a:defRPr sz="3600" b="1">
+              <a:defRPr sz="3800" b="1">
                 <a:solidFill>
                   <a:srgbClr val="FFFFFF"/>
                 </a:solidFill>
@@ -3221,9 +3221,9 @@
           <a:p>
             <a:pPr>
               <a:spcBef>
-                <a:spcPts val="400"/>
+                <a:spcPts val="600"/>
               </a:spcBef>
-              <a:defRPr sz="1600" b="1">
+              <a:defRPr sz="1700" b="1">
                 <a:solidFill>
                   <a:srgbClr val="FF0033"/>
                 </a:solidFill>
@@ -3236,9 +3236,9 @@
           <a:p>
             <a:pPr>
               <a:spcBef>
-                <a:spcPts val="400"/>
+                <a:spcPts val="600"/>
               </a:spcBef>
-              <a:defRPr sz="1300">
+              <a:defRPr sz="1400">
                 <a:solidFill>
                   <a:srgbClr val="3EA6FF"/>
                 </a:solidFill>
@@ -3266,8 +3266,8 @@
         </p:blipFill>
         <p:spPr>
           <a:xfrm>
-            <a:off x="9601200" y="822960"/>
-            <a:ext cx="5865460" cy="1097280"/>
+            <a:off x="9875520" y="822960"/>
+            <a:ext cx="6843037" cy="1280160"/>
           </a:xfrm>
           <a:prstGeom prst="rect">
             <a:avLst/>
@@ -3291,7 +3291,7 @@
           <a:solidFill>
             <a:srgbClr val="161922"/>
           </a:solidFill>
-          <a:ln>
+          <a:ln w="19050">
             <a:solidFill>
               <a:srgbClr val="2E3445"/>
             </a:solidFill>
@@ -3328,7 +3328,7 @@
         <p:spPr>
           <a:xfrm>
             <a:off x="1097280" y="3566160"/>
-            <a:ext cx="4572000" cy="2286000"/>
+            <a:ext cx="4572000" cy="2377440"/>
           </a:xfrm>
           <a:prstGeom prst="rect">
             <a:avLst/>
@@ -3343,47 +3343,53 @@
           <a:p>
             <a:pPr>
               <a:spcAft>
-                <a:spcPts val="800"/>
-              </a:spcAft>
+                <a:spcPts val="1000"/>
+              </a:spcAft>
+              <a:defRPr sz="1600" b="1">
+                <a:solidFill>
+                  <a:srgbClr val="FF0033"/>
+                </a:solidFill>
+              </a:defRPr>
+            </a:pPr>
+            <a:r>
+              <a:t>Supervised By:</a:t>
+            </a:r>
+          </a:p>
+          <a:p>
+            <a:pPr>
               <a:defRPr sz="1500" b="1">
                 <a:solidFill>
-                  <a:srgbClr val="FF0033"/>
+                  <a:srgbClr val="FFFFFF"/>
                 </a:solidFill>
               </a:defRPr>
             </a:pPr>
             <a:r>
-              <a:t>Supervised By:</a:t>
-            </a:r>
-          </a:p>
-          <a:p>
-            <a:pPr>
-              <a:defRPr sz="1400" b="1">
-                <a:solidFill>
-                  <a:srgbClr val="FFFFFF"/>
+              <a:t>Mr. Shubham Kumar</a:t>
+            </a:r>
+          </a:p>
+          <a:p>
+            <a:pPr>
+              <a:spcBef>
+                <a:spcPts val="400"/>
+              </a:spcBef>
+              <a:defRPr sz="1300">
+                <a:solidFill>
+                  <a:srgbClr val="CDD2DC"/>
                 </a:solidFill>
               </a:defRPr>
             </a:pPr>
             <a:r>
-              <a:t>Mr. Shubham Kumar</a:t>
-            </a:r>
-          </a:p>
-          <a:p>
-            <a:pPr>
-              <a:defRPr sz="1100">
-                <a:solidFill>
-                  <a:srgbClr val="BEC3CD"/>
-                </a:solidFill>
-              </a:defRPr>
-            </a:pPr>
-            <a:r>
               <a:t>Technical Trainer, Department of CSE</a:t>
             </a:r>
           </a:p>
           <a:p>
             <a:pPr>
-              <a:defRPr sz="1000">
-                <a:solidFill>
-                  <a:srgbClr val="8C919B"/>
+              <a:spcBef>
+                <a:spcPts val="400"/>
+              </a:spcBef>
+              <a:defRPr sz="1150">
+                <a:solidFill>
+                  <a:srgbClr val="969BA8"/>
                 </a:solidFill>
               </a:defRPr>
             </a:pPr>
@@ -3402,7 +3408,7 @@
         <p:spPr>
           <a:xfrm>
             <a:off x="6217920" y="3566160"/>
-            <a:ext cx="4846320" cy="2286000"/>
+            <a:ext cx="4846320" cy="2377440"/>
           </a:xfrm>
           <a:prstGeom prst="rect">
             <a:avLst/>
@@ -3417,9 +3423,9 @@
           <a:p>
             <a:pPr>
               <a:spcAft>
-                <a:spcPts val="800"/>
-              </a:spcAft>
-              <a:defRPr sz="1500" b="1">
+                <a:spcPts val="1000"/>
+              </a:spcAft>
+              <a:defRPr sz="1600" b="1">
                 <a:solidFill>
                   <a:srgbClr val="3EA6FF"/>
                 </a:solidFill>
@@ -3432,9 +3438,9 @@
           <a:p>
             <a:pPr>
               <a:spcAft>
-                <a:spcPts val="400"/>
-              </a:spcAft>
-              <a:defRPr sz="1150" b="1">
+                <a:spcPts val="500"/>
+              </a:spcAft>
+              <a:defRPr sz="1300" b="1">
                 <a:solidFill>
                   <a:srgbClr val="FFFFFF"/>
                 </a:solidFill>
@@ -3447,9 +3453,9 @@
           <a:p>
             <a:pPr>
               <a:spcAft>
-                <a:spcPts val="400"/>
-              </a:spcAft>
-              <a:defRPr sz="1150" b="1">
+                <a:spcPts val="500"/>
+              </a:spcAft>
+              <a:defRPr sz="1300" b="1">
                 <a:solidFill>
                   <a:srgbClr val="FFFFFF"/>
                 </a:solidFill>
@@ -3462,9 +3468,9 @@
           <a:p>
             <a:pPr>
               <a:spcAft>
-                <a:spcPts val="400"/>
-              </a:spcAft>
-              <a:defRPr sz="1150" b="1">
+                <a:spcPts val="500"/>
+              </a:spcAft>
+              <a:defRPr sz="1300" b="1">
                 <a:solidFill>
                   <a:srgbClr val="FFFFFF"/>
                 </a:solidFill>
@@ -3477,9 +3483,9 @@
           <a:p>
             <a:pPr>
               <a:spcAft>
-                <a:spcPts val="400"/>
-              </a:spcAft>
-              <a:defRPr sz="1150" b="1">
+                <a:spcPts val="500"/>
+              </a:spcAft>
+              <a:defRPr sz="1300" b="1">
                 <a:solidFill>
                   <a:srgbClr val="FFFFFF"/>
                 </a:solidFill>
@@ -3621,14 +3627,14 @@
           <a:lstStyle/>
           <a:p>
             <a:pPr>
-              <a:defRPr sz="1000" b="1">
+              <a:defRPr sz="1200" b="1">
                 <a:solidFill>
                   <a:srgbClr val="3EA6FF"/>
                 </a:solidFill>
               </a:defRPr>
             </a:pPr>
             <a:r>
-              <a:t>GROUP G15  •  PROJECT ID: G15-PID-17 (P-17)  •  EVALUATION-II (25CSE0203)</a:t>
+              <a:t>GROUP G15  •  PROJECT ID: G15-PID-17 (P-17)  •  EVALUATION-II</a:t>
             </a:r>
           </a:p>
         </p:txBody>
@@ -3641,8 +3647,8 @@
         </p:nvSpPr>
         <p:spPr>
           <a:xfrm>
-            <a:off x="731520" y="594360"/>
-            <a:ext cx="10728655" cy="594360"/>
+            <a:off x="731520" y="621792"/>
+            <a:ext cx="10728655" cy="640080"/>
           </a:xfrm>
           <a:prstGeom prst="rect">
             <a:avLst/>
@@ -3656,7 +3662,7 @@
           <a:lstStyle/>
           <a:p>
             <a:pPr>
-              <a:defRPr sz="2100" b="1">
+              <a:defRPr sz="2500" b="1">
                 <a:solidFill>
                   <a:srgbClr val="FFFFFF"/>
                 </a:solidFill>
@@ -3691,9 +3697,9 @@
           <a:lstStyle/>
           <a:p>
             <a:pPr>
-              <a:defRPr sz="900">
-                <a:solidFill>
-                  <a:srgbClr val="7B8293"/>
+              <a:defRPr sz="1050">
+                <a:solidFill>
+                  <a:srgbClr val="828A9B"/>
                 </a:solidFill>
               </a:defRPr>
             </a:pPr>
@@ -3712,7 +3718,7 @@
         <p:spPr>
           <a:xfrm>
             <a:off x="731520" y="1371600"/>
-            <a:ext cx="3383280" cy="4663440"/>
+            <a:ext cx="5943600" cy="4663440"/>
           </a:xfrm>
           <a:prstGeom prst="roundRect">
             <a:avLst/>
@@ -3720,7 +3726,7 @@
           <a:solidFill>
             <a:srgbClr val="161922"/>
           </a:solidFill>
-          <a:ln w="15240">
+          <a:ln w="17780">
             <a:solidFill>
               <a:srgbClr val="2E3445"/>
             </a:solidFill>
@@ -3756,8 +3762,8 @@
         </p:nvSpPr>
         <p:spPr>
           <a:xfrm>
-            <a:off x="914400" y="1508760"/>
-            <a:ext cx="3017520" cy="4389120"/>
+            <a:off x="932688" y="1536192"/>
+            <a:ext cx="5541264" cy="4334255"/>
           </a:xfrm>
           <a:prstGeom prst="rect">
             <a:avLst/>
@@ -3772,26 +3778,57 @@
           <a:p>
             <a:pPr>
               <a:spcAft>
+                <a:spcPts val="1000"/>
+              </a:spcAft>
+              <a:defRPr sz="1700" b="1">
+                <a:solidFill>
+                  <a:srgbClr val="FF0033"/>
+                </a:solidFill>
+              </a:defRPr>
+            </a:pPr>
+            <a:r>
+              <a:t>Responsive Breakpoints &amp; UX Architecture</a:t>
+            </a:r>
+          </a:p>
+          <a:p>
+            <a:pPr>
+              <a:spcAft>
                 <a:spcPts val="800"/>
               </a:spcAft>
-              <a:defRPr sz="1300" b="1">
+            </a:pPr>
+            <a:r>
+              <a:rPr b="1" sz="1500">
                 <a:solidFill>
                   <a:srgbClr val="FF0033"/>
                 </a:solidFill>
-              </a:defRPr>
-            </a:pPr>
-            <a:r>
-              <a:t>Responsive Breakpoints Architecture</a:t>
-            </a:r>
-          </a:p>
-          <a:p>
-            <a:pPr>
-              <a:spcAft>
-                <a:spcPts val="600"/>
-              </a:spcAft>
-            </a:pPr>
-            <a:r>
-              <a:rPr b="1" sz="1050">
+              </a:rPr>
+              <a:t>• </a:t>
+            </a:r>
+            <a:r>
+              <a:rPr b="1" sz="1400">
+                <a:solidFill>
+                  <a:srgbClr val="FFFFFF"/>
+                </a:solidFill>
+              </a:rPr>
+              <a:t>Desktop (&gt;1150px): </a:t>
+            </a:r>
+            <a:r>
+              <a:rPr sz="1400">
+                <a:solidFill>
+                  <a:srgbClr val="CDD2DC"/>
+                </a:solidFill>
+              </a:rPr>
+              <a:t>4-column video feed, collapsible full sidebar, dual-column Watch page with sidebar queue.</a:t>
+            </a:r>
+          </a:p>
+          <a:p>
+            <a:pPr>
+              <a:spcAft>
+                <a:spcPts val="800"/>
+              </a:spcAft>
+            </a:pPr>
+            <a:r>
+              <a:rPr b="1" sz="1500">
                 <a:solidFill>
                   <a:srgbClr val="FF0033"/>
                 </a:solidFill>
@@ -3799,30 +3836,30 @@
               <a:t>• </a:t>
             </a:r>
             <a:r>
-              <a:rPr b="1" sz="1000">
+              <a:rPr b="1" sz="1400">
                 <a:solidFill>
                   <a:srgbClr val="FFFFFF"/>
                 </a:solidFill>
               </a:rPr>
-              <a:t>Desktop (&gt;1150px): </a:t>
-            </a:r>
-            <a:r>
-              <a:rPr sz="1000">
-                <a:solidFill>
-                  <a:srgbClr val="BEC3CD"/>
-                </a:solidFill>
-              </a:rPr>
-              <a:t>4-column feed grid, collapsible full sidebar, dual-column Watch page with sidebar queue.</a:t>
-            </a:r>
-          </a:p>
-          <a:p>
-            <a:pPr>
-              <a:spcAft>
-                <a:spcPts val="600"/>
-              </a:spcAft>
-            </a:pPr>
-            <a:r>
-              <a:rPr b="1" sz="1050">
+              <a:t>Tablet (768px - 1150px): </a:t>
+            </a:r>
+            <a:r>
+              <a:rPr sz="1400">
+                <a:solidFill>
+                  <a:srgbClr val="CDD2DC"/>
+                </a:solidFill>
+              </a:rPr>
+              <a:t>2-3 column fluid grid, compact icon sidebar, stacked Watch page layout.</a:t>
+            </a:r>
+          </a:p>
+          <a:p>
+            <a:pPr>
+              <a:spcAft>
+                <a:spcPts val="800"/>
+              </a:spcAft>
+            </a:pPr>
+            <a:r>
+              <a:rPr b="1" sz="1500">
                 <a:solidFill>
                   <a:srgbClr val="FF0033"/>
                 </a:solidFill>
@@ -3830,30 +3867,30 @@
               <a:t>• </a:t>
             </a:r>
             <a:r>
-              <a:rPr b="1" sz="1000">
+              <a:rPr b="1" sz="1400">
                 <a:solidFill>
                   <a:srgbClr val="FFFFFF"/>
                 </a:solidFill>
               </a:rPr>
-              <a:t>Tablet (768px - 1150px): </a:t>
-            </a:r>
-            <a:r>
-              <a:rPr sz="1000">
-                <a:solidFill>
-                  <a:srgbClr val="BEC3CD"/>
-                </a:solidFill>
-              </a:rPr>
-              <a:t>2-3 column fluid grid, compact icon sidebar, stacked Watch page layout.</a:t>
-            </a:r>
-          </a:p>
-          <a:p>
-            <a:pPr>
-              <a:spcAft>
-                <a:spcPts val="600"/>
-              </a:spcAft>
-            </a:pPr>
-            <a:r>
-              <a:rPr b="1" sz="1050">
+              <a:t>Mobile (&lt;480px): </a:t>
+            </a:r>
+            <a:r>
+              <a:rPr sz="1400">
+                <a:solidFill>
+                  <a:srgbClr val="CDD2DC"/>
+                </a:solidFill>
+              </a:rPr>
+              <a:t>Single column full-bleed cards, bottom navigation parity, full-width video player.</a:t>
+            </a:r>
+          </a:p>
+          <a:p>
+            <a:pPr>
+              <a:spcAft>
+                <a:spcPts val="800"/>
+              </a:spcAft>
+            </a:pPr>
+            <a:r>
+              <a:rPr b="1" sz="1500">
                 <a:solidFill>
                   <a:srgbClr val="FF0033"/>
                 </a:solidFill>
@@ -3861,20 +3898,82 @@
               <a:t>• </a:t>
             </a:r>
             <a:r>
-              <a:rPr b="1" sz="1000">
+              <a:rPr b="1" sz="1400">
                 <a:solidFill>
                   <a:srgbClr val="FFFFFF"/>
                 </a:solidFill>
               </a:rPr>
-              <a:t>Mobile (&lt;480px): </a:t>
-            </a:r>
-            <a:r>
-              <a:rPr sz="1000">
-                <a:solidFill>
-                  <a:srgbClr val="BEC3CD"/>
-                </a:solidFill>
-              </a:rPr>
-              <a:t>Single column full-bleed cards, bottom navigation parity, full-width responsive video player.</a:t>
+              <a:t>Live Search Autocomplete: </a:t>
+            </a:r>
+            <a:r>
+              <a:rPr sz="1400">
+                <a:solidFill>
+                  <a:srgbClr val="CDD2DC"/>
+                </a:solidFill>
+              </a:rPr>
+              <a:t>Instant substring matching with floating dropdown and direct video routing.</a:t>
+            </a:r>
+          </a:p>
+          <a:p>
+            <a:pPr>
+              <a:spcAft>
+                <a:spcPts val="800"/>
+              </a:spcAft>
+            </a:pPr>
+            <a:r>
+              <a:rPr b="1" sz="1500">
+                <a:solidFill>
+                  <a:srgbClr val="FF0033"/>
+                </a:solidFill>
+              </a:rPr>
+              <a:t>• </a:t>
+            </a:r>
+            <a:r>
+              <a:rPr b="1" sz="1400">
+                <a:solidFill>
+                  <a:srgbClr val="FFFFFF"/>
+                </a:solidFill>
+              </a:rPr>
+              <a:t>Native Voice Search: </a:t>
+            </a:r>
+            <a:r>
+              <a:rPr sz="1400">
+                <a:solidFill>
+                  <a:srgbClr val="CDD2DC"/>
+                </a:solidFill>
+              </a:rPr>
+              <a:t>Web Speech API microphone integration converting voice input directly to search queries.</a:t>
+            </a:r>
+          </a:p>
+          <a:p>
+            <a:pPr>
+              <a:spcAft>
+                <a:spcPts val="800"/>
+              </a:spcAft>
+            </a:pPr>
+            <a:r>
+              <a:rPr b="1" sz="1500">
+                <a:solidFill>
+                  <a:srgbClr val="FF0033"/>
+                </a:solidFill>
+              </a:rPr>
+              <a:t>• </a:t>
+            </a:r>
+            <a:r>
+              <a:rPr b="1" sz="1400">
+                <a:solidFill>
+                  <a:srgbClr val="FFFFFF"/>
+                </a:solidFill>
+              </a:rPr>
+              <a:t>Shorts Feed Scroll-Snap: </a:t>
+            </a:r>
+            <a:r>
+              <a:rPr sz="1400">
+                <a:solidFill>
+                  <a:srgbClr val="CDD2DC"/>
+                </a:solidFill>
+              </a:rPr>
+              <a:t>CSS scroll-snap-type: y mandatory for smooth vertical reel browsing.</a:t>
             </a:r>
           </a:p>
         </p:txBody>
@@ -3887,8 +3986,8 @@
         </p:nvSpPr>
         <p:spPr>
           <a:xfrm>
-            <a:off x="4389120" y="1371600"/>
-            <a:ext cx="3383280" cy="4663440"/>
+            <a:off x="6949440" y="1371600"/>
+            <a:ext cx="4480560" cy="4663440"/>
           </a:xfrm>
           <a:prstGeom prst="roundRect">
             <a:avLst/>
@@ -3896,7 +3995,7 @@
           <a:solidFill>
             <a:srgbClr val="161922"/>
           </a:solidFill>
-          <a:ln w="15240">
+          <a:ln w="17780">
             <a:solidFill>
               <a:srgbClr val="2E3445"/>
             </a:solidFill>
@@ -3924,16 +4023,40 @@
           </a:p>
         </p:txBody>
       </p:sp>
-      <p:sp>
-        <p:nvSpPr>
-          <p:cNvPr id="10" name="TextBox 9"/>
+      <p:pic>
+        <p:nvPicPr>
+          <p:cNvPr id="10" name="Picture 9" descr="ui_search_clean.png"/>
+          <p:cNvPicPr>
+            <a:picLocks noChangeAspect="1"/>
+          </p:cNvPicPr>
+          <p:nvPr/>
+        </p:nvPicPr>
+        <p:blipFill>
+          <a:blip r:embed="rId2"/>
+          <a:stretch>
+            <a:fillRect/>
+          </a:stretch>
+        </p:blipFill>
+        <p:spPr>
+          <a:xfrm>
+            <a:off x="7178040" y="1645920"/>
+            <a:ext cx="4023360" cy="3760967"/>
+          </a:xfrm>
+          <a:prstGeom prst="rect">
+            <a:avLst/>
+          </a:prstGeom>
+        </p:spPr>
+      </p:pic>
+      <p:sp>
+        <p:nvSpPr>
+          <p:cNvPr id="11" name="TextBox 10"/>
           <p:cNvSpPr txBox="1"/>
           <p:nvPr/>
         </p:nvSpPr>
         <p:spPr>
           <a:xfrm>
-            <a:off x="4572000" y="1508760"/>
-            <a:ext cx="3017520" cy="4389120"/>
+            <a:off x="7178040" y="4114800"/>
+            <a:ext cx="4023360" cy="1645920"/>
           </a:xfrm>
           <a:prstGeom prst="rect">
             <a:avLst/>
@@ -3947,286 +4070,29 @@
           <a:lstStyle/>
           <a:p>
             <a:pPr>
-              <a:spcAft>
-                <a:spcPts val="800"/>
-              </a:spcAft>
-              <a:defRPr sz="1300" b="1">
+              <a:defRPr sz="1500" b="1">
                 <a:solidFill>
                   <a:srgbClr val="3EA6FF"/>
                 </a:solidFill>
               </a:defRPr>
             </a:pPr>
             <a:r>
-              <a:t>Live Search Autocomplete Engine</a:t>
-            </a:r>
-          </a:p>
-          <a:p>
-            <a:pPr>
-              <a:spcAft>
-                <a:spcPts val="600"/>
-              </a:spcAft>
-            </a:pPr>
-            <a:r>
-              <a:rPr b="1" sz="1050">
-                <a:solidFill>
-                  <a:srgbClr val="3EA6FF"/>
-                </a:solidFill>
-              </a:rPr>
-              <a:t>• </a:t>
-            </a:r>
-            <a:r>
-              <a:rPr b="1" sz="1000">
-                <a:solidFill>
-                  <a:srgbClr val="FFFFFF"/>
-                </a:solidFill>
-              </a:rPr>
-              <a:t>Instant Substring Matching: </a:t>
-            </a:r>
-            <a:r>
-              <a:rPr sz="1000">
-                <a:solidFill>
-                  <a:srgbClr val="BEC3CD"/>
-                </a:solidFill>
-              </a:rPr>
-              <a:t>Filters video titles, creator names, and tags in real-time as the user types.</a:t>
-            </a:r>
-          </a:p>
-          <a:p>
-            <a:pPr>
-              <a:spcAft>
-                <a:spcPts val="600"/>
-              </a:spcAft>
-            </a:pPr>
-            <a:r>
-              <a:rPr b="1" sz="1050">
-                <a:solidFill>
-                  <a:srgbClr val="3EA6FF"/>
-                </a:solidFill>
-              </a:rPr>
-              <a:t>• </a:t>
-            </a:r>
-            <a:r>
-              <a:rPr b="1" sz="1000">
-                <a:solidFill>
-                  <a:srgbClr val="FFFFFF"/>
-                </a:solidFill>
-              </a:rPr>
-              <a:t>Floating Dropdown Menu: </a:t>
-            </a:r>
-            <a:r>
-              <a:rPr sz="1000">
-                <a:solidFill>
-                  <a:srgbClr val="BEC3CD"/>
-                </a:solidFill>
-              </a:rPr>
-              <a:t>Rendered with subtle shadow elevation, keyboard accessibility, and outside-click dismiss.</a:t>
-            </a:r>
-          </a:p>
-          <a:p>
-            <a:pPr>
-              <a:spcAft>
-                <a:spcPts val="600"/>
-              </a:spcAft>
-            </a:pPr>
-            <a:r>
-              <a:rPr b="1" sz="1050">
-                <a:solidFill>
-                  <a:srgbClr val="3EA6FF"/>
-                </a:solidFill>
-              </a:rPr>
-              <a:t>• </a:t>
-            </a:r>
-            <a:r>
-              <a:rPr b="1" sz="1000">
-                <a:solidFill>
-                  <a:srgbClr val="FFFFFF"/>
-                </a:solidFill>
-              </a:rPr>
-              <a:t>Direct Video Launch: </a:t>
-            </a:r>
-            <a:r>
-              <a:rPr sz="1000">
-                <a:solidFill>
-                  <a:srgbClr val="BEC3CD"/>
-                </a:solidFill>
-              </a:rPr>
-              <a:t>Selecting any suggestion navigates straight to that video's dynamic player route.</a:t>
-            </a:r>
-          </a:p>
-        </p:txBody>
-      </p:sp>
-      <p:sp>
-        <p:nvSpPr>
-          <p:cNvPr id="11" name="Rounded Rectangle 10"/>
-          <p:cNvSpPr/>
-          <p:nvPr/>
-        </p:nvSpPr>
-        <p:spPr>
-          <a:xfrm>
-            <a:off x="8046720" y="1371600"/>
-            <a:ext cx="3383280" cy="4663440"/>
-          </a:xfrm>
-          <a:prstGeom prst="roundRect">
-            <a:avLst/>
-          </a:prstGeom>
-          <a:solidFill>
-            <a:srgbClr val="161922"/>
-          </a:solidFill>
-          <a:ln w="15240">
-            <a:solidFill>
-              <a:srgbClr val="2E3445"/>
-            </a:solidFill>
-          </a:ln>
-        </p:spPr>
-        <p:style>
-          <a:lnRef idx="1">
-            <a:schemeClr val="accent1"/>
-          </a:lnRef>
-          <a:fillRef idx="3">
-            <a:schemeClr val="accent1"/>
-          </a:fillRef>
-          <a:effectRef idx="2">
-            <a:schemeClr val="accent1"/>
-          </a:effectRef>
-          <a:fontRef idx="minor">
-            <a:schemeClr val="lt1"/>
-          </a:fontRef>
-        </p:style>
-        <p:txBody>
-          <a:bodyPr rtlCol="0" anchor="ctr"/>
-          <a:lstStyle/>
-          <a:p>
-            <a:pPr algn="ctr"/>
-          </a:p>
-        </p:txBody>
-      </p:sp>
-      <p:sp>
-        <p:nvSpPr>
-          <p:cNvPr id="12" name="TextBox 11"/>
-          <p:cNvSpPr txBox="1"/>
-          <p:nvPr/>
-        </p:nvSpPr>
-        <p:spPr>
-          <a:xfrm>
-            <a:off x="8229600" y="1508760"/>
-            <a:ext cx="3017520" cy="4389120"/>
-          </a:xfrm>
-          <a:prstGeom prst="rect">
-            <a:avLst/>
-          </a:prstGeom>
-          <a:noFill/>
-        </p:spPr>
-        <p:txBody>
-          <a:bodyPr wrap="square">
-            <a:spAutoFit/>
-          </a:bodyPr>
-          <a:lstStyle/>
-          <a:p>
-            <a:pPr>
-              <a:spcAft>
-                <a:spcPts val="800"/>
-              </a:spcAft>
-              <a:defRPr sz="1300" b="1">
-                <a:solidFill>
-                  <a:srgbClr val="2BA640"/>
+              <a:t>Live Search &amp; Suggestion Overlay</a:t>
+            </a:r>
+          </a:p>
+          <a:p>
+            <a:pPr>
+              <a:spcBef>
+                <a:spcPts val="400"/>
+              </a:spcBef>
+              <a:defRPr sz="1250">
+                <a:solidFill>
+                  <a:srgbClr val="CDD2DC"/>
                 </a:solidFill>
               </a:defRPr>
             </a:pPr>
             <a:r>
-              <a:t>Micro-Interactions &amp; Toast Bus</a:t>
-            </a:r>
-          </a:p>
-          <a:p>
-            <a:pPr>
-              <a:spcAft>
-                <a:spcPts val="600"/>
-              </a:spcAft>
-            </a:pPr>
-            <a:r>
-              <a:rPr b="1" sz="1050">
-                <a:solidFill>
-                  <a:srgbClr val="2BA640"/>
-                </a:solidFill>
-              </a:rPr>
-              <a:t>• </a:t>
-            </a:r>
-            <a:r>
-              <a:rPr b="1" sz="1000">
-                <a:solidFill>
-                  <a:srgbClr val="FFFFFF"/>
-                </a:solidFill>
-              </a:rPr>
-              <a:t>react-toastify Alerts: </a:t>
-            </a:r>
-            <a:r>
-              <a:rPr sz="1000">
-                <a:solidFill>
-                  <a:srgbClr val="BEC3CD"/>
-                </a:solidFill>
-              </a:rPr>
-              <a:t>Dark-themed feedback badges on likes, playlist additions, and clipboard copy.</a:t>
-            </a:r>
-          </a:p>
-          <a:p>
-            <a:pPr>
-              <a:spcAft>
-                <a:spcPts val="600"/>
-              </a:spcAft>
-            </a:pPr>
-            <a:r>
-              <a:rPr b="1" sz="1050">
-                <a:solidFill>
-                  <a:srgbClr val="2BA640"/>
-                </a:solidFill>
-              </a:rPr>
-              <a:t>• </a:t>
-            </a:r>
-            <a:r>
-              <a:rPr b="1" sz="1000">
-                <a:solidFill>
-                  <a:srgbClr val="FFFFFF"/>
-                </a:solidFill>
-              </a:rPr>
-              <a:t>Shorts Feed Scroll-Snap: </a:t>
-            </a:r>
-            <a:r>
-              <a:rPr sz="1000">
-                <a:solidFill>
-                  <a:srgbClr val="BEC3CD"/>
-                </a:solidFill>
-              </a:rPr>
-              <a:t>CSS scroll-snap-type: y mandatory for smooth vertical reel browsing.</a:t>
-            </a:r>
-          </a:p>
-          <a:p>
-            <a:pPr>
-              <a:spcAft>
-                <a:spcPts val="600"/>
-              </a:spcAft>
-            </a:pPr>
-            <a:r>
-              <a:rPr b="1" sz="1050">
-                <a:solidFill>
-                  <a:srgbClr val="2BA640"/>
-                </a:solidFill>
-              </a:rPr>
-              <a:t>• </a:t>
-            </a:r>
-            <a:r>
-              <a:rPr b="1" sz="1000">
-                <a:solidFill>
-                  <a:srgbClr val="FFFFFF"/>
-                </a:solidFill>
-              </a:rPr>
-              <a:t>Web Speech Voice Search: </a:t>
-            </a:r>
-            <a:r>
-              <a:rPr sz="1000">
-                <a:solidFill>
-                  <a:srgbClr val="BEC3CD"/>
-                </a:solidFill>
-              </a:rPr>
-              <a:t>Microphone transcription converting voice input to instant search queries.</a:t>
+              <a:t>Features real-time autocomplete suggestion cards with creator subtitles, clear button, and voice recognition pulse indicator.</a:t>
             </a:r>
           </a:p>
         </p:txBody>
@@ -4361,14 +4227,14 @@
           <a:lstStyle/>
           <a:p>
             <a:pPr>
-              <a:defRPr sz="1000" b="1">
+              <a:defRPr sz="1200" b="1">
                 <a:solidFill>
                   <a:srgbClr val="3EA6FF"/>
                 </a:solidFill>
               </a:defRPr>
             </a:pPr>
             <a:r>
-              <a:t>GROUP G15  •  PROJECT ID: G15-PID-17 (P-17)  •  EVALUATION-II (25CSE0203)</a:t>
+              <a:t>GROUP G15  •  PROJECT ID: G15-PID-17 (P-17)  •  EVALUATION-II</a:t>
             </a:r>
           </a:p>
         </p:txBody>
@@ -4381,8 +4247,8 @@
         </p:nvSpPr>
         <p:spPr>
           <a:xfrm>
-            <a:off x="731520" y="594360"/>
-            <a:ext cx="10728655" cy="594360"/>
+            <a:off x="731520" y="621792"/>
+            <a:ext cx="10728655" cy="640080"/>
           </a:xfrm>
           <a:prstGeom prst="rect">
             <a:avLst/>
@@ -4396,14 +4262,14 @@
           <a:lstStyle/>
           <a:p>
             <a:pPr>
-              <a:defRPr sz="2100" b="1">
+              <a:defRPr sz="2500" b="1">
                 <a:solidFill>
                   <a:srgbClr val="FFFFFF"/>
                 </a:solidFill>
               </a:defRPr>
             </a:pPr>
             <a:r>
-              <a:t>Curriculum Alignment &amp; Faculty Reference Verification</a:t>
+              <a:t>Technical Roadmap &amp; Scope for Phase 3 (MERN Stack)</a:t>
             </a:r>
           </a:p>
         </p:txBody>
@@ -4431,9 +4297,9 @@
           <a:lstStyle/>
           <a:p>
             <a:pPr>
-              <a:defRPr sz="900">
-                <a:solidFill>
-                  <a:srgbClr val="7B8293"/>
+              <a:defRPr sz="1050">
+                <a:solidFill>
+                  <a:srgbClr val="828A9B"/>
                 </a:solidFill>
               </a:defRPr>
             </a:pPr>
@@ -4452,7 +4318,7 @@
         <p:spPr>
           <a:xfrm>
             <a:off x="731520" y="1371600"/>
-            <a:ext cx="5212080" cy="4663440"/>
+            <a:ext cx="3383280" cy="4663440"/>
           </a:xfrm>
           <a:prstGeom prst="roundRect">
             <a:avLst/>
@@ -4460,7 +4326,7 @@
           <a:solidFill>
             <a:srgbClr val="161922"/>
           </a:solidFill>
-          <a:ln w="15240">
+          <a:ln w="17780">
             <a:solidFill>
               <a:srgbClr val="2E3445"/>
             </a:solidFill>
@@ -4496,8 +4362,8 @@
         </p:nvSpPr>
         <p:spPr>
           <a:xfrm>
-            <a:off x="914400" y="1508760"/>
-            <a:ext cx="4846320" cy="4389120"/>
+            <a:off x="932688" y="1536192"/>
+            <a:ext cx="2980944" cy="4334255"/>
           </a:xfrm>
           <a:prstGeom prst="rect">
             <a:avLst/>
@@ -4512,26 +4378,57 @@
           <a:p>
             <a:pPr>
               <a:spcAft>
+                <a:spcPts val="1000"/>
+              </a:spcAft>
+              <a:defRPr sz="1700" b="1">
+                <a:solidFill>
+                  <a:srgbClr val="FF0033"/>
+                </a:solidFill>
+              </a:defRPr>
+            </a:pPr>
+            <a:r>
+              <a:t>Phase 1: Foundation (Done)</a:t>
+            </a:r>
+          </a:p>
+          <a:p>
+            <a:pPr>
+              <a:spcAft>
                 <a:spcPts val="800"/>
               </a:spcAft>
-              <a:defRPr sz="1300" b="1">
+            </a:pPr>
+            <a:r>
+              <a:rPr b="1" sz="1500">
                 <a:solidFill>
                   <a:srgbClr val="FF0033"/>
                 </a:solidFill>
-              </a:defRPr>
-            </a:pPr>
-            <a:r>
-              <a:t>Class Reference Alignment (Mr. Shubham Kumar)</a:t>
-            </a:r>
-          </a:p>
-          <a:p>
-            <a:pPr>
-              <a:spcAft>
-                <a:spcPts val="600"/>
-              </a:spcAft>
-            </a:pPr>
-            <a:r>
-              <a:rPr b="1" sz="1050">
+              </a:rPr>
+              <a:t>• </a:t>
+            </a:r>
+            <a:r>
+              <a:rPr b="1" sz="1400">
+                <a:solidFill>
+                  <a:srgbClr val="FFFFFF"/>
+                </a:solidFill>
+              </a:rPr>
+              <a:t>Complete UI Layout: </a:t>
+            </a:r>
+            <a:r>
+              <a:rPr sz="1400">
+                <a:solidFill>
+                  <a:srgbClr val="CDD2DC"/>
+                </a:solidFill>
+              </a:rPr>
+              <a:t>Dark obsidian theme layout, YouTube visual branding, and icon system.</a:t>
+            </a:r>
+          </a:p>
+          <a:p>
+            <a:pPr>
+              <a:spcAft>
+                <a:spcPts val="800"/>
+              </a:spcAft>
+            </a:pPr>
+            <a:r>
+              <a:rPr b="1" sz="1500">
                 <a:solidFill>
                   <a:srgbClr val="FF0033"/>
                 </a:solidFill>
@@ -4539,30 +4436,30 @@
               <a:t>• </a:t>
             </a:r>
             <a:r>
-              <a:rPr b="1" sz="1000">
+              <a:rPr b="1" sz="1400">
                 <a:solidFill>
                   <a:srgbClr val="FFFFFF"/>
                 </a:solidFill>
               </a:rPr>
-              <a:t>Reference Codebase Inspection: </a:t>
-            </a:r>
-            <a:r>
-              <a:rPr sz="1000">
-                <a:solidFill>
-                  <a:srgbClr val="BEC3CD"/>
-                </a:solidFill>
-              </a:rPr>
-              <a:t>Validated against faculty GitHub repository (shubhamkumar123456/G15-updated).</a:t>
-            </a:r>
-          </a:p>
-          <a:p>
-            <a:pPr>
-              <a:spcAft>
-                <a:spcPts val="600"/>
-              </a:spcAft>
-            </a:pPr>
-            <a:r>
-              <a:rPr b="1" sz="1050">
+              <a:t>Video &amp; Shorts Grid: </a:t>
+            </a:r>
+            <a:r>
+              <a:rPr sz="1400">
+                <a:solidFill>
+                  <a:srgbClr val="CDD2DC"/>
+                </a:solidFill>
+              </a:rPr>
+              <a:t>Multi-category filtering pills and responsive card layout.</a:t>
+            </a:r>
+          </a:p>
+          <a:p>
+            <a:pPr>
+              <a:spcAft>
+                <a:spcPts val="800"/>
+              </a:spcAft>
+            </a:pPr>
+            <a:r>
+              <a:rPr b="1" sz="1500">
                 <a:solidFill>
                   <a:srgbClr val="FF0033"/>
                 </a:solidFill>
@@ -4570,82 +4467,20 @@
               <a:t>• </a:t>
             </a:r>
             <a:r>
-              <a:rPr b="1" sz="1000">
+              <a:rPr b="1" sz="1400">
                 <a:solidFill>
                   <a:srgbClr val="FFFFFF"/>
                 </a:solidFill>
               </a:rPr>
-              <a:t>Course Hook Implementations: </a:t>
-            </a:r>
-            <a:r>
-              <a:rPr sz="1000">
-                <a:solidFill>
-                  <a:srgbClr val="BEC3CD"/>
-                </a:solidFill>
-              </a:rPr>
-              <a:t>Fully implements useParams, useRef, useEffect, and useState in accordance with semester syllabus.</a:t>
-            </a:r>
-          </a:p>
-          <a:p>
-            <a:pPr>
-              <a:spcAft>
-                <a:spcPts val="600"/>
-              </a:spcAft>
-            </a:pPr>
-            <a:r>
-              <a:rPr b="1" sz="1050">
-                <a:solidFill>
-                  <a:srgbClr val="FF0033"/>
-                </a:solidFill>
-              </a:rPr>
-              <a:t>• </a:t>
-            </a:r>
-            <a:r>
-              <a:rPr b="1" sz="1000">
-                <a:solidFill>
-                  <a:srgbClr val="FFFFFF"/>
-                </a:solidFill>
-              </a:rPr>
-              <a:t>State Architecture: </a:t>
-            </a:r>
-            <a:r>
-              <a:rPr sz="1000">
-                <a:solidFill>
-                  <a:srgbClr val="BEC3CD"/>
-                </a:solidFill>
-              </a:rPr>
-              <a:t>Context API and persistent LocalStorage follow faculty architectural patterns demonstrated in class.</a:t>
-            </a:r>
-          </a:p>
-          <a:p>
-            <a:pPr>
-              <a:spcAft>
-                <a:spcPts val="600"/>
-              </a:spcAft>
-            </a:pPr>
-            <a:r>
-              <a:rPr b="1" sz="1050">
-                <a:solidFill>
-                  <a:srgbClr val="FF0033"/>
-                </a:solidFill>
-              </a:rPr>
-              <a:t>• </a:t>
-            </a:r>
-            <a:r>
-              <a:rPr b="1" sz="1000">
-                <a:solidFill>
-                  <a:srgbClr val="FFFFFF"/>
-                </a:solidFill>
-              </a:rPr>
-              <a:t>Faculty Recommendations: </a:t>
-            </a:r>
-            <a:r>
-              <a:rPr sz="1000">
-                <a:solidFill>
-                  <a:srgbClr val="BEC3CD"/>
-                </a:solidFill>
-              </a:rPr>
-              <a:t>Incorporated react-toastify as explicitly recommended by faculty during lab lectures.</a:t>
+              <a:t>Basic Navigation: </a:t>
+            </a:r>
+            <a:r>
+              <a:rPr sz="1400">
+                <a:solidFill>
+                  <a:srgbClr val="CDD2DC"/>
+                </a:solidFill>
+              </a:rPr>
+              <a:t>Sidebar navigation tabs and static search query input.</a:t>
             </a:r>
           </a:p>
         </p:txBody>
@@ -4658,8 +4493,8 @@
         </p:nvSpPr>
         <p:spPr>
           <a:xfrm>
-            <a:off x="6217920" y="1371600"/>
-            <a:ext cx="5212080" cy="4663440"/>
+            <a:off x="4389120" y="1371600"/>
+            <a:ext cx="3383280" cy="4663440"/>
           </a:xfrm>
           <a:prstGeom prst="roundRect">
             <a:avLst/>
@@ -4667,7 +4502,7 @@
           <a:solidFill>
             <a:srgbClr val="161922"/>
           </a:solidFill>
-          <a:ln w="15240">
+          <a:ln w="17780">
             <a:solidFill>
               <a:srgbClr val="2E3445"/>
             </a:solidFill>
@@ -4703,8 +4538,8 @@
         </p:nvSpPr>
         <p:spPr>
           <a:xfrm>
-            <a:off x="6400800" y="1508760"/>
-            <a:ext cx="4846320" cy="4389120"/>
+            <a:off x="4590288" y="1536192"/>
+            <a:ext cx="2980944" cy="4334255"/>
           </a:xfrm>
           <a:prstGeom prst="rect">
             <a:avLst/>
@@ -4719,26 +4554,202 @@
           <a:p>
             <a:pPr>
               <a:spcAft>
+                <a:spcPts val="1000"/>
+              </a:spcAft>
+              <a:defRPr sz="1700" b="1">
+                <a:solidFill>
+                  <a:srgbClr val="3EA6FF"/>
+                </a:solidFill>
+              </a:defRPr>
+            </a:pPr>
+            <a:r>
+              <a:t>Phase 2: SPA (Current)</a:t>
+            </a:r>
+          </a:p>
+          <a:p>
+            <a:pPr>
+              <a:spcAft>
                 <a:spcPts val="800"/>
               </a:spcAft>
-              <a:defRPr sz="1300" b="1">
+            </a:pPr>
+            <a:r>
+              <a:rPr b="1" sz="1500">
+                <a:solidFill>
+                  <a:srgbClr val="3EA6FF"/>
+                </a:solidFill>
+              </a:rPr>
+              <a:t>• </a:t>
+            </a:r>
+            <a:r>
+              <a:rPr b="1" sz="1400">
+                <a:solidFill>
+                  <a:srgbClr val="FFFFFF"/>
+                </a:solidFill>
+              </a:rPr>
+              <a:t>Dynamic Route: </a:t>
+            </a:r>
+            <a:r>
+              <a:rPr sz="1400">
+                <a:solidFill>
+                  <a:srgbClr val="CDD2DC"/>
+                </a:solidFill>
+              </a:rPr>
+              <a:t>/watch/:id via useParams with embedded 16:9 streaming.</a:t>
+            </a:r>
+          </a:p>
+          <a:p>
+            <a:pPr>
+              <a:spcAft>
+                <a:spcPts val="800"/>
+              </a:spcAft>
+            </a:pPr>
+            <a:r>
+              <a:rPr b="1" sz="1500">
+                <a:solidFill>
+                  <a:srgbClr val="3EA6FF"/>
+                </a:solidFill>
+              </a:rPr>
+              <a:t>• </a:t>
+            </a:r>
+            <a:r>
+              <a:rPr b="1" sz="1400">
+                <a:solidFill>
+                  <a:srgbClr val="FFFFFF"/>
+                </a:solidFill>
+              </a:rPr>
+              <a:t>Interactive Comments: </a:t>
+            </a:r>
+            <a:r>
+              <a:rPr sz="1400">
+                <a:solidFill>
+                  <a:srgbClr val="CDD2DC"/>
+                </a:solidFill>
+              </a:rPr>
+              <a:t>DOM focus control via useRef and Top/Newest sorting.</a:t>
+            </a:r>
+          </a:p>
+          <a:p>
+            <a:pPr>
+              <a:spcAft>
+                <a:spcPts val="800"/>
+              </a:spcAft>
+            </a:pPr>
+            <a:r>
+              <a:rPr b="1" sz="1500">
+                <a:solidFill>
+                  <a:srgbClr val="3EA6FF"/>
+                </a:solidFill>
+              </a:rPr>
+              <a:t>• </a:t>
+            </a:r>
+            <a:r>
+              <a:rPr b="1" sz="1400">
+                <a:solidFill>
+                  <a:srgbClr val="FFFFFF"/>
+                </a:solidFill>
+              </a:rPr>
+              <a:t>State Bus &amp; Alerts: </a:t>
+            </a:r>
+            <a:r>
+              <a:rPr sz="1400">
+                <a:solidFill>
+                  <a:srgbClr val="CDD2DC"/>
+                </a:solidFill>
+              </a:rPr>
+              <a:t>Centralized Context API, LocalStorage sync, react-toastify, and Voice Search.</a:t>
+            </a:r>
+          </a:p>
+        </p:txBody>
+      </p:sp>
+      <p:sp>
+        <p:nvSpPr>
+          <p:cNvPr id="11" name="Rounded Rectangle 10"/>
+          <p:cNvSpPr/>
+          <p:nvPr/>
+        </p:nvSpPr>
+        <p:spPr>
+          <a:xfrm>
+            <a:off x="8046720" y="1371600"/>
+            <a:ext cx="3383280" cy="4663440"/>
+          </a:xfrm>
+          <a:prstGeom prst="roundRect">
+            <a:avLst/>
+          </a:prstGeom>
+          <a:solidFill>
+            <a:srgbClr val="161922"/>
+          </a:solidFill>
+          <a:ln w="17780">
+            <a:solidFill>
+              <a:srgbClr val="2E3445"/>
+            </a:solidFill>
+          </a:ln>
+        </p:spPr>
+        <p:style>
+          <a:lnRef idx="1">
+            <a:schemeClr val="accent1"/>
+          </a:lnRef>
+          <a:fillRef idx="3">
+            <a:schemeClr val="accent1"/>
+          </a:fillRef>
+          <a:effectRef idx="2">
+            <a:schemeClr val="accent1"/>
+          </a:effectRef>
+          <a:fontRef idx="minor">
+            <a:schemeClr val="lt1"/>
+          </a:fontRef>
+        </p:style>
+        <p:txBody>
+          <a:bodyPr rtlCol="0" anchor="ctr"/>
+          <a:lstStyle/>
+          <a:p>
+            <a:pPr algn="ctr"/>
+          </a:p>
+        </p:txBody>
+      </p:sp>
+      <p:sp>
+        <p:nvSpPr>
+          <p:cNvPr id="12" name="TextBox 11"/>
+          <p:cNvSpPr txBox="1"/>
+          <p:nvPr/>
+        </p:nvSpPr>
+        <p:spPr>
+          <a:xfrm>
+            <a:off x="8247888" y="1536192"/>
+            <a:ext cx="2980944" cy="4334255"/>
+          </a:xfrm>
+          <a:prstGeom prst="rect">
+            <a:avLst/>
+          </a:prstGeom>
+          <a:noFill/>
+        </p:spPr>
+        <p:txBody>
+          <a:bodyPr wrap="square">
+            <a:spAutoFit/>
+          </a:bodyPr>
+          <a:lstStyle/>
+          <a:p>
+            <a:pPr>
+              <a:spcAft>
+                <a:spcPts val="1000"/>
+              </a:spcAft>
+              <a:defRPr sz="1700" b="1">
                 <a:solidFill>
                   <a:srgbClr val="2BA640"/>
                 </a:solidFill>
               </a:defRPr>
             </a:pPr>
             <a:r>
-              <a:t>Evaluation-II Viva Readiness &amp; Proofs</a:t>
-            </a:r>
-          </a:p>
-          <a:p>
-            <a:pPr>
-              <a:spcAft>
-                <a:spcPts val="600"/>
-              </a:spcAft>
-            </a:pPr>
-            <a:r>
-              <a:rPr b="1" sz="1050">
+              <a:t>Phase 3: Full Stack (Roadmap)</a:t>
+            </a:r>
+          </a:p>
+          <a:p>
+            <a:pPr>
+              <a:spcAft>
+                <a:spcPts val="800"/>
+              </a:spcAft>
+            </a:pPr>
+            <a:r>
+              <a:rPr b="1" sz="1500">
                 <a:solidFill>
                   <a:srgbClr val="2BA640"/>
                 </a:solidFill>
@@ -4746,30 +4757,30 @@
               <a:t>• </a:t>
             </a:r>
             <a:r>
-              <a:rPr b="1" sz="1000">
+              <a:rPr b="1" sz="1400">
                 <a:solidFill>
                   <a:srgbClr val="FFFFFF"/>
                 </a:solidFill>
               </a:rPr>
-              <a:t>Strict Production Separation: </a:t>
-            </a:r>
-            <a:r>
-              <a:rPr sz="1000">
-                <a:solidFill>
-                  <a:srgbClr val="BEC3CD"/>
-                </a:solidFill>
-              </a:rPr>
-              <a:t>Private viva preparation guides and scratch notes kept strictly local; only production code pushed to GitHub.</a:t>
-            </a:r>
-          </a:p>
-          <a:p>
-            <a:pPr>
-              <a:spcAft>
-                <a:spcPts val="600"/>
-              </a:spcAft>
-            </a:pPr>
-            <a:r>
-              <a:rPr b="1" sz="1050">
+              <a:t>Node.js &amp; Express API: </a:t>
+            </a:r>
+            <a:r>
+              <a:rPr sz="1400">
+                <a:solidFill>
+                  <a:srgbClr val="CDD2DC"/>
+                </a:solidFill>
+              </a:rPr>
+              <a:t>RESTful backend endpoints replacing mock JSON dataset.</a:t>
+            </a:r>
+          </a:p>
+          <a:p>
+            <a:pPr>
+              <a:spcAft>
+                <a:spcPts val="800"/>
+              </a:spcAft>
+            </a:pPr>
+            <a:r>
+              <a:rPr b="1" sz="1500">
                 <a:solidFill>
                   <a:srgbClr val="2BA640"/>
                 </a:solidFill>
@@ -4777,30 +4788,30 @@
               <a:t>• </a:t>
             </a:r>
             <a:r>
-              <a:rPr b="1" sz="1000">
+              <a:rPr b="1" sz="1400">
                 <a:solidFill>
                   <a:srgbClr val="FFFFFF"/>
                 </a:solidFill>
               </a:rPr>
-              <a:t>Measurable Metrics: </a:t>
-            </a:r>
-            <a:r>
-              <a:rPr sz="1000">
-                <a:solidFill>
-                  <a:srgbClr val="BEC3CD"/>
-                </a:solidFill>
-              </a:rPr>
-              <a:t>Zero external redirect bounces; 100% in-app streaming; 15 videos, 8 shorts across 9 categories.</a:t>
-            </a:r>
-          </a:p>
-          <a:p>
-            <a:pPr>
-              <a:spcAft>
-                <a:spcPts val="600"/>
-              </a:spcAft>
-            </a:pPr>
-            <a:r>
-              <a:rPr b="1" sz="1050">
+              <a:t>MongoDB &amp; Mongoose: </a:t>
+            </a:r>
+            <a:r>
+              <a:rPr sz="1400">
+                <a:solidFill>
+                  <a:srgbClr val="CDD2DC"/>
+                </a:solidFill>
+              </a:rPr>
+              <a:t>Cloud database storing user profiles, videos, and comments.</a:t>
+            </a:r>
+          </a:p>
+          <a:p>
+            <a:pPr>
+              <a:spcAft>
+                <a:spcPts val="800"/>
+              </a:spcAft>
+            </a:pPr>
+            <a:r>
+              <a:rPr b="1" sz="1500">
                 <a:solidFill>
                   <a:srgbClr val="2BA640"/>
                 </a:solidFill>
@@ -4808,30 +4819,30 @@
               <a:t>• </a:t>
             </a:r>
             <a:r>
-              <a:rPr b="1" sz="1000">
+              <a:rPr b="1" sz="1400">
                 <a:solidFill>
                   <a:srgbClr val="FFFFFF"/>
                 </a:solidFill>
               </a:rPr>
-              <a:t>Component Explainability: </a:t>
-            </a:r>
-            <a:r>
-              <a:rPr sz="1000">
-                <a:solidFill>
-                  <a:srgbClr val="BEC3CD"/>
-                </a:solidFill>
-              </a:rPr>
-              <a:t>Code written with clean modularity, standard variable naming, and clear functional boundaries for confident viva defense.</a:t>
-            </a:r>
-          </a:p>
-          <a:p>
-            <a:pPr>
-              <a:spcAft>
-                <a:spcPts val="600"/>
-              </a:spcAft>
-            </a:pPr>
-            <a:r>
-              <a:rPr b="1" sz="1050">
+              <a:t>JWT Authentication: </a:t>
+            </a:r>
+            <a:r>
+              <a:rPr sz="1400">
+                <a:solidFill>
+                  <a:srgbClr val="CDD2DC"/>
+                </a:solidFill>
+              </a:rPr>
+              <a:t>Server-verified authentication with encrypted user tokens.</a:t>
+            </a:r>
+          </a:p>
+          <a:p>
+            <a:pPr>
+              <a:spcAft>
+                <a:spcPts val="800"/>
+              </a:spcAft>
+            </a:pPr>
+            <a:r>
+              <a:rPr b="1" sz="1500">
                 <a:solidFill>
                   <a:srgbClr val="2BA640"/>
                 </a:solidFill>
@@ -4839,20 +4850,20 @@
               <a:t>• </a:t>
             </a:r>
             <a:r>
-              <a:rPr b="1" sz="1000">
+              <a:rPr b="1" sz="1400">
                 <a:solidFill>
                   <a:srgbClr val="FFFFFF"/>
                 </a:solidFill>
               </a:rPr>
-              <a:t>Standard File Naming: </a:t>
-            </a:r>
-            <a:r>
-              <a:rPr sz="1000">
-                <a:solidFill>
-                  <a:srgbClr val="BEC3CD"/>
-                </a:solidFill>
-              </a:rPr>
-              <a:t>Output deck formatted strictly as G15-PID-17.pdf and G15-PID-17.pptx for formal presentation.</a:t>
+              <a:t>Redux Toolkit: </a:t>
+            </a:r>
+            <a:r>
+              <a:rPr sz="1400">
+                <a:solidFill>
+                  <a:srgbClr val="CDD2DC"/>
+                </a:solidFill>
+              </a:rPr>
+              <a:t>Advanced cached state management and optimistic mutations.</a:t>
             </a:r>
           </a:p>
         </p:txBody>
@@ -4987,14 +4998,14 @@
           <a:lstStyle/>
           <a:p>
             <a:pPr>
-              <a:defRPr sz="1000" b="1">
+              <a:defRPr sz="1200" b="1">
                 <a:solidFill>
                   <a:srgbClr val="3EA6FF"/>
                 </a:solidFill>
               </a:defRPr>
             </a:pPr>
             <a:r>
-              <a:t>GROUP G15  •  PROJECT ID: G15-PID-17 (P-17)  •  EVALUATION-II (25CSE0203)</a:t>
+              <a:t>GROUP G15  •  PROJECT ID: G15-PID-17 (P-17)  •  EVALUATION-II</a:t>
             </a:r>
           </a:p>
         </p:txBody>
@@ -5007,8 +5018,8 @@
         </p:nvSpPr>
         <p:spPr>
           <a:xfrm>
-            <a:off x="731520" y="594360"/>
-            <a:ext cx="10728655" cy="594360"/>
+            <a:off x="731520" y="621792"/>
+            <a:ext cx="10728655" cy="640080"/>
           </a:xfrm>
           <a:prstGeom prst="rect">
             <a:avLst/>
@@ -5022,14 +5033,14 @@
           <a:lstStyle/>
           <a:p>
             <a:pPr>
-              <a:defRPr sz="2100" b="1">
+              <a:defRPr sz="2500" b="1">
                 <a:solidFill>
                   <a:srgbClr val="FFFFFF"/>
                 </a:solidFill>
               </a:defRPr>
             </a:pPr>
             <a:r>
-              <a:t>Technical Roadmap &amp; Scope for Phase 3 (MERN Stack)</a:t>
+              <a:t>Summary, Live Demonstration &amp; Viva Readiness</a:t>
             </a:r>
           </a:p>
         </p:txBody>
@@ -5057,9 +5068,9 @@
           <a:lstStyle/>
           <a:p>
             <a:pPr>
-              <a:defRPr sz="900">
-                <a:solidFill>
-                  <a:srgbClr val="7B8293"/>
+              <a:defRPr sz="1050">
+                <a:solidFill>
+                  <a:srgbClr val="828A9B"/>
                 </a:solidFill>
               </a:defRPr>
             </a:pPr>
@@ -5078,7 +5089,7 @@
         <p:spPr>
           <a:xfrm>
             <a:off x="731520" y="1371600"/>
-            <a:ext cx="3383280" cy="4663440"/>
+            <a:ext cx="5212080" cy="4663440"/>
           </a:xfrm>
           <a:prstGeom prst="roundRect">
             <a:avLst/>
@@ -5086,7 +5097,7 @@
           <a:solidFill>
             <a:srgbClr val="161922"/>
           </a:solidFill>
-          <a:ln w="15240">
+          <a:ln w="17780">
             <a:solidFill>
               <a:srgbClr val="2E3445"/>
             </a:solidFill>
@@ -5122,8 +5133,8 @@
         </p:nvSpPr>
         <p:spPr>
           <a:xfrm>
-            <a:off x="914400" y="1508760"/>
-            <a:ext cx="3017520" cy="4389120"/>
+            <a:off x="932688" y="1536192"/>
+            <a:ext cx="4809744" cy="4334255"/>
           </a:xfrm>
           <a:prstGeom prst="rect">
             <a:avLst/>
@@ -5138,26 +5149,57 @@
           <a:p>
             <a:pPr>
               <a:spcAft>
+                <a:spcPts val="1000"/>
+              </a:spcAft>
+              <a:defRPr sz="1700" b="1">
+                <a:solidFill>
+                  <a:srgbClr val="FF0033"/>
+                </a:solidFill>
+              </a:defRPr>
+            </a:pPr>
+            <a:r>
+              <a:t>Phase 2 Engineering Achievements</a:t>
+            </a:r>
+          </a:p>
+          <a:p>
+            <a:pPr>
+              <a:spcAft>
                 <a:spcPts val="800"/>
               </a:spcAft>
-              <a:defRPr sz="1300" b="1">
+            </a:pPr>
+            <a:r>
+              <a:rPr b="1" sz="1500">
                 <a:solidFill>
                   <a:srgbClr val="FF0033"/>
                 </a:solidFill>
-              </a:defRPr>
-            </a:pPr>
-            <a:r>
-              <a:t>Phase 1: Foundation (Completed)</a:t>
-            </a:r>
-          </a:p>
-          <a:p>
-            <a:pPr>
-              <a:spcAft>
-                <a:spcPts val="600"/>
-              </a:spcAft>
-            </a:pPr>
-            <a:r>
-              <a:rPr b="1" sz="1050">
+              </a:rPr>
+              <a:t>• </a:t>
+            </a:r>
+            <a:r>
+              <a:rPr b="1" sz="1400">
+                <a:solidFill>
+                  <a:srgbClr val="FFFFFF"/>
+                </a:solidFill>
+              </a:rPr>
+              <a:t>Zero Bounce In-App Streaming: </a:t>
+            </a:r>
+            <a:r>
+              <a:rPr sz="1400">
+                <a:solidFill>
+                  <a:srgbClr val="CDD2DC"/>
+                </a:solidFill>
+              </a:rPr>
+              <a:t>Fully functional /watch/:id route replacing external YouTube link-outs.</a:t>
+            </a:r>
+          </a:p>
+          <a:p>
+            <a:pPr>
+              <a:spcAft>
+                <a:spcPts val="800"/>
+              </a:spcAft>
+            </a:pPr>
+            <a:r>
+              <a:rPr b="1" sz="1500">
                 <a:solidFill>
                   <a:srgbClr val="FF0033"/>
                 </a:solidFill>
@@ -5165,30 +5207,30 @@
               <a:t>• </a:t>
             </a:r>
             <a:r>
-              <a:rPr b="1" sz="1000">
+              <a:rPr b="1" sz="1400">
                 <a:solidFill>
                   <a:srgbClr val="FFFFFF"/>
                 </a:solidFill>
               </a:rPr>
-              <a:t>Complete UI Layout: </a:t>
-            </a:r>
-            <a:r>
-              <a:rPr sz="1000">
-                <a:solidFill>
-                  <a:srgbClr val="BEC3CD"/>
-                </a:solidFill>
-              </a:rPr>
-              <a:t>Dark theme layout, YouTube visual branding, and icon system.</a:t>
-            </a:r>
-          </a:p>
-          <a:p>
-            <a:pPr>
-              <a:spcAft>
-                <a:spcPts val="600"/>
-              </a:spcAft>
-            </a:pPr>
-            <a:r>
-              <a:rPr b="1" sz="1050">
+              <a:t>Strategic DOM Control: </a:t>
+            </a:r>
+            <a:r>
+              <a:rPr sz="1400">
+                <a:solidFill>
+                  <a:srgbClr val="CDD2DC"/>
+                </a:solidFill>
+              </a:rPr>
+              <a:t>useRef applied for auto-focusing comments and smooth scroll transitions.</a:t>
+            </a:r>
+          </a:p>
+          <a:p>
+            <a:pPr>
+              <a:spcAft>
+                <a:spcPts val="800"/>
+              </a:spcAft>
+            </a:pPr>
+            <a:r>
+              <a:rPr b="1" sz="1500">
                 <a:solidFill>
                   <a:srgbClr val="FF0033"/>
                 </a:solidFill>
@@ -5196,30 +5238,30 @@
               <a:t>• </a:t>
             </a:r>
             <a:r>
-              <a:rPr b="1" sz="1000">
+              <a:rPr b="1" sz="1400">
                 <a:solidFill>
                   <a:srgbClr val="FFFFFF"/>
                 </a:solidFill>
               </a:rPr>
-              <a:t>Video &amp; Shorts Grid: </a:t>
-            </a:r>
-            <a:r>
-              <a:rPr sz="1000">
-                <a:solidFill>
-                  <a:srgbClr val="BEC3CD"/>
-                </a:solidFill>
-              </a:rPr>
-              <a:t>Multi-category filtering pills and responsive card layout.</a:t>
-            </a:r>
-          </a:p>
-          <a:p>
-            <a:pPr>
-              <a:spcAft>
-                <a:spcPts val="600"/>
-              </a:spcAft>
-            </a:pPr>
-            <a:r>
-              <a:rPr b="1" sz="1050">
+              <a:t>Scalable State Management: </a:t>
+            </a:r>
+            <a:r>
+              <a:rPr sz="1400">
+                <a:solidFill>
+                  <a:srgbClr val="CDD2DC"/>
+                </a:solidFill>
+              </a:rPr>
+              <a:t>Global React Context API synchronized seamlessly with browser localStorage.</a:t>
+            </a:r>
+          </a:p>
+          <a:p>
+            <a:pPr>
+              <a:spcAft>
+                <a:spcPts val="800"/>
+              </a:spcAft>
+            </a:pPr>
+            <a:r>
+              <a:rPr b="1" sz="1500">
                 <a:solidFill>
                   <a:srgbClr val="FF0033"/>
                 </a:solidFill>
@@ -5227,20 +5269,20 @@
               <a:t>• </a:t>
             </a:r>
             <a:r>
-              <a:rPr b="1" sz="1000">
+              <a:rPr b="1" sz="1400">
                 <a:solidFill>
                   <a:srgbClr val="FFFFFF"/>
                 </a:solidFill>
               </a:rPr>
-              <a:t>Navigation: </a:t>
-            </a:r>
-            <a:r>
-              <a:rPr sz="1000">
-                <a:solidFill>
-                  <a:srgbClr val="BEC3CD"/>
-                </a:solidFill>
-              </a:rPr>
-              <a:t>Sidebar navigation tabs and basic search input.</a:t>
+              <a:t>Teacher-Recommended UX: </a:t>
+            </a:r>
+            <a:r>
+              <a:rPr sz="1400">
+                <a:solidFill>
+                  <a:srgbClr val="CDD2DC"/>
+                </a:solidFill>
+              </a:rPr>
+              <a:t>Integrated react-toastify alerts and native Web Speech voice search.</a:t>
             </a:r>
           </a:p>
         </p:txBody>
@@ -5253,8 +5295,8 @@
         </p:nvSpPr>
         <p:spPr>
           <a:xfrm>
-            <a:off x="4389120" y="1371600"/>
-            <a:ext cx="3383280" cy="4663440"/>
+            <a:off x="6217920" y="1371600"/>
+            <a:ext cx="5212080" cy="4663440"/>
           </a:xfrm>
           <a:prstGeom prst="roundRect">
             <a:avLst/>
@@ -5262,7 +5304,7 @@
           <a:solidFill>
             <a:srgbClr val="161922"/>
           </a:solidFill>
-          <a:ln w="15240">
+          <a:ln w="17780">
             <a:solidFill>
               <a:srgbClr val="2E3445"/>
             </a:solidFill>
@@ -5298,8 +5340,8 @@
         </p:nvSpPr>
         <p:spPr>
           <a:xfrm>
-            <a:off x="4572000" y="1508760"/>
-            <a:ext cx="3017520" cy="4389120"/>
+            <a:off x="6419088" y="1536192"/>
+            <a:ext cx="4809744" cy="4334255"/>
           </a:xfrm>
           <a:prstGeom prst="rect">
             <a:avLst/>
@@ -5314,316 +5356,140 @@
           <a:p>
             <a:pPr>
               <a:spcAft>
+                <a:spcPts val="1000"/>
+              </a:spcAft>
+              <a:defRPr sz="1700" b="1">
+                <a:solidFill>
+                  <a:srgbClr val="2BA640"/>
+                </a:solidFill>
+              </a:defRPr>
+            </a:pPr>
+            <a:r>
+              <a:t>Live Application Demonstration Highlights</a:t>
+            </a:r>
+          </a:p>
+          <a:p>
+            <a:pPr>
+              <a:spcAft>
                 <a:spcPts val="800"/>
               </a:spcAft>
-              <a:defRPr sz="1300" b="1">
-                <a:solidFill>
-                  <a:srgbClr val="3EA6FF"/>
-                </a:solidFill>
-              </a:defRPr>
-            </a:pPr>
-            <a:r>
-              <a:t>Phase 2: SPA Architecture (Current)</a:t>
-            </a:r>
-          </a:p>
-          <a:p>
-            <a:pPr>
-              <a:spcAft>
-                <a:spcPts val="600"/>
-              </a:spcAft>
-            </a:pPr>
-            <a:r>
-              <a:rPr b="1" sz="1050">
-                <a:solidFill>
-                  <a:srgbClr val="3EA6FF"/>
+            </a:pPr>
+            <a:r>
+              <a:rPr b="1" sz="1500">
+                <a:solidFill>
+                  <a:srgbClr val="2BA640"/>
                 </a:solidFill>
               </a:rPr>
               <a:t>• </a:t>
             </a:r>
             <a:r>
-              <a:rPr b="1" sz="1000">
+              <a:rPr b="1" sz="1400">
                 <a:solidFill>
                   <a:srgbClr val="FFFFFF"/>
                 </a:solidFill>
               </a:rPr>
-              <a:t>Dynamic Route: </a:t>
-            </a:r>
-            <a:r>
-              <a:rPr sz="1000">
-                <a:solidFill>
-                  <a:srgbClr val="BEC3CD"/>
-                </a:solidFill>
-              </a:rPr>
-              <a:t>/watch/:id via useParams with embedded 16:9 streaming.</a:t>
-            </a:r>
-          </a:p>
-          <a:p>
-            <a:pPr>
-              <a:spcAft>
-                <a:spcPts val="600"/>
-              </a:spcAft>
-            </a:pPr>
-            <a:r>
-              <a:rPr b="1" sz="1050">
-                <a:solidFill>
-                  <a:srgbClr val="3EA6FF"/>
+              <a:t>Seamless Navigation: </a:t>
+            </a:r>
+            <a:r>
+              <a:rPr sz="1400">
+                <a:solidFill>
+                  <a:srgbClr val="CDD2DC"/>
+                </a:solidFill>
+              </a:rPr>
+              <a:t>Switching channels, categories, and up-next recommendations with zero page flushes.</a:t>
+            </a:r>
+          </a:p>
+          <a:p>
+            <a:pPr>
+              <a:spcAft>
+                <a:spcPts val="800"/>
+              </a:spcAft>
+            </a:pPr>
+            <a:r>
+              <a:rPr b="1" sz="1500">
+                <a:solidFill>
+                  <a:srgbClr val="2BA640"/>
                 </a:solidFill>
               </a:rPr>
               <a:t>• </a:t>
             </a:r>
             <a:r>
-              <a:rPr b="1" sz="1000">
+              <a:rPr b="1" sz="1400">
                 <a:solidFill>
                   <a:srgbClr val="FFFFFF"/>
                 </a:solidFill>
               </a:rPr>
-              <a:t>Interactive Comments: </a:t>
-            </a:r>
-            <a:r>
-              <a:rPr sz="1000">
-                <a:solidFill>
-                  <a:srgbClr val="BEC3CD"/>
-                </a:solidFill>
-              </a:rPr>
-              <a:t>DOM focus control via useRef and Top/Newest sorting.</a:t>
-            </a:r>
-          </a:p>
-          <a:p>
-            <a:pPr>
-              <a:spcAft>
-                <a:spcPts val="600"/>
-              </a:spcAft>
-            </a:pPr>
-            <a:r>
-              <a:rPr b="1" sz="1050">
-                <a:solidFill>
-                  <a:srgbClr val="3EA6FF"/>
+              <a:t>Multi-Device Adaptability: </a:t>
+            </a:r>
+            <a:r>
+              <a:rPr sz="1400">
+                <a:solidFill>
+                  <a:srgbClr val="CDD2DC"/>
+                </a:solidFill>
+              </a:rPr>
+              <a:t>Tested across 375px mobile, 768px tablet, and 1440px desktop resolutions.</a:t>
+            </a:r>
+          </a:p>
+          <a:p>
+            <a:pPr>
+              <a:spcAft>
+                <a:spcPts val="800"/>
+              </a:spcAft>
+            </a:pPr>
+            <a:r>
+              <a:rPr b="1" sz="1500">
+                <a:solidFill>
+                  <a:srgbClr val="2BA640"/>
                 </a:solidFill>
               </a:rPr>
               <a:t>• </a:t>
             </a:r>
             <a:r>
-              <a:rPr b="1" sz="1000">
+              <a:rPr b="1" sz="1400">
                 <a:solidFill>
                   <a:srgbClr val="FFFFFF"/>
                 </a:solidFill>
               </a:rPr>
-              <a:t>State Bus &amp; Alerts: </a:t>
-            </a:r>
-            <a:r>
-              <a:rPr sz="1000">
-                <a:solidFill>
-                  <a:srgbClr val="BEC3CD"/>
-                </a:solidFill>
-              </a:rPr>
-              <a:t>Centralized Context API, LocalStorage sync, react-toastify, and Voice Search.</a:t>
-            </a:r>
-          </a:p>
-        </p:txBody>
-      </p:sp>
-      <p:sp>
-        <p:nvSpPr>
-          <p:cNvPr id="11" name="Rounded Rectangle 10"/>
-          <p:cNvSpPr/>
-          <p:nvPr/>
-        </p:nvSpPr>
-        <p:spPr>
-          <a:xfrm>
-            <a:off x="8046720" y="1371600"/>
-            <a:ext cx="3383280" cy="4663440"/>
-          </a:xfrm>
-          <a:prstGeom prst="roundRect">
-            <a:avLst/>
-          </a:prstGeom>
-          <a:solidFill>
-            <a:srgbClr val="161922"/>
-          </a:solidFill>
-          <a:ln w="15240">
-            <a:solidFill>
-              <a:srgbClr val="2E3445"/>
-            </a:solidFill>
-          </a:ln>
-        </p:spPr>
-        <p:style>
-          <a:lnRef idx="1">
-            <a:schemeClr val="accent1"/>
-          </a:lnRef>
-          <a:fillRef idx="3">
-            <a:schemeClr val="accent1"/>
-          </a:fillRef>
-          <a:effectRef idx="2">
-            <a:schemeClr val="accent1"/>
-          </a:effectRef>
-          <a:fontRef idx="minor">
-            <a:schemeClr val="lt1"/>
-          </a:fontRef>
-        </p:style>
-        <p:txBody>
-          <a:bodyPr rtlCol="0" anchor="ctr"/>
-          <a:lstStyle/>
-          <a:p>
-            <a:pPr algn="ctr"/>
-          </a:p>
-        </p:txBody>
-      </p:sp>
-      <p:sp>
-        <p:nvSpPr>
-          <p:cNvPr id="12" name="TextBox 11"/>
-          <p:cNvSpPr txBox="1"/>
-          <p:nvPr/>
-        </p:nvSpPr>
-        <p:spPr>
-          <a:xfrm>
-            <a:off x="8229600" y="1508760"/>
-            <a:ext cx="3017520" cy="4389120"/>
-          </a:xfrm>
-          <a:prstGeom prst="rect">
-            <a:avLst/>
-          </a:prstGeom>
-          <a:noFill/>
-        </p:spPr>
-        <p:txBody>
-          <a:bodyPr wrap="square">
-            <a:spAutoFit/>
-          </a:bodyPr>
-          <a:lstStyle/>
+              <a:t>Production Verification: </a:t>
+            </a:r>
+            <a:r>
+              <a:rPr sz="1400">
+                <a:solidFill>
+                  <a:srgbClr val="CDD2DC"/>
+                </a:solidFill>
+              </a:rPr>
+              <a:t>100% Vite build success (sub-350ms bundle time) with 0 errors.</a:t>
+            </a:r>
+          </a:p>
           <a:p>
             <a:pPr>
               <a:spcAft>
                 <a:spcPts val="800"/>
               </a:spcAft>
-              <a:defRPr sz="1300" b="1">
+            </a:pPr>
+            <a:r>
+              <a:rPr b="1" sz="1500">
                 <a:solidFill>
                   <a:srgbClr val="2BA640"/>
                 </a:solidFill>
-              </a:defRPr>
-            </a:pPr>
-            <a:r>
-              <a:t>Phase 3: Full Stack Scaling (Roadmap)</a:t>
-            </a:r>
-          </a:p>
-          <a:p>
-            <a:pPr>
-              <a:spcAft>
-                <a:spcPts val="600"/>
-              </a:spcAft>
-            </a:pPr>
-            <a:r>
-              <a:rPr b="1" sz="1050">
-                <a:solidFill>
-                  <a:srgbClr val="2BA640"/>
-                </a:solidFill>
               </a:rPr>
               <a:t>• </a:t>
             </a:r>
             <a:r>
-              <a:rPr b="1" sz="1000">
+              <a:rPr b="1" sz="1400">
                 <a:solidFill>
                   <a:srgbClr val="FFFFFF"/>
                 </a:solidFill>
               </a:rPr>
-              <a:t>Node.js &amp; Express API: </a:t>
-            </a:r>
-            <a:r>
-              <a:rPr sz="1000">
-                <a:solidFill>
-                  <a:srgbClr val="BEC3CD"/>
-                </a:solidFill>
-              </a:rPr>
-              <a:t>RESTful backend endpoints replacing mock JSON dataset.</a:t>
-            </a:r>
-          </a:p>
-          <a:p>
-            <a:pPr>
-              <a:spcAft>
-                <a:spcPts val="600"/>
-              </a:spcAft>
-            </a:pPr>
-            <a:r>
-              <a:rPr b="1" sz="1050">
-                <a:solidFill>
-                  <a:srgbClr val="2BA640"/>
-                </a:solidFill>
-              </a:rPr>
-              <a:t>• </a:t>
-            </a:r>
-            <a:r>
-              <a:rPr b="1" sz="1000">
-                <a:solidFill>
-                  <a:srgbClr val="FFFFFF"/>
-                </a:solidFill>
-              </a:rPr>
-              <a:t>MongoDB &amp; Mongoose: </a:t>
-            </a:r>
-            <a:r>
-              <a:rPr sz="1000">
-                <a:solidFill>
-                  <a:srgbClr val="BEC3CD"/>
-                </a:solidFill>
-              </a:rPr>
-              <a:t>Cloud database storing user profiles, videos, and comments.</a:t>
-            </a:r>
-          </a:p>
-          <a:p>
-            <a:pPr>
-              <a:spcAft>
-                <a:spcPts val="600"/>
-              </a:spcAft>
-            </a:pPr>
-            <a:r>
-              <a:rPr b="1" sz="1050">
-                <a:solidFill>
-                  <a:srgbClr val="2BA640"/>
-                </a:solidFill>
-              </a:rPr>
-              <a:t>• </a:t>
-            </a:r>
-            <a:r>
-              <a:rPr b="1" sz="1000">
-                <a:solidFill>
-                  <a:srgbClr val="FFFFFF"/>
-                </a:solidFill>
-              </a:rPr>
-              <a:t>JWT Authentication: </a:t>
-            </a:r>
-            <a:r>
-              <a:rPr sz="1000">
-                <a:solidFill>
-                  <a:srgbClr val="BEC3CD"/>
-                </a:solidFill>
-              </a:rPr>
-              <a:t>Server-verified authentication with encrypted user tokens.</a:t>
-            </a:r>
-          </a:p>
-          <a:p>
-            <a:pPr>
-              <a:spcAft>
-                <a:spcPts val="600"/>
-              </a:spcAft>
-            </a:pPr>
-            <a:r>
-              <a:rPr b="1" sz="1050">
-                <a:solidFill>
-                  <a:srgbClr val="2BA640"/>
-                </a:solidFill>
-              </a:rPr>
-              <a:t>• </a:t>
-            </a:r>
-            <a:r>
-              <a:rPr b="1" sz="1000">
-                <a:solidFill>
-                  <a:srgbClr val="FFFFFF"/>
-                </a:solidFill>
-              </a:rPr>
-              <a:t>Redux Toolkit: </a:t>
-            </a:r>
-            <a:r>
-              <a:rPr sz="1000">
-                <a:solidFill>
-                  <a:srgbClr val="BEC3CD"/>
-                </a:solidFill>
-              </a:rPr>
-              <a:t>Advanced cached state management and optimistic mutations.</a:t>
+              <a:t>Q&amp;A Readiness: </a:t>
+            </a:r>
+            <a:r>
+              <a:rPr sz="1400">
+                <a:solidFill>
+                  <a:srgbClr val="CDD2DC"/>
+                </a:solidFill>
+              </a:rPr>
+              <a:t>Team G15 is fully prepared for technical architecture and code defense viva.</a:t>
             </a:r>
           </a:p>
         </p:txBody>
@@ -5758,14 +5624,14 @@
           <a:lstStyle/>
           <a:p>
             <a:pPr>
-              <a:defRPr sz="1000" b="1">
+              <a:defRPr sz="1200" b="1">
                 <a:solidFill>
                   <a:srgbClr val="3EA6FF"/>
                 </a:solidFill>
               </a:defRPr>
             </a:pPr>
             <a:r>
-              <a:t>GROUP G15  •  PROJECT ID: G15-PID-17 (P-17)  •  EVALUATION-II (25CSE0203)</a:t>
+              <a:t>GROUP G15  •  PROJECT ID: G15-PID-17 (P-17)  •  EVALUATION-II</a:t>
             </a:r>
           </a:p>
         </p:txBody>
@@ -5778,8 +5644,8 @@
         </p:nvSpPr>
         <p:spPr>
           <a:xfrm>
-            <a:off x="731520" y="594360"/>
-            <a:ext cx="10728655" cy="594360"/>
+            <a:off x="731520" y="621792"/>
+            <a:ext cx="10728655" cy="640080"/>
           </a:xfrm>
           <a:prstGeom prst="rect">
             <a:avLst/>
@@ -5793,7 +5659,7 @@
           <a:lstStyle/>
           <a:p>
             <a:pPr>
-              <a:defRPr sz="2100" b="1">
+              <a:defRPr sz="2500" b="1">
                 <a:solidFill>
                   <a:srgbClr val="FFFFFF"/>
                 </a:solidFill>
@@ -5828,9 +5694,9 @@
           <a:lstStyle/>
           <a:p>
             <a:pPr>
-              <a:defRPr sz="900">
-                <a:solidFill>
-                  <a:srgbClr val="7B8293"/>
+              <a:defRPr sz="1050">
+                <a:solidFill>
+                  <a:srgbClr val="828A9B"/>
                 </a:solidFill>
               </a:defRPr>
             </a:pPr>
@@ -5857,7 +5723,7 @@
           <a:solidFill>
             <a:srgbClr val="161922"/>
           </a:solidFill>
-          <a:ln>
+          <a:ln w="17780">
             <a:solidFill>
               <a:srgbClr val="2E3445"/>
             </a:solidFill>
@@ -5909,11 +5775,11 @@
           <a:p>
             <a:pPr>
               <a:spcAft>
-                <a:spcPts val="1600"/>
-              </a:spcAft>
-            </a:pPr>
-            <a:r>
-              <a:rPr b="1" sz="1200">
+                <a:spcPts val="1800"/>
+              </a:spcAft>
+            </a:pPr>
+            <a:r>
+              <a:rPr b="1" sz="1500">
                 <a:solidFill>
                   <a:srgbClr val="FF0033"/>
                 </a:solidFill>
@@ -5921,7 +5787,7 @@
               <a:t>01. </a:t>
             </a:r>
             <a:r>
-              <a:rPr sz="1100">
+              <a:rPr sz="1400" b="1">
                 <a:solidFill>
                   <a:srgbClr val="FFFFFF"/>
                 </a:solidFill>
@@ -5932,11 +5798,11 @@
           <a:p>
             <a:pPr>
               <a:spcAft>
-                <a:spcPts val="1600"/>
-              </a:spcAft>
-            </a:pPr>
-            <a:r>
-              <a:rPr b="1" sz="1200">
+                <a:spcPts val="1800"/>
+              </a:spcAft>
+            </a:pPr>
+            <a:r>
+              <a:rPr b="1" sz="1500">
                 <a:solidFill>
                   <a:srgbClr val="FF0033"/>
                 </a:solidFill>
@@ -5944,7 +5810,7 @@
               <a:t>02. </a:t>
             </a:r>
             <a:r>
-              <a:rPr sz="1100">
+              <a:rPr sz="1400" b="1">
                 <a:solidFill>
                   <a:srgbClr val="FFFFFF"/>
                 </a:solidFill>
@@ -5955,11 +5821,11 @@
           <a:p>
             <a:pPr>
               <a:spcAft>
-                <a:spcPts val="1600"/>
-              </a:spcAft>
-            </a:pPr>
-            <a:r>
-              <a:rPr b="1" sz="1200">
+                <a:spcPts val="1800"/>
+              </a:spcAft>
+            </a:pPr>
+            <a:r>
+              <a:rPr b="1" sz="1500">
                 <a:solidFill>
                   <a:srgbClr val="FF0033"/>
                 </a:solidFill>
@@ -5967,7 +5833,7 @@
               <a:t>03. </a:t>
             </a:r>
             <a:r>
-              <a:rPr sz="1100">
+              <a:rPr sz="1400" b="1">
                 <a:solidFill>
                   <a:srgbClr val="FFFFFF"/>
                 </a:solidFill>
@@ -5978,11 +5844,11 @@
           <a:p>
             <a:pPr>
               <a:spcAft>
-                <a:spcPts val="1600"/>
-              </a:spcAft>
-            </a:pPr>
-            <a:r>
-              <a:rPr b="1" sz="1200">
+                <a:spcPts val="1800"/>
+              </a:spcAft>
+            </a:pPr>
+            <a:r>
+              <a:rPr b="1" sz="1500">
                 <a:solidFill>
                   <a:srgbClr val="FF0033"/>
                 </a:solidFill>
@@ -5990,7 +5856,7 @@
               <a:t>04. </a:t>
             </a:r>
             <a:r>
-              <a:rPr sz="1100">
+              <a:rPr sz="1400" b="1">
                 <a:solidFill>
                   <a:srgbClr val="FFFFFF"/>
                 </a:solidFill>
@@ -6001,11 +5867,11 @@
           <a:p>
             <a:pPr>
               <a:spcAft>
-                <a:spcPts val="1600"/>
-              </a:spcAft>
-            </a:pPr>
-            <a:r>
-              <a:rPr b="1" sz="1200">
+                <a:spcPts val="1800"/>
+              </a:spcAft>
+            </a:pPr>
+            <a:r>
+              <a:rPr b="1" sz="1500">
                 <a:solidFill>
                   <a:srgbClr val="FF0033"/>
                 </a:solidFill>
@@ -6013,7 +5879,7 @@
               <a:t>05. </a:t>
             </a:r>
             <a:r>
-              <a:rPr sz="1100">
+              <a:rPr sz="1400" b="1">
                 <a:solidFill>
                   <a:srgbClr val="FFFFFF"/>
                 </a:solidFill>
@@ -6040,7 +5906,7 @@
           <a:solidFill>
             <a:srgbClr val="161922"/>
           </a:solidFill>
-          <a:ln>
+          <a:ln w="17780">
             <a:solidFill>
               <a:srgbClr val="2E3445"/>
             </a:solidFill>
@@ -6092,11 +5958,11 @@
           <a:p>
             <a:pPr>
               <a:spcAft>
-                <a:spcPts val="1600"/>
-              </a:spcAft>
-            </a:pPr>
-            <a:r>
-              <a:rPr b="1" sz="1200">
+                <a:spcPts val="1800"/>
+              </a:spcAft>
+            </a:pPr>
+            <a:r>
+              <a:rPr b="1" sz="1500">
                 <a:solidFill>
                   <a:srgbClr val="3EA6FF"/>
                 </a:solidFill>
@@ -6104,7 +5970,7 @@
               <a:t>06. </a:t>
             </a:r>
             <a:r>
-              <a:rPr sz="1100">
+              <a:rPr sz="1400" b="1">
                 <a:solidFill>
                   <a:srgbClr val="FFFFFF"/>
                 </a:solidFill>
@@ -6115,11 +5981,11 @@
           <a:p>
             <a:pPr>
               <a:spcAft>
-                <a:spcPts val="1600"/>
-              </a:spcAft>
-            </a:pPr>
-            <a:r>
-              <a:rPr b="1" sz="1200">
+                <a:spcPts val="1800"/>
+              </a:spcAft>
+            </a:pPr>
+            <a:r>
+              <a:rPr b="1" sz="1500">
                 <a:solidFill>
                   <a:srgbClr val="3EA6FF"/>
                 </a:solidFill>
@@ -6127,7 +5993,7 @@
               <a:t>07. </a:t>
             </a:r>
             <a:r>
-              <a:rPr sz="1100">
+              <a:rPr sz="1400" b="1">
                 <a:solidFill>
                   <a:srgbClr val="FFFFFF"/>
                 </a:solidFill>
@@ -6138,11 +6004,11 @@
           <a:p>
             <a:pPr>
               <a:spcAft>
-                <a:spcPts val="1600"/>
-              </a:spcAft>
-            </a:pPr>
-            <a:r>
-              <a:rPr b="1" sz="1200">
+                <a:spcPts val="1800"/>
+              </a:spcAft>
+            </a:pPr>
+            <a:r>
+              <a:rPr b="1" sz="1500">
                 <a:solidFill>
                   <a:srgbClr val="3EA6FF"/>
                 </a:solidFill>
@@ -6150,7 +6016,7 @@
               <a:t>08. </a:t>
             </a:r>
             <a:r>
-              <a:rPr sz="1100">
+              <a:rPr sz="1400" b="1">
                 <a:solidFill>
                   <a:srgbClr val="FFFFFF"/>
                 </a:solidFill>
@@ -6161,11 +6027,11 @@
           <a:p>
             <a:pPr>
               <a:spcAft>
-                <a:spcPts val="1600"/>
-              </a:spcAft>
-            </a:pPr>
-            <a:r>
-              <a:rPr b="1" sz="1200">
+                <a:spcPts val="1800"/>
+              </a:spcAft>
+            </a:pPr>
+            <a:r>
+              <a:rPr b="1" sz="1500">
                 <a:solidFill>
                   <a:srgbClr val="3EA6FF"/>
                 </a:solidFill>
@@ -6173,22 +6039,22 @@
               <a:t>09. </a:t>
             </a:r>
             <a:r>
-              <a:rPr sz="1100">
+              <a:rPr sz="1400" b="1">
                 <a:solidFill>
                   <a:srgbClr val="FFFFFF"/>
                 </a:solidFill>
               </a:rPr>
-              <a:t>Curriculum Alignment &amp; Faculty Reference Verification (Page 11)</a:t>
-            </a:r>
-          </a:p>
-          <a:p>
-            <a:pPr>
-              <a:spcAft>
-                <a:spcPts val="1600"/>
-              </a:spcAft>
-            </a:pPr>
-            <a:r>
-              <a:rPr b="1" sz="1200">
+              <a:t>Technical Roadmap &amp; Scope for Phase 3 (MERN Stack) (Page 11)</a:t>
+            </a:r>
+          </a:p>
+          <a:p>
+            <a:pPr>
+              <a:spcAft>
+                <a:spcPts val="1800"/>
+              </a:spcAft>
+            </a:pPr>
+            <a:r>
+              <a:rPr b="1" sz="1500">
                 <a:solidFill>
                   <a:srgbClr val="3EA6FF"/>
                 </a:solidFill>
@@ -6196,12 +6062,12 @@
               <a:t>10. </a:t>
             </a:r>
             <a:r>
-              <a:rPr sz="1100">
+              <a:rPr sz="1400" b="1">
                 <a:solidFill>
                   <a:srgbClr val="FFFFFF"/>
                 </a:solidFill>
               </a:rPr>
-              <a:t>Technical Roadmap &amp; Scope for Phase 3 (MERN Stack) (Page 12)</a:t>
+              <a:t>Summary, Live Demonstration &amp; Viva Readiness (Page 12)</a:t>
             </a:r>
           </a:p>
         </p:txBody>
@@ -6336,14 +6202,14 @@
           <a:lstStyle/>
           <a:p>
             <a:pPr>
-              <a:defRPr sz="1000" b="1">
+              <a:defRPr sz="1200" b="1">
                 <a:solidFill>
                   <a:srgbClr val="3EA6FF"/>
                 </a:solidFill>
               </a:defRPr>
             </a:pPr>
             <a:r>
-              <a:t>GROUP G15  •  PROJECT ID: G15-PID-17 (P-17)  •  EVALUATION-II (25CSE0203)</a:t>
+              <a:t>GROUP G15  •  PROJECT ID: G15-PID-17 (P-17)  •  EVALUATION-II</a:t>
             </a:r>
           </a:p>
         </p:txBody>
@@ -6356,8 +6222,8 @@
         </p:nvSpPr>
         <p:spPr>
           <a:xfrm>
-            <a:off x="731520" y="594360"/>
-            <a:ext cx="10728655" cy="594360"/>
+            <a:off x="731520" y="621792"/>
+            <a:ext cx="10728655" cy="640080"/>
           </a:xfrm>
           <a:prstGeom prst="rect">
             <a:avLst/>
@@ -6371,7 +6237,7 @@
           <a:lstStyle/>
           <a:p>
             <a:pPr>
-              <a:defRPr sz="2100" b="1">
+              <a:defRPr sz="2500" b="1">
                 <a:solidFill>
                   <a:srgbClr val="FFFFFF"/>
                 </a:solidFill>
@@ -6406,9 +6272,9 @@
           <a:lstStyle/>
           <a:p>
             <a:pPr>
-              <a:defRPr sz="900">
-                <a:solidFill>
-                  <a:srgbClr val="7B8293"/>
+              <a:defRPr sz="1050">
+                <a:solidFill>
+                  <a:srgbClr val="828A9B"/>
                 </a:solidFill>
               </a:defRPr>
             </a:pPr>
@@ -6435,7 +6301,7 @@
           <a:solidFill>
             <a:srgbClr val="161922"/>
           </a:solidFill>
-          <a:ln w="15240">
+          <a:ln w="17780">
             <a:solidFill>
               <a:srgbClr val="2E3445"/>
             </a:solidFill>
@@ -6471,8 +6337,8 @@
         </p:nvSpPr>
         <p:spPr>
           <a:xfrm>
-            <a:off x="914400" y="1508760"/>
-            <a:ext cx="3017520" cy="4389120"/>
+            <a:off x="932688" y="1536192"/>
+            <a:ext cx="2980944" cy="4334255"/>
           </a:xfrm>
           <a:prstGeom prst="rect">
             <a:avLst/>
@@ -6487,26 +6353,57 @@
           <a:p>
             <a:pPr>
               <a:spcAft>
+                <a:spcPts val="1000"/>
+              </a:spcAft>
+              <a:defRPr sz="1700" b="1">
+                <a:solidFill>
+                  <a:srgbClr val="FF0033"/>
+                </a:solidFill>
+              </a:defRPr>
+            </a:pPr>
+            <a:r>
+              <a:t>Phase 1 vs Phase 2 Focus</a:t>
+            </a:r>
+          </a:p>
+          <a:p>
+            <a:pPr>
+              <a:spcAft>
                 <a:spcPts val="800"/>
               </a:spcAft>
-              <a:defRPr sz="1300" b="1">
+            </a:pPr>
+            <a:r>
+              <a:rPr b="1" sz="1500">
                 <a:solidFill>
                   <a:srgbClr val="FF0033"/>
                 </a:solidFill>
-              </a:defRPr>
-            </a:pPr>
-            <a:r>
-              <a:t>Phase 1 vs Phase 2 Focus</a:t>
-            </a:r>
-          </a:p>
-          <a:p>
-            <a:pPr>
-              <a:spcAft>
-                <a:spcPts val="600"/>
-              </a:spcAft>
-            </a:pPr>
-            <a:r>
-              <a:rPr b="1" sz="1050">
+              </a:rPr>
+              <a:t>• </a:t>
+            </a:r>
+            <a:r>
+              <a:rPr b="1" sz="1400">
+                <a:solidFill>
+                  <a:srgbClr val="FFFFFF"/>
+                </a:solidFill>
+              </a:rPr>
+              <a:t>Phase 1 Foundation: </a:t>
+            </a:r>
+            <a:r>
+              <a:rPr sz="1400">
+                <a:solidFill>
+                  <a:srgbClr val="CDD2DC"/>
+                </a:solidFill>
+              </a:rPr>
+              <a:t>Established responsive card grids, category chips, and external YouTube links.</a:t>
+            </a:r>
+          </a:p>
+          <a:p>
+            <a:pPr>
+              <a:spcAft>
+                <a:spcPts val="800"/>
+              </a:spcAft>
+            </a:pPr>
+            <a:r>
+              <a:rPr b="1" sz="1500">
                 <a:solidFill>
                   <a:srgbClr val="FF0033"/>
                 </a:solidFill>
@@ -6514,30 +6411,30 @@
               <a:t>• </a:t>
             </a:r>
             <a:r>
-              <a:rPr b="1" sz="1000">
+              <a:rPr b="1" sz="1400">
                 <a:solidFill>
                   <a:srgbClr val="FFFFFF"/>
                 </a:solidFill>
               </a:rPr>
-              <a:t>Phase 1 Foundation: </a:t>
-            </a:r>
-            <a:r>
-              <a:rPr sz="1000">
-                <a:solidFill>
-                  <a:srgbClr val="BEC3CD"/>
-                </a:solidFill>
-              </a:rPr>
-              <a:t>Established responsive card grids, category chip filters, and external YouTube link outs.</a:t>
-            </a:r>
-          </a:p>
-          <a:p>
-            <a:pPr>
-              <a:spcAft>
-                <a:spcPts val="600"/>
-              </a:spcAft>
-            </a:pPr>
-            <a:r>
-              <a:rPr b="1" sz="1050">
+              <a:t>Phase 2 Transition: </a:t>
+            </a:r>
+            <a:r>
+              <a:rPr sz="1400">
+                <a:solidFill>
+                  <a:srgbClr val="CDD2DC"/>
+                </a:solidFill>
+              </a:rPr>
+              <a:t>Elevated PheW TuBe into an authentic, stateful Single Page Application (SPA).</a:t>
+            </a:r>
+          </a:p>
+          <a:p>
+            <a:pPr>
+              <a:spcAft>
+                <a:spcPts val="800"/>
+              </a:spcAft>
+            </a:pPr>
+            <a:r>
+              <a:rPr b="1" sz="1500">
                 <a:solidFill>
                   <a:srgbClr val="FF0033"/>
                 </a:solidFill>
@@ -6545,51 +6442,20 @@
               <a:t>• </a:t>
             </a:r>
             <a:r>
-              <a:rPr b="1" sz="1000">
+              <a:rPr b="1" sz="1400">
                 <a:solidFill>
                   <a:srgbClr val="FFFFFF"/>
                 </a:solidFill>
               </a:rPr>
-              <a:t>Phase 2 Transition: </a:t>
-            </a:r>
-            <a:r>
-              <a:rPr sz="1000">
-                <a:solidFill>
-                  <a:srgbClr val="BEC3CD"/>
-                </a:solidFill>
-              </a:rPr>
-              <a:t>Elevated PheW TuBe into an authentic, stateful Single Page Application (SPA).</a:t>
-            </a:r>
-          </a:p>
-          <a:p>
-            <a:pPr>
-              <a:spcAft>
-                <a:spcPts val="600"/>
-              </a:spcAft>
-            </a:pPr>
-            <a:r>
-              <a:rPr b="1" sz="1050">
-                <a:solidFill>
-                  <a:srgbClr val="FF0033"/>
-                </a:solidFill>
-              </a:rPr>
-              <a:t>• </a:t>
-            </a:r>
-            <a:r>
-              <a:rPr b="1" sz="1000">
-                <a:solidFill>
-                  <a:srgbClr val="FFFFFF"/>
-                </a:solidFill>
-              </a:rPr>
               <a:t>Zero Page Reloads: </a:t>
             </a:r>
             <a:r>
-              <a:rPr sz="1000">
-                <a:solidFill>
-                  <a:srgbClr val="BEC3CD"/>
-                </a:solidFill>
-              </a:rPr>
-              <a:t>Client-side routing via React Router DOM ensures instant state reactivity without full-page flushes.</a:t>
+              <a:rPr sz="1400">
+                <a:solidFill>
+                  <a:srgbClr val="CDD2DC"/>
+                </a:solidFill>
+              </a:rPr>
+              <a:t>Client-side routing via React Router DOM ensures instant state reactivity without full flushes.</a:t>
             </a:r>
           </a:p>
         </p:txBody>
@@ -6611,7 +6477,7 @@
           <a:solidFill>
             <a:srgbClr val="161922"/>
           </a:solidFill>
-          <a:ln w="15240">
+          <a:ln w="17780">
             <a:solidFill>
               <a:srgbClr val="2E3445"/>
             </a:solidFill>
@@ -6647,8 +6513,8 @@
         </p:nvSpPr>
         <p:spPr>
           <a:xfrm>
-            <a:off x="4572000" y="1508760"/>
-            <a:ext cx="3017520" cy="4389120"/>
+            <a:off x="4590288" y="1536192"/>
+            <a:ext cx="2980944" cy="4334255"/>
           </a:xfrm>
           <a:prstGeom prst="rect">
             <a:avLst/>
@@ -6663,26 +6529,57 @@
           <a:p>
             <a:pPr>
               <a:spcAft>
+                <a:spcPts val="1000"/>
+              </a:spcAft>
+              <a:defRPr sz="1700" b="1">
+                <a:solidFill>
+                  <a:srgbClr val="3EA6FF"/>
+                </a:solidFill>
+              </a:defRPr>
+            </a:pPr>
+            <a:r>
+              <a:t>Core Technical Objectives</a:t>
+            </a:r>
+          </a:p>
+          <a:p>
+            <a:pPr>
+              <a:spcAft>
                 <a:spcPts val="800"/>
               </a:spcAft>
-              <a:defRPr sz="1300" b="1">
+            </a:pPr>
+            <a:r>
+              <a:rPr b="1" sz="1500">
                 <a:solidFill>
                   <a:srgbClr val="3EA6FF"/>
                 </a:solidFill>
-              </a:defRPr>
-            </a:pPr>
-            <a:r>
-              <a:t>Core Technical Objectives</a:t>
-            </a:r>
-          </a:p>
-          <a:p>
-            <a:pPr>
-              <a:spcAft>
-                <a:spcPts val="600"/>
-              </a:spcAft>
-            </a:pPr>
-            <a:r>
-              <a:rPr b="1" sz="1050">
+              </a:rPr>
+              <a:t>• </a:t>
+            </a:r>
+            <a:r>
+              <a:rPr b="1" sz="1400">
+                <a:solidFill>
+                  <a:srgbClr val="FFFFFF"/>
+                </a:solidFill>
+              </a:rPr>
+              <a:t>Dynamic Route: </a:t>
+            </a:r>
+            <a:r>
+              <a:rPr sz="1400">
+                <a:solidFill>
+                  <a:srgbClr val="CDD2DC"/>
+                </a:solidFill>
+              </a:rPr>
+              <a:t>Deep link /watch/:id powered by useParams() with embedded 16:9 streaming.</a:t>
+            </a:r>
+          </a:p>
+          <a:p>
+            <a:pPr>
+              <a:spcAft>
+                <a:spcPts val="800"/>
+              </a:spcAft>
+            </a:pPr>
+            <a:r>
+              <a:rPr b="1" sz="1500">
                 <a:solidFill>
                   <a:srgbClr val="3EA6FF"/>
                 </a:solidFill>
@@ -6690,30 +6587,30 @@
               <a:t>• </a:t>
             </a:r>
             <a:r>
-              <a:rPr b="1" sz="1000">
+              <a:rPr b="1" sz="1400">
                 <a:solidFill>
                   <a:srgbClr val="FFFFFF"/>
                 </a:solidFill>
               </a:rPr>
-              <a:t>Dynamic Watch Route: </a:t>
-            </a:r>
-            <a:r>
-              <a:rPr sz="1000">
-                <a:solidFill>
-                  <a:srgbClr val="BEC3CD"/>
-                </a:solidFill>
-              </a:rPr>
-              <a:t>Deep link /watch/:id powered by useParams() with embedded 16:9 streaming.</a:t>
-            </a:r>
-          </a:p>
-          <a:p>
-            <a:pPr>
-              <a:spcAft>
-                <a:spcPts val="600"/>
-              </a:spcAft>
-            </a:pPr>
-            <a:r>
-              <a:rPr b="1" sz="1050">
+              <a:t>DOM Control via useRef: </a:t>
+            </a:r>
+            <a:r>
+              <a:rPr sz="1400">
+                <a:solidFill>
+                  <a:srgbClr val="CDD2DC"/>
+                </a:solidFill>
+              </a:rPr>
+              <a:t>Direct focus on comment inputs and auto-scroll control without synthetic re-renders.</a:t>
+            </a:r>
+          </a:p>
+          <a:p>
+            <a:pPr>
+              <a:spcAft>
+                <a:spcPts val="800"/>
+              </a:spcAft>
+            </a:pPr>
+            <a:r>
+              <a:rPr b="1" sz="1500">
                 <a:solidFill>
                   <a:srgbClr val="3EA6FF"/>
                 </a:solidFill>
@@ -6721,48 +6618,17 @@
               <a:t>• </a:t>
             </a:r>
             <a:r>
-              <a:rPr b="1" sz="1000">
+              <a:rPr b="1" sz="1400">
                 <a:solidFill>
                   <a:srgbClr val="FFFFFF"/>
                 </a:solidFill>
               </a:rPr>
-              <a:t>DOM Control with useRef: </a:t>
-            </a:r>
-            <a:r>
-              <a:rPr sz="1000">
-                <a:solidFill>
-                  <a:srgbClr val="BEC3CD"/>
-                </a:solidFill>
-              </a:rPr>
-              <a:t>Direct programmatic focus on comment input and auto-scroll viewport control without re-renders.</a:t>
-            </a:r>
-          </a:p>
-          <a:p>
-            <a:pPr>
-              <a:spcAft>
-                <a:spcPts val="600"/>
-              </a:spcAft>
-            </a:pPr>
-            <a:r>
-              <a:rPr b="1" sz="1050">
-                <a:solidFill>
-                  <a:srgbClr val="3EA6FF"/>
-                </a:solidFill>
-              </a:rPr>
-              <a:t>• </a:t>
-            </a:r>
-            <a:r>
-              <a:rPr b="1" sz="1000">
-                <a:solidFill>
-                  <a:srgbClr val="FFFFFF"/>
-                </a:solidFill>
-              </a:rPr>
               <a:t>Global Context API: </a:t>
             </a:r>
             <a:r>
-              <a:rPr sz="1000">
-                <a:solidFill>
-                  <a:srgbClr val="BEC3CD"/>
+              <a:rPr sz="1400">
+                <a:solidFill>
+                  <a:srgbClr val="CDD2DC"/>
                 </a:solidFill>
               </a:rPr>
               <a:t>Centralized multi-state bus eliminating prop drilling across nested component trees.</a:t>
@@ -6787,7 +6653,7 @@
           <a:solidFill>
             <a:srgbClr val="161922"/>
           </a:solidFill>
-          <a:ln w="15240">
+          <a:ln w="17780">
             <a:solidFill>
               <a:srgbClr val="2E3445"/>
             </a:solidFill>
@@ -6823,8 +6689,8 @@
         </p:nvSpPr>
         <p:spPr>
           <a:xfrm>
-            <a:off x="8229600" y="1508760"/>
-            <a:ext cx="3017520" cy="4389120"/>
+            <a:off x="8247888" y="1536192"/>
+            <a:ext cx="2980944" cy="4334255"/>
           </a:xfrm>
           <a:prstGeom prst="rect">
             <a:avLst/>
@@ -6839,26 +6705,57 @@
           <a:p>
             <a:pPr>
               <a:spcAft>
+                <a:spcPts val="1000"/>
+              </a:spcAft>
+              <a:defRPr sz="1700" b="1">
+                <a:solidFill>
+                  <a:srgbClr val="2BA640"/>
+                </a:solidFill>
+              </a:defRPr>
+            </a:pPr>
+            <a:r>
+              <a:t>User Experience &amp; Realism</a:t>
+            </a:r>
+          </a:p>
+          <a:p>
+            <a:pPr>
+              <a:spcAft>
                 <a:spcPts val="800"/>
               </a:spcAft>
-              <a:defRPr sz="1300" b="1">
+            </a:pPr>
+            <a:r>
+              <a:rPr b="1" sz="1500">
                 <a:solidFill>
                   <a:srgbClr val="2BA640"/>
                 </a:solidFill>
-              </a:defRPr>
-            </a:pPr>
-            <a:r>
-              <a:t>User Experience &amp; Realism</a:t>
-            </a:r>
-          </a:p>
-          <a:p>
-            <a:pPr>
-              <a:spcAft>
-                <a:spcPts val="600"/>
-              </a:spcAft>
-            </a:pPr>
-            <a:r>
-              <a:rPr b="1" sz="1050">
+              </a:rPr>
+              <a:t>• </a:t>
+            </a:r>
+            <a:r>
+              <a:rPr b="1" sz="1400">
+                <a:solidFill>
+                  <a:srgbClr val="FFFFFF"/>
+                </a:solidFill>
+              </a:rPr>
+              <a:t>Up-Next Queue: </a:t>
+            </a:r>
+            <a:r>
+              <a:rPr sz="1400">
+                <a:solidFill>
+                  <a:srgbClr val="CDD2DC"/>
+                </a:solidFill>
+              </a:rPr>
+              <a:t>Dynamic video swapping via useNavigate() with synchronized metadata.</a:t>
+            </a:r>
+          </a:p>
+          <a:p>
+            <a:pPr>
+              <a:spcAft>
+                <a:spcPts val="800"/>
+              </a:spcAft>
+            </a:pPr>
+            <a:r>
+              <a:rPr b="1" sz="1500">
                 <a:solidFill>
                   <a:srgbClr val="2BA640"/>
                 </a:solidFill>
@@ -6866,30 +6763,30 @@
               <a:t>• </a:t>
             </a:r>
             <a:r>
-              <a:rPr b="1" sz="1000">
+              <a:rPr b="1" sz="1400">
                 <a:solidFill>
                   <a:srgbClr val="FFFFFF"/>
                 </a:solidFill>
               </a:rPr>
-              <a:t>Up-Next Recommendations: </a:t>
-            </a:r>
-            <a:r>
-              <a:rPr sz="1000">
-                <a:solidFill>
-                  <a:srgbClr val="BEC3CD"/>
-                </a:solidFill>
-              </a:rPr>
-              <a:t>Dynamic video swapping via useNavigate() with synchronized video metadata.</a:t>
-            </a:r>
-          </a:p>
-          <a:p>
-            <a:pPr>
-              <a:spcAft>
-                <a:spcPts val="600"/>
-              </a:spcAft>
-            </a:pPr>
-            <a:r>
-              <a:rPr b="1" sz="1050">
+              <a:t>Toast Bus: </a:t>
+            </a:r>
+            <a:r>
+              <a:rPr sz="1400">
+                <a:solidFill>
+                  <a:srgbClr val="CDD2DC"/>
+                </a:solidFill>
+              </a:rPr>
+              <a:t>Integrated react-toastify for instant feedback on user actions and likes.</a:t>
+            </a:r>
+          </a:p>
+          <a:p>
+            <a:pPr>
+              <a:spcAft>
+                <a:spcPts val="800"/>
+              </a:spcAft>
+            </a:pPr>
+            <a:r>
+              <a:rPr b="1" sz="1500">
                 <a:solidFill>
                   <a:srgbClr val="2BA640"/>
                 </a:solidFill>
@@ -6897,51 +6794,20 @@
               <a:t>• </a:t>
             </a:r>
             <a:r>
-              <a:rPr b="1" sz="1000">
+              <a:rPr b="1" sz="1400">
                 <a:solidFill>
                   <a:srgbClr val="FFFFFF"/>
                 </a:solidFill>
               </a:rPr>
-              <a:t>Interactive Notification Bus: </a:t>
-            </a:r>
-            <a:r>
-              <a:rPr sz="1000">
-                <a:solidFill>
-                  <a:srgbClr val="BEC3CD"/>
-                </a:solidFill>
-              </a:rPr>
-              <a:t>Integrated react-toastify for instant feedback on user actions.</a:t>
-            </a:r>
-          </a:p>
-          <a:p>
-            <a:pPr>
-              <a:spcAft>
-                <a:spcPts val="600"/>
-              </a:spcAft>
-            </a:pPr>
-            <a:r>
-              <a:rPr b="1" sz="1050">
-                <a:solidFill>
-                  <a:srgbClr val="2BA640"/>
-                </a:solidFill>
-              </a:rPr>
-              <a:t>• </a:t>
-            </a:r>
-            <a:r>
-              <a:rPr b="1" sz="1000">
-                <a:solidFill>
-                  <a:srgbClr val="FFFFFF"/>
-                </a:solidFill>
-              </a:rPr>
               <a:t>Responsive Parity: </a:t>
             </a:r>
             <a:r>
-              <a:rPr sz="1000">
-                <a:solidFill>
-                  <a:srgbClr val="BEC3CD"/>
-                </a:solidFill>
-              </a:rPr>
-              <a:t>Seamless scaling across 375px mobile, 768px tablet, and 1440px desktop screens.</a:t>
+              <a:rPr sz="1400">
+                <a:solidFill>
+                  <a:srgbClr val="CDD2DC"/>
+                </a:solidFill>
+              </a:rPr>
+              <a:t>Fluid scaling across 375px mobile, 768px tablet, and 1440px desktop screens.</a:t>
             </a:r>
           </a:p>
         </p:txBody>
@@ -7076,14 +6942,14 @@
           <a:lstStyle/>
           <a:p>
             <a:pPr>
-              <a:defRPr sz="1000" b="1">
+              <a:defRPr sz="1200" b="1">
                 <a:solidFill>
                   <a:srgbClr val="3EA6FF"/>
                 </a:solidFill>
               </a:defRPr>
             </a:pPr>
             <a:r>
-              <a:t>GROUP G15  •  PROJECT ID: G15-PID-17 (P-17)  •  EVALUATION-II (25CSE0203)</a:t>
+              <a:t>GROUP G15  •  PROJECT ID: G15-PID-17 (P-17)  •  EVALUATION-II</a:t>
             </a:r>
           </a:p>
         </p:txBody>
@@ -7096,8 +6962,8 @@
         </p:nvSpPr>
         <p:spPr>
           <a:xfrm>
-            <a:off x="731520" y="594360"/>
-            <a:ext cx="10728655" cy="594360"/>
+            <a:off x="731520" y="621792"/>
+            <a:ext cx="10728655" cy="640080"/>
           </a:xfrm>
           <a:prstGeom prst="rect">
             <a:avLst/>
@@ -7111,7 +6977,7 @@
           <a:lstStyle/>
           <a:p>
             <a:pPr>
-              <a:defRPr sz="2100" b="1">
+              <a:defRPr sz="2500" b="1">
                 <a:solidFill>
                   <a:srgbClr val="FFFFFF"/>
                 </a:solidFill>
@@ -7146,9 +7012,9 @@
           <a:lstStyle/>
           <a:p>
             <a:pPr>
-              <a:defRPr sz="900">
-                <a:solidFill>
-                  <a:srgbClr val="7B8293"/>
+              <a:defRPr sz="1050">
+                <a:solidFill>
+                  <a:srgbClr val="828A9B"/>
                 </a:solidFill>
               </a:defRPr>
             </a:pPr>
@@ -7175,7 +7041,7 @@
           <a:solidFill>
             <a:srgbClr val="161922"/>
           </a:solidFill>
-          <a:ln w="15240">
+          <a:ln w="17780">
             <a:solidFill>
               <a:srgbClr val="2E3445"/>
             </a:solidFill>
@@ -7211,8 +7077,8 @@
         </p:nvSpPr>
         <p:spPr>
           <a:xfrm>
-            <a:off x="914400" y="1508760"/>
-            <a:ext cx="3017520" cy="4389120"/>
+            <a:off x="932688" y="1536192"/>
+            <a:ext cx="2980944" cy="4334255"/>
           </a:xfrm>
           <a:prstGeom prst="rect">
             <a:avLst/>
@@ -7227,26 +7093,57 @@
           <a:p>
             <a:pPr>
               <a:spcAft>
+                <a:spcPts val="1000"/>
+              </a:spcAft>
+              <a:defRPr sz="1700" b="1">
+                <a:solidFill>
+                  <a:srgbClr val="FF0033"/>
+                </a:solidFill>
+              </a:defRPr>
+            </a:pPr>
+            <a:r>
+              <a:t>React 19 &amp; Routing</a:t>
+            </a:r>
+          </a:p>
+          <a:p>
+            <a:pPr>
+              <a:spcAft>
                 <a:spcPts val="800"/>
               </a:spcAft>
-              <a:defRPr sz="1300" b="1">
+            </a:pPr>
+            <a:r>
+              <a:rPr b="1" sz="1500">
                 <a:solidFill>
                   <a:srgbClr val="FF0033"/>
                 </a:solidFill>
-              </a:defRPr>
-            </a:pPr>
-            <a:r>
-              <a:t>React 19 &amp; Routing Architecture</a:t>
-            </a:r>
-          </a:p>
-          <a:p>
-            <a:pPr>
-              <a:spcAft>
-                <a:spcPts val="600"/>
-              </a:spcAft>
-            </a:pPr>
-            <a:r>
-              <a:rPr b="1" sz="1050">
+              </a:rPr>
+              <a:t>• </a:t>
+            </a:r>
+            <a:r>
+              <a:rPr b="1" sz="1400">
+                <a:solidFill>
+                  <a:srgbClr val="FFFFFF"/>
+                </a:solidFill>
+              </a:rPr>
+              <a:t>Functional Components: </a:t>
+            </a:r>
+            <a:r>
+              <a:rPr sz="1400">
+                <a:solidFill>
+                  <a:srgbClr val="CDD2DC"/>
+                </a:solidFill>
+              </a:rPr>
+              <a:t>100% modular, pure functional architecture with explicit hook lifecycles.</a:t>
+            </a:r>
+          </a:p>
+          <a:p>
+            <a:pPr>
+              <a:spcAft>
+                <a:spcPts val="800"/>
+              </a:spcAft>
+            </a:pPr>
+            <a:r>
+              <a:rPr b="1" sz="1500">
                 <a:solidFill>
                   <a:srgbClr val="FF0033"/>
                 </a:solidFill>
@@ -7254,30 +7151,30 @@
               <a:t>• </a:t>
             </a:r>
             <a:r>
-              <a:rPr b="1" sz="1000">
+              <a:rPr b="1" sz="1400">
                 <a:solidFill>
                   <a:srgbClr val="FFFFFF"/>
                 </a:solidFill>
               </a:rPr>
-              <a:t>Functional Components: </a:t>
-            </a:r>
-            <a:r>
-              <a:rPr sz="1000">
-                <a:solidFill>
-                  <a:srgbClr val="BEC3CD"/>
-                </a:solidFill>
-              </a:rPr>
-              <a:t>100% modular, pure functional architecture with explicit hook lifecycles.</a:t>
-            </a:r>
-          </a:p>
-          <a:p>
-            <a:pPr>
-              <a:spcAft>
-                <a:spcPts val="600"/>
-              </a:spcAft>
-            </a:pPr>
-            <a:r>
-              <a:rPr b="1" sz="1050">
+              <a:t>React Router DOM v6: </a:t>
+            </a:r>
+            <a:r>
+              <a:rPr sz="1400">
+                <a:solidFill>
+                  <a:srgbClr val="CDD2DC"/>
+                </a:solidFill>
+              </a:rPr>
+              <a:t>Declarative routing engine featuring parameterized dynamic routes (/watch/:id).</a:t>
+            </a:r>
+          </a:p>
+          <a:p>
+            <a:pPr>
+              <a:spcAft>
+                <a:spcPts val="800"/>
+              </a:spcAft>
+            </a:pPr>
+            <a:r>
+              <a:rPr b="1" sz="1500">
                 <a:solidFill>
                   <a:srgbClr val="FF0033"/>
                 </a:solidFill>
@@ -7285,51 +7182,20 @@
               <a:t>• </a:t>
             </a:r>
             <a:r>
-              <a:rPr b="1" sz="1000">
+              <a:rPr b="1" sz="1400">
                 <a:solidFill>
                   <a:srgbClr val="FFFFFF"/>
                 </a:solidFill>
               </a:rPr>
-              <a:t>React Router DOM v6: </a:t>
-            </a:r>
-            <a:r>
-              <a:rPr sz="1000">
-                <a:solidFill>
-                  <a:srgbClr val="BEC3CD"/>
-                </a:solidFill>
-              </a:rPr>
-              <a:t>Declarative routing engine featuring parameterized dynamic routes (/watch/:id).</a:t>
-            </a:r>
-          </a:p>
-          <a:p>
-            <a:pPr>
-              <a:spcAft>
-                <a:spcPts val="600"/>
-              </a:spcAft>
-            </a:pPr>
-            <a:r>
-              <a:rPr b="1" sz="1050">
-                <a:solidFill>
-                  <a:srgbClr val="FF0033"/>
-                </a:solidFill>
-              </a:rPr>
-              <a:t>• </a:t>
-            </a:r>
-            <a:r>
-              <a:rPr b="1" sz="1000">
-                <a:solidFill>
-                  <a:srgbClr val="FFFFFF"/>
-                </a:solidFill>
-              </a:rPr>
               <a:t>Vite 8 Build Tooling: </a:t>
             </a:r>
             <a:r>
-              <a:rPr sz="1000">
-                <a:solidFill>
-                  <a:srgbClr val="BEC3CD"/>
-                </a:solidFill>
-              </a:rPr>
-              <a:t>Lightning fast ESM bundling delivering sub-350ms hot module replacement (HMR).</a:t>
+              <a:rPr sz="1400">
+                <a:solidFill>
+                  <a:srgbClr val="CDD2DC"/>
+                </a:solidFill>
+              </a:rPr>
+              <a:t>Lightning-fast ESM bundling delivering sub-350ms hot module replacement (HMR).</a:t>
             </a:r>
           </a:p>
         </p:txBody>
@@ -7351,7 +7217,7 @@
           <a:solidFill>
             <a:srgbClr val="161922"/>
           </a:solidFill>
-          <a:ln w="15240">
+          <a:ln w="17780">
             <a:solidFill>
               <a:srgbClr val="2E3445"/>
             </a:solidFill>
@@ -7387,8 +7253,8 @@
         </p:nvSpPr>
         <p:spPr>
           <a:xfrm>
-            <a:off x="4572000" y="1508760"/>
-            <a:ext cx="3017520" cy="4389120"/>
+            <a:off x="4590288" y="1536192"/>
+            <a:ext cx="2980944" cy="4334255"/>
           </a:xfrm>
           <a:prstGeom prst="rect">
             <a:avLst/>
@@ -7403,26 +7269,57 @@
           <a:p>
             <a:pPr>
               <a:spcAft>
+                <a:spcPts val="1000"/>
+              </a:spcAft>
+              <a:defRPr sz="1700" b="1">
+                <a:solidFill>
+                  <a:srgbClr val="3EA6FF"/>
+                </a:solidFill>
+              </a:defRPr>
+            </a:pPr>
+            <a:r>
+              <a:t>Hooks Lifecycle Layer</a:t>
+            </a:r>
+          </a:p>
+          <a:p>
+            <a:pPr>
+              <a:spcAft>
                 <a:spcPts val="800"/>
               </a:spcAft>
-              <a:defRPr sz="1300" b="1">
+            </a:pPr>
+            <a:r>
+              <a:rPr b="1" sz="1500">
                 <a:solidFill>
                   <a:srgbClr val="3EA6FF"/>
                 </a:solidFill>
-              </a:defRPr>
-            </a:pPr>
-            <a:r>
-              <a:t>Hooks &amp; Memory Lifecycle Layer</a:t>
-            </a:r>
-          </a:p>
-          <a:p>
-            <a:pPr>
-              <a:spcAft>
-                <a:spcPts val="600"/>
-              </a:spcAft>
-            </a:pPr>
-            <a:r>
-              <a:rPr b="1" sz="1050">
+              </a:rPr>
+              <a:t>• </a:t>
+            </a:r>
+            <a:r>
+              <a:rPr b="1" sz="1400">
+                <a:solidFill>
+                  <a:srgbClr val="FFFFFF"/>
+                </a:solidFill>
+              </a:rPr>
+              <a:t>useState &amp; useEffect: </a:t>
+            </a:r>
+            <a:r>
+              <a:rPr sz="1400">
+                <a:solidFill>
+                  <a:srgbClr val="CDD2DC"/>
+                </a:solidFill>
+              </a:rPr>
+              <a:t>Controlled inputs, mount lifecycle triggers, and document title synchronization.</a:t>
+            </a:r>
+          </a:p>
+          <a:p>
+            <a:pPr>
+              <a:spcAft>
+                <a:spcPts val="800"/>
+              </a:spcAft>
+            </a:pPr>
+            <a:r>
+              <a:rPr b="1" sz="1500">
                 <a:solidFill>
                   <a:srgbClr val="3EA6FF"/>
                 </a:solidFill>
@@ -7430,30 +7327,30 @@
               <a:t>• </a:t>
             </a:r>
             <a:r>
-              <a:rPr b="1" sz="1000">
+              <a:rPr b="1" sz="1400">
                 <a:solidFill>
                   <a:srgbClr val="FFFFFF"/>
                 </a:solidFill>
               </a:rPr>
-              <a:t>useState &amp; useEffect: </a:t>
-            </a:r>
-            <a:r>
-              <a:rPr sz="1000">
-                <a:solidFill>
-                  <a:srgbClr val="BEC3CD"/>
-                </a:solidFill>
-              </a:rPr>
-              <a:t>Controlled inputs, mount lifecycle triggers, and document title synchronization.</a:t>
-            </a:r>
-          </a:p>
-          <a:p>
-            <a:pPr>
-              <a:spcAft>
-                <a:spcPts val="600"/>
-              </a:spcAft>
-            </a:pPr>
-            <a:r>
-              <a:rPr b="1" sz="1050">
+              <a:t>useRef Hook: </a:t>
+            </a:r>
+            <a:r>
+              <a:rPr sz="1400">
+                <a:solidFill>
+                  <a:srgbClr val="CDD2DC"/>
+                </a:solidFill>
+              </a:rPr>
+              <a:t>Mutable non-rendering container for DOM focus control and debounced listeners.</a:t>
+            </a:r>
+          </a:p>
+          <a:p>
+            <a:pPr>
+              <a:spcAft>
+                <a:spcPts val="800"/>
+              </a:spcAft>
+            </a:pPr>
+            <a:r>
+              <a:rPr b="1" sz="1500">
                 <a:solidFill>
                   <a:srgbClr val="3EA6FF"/>
                 </a:solidFill>
@@ -7461,48 +7358,17 @@
               <a:t>• </a:t>
             </a:r>
             <a:r>
-              <a:rPr b="1" sz="1000">
+              <a:rPr b="1" sz="1400">
                 <a:solidFill>
                   <a:srgbClr val="FFFFFF"/>
                 </a:solidFill>
               </a:rPr>
-              <a:t>useRef Hook: </a:t>
-            </a:r>
-            <a:r>
-              <a:rPr sz="1000">
-                <a:solidFill>
-                  <a:srgbClr val="BEC3CD"/>
-                </a:solidFill>
-              </a:rPr>
-              <a:t>Mutable non-rendering container for DOM focus control and debounced listeners.</a:t>
-            </a:r>
-          </a:p>
-          <a:p>
-            <a:pPr>
-              <a:spcAft>
-                <a:spcPts val="600"/>
-              </a:spcAft>
-            </a:pPr>
-            <a:r>
-              <a:rPr b="1" sz="1050">
-                <a:solidFill>
-                  <a:srgbClr val="3EA6FF"/>
-                </a:solidFill>
-              </a:rPr>
-              <a:t>• </a:t>
-            </a:r>
-            <a:r>
-              <a:rPr b="1" sz="1000">
-                <a:solidFill>
-                  <a:srgbClr val="FFFFFF"/>
-                </a:solidFill>
-              </a:rPr>
               <a:t>useParams &amp; useNavigate: </a:t>
             </a:r>
             <a:r>
-              <a:rPr sz="1000">
-                <a:solidFill>
-                  <a:srgbClr val="BEC3CD"/>
+              <a:rPr sz="1400">
+                <a:solidFill>
+                  <a:srgbClr val="CDD2DC"/>
                 </a:solidFill>
               </a:rPr>
               <a:t>URL parameter extraction and programmatic navigation without page reloads.</a:t>
@@ -7527,7 +7393,7 @@
           <a:solidFill>
             <a:srgbClr val="161922"/>
           </a:solidFill>
-          <a:ln w="15240">
+          <a:ln w="17780">
             <a:solidFill>
               <a:srgbClr val="2E3445"/>
             </a:solidFill>
@@ -7563,8 +7429,8 @@
         </p:nvSpPr>
         <p:spPr>
           <a:xfrm>
-            <a:off x="8229600" y="1508760"/>
-            <a:ext cx="3017520" cy="4389120"/>
+            <a:off x="8247888" y="1536192"/>
+            <a:ext cx="2980944" cy="4334255"/>
           </a:xfrm>
           <a:prstGeom prst="rect">
             <a:avLst/>
@@ -7579,26 +7445,57 @@
           <a:p>
             <a:pPr>
               <a:spcAft>
+                <a:spcPts val="1000"/>
+              </a:spcAft>
+              <a:defRPr sz="1700" b="1">
+                <a:solidFill>
+                  <a:srgbClr val="2BA640"/>
+                </a:solidFill>
+              </a:defRPr>
+            </a:pPr>
+            <a:r>
+              <a:t>State &amp; Notification Bus</a:t>
+            </a:r>
+          </a:p>
+          <a:p>
+            <a:pPr>
+              <a:spcAft>
                 <a:spcPts val="800"/>
               </a:spcAft>
-              <a:defRPr sz="1300" b="1">
+            </a:pPr>
+            <a:r>
+              <a:rPr b="1" sz="1500">
                 <a:solidFill>
                   <a:srgbClr val="2BA640"/>
                 </a:solidFill>
-              </a:defRPr>
-            </a:pPr>
-            <a:r>
-              <a:t>State Persistence &amp; UX Bus</a:t>
-            </a:r>
-          </a:p>
-          <a:p>
-            <a:pPr>
-              <a:spcAft>
-                <a:spcPts val="600"/>
-              </a:spcAft>
-            </a:pPr>
-            <a:r>
-              <a:rPr b="1" sz="1050">
+              </a:rPr>
+              <a:t>• </a:t>
+            </a:r>
+            <a:r>
+              <a:rPr b="1" sz="1400">
+                <a:solidFill>
+                  <a:srgbClr val="FFFFFF"/>
+                </a:solidFill>
+              </a:rPr>
+              <a:t>Context API: </a:t>
+            </a:r>
+            <a:r>
+              <a:rPr sz="1400">
+                <a:solidFill>
+                  <a:srgbClr val="CDD2DC"/>
+                </a:solidFill>
+              </a:rPr>
+              <a:t>Shared application state for library, history, subscriptions, and auth.</a:t>
+            </a:r>
+          </a:p>
+          <a:p>
+            <a:pPr>
+              <a:spcAft>
+                <a:spcPts val="800"/>
+              </a:spcAft>
+            </a:pPr>
+            <a:r>
+              <a:rPr b="1" sz="1500">
                 <a:solidFill>
                   <a:srgbClr val="2BA640"/>
                 </a:solidFill>
@@ -7606,30 +7503,30 @@
               <a:t>• </a:t>
             </a:r>
             <a:r>
-              <a:rPr b="1" sz="1000">
+              <a:rPr b="1" sz="1400">
                 <a:solidFill>
                   <a:srgbClr val="FFFFFF"/>
                 </a:solidFill>
               </a:rPr>
-              <a:t>Context API (createContext): </a:t>
-            </a:r>
-            <a:r>
-              <a:rPr sz="1000">
-                <a:solidFill>
-                  <a:srgbClr val="BEC3CD"/>
-                </a:solidFill>
-              </a:rPr>
-              <a:t>Shared application state for library, history, subscriptions, and auth.</a:t>
-            </a:r>
-          </a:p>
-          <a:p>
-            <a:pPr>
-              <a:spcAft>
-                <a:spcPts val="600"/>
-              </a:spcAft>
-            </a:pPr>
-            <a:r>
-              <a:rPr b="1" sz="1050">
+              <a:t>Browser LocalStorage: </a:t>
+            </a:r>
+            <a:r>
+              <a:rPr sz="1400">
+                <a:solidFill>
+                  <a:srgbClr val="CDD2DC"/>
+                </a:solidFill>
+              </a:rPr>
+              <a:t>Client-side JSON persistence ensuring data survives page refreshes.</a:t>
+            </a:r>
+          </a:p>
+          <a:p>
+            <a:pPr>
+              <a:spcAft>
+                <a:spcPts val="800"/>
+              </a:spcAft>
+            </a:pPr>
+            <a:r>
+              <a:rPr b="1" sz="1500">
                 <a:solidFill>
                   <a:srgbClr val="2BA640"/>
                 </a:solidFill>
@@ -7637,48 +7534,17 @@
               <a:t>• </a:t>
             </a:r>
             <a:r>
-              <a:rPr b="1" sz="1000">
+              <a:rPr b="1" sz="1400">
                 <a:solidFill>
                   <a:srgbClr val="FFFFFF"/>
                 </a:solidFill>
               </a:rPr>
-              <a:t>Browser LocalStorage: </a:t>
-            </a:r>
-            <a:r>
-              <a:rPr sz="1000">
-                <a:solidFill>
-                  <a:srgbClr val="BEC3CD"/>
-                </a:solidFill>
-              </a:rPr>
-              <a:t>Client-side JSON persistence ensuring data survives page refreshes and browser restarts.</a:t>
-            </a:r>
-          </a:p>
-          <a:p>
-            <a:pPr>
-              <a:spcAft>
-                <a:spcPts val="600"/>
-              </a:spcAft>
-            </a:pPr>
-            <a:r>
-              <a:rPr b="1" sz="1050">
-                <a:solidFill>
-                  <a:srgbClr val="2BA640"/>
-                </a:solidFill>
-              </a:rPr>
-              <a:t>• </a:t>
-            </a:r>
-            <a:r>
-              <a:rPr b="1" sz="1000">
-                <a:solidFill>
-                  <a:srgbClr val="FFFFFF"/>
-                </a:solidFill>
-              </a:rPr>
               <a:t>react-toastify: </a:t>
             </a:r>
             <a:r>
-              <a:rPr sz="1000">
-                <a:solidFill>
-                  <a:srgbClr val="BEC3CD"/>
+              <a:rPr sz="1400">
+                <a:solidFill>
+                  <a:srgbClr val="CDD2DC"/>
                 </a:solidFill>
               </a:rPr>
               <a:t>Non-blocking alert toasts recommended by course supervisor Mr. Shubham Kumar.</a:t>
@@ -7816,14 +7682,14 @@
           <a:lstStyle/>
           <a:p>
             <a:pPr>
-              <a:defRPr sz="1000" b="1">
+              <a:defRPr sz="1200" b="1">
                 <a:solidFill>
                   <a:srgbClr val="3EA6FF"/>
                 </a:solidFill>
               </a:defRPr>
             </a:pPr>
             <a:r>
-              <a:t>GROUP G15  •  PROJECT ID: G15-PID-17 (P-17)  •  EVALUATION-II (25CSE0203)</a:t>
+              <a:t>GROUP G15  •  PROJECT ID: G15-PID-17 (P-17)  •  EVALUATION-II</a:t>
             </a:r>
           </a:p>
         </p:txBody>
@@ -7836,8 +7702,8 @@
         </p:nvSpPr>
         <p:spPr>
           <a:xfrm>
-            <a:off x="731520" y="594360"/>
-            <a:ext cx="10728655" cy="594360"/>
+            <a:off x="731520" y="621792"/>
+            <a:ext cx="10728655" cy="640080"/>
           </a:xfrm>
           <a:prstGeom prst="rect">
             <a:avLst/>
@@ -7851,7 +7717,7 @@
           <a:lstStyle/>
           <a:p>
             <a:pPr>
-              <a:defRPr sz="2100" b="1">
+              <a:defRPr sz="2500" b="1">
                 <a:solidFill>
                   <a:srgbClr val="FFFFFF"/>
                 </a:solidFill>
@@ -7886,9 +7752,9 @@
           <a:lstStyle/>
           <a:p>
             <a:pPr>
-              <a:defRPr sz="900">
-                <a:solidFill>
-                  <a:srgbClr val="7B8293"/>
+              <a:defRPr sz="1050">
+                <a:solidFill>
+                  <a:srgbClr val="828A9B"/>
                 </a:solidFill>
               </a:defRPr>
             </a:pPr>
@@ -7915,7 +7781,7 @@
           <a:solidFill>
             <a:srgbClr val="161922"/>
           </a:solidFill>
-          <a:ln w="15240">
+          <a:ln w="17780">
             <a:solidFill>
               <a:srgbClr val="2E3445"/>
             </a:solidFill>
@@ -7951,8 +7817,8 @@
         </p:nvSpPr>
         <p:spPr>
           <a:xfrm>
-            <a:off x="914400" y="1508760"/>
-            <a:ext cx="4846320" cy="4389120"/>
+            <a:off x="932688" y="1536192"/>
+            <a:ext cx="4809744" cy="4334255"/>
           </a:xfrm>
           <a:prstGeom prst="rect">
             <a:avLst/>
@@ -7967,26 +7833,57 @@
           <a:p>
             <a:pPr>
               <a:spcAft>
+                <a:spcPts val="1000"/>
+              </a:spcAft>
+              <a:defRPr sz="1700" b="1">
+                <a:solidFill>
+                  <a:srgbClr val="3EA6FF"/>
+                </a:solidFill>
+              </a:defRPr>
+            </a:pPr>
+            <a:r>
+              <a:t>Component Hierarchy &amp; Responsibility</a:t>
+            </a:r>
+          </a:p>
+          <a:p>
+            <a:pPr>
+              <a:spcAft>
                 <a:spcPts val="800"/>
               </a:spcAft>
-              <a:defRPr sz="1300" b="1">
+            </a:pPr>
+            <a:r>
+              <a:rPr b="1" sz="1500">
                 <a:solidFill>
                   <a:srgbClr val="3EA6FF"/>
                 </a:solidFill>
-              </a:defRPr>
-            </a:pPr>
-            <a:r>
-              <a:t>Component Hierarchy &amp; Responsibility</a:t>
-            </a:r>
-          </a:p>
-          <a:p>
-            <a:pPr>
-              <a:spcAft>
-                <a:spcPts val="600"/>
-              </a:spcAft>
-            </a:pPr>
-            <a:r>
-              <a:rPr b="1" sz="1050">
+              </a:rPr>
+              <a:t>• </a:t>
+            </a:r>
+            <a:r>
+              <a:rPr b="1" sz="1400">
+                <a:solidFill>
+                  <a:srgbClr val="FFFFFF"/>
+                </a:solidFill>
+              </a:rPr>
+              <a:t>&lt;AppProvider&gt; (Root Context): </a:t>
+            </a:r>
+            <a:r>
+              <a:rPr sz="1400">
+                <a:solidFill>
+                  <a:srgbClr val="CDD2DC"/>
+                </a:solidFill>
+              </a:rPr>
+              <a:t>Houses global state slices, reducer actions, and localStorage side effects.</a:t>
+            </a:r>
+          </a:p>
+          <a:p>
+            <a:pPr>
+              <a:spcAft>
+                <a:spcPts val="800"/>
+              </a:spcAft>
+            </a:pPr>
+            <a:r>
+              <a:rPr b="1" sz="1500">
                 <a:solidFill>
                   <a:srgbClr val="3EA6FF"/>
                 </a:solidFill>
@@ -7994,30 +7891,30 @@
               <a:t>• </a:t>
             </a:r>
             <a:r>
-              <a:rPr b="1" sz="1000">
+              <a:rPr b="1" sz="1400">
                 <a:solidFill>
                   <a:srgbClr val="FFFFFF"/>
                 </a:solidFill>
               </a:rPr>
-              <a:t>&lt;AppProvider&gt; (Root Context): </a:t>
-            </a:r>
-            <a:r>
-              <a:rPr sz="1000">
-                <a:solidFill>
-                  <a:srgbClr val="BEC3CD"/>
-                </a:solidFill>
-              </a:rPr>
-              <a:t>Houses global state slices, reducer actions, and localStorage side effects.</a:t>
-            </a:r>
-          </a:p>
-          <a:p>
-            <a:pPr>
-              <a:spcAft>
-                <a:spcPts val="600"/>
-              </a:spcAft>
-            </a:pPr>
-            <a:r>
-              <a:rPr b="1" sz="1050">
+              <a:t>&lt;Navbar&gt;: </a:t>
+            </a:r>
+            <a:r>
+              <a:rPr sz="1400">
+                <a:solidFill>
+                  <a:srgbClr val="CDD2DC"/>
+                </a:solidFill>
+              </a:rPr>
+              <a:t>Independent search bar with live auto-complete dropdown, microphone voice trigger, and auth modal.</a:t>
+            </a:r>
+          </a:p>
+          <a:p>
+            <a:pPr>
+              <a:spcAft>
+                <a:spcPts val="800"/>
+              </a:spcAft>
+            </a:pPr>
+            <a:r>
+              <a:rPr b="1" sz="1500">
                 <a:solidFill>
                   <a:srgbClr val="3EA6FF"/>
                 </a:solidFill>
@@ -8025,30 +7922,30 @@
               <a:t>• </a:t>
             </a:r>
             <a:r>
-              <a:rPr b="1" sz="1000">
+              <a:rPr b="1" sz="1400">
                 <a:solidFill>
                   <a:srgbClr val="FFFFFF"/>
                 </a:solidFill>
               </a:rPr>
-              <a:t>&lt;Navbar&gt;: </a:t>
-            </a:r>
-            <a:r>
-              <a:rPr sz="1000">
-                <a:solidFill>
-                  <a:srgbClr val="BEC3CD"/>
-                </a:solidFill>
-              </a:rPr>
-              <a:t>Independent search bar with live auto-complete dropdown, microphone voice trigger, and auth modal.</a:t>
-            </a:r>
-          </a:p>
-          <a:p>
-            <a:pPr>
-              <a:spcAft>
-                <a:spcPts val="600"/>
-              </a:spcAft>
-            </a:pPr>
-            <a:r>
-              <a:rPr b="1" sz="1050">
+              <a:t>&lt;Sidebar&gt; &amp; &lt;CategoryChips&gt;: </a:t>
+            </a:r>
+            <a:r>
+              <a:rPr sz="1400">
+                <a:solidFill>
+                  <a:srgbClr val="CDD2DC"/>
+                </a:solidFill>
+              </a:rPr>
+              <a:t>Two-way bound navigation and category filtering driving video feeds.</a:t>
+            </a:r>
+          </a:p>
+          <a:p>
+            <a:pPr>
+              <a:spcAft>
+                <a:spcPts val="800"/>
+              </a:spcAft>
+            </a:pPr>
+            <a:r>
+              <a:rPr b="1" sz="1500">
                 <a:solidFill>
                   <a:srgbClr val="3EA6FF"/>
                 </a:solidFill>
@@ -8056,30 +7953,30 @@
               <a:t>• </a:t>
             </a:r>
             <a:r>
-              <a:rPr b="1" sz="1000">
+              <a:rPr b="1" sz="1400">
                 <a:solidFill>
                   <a:srgbClr val="FFFFFF"/>
                 </a:solidFill>
               </a:rPr>
-              <a:t>&lt;Sidebar&gt; &amp; &lt;CategoryChips&gt;: </a:t>
-            </a:r>
-            <a:r>
-              <a:rPr sz="1000">
-                <a:solidFill>
-                  <a:srgbClr val="BEC3CD"/>
-                </a:solidFill>
-              </a:rPr>
-              <a:t>Two-way bound navigation and category filtering driving video feeds.</a:t>
-            </a:r>
-          </a:p>
-          <a:p>
-            <a:pPr>
-              <a:spcAft>
-                <a:spcPts val="600"/>
-              </a:spcAft>
-            </a:pPr>
-            <a:r>
-              <a:rPr b="1" sz="1050">
+              <a:t>&lt;VideoCard&gt; &amp; &lt;ShortsCard&gt;: </a:t>
+            </a:r>
+            <a:r>
+              <a:rPr sz="1400">
+                <a:solidFill>
+                  <a:srgbClr val="CDD2DC"/>
+                </a:solidFill>
+              </a:rPr>
+              <a:t>Pure presentation components passing IDs to dynamic watch routes via navigate hooks.</a:t>
+            </a:r>
+          </a:p>
+          <a:p>
+            <a:pPr>
+              <a:spcAft>
+                <a:spcPts val="800"/>
+              </a:spcAft>
+            </a:pPr>
+            <a:r>
+              <a:rPr b="1" sz="1500">
                 <a:solidFill>
                   <a:srgbClr val="3EA6FF"/>
                 </a:solidFill>
@@ -8087,48 +7984,17 @@
               <a:t>• </a:t>
             </a:r>
             <a:r>
-              <a:rPr b="1" sz="1000">
+              <a:rPr b="1" sz="1400">
                 <a:solidFill>
                   <a:srgbClr val="FFFFFF"/>
                 </a:solidFill>
               </a:rPr>
-              <a:t>&lt;VideoCard&gt; &amp; &lt;ShortsCard&gt;: </a:t>
-            </a:r>
-            <a:r>
-              <a:rPr sz="1000">
-                <a:solidFill>
-                  <a:srgbClr val="BEC3CD"/>
-                </a:solidFill>
-              </a:rPr>
-              <a:t>Pure presentation components passing IDs to dynamic watch routes via navigate hooks.</a:t>
-            </a:r>
-          </a:p>
-          <a:p>
-            <a:pPr>
-              <a:spcAft>
-                <a:spcPts val="600"/>
-              </a:spcAft>
-            </a:pPr>
-            <a:r>
-              <a:rPr b="1" sz="1050">
-                <a:solidFill>
-                  <a:srgbClr val="3EA6FF"/>
-                </a:solidFill>
-              </a:rPr>
-              <a:t>• </a:t>
-            </a:r>
-            <a:r>
-              <a:rPr b="1" sz="1000">
-                <a:solidFill>
-                  <a:srgbClr val="FFFFFF"/>
-                </a:solidFill>
-              </a:rPr>
               <a:t>&lt;WatchPage&gt;: </a:t>
             </a:r>
             <a:r>
-              <a:rPr sz="1000">
-                <a:solidFill>
-                  <a:srgbClr val="BEC3CD"/>
+              <a:rPr sz="1400">
+                <a:solidFill>
+                  <a:srgbClr val="CDD2DC"/>
                 </a:solidFill>
               </a:rPr>
               <a:t>Master composite page integrating video player, channel actions, comments feed, and recommended sidebar.</a:t>
@@ -8153,7 +8019,7 @@
           <a:solidFill>
             <a:srgbClr val="161922"/>
           </a:solidFill>
-          <a:ln w="15240">
+          <a:ln w="17780">
             <a:solidFill>
               <a:srgbClr val="2E3445"/>
             </a:solidFill>
@@ -8189,8 +8055,8 @@
         </p:nvSpPr>
         <p:spPr>
           <a:xfrm>
-            <a:off x="6400800" y="1508760"/>
-            <a:ext cx="4846320" cy="4389120"/>
+            <a:off x="6419088" y="1536192"/>
+            <a:ext cx="4809744" cy="4334255"/>
           </a:xfrm>
           <a:prstGeom prst="rect">
             <a:avLst/>
@@ -8205,26 +8071,57 @@
           <a:p>
             <a:pPr>
               <a:spcAft>
+                <a:spcPts val="1000"/>
+              </a:spcAft>
+              <a:defRPr sz="1700" b="1">
+                <a:solidFill>
+                  <a:srgbClr val="FF0033"/>
+                </a:solidFill>
+              </a:defRPr>
+            </a:pPr>
+            <a:r>
+              <a:t>Data Flow &amp; Isolation Architecture</a:t>
+            </a:r>
+          </a:p>
+          <a:p>
+            <a:pPr>
+              <a:spcAft>
                 <a:spcPts val="800"/>
               </a:spcAft>
-              <a:defRPr sz="1300" b="1">
+            </a:pPr>
+            <a:r>
+              <a:rPr b="1" sz="1500">
                 <a:solidFill>
                   <a:srgbClr val="FF0033"/>
                 </a:solidFill>
-              </a:defRPr>
-            </a:pPr>
-            <a:r>
-              <a:t>Data Flow &amp; Isolation Architecture</a:t>
-            </a:r>
-          </a:p>
-          <a:p>
-            <a:pPr>
-              <a:spcAft>
-                <a:spcPts val="600"/>
-              </a:spcAft>
-            </a:pPr>
-            <a:r>
-              <a:rPr b="1" sz="1050">
+              </a:rPr>
+              <a:t>• </a:t>
+            </a:r>
+            <a:r>
+              <a:rPr b="1" sz="1400">
+                <a:solidFill>
+                  <a:srgbClr val="FFFFFF"/>
+                </a:solidFill>
+              </a:rPr>
+              <a:t>Unidirectional Data Flow: </a:t>
+            </a:r>
+            <a:r>
+              <a:rPr sz="1400">
+                <a:solidFill>
+                  <a:srgbClr val="CDD2DC"/>
+                </a:solidFill>
+              </a:rPr>
+              <a:t>Context state descends via hooks; child actions bubble up via context methods (toggleLike, addComment).</a:t>
+            </a:r>
+          </a:p>
+          <a:p>
+            <a:pPr>
+              <a:spcAft>
+                <a:spcPts val="800"/>
+              </a:spcAft>
+            </a:pPr>
+            <a:r>
+              <a:rPr b="1" sz="1500">
                 <a:solidFill>
                   <a:srgbClr val="FF0033"/>
                 </a:solidFill>
@@ -8232,30 +8129,30 @@
               <a:t>• </a:t>
             </a:r>
             <a:r>
-              <a:rPr b="1" sz="1000">
+              <a:rPr b="1" sz="1400">
                 <a:solidFill>
                   <a:srgbClr val="FFFFFF"/>
                 </a:solidFill>
               </a:rPr>
-              <a:t>Unidirectional Data Flow: </a:t>
-            </a:r>
-            <a:r>
-              <a:rPr sz="1000">
-                <a:solidFill>
-                  <a:srgbClr val="BEC3CD"/>
-                </a:solidFill>
-              </a:rPr>
-              <a:t>Context state descends via hooks; child actions bubble up via context methods (toggleLike, addComment).</a:t>
-            </a:r>
-          </a:p>
-          <a:p>
-            <a:pPr>
-              <a:spcAft>
-                <a:spcPts val="600"/>
-              </a:spcAft>
-            </a:pPr>
-            <a:r>
-              <a:rPr b="1" sz="1050">
+              <a:t>Prop-Drilling Elimination: </a:t>
+            </a:r>
+            <a:r>
+              <a:rPr sz="1400">
+                <a:solidFill>
+                  <a:srgbClr val="CDD2DC"/>
+                </a:solidFill>
+              </a:rPr>
+              <a:t>WatchPage, Navbar, and Sidebar independently consume useApp() without intermediary props.</a:t>
+            </a:r>
+          </a:p>
+          <a:p>
+            <a:pPr>
+              <a:spcAft>
+                <a:spcPts val="800"/>
+              </a:spcAft>
+            </a:pPr>
+            <a:r>
+              <a:rPr b="1" sz="1500">
                 <a:solidFill>
                   <a:srgbClr val="FF0033"/>
                 </a:solidFill>
@@ -8263,30 +8160,30 @@
               <a:t>• </a:t>
             </a:r>
             <a:r>
-              <a:rPr b="1" sz="1000">
+              <a:rPr b="1" sz="1400">
                 <a:solidFill>
                   <a:srgbClr val="FFFFFF"/>
                 </a:solidFill>
               </a:rPr>
-              <a:t>Prop-Drilling Elimination: </a:t>
-            </a:r>
-            <a:r>
-              <a:rPr sz="1000">
-                <a:solidFill>
-                  <a:srgbClr val="BEC3CD"/>
-                </a:solidFill>
-              </a:rPr>
-              <a:t>WatchPage, Navbar, and Sidebar independently consume useApp() without intermediary props.</a:t>
-            </a:r>
-          </a:p>
-          <a:p>
-            <a:pPr>
-              <a:spcAft>
-                <a:spcPts val="600"/>
-              </a:spcAft>
-            </a:pPr>
-            <a:r>
-              <a:rPr b="1" sz="1050">
+              <a:t>Modular Route Segregation: </a:t>
+            </a:r>
+            <a:r>
+              <a:rPr sz="1400">
+                <a:solidFill>
+                  <a:srgbClr val="CDD2DC"/>
+                </a:solidFill>
+              </a:rPr>
+              <a:t>Distinct routes for /, /watch/:id, /shorts, /history, /liked, /watch-later, and /subscriptions.</a:t>
+            </a:r>
+          </a:p>
+          <a:p>
+            <a:pPr>
+              <a:spcAft>
+                <a:spcPts val="800"/>
+              </a:spcAft>
+            </a:pPr>
+            <a:r>
+              <a:rPr b="1" sz="1500">
                 <a:solidFill>
                   <a:srgbClr val="FF0033"/>
                 </a:solidFill>
@@ -8294,48 +8191,17 @@
               <a:t>• </a:t>
             </a:r>
             <a:r>
-              <a:rPr b="1" sz="1000">
+              <a:rPr b="1" sz="1400">
                 <a:solidFill>
                   <a:srgbClr val="FFFFFF"/>
                 </a:solidFill>
               </a:rPr>
-              <a:t>Modular Route Segregation: </a:t>
-            </a:r>
-            <a:r>
-              <a:rPr sz="1000">
-                <a:solidFill>
-                  <a:srgbClr val="BEC3CD"/>
-                </a:solidFill>
-              </a:rPr>
-              <a:t>Distinct routes for /, /watch/:id, /shorts, /history, /liked, /watch-later, and /subscriptions.</a:t>
-            </a:r>
-          </a:p>
-          <a:p>
-            <a:pPr>
-              <a:spcAft>
-                <a:spcPts val="600"/>
-              </a:spcAft>
-            </a:pPr>
-            <a:r>
-              <a:rPr b="1" sz="1050">
-                <a:solidFill>
-                  <a:srgbClr val="FF0033"/>
-                </a:solidFill>
-              </a:rPr>
-              <a:t>• </a:t>
-            </a:r>
-            <a:r>
-              <a:rPr b="1" sz="1000">
-                <a:solidFill>
-                  <a:srgbClr val="FFFFFF"/>
-                </a:solidFill>
-              </a:rPr>
               <a:t>Authentication Modal Isolation: </a:t>
             </a:r>
             <a:r>
-              <a:rPr sz="1000">
-                <a:solidFill>
-                  <a:srgbClr val="BEC3CD"/>
+              <a:rPr sz="1400">
+                <a:solidFill>
+                  <a:srgbClr val="CDD2DC"/>
                 </a:solidFill>
               </a:rPr>
               <a:t>Client-side auth popup controlled by Context state, avoiding parent re-renders.</a:t>
@@ -8473,14 +8339,14 @@
           <a:lstStyle/>
           <a:p>
             <a:pPr>
-              <a:defRPr sz="1000" b="1">
+              <a:defRPr sz="1200" b="1">
                 <a:solidFill>
                   <a:srgbClr val="3EA6FF"/>
                 </a:solidFill>
               </a:defRPr>
             </a:pPr>
             <a:r>
-              <a:t>GROUP G15  •  PROJECT ID: G15-PID-17 (P-17)  •  EVALUATION-II (25CSE0203)</a:t>
+              <a:t>GROUP G15  •  PROJECT ID: G15-PID-17 (P-17)  •  EVALUATION-II</a:t>
             </a:r>
           </a:p>
         </p:txBody>
@@ -8493,8 +8359,8 @@
         </p:nvSpPr>
         <p:spPr>
           <a:xfrm>
-            <a:off x="731520" y="594360"/>
-            <a:ext cx="10728655" cy="594360"/>
+            <a:off x="731520" y="621792"/>
+            <a:ext cx="10728655" cy="640080"/>
           </a:xfrm>
           <a:prstGeom prst="rect">
             <a:avLst/>
@@ -8508,7 +8374,7 @@
           <a:lstStyle/>
           <a:p>
             <a:pPr>
-              <a:defRPr sz="2100" b="1">
+              <a:defRPr sz="2500" b="1">
                 <a:solidFill>
                   <a:srgbClr val="FFFFFF"/>
                 </a:solidFill>
@@ -8543,9 +8409,9 @@
           <a:lstStyle/>
           <a:p>
             <a:pPr>
-              <a:defRPr sz="900">
-                <a:solidFill>
-                  <a:srgbClr val="7B8293"/>
+              <a:defRPr sz="1050">
+                <a:solidFill>
+                  <a:srgbClr val="828A9B"/>
                 </a:solidFill>
               </a:defRPr>
             </a:pPr>
@@ -8564,7 +8430,7 @@
         <p:spPr>
           <a:xfrm>
             <a:off x="731520" y="1371600"/>
-            <a:ext cx="3383280" cy="4663440"/>
+            <a:ext cx="5943600" cy="4663440"/>
           </a:xfrm>
           <a:prstGeom prst="roundRect">
             <a:avLst/>
@@ -8572,7 +8438,7 @@
           <a:solidFill>
             <a:srgbClr val="161922"/>
           </a:solidFill>
-          <a:ln w="15240">
+          <a:ln w="17780">
             <a:solidFill>
               <a:srgbClr val="2E3445"/>
             </a:solidFill>
@@ -8608,8 +8474,8 @@
         </p:nvSpPr>
         <p:spPr>
           <a:xfrm>
-            <a:off x="914400" y="1508760"/>
-            <a:ext cx="3017520" cy="4389120"/>
+            <a:off x="932688" y="1536192"/>
+            <a:ext cx="5541264" cy="4334255"/>
           </a:xfrm>
           <a:prstGeom prst="rect">
             <a:avLst/>
@@ -8624,26 +8490,57 @@
           <a:p>
             <a:pPr>
               <a:spcAft>
+                <a:spcPts val="1000"/>
+              </a:spcAft>
+              <a:defRPr sz="1700" b="1">
+                <a:solidFill>
+                  <a:srgbClr val="FF0033"/>
+                </a:solidFill>
+              </a:defRPr>
+            </a:pPr>
+            <a:r>
+              <a:t>Dynamic Routing &amp; Streaming Player Engine</a:t>
+            </a:r>
+          </a:p>
+          <a:p>
+            <a:pPr>
+              <a:spcAft>
                 <a:spcPts val="800"/>
               </a:spcAft>
-              <a:defRPr sz="1300" b="1">
+            </a:pPr>
+            <a:r>
+              <a:rPr b="1" sz="1500">
                 <a:solidFill>
                   <a:srgbClr val="FF0033"/>
                 </a:solidFill>
-              </a:defRPr>
-            </a:pPr>
-            <a:r>
-              <a:t>URL Extraction via useParams()</a:t>
-            </a:r>
-          </a:p>
-          <a:p>
-            <a:pPr>
-              <a:spcAft>
-                <a:spcPts val="600"/>
-              </a:spcAft>
-            </a:pPr>
-            <a:r>
-              <a:rPr b="1" sz="1050">
+              </a:rPr>
+              <a:t>• </a:t>
+            </a:r>
+            <a:r>
+              <a:rPr b="1" sz="1400">
+                <a:solidFill>
+                  <a:srgbClr val="FFFFFF"/>
+                </a:solidFill>
+              </a:rPr>
+              <a:t>URL Parameter Extraction: </a:t>
+            </a:r>
+            <a:r>
+              <a:rPr sz="1400">
+                <a:solidFill>
+                  <a:srgbClr val="CDD2DC"/>
+                </a:solidFill>
+              </a:rPr>
+              <a:t>const { id } = useParams() extracts video ID from route wildcard without page reload.</a:t>
+            </a:r>
+          </a:p>
+          <a:p>
+            <a:pPr>
+              <a:spcAft>
+                <a:spcPts val="800"/>
+              </a:spcAft>
+            </a:pPr>
+            <a:r>
+              <a:rPr b="1" sz="1500">
                 <a:solidFill>
                   <a:srgbClr val="FF0033"/>
                 </a:solidFill>
@@ -8651,30 +8548,30 @@
               <a:t>• </a:t>
             </a:r>
             <a:r>
-              <a:rPr b="1" sz="1000">
+              <a:rPr b="1" sz="1400">
                 <a:solidFill>
                   <a:srgbClr val="FFFFFF"/>
                 </a:solidFill>
               </a:rPr>
-              <a:t>Dynamic Route Pattern: </a:t>
-            </a:r>
-            <a:r>
-              <a:rPr sz="1000">
-                <a:solidFill>
-                  <a:srgbClr val="BEC3CD"/>
-                </a:solidFill>
-              </a:rPr>
-              <a:t>Configured in App.jsx as &lt;Route path="/watch/:id" element={&lt;WatchPage /&gt;} /&gt;.</a:t>
-            </a:r>
-          </a:p>
-          <a:p>
-            <a:pPr>
-              <a:spcAft>
-                <a:spcPts val="600"/>
-              </a:spcAft>
-            </a:pPr>
-            <a:r>
-              <a:rPr b="1" sz="1050">
+              <a:t>16:9 Streaming Player: </a:t>
+            </a:r>
+            <a:r>
+              <a:rPr sz="1400">
+                <a:solidFill>
+                  <a:srgbClr val="CDD2DC"/>
+                </a:solidFill>
+              </a:rPr>
+              <a:t>Embeds verified YouTube streams with autoplay, picture-in-picture, and fullscreen controls.</a:t>
+            </a:r>
+          </a:p>
+          <a:p>
+            <a:pPr>
+              <a:spcAft>
+                <a:spcPts val="800"/>
+              </a:spcAft>
+            </a:pPr>
+            <a:r>
+              <a:rPr b="1" sz="1500">
                 <a:solidFill>
                   <a:srgbClr val="FF0033"/>
                 </a:solidFill>
@@ -8682,30 +8579,30 @@
               <a:t>• </a:t>
             </a:r>
             <a:r>
-              <a:rPr b="1" sz="1000">
+              <a:rPr b="1" sz="1400">
                 <a:solidFill>
                   <a:srgbClr val="FFFFFF"/>
                 </a:solidFill>
               </a:rPr>
-              <a:t>Runtime Extraction: </a:t>
-            </a:r>
-            <a:r>
-              <a:rPr sz="1000">
-                <a:solidFill>
-                  <a:srgbClr val="BEC3CD"/>
-                </a:solidFill>
-              </a:rPr>
-              <a:t>const { id } = useParams() instantly queries dataset without page reloads.</a:t>
-            </a:r>
-          </a:p>
-          <a:p>
-            <a:pPr>
-              <a:spcAft>
-                <a:spcPts val="600"/>
-              </a:spcAft>
-            </a:pPr>
-            <a:r>
-              <a:rPr b="1" sz="1050">
+              <a:t>Up-Next Recommendation Engine: </a:t>
+            </a:r>
+            <a:r>
+              <a:rPr sz="1400">
+                <a:solidFill>
+                  <a:srgbClr val="CDD2DC"/>
+                </a:solidFill>
+              </a:rPr>
+              <a:t>Right-column queue filtered dynamically by category; clicking swaps video via useNavigate().</a:t>
+            </a:r>
+          </a:p>
+          <a:p>
+            <a:pPr>
+              <a:spcAft>
+                <a:spcPts val="800"/>
+              </a:spcAft>
+            </a:pPr>
+            <a:r>
+              <a:rPr b="1" sz="1500">
                 <a:solidFill>
                   <a:srgbClr val="FF0033"/>
                 </a:solidFill>
@@ -8713,20 +8610,51 @@
               <a:t>• </a:t>
             </a:r>
             <a:r>
-              <a:rPr b="1" sz="1000">
+              <a:rPr b="1" sz="1400">
                 <a:solidFill>
                   <a:srgbClr val="FFFFFF"/>
                 </a:solidFill>
               </a:rPr>
-              <a:t>Graceful Fallback: </a:t>
-            </a:r>
-            <a:r>
-              <a:rPr sz="1000">
-                <a:solidFill>
-                  <a:srgbClr val="BEC3CD"/>
-                </a:solidFill>
-              </a:rPr>
-              <a:t>Fallback screen renders with redirect button if invalid or non-existent video ID is supplied.</a:t>
+              <a:t>Auto-Scroll on Video Change: </a:t>
+            </a:r>
+            <a:r>
+              <a:rPr sz="1400">
+                <a:solidFill>
+                  <a:srgbClr val="CDD2DC"/>
+                </a:solidFill>
+              </a:rPr>
+              <a:t>window.scrollTo(0, 0) automatically triggers in useEffect when video ID updates.</a:t>
+            </a:r>
+          </a:p>
+          <a:p>
+            <a:pPr>
+              <a:spcAft>
+                <a:spcPts val="800"/>
+              </a:spcAft>
+            </a:pPr>
+            <a:r>
+              <a:rPr b="1" sz="1500">
+                <a:solidFill>
+                  <a:srgbClr val="FF0033"/>
+                </a:solidFill>
+              </a:rPr>
+              <a:t>• </a:t>
+            </a:r>
+            <a:r>
+              <a:rPr b="1" sz="1400">
+                <a:solidFill>
+                  <a:srgbClr val="FFFFFF"/>
+                </a:solidFill>
+              </a:rPr>
+              <a:t>Persistent Watch History: </a:t>
+            </a:r>
+            <a:r>
+              <a:rPr sz="1400">
+                <a:solidFill>
+                  <a:srgbClr val="CDD2DC"/>
+                </a:solidFill>
+              </a:rPr>
+              <a:t>Navigating to a video automatically appends it to persistent history in localStorage.</a:t>
             </a:r>
           </a:p>
         </p:txBody>
@@ -8739,8 +8667,8 @@
         </p:nvSpPr>
         <p:spPr>
           <a:xfrm>
-            <a:off x="4389120" y="1371600"/>
-            <a:ext cx="3383280" cy="4663440"/>
+            <a:off x="6949440" y="1371600"/>
+            <a:ext cx="4480560" cy="4663440"/>
           </a:xfrm>
           <a:prstGeom prst="roundRect">
             <a:avLst/>
@@ -8748,7 +8676,7 @@
           <a:solidFill>
             <a:srgbClr val="161922"/>
           </a:solidFill>
-          <a:ln w="15240">
+          <a:ln w="17780">
             <a:solidFill>
               <a:srgbClr val="2E3445"/>
             </a:solidFill>
@@ -8776,16 +8704,40 @@
           </a:p>
         </p:txBody>
       </p:sp>
-      <p:sp>
-        <p:nvSpPr>
-          <p:cNvPr id="10" name="TextBox 9"/>
+      <p:pic>
+        <p:nvPicPr>
+          <p:cNvPr id="10" name="Picture 9" descr="chaiaurcode_react_part1.png"/>
+          <p:cNvPicPr>
+            <a:picLocks noChangeAspect="1"/>
+          </p:cNvPicPr>
+          <p:nvPr/>
+        </p:nvPicPr>
+        <p:blipFill>
+          <a:blip r:embed="rId2"/>
+          <a:stretch>
+            <a:fillRect/>
+          </a:stretch>
+        </p:blipFill>
+        <p:spPr>
+          <a:xfrm>
+            <a:off x="7178040" y="1645920"/>
+            <a:ext cx="4023360" cy="2263140"/>
+          </a:xfrm>
+          <a:prstGeom prst="rect">
+            <a:avLst/>
+          </a:prstGeom>
+        </p:spPr>
+      </p:pic>
+      <p:sp>
+        <p:nvSpPr>
+          <p:cNvPr id="11" name="TextBox 10"/>
           <p:cNvSpPr txBox="1"/>
           <p:nvPr/>
         </p:nvSpPr>
         <p:spPr>
           <a:xfrm>
-            <a:off x="4572000" y="1508760"/>
-            <a:ext cx="3017520" cy="4389120"/>
+            <a:off x="7178040" y="4114800"/>
+            <a:ext cx="4023360" cy="1645920"/>
           </a:xfrm>
           <a:prstGeom prst="rect">
             <a:avLst/>
@@ -8799,286 +8751,29 @@
           <a:lstStyle/>
           <a:p>
             <a:pPr>
-              <a:spcAft>
-                <a:spcPts val="800"/>
-              </a:spcAft>
-              <a:defRPr sz="1300" b="1">
+              <a:defRPr sz="1500" b="1">
                 <a:solidFill>
                   <a:srgbClr val="3EA6FF"/>
                 </a:solidFill>
               </a:defRPr>
             </a:pPr>
             <a:r>
-              <a:t>Embedded 16:9 Streaming Engine</a:t>
-            </a:r>
-          </a:p>
-          <a:p>
-            <a:pPr>
-              <a:spcAft>
-                <a:spcPts val="600"/>
-              </a:spcAft>
-            </a:pPr>
-            <a:r>
-              <a:rPr b="1" sz="1050">
-                <a:solidFill>
-                  <a:srgbClr val="3EA6FF"/>
-                </a:solidFill>
-              </a:rPr>
-              <a:t>• </a:t>
-            </a:r>
-            <a:r>
-              <a:rPr b="1" sz="1000">
-                <a:solidFill>
-                  <a:srgbClr val="FFFFFF"/>
-                </a:solidFill>
-              </a:rPr>
-              <a:t>Native YouTube Embed: </a:t>
-            </a:r>
-            <a:r>
-              <a:rPr sz="1000">
-                <a:solidFill>
-                  <a:srgbClr val="BEC3CD"/>
-                </a:solidFill>
-              </a:rPr>
-              <a:t>Embeds legitimate YouTube stream IDs with autoplay, picture-in-picture, and fullscreen flags.</a:t>
-            </a:r>
-          </a:p>
-          <a:p>
-            <a:pPr>
-              <a:spcAft>
-                <a:spcPts val="600"/>
-              </a:spcAft>
-            </a:pPr>
-            <a:r>
-              <a:rPr b="1" sz="1050">
-                <a:solidFill>
-                  <a:srgbClr val="3EA6FF"/>
-                </a:solidFill>
-              </a:rPr>
-              <a:t>• </a:t>
-            </a:r>
-            <a:r>
-              <a:rPr b="1" sz="1000">
-                <a:solidFill>
-                  <a:srgbClr val="FFFFFF"/>
-                </a:solidFill>
-              </a:rPr>
-              <a:t>Auto-Scroll on Switch: </a:t>
-            </a:r>
-            <a:r>
-              <a:rPr sz="1000">
-                <a:solidFill>
-                  <a:srgbClr val="BEC3CD"/>
-                </a:solidFill>
-              </a:rPr>
-              <a:t>window.scrollTo(0, 0) fires in useEffect on [id] change for smooth navigation.</a:t>
-            </a:r>
-          </a:p>
-          <a:p>
-            <a:pPr>
-              <a:spcAft>
-                <a:spcPts val="600"/>
-              </a:spcAft>
-            </a:pPr>
-            <a:r>
-              <a:rPr b="1" sz="1050">
-                <a:solidFill>
-                  <a:srgbClr val="3EA6FF"/>
-                </a:solidFill>
-              </a:rPr>
-              <a:t>• </a:t>
-            </a:r>
-            <a:r>
-              <a:rPr b="1" sz="1000">
-                <a:solidFill>
-                  <a:srgbClr val="FFFFFF"/>
-                </a:solidFill>
-              </a:rPr>
-              <a:t>History Auto-Recording: </a:t>
-            </a:r>
-            <a:r>
-              <a:rPr sz="1000">
-                <a:solidFill>
-                  <a:srgbClr val="BEC3CD"/>
-                </a:solidFill>
-              </a:rPr>
-              <a:t>Automatically pushes viewed video into persistent Watch History via Context API.</a:t>
-            </a:r>
-          </a:p>
-        </p:txBody>
-      </p:sp>
-      <p:sp>
-        <p:nvSpPr>
-          <p:cNvPr id="11" name="Rounded Rectangle 10"/>
-          <p:cNvSpPr/>
-          <p:nvPr/>
-        </p:nvSpPr>
-        <p:spPr>
-          <a:xfrm>
-            <a:off x="8046720" y="1371600"/>
-            <a:ext cx="3383280" cy="4663440"/>
-          </a:xfrm>
-          <a:prstGeom prst="roundRect">
-            <a:avLst/>
-          </a:prstGeom>
-          <a:solidFill>
-            <a:srgbClr val="161922"/>
-          </a:solidFill>
-          <a:ln w="15240">
-            <a:solidFill>
-              <a:srgbClr val="2E3445"/>
-            </a:solidFill>
-          </a:ln>
-        </p:spPr>
-        <p:style>
-          <a:lnRef idx="1">
-            <a:schemeClr val="accent1"/>
-          </a:lnRef>
-          <a:fillRef idx="3">
-            <a:schemeClr val="accent1"/>
-          </a:fillRef>
-          <a:effectRef idx="2">
-            <a:schemeClr val="accent1"/>
-          </a:effectRef>
-          <a:fontRef idx="minor">
-            <a:schemeClr val="lt1"/>
-          </a:fontRef>
-        </p:style>
-        <p:txBody>
-          <a:bodyPr rtlCol="0" anchor="ctr"/>
-          <a:lstStyle/>
-          <a:p>
-            <a:pPr algn="ctr"/>
-          </a:p>
-        </p:txBody>
-      </p:sp>
-      <p:sp>
-        <p:nvSpPr>
-          <p:cNvPr id="12" name="TextBox 11"/>
-          <p:cNvSpPr txBox="1"/>
-          <p:nvPr/>
-        </p:nvSpPr>
-        <p:spPr>
-          <a:xfrm>
-            <a:off x="8229600" y="1508760"/>
-            <a:ext cx="3017520" cy="4389120"/>
-          </a:xfrm>
-          <a:prstGeom prst="rect">
-            <a:avLst/>
-          </a:prstGeom>
-          <a:noFill/>
-        </p:spPr>
-        <p:txBody>
-          <a:bodyPr wrap="square">
-            <a:spAutoFit/>
-          </a:bodyPr>
-          <a:lstStyle/>
-          <a:p>
-            <a:pPr>
-              <a:spcAft>
-                <a:spcPts val="800"/>
-              </a:spcAft>
-              <a:defRPr sz="1300" b="1">
-                <a:solidFill>
-                  <a:srgbClr val="2BA640"/>
+              <a:t>In-App Watch Engine Live Preview</a:t>
+            </a:r>
+          </a:p>
+          <a:p>
+            <a:pPr>
+              <a:spcBef>
+                <a:spcPts val="400"/>
+              </a:spcBef>
+              <a:defRPr sz="1250">
+                <a:solidFill>
+                  <a:srgbClr val="CDD2DC"/>
                 </a:solidFill>
               </a:defRPr>
             </a:pPr>
             <a:r>
-              <a:t>Up-Next Recommendation Engine</a:t>
-            </a:r>
-          </a:p>
-          <a:p>
-            <a:pPr>
-              <a:spcAft>
-                <a:spcPts val="600"/>
-              </a:spcAft>
-            </a:pPr>
-            <a:r>
-              <a:rPr b="1" sz="1050">
-                <a:solidFill>
-                  <a:srgbClr val="2BA640"/>
-                </a:solidFill>
-              </a:rPr>
-              <a:t>• </a:t>
-            </a:r>
-            <a:r>
-              <a:rPr b="1" sz="1000">
-                <a:solidFill>
-                  <a:srgbClr val="FFFFFF"/>
-                </a:solidFill>
-              </a:rPr>
-              <a:t>Category-Aware Sidebar: </a:t>
-            </a:r>
-            <a:r>
-              <a:rPr sz="1000">
-                <a:solidFill>
-                  <a:srgbClr val="BEC3CD"/>
-                </a:solidFill>
-              </a:rPr>
-              <a:t>Automatically filters catalog to present related videos in right-hand column.</a:t>
-            </a:r>
-          </a:p>
-          <a:p>
-            <a:pPr>
-              <a:spcAft>
-                <a:spcPts val="600"/>
-              </a:spcAft>
-            </a:pPr>
-            <a:r>
-              <a:rPr b="1" sz="1050">
-                <a:solidFill>
-                  <a:srgbClr val="2BA640"/>
-                </a:solidFill>
-              </a:rPr>
-              <a:t>• </a:t>
-            </a:r>
-            <a:r>
-              <a:rPr b="1" sz="1000">
-                <a:solidFill>
-                  <a:srgbClr val="FFFFFF"/>
-                </a:solidFill>
-              </a:rPr>
-              <a:t>Seamless Swap: </a:t>
-            </a:r>
-            <a:r>
-              <a:rPr sz="1000">
-                <a:solidFill>
-                  <a:srgbClr val="BEC3CD"/>
-                </a:solidFill>
-              </a:rPr>
-              <a:t>Clicking recommendation triggers useNavigate('/watch/' + nextId) instantly swapping player state.</a:t>
-            </a:r>
-          </a:p>
-          <a:p>
-            <a:pPr>
-              <a:spcAft>
-                <a:spcPts val="600"/>
-              </a:spcAft>
-            </a:pPr>
-            <a:r>
-              <a:rPr b="1" sz="1050">
-                <a:solidFill>
-                  <a:srgbClr val="2BA640"/>
-                </a:solidFill>
-              </a:rPr>
-              <a:t>• </a:t>
-            </a:r>
-            <a:r>
-              <a:rPr b="1" sz="1000">
-                <a:solidFill>
-                  <a:srgbClr val="FFFFFF"/>
-                </a:solidFill>
-              </a:rPr>
-              <a:t>Interactive Action Bar: </a:t>
-            </a:r>
-            <a:r>
-              <a:rPr sz="1000">
-                <a:solidFill>
-                  <a:srgbClr val="BEC3CD"/>
-                </a:solidFill>
-              </a:rPr>
-              <a:t>Interactive Like, Watch Later, and Clipboard Share with instant toast feedback.</a:t>
+              <a:t>Features dynamic /watch/:id route, channel action pill bar (Like, Watch Later, Share), interactive comments, and synchronized Up-Next queue.</a:t>
             </a:r>
           </a:p>
         </p:txBody>
@@ -9213,14 +8908,14 @@
           <a:lstStyle/>
           <a:p>
             <a:pPr>
-              <a:defRPr sz="1000" b="1">
+              <a:defRPr sz="1200" b="1">
                 <a:solidFill>
                   <a:srgbClr val="3EA6FF"/>
                 </a:solidFill>
               </a:defRPr>
             </a:pPr>
             <a:r>
-              <a:t>GROUP G15  •  PROJECT ID: G15-PID-17 (P-17)  •  EVALUATION-II (25CSE0203)</a:t>
+              <a:t>GROUP G15  •  PROJECT ID: G15-PID-17 (P-17)  •  EVALUATION-II</a:t>
             </a:r>
           </a:p>
         </p:txBody>
@@ -9233,8 +8928,8 @@
         </p:nvSpPr>
         <p:spPr>
           <a:xfrm>
-            <a:off x="731520" y="594360"/>
-            <a:ext cx="10728655" cy="594360"/>
+            <a:off x="731520" y="621792"/>
+            <a:ext cx="10728655" cy="640080"/>
           </a:xfrm>
           <a:prstGeom prst="rect">
             <a:avLst/>
@@ -9248,7 +8943,7 @@
           <a:lstStyle/>
           <a:p>
             <a:pPr>
-              <a:defRPr sz="2100" b="1">
+              <a:defRPr sz="2500" b="1">
                 <a:solidFill>
                   <a:srgbClr val="FFFFFF"/>
                 </a:solidFill>
@@ -9283,9 +8978,9 @@
           <a:lstStyle/>
           <a:p>
             <a:pPr>
-              <a:defRPr sz="900">
-                <a:solidFill>
-                  <a:srgbClr val="7B8293"/>
+              <a:defRPr sz="1050">
+                <a:solidFill>
+                  <a:srgbClr val="828A9B"/>
                 </a:solidFill>
               </a:defRPr>
             </a:pPr>
@@ -9304,7 +8999,7 @@
         <p:spPr>
           <a:xfrm>
             <a:off x="731520" y="1371600"/>
-            <a:ext cx="5212080" cy="4663440"/>
+            <a:ext cx="5943600" cy="4663440"/>
           </a:xfrm>
           <a:prstGeom prst="roundRect">
             <a:avLst/>
@@ -9312,7 +9007,7 @@
           <a:solidFill>
             <a:srgbClr val="161922"/>
           </a:solidFill>
-          <a:ln w="15240">
+          <a:ln w="17780">
             <a:solidFill>
               <a:srgbClr val="2E3445"/>
             </a:solidFill>
@@ -9348,8 +9043,8 @@
         </p:nvSpPr>
         <p:spPr>
           <a:xfrm>
-            <a:off x="914400" y="1508760"/>
-            <a:ext cx="4846320" cy="4389120"/>
+            <a:off x="932688" y="1536192"/>
+            <a:ext cx="5541264" cy="4334255"/>
           </a:xfrm>
           <a:prstGeom prst="rect">
             <a:avLst/>
@@ -9364,65 +9059,65 @@
           <a:p>
             <a:pPr>
               <a:spcAft>
+                <a:spcPts val="1000"/>
+              </a:spcAft>
+              <a:defRPr sz="1700" b="1">
+                <a:solidFill>
+                  <a:srgbClr val="3EA6FF"/>
+                </a:solidFill>
+              </a:defRPr>
+            </a:pPr>
+            <a:r>
+              <a:t>Targeted DOM Control &amp; Comment Architecture</a:t>
+            </a:r>
+          </a:p>
+          <a:p>
+            <a:pPr>
+              <a:spcAft>
                 <a:spcPts val="800"/>
               </a:spcAft>
-              <a:defRPr sz="1300" b="1">
-                <a:solidFill>
-                  <a:srgbClr val="FF0033"/>
-                </a:solidFill>
-              </a:defRPr>
-            </a:pPr>
-            <a:r>
-              <a:t>Targeted DOM Access via useRef Hook</a:t>
-            </a:r>
-          </a:p>
-          <a:p>
-            <a:pPr>
-              <a:spcAft>
-                <a:spcPts val="600"/>
-              </a:spcAft>
-            </a:pPr>
-            <a:r>
-              <a:rPr b="1" sz="1050">
-                <a:solidFill>
-                  <a:srgbClr val="FF0033"/>
+            </a:pPr>
+            <a:r>
+              <a:rPr b="1" sz="1500">
+                <a:solidFill>
+                  <a:srgbClr val="3EA6FF"/>
                 </a:solidFill>
               </a:rPr>
               <a:t>• </a:t>
             </a:r>
             <a:r>
-              <a:rPr b="1" sz="1000">
+              <a:rPr b="1" sz="1400">
                 <a:solidFill>
                   <a:srgbClr val="FFFFFF"/>
                 </a:solidFill>
               </a:rPr>
-              <a:t>Direct Input Referencing: </a:t>
-            </a:r>
-            <a:r>
-              <a:rPr sz="1000">
-                <a:solidFill>
-                  <a:srgbClr val="BEC3CD"/>
-                </a:solidFill>
-              </a:rPr>
-              <a:t>Initialized via const commentInputRef = useRef(null) and bound to input element.</a:t>
-            </a:r>
-          </a:p>
-          <a:p>
-            <a:pPr>
-              <a:spcAft>
-                <a:spcPts val="600"/>
-              </a:spcAft>
-            </a:pPr>
-            <a:r>
-              <a:rPr b="1" sz="1050">
-                <a:solidFill>
-                  <a:srgbClr val="FF0033"/>
+              <a:t>DOM Referencing via useRef: </a:t>
+            </a:r>
+            <a:r>
+              <a:rPr sz="1400">
+                <a:solidFill>
+                  <a:srgbClr val="CDD2DC"/>
+                </a:solidFill>
+              </a:rPr>
+              <a:t>Initialized as commentInputRef = useRef(null) and directly attached to the comment text field.</a:t>
+            </a:r>
+          </a:p>
+          <a:p>
+            <a:pPr>
+              <a:spcAft>
+                <a:spcPts val="800"/>
+              </a:spcAft>
+            </a:pPr>
+            <a:r>
+              <a:rPr b="1" sz="1500">
+                <a:solidFill>
+                  <a:srgbClr val="3EA6FF"/>
                 </a:solidFill>
               </a:rPr>
               <a:t>• </a:t>
             </a:r>
             <a:r>
-              <a:rPr b="1" sz="1000">
+              <a:rPr b="1" sz="1400">
                 <a:solidFill>
                   <a:srgbClr val="FFFFFF"/>
                 </a:solidFill>
@@ -9430,74 +9125,105 @@
               <a:t>Programmatic Focus: </a:t>
             </a:r>
             <a:r>
-              <a:rPr sz="1000">
-                <a:solidFill>
-                  <a:srgbClr val="BEC3CD"/>
-                </a:solidFill>
-              </a:rPr>
-              <a:t>Calling commentInputRef.current.focus() focuses comment box without triggering component re-rendering.</a:t>
-            </a:r>
-          </a:p>
-          <a:p>
-            <a:pPr>
-              <a:spcAft>
-                <a:spcPts val="600"/>
-              </a:spcAft>
-            </a:pPr>
-            <a:r>
-              <a:rPr b="1" sz="1050">
-                <a:solidFill>
-                  <a:srgbClr val="FF0033"/>
+              <a:rPr sz="1400">
+                <a:solidFill>
+                  <a:srgbClr val="CDD2DC"/>
+                </a:solidFill>
+              </a:rPr>
+              <a:t>Calling commentInputRef.current?.focus() draws immediate user focus without re-rendering the tree.</a:t>
+            </a:r>
+          </a:p>
+          <a:p>
+            <a:pPr>
+              <a:spcAft>
+                <a:spcPts val="800"/>
+              </a:spcAft>
+            </a:pPr>
+            <a:r>
+              <a:rPr b="1" sz="1500">
+                <a:solidFill>
+                  <a:srgbClr val="3EA6FF"/>
                 </a:solidFill>
               </a:rPr>
               <a:t>• </a:t>
             </a:r>
             <a:r>
-              <a:rPr b="1" sz="1000">
+              <a:rPr b="1" sz="1400">
                 <a:solidFill>
                   <a:srgbClr val="FFFFFF"/>
                 </a:solidFill>
               </a:rPr>
-              <a:t>Controlled State Binding: </a:t>
-            </a:r>
-            <a:r>
-              <a:rPr sz="1000">
-                <a:solidFill>
-                  <a:srgbClr val="BEC3CD"/>
-                </a:solidFill>
-              </a:rPr>
-              <a:t>Controlled input state (useState) manages character text, clearing cleanly upon submission.</a:t>
-            </a:r>
-          </a:p>
-          <a:p>
-            <a:pPr>
-              <a:spcAft>
-                <a:spcPts val="600"/>
-              </a:spcAft>
-            </a:pPr>
-            <a:r>
-              <a:rPr b="1" sz="1050">
-                <a:solidFill>
-                  <a:srgbClr val="FF0033"/>
+              <a:t>Isolated Video Comment Threads: </a:t>
+            </a:r>
+            <a:r>
+              <a:rPr sz="1400">
+                <a:solidFill>
+                  <a:srgbClr val="CDD2DC"/>
+                </a:solidFill>
+              </a:rPr>
+              <a:t>Comments stored by video ID in state dictionary: comments[videoId] = [...].</a:t>
+            </a:r>
+          </a:p>
+          <a:p>
+            <a:pPr>
+              <a:spcAft>
+                <a:spcPts val="800"/>
+              </a:spcAft>
+            </a:pPr>
+            <a:r>
+              <a:rPr b="1" sz="1500">
+                <a:solidFill>
+                  <a:srgbClr val="3EA6FF"/>
                 </a:solidFill>
               </a:rPr>
               <a:t>• </a:t>
             </a:r>
             <a:r>
-              <a:rPr b="1" sz="1000">
+              <a:rPr b="1" sz="1400">
                 <a:solidFill>
                   <a:srgbClr val="FFFFFF"/>
                 </a:solidFill>
               </a:rPr>
-              <a:t>Defensible Viva Design: </a:t>
-            </a:r>
-            <a:r>
-              <a:rPr sz="1000">
-                <a:solidFill>
-                  <a:srgbClr val="BEC3CD"/>
-                </a:solidFill>
-              </a:rPr>
-              <a:t>Demonstrates genuine understanding of DOM interaction vs state mutations.</a:t>
+              <a:t>Dynamic Sorting Engine: </a:t>
+            </a:r>
+            <a:r>
+              <a:rPr sz="1400">
+                <a:solidFill>
+                  <a:srgbClr val="CDD2DC"/>
+                </a:solidFill>
+              </a:rPr>
+              <a:t>Instant sorting toggle between Top Comments (by upvotes) and Newest (chronological).</a:t>
+            </a:r>
+          </a:p>
+          <a:p>
+            <a:pPr>
+              <a:spcAft>
+                <a:spcPts val="800"/>
+              </a:spcAft>
+            </a:pPr>
+            <a:r>
+              <a:rPr b="1" sz="1500">
+                <a:solidFill>
+                  <a:srgbClr val="3EA6FF"/>
+                </a:solidFill>
+              </a:rPr>
+              <a:t>• </a:t>
+            </a:r>
+            <a:r>
+              <a:rPr b="1" sz="1400">
+                <a:solidFill>
+                  <a:srgbClr val="FFFFFF"/>
+                </a:solidFill>
+              </a:rPr>
+              <a:t>Optimistic Submissions: </a:t>
+            </a:r>
+            <a:r>
+              <a:rPr sz="1400">
+                <a:solidFill>
+                  <a:srgbClr val="CDD2DC"/>
+                </a:solidFill>
+              </a:rPr>
+              <a:t>Comments post instantly with 'Just now' timestamp and serialize to browser localStorage.</a:t>
             </a:r>
           </a:p>
         </p:txBody>
@@ -9510,8 +9236,8 @@
         </p:nvSpPr>
         <p:spPr>
           <a:xfrm>
-            <a:off x="6217920" y="1371600"/>
-            <a:ext cx="5212080" cy="4663440"/>
+            <a:off x="6949440" y="1371600"/>
+            <a:ext cx="4480560" cy="4663440"/>
           </a:xfrm>
           <a:prstGeom prst="roundRect">
             <a:avLst/>
@@ -9519,7 +9245,7 @@
           <a:solidFill>
             <a:srgbClr val="161922"/>
           </a:solidFill>
-          <a:ln w="15240">
+          <a:ln w="17780">
             <a:solidFill>
               <a:srgbClr val="2E3445"/>
             </a:solidFill>
@@ -9547,16 +9273,40 @@
           </a:p>
         </p:txBody>
       </p:sp>
-      <p:sp>
-        <p:nvSpPr>
-          <p:cNvPr id="10" name="TextBox 9"/>
+      <p:pic>
+        <p:nvPicPr>
+          <p:cNvPr id="10" name="Picture 9" descr="latent_ep6.jpg"/>
+          <p:cNvPicPr>
+            <a:picLocks noChangeAspect="1"/>
+          </p:cNvPicPr>
+          <p:nvPr/>
+        </p:nvPicPr>
+        <p:blipFill>
+          <a:blip r:embed="rId2"/>
+          <a:stretch>
+            <a:fillRect/>
+          </a:stretch>
+        </p:blipFill>
+        <p:spPr>
+          <a:xfrm>
+            <a:off x="7178040" y="1645920"/>
+            <a:ext cx="4023360" cy="3017520"/>
+          </a:xfrm>
+          <a:prstGeom prst="rect">
+            <a:avLst/>
+          </a:prstGeom>
+        </p:spPr>
+      </p:pic>
+      <p:sp>
+        <p:nvSpPr>
+          <p:cNvPr id="11" name="TextBox 10"/>
           <p:cNvSpPr txBox="1"/>
           <p:nvPr/>
         </p:nvSpPr>
         <p:spPr>
           <a:xfrm>
-            <a:off x="6400800" y="1508760"/>
-            <a:ext cx="4846320" cy="4389120"/>
+            <a:off x="7178040" y="4114800"/>
+            <a:ext cx="4023360" cy="1645920"/>
           </a:xfrm>
           <a:prstGeom prst="rect">
             <a:avLst/>
@@ -9570,141 +9320,29 @@
           <a:lstStyle/>
           <a:p>
             <a:pPr>
-              <a:spcAft>
-                <a:spcPts val="800"/>
-              </a:spcAft>
-              <a:defRPr sz="1300" b="1">
-                <a:solidFill>
-                  <a:srgbClr val="3EA6FF"/>
+              <a:defRPr sz="1500" b="1">
+                <a:solidFill>
+                  <a:srgbClr val="FF0033"/>
                 </a:solidFill>
               </a:defRPr>
             </a:pPr>
             <a:r>
-              <a:t>Multi-Video Comment Isolation &amp; Sorting</a:t>
-            </a:r>
-          </a:p>
-          <a:p>
-            <a:pPr>
-              <a:spcAft>
-                <a:spcPts val="600"/>
-              </a:spcAft>
-            </a:pPr>
-            <a:r>
-              <a:rPr b="1" sz="1050">
-                <a:solidFill>
-                  <a:srgbClr val="3EA6FF"/>
-                </a:solidFill>
-              </a:rPr>
-              <a:t>• </a:t>
-            </a:r>
-            <a:r>
-              <a:rPr b="1" sz="1000">
-                <a:solidFill>
-                  <a:srgbClr val="FFFFFF"/>
-                </a:solidFill>
-              </a:rPr>
-              <a:t>Isolated Video Keys: </a:t>
-            </a:r>
-            <a:r>
-              <a:rPr sz="1000">
-                <a:solidFill>
-                  <a:srgbClr val="BEC3CD"/>
-                </a:solidFill>
-              </a:rPr>
-              <a:t>Comments mapped in state dictionary by video ID: comments[videoId] = [...].</a:t>
-            </a:r>
-          </a:p>
-          <a:p>
-            <a:pPr>
-              <a:spcAft>
-                <a:spcPts val="600"/>
-              </a:spcAft>
-            </a:pPr>
-            <a:r>
-              <a:rPr b="1" sz="1050">
-                <a:solidFill>
-                  <a:srgbClr val="3EA6FF"/>
-                </a:solidFill>
-              </a:rPr>
-              <a:t>• </a:t>
-            </a:r>
-            <a:r>
-              <a:rPr b="1" sz="1000">
-                <a:solidFill>
-                  <a:srgbClr val="FFFFFF"/>
-                </a:solidFill>
-              </a:rPr>
-              <a:t>Dynamic Sorting Engine: </a:t>
-            </a:r>
-            <a:r>
-              <a:rPr sz="1000">
-                <a:solidFill>
-                  <a:srgbClr val="BEC3CD"/>
-                </a:solidFill>
-              </a:rPr>
-              <a:t>Users toggle between Top Comments (sorted by upvote count) and Newest First (chronological order).</a:t>
-            </a:r>
-          </a:p>
-          <a:p>
-            <a:pPr>
-              <a:spcAft>
-                <a:spcPts val="600"/>
-              </a:spcAft>
-            </a:pPr>
-            <a:r>
-              <a:rPr b="1" sz="1050">
-                <a:solidFill>
-                  <a:srgbClr val="3EA6FF"/>
-                </a:solidFill>
-              </a:rPr>
-              <a:t>• </a:t>
-            </a:r>
-            <a:r>
-              <a:rPr b="1" sz="1000">
-                <a:solidFill>
-                  <a:srgbClr val="FFFFFF"/>
-                </a:solidFill>
-              </a:rPr>
-              <a:t>Optimistic Updates: </a:t>
-            </a:r>
-            <a:r>
-              <a:rPr sz="1000">
-                <a:solidFill>
-                  <a:srgbClr val="BEC3CD"/>
-                </a:solidFill>
-              </a:rPr>
-              <a:t>Submitted comments appear instantly at the head of the feed with 'Just now' timestamp.</a:t>
-            </a:r>
-          </a:p>
-          <a:p>
-            <a:pPr>
-              <a:spcAft>
-                <a:spcPts val="600"/>
-              </a:spcAft>
-            </a:pPr>
-            <a:r>
-              <a:rPr b="1" sz="1050">
-                <a:solidFill>
-                  <a:srgbClr val="3EA6FF"/>
-                </a:solidFill>
-              </a:rPr>
-              <a:t>• </a:t>
-            </a:r>
-            <a:r>
-              <a:rPr b="1" sz="1000">
-                <a:solidFill>
-                  <a:srgbClr val="FFFFFF"/>
-                </a:solidFill>
-              </a:rPr>
-              <a:t>Persistent Storage: </a:t>
-            </a:r>
-            <a:r>
-              <a:rPr sz="1000">
-                <a:solidFill>
-                  <a:srgbClr val="BEC3CD"/>
-                </a:solidFill>
-              </a:rPr>
-              <a:t>New comments persist to browser localStorage, retaining discussion threads across visits.</a:t>
+              <a:t>Interactive Comments &amp; Discussion</a:t>
+            </a:r>
+          </a:p>
+          <a:p>
+            <a:pPr>
+              <a:spcBef>
+                <a:spcPts val="400"/>
+              </a:spcBef>
+              <a:defRPr sz="1250">
+                <a:solidFill>
+                  <a:srgbClr val="CDD2DC"/>
+                </a:solidFill>
+              </a:defRPr>
+            </a:pPr>
+            <a:r>
+              <a:t>Shows live comment count, controlled text input, cancel/submit buttons, upvote counters, and dynamic user avatar feedback.</a:t>
             </a:r>
           </a:p>
         </p:txBody>
@@ -9839,14 +9477,14 @@
           <a:lstStyle/>
           <a:p>
             <a:pPr>
-              <a:defRPr sz="1000" b="1">
+              <a:defRPr sz="1200" b="1">
                 <a:solidFill>
                   <a:srgbClr val="3EA6FF"/>
                 </a:solidFill>
               </a:defRPr>
             </a:pPr>
             <a:r>
-              <a:t>GROUP G15  •  PROJECT ID: G15-PID-17 (P-17)  •  EVALUATION-II (25CSE0203)</a:t>
+              <a:t>GROUP G15  •  PROJECT ID: G15-PID-17 (P-17)  •  EVALUATION-II</a:t>
             </a:r>
           </a:p>
         </p:txBody>
@@ -9859,8 +9497,8 @@
         </p:nvSpPr>
         <p:spPr>
           <a:xfrm>
-            <a:off x="731520" y="594360"/>
-            <a:ext cx="10728655" cy="594360"/>
+            <a:off x="731520" y="621792"/>
+            <a:ext cx="10728655" cy="640080"/>
           </a:xfrm>
           <a:prstGeom prst="rect">
             <a:avLst/>
@@ -9874,7 +9512,7 @@
           <a:lstStyle/>
           <a:p>
             <a:pPr>
-              <a:defRPr sz="2100" b="1">
+              <a:defRPr sz="2500" b="1">
                 <a:solidFill>
                   <a:srgbClr val="FFFFFF"/>
                 </a:solidFill>
@@ -9909,9 +9547,9 @@
           <a:lstStyle/>
           <a:p>
             <a:pPr>
-              <a:defRPr sz="900">
-                <a:solidFill>
-                  <a:srgbClr val="7B8293"/>
+              <a:defRPr sz="1050">
+                <a:solidFill>
+                  <a:srgbClr val="828A9B"/>
                 </a:solidFill>
               </a:defRPr>
             </a:pPr>
@@ -9938,7 +9576,7 @@
           <a:solidFill>
             <a:srgbClr val="161922"/>
           </a:solidFill>
-          <a:ln w="15240">
+          <a:ln w="17780">
             <a:solidFill>
               <a:srgbClr val="2E3445"/>
             </a:solidFill>
@@ -9974,8 +9612,8 @@
         </p:nvSpPr>
         <p:spPr>
           <a:xfrm>
-            <a:off x="914400" y="1508760"/>
-            <a:ext cx="3017520" cy="4389120"/>
+            <a:off x="932688" y="1536192"/>
+            <a:ext cx="2980944" cy="4334255"/>
           </a:xfrm>
           <a:prstGeom prst="rect">
             <a:avLst/>
@@ -9990,26 +9628,57 @@
           <a:p>
             <a:pPr>
               <a:spcAft>
+                <a:spcPts val="1000"/>
+              </a:spcAft>
+              <a:defRPr sz="1700" b="1">
+                <a:solidFill>
+                  <a:srgbClr val="FF0033"/>
+                </a:solidFill>
+              </a:defRPr>
+            </a:pPr>
+            <a:r>
+              <a:t>Context API Design</a:t>
+            </a:r>
+          </a:p>
+          <a:p>
+            <a:pPr>
+              <a:spcAft>
                 <a:spcPts val="800"/>
               </a:spcAft>
-              <a:defRPr sz="1300" b="1">
+            </a:pPr>
+            <a:r>
+              <a:rPr b="1" sz="1500">
                 <a:solidFill>
                   <a:srgbClr val="FF0033"/>
                 </a:solidFill>
-              </a:defRPr>
-            </a:pPr>
-            <a:r>
-              <a:t>Context API Design (AppContext)</a:t>
-            </a:r>
-          </a:p>
-          <a:p>
-            <a:pPr>
-              <a:spcAft>
-                <a:spcPts val="600"/>
-              </a:spcAft>
-            </a:pPr>
-            <a:r>
-              <a:rPr b="1" sz="1050">
+              </a:rPr>
+              <a:t>• </a:t>
+            </a:r>
+            <a:r>
+              <a:rPr b="1" sz="1400">
+                <a:solidFill>
+                  <a:srgbClr val="FFFFFF"/>
+                </a:solidFill>
+              </a:rPr>
+              <a:t>Single Source of Truth: </a:t>
+            </a:r>
+            <a:r>
+              <a:rPr sz="1400">
+                <a:solidFill>
+                  <a:srgbClr val="CDD2DC"/>
+                </a:solidFill>
+              </a:rPr>
+              <a:t>Centralizes state for videos, shorts, likes, watch later, history, and comments.</a:t>
+            </a:r>
+          </a:p>
+          <a:p>
+            <a:pPr>
+              <a:spcAft>
+                <a:spcPts val="800"/>
+              </a:spcAft>
+            </a:pPr>
+            <a:r>
+              <a:rPr b="1" sz="1500">
                 <a:solidFill>
                   <a:srgbClr val="FF0033"/>
                 </a:solidFill>
@@ -10017,30 +9686,30 @@
               <a:t>• </a:t>
             </a:r>
             <a:r>
-              <a:rPr b="1" sz="1000">
+              <a:rPr b="1" sz="1400">
                 <a:solidFill>
                   <a:srgbClr val="FFFFFF"/>
                 </a:solidFill>
               </a:rPr>
-              <a:t>Single Source of Truth: </a:t>
-            </a:r>
-            <a:r>
-              <a:rPr sz="1000">
-                <a:solidFill>
-                  <a:srgbClr val="BEC3CD"/>
-                </a:solidFill>
-              </a:rPr>
-              <a:t>Centralizes state for videos, shorts, likes, watch later, history, subscriptions, and comments.</a:t>
-            </a:r>
-          </a:p>
-          <a:p>
-            <a:pPr>
-              <a:spcAft>
-                <a:spcPts val="600"/>
-              </a:spcAft>
-            </a:pPr>
-            <a:r>
-              <a:rPr b="1" sz="1050">
+              <a:t>Custom Hook: </a:t>
+            </a:r>
+            <a:r>
+              <a:rPr sz="1400">
+                <a:solidFill>
+                  <a:srgbClr val="CDD2DC"/>
+                </a:solidFill>
+              </a:rPr>
+              <a:t>useApp() provides simple, guarded access to state and dispatch methods.</a:t>
+            </a:r>
+          </a:p>
+          <a:p>
+            <a:pPr>
+              <a:spcAft>
+                <a:spcPts val="800"/>
+              </a:spcAft>
+            </a:pPr>
+            <a:r>
+              <a:rPr b="1" sz="1500">
                 <a:solidFill>
                   <a:srgbClr val="FF0033"/>
                 </a:solidFill>
@@ -10048,51 +9717,20 @@
               <a:t>• </a:t>
             </a:r>
             <a:r>
-              <a:rPr b="1" sz="1000">
+              <a:rPr b="1" sz="1400">
                 <a:solidFill>
                   <a:srgbClr val="FFFFFF"/>
                 </a:solidFill>
               </a:rPr>
-              <a:t>Custom Hook Convenience: </a:t>
-            </a:r>
-            <a:r>
-              <a:rPr sz="1000">
-                <a:solidFill>
-                  <a:srgbClr val="BEC3CD"/>
-                </a:solidFill>
-              </a:rPr>
-              <a:t>Encapsulates consumer logic into useApp(), throwing errors if accessed outside Provider.</a:t>
-            </a:r>
-          </a:p>
-          <a:p>
-            <a:pPr>
-              <a:spcAft>
-                <a:spcPts val="600"/>
-              </a:spcAft>
-            </a:pPr>
-            <a:r>
-              <a:rPr b="1" sz="1050">
-                <a:solidFill>
-                  <a:srgbClr val="FF0033"/>
-                </a:solidFill>
-              </a:rPr>
-              <a:t>• </a:t>
-            </a:r>
-            <a:r>
-              <a:rPr b="1" sz="1000">
-                <a:solidFill>
-                  <a:srgbClr val="FFFFFF"/>
-                </a:solidFill>
-              </a:rPr>
-              <a:t>High Modularity: </a:t>
-            </a:r>
-            <a:r>
-              <a:rPr sz="1000">
-                <a:solidFill>
-                  <a:srgbClr val="BEC3CD"/>
-                </a:solidFill>
-              </a:rPr>
-              <a:t>Decouples UI rendering from business logic and data mutations.</a:t>
+              <a:t>Decoupled Logic: </a:t>
+            </a:r>
+            <a:r>
+              <a:rPr sz="1400">
+                <a:solidFill>
+                  <a:srgbClr val="CDD2DC"/>
+                </a:solidFill>
+              </a:rPr>
+              <a:t>Keeps UI components clean and focused purely on rendering views.</a:t>
             </a:r>
           </a:p>
         </p:txBody>
@@ -10114,7 +9752,7 @@
           <a:solidFill>
             <a:srgbClr val="161922"/>
           </a:solidFill>
-          <a:ln w="15240">
+          <a:ln w="17780">
             <a:solidFill>
               <a:srgbClr val="2E3445"/>
             </a:solidFill>
@@ -10150,8 +9788,8 @@
         </p:nvSpPr>
         <p:spPr>
           <a:xfrm>
-            <a:off x="4572000" y="1508760"/>
-            <a:ext cx="3017520" cy="4389120"/>
+            <a:off x="4590288" y="1536192"/>
+            <a:ext cx="2980944" cy="4334255"/>
           </a:xfrm>
           <a:prstGeom prst="rect">
             <a:avLst/>
@@ -10166,26 +9804,57 @@
           <a:p>
             <a:pPr>
               <a:spcAft>
+                <a:spcPts val="1000"/>
+              </a:spcAft>
+              <a:defRPr sz="1700" b="1">
+                <a:solidFill>
+                  <a:srgbClr val="3EA6FF"/>
+                </a:solidFill>
+              </a:defRPr>
+            </a:pPr>
+            <a:r>
+              <a:t>LocalStorage Sync</a:t>
+            </a:r>
+          </a:p>
+          <a:p>
+            <a:pPr>
+              <a:spcAft>
                 <a:spcPts val="800"/>
               </a:spcAft>
-              <a:defRPr sz="1300" b="1">
+            </a:pPr>
+            <a:r>
+              <a:rPr b="1" sz="1500">
                 <a:solidFill>
                   <a:srgbClr val="3EA6FF"/>
                 </a:solidFill>
-              </a:defRPr>
-            </a:pPr>
-            <a:r>
-              <a:t>LocalStorage Synchronization</a:t>
-            </a:r>
-          </a:p>
-          <a:p>
-            <a:pPr>
-              <a:spcAft>
-                <a:spcPts val="600"/>
-              </a:spcAft>
-            </a:pPr>
-            <a:r>
-              <a:rPr b="1" sz="1050">
+              </a:rPr>
+              <a:t>• </a:t>
+            </a:r>
+            <a:r>
+              <a:rPr b="1" sz="1400">
+                <a:solidFill>
+                  <a:srgbClr val="FFFFFF"/>
+                </a:solidFill>
+              </a:rPr>
+              <a:t>Lazy Initializers: </a:t>
+            </a:r>
+            <a:r>
+              <a:rPr sz="1400">
+                <a:solidFill>
+                  <a:srgbClr val="CDD2DC"/>
+                </a:solidFill>
+              </a:rPr>
+              <a:t>State initializes directly from localStorage.getItem() on page boot.</a:t>
+            </a:r>
+          </a:p>
+          <a:p>
+            <a:pPr>
+              <a:spcAft>
+                <a:spcPts val="800"/>
+              </a:spcAft>
+            </a:pPr>
+            <a:r>
+              <a:rPr b="1" sz="1500">
                 <a:solidFill>
                   <a:srgbClr val="3EA6FF"/>
                 </a:solidFill>
@@ -10193,30 +9862,30 @@
               <a:t>• </a:t>
             </a:r>
             <a:r>
-              <a:rPr b="1" sz="1000">
+              <a:rPr b="1" sz="1400">
                 <a:solidFill>
                   <a:srgbClr val="FFFFFF"/>
                 </a:solidFill>
               </a:rPr>
-              <a:t>Lazy State Initializers: </a:t>
-            </a:r>
-            <a:r>
-              <a:rPr sz="1000">
-                <a:solidFill>
-                  <a:srgbClr val="BEC3CD"/>
-                </a:solidFill>
-              </a:rPr>
-              <a:t>State initializes directly from localStorage.getItem() with safe fallback defaults.</a:t>
-            </a:r>
-          </a:p>
-          <a:p>
-            <a:pPr>
-              <a:spcAft>
-                <a:spcPts val="600"/>
-              </a:spcAft>
-            </a:pPr>
-            <a:r>
-              <a:rPr b="1" sz="1050">
+              <a:t>Reactive Effects: </a:t>
+            </a:r>
+            <a:r>
+              <a:rPr sz="1400">
+                <a:solidFill>
+                  <a:srgbClr val="CDD2DC"/>
+                </a:solidFill>
+              </a:rPr>
+              <a:t>Dedicated useEffect hooks automatically serialize state changes.</a:t>
+            </a:r>
+          </a:p>
+          <a:p>
+            <a:pPr>
+              <a:spcAft>
+                <a:spcPts val="800"/>
+              </a:spcAft>
+            </a:pPr>
+            <a:r>
+              <a:rPr b="1" sz="1500">
                 <a:solidFill>
                   <a:srgbClr val="3EA6FF"/>
                 </a:solidFill>
@@ -10224,51 +9893,20 @@
               <a:t>• </a:t>
             </a:r>
             <a:r>
-              <a:rPr b="1" sz="1000">
+              <a:rPr b="1" sz="1400">
                 <a:solidFill>
                   <a:srgbClr val="FFFFFF"/>
                 </a:solidFill>
               </a:rPr>
-              <a:t>Reactive Serialization: </a:t>
-            </a:r>
-            <a:r>
-              <a:rPr sz="1000">
-                <a:solidFill>
-                  <a:srgbClr val="BEC3CD"/>
-                </a:solidFill>
-              </a:rPr>
-              <a:t>Dedicated useEffect listeners automatically serialize state changes to browser storage.</a:t>
-            </a:r>
-          </a:p>
-          <a:p>
-            <a:pPr>
-              <a:spcAft>
-                <a:spcPts val="600"/>
-              </a:spcAft>
-            </a:pPr>
-            <a:r>
-              <a:rPr b="1" sz="1050">
-                <a:solidFill>
-                  <a:srgbClr val="3EA6FF"/>
-                </a:solidFill>
-              </a:rPr>
-              <a:t>• </a:t>
-            </a:r>
-            <a:r>
-              <a:rPr b="1" sz="1000">
-                <a:solidFill>
-                  <a:srgbClr val="FFFFFF"/>
-                </a:solidFill>
-              </a:rPr>
-              <a:t>Offline Data Durability: </a:t>
-            </a:r>
-            <a:r>
-              <a:rPr sz="1000">
-                <a:solidFill>
-                  <a:srgbClr val="BEC3CD"/>
-                </a:solidFill>
-              </a:rPr>
-              <a:t>Liked videos, watch history, and user settings persist across page reloads and browser sessions.</a:t>
+              <a:t>Offline Durability: </a:t>
+            </a:r>
+            <a:r>
+              <a:rPr sz="1400">
+                <a:solidFill>
+                  <a:srgbClr val="CDD2DC"/>
+                </a:solidFill>
+              </a:rPr>
+              <a:t>User likes, playlists, and watch history persist across browser restarts.</a:t>
             </a:r>
           </a:p>
         </p:txBody>
@@ -10290,7 +9928,7 @@
           <a:solidFill>
             <a:srgbClr val="161922"/>
           </a:solidFill>
-          <a:ln w="15240">
+          <a:ln w="17780">
             <a:solidFill>
               <a:srgbClr val="2E3445"/>
             </a:solidFill>
@@ -10326,8 +9964,8 @@
         </p:nvSpPr>
         <p:spPr>
           <a:xfrm>
-            <a:off x="8229600" y="1508760"/>
-            <a:ext cx="3017520" cy="4389120"/>
+            <a:off x="8247888" y="1536192"/>
+            <a:ext cx="2980944" cy="4334255"/>
           </a:xfrm>
           <a:prstGeom prst="rect">
             <a:avLst/>
@@ -10342,26 +9980,57 @@
           <a:p>
             <a:pPr>
               <a:spcAft>
+                <a:spcPts val="1000"/>
+              </a:spcAft>
+              <a:defRPr sz="1700" b="1">
+                <a:solidFill>
+                  <a:srgbClr val="2BA640"/>
+                </a:solidFill>
+              </a:defRPr>
+            </a:pPr>
+            <a:r>
+              <a:t>Client-Side Auth Modal</a:t>
+            </a:r>
+          </a:p>
+          <a:p>
+            <a:pPr>
+              <a:spcAft>
                 <a:spcPts val="800"/>
               </a:spcAft>
-              <a:defRPr sz="1300" b="1">
+            </a:pPr>
+            <a:r>
+              <a:rPr b="1" sz="1500">
                 <a:solidFill>
                   <a:srgbClr val="2BA640"/>
                 </a:solidFill>
-              </a:defRPr>
-            </a:pPr>
-            <a:r>
-              <a:t>Client-Side Authentication Pattern</a:t>
-            </a:r>
-          </a:p>
-          <a:p>
-            <a:pPr>
-              <a:spcAft>
-                <a:spcPts val="600"/>
-              </a:spcAft>
-            </a:pPr>
-            <a:r>
-              <a:rPr b="1" sz="1050">
+              </a:rPr>
+              <a:t>• </a:t>
+            </a:r>
+            <a:r>
+              <a:rPr b="1" sz="1400">
+                <a:solidFill>
+                  <a:srgbClr val="FFFFFF"/>
+                </a:solidFill>
+              </a:rPr>
+              <a:t>Controlled Modal: </a:t>
+            </a:r>
+            <a:r>
+              <a:rPr sz="1400">
+                <a:solidFill>
+                  <a:srgbClr val="CDD2DC"/>
+                </a:solidFill>
+              </a:rPr>
+              <a:t>Features Sign In / Sign Up toggle (faculty ecom class architecture).</a:t>
+            </a:r>
+          </a:p>
+          <a:p>
+            <a:pPr>
+              <a:spcAft>
+                <a:spcPts val="800"/>
+              </a:spcAft>
+            </a:pPr>
+            <a:r>
+              <a:rPr b="1" sz="1500">
                 <a:solidFill>
                   <a:srgbClr val="2BA640"/>
                 </a:solidFill>
@@ -10369,30 +10038,30 @@
               <a:t>• </a:t>
             </a:r>
             <a:r>
-              <a:rPr b="1" sz="1000">
+              <a:rPr b="1" sz="1400">
                 <a:solidFill>
                   <a:srgbClr val="FFFFFF"/>
                 </a:solidFill>
               </a:rPr>
-              <a:t>Curriculum-Aligned Auth: </a:t>
-            </a:r>
-            <a:r>
-              <a:rPr sz="1000">
-                <a:solidFill>
-                  <a:srgbClr val="BEC3CD"/>
-                </a:solidFill>
-              </a:rPr>
-              <a:t>Implements teacher-recommended modal sign-in/sign-up pattern (ecom class architecture).</a:t>
-            </a:r>
-          </a:p>
-          <a:p>
-            <a:pPr>
-              <a:spcAft>
-                <a:spcPts val="600"/>
-              </a:spcAft>
-            </a:pPr>
-            <a:r>
-              <a:rPr b="1" sz="1050">
+              <a:t>Session State: </a:t>
+            </a:r>
+            <a:r>
+              <a:rPr sz="1400">
+                <a:solidFill>
+                  <a:srgbClr val="CDD2DC"/>
+                </a:solidFill>
+              </a:rPr>
+              <a:t>Tracks user name, university email, and dynamic avatar status in state.</a:t>
+            </a:r>
+          </a:p>
+          <a:p>
+            <a:pPr>
+              <a:spcAft>
+                <a:spcPts val="800"/>
+              </a:spcAft>
+            </a:pPr>
+            <a:r>
+              <a:rPr b="1" sz="1500">
                 <a:solidFill>
                   <a:srgbClr val="2BA640"/>
                 </a:solidFill>
@@ -10400,51 +10069,20 @@
               <a:t>• </a:t>
             </a:r>
             <a:r>
-              <a:rPr b="1" sz="1000">
+              <a:rPr b="1" sz="1400">
                 <a:solidFill>
                   <a:srgbClr val="FFFFFF"/>
                 </a:solidFill>
               </a:rPr>
-              <a:t>Session State: </a:t>
-            </a:r>
-            <a:r>
-              <a:rPr sz="1000">
-                <a:solidFill>
-                  <a:srgbClr val="BEC3CD"/>
-                </a:solidFill>
-              </a:rPr>
-              <a:t>Tracks user name, university email, and dynamic avatar status in persistent state.</a:t>
-            </a:r>
-          </a:p>
-          <a:p>
-            <a:pPr>
-              <a:spcAft>
-                <a:spcPts val="600"/>
-              </a:spcAft>
-            </a:pPr>
-            <a:r>
-              <a:rPr b="1" sz="1050">
-                <a:solidFill>
-                  <a:srgbClr val="2BA640"/>
-                </a:solidFill>
-              </a:rPr>
-              <a:t>• </a:t>
-            </a:r>
-            <a:r>
-              <a:rPr b="1" sz="1000">
-                <a:solidFill>
-                  <a:srgbClr val="FFFFFF"/>
-                </a:solidFill>
-              </a:rPr>
-              <a:t>Access Validation: </a:t>
-            </a:r>
-            <a:r>
-              <a:rPr sz="1000">
-                <a:solidFill>
-                  <a:srgbClr val="BEC3CD"/>
-                </a:solidFill>
-              </a:rPr>
-              <a:t>Displays toast alerts prompting sign-in when attempting protected actions like upload or comment.</a:t>
+              <a:t>Action Guarding: </a:t>
+            </a:r>
+            <a:r>
+              <a:rPr sz="1400">
+                <a:solidFill>
+                  <a:srgbClr val="CDD2DC"/>
+                </a:solidFill>
+              </a:rPr>
+              <a:t>Displays toast alerts prompting sign-in on upload and restricted actions.</a:t>
             </a:r>
           </a:p>
         </p:txBody>
@@ -10579,14 +10217,14 @@
           <a:lstStyle/>
           <a:p>
             <a:pPr>
-              <a:defRPr sz="1000" b="1">
+              <a:defRPr sz="1200" b="1">
                 <a:solidFill>
                   <a:srgbClr val="3EA6FF"/>
                 </a:solidFill>
               </a:defRPr>
             </a:pPr>
             <a:r>
-              <a:t>GROUP G15  •  PROJECT ID: G15-PID-17 (P-17)  •  EVALUATION-II (25CSE0203)</a:t>
+              <a:t>GROUP G15  •  PROJECT ID: G15-PID-17 (P-17)  •  EVALUATION-II</a:t>
             </a:r>
           </a:p>
         </p:txBody>
@@ -10599,8 +10237,8 @@
         </p:nvSpPr>
         <p:spPr>
           <a:xfrm>
-            <a:off x="731520" y="594360"/>
-            <a:ext cx="10728655" cy="594360"/>
+            <a:off x="731520" y="621792"/>
+            <a:ext cx="10728655" cy="640080"/>
           </a:xfrm>
           <a:prstGeom prst="rect">
             <a:avLst/>
@@ -10614,7 +10252,7 @@
           <a:lstStyle/>
           <a:p>
             <a:pPr>
-              <a:defRPr sz="2100" b="1">
+              <a:defRPr sz="2500" b="1">
                 <a:solidFill>
                   <a:srgbClr val="FFFFFF"/>
                 </a:solidFill>
@@ -10649,9 +10287,9 @@
           <a:lstStyle/>
           <a:p>
             <a:pPr>
-              <a:defRPr sz="900">
-                <a:solidFill>
-                  <a:srgbClr val="7B8293"/>
+              <a:defRPr sz="1050">
+                <a:solidFill>
+                  <a:srgbClr val="828A9B"/>
                 </a:solidFill>
               </a:defRPr>
             </a:pPr>
@@ -10670,7 +10308,535 @@
         <p:spPr>
           <a:xfrm>
             <a:off x="731520" y="1371600"/>
-            <a:ext cx="3383280" cy="4663440"/>
+            <a:ext cx="3383280" cy="3108960"/>
+          </a:xfrm>
+          <a:prstGeom prst="roundRect">
+            <a:avLst/>
+          </a:prstGeom>
+          <a:solidFill>
+            <a:srgbClr val="161922"/>
+          </a:solidFill>
+          <a:ln w="17780">
+            <a:solidFill>
+              <a:srgbClr val="2E3445"/>
+            </a:solidFill>
+          </a:ln>
+        </p:spPr>
+        <p:style>
+          <a:lnRef idx="1">
+            <a:schemeClr val="accent1"/>
+          </a:lnRef>
+          <a:fillRef idx="3">
+            <a:schemeClr val="accent1"/>
+          </a:fillRef>
+          <a:effectRef idx="2">
+            <a:schemeClr val="accent1"/>
+          </a:effectRef>
+          <a:fontRef idx="minor">
+            <a:schemeClr val="lt1"/>
+          </a:fontRef>
+        </p:style>
+        <p:txBody>
+          <a:bodyPr rtlCol="0" anchor="ctr"/>
+          <a:lstStyle/>
+          <a:p>
+            <a:pPr algn="ctr"/>
+          </a:p>
+        </p:txBody>
+      </p:sp>
+      <p:sp>
+        <p:nvSpPr>
+          <p:cNvPr id="8" name="TextBox 7"/>
+          <p:cNvSpPr txBox="1"/>
+          <p:nvPr/>
+        </p:nvSpPr>
+        <p:spPr>
+          <a:xfrm>
+            <a:off x="932688" y="1536192"/>
+            <a:ext cx="2980944" cy="2779776"/>
+          </a:xfrm>
+          <a:prstGeom prst="rect">
+            <a:avLst/>
+          </a:prstGeom>
+          <a:noFill/>
+        </p:spPr>
+        <p:txBody>
+          <a:bodyPr wrap="square">
+            <a:spAutoFit/>
+          </a:bodyPr>
+          <a:lstStyle/>
+          <a:p>
+            <a:pPr>
+              <a:spcAft>
+                <a:spcPts val="1000"/>
+              </a:spcAft>
+              <a:defRPr sz="1700" b="1">
+                <a:solidFill>
+                  <a:srgbClr val="FF0033"/>
+                </a:solidFill>
+              </a:defRPr>
+            </a:pPr>
+            <a:r>
+              <a:t>Entertainment &amp; Music</a:t>
+            </a:r>
+          </a:p>
+          <a:p>
+            <a:pPr>
+              <a:spcAft>
+                <a:spcPts val="800"/>
+              </a:spcAft>
+            </a:pPr>
+            <a:r>
+              <a:rPr b="1" sz="1500">
+                <a:solidFill>
+                  <a:srgbClr val="FF0033"/>
+                </a:solidFill>
+              </a:rPr>
+              <a:t>• </a:t>
+            </a:r>
+            <a:r>
+              <a:rPr b="1" sz="1400">
+                <a:solidFill>
+                  <a:srgbClr val="FFFFFF"/>
+                </a:solidFill>
+              </a:rPr>
+              <a:t>MrBeast: </a:t>
+            </a:r>
+            <a:r>
+              <a:rPr sz="1400">
+                <a:solidFill>
+                  <a:srgbClr val="CDD2DC"/>
+                </a:solidFill>
+              </a:rPr>
+              <a:t>522M subscribers — World's #1 creator; features 7-Days Stranded challenges.</a:t>
+            </a:r>
+          </a:p>
+          <a:p>
+            <a:pPr>
+              <a:spcAft>
+                <a:spcPts val="800"/>
+              </a:spcAft>
+            </a:pPr>
+            <a:r>
+              <a:rPr b="1" sz="1500">
+                <a:solidFill>
+                  <a:srgbClr val="FF0033"/>
+                </a:solidFill>
+              </a:rPr>
+              <a:t>• </a:t>
+            </a:r>
+            <a:r>
+              <a:rPr b="1" sz="1400">
+                <a:solidFill>
+                  <a:srgbClr val="FFFFFF"/>
+                </a:solidFill>
+              </a:rPr>
+              <a:t>T-Series: </a:t>
+            </a:r>
+            <a:r>
+              <a:rPr sz="1400">
+                <a:solidFill>
+                  <a:srgbClr val="CDD2DC"/>
+                </a:solidFill>
+              </a:rPr>
+              <a:t>316M subscribers — Leading Indian music label with viral movie soundtracks.</a:t>
+            </a:r>
+          </a:p>
+          <a:p>
+            <a:pPr>
+              <a:spcAft>
+                <a:spcPts val="800"/>
+              </a:spcAft>
+            </a:pPr>
+            <a:r>
+              <a:rPr b="1" sz="1500">
+                <a:solidFill>
+                  <a:srgbClr val="FF0033"/>
+                </a:solidFill>
+              </a:rPr>
+              <a:t>• </a:t>
+            </a:r>
+            <a:r>
+              <a:rPr b="1" sz="1400">
+                <a:solidFill>
+                  <a:srgbClr val="FFFFFF"/>
+                </a:solidFill>
+              </a:rPr>
+              <a:t>Techno Gamerz: </a:t>
+            </a:r>
+            <a:r>
+              <a:rPr sz="1400">
+                <a:solidFill>
+                  <a:srgbClr val="CDD2DC"/>
+                </a:solidFill>
+              </a:rPr>
+              <a:t>53.4M subscribers — India's gaming icon; features GTA 5 and Minecraft series.</a:t>
+            </a:r>
+          </a:p>
+        </p:txBody>
+      </p:sp>
+      <p:sp>
+        <p:nvSpPr>
+          <p:cNvPr id="9" name="Rounded Rectangle 8"/>
+          <p:cNvSpPr/>
+          <p:nvPr/>
+        </p:nvSpPr>
+        <p:spPr>
+          <a:xfrm>
+            <a:off x="4389120" y="1371600"/>
+            <a:ext cx="3383280" cy="3108960"/>
+          </a:xfrm>
+          <a:prstGeom prst="roundRect">
+            <a:avLst/>
+          </a:prstGeom>
+          <a:solidFill>
+            <a:srgbClr val="161922"/>
+          </a:solidFill>
+          <a:ln w="17780">
+            <a:solidFill>
+              <a:srgbClr val="2E3445"/>
+            </a:solidFill>
+          </a:ln>
+        </p:spPr>
+        <p:style>
+          <a:lnRef idx="1">
+            <a:schemeClr val="accent1"/>
+          </a:lnRef>
+          <a:fillRef idx="3">
+            <a:schemeClr val="accent1"/>
+          </a:fillRef>
+          <a:effectRef idx="2">
+            <a:schemeClr val="accent1"/>
+          </a:effectRef>
+          <a:fontRef idx="minor">
+            <a:schemeClr val="lt1"/>
+          </a:fontRef>
+        </p:style>
+        <p:txBody>
+          <a:bodyPr rtlCol="0" anchor="ctr"/>
+          <a:lstStyle/>
+          <a:p>
+            <a:pPr algn="ctr"/>
+          </a:p>
+        </p:txBody>
+      </p:sp>
+      <p:sp>
+        <p:nvSpPr>
+          <p:cNvPr id="10" name="TextBox 9"/>
+          <p:cNvSpPr txBox="1"/>
+          <p:nvPr/>
+        </p:nvSpPr>
+        <p:spPr>
+          <a:xfrm>
+            <a:off x="4590288" y="1536192"/>
+            <a:ext cx="2980944" cy="2779776"/>
+          </a:xfrm>
+          <a:prstGeom prst="rect">
+            <a:avLst/>
+          </a:prstGeom>
+          <a:noFill/>
+        </p:spPr>
+        <p:txBody>
+          <a:bodyPr wrap="square">
+            <a:spAutoFit/>
+          </a:bodyPr>
+          <a:lstStyle/>
+          <a:p>
+            <a:pPr>
+              <a:spcAft>
+                <a:spcPts val="1000"/>
+              </a:spcAft>
+              <a:defRPr sz="1700" b="1">
+                <a:solidFill>
+                  <a:srgbClr val="3EA6FF"/>
+                </a:solidFill>
+              </a:defRPr>
+            </a:pPr>
+            <a:r>
+              <a:t>Comedy &amp; Specialized Gaming</a:t>
+            </a:r>
+          </a:p>
+          <a:p>
+            <a:pPr>
+              <a:spcAft>
+                <a:spcPts val="800"/>
+              </a:spcAft>
+            </a:pPr>
+            <a:r>
+              <a:rPr b="1" sz="1500">
+                <a:solidFill>
+                  <a:srgbClr val="3EA6FF"/>
+                </a:solidFill>
+              </a:rPr>
+              <a:t>• </a:t>
+            </a:r>
+            <a:r>
+              <a:rPr b="1" sz="1400">
+                <a:solidFill>
+                  <a:srgbClr val="FFFFFF"/>
+                </a:solidFill>
+              </a:rPr>
+              <a:t>Samay Raina: </a:t>
+            </a:r>
+            <a:r>
+              <a:rPr sz="1400">
+                <a:solidFill>
+                  <a:srgbClr val="CDD2DC"/>
+                </a:solidFill>
+              </a:rPr>
+              <a:t>7.65M subscribers — Standup comedy &amp; India's Got Latent episodes.</a:t>
+            </a:r>
+          </a:p>
+          <a:p>
+            <a:pPr>
+              <a:spcAft>
+                <a:spcPts val="800"/>
+              </a:spcAft>
+            </a:pPr>
+            <a:r>
+              <a:rPr b="1" sz="1500">
+                <a:solidFill>
+                  <a:srgbClr val="3EA6FF"/>
+                </a:solidFill>
+              </a:rPr>
+              <a:t>• </a:t>
+            </a:r>
+            <a:r>
+              <a:rPr b="1" sz="1400">
+                <a:solidFill>
+                  <a:srgbClr val="FFFFFF"/>
+                </a:solidFill>
+              </a:rPr>
+              <a:t>Wemmbu: </a:t>
+            </a:r>
+            <a:r>
+              <a:rPr sz="1400">
+                <a:solidFill>
+                  <a:srgbClr val="CDD2DC"/>
+                </a:solidFill>
+              </a:rPr>
+              <a:t>3.45M subscribers — Hardcore Minecraft survival and trap build walkthroughs.</a:t>
+            </a:r>
+          </a:p>
+          <a:p>
+            <a:pPr>
+              <a:spcAft>
+                <a:spcPts val="800"/>
+              </a:spcAft>
+            </a:pPr>
+            <a:r>
+              <a:rPr b="1" sz="1500">
+                <a:solidFill>
+                  <a:srgbClr val="3EA6FF"/>
+                </a:solidFill>
+              </a:rPr>
+              <a:t>• </a:t>
+            </a:r>
+            <a:r>
+              <a:rPr b="1" sz="1400">
+                <a:solidFill>
+                  <a:srgbClr val="FFFFFF"/>
+                </a:solidFill>
+              </a:rPr>
+              <a:t>Verified Community: </a:t>
+            </a:r>
+            <a:r>
+              <a:rPr sz="1400">
+                <a:solidFill>
+                  <a:srgbClr val="CDD2DC"/>
+                </a:solidFill>
+              </a:rPr>
+              <a:t>8 Verified Channels spanning Coding, Comedy, Music, and Gaming.</a:t>
+            </a:r>
+          </a:p>
+        </p:txBody>
+      </p:sp>
+      <p:sp>
+        <p:nvSpPr>
+          <p:cNvPr id="11" name="Rounded Rectangle 10"/>
+          <p:cNvSpPr/>
+          <p:nvPr/>
+        </p:nvSpPr>
+        <p:spPr>
+          <a:xfrm>
+            <a:off x="8046720" y="1371600"/>
+            <a:ext cx="3383280" cy="3108960"/>
+          </a:xfrm>
+          <a:prstGeom prst="roundRect">
+            <a:avLst/>
+          </a:prstGeom>
+          <a:solidFill>
+            <a:srgbClr val="161922"/>
+          </a:solidFill>
+          <a:ln w="17780">
+            <a:solidFill>
+              <a:srgbClr val="2E3445"/>
+            </a:solidFill>
+          </a:ln>
+        </p:spPr>
+        <p:style>
+          <a:lnRef idx="1">
+            <a:schemeClr val="accent1"/>
+          </a:lnRef>
+          <a:fillRef idx="3">
+            <a:schemeClr val="accent1"/>
+          </a:fillRef>
+          <a:effectRef idx="2">
+            <a:schemeClr val="accent1"/>
+          </a:effectRef>
+          <a:fontRef idx="minor">
+            <a:schemeClr val="lt1"/>
+          </a:fontRef>
+        </p:style>
+        <p:txBody>
+          <a:bodyPr rtlCol="0" anchor="ctr"/>
+          <a:lstStyle/>
+          <a:p>
+            <a:pPr algn="ctr"/>
+          </a:p>
+        </p:txBody>
+      </p:sp>
+      <p:sp>
+        <p:nvSpPr>
+          <p:cNvPr id="12" name="TextBox 11"/>
+          <p:cNvSpPr txBox="1"/>
+          <p:nvPr/>
+        </p:nvSpPr>
+        <p:spPr>
+          <a:xfrm>
+            <a:off x="8247888" y="1536192"/>
+            <a:ext cx="2980944" cy="2779776"/>
+          </a:xfrm>
+          <a:prstGeom prst="rect">
+            <a:avLst/>
+          </a:prstGeom>
+          <a:noFill/>
+        </p:spPr>
+        <p:txBody>
+          <a:bodyPr wrap="square">
+            <a:spAutoFit/>
+          </a:bodyPr>
+          <a:lstStyle/>
+          <a:p>
+            <a:pPr>
+              <a:spcAft>
+                <a:spcPts val="1000"/>
+              </a:spcAft>
+              <a:defRPr sz="1700" b="1">
+                <a:solidFill>
+                  <a:srgbClr val="2BA640"/>
+                </a:solidFill>
+              </a:defRPr>
+            </a:pPr>
+            <a:r>
+              <a:t>Developer Education</a:t>
+            </a:r>
+          </a:p>
+          <a:p>
+            <a:pPr>
+              <a:spcAft>
+                <a:spcPts val="800"/>
+              </a:spcAft>
+            </a:pPr>
+            <a:r>
+              <a:rPr b="1" sz="1500">
+                <a:solidFill>
+                  <a:srgbClr val="2BA640"/>
+                </a:solidFill>
+              </a:rPr>
+              <a:t>• </a:t>
+            </a:r>
+            <a:r>
+              <a:rPr b="1" sz="1400">
+                <a:solidFill>
+                  <a:srgbClr val="FFFFFF"/>
+                </a:solidFill>
+              </a:rPr>
+              <a:t>freeCodeCamp.org: </a:t>
+            </a:r>
+            <a:r>
+              <a:rPr sz="1400">
+                <a:solidFill>
+                  <a:srgbClr val="CDD2DC"/>
+                </a:solidFill>
+              </a:rPr>
+              <a:t>12.0M subscribers — Comprehensive 10-Hour DSA masterclass.</a:t>
+            </a:r>
+          </a:p>
+          <a:p>
+            <a:pPr>
+              <a:spcAft>
+                <a:spcPts val="800"/>
+              </a:spcAft>
+            </a:pPr>
+            <a:r>
+              <a:rPr b="1" sz="1500">
+                <a:solidFill>
+                  <a:srgbClr val="2BA640"/>
+                </a:solidFill>
+              </a:rPr>
+              <a:t>• </a:t>
+            </a:r>
+            <a:r>
+              <a:rPr b="1" sz="1400">
+                <a:solidFill>
+                  <a:srgbClr val="FFFFFF"/>
+                </a:solidFill>
+              </a:rPr>
+              <a:t>Chai aur Code: </a:t>
+            </a:r>
+            <a:r>
+              <a:rPr sz="1400">
+                <a:solidFill>
+                  <a:srgbClr val="CDD2DC"/>
+                </a:solidFill>
+              </a:rPr>
+              <a:t>645K subscribers — Hindi developer education and React 19 series.</a:t>
+            </a:r>
+          </a:p>
+          <a:p>
+            <a:pPr>
+              <a:spcAft>
+                <a:spcPts val="800"/>
+              </a:spcAft>
+            </a:pPr>
+            <a:r>
+              <a:rPr b="1" sz="1500">
+                <a:solidFill>
+                  <a:srgbClr val="2BA640"/>
+                </a:solidFill>
+              </a:rPr>
+              <a:t>• </a:t>
+            </a:r>
+            <a:r>
+              <a:rPr b="1" sz="1400">
+                <a:solidFill>
+                  <a:srgbClr val="FFFFFF"/>
+                </a:solidFill>
+              </a:rPr>
+              <a:t>NeetCode / Striver: </a:t>
+            </a:r>
+            <a:r>
+              <a:rPr sz="1400">
+                <a:solidFill>
+                  <a:srgbClr val="CDD2DC"/>
+                </a:solidFill>
+              </a:rPr>
+              <a:t>980K subscribers — Algorithms and placement interview prep.</a:t>
+            </a:r>
+          </a:p>
+        </p:txBody>
+      </p:sp>
+      <p:sp>
+        <p:nvSpPr>
+          <p:cNvPr id="13" name="Rounded Rectangle 12"/>
+          <p:cNvSpPr/>
+          <p:nvPr/>
+        </p:nvSpPr>
+        <p:spPr>
+          <a:xfrm>
+            <a:off x="731520" y="4663440"/>
+            <a:ext cx="10728655" cy="1371600"/>
           </a:xfrm>
           <a:prstGeom prst="roundRect">
             <a:avLst/>
@@ -10706,16 +10872,40 @@
           </a:p>
         </p:txBody>
       </p:sp>
-      <p:sp>
-        <p:nvSpPr>
-          <p:cNvPr id="8" name="TextBox 7"/>
+      <p:pic>
+        <p:nvPicPr>
+          <p:cNvPr id="14" name="Picture 13" descr="mrbeast_logo.png"/>
+          <p:cNvPicPr>
+            <a:picLocks noChangeAspect="1"/>
+          </p:cNvPicPr>
+          <p:nvPr/>
+        </p:nvPicPr>
+        <p:blipFill>
+          <a:blip r:embed="rId2"/>
+          <a:stretch>
+            <a:fillRect/>
+          </a:stretch>
+        </p:blipFill>
+        <p:spPr>
+          <a:xfrm>
+            <a:off x="1188720" y="4800600"/>
+            <a:ext cx="797169" cy="777240"/>
+          </a:xfrm>
+          <a:prstGeom prst="rect">
+            <a:avLst/>
+          </a:prstGeom>
+        </p:spPr>
+      </p:pic>
+      <p:sp>
+        <p:nvSpPr>
+          <p:cNvPr id="15" name="TextBox 14"/>
           <p:cNvSpPr txBox="1"/>
           <p:nvPr/>
         </p:nvSpPr>
         <p:spPr>
           <a:xfrm>
-            <a:off x="914400" y="1508760"/>
-            <a:ext cx="3017520" cy="4389120"/>
+            <a:off x="2057400" y="4892040"/>
+            <a:ext cx="1920240" cy="548640"/>
           </a:xfrm>
           <a:prstGeom prst="rect">
             <a:avLst/>
@@ -10729,169 +10919,52 @@
           <a:lstStyle/>
           <a:p>
             <a:pPr>
-              <a:spcAft>
-                <a:spcPts val="800"/>
-              </a:spcAft>
-              <a:defRPr sz="1300" b="1">
-                <a:solidFill>
-                  <a:srgbClr val="FF0033"/>
+              <a:defRPr sz="1200" b="1">
+                <a:solidFill>
+                  <a:srgbClr val="FFFFFF"/>
                 </a:solidFill>
               </a:defRPr>
             </a:pPr>
             <a:r>
-              <a:t>Global Megastars</a:t>
-            </a:r>
-          </a:p>
-          <a:p>
-            <a:pPr>
-              <a:spcAft>
-                <a:spcPts val="600"/>
-              </a:spcAft>
-            </a:pPr>
-            <a:r>
-              <a:rPr b="1" sz="1050">
-                <a:solidFill>
-                  <a:srgbClr val="FF0033"/>
-                </a:solidFill>
-              </a:rPr>
-              <a:t>• </a:t>
-            </a:r>
-            <a:r>
-              <a:rPr b="1" sz="1000">
-                <a:solidFill>
-                  <a:srgbClr val="FFFFFF"/>
-                </a:solidFill>
-              </a:rPr>
-              <a:t>MrBeast: </a:t>
-            </a:r>
-            <a:r>
-              <a:rPr sz="1000">
-                <a:solidFill>
-                  <a:srgbClr val="BEC3CD"/>
-                </a:solidFill>
-              </a:rPr>
-              <a:t>522M subscribers — YouTube's #1 creator; features 7-Days Stranded and Private Island challenges.</a:t>
-            </a:r>
-          </a:p>
-          <a:p>
-            <a:pPr>
-              <a:spcAft>
-                <a:spcPts val="600"/>
-              </a:spcAft>
-            </a:pPr>
-            <a:r>
-              <a:rPr b="1" sz="1050">
-                <a:solidFill>
-                  <a:srgbClr val="FF0033"/>
-                </a:solidFill>
-              </a:rPr>
-              <a:t>• </a:t>
-            </a:r>
-            <a:r>
-              <a:rPr b="1" sz="1000">
-                <a:solidFill>
-                  <a:srgbClr val="FFFFFF"/>
-                </a:solidFill>
-              </a:rPr>
-              <a:t>T-Series: </a:t>
-            </a:r>
-            <a:r>
-              <a:rPr sz="1000">
-                <a:solidFill>
-                  <a:srgbClr val="BEC3CD"/>
-                </a:solidFill>
-              </a:rPr>
-              <a:t>316M subscribers — World's leading Indian music label; features viral soundtrack releases.</a:t>
-            </a:r>
-          </a:p>
-          <a:p>
-            <a:pPr>
-              <a:spcAft>
-                <a:spcPts val="600"/>
-              </a:spcAft>
-            </a:pPr>
-            <a:r>
-              <a:rPr b="1" sz="1050">
-                <a:solidFill>
-                  <a:srgbClr val="FF0033"/>
-                </a:solidFill>
-              </a:rPr>
-              <a:t>• </a:t>
-            </a:r>
-            <a:r>
-              <a:rPr b="1" sz="1000">
-                <a:solidFill>
-                  <a:srgbClr val="FFFFFF"/>
-                </a:solidFill>
-              </a:rPr>
-              <a:t>Techno Gamerz (Ujjwal): </a:t>
-            </a:r>
-            <a:r>
-              <a:rPr sz="1000">
-                <a:solidFill>
-                  <a:srgbClr val="BEC3CD"/>
-                </a:solidFill>
-              </a:rPr>
-              <a:t>53.4M subscribers — India's gaming icon; features GTA 5 Episode 147 and Minecraft survival.</a:t>
-            </a:r>
-          </a:p>
-        </p:txBody>
-      </p:sp>
-      <p:sp>
-        <p:nvSpPr>
-          <p:cNvPr id="9" name="Rounded Rectangle 8"/>
-          <p:cNvSpPr/>
-          <p:nvPr/>
-        </p:nvSpPr>
-        <p:spPr>
-          <a:xfrm>
-            <a:off x="4389120" y="1371600"/>
-            <a:ext cx="3383280" cy="4663440"/>
-          </a:xfrm>
-          <a:prstGeom prst="roundRect">
-            <a:avLst/>
-          </a:prstGeom>
-          <a:solidFill>
-            <a:srgbClr val="161922"/>
-          </a:solidFill>
-          <a:ln w="15240">
-            <a:solidFill>
-              <a:srgbClr val="2E3445"/>
-            </a:solidFill>
-          </a:ln>
-        </p:spPr>
-        <p:style>
-          <a:lnRef idx="1">
-            <a:schemeClr val="accent1"/>
-          </a:lnRef>
-          <a:fillRef idx="3">
-            <a:schemeClr val="accent1"/>
-          </a:fillRef>
-          <a:effectRef idx="2">
-            <a:schemeClr val="accent1"/>
-          </a:effectRef>
-          <a:fontRef idx="minor">
-            <a:schemeClr val="lt1"/>
-          </a:fontRef>
-        </p:style>
-        <p:txBody>
-          <a:bodyPr rtlCol="0" anchor="ctr"/>
-          <a:lstStyle/>
-          <a:p>
-            <a:pPr algn="ctr"/>
-          </a:p>
-        </p:txBody>
-      </p:sp>
-      <p:sp>
-        <p:nvSpPr>
-          <p:cNvPr id="10" name="TextBox 9"/>
+              <a:t>MrBeast (522M)</a:t>
+            </a:r>
+          </a:p>
+        </p:txBody>
+      </p:sp>
+      <p:pic>
+        <p:nvPicPr>
+          <p:cNvPr id="16" name="Picture 15" descr="samay_raina.png"/>
+          <p:cNvPicPr>
+            <a:picLocks noChangeAspect="1"/>
+          </p:cNvPicPr>
+          <p:nvPr/>
+        </p:nvPicPr>
+        <p:blipFill>
+          <a:blip r:embed="rId3"/>
+          <a:stretch>
+            <a:fillRect/>
+          </a:stretch>
+        </p:blipFill>
+        <p:spPr>
+          <a:xfrm>
+            <a:off x="3931920" y="4800600"/>
+            <a:ext cx="777240" cy="777240"/>
+          </a:xfrm>
+          <a:prstGeom prst="rect">
+            <a:avLst/>
+          </a:prstGeom>
+        </p:spPr>
+      </p:pic>
+      <p:sp>
+        <p:nvSpPr>
+          <p:cNvPr id="17" name="TextBox 16"/>
           <p:cNvSpPr txBox="1"/>
           <p:nvPr/>
         </p:nvSpPr>
         <p:spPr>
           <a:xfrm>
-            <a:off x="4572000" y="1508760"/>
-            <a:ext cx="3017520" cy="4389120"/>
+            <a:off x="4800600" y="4892040"/>
+            <a:ext cx="1920240" cy="548640"/>
           </a:xfrm>
           <a:prstGeom prst="rect">
             <a:avLst/>
@@ -10905,169 +10978,52 @@
           <a:lstStyle/>
           <a:p>
             <a:pPr>
-              <a:spcAft>
-                <a:spcPts val="800"/>
-              </a:spcAft>
-              <a:defRPr sz="1300" b="1">
-                <a:solidFill>
-                  <a:srgbClr val="3EA6FF"/>
+              <a:defRPr sz="1200" b="1">
+                <a:solidFill>
+                  <a:srgbClr val="FFFFFF"/>
                 </a:solidFill>
               </a:defRPr>
             </a:pPr>
             <a:r>
-              <a:t>Comedy &amp; Specialized Gaming</a:t>
-            </a:r>
-          </a:p>
-          <a:p>
-            <a:pPr>
-              <a:spcAft>
-                <a:spcPts val="600"/>
-              </a:spcAft>
-            </a:pPr>
-            <a:r>
-              <a:rPr b="1" sz="1050">
-                <a:solidFill>
-                  <a:srgbClr val="3EA6FF"/>
-                </a:solidFill>
-              </a:rPr>
-              <a:t>• </a:t>
-            </a:r>
-            <a:r>
-              <a:rPr b="1" sz="1000">
-                <a:solidFill>
-                  <a:srgbClr val="FFFFFF"/>
-                </a:solidFill>
-              </a:rPr>
-              <a:t>Samay Raina: </a:t>
-            </a:r>
-            <a:r>
-              <a:rPr sz="1000">
-                <a:solidFill>
-                  <a:srgbClr val="BEC3CD"/>
-                </a:solidFill>
-              </a:rPr>
-              <a:t>7.65M subscribers — Standup comedy &amp; India's Got Latent episodes featuring top guest panels.</a:t>
-            </a:r>
-          </a:p>
-          <a:p>
-            <a:pPr>
-              <a:spcAft>
-                <a:spcPts val="600"/>
-              </a:spcAft>
-            </a:pPr>
-            <a:r>
-              <a:rPr b="1" sz="1050">
-                <a:solidFill>
-                  <a:srgbClr val="3EA6FF"/>
-                </a:solidFill>
-              </a:rPr>
-              <a:t>• </a:t>
-            </a:r>
-            <a:r>
-              <a:rPr b="1" sz="1000">
-                <a:solidFill>
-                  <a:srgbClr val="FFFFFF"/>
-                </a:solidFill>
-              </a:rPr>
-              <a:t>Wemmbu: </a:t>
-            </a:r>
-            <a:r>
-              <a:rPr sz="1000">
-                <a:solidFill>
-                  <a:srgbClr val="BEC3CD"/>
-                </a:solidFill>
-              </a:rPr>
-              <a:t>3.45M subscribers — Hardcore Minecraft survival, traps, and secret base architectural walkthroughs.</a:t>
-            </a:r>
-          </a:p>
-          <a:p>
-            <a:pPr>
-              <a:spcAft>
-                <a:spcPts val="600"/>
-              </a:spcAft>
-            </a:pPr>
-            <a:r>
-              <a:rPr b="1" sz="1050">
-                <a:solidFill>
-                  <a:srgbClr val="3EA6FF"/>
-                </a:solidFill>
-              </a:rPr>
-              <a:t>• </a:t>
-            </a:r>
-            <a:r>
-              <a:rPr b="1" sz="1000">
-                <a:solidFill>
-                  <a:srgbClr val="FFFFFF"/>
-                </a:solidFill>
-              </a:rPr>
-              <a:t>Verified Community: </a:t>
-            </a:r>
-            <a:r>
-              <a:rPr sz="1000">
-                <a:solidFill>
-                  <a:srgbClr val="BEC3CD"/>
-                </a:solidFill>
-              </a:rPr>
-              <a:t>8 Verified Channels — Multi-category coverage spanning Coding, Comedy, Music, and Gaming.</a:t>
-            </a:r>
-          </a:p>
-        </p:txBody>
-      </p:sp>
-      <p:sp>
-        <p:nvSpPr>
-          <p:cNvPr id="11" name="Rounded Rectangle 10"/>
-          <p:cNvSpPr/>
-          <p:nvPr/>
-        </p:nvSpPr>
-        <p:spPr>
-          <a:xfrm>
-            <a:off x="8046720" y="1371600"/>
-            <a:ext cx="3383280" cy="4663440"/>
-          </a:xfrm>
-          <a:prstGeom prst="roundRect">
-            <a:avLst/>
-          </a:prstGeom>
-          <a:solidFill>
-            <a:srgbClr val="161922"/>
-          </a:solidFill>
-          <a:ln w="15240">
-            <a:solidFill>
-              <a:srgbClr val="2E3445"/>
-            </a:solidFill>
-          </a:ln>
-        </p:spPr>
-        <p:style>
-          <a:lnRef idx="1">
-            <a:schemeClr val="accent1"/>
-          </a:lnRef>
-          <a:fillRef idx="3">
-            <a:schemeClr val="accent1"/>
-          </a:fillRef>
-          <a:effectRef idx="2">
-            <a:schemeClr val="accent1"/>
-          </a:effectRef>
-          <a:fontRef idx="minor">
-            <a:schemeClr val="lt1"/>
-          </a:fontRef>
-        </p:style>
-        <p:txBody>
-          <a:bodyPr rtlCol="0" anchor="ctr"/>
-          <a:lstStyle/>
-          <a:p>
-            <a:pPr algn="ctr"/>
-          </a:p>
-        </p:txBody>
-      </p:sp>
-      <p:sp>
-        <p:nvSpPr>
-          <p:cNvPr id="12" name="TextBox 11"/>
+              <a:t>Samay Raina (7.65M)</a:t>
+            </a:r>
+          </a:p>
+        </p:txBody>
+      </p:sp>
+      <p:pic>
+        <p:nvPicPr>
+          <p:cNvPr id="18" name="Picture 17" descr="techno_gamerz.png"/>
+          <p:cNvPicPr>
+            <a:picLocks noChangeAspect="1"/>
+          </p:cNvPicPr>
+          <p:nvPr/>
+        </p:nvPicPr>
+        <p:blipFill>
+          <a:blip r:embed="rId4"/>
+          <a:stretch>
+            <a:fillRect/>
+          </a:stretch>
+        </p:blipFill>
+        <p:spPr>
+          <a:xfrm>
+            <a:off x="6675120" y="4800600"/>
+            <a:ext cx="866518" cy="777240"/>
+          </a:xfrm>
+          <a:prstGeom prst="rect">
+            <a:avLst/>
+          </a:prstGeom>
+        </p:spPr>
+      </p:pic>
+      <p:sp>
+        <p:nvSpPr>
+          <p:cNvPr id="19" name="TextBox 18"/>
           <p:cNvSpPr txBox="1"/>
           <p:nvPr/>
         </p:nvSpPr>
         <p:spPr>
           <a:xfrm>
-            <a:off x="8229600" y="1508760"/>
-            <a:ext cx="3017520" cy="4389120"/>
+            <a:off x="7543800" y="4892040"/>
+            <a:ext cx="1920240" cy="548640"/>
           </a:xfrm>
           <a:prstGeom prst="rect">
             <a:avLst/>
@@ -11081,110 +11037,73 @@
           <a:lstStyle/>
           <a:p>
             <a:pPr>
-              <a:spcAft>
-                <a:spcPts val="800"/>
-              </a:spcAft>
-              <a:defRPr sz="1300" b="1">
-                <a:solidFill>
-                  <a:srgbClr val="2BA640"/>
+              <a:defRPr sz="1200" b="1">
+                <a:solidFill>
+                  <a:srgbClr val="FFFFFF"/>
                 </a:solidFill>
               </a:defRPr>
             </a:pPr>
             <a:r>
-              <a:t>Syllabus &amp; Education Channels</a:t>
-            </a:r>
-          </a:p>
-          <a:p>
-            <a:pPr>
-              <a:spcAft>
-                <a:spcPts val="600"/>
-              </a:spcAft>
-            </a:pPr>
-            <a:r>
-              <a:rPr b="1" sz="1050">
-                <a:solidFill>
-                  <a:srgbClr val="2BA640"/>
-                </a:solidFill>
-              </a:rPr>
-              <a:t>• </a:t>
-            </a:r>
-            <a:r>
-              <a:rPr b="1" sz="1000">
+              <a:t>Techno Gamerz (53.4M)</a:t>
+            </a:r>
+          </a:p>
+        </p:txBody>
+      </p:sp>
+      <p:pic>
+        <p:nvPicPr>
+          <p:cNvPr id="20" name="Picture 19" descr="chaiaurcode_logo.png"/>
+          <p:cNvPicPr>
+            <a:picLocks noChangeAspect="1"/>
+          </p:cNvPicPr>
+          <p:nvPr/>
+        </p:nvPicPr>
+        <p:blipFill>
+          <a:blip r:embed="rId5"/>
+          <a:stretch>
+            <a:fillRect/>
+          </a:stretch>
+        </p:blipFill>
+        <p:spPr>
+          <a:xfrm>
+            <a:off x="9418320" y="4800600"/>
+            <a:ext cx="777240" cy="777240"/>
+          </a:xfrm>
+          <a:prstGeom prst="rect">
+            <a:avLst/>
+          </a:prstGeom>
+        </p:spPr>
+      </p:pic>
+      <p:sp>
+        <p:nvSpPr>
+          <p:cNvPr id="21" name="TextBox 20"/>
+          <p:cNvSpPr txBox="1"/>
+          <p:nvPr/>
+        </p:nvSpPr>
+        <p:spPr>
+          <a:xfrm>
+            <a:off x="10287000" y="4892040"/>
+            <a:ext cx="1920240" cy="548640"/>
+          </a:xfrm>
+          <a:prstGeom prst="rect">
+            <a:avLst/>
+          </a:prstGeom>
+          <a:noFill/>
+        </p:spPr>
+        <p:txBody>
+          <a:bodyPr wrap="square">
+            <a:spAutoFit/>
+          </a:bodyPr>
+          <a:lstStyle/>
+          <a:p>
+            <a:pPr>
+              <a:defRPr sz="1200" b="1">
                 <a:solidFill>
                   <a:srgbClr val="FFFFFF"/>
                 </a:solidFill>
-              </a:rPr>
-              <a:t>freeCodeCamp.org: </a:t>
-            </a:r>
-            <a:r>
-              <a:rPr sz="1000">
-                <a:solidFill>
-                  <a:srgbClr val="BEC3CD"/>
-                </a:solidFill>
-              </a:rPr>
-              <a:t>12.0M subscribers — Industry standard open curriculum; features comprehensive 10-Hour DSA course.</a:t>
-            </a:r>
-          </a:p>
-          <a:p>
-            <a:pPr>
-              <a:spcAft>
-                <a:spcPts val="600"/>
-              </a:spcAft>
-            </a:pPr>
-            <a:r>
-              <a:rPr b="1" sz="1050">
-                <a:solidFill>
-                  <a:srgbClr val="2BA640"/>
-                </a:solidFill>
-              </a:rPr>
-              <a:t>• </a:t>
-            </a:r>
-            <a:r>
-              <a:rPr b="1" sz="1000">
-                <a:solidFill>
-                  <a:srgbClr val="FFFFFF"/>
-                </a:solidFill>
-              </a:rPr>
-              <a:t>Chai aur Code (Hitesh): </a:t>
-            </a:r>
-            <a:r>
-              <a:rPr sz="1000">
-                <a:solidFill>
-                  <a:srgbClr val="BEC3CD"/>
-                </a:solidFill>
-              </a:rPr>
-              <a:t>645K subscribers — Hindi developer education; features foundational React 19 series.</a:t>
-            </a:r>
-          </a:p>
-          <a:p>
-            <a:pPr>
-              <a:spcAft>
-                <a:spcPts val="600"/>
-              </a:spcAft>
-            </a:pPr>
-            <a:r>
-              <a:rPr b="1" sz="1050">
-                <a:solidFill>
-                  <a:srgbClr val="2BA640"/>
-                </a:solidFill>
-              </a:rPr>
-              <a:t>• </a:t>
-            </a:r>
-            <a:r>
-              <a:rPr b="1" sz="1000">
-                <a:solidFill>
-                  <a:srgbClr val="FFFFFF"/>
-                </a:solidFill>
-              </a:rPr>
-              <a:t>NeetCode / Striver: </a:t>
-            </a:r>
-            <a:r>
-              <a:rPr sz="1000">
-                <a:solidFill>
-                  <a:srgbClr val="BEC3CD"/>
-                </a:solidFill>
-              </a:rPr>
-              <a:t>980K subscribers — Data structures, competitive algorithms, and tech interview masterclasses.</a:t>
+              </a:defRPr>
+            </a:pPr>
+            <a:r>
+              <a:t>Chai aur Code (645K)</a:t>
             </a:r>
           </a:p>
         </p:txBody>

--- a/G15-PID-17.pptx
+++ b/G15-PID-17.pptx
@@ -17,6 +17,8 @@
     <p:sldId id="265" r:id="rId16"/>
     <p:sldId id="266" r:id="rId17"/>
     <p:sldId id="267" r:id="rId18"/>
+    <p:sldId id="268" r:id="rId19"/>
+    <p:sldId id="269" r:id="rId20"/>
   </p:sldIdLst>
   <p:sldSz cx="12191695" cy="6858000" type="screen4x3"/>
   <p:notesSz cx="6858000" cy="9144000"/>
@@ -3150,7 +3152,7 @@
         </p:nvSpPr>
         <p:spPr>
           <a:xfrm>
-            <a:off x="731520" y="640080"/>
+            <a:off x="731520" y="594360"/>
             <a:ext cx="731520" cy="73152"/>
           </a:xfrm>
           <a:prstGeom prst="rect">
@@ -3193,8 +3195,8 @@
         </p:nvSpPr>
         <p:spPr>
           <a:xfrm>
-            <a:off x="731520" y="868680"/>
-            <a:ext cx="9326880" cy="2103120"/>
+            <a:off x="731520" y="777240"/>
+            <a:ext cx="7772400" cy="2103120"/>
           </a:xfrm>
           <a:prstGeom prst="rect">
             <a:avLst/>
@@ -3202,13 +3204,13 @@
           <a:noFill/>
         </p:spPr>
         <p:txBody>
-          <a:bodyPr wrap="none">
+          <a:bodyPr wrap="square">
             <a:spAutoFit/>
           </a:bodyPr>
           <a:lstStyle/>
           <a:p>
             <a:pPr>
-              <a:defRPr sz="3800" b="1">
+              <a:defRPr sz="3600" b="1">
                 <a:solidFill>
                   <a:srgbClr val="FFFFFF"/>
                 </a:solidFill>
@@ -3223,7 +3225,7 @@
               <a:spcBef>
                 <a:spcPts val="600"/>
               </a:spcBef>
-              <a:defRPr sz="1700" b="1">
+              <a:defRPr sz="1600" b="1">
                 <a:solidFill>
                   <a:srgbClr val="FF0033"/>
                 </a:solidFill>
@@ -3238,7 +3240,7 @@
               <a:spcBef>
                 <a:spcPts val="600"/>
               </a:spcBef>
-              <a:defRPr sz="1400">
+              <a:defRPr sz="1350">
                 <a:solidFill>
                   <a:srgbClr val="3EA6FF"/>
                 </a:solidFill>
@@ -3247,12 +3249,55 @@
             <a:r>
               <a:t>Department of Computer Science &amp; Engineering • Chitkara University, Punjab</a:t>
             </a:r>
+          </a:p>
+        </p:txBody>
+      </p:sp>
+      <p:sp>
+        <p:nvSpPr>
+          <p:cNvPr id="5" name="Rounded Rectangle 4"/>
+          <p:cNvSpPr/>
+          <p:nvPr/>
+        </p:nvSpPr>
+        <p:spPr>
+          <a:xfrm>
+            <a:off x="8961120" y="777240"/>
+            <a:ext cx="2468880" cy="1005840"/>
+          </a:xfrm>
+          <a:prstGeom prst="roundRect">
+            <a:avLst/>
+          </a:prstGeom>
+          <a:solidFill>
+            <a:srgbClr val="FFFFFF"/>
+          </a:solidFill>
+          <a:ln>
+            <a:noFill/>
+          </a:ln>
+        </p:spPr>
+        <p:style>
+          <a:lnRef idx="1">
+            <a:schemeClr val="accent1"/>
+          </a:lnRef>
+          <a:fillRef idx="3">
+            <a:schemeClr val="accent1"/>
+          </a:fillRef>
+          <a:effectRef idx="2">
+            <a:schemeClr val="accent1"/>
+          </a:effectRef>
+          <a:fontRef idx="minor">
+            <a:schemeClr val="lt1"/>
+          </a:fontRef>
+        </p:style>
+        <p:txBody>
+          <a:bodyPr rtlCol="0" anchor="ctr"/>
+          <a:lstStyle/>
+          <a:p>
+            <a:pPr algn="ctr"/>
           </a:p>
         </p:txBody>
       </p:sp>
       <p:pic>
         <p:nvPicPr>
-          <p:cNvPr id="5" name="Picture 4" descr="chitkara_logo.png"/>
+          <p:cNvPr id="6" name="Picture 5" descr="chitkara_logo.png"/>
           <p:cNvPicPr>
             <a:picLocks noChangeAspect="1"/>
           </p:cNvPicPr>
@@ -3266,8 +3311,8 @@
         </p:blipFill>
         <p:spPr>
           <a:xfrm>
-            <a:off x="9875520" y="822960"/>
-            <a:ext cx="6843037" cy="1280160"/>
+            <a:off x="9098280" y="896112"/>
+            <a:ext cx="2194560" cy="410547"/>
           </a:xfrm>
           <a:prstGeom prst="rect">
             <a:avLst/>
@@ -3276,14 +3321,14 @@
       </p:pic>
       <p:sp>
         <p:nvSpPr>
-          <p:cNvPr id="6" name="Rounded Rectangle 5"/>
+          <p:cNvPr id="7" name="Rounded Rectangle 6"/>
           <p:cNvSpPr/>
           <p:nvPr/>
         </p:nvSpPr>
         <p:spPr>
           <a:xfrm>
-            <a:off x="731520" y="3291840"/>
-            <a:ext cx="10728655" cy="2926080"/>
+            <a:off x="731520" y="3200400"/>
+            <a:ext cx="10728655" cy="3017520"/>
           </a:xfrm>
           <a:prstGeom prst="roundRect">
             <a:avLst/>
@@ -3321,14 +3366,14 @@
       </p:sp>
       <p:sp>
         <p:nvSpPr>
-          <p:cNvPr id="7" name="TextBox 6"/>
+          <p:cNvPr id="8" name="TextBox 7"/>
           <p:cNvSpPr txBox="1"/>
           <p:nvPr/>
         </p:nvSpPr>
         <p:spPr>
           <a:xfrm>
-            <a:off x="1097280" y="3566160"/>
-            <a:ext cx="4572000" cy="2377440"/>
+            <a:off x="1097280" y="3474720"/>
+            <a:ext cx="4572000" cy="2468880"/>
           </a:xfrm>
           <a:prstGeom prst="rect">
             <a:avLst/>
@@ -3343,9 +3388,9 @@
           <a:p>
             <a:pPr>
               <a:spcAft>
-                <a:spcPts val="1000"/>
-              </a:spcAft>
-              <a:defRPr sz="1600" b="1">
+                <a:spcPts val="800"/>
+              </a:spcAft>
+              <a:defRPr sz="1550" b="1">
                 <a:solidFill>
                   <a:srgbClr val="FF0033"/>
                 </a:solidFill>
@@ -3389,7 +3434,7 @@
               </a:spcBef>
               <a:defRPr sz="1150">
                 <a:solidFill>
-                  <a:srgbClr val="969BA8"/>
+                  <a:srgbClr val="8C94A5"/>
                 </a:solidFill>
               </a:defRPr>
             </a:pPr>
@@ -3401,14 +3446,14 @@
       </p:sp>
       <p:sp>
         <p:nvSpPr>
-          <p:cNvPr id="8" name="TextBox 7"/>
+          <p:cNvPr id="9" name="TextBox 8"/>
           <p:cNvSpPr txBox="1"/>
           <p:nvPr/>
         </p:nvSpPr>
         <p:spPr>
           <a:xfrm>
-            <a:off x="6217920" y="3566160"/>
-            <a:ext cx="4846320" cy="2377440"/>
+            <a:off x="6035040" y="3474720"/>
+            <a:ext cx="5029200" cy="2468880"/>
           </a:xfrm>
           <a:prstGeom prst="rect">
             <a:avLst/>
@@ -3423,9 +3468,9 @@
           <a:p>
             <a:pPr>
               <a:spcAft>
-                <a:spcPts val="1000"/>
-              </a:spcAft>
-              <a:defRPr sz="1600" b="1">
+                <a:spcPts val="800"/>
+              </a:spcAft>
+              <a:defRPr sz="1550" b="1">
                 <a:solidFill>
                   <a:srgbClr val="3EA6FF"/>
                 </a:solidFill>
@@ -3438,9 +3483,9 @@
           <a:p>
             <a:pPr>
               <a:spcAft>
-                <a:spcPts val="500"/>
-              </a:spcAft>
-              <a:defRPr sz="1300" b="1">
+                <a:spcPts val="400"/>
+              </a:spcAft>
+              <a:defRPr sz="1250" b="1">
                 <a:solidFill>
                   <a:srgbClr val="FFFFFF"/>
                 </a:solidFill>
@@ -3453,9 +3498,9 @@
           <a:p>
             <a:pPr>
               <a:spcAft>
-                <a:spcPts val="500"/>
-              </a:spcAft>
-              <a:defRPr sz="1300" b="1">
+                <a:spcPts val="400"/>
+              </a:spcAft>
+              <a:defRPr sz="1250" b="1">
                 <a:solidFill>
                   <a:srgbClr val="FFFFFF"/>
                 </a:solidFill>
@@ -3468,9 +3513,9 @@
           <a:p>
             <a:pPr>
               <a:spcAft>
-                <a:spcPts val="500"/>
-              </a:spcAft>
-              <a:defRPr sz="1300" b="1">
+                <a:spcPts val="400"/>
+              </a:spcAft>
+              <a:defRPr sz="1250" b="1">
                 <a:solidFill>
                   <a:srgbClr val="FFFFFF"/>
                 </a:solidFill>
@@ -3483,9 +3528,9 @@
           <a:p>
             <a:pPr>
               <a:spcAft>
-                <a:spcPts val="500"/>
-              </a:spcAft>
-              <a:defRPr sz="1300" b="1">
+                <a:spcPts val="400"/>
+              </a:spcAft>
+              <a:defRPr sz="1250" b="1">
                 <a:solidFill>
                   <a:srgbClr val="FFFFFF"/>
                 </a:solidFill>
@@ -3627,7 +3672,7 @@
           <a:lstStyle/>
           <a:p>
             <a:pPr>
-              <a:defRPr sz="1200" b="1">
+              <a:defRPr sz="1150" b="1">
                 <a:solidFill>
                   <a:srgbClr val="3EA6FF"/>
                 </a:solidFill>
@@ -3648,7 +3693,42 @@
         <p:spPr>
           <a:xfrm>
             <a:off x="731520" y="621792"/>
-            <a:ext cx="10728655" cy="640080"/>
+            <a:ext cx="10728655" cy="594360"/>
+          </a:xfrm>
+          <a:prstGeom prst="rect">
+            <a:avLst/>
+          </a:prstGeom>
+          <a:noFill/>
+        </p:spPr>
+        <p:txBody>
+          <a:bodyPr wrap="square">
+            <a:spAutoFit/>
+          </a:bodyPr>
+          <a:lstStyle/>
+          <a:p>
+            <a:pPr>
+              <a:defRPr sz="2300" b="1">
+                <a:solidFill>
+                  <a:srgbClr val="FFFFFF"/>
+                </a:solidFill>
+              </a:defRPr>
+            </a:pPr>
+            <a:r>
+              <a:t>YouTube Data API v3 &amp; Resilient Fallback Engine</a:t>
+            </a:r>
+          </a:p>
+        </p:txBody>
+      </p:sp>
+      <p:sp>
+        <p:nvSpPr>
+          <p:cNvPr id="6" name="TextBox 5"/>
+          <p:cNvSpPr txBox="1"/>
+          <p:nvPr/>
+        </p:nvSpPr>
+        <p:spPr>
+          <a:xfrm>
+            <a:off x="731520" y="6327648"/>
+            <a:ext cx="10728655" cy="274320"/>
           </a:xfrm>
           <a:prstGeom prst="rect">
             <a:avLst/>
@@ -3662,49 +3742,14 @@
           <a:lstStyle/>
           <a:p>
             <a:pPr>
-              <a:defRPr sz="2500" b="1">
-                <a:solidFill>
-                  <a:srgbClr val="FFFFFF"/>
+              <a:defRPr sz="1000">
+                <a:solidFill>
+                  <a:srgbClr val="8C94A5"/>
                 </a:solidFill>
               </a:defRPr>
             </a:pPr>
             <a:r>
-              <a:t>Multi-Device Responsive Design &amp; Modern UI/UX Layer</a:t>
-            </a:r>
-          </a:p>
-        </p:txBody>
-      </p:sp>
-      <p:sp>
-        <p:nvSpPr>
-          <p:cNvPr id="6" name="TextBox 5"/>
-          <p:cNvSpPr txBox="1"/>
-          <p:nvPr/>
-        </p:nvSpPr>
-        <p:spPr>
-          <a:xfrm>
-            <a:off x="731520" y="6309360"/>
-            <a:ext cx="10728655" cy="320040"/>
-          </a:xfrm>
-          <a:prstGeom prst="rect">
-            <a:avLst/>
-          </a:prstGeom>
-          <a:noFill/>
-        </p:spPr>
-        <p:txBody>
-          <a:bodyPr wrap="none">
-            <a:spAutoFit/>
-          </a:bodyPr>
-          <a:lstStyle/>
-          <a:p>
-            <a:pPr>
-              <a:defRPr sz="1050">
-                <a:solidFill>
-                  <a:srgbClr val="828A9B"/>
-                </a:solidFill>
-              </a:defRPr>
-            </a:pPr>
-            <a:r>
-              <a:t>PheW TuBe: Video Streaming Platform (G15-PID-17)  |  Evaluation-II  |  Page 10</a:t>
+              <a:t>PheW TuBe: Video Streaming Platform (G15-PID-17)  |  Chitkara University FEE-II  |  Page 10</a:t>
             </a:r>
           </a:p>
         </p:txBody>
@@ -3718,7 +3763,7 @@
         <p:spPr>
           <a:xfrm>
             <a:off x="731520" y="1371600"/>
-            <a:ext cx="5943600" cy="4663440"/>
+            <a:ext cx="3383280" cy="4754880"/>
           </a:xfrm>
           <a:prstGeom prst="roundRect">
             <a:avLst/>
@@ -3726,7 +3771,7 @@
           <a:solidFill>
             <a:srgbClr val="161922"/>
           </a:solidFill>
-          <a:ln w="17780">
+          <a:ln w="16510">
             <a:solidFill>
               <a:srgbClr val="2E3445"/>
             </a:solidFill>
@@ -3762,8 +3807,8 @@
         </p:nvSpPr>
         <p:spPr>
           <a:xfrm>
-            <a:off x="932688" y="1536192"/>
-            <a:ext cx="5541264" cy="4334255"/>
+            <a:off x="914400" y="1517904"/>
+            <a:ext cx="3017520" cy="4462272"/>
           </a:xfrm>
           <a:prstGeom prst="rect">
             <a:avLst/>
@@ -3771,33 +3816,33 @@
           <a:noFill/>
         </p:spPr>
         <p:txBody>
-          <a:bodyPr wrap="square">
+          <a:bodyPr wrap="square" tIns="0" bIns="0" lIns="0" rIns="0">
             <a:spAutoFit/>
           </a:bodyPr>
           <a:lstStyle/>
           <a:p>
             <a:pPr>
               <a:spcAft>
-                <a:spcPts val="1000"/>
-              </a:spcAft>
-              <a:defRPr sz="1700" b="1">
+                <a:spcPts val="800"/>
+              </a:spcAft>
+              <a:defRPr sz="1550" b="1">
                 <a:solidFill>
                   <a:srgbClr val="FF0033"/>
                 </a:solidFill>
               </a:defRPr>
             </a:pPr>
             <a:r>
-              <a:t>Responsive Breakpoints &amp; UX Architecture</a:t>
-            </a:r>
-          </a:p>
-          <a:p>
-            <a:pPr>
-              <a:spcAft>
-                <a:spcPts val="800"/>
-              </a:spcAft>
-            </a:pPr>
-            <a:r>
-              <a:rPr b="1" sz="1500">
+              <a:t>Google Cloud Integration</a:t>
+            </a:r>
+          </a:p>
+          <a:p>
+            <a:pPr>
+              <a:spcAft>
+                <a:spcPts val="600"/>
+              </a:spcAft>
+            </a:pPr>
+            <a:r>
+              <a:rPr b="1" sz="1200">
                 <a:solidFill>
                   <a:srgbClr val="FF0033"/>
                 </a:solidFill>
@@ -3805,30 +3850,30 @@
               <a:t>• </a:t>
             </a:r>
             <a:r>
-              <a:rPr b="1" sz="1400">
-                <a:solidFill>
-                  <a:srgbClr val="FFFFFF"/>
-                </a:solidFill>
-              </a:rPr>
-              <a:t>Desktop (&gt;1150px): </a:t>
-            </a:r>
-            <a:r>
-              <a:rPr sz="1400">
+              <a:rPr b="1" sz="1200">
+                <a:solidFill>
+                  <a:srgbClr val="FFFFFF"/>
+                </a:solidFill>
+              </a:rPr>
+              <a:t>API v3 Endpoints: </a:t>
+            </a:r>
+            <a:r>
+              <a:rPr sz="1200">
                 <a:solidFill>
                   <a:srgbClr val="CDD2DC"/>
                 </a:solidFill>
               </a:rPr>
-              <a:t>4-column video feed, collapsible full sidebar, dual-column Watch page with sidebar queue.</a:t>
-            </a:r>
-          </a:p>
-          <a:p>
-            <a:pPr>
-              <a:spcAft>
-                <a:spcPts val="800"/>
-              </a:spcAft>
-            </a:pPr>
-            <a:r>
-              <a:rPr b="1" sz="1500">
+              <a:t>Connects to https://www.googleapis.com/youtube/v3/search and /videos endpoints.</a:t>
+            </a:r>
+          </a:p>
+          <a:p>
+            <a:pPr>
+              <a:spcAft>
+                <a:spcPts val="600"/>
+              </a:spcAft>
+            </a:pPr>
+            <a:r>
+              <a:rPr b="1" sz="1200">
                 <a:solidFill>
                   <a:srgbClr val="FF0033"/>
                 </a:solidFill>
@@ -3836,30 +3881,30 @@
               <a:t>• </a:t>
             </a:r>
             <a:r>
-              <a:rPr b="1" sz="1400">
-                <a:solidFill>
-                  <a:srgbClr val="FFFFFF"/>
-                </a:solidFill>
-              </a:rPr>
-              <a:t>Tablet (768px - 1150px): </a:t>
-            </a:r>
-            <a:r>
-              <a:rPr sz="1400">
+              <a:rPr b="1" sz="1200">
+                <a:solidFill>
+                  <a:srgbClr val="FFFFFF"/>
+                </a:solidFill>
+              </a:rPr>
+              <a:t>Live Metadata Fetching: </a:t>
+            </a:r>
+            <a:r>
+              <a:rPr sz="1200">
                 <a:solidFill>
                   <a:srgbClr val="CDD2DC"/>
                 </a:solidFill>
               </a:rPr>
-              <a:t>2-3 column fluid grid, compact icon sidebar, stacked Watch page layout.</a:t>
-            </a:r>
-          </a:p>
-          <a:p>
-            <a:pPr>
-              <a:spcAft>
-                <a:spcPts val="800"/>
-              </a:spcAft>
-            </a:pPr>
-            <a:r>
-              <a:rPr b="1" sz="1500">
+              <a:t>Fetches real video IDs, durations (PT15M33S parsed), view statistics, and channel art.</a:t>
+            </a:r>
+          </a:p>
+          <a:p>
+            <a:pPr>
+              <a:spcAft>
+                <a:spcPts val="600"/>
+              </a:spcAft>
+            </a:pPr>
+            <a:r>
+              <a:rPr b="1" sz="1200">
                 <a:solidFill>
                   <a:srgbClr val="FF0033"/>
                 </a:solidFill>
@@ -3867,113 +3912,20 @@
               <a:t>• </a:t>
             </a:r>
             <a:r>
-              <a:rPr b="1" sz="1400">
-                <a:solidFill>
-                  <a:srgbClr val="FFFFFF"/>
-                </a:solidFill>
-              </a:rPr>
-              <a:t>Mobile (&lt;480px): </a:t>
-            </a:r>
-            <a:r>
-              <a:rPr sz="1400">
+              <a:rPr b="1" sz="1200">
+                <a:solidFill>
+                  <a:srgbClr val="FFFFFF"/>
+                </a:solidFill>
+              </a:rPr>
+              <a:t>Dynamic Search Topics: </a:t>
+            </a:r>
+            <a:r>
+              <a:rPr sz="1200">
                 <a:solidFill>
                   <a:srgbClr val="CDD2DC"/>
                 </a:solidFill>
               </a:rPr>
-              <a:t>Single column full-bleed cards, bottom navigation parity, full-width video player.</a:t>
-            </a:r>
-          </a:p>
-          <a:p>
-            <a:pPr>
-              <a:spcAft>
-                <a:spcPts val="800"/>
-              </a:spcAft>
-            </a:pPr>
-            <a:r>
-              <a:rPr b="1" sz="1500">
-                <a:solidFill>
-                  <a:srgbClr val="FF0033"/>
-                </a:solidFill>
-              </a:rPr>
-              <a:t>• </a:t>
-            </a:r>
-            <a:r>
-              <a:rPr b="1" sz="1400">
-                <a:solidFill>
-                  <a:srgbClr val="FFFFFF"/>
-                </a:solidFill>
-              </a:rPr>
-              <a:t>Live Search Autocomplete: </a:t>
-            </a:r>
-            <a:r>
-              <a:rPr sz="1400">
-                <a:solidFill>
-                  <a:srgbClr val="CDD2DC"/>
-                </a:solidFill>
-              </a:rPr>
-              <a:t>Instant substring matching with floating dropdown and direct video routing.</a:t>
-            </a:r>
-          </a:p>
-          <a:p>
-            <a:pPr>
-              <a:spcAft>
-                <a:spcPts val="800"/>
-              </a:spcAft>
-            </a:pPr>
-            <a:r>
-              <a:rPr b="1" sz="1500">
-                <a:solidFill>
-                  <a:srgbClr val="FF0033"/>
-                </a:solidFill>
-              </a:rPr>
-              <a:t>• </a:t>
-            </a:r>
-            <a:r>
-              <a:rPr b="1" sz="1400">
-                <a:solidFill>
-                  <a:srgbClr val="FFFFFF"/>
-                </a:solidFill>
-              </a:rPr>
-              <a:t>Native Voice Search: </a:t>
-            </a:r>
-            <a:r>
-              <a:rPr sz="1400">
-                <a:solidFill>
-                  <a:srgbClr val="CDD2DC"/>
-                </a:solidFill>
-              </a:rPr>
-              <a:t>Web Speech API microphone integration converting voice input directly to search queries.</a:t>
-            </a:r>
-          </a:p>
-          <a:p>
-            <a:pPr>
-              <a:spcAft>
-                <a:spcPts val="800"/>
-              </a:spcAft>
-            </a:pPr>
-            <a:r>
-              <a:rPr b="1" sz="1500">
-                <a:solidFill>
-                  <a:srgbClr val="FF0033"/>
-                </a:solidFill>
-              </a:rPr>
-              <a:t>• </a:t>
-            </a:r>
-            <a:r>
-              <a:rPr b="1" sz="1400">
-                <a:solidFill>
-                  <a:srgbClr val="FFFFFF"/>
-                </a:solidFill>
-              </a:rPr>
-              <a:t>Shorts Feed Scroll-Snap: </a:t>
-            </a:r>
-            <a:r>
-              <a:rPr sz="1400">
-                <a:solidFill>
-                  <a:srgbClr val="CDD2DC"/>
-                </a:solidFill>
-              </a:rPr>
-              <a:t>CSS scroll-snap-type: y mandatory for smooth vertical reel browsing.</a:t>
+              <a:t>Allows fetching custom live topics (e.g., 'React 19', 'Latent', 'Gaming') on demand.</a:t>
             </a:r>
           </a:p>
         </p:txBody>
@@ -3986,8 +3938,8 @@
         </p:nvSpPr>
         <p:spPr>
           <a:xfrm>
-            <a:off x="6949440" y="1371600"/>
-            <a:ext cx="4480560" cy="4663440"/>
+            <a:off x="4389120" y="1371600"/>
+            <a:ext cx="3383280" cy="4754880"/>
           </a:xfrm>
           <a:prstGeom prst="roundRect">
             <a:avLst/>
@@ -3995,7 +3947,7 @@
           <a:solidFill>
             <a:srgbClr val="161922"/>
           </a:solidFill>
-          <a:ln w="17780">
+          <a:ln w="16510">
             <a:solidFill>
               <a:srgbClr val="2E3445"/>
             </a:solidFill>
@@ -4023,76 +3975,309 @@
           </a:p>
         </p:txBody>
       </p:sp>
-      <p:pic>
-        <p:nvPicPr>
-          <p:cNvPr id="10" name="Picture 9" descr="ui_search_clean.png"/>
-          <p:cNvPicPr>
-            <a:picLocks noChangeAspect="1"/>
-          </p:cNvPicPr>
-          <p:nvPr/>
-        </p:nvPicPr>
-        <p:blipFill>
-          <a:blip r:embed="rId2"/>
-          <a:stretch>
-            <a:fillRect/>
-          </a:stretch>
-        </p:blipFill>
-        <p:spPr>
-          <a:xfrm>
-            <a:off x="7178040" y="1645920"/>
-            <a:ext cx="4023360" cy="3760967"/>
+      <p:sp>
+        <p:nvSpPr>
+          <p:cNvPr id="10" name="TextBox 9"/>
+          <p:cNvSpPr txBox="1"/>
+          <p:nvPr/>
+        </p:nvSpPr>
+        <p:spPr>
+          <a:xfrm>
+            <a:off x="4572000" y="1517904"/>
+            <a:ext cx="3017520" cy="4462272"/>
           </a:xfrm>
           <a:prstGeom prst="rect">
             <a:avLst/>
           </a:prstGeom>
-        </p:spPr>
-      </p:pic>
-      <p:sp>
-        <p:nvSpPr>
-          <p:cNvPr id="11" name="TextBox 10"/>
-          <p:cNvSpPr txBox="1"/>
-          <p:nvPr/>
-        </p:nvSpPr>
-        <p:spPr>
-          <a:xfrm>
-            <a:off x="7178040" y="4114800"/>
-            <a:ext cx="4023360" cy="1645920"/>
-          </a:xfrm>
-          <a:prstGeom prst="rect">
-            <a:avLst/>
-          </a:prstGeom>
           <a:noFill/>
         </p:spPr>
         <p:txBody>
-          <a:bodyPr wrap="square">
+          <a:bodyPr wrap="square" tIns="0" bIns="0" lIns="0" rIns="0">
             <a:spAutoFit/>
           </a:bodyPr>
           <a:lstStyle/>
           <a:p>
             <a:pPr>
-              <a:defRPr sz="1500" b="1">
+              <a:spcAft>
+                <a:spcPts val="800"/>
+              </a:spcAft>
+              <a:defRPr sz="1550" b="1">
                 <a:solidFill>
                   <a:srgbClr val="3EA6FF"/>
                 </a:solidFill>
               </a:defRPr>
             </a:pPr>
             <a:r>
-              <a:t>Live Search &amp; Suggestion Overlay</a:t>
-            </a:r>
-          </a:p>
-          <a:p>
-            <a:pPr>
-              <a:spcBef>
-                <a:spcPts val="400"/>
-              </a:spcBef>
-              <a:defRPr sz="1250">
+              <a:t>Resilient Curated Fallback</a:t>
+            </a:r>
+          </a:p>
+          <a:p>
+            <a:pPr>
+              <a:spcAft>
+                <a:spcPts val="600"/>
+              </a:spcAft>
+            </a:pPr>
+            <a:r>
+              <a:rPr b="1" sz="1200">
+                <a:solidFill>
+                  <a:srgbClr val="3EA6FF"/>
+                </a:solidFill>
+              </a:rPr>
+              <a:t>• </a:t>
+            </a:r>
+            <a:r>
+              <a:rPr b="1" sz="1200">
+                <a:solidFill>
+                  <a:srgbClr val="FFFFFF"/>
+                </a:solidFill>
+              </a:rPr>
+              <a:t>Zero-Crash Guarantee: </a:t>
+            </a:r>
+            <a:r>
+              <a:rPr sz="1200">
                 <a:solidFill>
                   <a:srgbClr val="CDD2DC"/>
                 </a:solidFill>
+              </a:rPr>
+              <a:t>Prevents broken evaluations if Google's daily quota (10,000 units) is exhausted.</a:t>
+            </a:r>
+          </a:p>
+          <a:p>
+            <a:pPr>
+              <a:spcAft>
+                <a:spcPts val="600"/>
+              </a:spcAft>
+            </a:pPr>
+            <a:r>
+              <a:rPr b="1" sz="1200">
+                <a:solidFill>
+                  <a:srgbClr val="3EA6FF"/>
+                </a:solidFill>
+              </a:rPr>
+              <a:t>• </a:t>
+            </a:r>
+            <a:r>
+              <a:rPr b="1" sz="1200">
+                <a:solidFill>
+                  <a:srgbClr val="FFFFFF"/>
+                </a:solidFill>
+              </a:rPr>
+              <a:t>Instant Offline Mode: </a:t>
+            </a:r>
+            <a:r>
+              <a:rPr sz="1200">
+                <a:solidFill>
+                  <a:srgbClr val="CDD2DC"/>
+                </a:solidFill>
+              </a:rPr>
+              <a:t>Gracefully falls back to high-quality local curated dataset if no API key is supplied.</a:t>
+            </a:r>
+          </a:p>
+          <a:p>
+            <a:pPr>
+              <a:spcAft>
+                <a:spcPts val="600"/>
+              </a:spcAft>
+            </a:pPr>
+            <a:r>
+              <a:rPr b="1" sz="1200">
+                <a:solidFill>
+                  <a:srgbClr val="3EA6FF"/>
+                </a:solidFill>
+              </a:rPr>
+              <a:t>• </a:t>
+            </a:r>
+            <a:r>
+              <a:rPr b="1" sz="1200">
+                <a:solidFill>
+                  <a:srgbClr val="FFFFFF"/>
+                </a:solidFill>
+              </a:rPr>
+              <a:t>Deterministic Viva Demo: </a:t>
+            </a:r>
+            <a:r>
+              <a:rPr sz="1200">
+                <a:solidFill>
+                  <a:srgbClr val="CDD2DC"/>
+                </a:solidFill>
+              </a:rPr>
+              <a:t>Guarantees full functionality during live classroom evaluation without WiFi hiccups.</a:t>
+            </a:r>
+          </a:p>
+        </p:txBody>
+      </p:sp>
+      <p:sp>
+        <p:nvSpPr>
+          <p:cNvPr id="11" name="Rounded Rectangle 10"/>
+          <p:cNvSpPr/>
+          <p:nvPr/>
+        </p:nvSpPr>
+        <p:spPr>
+          <a:xfrm>
+            <a:off x="8046720" y="1371600"/>
+            <a:ext cx="3383280" cy="4754880"/>
+          </a:xfrm>
+          <a:prstGeom prst="roundRect">
+            <a:avLst/>
+          </a:prstGeom>
+          <a:solidFill>
+            <a:srgbClr val="161922"/>
+          </a:solidFill>
+          <a:ln w="16510">
+            <a:solidFill>
+              <a:srgbClr val="2E3445"/>
+            </a:solidFill>
+          </a:ln>
+        </p:spPr>
+        <p:style>
+          <a:lnRef idx="1">
+            <a:schemeClr val="accent1"/>
+          </a:lnRef>
+          <a:fillRef idx="3">
+            <a:schemeClr val="accent1"/>
+          </a:fillRef>
+          <a:effectRef idx="2">
+            <a:schemeClr val="accent1"/>
+          </a:effectRef>
+          <a:fontRef idx="minor">
+            <a:schemeClr val="lt1"/>
+          </a:fontRef>
+        </p:style>
+        <p:txBody>
+          <a:bodyPr rtlCol="0" anchor="ctr"/>
+          <a:lstStyle/>
+          <a:p>
+            <a:pPr algn="ctr"/>
+          </a:p>
+        </p:txBody>
+      </p:sp>
+      <p:sp>
+        <p:nvSpPr>
+          <p:cNvPr id="12" name="TextBox 11"/>
+          <p:cNvSpPr txBox="1"/>
+          <p:nvPr/>
+        </p:nvSpPr>
+        <p:spPr>
+          <a:xfrm>
+            <a:off x="8229600" y="1517904"/>
+            <a:ext cx="3017520" cy="4462272"/>
+          </a:xfrm>
+          <a:prstGeom prst="rect">
+            <a:avLst/>
+          </a:prstGeom>
+          <a:noFill/>
+        </p:spPr>
+        <p:txBody>
+          <a:bodyPr wrap="square" tIns="0" bIns="0" lIns="0" rIns="0">
+            <a:spAutoFit/>
+          </a:bodyPr>
+          <a:lstStyle/>
+          <a:p>
+            <a:pPr>
+              <a:spcAft>
+                <a:spcPts val="800"/>
+              </a:spcAft>
+              <a:defRPr sz="1550" b="1">
+                <a:solidFill>
+                  <a:srgbClr val="A855F7"/>
+                </a:solidFill>
               </a:defRPr>
             </a:pPr>
             <a:r>
-              <a:t>Features real-time autocomplete suggestion cards with creator subtitles, clear button, and voice recognition pulse indicator.</a:t>
+              <a:t>Live Demo Controls in Settings</a:t>
+            </a:r>
+          </a:p>
+          <a:p>
+            <a:pPr>
+              <a:spcAft>
+                <a:spcPts val="600"/>
+              </a:spcAft>
+            </a:pPr>
+            <a:r>
+              <a:rPr b="1" sz="1200">
+                <a:solidFill>
+                  <a:srgbClr val="A855F7"/>
+                </a:solidFill>
+              </a:rPr>
+              <a:t>• </a:t>
+            </a:r>
+            <a:r>
+              <a:rPr b="1" sz="1200">
+                <a:solidFill>
+                  <a:srgbClr val="FFFFFF"/>
+                </a:solidFill>
+              </a:rPr>
+              <a:t>Settings Integration: </a:t>
+            </a:r>
+            <a:r>
+              <a:rPr sz="1200">
+                <a:solidFill>
+                  <a:srgbClr val="CDD2DC"/>
+                </a:solidFill>
+              </a:rPr>
+              <a:t>Dedicated YouTube API card in SettingsModal with API Key input and save state.</a:t>
+            </a:r>
+          </a:p>
+          <a:p>
+            <a:pPr>
+              <a:spcAft>
+                <a:spcPts val="600"/>
+              </a:spcAft>
+            </a:pPr>
+            <a:r>
+              <a:rPr b="1" sz="1200">
+                <a:solidFill>
+                  <a:srgbClr val="A855F7"/>
+                </a:solidFill>
+              </a:rPr>
+              <a:t>• </a:t>
+            </a:r>
+            <a:r>
+              <a:rPr b="1" sz="1200">
+                <a:solidFill>
+                  <a:srgbClr val="FFFFFF"/>
+                </a:solidFill>
+              </a:rPr>
+              <a:t>Connection Test Button: </a:t>
+            </a:r>
+            <a:r>
+              <a:rPr sz="1200">
+                <a:solidFill>
+                  <a:srgbClr val="CDD2DC"/>
+                </a:solidFill>
+              </a:rPr>
+              <a:t>'Fetch Live' button triggers immediate asynchronous API query with toast alerts.</a:t>
+            </a:r>
+          </a:p>
+          <a:p>
+            <a:pPr>
+              <a:spcAft>
+                <a:spcPts val="600"/>
+              </a:spcAft>
+            </a:pPr>
+            <a:r>
+              <a:rPr b="1" sz="1200">
+                <a:solidFill>
+                  <a:srgbClr val="A855F7"/>
+                </a:solidFill>
+              </a:rPr>
+              <a:t>• </a:t>
+            </a:r>
+            <a:r>
+              <a:rPr b="1" sz="1200">
+                <a:solidFill>
+                  <a:srgbClr val="FFFFFF"/>
+                </a:solidFill>
+              </a:rPr>
+              <a:t>Live Badge Indicator: </a:t>
+            </a:r>
+            <a:r>
+              <a:rPr sz="1200">
+                <a:solidFill>
+                  <a:srgbClr val="CDD2DC"/>
+                </a:solidFill>
+              </a:rPr>
+              <a:t>Displays green '● Live API Ready' or gray '○ Curated Mode' status.</a:t>
             </a:r>
           </a:p>
         </p:txBody>
@@ -4227,7 +4412,7 @@
           <a:lstStyle/>
           <a:p>
             <a:pPr>
-              <a:defRPr sz="1200" b="1">
+              <a:defRPr sz="1150" b="1">
                 <a:solidFill>
                   <a:srgbClr val="3EA6FF"/>
                 </a:solidFill>
@@ -4248,7 +4433,42 @@
         <p:spPr>
           <a:xfrm>
             <a:off x="731520" y="621792"/>
-            <a:ext cx="10728655" cy="640080"/>
+            <a:ext cx="10728655" cy="594360"/>
+          </a:xfrm>
+          <a:prstGeom prst="rect">
+            <a:avLst/>
+          </a:prstGeom>
+          <a:noFill/>
+        </p:spPr>
+        <p:txBody>
+          <a:bodyPr wrap="square">
+            <a:spAutoFit/>
+          </a:bodyPr>
+          <a:lstStyle/>
+          <a:p>
+            <a:pPr>
+              <a:defRPr sz="2300" b="1">
+                <a:solidFill>
+                  <a:srgbClr val="FFFFFF"/>
+                </a:solidFill>
+              </a:defRPr>
+            </a:pPr>
+            <a:r>
+              <a:t>Creator Ecosystem &amp; Subscribed Channels Grid</a:t>
+            </a:r>
+          </a:p>
+        </p:txBody>
+      </p:sp>
+      <p:sp>
+        <p:nvSpPr>
+          <p:cNvPr id="6" name="TextBox 5"/>
+          <p:cNvSpPr txBox="1"/>
+          <p:nvPr/>
+        </p:nvSpPr>
+        <p:spPr>
+          <a:xfrm>
+            <a:off x="731520" y="6327648"/>
+            <a:ext cx="10728655" cy="274320"/>
           </a:xfrm>
           <a:prstGeom prst="rect">
             <a:avLst/>
@@ -4262,49 +4482,14 @@
           <a:lstStyle/>
           <a:p>
             <a:pPr>
-              <a:defRPr sz="2500" b="1">
-                <a:solidFill>
-                  <a:srgbClr val="FFFFFF"/>
+              <a:defRPr sz="1000">
+                <a:solidFill>
+                  <a:srgbClr val="8C94A5"/>
                 </a:solidFill>
               </a:defRPr>
             </a:pPr>
             <a:r>
-              <a:t>Technical Roadmap &amp; Scope for Phase 3 (MERN Stack)</a:t>
-            </a:r>
-          </a:p>
-        </p:txBody>
-      </p:sp>
-      <p:sp>
-        <p:nvSpPr>
-          <p:cNvPr id="6" name="TextBox 5"/>
-          <p:cNvSpPr txBox="1"/>
-          <p:nvPr/>
-        </p:nvSpPr>
-        <p:spPr>
-          <a:xfrm>
-            <a:off x="731520" y="6309360"/>
-            <a:ext cx="10728655" cy="320040"/>
-          </a:xfrm>
-          <a:prstGeom prst="rect">
-            <a:avLst/>
-          </a:prstGeom>
-          <a:noFill/>
-        </p:spPr>
-        <p:txBody>
-          <a:bodyPr wrap="none">
-            <a:spAutoFit/>
-          </a:bodyPr>
-          <a:lstStyle/>
-          <a:p>
-            <a:pPr>
-              <a:defRPr sz="1050">
-                <a:solidFill>
-                  <a:srgbClr val="828A9B"/>
-                </a:solidFill>
-              </a:defRPr>
-            </a:pPr>
-            <a:r>
-              <a:t>PheW TuBe: Video Streaming Platform (G15-PID-17)  |  Evaluation-II  |  Page 11</a:t>
+              <a:t>PheW TuBe: Video Streaming Platform (G15-PID-17)  |  Chitkara University FEE-II  |  Page 11</a:t>
             </a:r>
           </a:p>
         </p:txBody>
@@ -4318,7 +4503,7 @@
         <p:spPr>
           <a:xfrm>
             <a:off x="731520" y="1371600"/>
-            <a:ext cx="3383280" cy="4663440"/>
+            <a:ext cx="3383280" cy="3108960"/>
           </a:xfrm>
           <a:prstGeom prst="roundRect">
             <a:avLst/>
@@ -4326,7 +4511,7 @@
           <a:solidFill>
             <a:srgbClr val="161922"/>
           </a:solidFill>
-          <a:ln w="17780">
+          <a:ln w="16510">
             <a:solidFill>
               <a:srgbClr val="2E3445"/>
             </a:solidFill>
@@ -4362,8 +4547,8 @@
         </p:nvSpPr>
         <p:spPr>
           <a:xfrm>
-            <a:off x="932688" y="1536192"/>
-            <a:ext cx="2980944" cy="4334255"/>
+            <a:off x="914400" y="1517904"/>
+            <a:ext cx="3017520" cy="2816352"/>
           </a:xfrm>
           <a:prstGeom prst="rect">
             <a:avLst/>
@@ -4371,33 +4556,33 @@
           <a:noFill/>
         </p:spPr>
         <p:txBody>
-          <a:bodyPr wrap="square">
+          <a:bodyPr wrap="square" tIns="0" bIns="0" lIns="0" rIns="0">
             <a:spAutoFit/>
           </a:bodyPr>
           <a:lstStyle/>
           <a:p>
             <a:pPr>
               <a:spcAft>
-                <a:spcPts val="1000"/>
-              </a:spcAft>
-              <a:defRPr sz="1700" b="1">
+                <a:spcPts val="800"/>
+              </a:spcAft>
+              <a:defRPr sz="1550" b="1">
                 <a:solidFill>
                   <a:srgbClr val="FF0033"/>
                 </a:solidFill>
               </a:defRPr>
             </a:pPr>
             <a:r>
-              <a:t>Phase 1: Foundation (Done)</a:t>
-            </a:r>
-          </a:p>
-          <a:p>
-            <a:pPr>
-              <a:spcAft>
-                <a:spcPts val="800"/>
-              </a:spcAft>
-            </a:pPr>
-            <a:r>
-              <a:rPr b="1" sz="1500">
+              <a:t>Entertainment &amp; Music</a:t>
+            </a:r>
+          </a:p>
+          <a:p>
+            <a:pPr>
+              <a:spcAft>
+                <a:spcPts val="600"/>
+              </a:spcAft>
+            </a:pPr>
+            <a:r>
+              <a:rPr b="1" sz="1200">
                 <a:solidFill>
                   <a:srgbClr val="FF0033"/>
                 </a:solidFill>
@@ -4405,30 +4590,30 @@
               <a:t>• </a:t>
             </a:r>
             <a:r>
-              <a:rPr b="1" sz="1400">
-                <a:solidFill>
-                  <a:srgbClr val="FFFFFF"/>
-                </a:solidFill>
-              </a:rPr>
-              <a:t>Complete UI Layout: </a:t>
-            </a:r>
-            <a:r>
-              <a:rPr sz="1400">
+              <a:rPr b="1" sz="1200">
+                <a:solidFill>
+                  <a:srgbClr val="FFFFFF"/>
+                </a:solidFill>
+              </a:rPr>
+              <a:t>MrBeast: </a:t>
+            </a:r>
+            <a:r>
+              <a:rPr sz="1200">
                 <a:solidFill>
                   <a:srgbClr val="CDD2DC"/>
                 </a:solidFill>
               </a:rPr>
-              <a:t>Dark obsidian theme layout, YouTube visual branding, and icon system.</a:t>
-            </a:r>
-          </a:p>
-          <a:p>
-            <a:pPr>
-              <a:spcAft>
-                <a:spcPts val="800"/>
-              </a:spcAft>
-            </a:pPr>
-            <a:r>
-              <a:rPr b="1" sz="1500">
+              <a:t>522M subscribers — World's #1 creator; features 7-Days Stranded challenges.</a:t>
+            </a:r>
+          </a:p>
+          <a:p>
+            <a:pPr>
+              <a:spcAft>
+                <a:spcPts val="600"/>
+              </a:spcAft>
+            </a:pPr>
+            <a:r>
+              <a:rPr b="1" sz="1200">
                 <a:solidFill>
                   <a:srgbClr val="FF0033"/>
                 </a:solidFill>
@@ -4436,30 +4621,30 @@
               <a:t>• </a:t>
             </a:r>
             <a:r>
-              <a:rPr b="1" sz="1400">
-                <a:solidFill>
-                  <a:srgbClr val="FFFFFF"/>
-                </a:solidFill>
-              </a:rPr>
-              <a:t>Video &amp; Shorts Grid: </a:t>
-            </a:r>
-            <a:r>
-              <a:rPr sz="1400">
+              <a:rPr b="1" sz="1200">
+                <a:solidFill>
+                  <a:srgbClr val="FFFFFF"/>
+                </a:solidFill>
+              </a:rPr>
+              <a:t>T-Series: </a:t>
+            </a:r>
+            <a:r>
+              <a:rPr sz="1200">
                 <a:solidFill>
                   <a:srgbClr val="CDD2DC"/>
                 </a:solidFill>
               </a:rPr>
-              <a:t>Multi-category filtering pills and responsive card layout.</a:t>
-            </a:r>
-          </a:p>
-          <a:p>
-            <a:pPr>
-              <a:spcAft>
-                <a:spcPts val="800"/>
-              </a:spcAft>
-            </a:pPr>
-            <a:r>
-              <a:rPr b="1" sz="1500">
+              <a:t>316M subscribers — Leading Indian music label with viral movie soundtracks.</a:t>
+            </a:r>
+          </a:p>
+          <a:p>
+            <a:pPr>
+              <a:spcAft>
+                <a:spcPts val="600"/>
+              </a:spcAft>
+            </a:pPr>
+            <a:r>
+              <a:rPr b="1" sz="1200">
                 <a:solidFill>
                   <a:srgbClr val="FF0033"/>
                 </a:solidFill>
@@ -4467,20 +4652,20 @@
               <a:t>• </a:t>
             </a:r>
             <a:r>
-              <a:rPr b="1" sz="1400">
-                <a:solidFill>
-                  <a:srgbClr val="FFFFFF"/>
-                </a:solidFill>
-              </a:rPr>
-              <a:t>Basic Navigation: </a:t>
-            </a:r>
-            <a:r>
-              <a:rPr sz="1400">
+              <a:rPr b="1" sz="1200">
+                <a:solidFill>
+                  <a:srgbClr val="FFFFFF"/>
+                </a:solidFill>
+              </a:rPr>
+              <a:t>Techno Gamerz: </a:t>
+            </a:r>
+            <a:r>
+              <a:rPr sz="1200">
                 <a:solidFill>
                   <a:srgbClr val="CDD2DC"/>
                 </a:solidFill>
               </a:rPr>
-              <a:t>Sidebar navigation tabs and static search query input.</a:t>
+              <a:t>53.4M subscribers — India's gaming icon; features GTA 5 and Minecraft series.</a:t>
             </a:r>
           </a:p>
         </p:txBody>
@@ -4494,7 +4679,7 @@
         <p:spPr>
           <a:xfrm>
             <a:off x="4389120" y="1371600"/>
-            <a:ext cx="3383280" cy="4663440"/>
+            <a:ext cx="3383280" cy="3108960"/>
           </a:xfrm>
           <a:prstGeom prst="roundRect">
             <a:avLst/>
@@ -4502,7 +4687,7 @@
           <a:solidFill>
             <a:srgbClr val="161922"/>
           </a:solidFill>
-          <a:ln w="17780">
+          <a:ln w="16510">
             <a:solidFill>
               <a:srgbClr val="2E3445"/>
             </a:solidFill>
@@ -4538,8 +4723,8 @@
         </p:nvSpPr>
         <p:spPr>
           <a:xfrm>
-            <a:off x="4590288" y="1536192"/>
-            <a:ext cx="2980944" cy="4334255"/>
+            <a:off x="4572000" y="1517904"/>
+            <a:ext cx="3017520" cy="2816352"/>
           </a:xfrm>
           <a:prstGeom prst="rect">
             <a:avLst/>
@@ -4547,33 +4732,33 @@
           <a:noFill/>
         </p:spPr>
         <p:txBody>
-          <a:bodyPr wrap="square">
+          <a:bodyPr wrap="square" tIns="0" bIns="0" lIns="0" rIns="0">
             <a:spAutoFit/>
           </a:bodyPr>
           <a:lstStyle/>
           <a:p>
             <a:pPr>
               <a:spcAft>
-                <a:spcPts val="1000"/>
-              </a:spcAft>
-              <a:defRPr sz="1700" b="1">
+                <a:spcPts val="800"/>
+              </a:spcAft>
+              <a:defRPr sz="1550" b="1">
                 <a:solidFill>
                   <a:srgbClr val="3EA6FF"/>
                 </a:solidFill>
               </a:defRPr>
             </a:pPr>
             <a:r>
-              <a:t>Phase 2: SPA (Current)</a:t>
-            </a:r>
-          </a:p>
-          <a:p>
-            <a:pPr>
-              <a:spcAft>
-                <a:spcPts val="800"/>
-              </a:spcAft>
-            </a:pPr>
-            <a:r>
-              <a:rPr b="1" sz="1500">
+              <a:t>Comedy &amp; Specialized Gaming</a:t>
+            </a:r>
+          </a:p>
+          <a:p>
+            <a:pPr>
+              <a:spcAft>
+                <a:spcPts val="600"/>
+              </a:spcAft>
+            </a:pPr>
+            <a:r>
+              <a:rPr b="1" sz="1200">
                 <a:solidFill>
                   <a:srgbClr val="3EA6FF"/>
                 </a:solidFill>
@@ -4581,30 +4766,30 @@
               <a:t>• </a:t>
             </a:r>
             <a:r>
-              <a:rPr b="1" sz="1400">
-                <a:solidFill>
-                  <a:srgbClr val="FFFFFF"/>
-                </a:solidFill>
-              </a:rPr>
-              <a:t>Dynamic Route: </a:t>
-            </a:r>
-            <a:r>
-              <a:rPr sz="1400">
+              <a:rPr b="1" sz="1200">
+                <a:solidFill>
+                  <a:srgbClr val="FFFFFF"/>
+                </a:solidFill>
+              </a:rPr>
+              <a:t>Samay Raina: </a:t>
+            </a:r>
+            <a:r>
+              <a:rPr sz="1200">
                 <a:solidFill>
                   <a:srgbClr val="CDD2DC"/>
                 </a:solidFill>
               </a:rPr>
-              <a:t>/watch/:id via useParams with embedded 16:9 streaming.</a:t>
-            </a:r>
-          </a:p>
-          <a:p>
-            <a:pPr>
-              <a:spcAft>
-                <a:spcPts val="800"/>
-              </a:spcAft>
-            </a:pPr>
-            <a:r>
-              <a:rPr b="1" sz="1500">
+              <a:t>7.65M subscribers — Standup comedy &amp; India's Got Latent episodes.</a:t>
+            </a:r>
+          </a:p>
+          <a:p>
+            <a:pPr>
+              <a:spcAft>
+                <a:spcPts val="600"/>
+              </a:spcAft>
+            </a:pPr>
+            <a:r>
+              <a:rPr b="1" sz="1200">
                 <a:solidFill>
                   <a:srgbClr val="3EA6FF"/>
                 </a:solidFill>
@@ -4612,30 +4797,30 @@
               <a:t>• </a:t>
             </a:r>
             <a:r>
-              <a:rPr b="1" sz="1400">
-                <a:solidFill>
-                  <a:srgbClr val="FFFFFF"/>
-                </a:solidFill>
-              </a:rPr>
-              <a:t>Interactive Comments: </a:t>
-            </a:r>
-            <a:r>
-              <a:rPr sz="1400">
+              <a:rPr b="1" sz="1200">
+                <a:solidFill>
+                  <a:srgbClr val="FFFFFF"/>
+                </a:solidFill>
+              </a:rPr>
+              <a:t>Wemmbu: </a:t>
+            </a:r>
+            <a:r>
+              <a:rPr sz="1200">
                 <a:solidFill>
                   <a:srgbClr val="CDD2DC"/>
                 </a:solidFill>
               </a:rPr>
-              <a:t>DOM focus control via useRef and Top/Newest sorting.</a:t>
-            </a:r>
-          </a:p>
-          <a:p>
-            <a:pPr>
-              <a:spcAft>
-                <a:spcPts val="800"/>
-              </a:spcAft>
-            </a:pPr>
-            <a:r>
-              <a:rPr b="1" sz="1500">
+              <a:t>3.45M subscribers — Hardcore Minecraft survival and trap build walkthroughs.</a:t>
+            </a:r>
+          </a:p>
+          <a:p>
+            <a:pPr>
+              <a:spcAft>
+                <a:spcPts val="600"/>
+              </a:spcAft>
+            </a:pPr>
+            <a:r>
+              <a:rPr b="1" sz="1200">
                 <a:solidFill>
                   <a:srgbClr val="3EA6FF"/>
                 </a:solidFill>
@@ -4643,20 +4828,20 @@
               <a:t>• </a:t>
             </a:r>
             <a:r>
-              <a:rPr b="1" sz="1400">
-                <a:solidFill>
-                  <a:srgbClr val="FFFFFF"/>
-                </a:solidFill>
-              </a:rPr>
-              <a:t>State Bus &amp; Alerts: </a:t>
-            </a:r>
-            <a:r>
-              <a:rPr sz="1400">
+              <a:rPr b="1" sz="1200">
+                <a:solidFill>
+                  <a:srgbClr val="FFFFFF"/>
+                </a:solidFill>
+              </a:rPr>
+              <a:t>Nikhil Kamath: </a:t>
+            </a:r>
+            <a:r>
+              <a:rPr sz="1200">
                 <a:solidFill>
                   <a:srgbClr val="CDD2DC"/>
                 </a:solidFill>
               </a:rPr>
-              <a:t>Centralized Context API, LocalStorage sync, react-toastify, and Voice Search.</a:t>
+              <a:t>Flagship business &amp; startup podcast WTF with verified founders.</a:t>
             </a:r>
           </a:p>
         </p:txBody>
@@ -4670,7 +4855,7 @@
         <p:spPr>
           <a:xfrm>
             <a:off x="8046720" y="1371600"/>
-            <a:ext cx="3383280" cy="4663440"/>
+            <a:ext cx="3383280" cy="3108960"/>
           </a:xfrm>
           <a:prstGeom prst="roundRect">
             <a:avLst/>
@@ -4678,7 +4863,7 @@
           <a:solidFill>
             <a:srgbClr val="161922"/>
           </a:solidFill>
-          <a:ln w="17780">
+          <a:ln w="16510">
             <a:solidFill>
               <a:srgbClr val="2E3445"/>
             </a:solidFill>
@@ -4714,8 +4899,208 @@
         </p:nvSpPr>
         <p:spPr>
           <a:xfrm>
-            <a:off x="8247888" y="1536192"/>
-            <a:ext cx="2980944" cy="4334255"/>
+            <a:off x="8229600" y="1517904"/>
+            <a:ext cx="3017520" cy="2816352"/>
+          </a:xfrm>
+          <a:prstGeom prst="rect">
+            <a:avLst/>
+          </a:prstGeom>
+          <a:noFill/>
+        </p:spPr>
+        <p:txBody>
+          <a:bodyPr wrap="square" tIns="0" bIns="0" lIns="0" rIns="0">
+            <a:spAutoFit/>
+          </a:bodyPr>
+          <a:lstStyle/>
+          <a:p>
+            <a:pPr>
+              <a:spcAft>
+                <a:spcPts val="800"/>
+              </a:spcAft>
+              <a:defRPr sz="1550" b="1">
+                <a:solidFill>
+                  <a:srgbClr val="2BA640"/>
+                </a:solidFill>
+              </a:defRPr>
+            </a:pPr>
+            <a:r>
+              <a:t>Developer Education</a:t>
+            </a:r>
+          </a:p>
+          <a:p>
+            <a:pPr>
+              <a:spcAft>
+                <a:spcPts val="600"/>
+              </a:spcAft>
+            </a:pPr>
+            <a:r>
+              <a:rPr b="1" sz="1200">
+                <a:solidFill>
+                  <a:srgbClr val="2BA640"/>
+                </a:solidFill>
+              </a:rPr>
+              <a:t>• </a:t>
+            </a:r>
+            <a:r>
+              <a:rPr b="1" sz="1200">
+                <a:solidFill>
+                  <a:srgbClr val="FFFFFF"/>
+                </a:solidFill>
+              </a:rPr>
+              <a:t>freeCodeCamp.org: </a:t>
+            </a:r>
+            <a:r>
+              <a:rPr sz="1200">
+                <a:solidFill>
+                  <a:srgbClr val="CDD2DC"/>
+                </a:solidFill>
+              </a:rPr>
+              <a:t>12.0M subscribers — Comprehensive 10-Hour DSA masterclass.</a:t>
+            </a:r>
+          </a:p>
+          <a:p>
+            <a:pPr>
+              <a:spcAft>
+                <a:spcPts val="600"/>
+              </a:spcAft>
+            </a:pPr>
+            <a:r>
+              <a:rPr b="1" sz="1200">
+                <a:solidFill>
+                  <a:srgbClr val="2BA640"/>
+                </a:solidFill>
+              </a:rPr>
+              <a:t>• </a:t>
+            </a:r>
+            <a:r>
+              <a:rPr b="1" sz="1200">
+                <a:solidFill>
+                  <a:srgbClr val="FFFFFF"/>
+                </a:solidFill>
+              </a:rPr>
+              <a:t>Chai aur Code: </a:t>
+            </a:r>
+            <a:r>
+              <a:rPr sz="1200">
+                <a:solidFill>
+                  <a:srgbClr val="CDD2DC"/>
+                </a:solidFill>
+              </a:rPr>
+              <a:t>645K subscribers — Hindi developer education and React 19 series.</a:t>
+            </a:r>
+          </a:p>
+          <a:p>
+            <a:pPr>
+              <a:spcAft>
+                <a:spcPts val="600"/>
+              </a:spcAft>
+            </a:pPr>
+            <a:r>
+              <a:rPr b="1" sz="1200">
+                <a:solidFill>
+                  <a:srgbClr val="2BA640"/>
+                </a:solidFill>
+              </a:rPr>
+              <a:t>• </a:t>
+            </a:r>
+            <a:r>
+              <a:rPr b="1" sz="1200">
+                <a:solidFill>
+                  <a:srgbClr val="FFFFFF"/>
+                </a:solidFill>
+              </a:rPr>
+              <a:t>Verified Community: </a:t>
+            </a:r>
+            <a:r>
+              <a:rPr sz="1200">
+                <a:solidFill>
+                  <a:srgbClr val="CDD2DC"/>
+                </a:solidFill>
+              </a:rPr>
+              <a:t>All channels feature verified checkmarks and custom popular banners.</a:t>
+            </a:r>
+          </a:p>
+        </p:txBody>
+      </p:sp>
+      <p:sp>
+        <p:nvSpPr>
+          <p:cNvPr id="13" name="Rounded Rectangle 12"/>
+          <p:cNvSpPr/>
+          <p:nvPr/>
+        </p:nvSpPr>
+        <p:spPr>
+          <a:xfrm>
+            <a:off x="731520" y="4663440"/>
+            <a:ext cx="10728655" cy="1371600"/>
+          </a:xfrm>
+          <a:prstGeom prst="roundRect">
+            <a:avLst/>
+          </a:prstGeom>
+          <a:solidFill>
+            <a:srgbClr val="161922"/>
+          </a:solidFill>
+          <a:ln w="15240">
+            <a:solidFill>
+              <a:srgbClr val="2E3445"/>
+            </a:solidFill>
+          </a:ln>
+        </p:spPr>
+        <p:style>
+          <a:lnRef idx="1">
+            <a:schemeClr val="accent1"/>
+          </a:lnRef>
+          <a:fillRef idx="3">
+            <a:schemeClr val="accent1"/>
+          </a:fillRef>
+          <a:effectRef idx="2">
+            <a:schemeClr val="accent1"/>
+          </a:effectRef>
+          <a:fontRef idx="minor">
+            <a:schemeClr val="lt1"/>
+          </a:fontRef>
+        </p:style>
+        <p:txBody>
+          <a:bodyPr rtlCol="0" anchor="ctr"/>
+          <a:lstStyle/>
+          <a:p>
+            <a:pPr algn="ctr"/>
+          </a:p>
+        </p:txBody>
+      </p:sp>
+      <p:pic>
+        <p:nvPicPr>
+          <p:cNvPr id="14" name="Picture 13" descr="mrbeast_logo.png"/>
+          <p:cNvPicPr>
+            <a:picLocks noChangeAspect="1"/>
+          </p:cNvPicPr>
+          <p:nvPr/>
+        </p:nvPicPr>
+        <p:blipFill>
+          <a:blip r:embed="rId2"/>
+          <a:stretch>
+            <a:fillRect/>
+          </a:stretch>
+        </p:blipFill>
+        <p:spPr>
+          <a:xfrm>
+            <a:off x="1097280" y="4892040"/>
+            <a:ext cx="703385" cy="685800"/>
+          </a:xfrm>
+          <a:prstGeom prst="rect">
+            <a:avLst/>
+          </a:prstGeom>
+        </p:spPr>
+      </p:pic>
+      <p:sp>
+        <p:nvSpPr>
+          <p:cNvPr id="15" name="TextBox 14"/>
+          <p:cNvSpPr txBox="1"/>
+          <p:nvPr/>
+        </p:nvSpPr>
+        <p:spPr>
+          <a:xfrm>
+            <a:off x="1874519" y="4956048"/>
+            <a:ext cx="1920240" cy="548640"/>
           </a:xfrm>
           <a:prstGeom prst="rect">
             <a:avLst/>
@@ -4729,141 +5114,191 @@
           <a:lstStyle/>
           <a:p>
             <a:pPr>
-              <a:spcAft>
-                <a:spcPts val="1000"/>
-              </a:spcAft>
-              <a:defRPr sz="1700" b="1">
-                <a:solidFill>
-                  <a:srgbClr val="2BA640"/>
+              <a:defRPr sz="1150" b="1">
+                <a:solidFill>
+                  <a:srgbClr val="FFFFFF"/>
                 </a:solidFill>
               </a:defRPr>
             </a:pPr>
             <a:r>
-              <a:t>Phase 3: Full Stack (Roadmap)</a:t>
-            </a:r>
-          </a:p>
-          <a:p>
-            <a:pPr>
-              <a:spcAft>
-                <a:spcPts val="800"/>
-              </a:spcAft>
-            </a:pPr>
-            <a:r>
-              <a:rPr b="1" sz="1500">
-                <a:solidFill>
-                  <a:srgbClr val="2BA640"/>
-                </a:solidFill>
-              </a:rPr>
-              <a:t>• </a:t>
-            </a:r>
-            <a:r>
-              <a:rPr b="1" sz="1400">
-                <a:solidFill>
-                  <a:srgbClr val="FFFFFF"/>
-                </a:solidFill>
-              </a:rPr>
-              <a:t>Node.js &amp; Express API: </a:t>
-            </a:r>
-            <a:r>
-              <a:rPr sz="1400">
-                <a:solidFill>
-                  <a:srgbClr val="CDD2DC"/>
-                </a:solidFill>
-              </a:rPr>
-              <a:t>RESTful backend endpoints replacing mock JSON dataset.</a:t>
-            </a:r>
-          </a:p>
-          <a:p>
-            <a:pPr>
-              <a:spcAft>
-                <a:spcPts val="800"/>
-              </a:spcAft>
-            </a:pPr>
-            <a:r>
-              <a:rPr b="1" sz="1500">
-                <a:solidFill>
-                  <a:srgbClr val="2BA640"/>
-                </a:solidFill>
-              </a:rPr>
-              <a:t>• </a:t>
-            </a:r>
-            <a:r>
-              <a:rPr b="1" sz="1400">
-                <a:solidFill>
-                  <a:srgbClr val="FFFFFF"/>
-                </a:solidFill>
-              </a:rPr>
-              <a:t>MongoDB &amp; Mongoose: </a:t>
-            </a:r>
-            <a:r>
-              <a:rPr sz="1400">
-                <a:solidFill>
-                  <a:srgbClr val="CDD2DC"/>
-                </a:solidFill>
-              </a:rPr>
-              <a:t>Cloud database storing user profiles, videos, and comments.</a:t>
-            </a:r>
-          </a:p>
-          <a:p>
-            <a:pPr>
-              <a:spcAft>
-                <a:spcPts val="800"/>
-              </a:spcAft>
-            </a:pPr>
-            <a:r>
-              <a:rPr b="1" sz="1500">
-                <a:solidFill>
-                  <a:srgbClr val="2BA640"/>
-                </a:solidFill>
-              </a:rPr>
-              <a:t>• </a:t>
-            </a:r>
-            <a:r>
-              <a:rPr b="1" sz="1400">
-                <a:solidFill>
-                  <a:srgbClr val="FFFFFF"/>
-                </a:solidFill>
-              </a:rPr>
-              <a:t>JWT Authentication: </a:t>
-            </a:r>
-            <a:r>
-              <a:rPr sz="1400">
-                <a:solidFill>
-                  <a:srgbClr val="CDD2DC"/>
-                </a:solidFill>
-              </a:rPr>
-              <a:t>Server-verified authentication with encrypted user tokens.</a:t>
-            </a:r>
-          </a:p>
-          <a:p>
-            <a:pPr>
-              <a:spcAft>
-                <a:spcPts val="800"/>
-              </a:spcAft>
-            </a:pPr>
-            <a:r>
-              <a:rPr b="1" sz="1500">
-                <a:solidFill>
-                  <a:srgbClr val="2BA640"/>
-                </a:solidFill>
-              </a:rPr>
-              <a:t>• </a:t>
-            </a:r>
-            <a:r>
-              <a:rPr b="1" sz="1400">
-                <a:solidFill>
-                  <a:srgbClr val="FFFFFF"/>
-                </a:solidFill>
-              </a:rPr>
-              <a:t>Redux Toolkit: </a:t>
-            </a:r>
-            <a:r>
-              <a:rPr sz="1400">
-                <a:solidFill>
-                  <a:srgbClr val="CDD2DC"/>
-                </a:solidFill>
-              </a:rPr>
-              <a:t>Advanced cached state management and optimistic mutations.</a:t>
+              <a:t>MrBeast (522M)</a:t>
+            </a:r>
+          </a:p>
+        </p:txBody>
+      </p:sp>
+      <p:pic>
+        <p:nvPicPr>
+          <p:cNvPr id="16" name="Picture 15" descr="samay_raina.png"/>
+          <p:cNvPicPr>
+            <a:picLocks noChangeAspect="1"/>
+          </p:cNvPicPr>
+          <p:nvPr/>
+        </p:nvPicPr>
+        <p:blipFill>
+          <a:blip r:embed="rId3"/>
+          <a:stretch>
+            <a:fillRect/>
+          </a:stretch>
+        </p:blipFill>
+        <p:spPr>
+          <a:xfrm>
+            <a:off x="3840480" y="4892040"/>
+            <a:ext cx="685800" cy="685800"/>
+          </a:xfrm>
+          <a:prstGeom prst="rect">
+            <a:avLst/>
+          </a:prstGeom>
+        </p:spPr>
+      </p:pic>
+      <p:sp>
+        <p:nvSpPr>
+          <p:cNvPr id="17" name="TextBox 16"/>
+          <p:cNvSpPr txBox="1"/>
+          <p:nvPr/>
+        </p:nvSpPr>
+        <p:spPr>
+          <a:xfrm>
+            <a:off x="4617720" y="4956048"/>
+            <a:ext cx="1920240" cy="548640"/>
+          </a:xfrm>
+          <a:prstGeom prst="rect">
+            <a:avLst/>
+          </a:prstGeom>
+          <a:noFill/>
+        </p:spPr>
+        <p:txBody>
+          <a:bodyPr wrap="square">
+            <a:spAutoFit/>
+          </a:bodyPr>
+          <a:lstStyle/>
+          <a:p>
+            <a:pPr>
+              <a:defRPr sz="1150" b="1">
+                <a:solidFill>
+                  <a:srgbClr val="FFFFFF"/>
+                </a:solidFill>
+              </a:defRPr>
+            </a:pPr>
+            <a:r>
+              <a:t>Samay Raina (7.65M)</a:t>
+            </a:r>
+          </a:p>
+        </p:txBody>
+      </p:sp>
+      <p:pic>
+        <p:nvPicPr>
+          <p:cNvPr id="18" name="Picture 17" descr="techno_gamerz.png"/>
+          <p:cNvPicPr>
+            <a:picLocks noChangeAspect="1"/>
+          </p:cNvPicPr>
+          <p:nvPr/>
+        </p:nvPicPr>
+        <p:blipFill>
+          <a:blip r:embed="rId4"/>
+          <a:stretch>
+            <a:fillRect/>
+          </a:stretch>
+        </p:blipFill>
+        <p:spPr>
+          <a:xfrm>
+            <a:off x="6583680" y="4892040"/>
+            <a:ext cx="764574" cy="685800"/>
+          </a:xfrm>
+          <a:prstGeom prst="rect">
+            <a:avLst/>
+          </a:prstGeom>
+        </p:spPr>
+      </p:pic>
+      <p:sp>
+        <p:nvSpPr>
+          <p:cNvPr id="19" name="TextBox 18"/>
+          <p:cNvSpPr txBox="1"/>
+          <p:nvPr/>
+        </p:nvSpPr>
+        <p:spPr>
+          <a:xfrm>
+            <a:off x="7360920" y="4956048"/>
+            <a:ext cx="1920240" cy="548640"/>
+          </a:xfrm>
+          <a:prstGeom prst="rect">
+            <a:avLst/>
+          </a:prstGeom>
+          <a:noFill/>
+        </p:spPr>
+        <p:txBody>
+          <a:bodyPr wrap="square">
+            <a:spAutoFit/>
+          </a:bodyPr>
+          <a:lstStyle/>
+          <a:p>
+            <a:pPr>
+              <a:defRPr sz="1150" b="1">
+                <a:solidFill>
+                  <a:srgbClr val="FFFFFF"/>
+                </a:solidFill>
+              </a:defRPr>
+            </a:pPr>
+            <a:r>
+              <a:t>Techno Gamerz (53.4M)</a:t>
+            </a:r>
+          </a:p>
+        </p:txBody>
+      </p:sp>
+      <p:pic>
+        <p:nvPicPr>
+          <p:cNvPr id="20" name="Picture 19" descr="chaiaurcode_logo.png"/>
+          <p:cNvPicPr>
+            <a:picLocks noChangeAspect="1"/>
+          </p:cNvPicPr>
+          <p:nvPr/>
+        </p:nvPicPr>
+        <p:blipFill>
+          <a:blip r:embed="rId5"/>
+          <a:stretch>
+            <a:fillRect/>
+          </a:stretch>
+        </p:blipFill>
+        <p:spPr>
+          <a:xfrm>
+            <a:off x="9326880" y="4892040"/>
+            <a:ext cx="685800" cy="685800"/>
+          </a:xfrm>
+          <a:prstGeom prst="rect">
+            <a:avLst/>
+          </a:prstGeom>
+        </p:spPr>
+      </p:pic>
+      <p:sp>
+        <p:nvSpPr>
+          <p:cNvPr id="21" name="TextBox 20"/>
+          <p:cNvSpPr txBox="1"/>
+          <p:nvPr/>
+        </p:nvSpPr>
+        <p:spPr>
+          <a:xfrm>
+            <a:off x="10104119" y="4956048"/>
+            <a:ext cx="1920240" cy="548640"/>
+          </a:xfrm>
+          <a:prstGeom prst="rect">
+            <a:avLst/>
+          </a:prstGeom>
+          <a:noFill/>
+        </p:spPr>
+        <p:txBody>
+          <a:bodyPr wrap="square">
+            <a:spAutoFit/>
+          </a:bodyPr>
+          <a:lstStyle/>
+          <a:p>
+            <a:pPr>
+              <a:defRPr sz="1150" b="1">
+                <a:solidFill>
+                  <a:srgbClr val="FFFFFF"/>
+                </a:solidFill>
+              </a:defRPr>
+            </a:pPr>
+            <a:r>
+              <a:t>Chai aur Code (645K)</a:t>
             </a:r>
           </a:p>
         </p:txBody>
@@ -4998,7 +5433,7 @@
           <a:lstStyle/>
           <a:p>
             <a:pPr>
-              <a:defRPr sz="1200" b="1">
+              <a:defRPr sz="1150" b="1">
                 <a:solidFill>
                   <a:srgbClr val="3EA6FF"/>
                 </a:solidFill>
@@ -5019,7 +5454,42 @@
         <p:spPr>
           <a:xfrm>
             <a:off x="731520" y="621792"/>
-            <a:ext cx="10728655" cy="640080"/>
+            <a:ext cx="10728655" cy="594360"/>
+          </a:xfrm>
+          <a:prstGeom prst="rect">
+            <a:avLst/>
+          </a:prstGeom>
+          <a:noFill/>
+        </p:spPr>
+        <p:txBody>
+          <a:bodyPr wrap="square">
+            <a:spAutoFit/>
+          </a:bodyPr>
+          <a:lstStyle/>
+          <a:p>
+            <a:pPr>
+              <a:defRPr sz="2300" b="1">
+                <a:solidFill>
+                  <a:srgbClr val="FFFFFF"/>
+                </a:solidFill>
+              </a:defRPr>
+            </a:pPr>
+            <a:r>
+              <a:t>Multi-Device Responsive Design &amp; Modern UI/UX Layer</a:t>
+            </a:r>
+          </a:p>
+        </p:txBody>
+      </p:sp>
+      <p:sp>
+        <p:nvSpPr>
+          <p:cNvPr id="6" name="TextBox 5"/>
+          <p:cNvSpPr txBox="1"/>
+          <p:nvPr/>
+        </p:nvSpPr>
+        <p:spPr>
+          <a:xfrm>
+            <a:off x="731520" y="6327648"/>
+            <a:ext cx="10728655" cy="274320"/>
           </a:xfrm>
           <a:prstGeom prst="rect">
             <a:avLst/>
@@ -5033,49 +5503,14 @@
           <a:lstStyle/>
           <a:p>
             <a:pPr>
-              <a:defRPr sz="2500" b="1">
-                <a:solidFill>
-                  <a:srgbClr val="FFFFFF"/>
+              <a:defRPr sz="1000">
+                <a:solidFill>
+                  <a:srgbClr val="8C94A5"/>
                 </a:solidFill>
               </a:defRPr>
             </a:pPr>
             <a:r>
-              <a:t>Summary, Live Demonstration &amp; Viva Readiness</a:t>
-            </a:r>
-          </a:p>
-        </p:txBody>
-      </p:sp>
-      <p:sp>
-        <p:nvSpPr>
-          <p:cNvPr id="6" name="TextBox 5"/>
-          <p:cNvSpPr txBox="1"/>
-          <p:nvPr/>
-        </p:nvSpPr>
-        <p:spPr>
-          <a:xfrm>
-            <a:off x="731520" y="6309360"/>
-            <a:ext cx="10728655" cy="320040"/>
-          </a:xfrm>
-          <a:prstGeom prst="rect">
-            <a:avLst/>
-          </a:prstGeom>
-          <a:noFill/>
-        </p:spPr>
-        <p:txBody>
-          <a:bodyPr wrap="none">
-            <a:spAutoFit/>
-          </a:bodyPr>
-          <a:lstStyle/>
-          <a:p>
-            <a:pPr>
-              <a:defRPr sz="1050">
-                <a:solidFill>
-                  <a:srgbClr val="828A9B"/>
-                </a:solidFill>
-              </a:defRPr>
-            </a:pPr>
-            <a:r>
-              <a:t>PheW TuBe: Video Streaming Platform (G15-PID-17)  |  Evaluation-II  |  Page 12</a:t>
+              <a:t>PheW TuBe: Video Streaming Platform (G15-PID-17)  |  Chitkara University FEE-II  |  Page 12</a:t>
             </a:r>
           </a:p>
         </p:txBody>
@@ -5089,7 +5524,7 @@
         <p:spPr>
           <a:xfrm>
             <a:off x="731520" y="1371600"/>
-            <a:ext cx="5212080" cy="4663440"/>
+            <a:ext cx="5669280" cy="4754880"/>
           </a:xfrm>
           <a:prstGeom prst="roundRect">
             <a:avLst/>
@@ -5097,7 +5532,7 @@
           <a:solidFill>
             <a:srgbClr val="161922"/>
           </a:solidFill>
-          <a:ln w="17780">
+          <a:ln w="16510">
             <a:solidFill>
               <a:srgbClr val="2E3445"/>
             </a:solidFill>
@@ -5133,8 +5568,8 @@
         </p:nvSpPr>
         <p:spPr>
           <a:xfrm>
-            <a:off x="932688" y="1536192"/>
-            <a:ext cx="4809744" cy="4334255"/>
+            <a:off x="914400" y="1517904"/>
+            <a:ext cx="5303520" cy="4462272"/>
           </a:xfrm>
           <a:prstGeom prst="rect">
             <a:avLst/>
@@ -5142,33 +5577,33 @@
           <a:noFill/>
         </p:spPr>
         <p:txBody>
-          <a:bodyPr wrap="square">
+          <a:bodyPr wrap="square" tIns="0" bIns="0" lIns="0" rIns="0">
             <a:spAutoFit/>
           </a:bodyPr>
           <a:lstStyle/>
           <a:p>
             <a:pPr>
               <a:spcAft>
-                <a:spcPts val="1000"/>
-              </a:spcAft>
-              <a:defRPr sz="1700" b="1">
+                <a:spcPts val="800"/>
+              </a:spcAft>
+              <a:defRPr sz="1550" b="1">
                 <a:solidFill>
                   <a:srgbClr val="FF0033"/>
                 </a:solidFill>
               </a:defRPr>
             </a:pPr>
             <a:r>
-              <a:t>Phase 2 Engineering Achievements</a:t>
-            </a:r>
-          </a:p>
-          <a:p>
-            <a:pPr>
-              <a:spcAft>
-                <a:spcPts val="800"/>
-              </a:spcAft>
-            </a:pPr>
-            <a:r>
-              <a:rPr b="1" sz="1500">
+              <a:t>Responsive Breakpoints &amp; UX Architecture</a:t>
+            </a:r>
+          </a:p>
+          <a:p>
+            <a:pPr>
+              <a:spcAft>
+                <a:spcPts val="600"/>
+              </a:spcAft>
+            </a:pPr>
+            <a:r>
+              <a:rPr b="1" sz="1200">
                 <a:solidFill>
                   <a:srgbClr val="FF0033"/>
                 </a:solidFill>
@@ -5176,30 +5611,30 @@
               <a:t>• </a:t>
             </a:r>
             <a:r>
-              <a:rPr b="1" sz="1400">
-                <a:solidFill>
-                  <a:srgbClr val="FFFFFF"/>
-                </a:solidFill>
-              </a:rPr>
-              <a:t>Zero Bounce In-App Streaming: </a:t>
-            </a:r>
-            <a:r>
-              <a:rPr sz="1400">
+              <a:rPr b="1" sz="1200">
+                <a:solidFill>
+                  <a:srgbClr val="FFFFFF"/>
+                </a:solidFill>
+              </a:rPr>
+              <a:t>Desktop (&gt;1150px): </a:t>
+            </a:r>
+            <a:r>
+              <a:rPr sz="1200">
                 <a:solidFill>
                   <a:srgbClr val="CDD2DC"/>
                 </a:solidFill>
               </a:rPr>
-              <a:t>Fully functional /watch/:id route replacing external YouTube link-outs.</a:t>
-            </a:r>
-          </a:p>
-          <a:p>
-            <a:pPr>
-              <a:spcAft>
-                <a:spcPts val="800"/>
-              </a:spcAft>
-            </a:pPr>
-            <a:r>
-              <a:rPr b="1" sz="1500">
+              <a:t>4-column video feed, collapsible full sidebar, dual-column Watch page with queue.</a:t>
+            </a:r>
+          </a:p>
+          <a:p>
+            <a:pPr>
+              <a:spcAft>
+                <a:spcPts val="600"/>
+              </a:spcAft>
+            </a:pPr>
+            <a:r>
+              <a:rPr b="1" sz="1200">
                 <a:solidFill>
                   <a:srgbClr val="FF0033"/>
                 </a:solidFill>
@@ -5207,30 +5642,30 @@
               <a:t>• </a:t>
             </a:r>
             <a:r>
-              <a:rPr b="1" sz="1400">
-                <a:solidFill>
-                  <a:srgbClr val="FFFFFF"/>
-                </a:solidFill>
-              </a:rPr>
-              <a:t>Strategic DOM Control: </a:t>
-            </a:r>
-            <a:r>
-              <a:rPr sz="1400">
+              <a:rPr b="1" sz="1200">
+                <a:solidFill>
+                  <a:srgbClr val="FFFFFF"/>
+                </a:solidFill>
+              </a:rPr>
+              <a:t>Tablet (1024px iPad Mini): </a:t>
+            </a:r>
+            <a:r>
+              <a:rPr sz="1200">
                 <a:solidFill>
                   <a:srgbClr val="CDD2DC"/>
                 </a:solidFill>
               </a:rPr>
-              <a:t>useRef applied for auto-focusing comments and smooth scroll transitions.</a:t>
-            </a:r>
-          </a:p>
-          <a:p>
-            <a:pPr>
-              <a:spcAft>
-                <a:spcPts val="800"/>
-              </a:spcAft>
-            </a:pPr>
-            <a:r>
-              <a:rPr b="1" sz="1500">
+              <a:t>Solved horizontal cutoff with calc(100% - 72px) max-width boundary and 3-column auto-fit grid.</a:t>
+            </a:r>
+          </a:p>
+          <a:p>
+            <a:pPr>
+              <a:spcAft>
+                <a:spcPts val="600"/>
+              </a:spcAft>
+            </a:pPr>
+            <a:r>
+              <a:rPr b="1" sz="1200">
                 <a:solidFill>
                   <a:srgbClr val="FF0033"/>
                 </a:solidFill>
@@ -5238,30 +5673,30 @@
               <a:t>• </a:t>
             </a:r>
             <a:r>
-              <a:rPr b="1" sz="1400">
-                <a:solidFill>
-                  <a:srgbClr val="FFFFFF"/>
-                </a:solidFill>
-              </a:rPr>
-              <a:t>Scalable State Management: </a:t>
-            </a:r>
-            <a:r>
-              <a:rPr sz="1400">
+              <a:rPr b="1" sz="1200">
+                <a:solidFill>
+                  <a:srgbClr val="FFFFFF"/>
+                </a:solidFill>
+              </a:rPr>
+              <a:t>Mobile (&lt;480px): </a:t>
+            </a:r>
+            <a:r>
+              <a:rPr sz="1200">
                 <a:solidFill>
                   <a:srgbClr val="CDD2DC"/>
                 </a:solidFill>
               </a:rPr>
-              <a:t>Global React Context API synchronized seamlessly with browser localStorage.</a:t>
-            </a:r>
-          </a:p>
-          <a:p>
-            <a:pPr>
-              <a:spcAft>
-                <a:spcPts val="800"/>
-              </a:spcAft>
-            </a:pPr>
-            <a:r>
-              <a:rPr b="1" sz="1500">
+              <a:t>Single column full-bleed cards, bottom navigation parity, full-width video player.</a:t>
+            </a:r>
+          </a:p>
+          <a:p>
+            <a:pPr>
+              <a:spcAft>
+                <a:spcPts val="600"/>
+              </a:spcAft>
+            </a:pPr>
+            <a:r>
+              <a:rPr b="1" sz="1200">
                 <a:solidFill>
                   <a:srgbClr val="FF0033"/>
                 </a:solidFill>
@@ -5269,20 +5704,82 @@
               <a:t>• </a:t>
             </a:r>
             <a:r>
-              <a:rPr b="1" sz="1400">
-                <a:solidFill>
-                  <a:srgbClr val="FFFFFF"/>
-                </a:solidFill>
-              </a:rPr>
-              <a:t>Teacher-Recommended UX: </a:t>
-            </a:r>
-            <a:r>
-              <a:rPr sz="1400">
+              <a:rPr b="1" sz="1200">
+                <a:solidFill>
+                  <a:srgbClr val="FFFFFF"/>
+                </a:solidFill>
+              </a:rPr>
+              <a:t>Subscribed Channels Grid: </a:t>
+            </a:r>
+            <a:r>
+              <a:rPr sz="1200">
                 <a:solidFill>
                   <a:srgbClr val="CDD2DC"/>
                 </a:solidFill>
               </a:rPr>
-              <a:t>Integrated react-toastify alerts and native Web Speech voice search.</a:t>
+              <a:t>Prominent 72px creator cards with active creator dot and 1-click unsubscribe toggle.</a:t>
+            </a:r>
+          </a:p>
+          <a:p>
+            <a:pPr>
+              <a:spcAft>
+                <a:spcPts val="600"/>
+              </a:spcAft>
+            </a:pPr>
+            <a:r>
+              <a:rPr b="1" sz="1200">
+                <a:solidFill>
+                  <a:srgbClr val="FF0033"/>
+                </a:solidFill>
+              </a:rPr>
+              <a:t>• </a:t>
+            </a:r>
+            <a:r>
+              <a:rPr b="1" sz="1200">
+                <a:solidFill>
+                  <a:srgbClr val="FFFFFF"/>
+                </a:solidFill>
+              </a:rPr>
+              <a:t>Live Search Autocomplete: </a:t>
+            </a:r>
+            <a:r>
+              <a:rPr sz="1200">
+                <a:solidFill>
+                  <a:srgbClr val="CDD2DC"/>
+                </a:solidFill>
+              </a:rPr>
+              <a:t>Instant substring matching with floating dropdown and direct video routing.</a:t>
+            </a:r>
+          </a:p>
+          <a:p>
+            <a:pPr>
+              <a:spcAft>
+                <a:spcPts val="600"/>
+              </a:spcAft>
+            </a:pPr>
+            <a:r>
+              <a:rPr b="1" sz="1200">
+                <a:solidFill>
+                  <a:srgbClr val="FF0033"/>
+                </a:solidFill>
+              </a:rPr>
+              <a:t>• </a:t>
+            </a:r>
+            <a:r>
+              <a:rPr b="1" sz="1200">
+                <a:solidFill>
+                  <a:srgbClr val="FFFFFF"/>
+                </a:solidFill>
+              </a:rPr>
+              <a:t>Native Voice Search: </a:t>
+            </a:r>
+            <a:r>
+              <a:rPr sz="1200">
+                <a:solidFill>
+                  <a:srgbClr val="CDD2DC"/>
+                </a:solidFill>
+              </a:rPr>
+              <a:t>Web Speech API microphone integration converting voice input directly to search queries.</a:t>
             </a:r>
           </a:p>
         </p:txBody>
@@ -5295,8 +5792,8 @@
         </p:nvSpPr>
         <p:spPr>
           <a:xfrm>
-            <a:off x="6217920" y="1371600"/>
-            <a:ext cx="5212080" cy="4663440"/>
+            <a:off x="6675120" y="1371600"/>
+            <a:ext cx="4754880" cy="4754880"/>
           </a:xfrm>
           <a:prstGeom prst="roundRect">
             <a:avLst/>
@@ -5304,7 +5801,7 @@
           <a:solidFill>
             <a:srgbClr val="161922"/>
           </a:solidFill>
-          <a:ln w="17780">
+          <a:ln w="16510">
             <a:solidFill>
               <a:srgbClr val="2E3445"/>
             </a:solidFill>
@@ -5332,16 +5829,40 @@
           </a:p>
         </p:txBody>
       </p:sp>
-      <p:sp>
-        <p:nvSpPr>
-          <p:cNvPr id="10" name="TextBox 9"/>
+      <p:pic>
+        <p:nvPicPr>
+          <p:cNvPr id="10" name="Picture 9" descr="ui_search_clean.png"/>
+          <p:cNvPicPr>
+            <a:picLocks noChangeAspect="1"/>
+          </p:cNvPicPr>
+          <p:nvPr/>
+        </p:nvPicPr>
+        <p:blipFill>
+          <a:blip r:embed="rId2"/>
+          <a:stretch>
+            <a:fillRect/>
+          </a:stretch>
+        </p:blipFill>
+        <p:spPr>
+          <a:xfrm>
+            <a:off x="7799831" y="1600200"/>
+            <a:ext cx="2494398" cy="2331720"/>
+          </a:xfrm>
+          <a:prstGeom prst="rect">
+            <a:avLst/>
+          </a:prstGeom>
+        </p:spPr>
+      </p:pic>
+      <p:sp>
+        <p:nvSpPr>
+          <p:cNvPr id="11" name="TextBox 10"/>
           <p:cNvSpPr txBox="1"/>
           <p:nvPr/>
         </p:nvSpPr>
         <p:spPr>
           <a:xfrm>
-            <a:off x="6419088" y="1536192"/>
-            <a:ext cx="4809744" cy="4334255"/>
+            <a:off x="6949440" y="4160520"/>
+            <a:ext cx="4206240" cy="1737360"/>
           </a:xfrm>
           <a:prstGeom prst="rect">
             <a:avLst/>
@@ -5356,26 +5877,1373 @@
           <a:p>
             <a:pPr>
               <a:spcAft>
-                <a:spcPts val="1000"/>
-              </a:spcAft>
-              <a:defRPr sz="1700" b="1">
+                <a:spcPts val="400"/>
+              </a:spcAft>
+              <a:defRPr sz="1500" b="1">
+                <a:solidFill>
+                  <a:srgbClr val="3EA6FF"/>
+                </a:solidFill>
+              </a:defRPr>
+            </a:pPr>
+            <a:r>
+              <a:t>Live Search &amp; Suggestion Overlay</a:t>
+            </a:r>
+          </a:p>
+          <a:p>
+            <a:pPr>
+              <a:defRPr sz="1200">
+                <a:solidFill>
+                  <a:srgbClr val="CDD2DC"/>
+                </a:solidFill>
+              </a:defRPr>
+            </a:pPr>
+            <a:r>
+              <a:t>Features real-time autocomplete suggestion cards with creator subtitles, clear button, and voice recognition pulse indicator.</a:t>
+            </a:r>
+          </a:p>
+        </p:txBody>
+      </p:sp>
+    </p:spTree>
+  </p:cSld>
+  <p:clrMapOvr>
+    <a:masterClrMapping/>
+  </p:clrMapOvr>
+  <p:transition spd="fast">
+    <p:push dir="l"/>
+  </p:transition>
+</p:sld>
+</file>
+
+<file path=ppt/slides/slide13.xml><?xml version="1.0" encoding="utf-8"?>
+<p:sld xmlns:a="http://schemas.openxmlformats.org/drawingml/2006/main" xmlns:p="http://schemas.openxmlformats.org/presentationml/2006/main" xmlns:r="http://schemas.openxmlformats.org/officeDocument/2006/relationships">
+  <p:cSld>
+    <p:spTree>
+      <p:nvGrpSpPr>
+        <p:cNvPr id="1" name=""/>
+        <p:cNvGrpSpPr/>
+        <p:nvPr/>
+      </p:nvGrpSpPr>
+      <p:grpSpPr/>
+      <p:sp>
+        <p:nvSpPr>
+          <p:cNvPr id="2" name="Rectangle 1"/>
+          <p:cNvSpPr/>
+          <p:nvPr/>
+        </p:nvSpPr>
+        <p:spPr>
+          <a:xfrm>
+            <a:off x="0" y="0"/>
+            <a:ext cx="12191695" cy="6858000"/>
+          </a:xfrm>
+          <a:prstGeom prst="rect">
+            <a:avLst/>
+          </a:prstGeom>
+          <a:solidFill>
+            <a:srgbClr val="0B0C10"/>
+          </a:solidFill>
+          <a:ln>
+            <a:noFill/>
+          </a:ln>
+        </p:spPr>
+        <p:style>
+          <a:lnRef idx="1">
+            <a:schemeClr val="accent1"/>
+          </a:lnRef>
+          <a:fillRef idx="3">
+            <a:schemeClr val="accent1"/>
+          </a:fillRef>
+          <a:effectRef idx="2">
+            <a:schemeClr val="accent1"/>
+          </a:effectRef>
+          <a:fontRef idx="minor">
+            <a:schemeClr val="lt1"/>
+          </a:fontRef>
+        </p:style>
+        <p:txBody>
+          <a:bodyPr rtlCol="0" anchor="ctr"/>
+          <a:lstStyle/>
+          <a:p>
+            <a:pPr algn="ctr"/>
+          </a:p>
+        </p:txBody>
+      </p:sp>
+      <p:sp>
+        <p:nvSpPr>
+          <p:cNvPr id="3" name="Rectangle 2"/>
+          <p:cNvSpPr/>
+          <p:nvPr/>
+        </p:nvSpPr>
+        <p:spPr>
+          <a:xfrm>
+            <a:off x="731520" y="365760"/>
+            <a:ext cx="365760" cy="54864"/>
+          </a:xfrm>
+          <a:prstGeom prst="rect">
+            <a:avLst/>
+          </a:prstGeom>
+          <a:solidFill>
+            <a:srgbClr val="FF0033"/>
+          </a:solidFill>
+          <a:ln>
+            <a:noFill/>
+          </a:ln>
+        </p:spPr>
+        <p:style>
+          <a:lnRef idx="1">
+            <a:schemeClr val="accent1"/>
+          </a:lnRef>
+          <a:fillRef idx="3">
+            <a:schemeClr val="accent1"/>
+          </a:fillRef>
+          <a:effectRef idx="2">
+            <a:schemeClr val="accent1"/>
+          </a:effectRef>
+          <a:fontRef idx="minor">
+            <a:schemeClr val="lt1"/>
+          </a:fontRef>
+        </p:style>
+        <p:txBody>
+          <a:bodyPr rtlCol="0" anchor="ctr"/>
+          <a:lstStyle/>
+          <a:p>
+            <a:pPr algn="ctr"/>
+          </a:p>
+        </p:txBody>
+      </p:sp>
+      <p:sp>
+        <p:nvSpPr>
+          <p:cNvPr id="4" name="TextBox 3"/>
+          <p:cNvSpPr txBox="1"/>
+          <p:nvPr/>
+        </p:nvSpPr>
+        <p:spPr>
+          <a:xfrm>
+            <a:off x="1188720" y="292608"/>
+            <a:ext cx="10241280" cy="274320"/>
+          </a:xfrm>
+          <a:prstGeom prst="rect">
+            <a:avLst/>
+          </a:prstGeom>
+          <a:noFill/>
+        </p:spPr>
+        <p:txBody>
+          <a:bodyPr wrap="none">
+            <a:spAutoFit/>
+          </a:bodyPr>
+          <a:lstStyle/>
+          <a:p>
+            <a:pPr>
+              <a:defRPr sz="1150" b="1">
+                <a:solidFill>
+                  <a:srgbClr val="3EA6FF"/>
+                </a:solidFill>
+              </a:defRPr>
+            </a:pPr>
+            <a:r>
+              <a:t>GROUP G15  •  PROJECT ID: G15-PID-17 (P-17)  •  EVALUATION-II</a:t>
+            </a:r>
+          </a:p>
+        </p:txBody>
+      </p:sp>
+      <p:sp>
+        <p:nvSpPr>
+          <p:cNvPr id="5" name="TextBox 4"/>
+          <p:cNvSpPr txBox="1"/>
+          <p:nvPr/>
+        </p:nvSpPr>
+        <p:spPr>
+          <a:xfrm>
+            <a:off x="731520" y="621792"/>
+            <a:ext cx="10728655" cy="594360"/>
+          </a:xfrm>
+          <a:prstGeom prst="rect">
+            <a:avLst/>
+          </a:prstGeom>
+          <a:noFill/>
+        </p:spPr>
+        <p:txBody>
+          <a:bodyPr wrap="square">
+            <a:spAutoFit/>
+          </a:bodyPr>
+          <a:lstStyle/>
+          <a:p>
+            <a:pPr>
+              <a:defRPr sz="2300" b="1">
+                <a:solidFill>
+                  <a:srgbClr val="FFFFFF"/>
+                </a:solidFill>
+              </a:defRPr>
+            </a:pPr>
+            <a:r>
+              <a:t>Technical Roadmap &amp; Scope for Phase 3 (MERN Stack)</a:t>
+            </a:r>
+          </a:p>
+        </p:txBody>
+      </p:sp>
+      <p:sp>
+        <p:nvSpPr>
+          <p:cNvPr id="6" name="TextBox 5"/>
+          <p:cNvSpPr txBox="1"/>
+          <p:nvPr/>
+        </p:nvSpPr>
+        <p:spPr>
+          <a:xfrm>
+            <a:off x="731520" y="6327648"/>
+            <a:ext cx="10728655" cy="274320"/>
+          </a:xfrm>
+          <a:prstGeom prst="rect">
+            <a:avLst/>
+          </a:prstGeom>
+          <a:noFill/>
+        </p:spPr>
+        <p:txBody>
+          <a:bodyPr wrap="none">
+            <a:spAutoFit/>
+          </a:bodyPr>
+          <a:lstStyle/>
+          <a:p>
+            <a:pPr>
+              <a:defRPr sz="1000">
+                <a:solidFill>
+                  <a:srgbClr val="8C94A5"/>
+                </a:solidFill>
+              </a:defRPr>
+            </a:pPr>
+            <a:r>
+              <a:t>PheW TuBe: Video Streaming Platform (G15-PID-17)  |  Chitkara University FEE-II  |  Page 13</a:t>
+            </a:r>
+          </a:p>
+        </p:txBody>
+      </p:sp>
+      <p:sp>
+        <p:nvSpPr>
+          <p:cNvPr id="7" name="Rounded Rectangle 6"/>
+          <p:cNvSpPr/>
+          <p:nvPr/>
+        </p:nvSpPr>
+        <p:spPr>
+          <a:xfrm>
+            <a:off x="731520" y="1371600"/>
+            <a:ext cx="3383280" cy="4754880"/>
+          </a:xfrm>
+          <a:prstGeom prst="roundRect">
+            <a:avLst/>
+          </a:prstGeom>
+          <a:solidFill>
+            <a:srgbClr val="161922"/>
+          </a:solidFill>
+          <a:ln w="16510">
+            <a:solidFill>
+              <a:srgbClr val="2E3445"/>
+            </a:solidFill>
+          </a:ln>
+        </p:spPr>
+        <p:style>
+          <a:lnRef idx="1">
+            <a:schemeClr val="accent1"/>
+          </a:lnRef>
+          <a:fillRef idx="3">
+            <a:schemeClr val="accent1"/>
+          </a:fillRef>
+          <a:effectRef idx="2">
+            <a:schemeClr val="accent1"/>
+          </a:effectRef>
+          <a:fontRef idx="minor">
+            <a:schemeClr val="lt1"/>
+          </a:fontRef>
+        </p:style>
+        <p:txBody>
+          <a:bodyPr rtlCol="0" anchor="ctr"/>
+          <a:lstStyle/>
+          <a:p>
+            <a:pPr algn="ctr"/>
+          </a:p>
+        </p:txBody>
+      </p:sp>
+      <p:sp>
+        <p:nvSpPr>
+          <p:cNvPr id="8" name="TextBox 7"/>
+          <p:cNvSpPr txBox="1"/>
+          <p:nvPr/>
+        </p:nvSpPr>
+        <p:spPr>
+          <a:xfrm>
+            <a:off x="914400" y="1517904"/>
+            <a:ext cx="3017520" cy="4462272"/>
+          </a:xfrm>
+          <a:prstGeom prst="rect">
+            <a:avLst/>
+          </a:prstGeom>
+          <a:noFill/>
+        </p:spPr>
+        <p:txBody>
+          <a:bodyPr wrap="square" tIns="0" bIns="0" lIns="0" rIns="0">
+            <a:spAutoFit/>
+          </a:bodyPr>
+          <a:lstStyle/>
+          <a:p>
+            <a:pPr>
+              <a:spcAft>
+                <a:spcPts val="800"/>
+              </a:spcAft>
+              <a:defRPr sz="1550" b="1">
+                <a:solidFill>
+                  <a:srgbClr val="FF0033"/>
+                </a:solidFill>
+              </a:defRPr>
+            </a:pPr>
+            <a:r>
+              <a:t>Phase 1: UI Foundation</a:t>
+            </a:r>
+          </a:p>
+          <a:p>
+            <a:pPr>
+              <a:spcAft>
+                <a:spcPts val="600"/>
+              </a:spcAft>
+            </a:pPr>
+            <a:r>
+              <a:rPr b="1" sz="1200">
+                <a:solidFill>
+                  <a:srgbClr val="FF0033"/>
+                </a:solidFill>
+              </a:rPr>
+              <a:t>• </a:t>
+            </a:r>
+            <a:r>
+              <a:rPr b="1" sz="1200">
+                <a:solidFill>
+                  <a:srgbClr val="FFFFFF"/>
+                </a:solidFill>
+              </a:rPr>
+              <a:t>Visual Layout: </a:t>
+            </a:r>
+            <a:r>
+              <a:rPr sz="1200">
+                <a:solidFill>
+                  <a:srgbClr val="CDD2DC"/>
+                </a:solidFill>
+              </a:rPr>
+              <a:t>Dark obsidian theme layout, YouTube visual branding, and icon system.</a:t>
+            </a:r>
+          </a:p>
+          <a:p>
+            <a:pPr>
+              <a:spcAft>
+                <a:spcPts val="600"/>
+              </a:spcAft>
+            </a:pPr>
+            <a:r>
+              <a:rPr b="1" sz="1200">
+                <a:solidFill>
+                  <a:srgbClr val="FF0033"/>
+                </a:solidFill>
+              </a:rPr>
+              <a:t>• </a:t>
+            </a:r>
+            <a:r>
+              <a:rPr b="1" sz="1200">
+                <a:solidFill>
+                  <a:srgbClr val="FFFFFF"/>
+                </a:solidFill>
+              </a:rPr>
+              <a:t>Video &amp; Shorts Grid: </a:t>
+            </a:r>
+            <a:r>
+              <a:rPr sz="1200">
+                <a:solidFill>
+                  <a:srgbClr val="CDD2DC"/>
+                </a:solidFill>
+              </a:rPr>
+              <a:t>Multi-category filtering chips and responsive card layout.</a:t>
+            </a:r>
+          </a:p>
+          <a:p>
+            <a:pPr>
+              <a:spcAft>
+                <a:spcPts val="600"/>
+              </a:spcAft>
+            </a:pPr>
+            <a:r>
+              <a:rPr b="1" sz="1200">
+                <a:solidFill>
+                  <a:srgbClr val="FF0033"/>
+                </a:solidFill>
+              </a:rPr>
+              <a:t>• </a:t>
+            </a:r>
+            <a:r>
+              <a:rPr b="1" sz="1200">
+                <a:solidFill>
+                  <a:srgbClr val="FFFFFF"/>
+                </a:solidFill>
+              </a:rPr>
+              <a:t>Navigation: </a:t>
+            </a:r>
+            <a:r>
+              <a:rPr sz="1200">
+                <a:solidFill>
+                  <a:srgbClr val="CDD2DC"/>
+                </a:solidFill>
+              </a:rPr>
+              <a:t>Collapsible sidebar navigation tabs and search query input.</a:t>
+            </a:r>
+          </a:p>
+        </p:txBody>
+      </p:sp>
+      <p:sp>
+        <p:nvSpPr>
+          <p:cNvPr id="9" name="Rounded Rectangle 8"/>
+          <p:cNvSpPr/>
+          <p:nvPr/>
+        </p:nvSpPr>
+        <p:spPr>
+          <a:xfrm>
+            <a:off x="4389120" y="1371600"/>
+            <a:ext cx="3383280" cy="4754880"/>
+          </a:xfrm>
+          <a:prstGeom prst="roundRect">
+            <a:avLst/>
+          </a:prstGeom>
+          <a:solidFill>
+            <a:srgbClr val="161922"/>
+          </a:solidFill>
+          <a:ln w="16510">
+            <a:solidFill>
+              <a:srgbClr val="2E3445"/>
+            </a:solidFill>
+          </a:ln>
+        </p:spPr>
+        <p:style>
+          <a:lnRef idx="1">
+            <a:schemeClr val="accent1"/>
+          </a:lnRef>
+          <a:fillRef idx="3">
+            <a:schemeClr val="accent1"/>
+          </a:fillRef>
+          <a:effectRef idx="2">
+            <a:schemeClr val="accent1"/>
+          </a:effectRef>
+          <a:fontRef idx="minor">
+            <a:schemeClr val="lt1"/>
+          </a:fontRef>
+        </p:style>
+        <p:txBody>
+          <a:bodyPr rtlCol="0" anchor="ctr"/>
+          <a:lstStyle/>
+          <a:p>
+            <a:pPr algn="ctr"/>
+          </a:p>
+        </p:txBody>
+      </p:sp>
+      <p:sp>
+        <p:nvSpPr>
+          <p:cNvPr id="10" name="TextBox 9"/>
+          <p:cNvSpPr txBox="1"/>
+          <p:nvPr/>
+        </p:nvSpPr>
+        <p:spPr>
+          <a:xfrm>
+            <a:off x="4572000" y="1517904"/>
+            <a:ext cx="3017520" cy="4462272"/>
+          </a:xfrm>
+          <a:prstGeom prst="rect">
+            <a:avLst/>
+          </a:prstGeom>
+          <a:noFill/>
+        </p:spPr>
+        <p:txBody>
+          <a:bodyPr wrap="square" tIns="0" bIns="0" lIns="0" rIns="0">
+            <a:spAutoFit/>
+          </a:bodyPr>
+          <a:lstStyle/>
+          <a:p>
+            <a:pPr>
+              <a:spcAft>
+                <a:spcPts val="800"/>
+              </a:spcAft>
+              <a:defRPr sz="1550" b="1">
+                <a:solidFill>
+                  <a:srgbClr val="3EA6FF"/>
+                </a:solidFill>
+              </a:defRPr>
+            </a:pPr>
+            <a:r>
+              <a:t>Phase 2: SPA (Completed)</a:t>
+            </a:r>
+          </a:p>
+          <a:p>
+            <a:pPr>
+              <a:spcAft>
+                <a:spcPts val="600"/>
+              </a:spcAft>
+            </a:pPr>
+            <a:r>
+              <a:rPr b="1" sz="1200">
+                <a:solidFill>
+                  <a:srgbClr val="3EA6FF"/>
+                </a:solidFill>
+              </a:rPr>
+              <a:t>• </a:t>
+            </a:r>
+            <a:r>
+              <a:rPr b="1" sz="1200">
+                <a:solidFill>
+                  <a:srgbClr val="FFFFFF"/>
+                </a:solidFill>
+              </a:rPr>
+              <a:t>Dynamic Route: </a:t>
+            </a:r>
+            <a:r>
+              <a:rPr sz="1200">
+                <a:solidFill>
+                  <a:srgbClr val="CDD2DC"/>
+                </a:solidFill>
+              </a:rPr>
+              <a:t>/watch/:id via useParams with embedded 16:9 streaming.</a:t>
+            </a:r>
+          </a:p>
+          <a:p>
+            <a:pPr>
+              <a:spcAft>
+                <a:spcPts val="600"/>
+              </a:spcAft>
+            </a:pPr>
+            <a:r>
+              <a:rPr b="1" sz="1200">
+                <a:solidFill>
+                  <a:srgbClr val="3EA6FF"/>
+                </a:solidFill>
+              </a:rPr>
+              <a:t>• </a:t>
+            </a:r>
+            <a:r>
+              <a:rPr b="1" sz="1200">
+                <a:solidFill>
+                  <a:srgbClr val="FFFFFF"/>
+                </a:solidFill>
+              </a:rPr>
+              <a:t>Security: </a:t>
+            </a:r>
+            <a:r>
+              <a:rPr sz="1200">
+                <a:solidFill>
+                  <a:srgbClr val="CDD2DC"/>
+                </a:solidFill>
+              </a:rPr>
+              <a:t>Protected routing guarding user library and history.</a:t>
+            </a:r>
+          </a:p>
+          <a:p>
+            <a:pPr>
+              <a:spcAft>
+                <a:spcPts val="600"/>
+              </a:spcAft>
+            </a:pPr>
+            <a:r>
+              <a:rPr b="1" sz="1200">
+                <a:solidFill>
+                  <a:srgbClr val="3EA6FF"/>
+                </a:solidFill>
+              </a:rPr>
+              <a:t>• </a:t>
+            </a:r>
+            <a:r>
+              <a:rPr b="1" sz="1200">
+                <a:solidFill>
+                  <a:srgbClr val="FFFFFF"/>
+                </a:solidFill>
+              </a:rPr>
+              <a:t>Performance: </a:t>
+            </a:r>
+            <a:r>
+              <a:rPr sz="1200">
+                <a:solidFill>
+                  <a:srgbClr val="CDD2DC"/>
+                </a:solidFill>
+              </a:rPr>
+              <a:t>Infinite scroll pagination with react-infinite-scroll-component.</a:t>
+            </a:r>
+          </a:p>
+          <a:p>
+            <a:pPr>
+              <a:spcAft>
+                <a:spcPts val="600"/>
+              </a:spcAft>
+            </a:pPr>
+            <a:r>
+              <a:rPr b="1" sz="1200">
+                <a:solidFill>
+                  <a:srgbClr val="3EA6FF"/>
+                </a:solidFill>
+              </a:rPr>
+              <a:t>• </a:t>
+            </a:r>
+            <a:r>
+              <a:rPr b="1" sz="1200">
+                <a:solidFill>
+                  <a:srgbClr val="FFFFFF"/>
+                </a:solidFill>
+              </a:rPr>
+              <a:t>Dual Integration: </a:t>
+            </a:r>
+            <a:r>
+              <a:rPr sz="1200">
+                <a:solidFill>
+                  <a:srgbClr val="CDD2DC"/>
+                </a:solidFill>
+              </a:rPr>
+              <a:t>YouTube Data API v3 live fetching with offline curated fallback.</a:t>
+            </a:r>
+          </a:p>
+        </p:txBody>
+      </p:sp>
+      <p:sp>
+        <p:nvSpPr>
+          <p:cNvPr id="11" name="Rounded Rectangle 10"/>
+          <p:cNvSpPr/>
+          <p:nvPr/>
+        </p:nvSpPr>
+        <p:spPr>
+          <a:xfrm>
+            <a:off x="8046720" y="1371600"/>
+            <a:ext cx="3383280" cy="4754880"/>
+          </a:xfrm>
+          <a:prstGeom prst="roundRect">
+            <a:avLst/>
+          </a:prstGeom>
+          <a:solidFill>
+            <a:srgbClr val="161922"/>
+          </a:solidFill>
+          <a:ln w="16510">
+            <a:solidFill>
+              <a:srgbClr val="2E3445"/>
+            </a:solidFill>
+          </a:ln>
+        </p:spPr>
+        <p:style>
+          <a:lnRef idx="1">
+            <a:schemeClr val="accent1"/>
+          </a:lnRef>
+          <a:fillRef idx="3">
+            <a:schemeClr val="accent1"/>
+          </a:fillRef>
+          <a:effectRef idx="2">
+            <a:schemeClr val="accent1"/>
+          </a:effectRef>
+          <a:fontRef idx="minor">
+            <a:schemeClr val="lt1"/>
+          </a:fontRef>
+        </p:style>
+        <p:txBody>
+          <a:bodyPr rtlCol="0" anchor="ctr"/>
+          <a:lstStyle/>
+          <a:p>
+            <a:pPr algn="ctr"/>
+          </a:p>
+        </p:txBody>
+      </p:sp>
+      <p:sp>
+        <p:nvSpPr>
+          <p:cNvPr id="12" name="TextBox 11"/>
+          <p:cNvSpPr txBox="1"/>
+          <p:nvPr/>
+        </p:nvSpPr>
+        <p:spPr>
+          <a:xfrm>
+            <a:off x="8229600" y="1517904"/>
+            <a:ext cx="3017520" cy="4462272"/>
+          </a:xfrm>
+          <a:prstGeom prst="rect">
+            <a:avLst/>
+          </a:prstGeom>
+          <a:noFill/>
+        </p:spPr>
+        <p:txBody>
+          <a:bodyPr wrap="square" tIns="0" bIns="0" lIns="0" rIns="0">
+            <a:spAutoFit/>
+          </a:bodyPr>
+          <a:lstStyle/>
+          <a:p>
+            <a:pPr>
+              <a:spcAft>
+                <a:spcPts val="800"/>
+              </a:spcAft>
+              <a:defRPr sz="1550" b="1">
                 <a:solidFill>
                   <a:srgbClr val="2BA640"/>
                 </a:solidFill>
               </a:defRPr>
             </a:pPr>
             <a:r>
+              <a:t>Phase 3: Full Stack (MERN)</a:t>
+            </a:r>
+          </a:p>
+          <a:p>
+            <a:pPr>
+              <a:spcAft>
+                <a:spcPts val="600"/>
+              </a:spcAft>
+            </a:pPr>
+            <a:r>
+              <a:rPr b="1" sz="1200">
+                <a:solidFill>
+                  <a:srgbClr val="2BA640"/>
+                </a:solidFill>
+              </a:rPr>
+              <a:t>• </a:t>
+            </a:r>
+            <a:r>
+              <a:rPr b="1" sz="1200">
+                <a:solidFill>
+                  <a:srgbClr val="FFFFFF"/>
+                </a:solidFill>
+              </a:rPr>
+              <a:t>Node.js &amp; Express API: </a:t>
+            </a:r>
+            <a:r>
+              <a:rPr sz="1200">
+                <a:solidFill>
+                  <a:srgbClr val="CDD2DC"/>
+                </a:solidFill>
+              </a:rPr>
+              <a:t>RESTful backend endpoints replacing client-side localStorage.</a:t>
+            </a:r>
+          </a:p>
+          <a:p>
+            <a:pPr>
+              <a:spcAft>
+                <a:spcPts val="600"/>
+              </a:spcAft>
+            </a:pPr>
+            <a:r>
+              <a:rPr b="1" sz="1200">
+                <a:solidFill>
+                  <a:srgbClr val="2BA640"/>
+                </a:solidFill>
+              </a:rPr>
+              <a:t>• </a:t>
+            </a:r>
+            <a:r>
+              <a:rPr b="1" sz="1200">
+                <a:solidFill>
+                  <a:srgbClr val="FFFFFF"/>
+                </a:solidFill>
+              </a:rPr>
+              <a:t>MongoDB Database: </a:t>
+            </a:r>
+            <a:r>
+              <a:rPr sz="1200">
+                <a:solidFill>
+                  <a:srgbClr val="CDD2DC"/>
+                </a:solidFill>
+              </a:rPr>
+              <a:t>Cloud database storing persistent user accounts and video uploads.</a:t>
+            </a:r>
+          </a:p>
+          <a:p>
+            <a:pPr>
+              <a:spcAft>
+                <a:spcPts val="600"/>
+              </a:spcAft>
+            </a:pPr>
+            <a:r>
+              <a:rPr b="1" sz="1200">
+                <a:solidFill>
+                  <a:srgbClr val="2BA640"/>
+                </a:solidFill>
+              </a:rPr>
+              <a:t>• </a:t>
+            </a:r>
+            <a:r>
+              <a:rPr b="1" sz="1200">
+                <a:solidFill>
+                  <a:srgbClr val="FFFFFF"/>
+                </a:solidFill>
+              </a:rPr>
+              <a:t>JWT Authentication: </a:t>
+            </a:r>
+            <a:r>
+              <a:rPr sz="1200">
+                <a:solidFill>
+                  <a:srgbClr val="CDD2DC"/>
+                </a:solidFill>
+              </a:rPr>
+              <a:t>Secure JSON Web Tokens replacing client-side session mockup.</a:t>
+            </a:r>
+          </a:p>
+          <a:p>
+            <a:pPr>
+              <a:spcAft>
+                <a:spcPts val="600"/>
+              </a:spcAft>
+            </a:pPr>
+            <a:r>
+              <a:rPr b="1" sz="1200">
+                <a:solidFill>
+                  <a:srgbClr val="2BA640"/>
+                </a:solidFill>
+              </a:rPr>
+              <a:t>• </a:t>
+            </a:r>
+            <a:r>
+              <a:rPr b="1" sz="1200">
+                <a:solidFill>
+                  <a:srgbClr val="FFFFFF"/>
+                </a:solidFill>
+              </a:rPr>
+              <a:t>Redux Toolkit: </a:t>
+            </a:r>
+            <a:r>
+              <a:rPr sz="1200">
+                <a:solidFill>
+                  <a:srgbClr val="CDD2DC"/>
+                </a:solidFill>
+              </a:rPr>
+              <a:t>Global state migration to RTK as taught in advanced FEE lectures.</a:t>
+            </a:r>
+          </a:p>
+        </p:txBody>
+      </p:sp>
+    </p:spTree>
+  </p:cSld>
+  <p:clrMapOvr>
+    <a:masterClrMapping/>
+  </p:clrMapOvr>
+  <p:transition spd="fast">
+    <p:push dir="l"/>
+  </p:transition>
+</p:sld>
+</file>
+
+<file path=ppt/slides/slide14.xml><?xml version="1.0" encoding="utf-8"?>
+<p:sld xmlns:a="http://schemas.openxmlformats.org/drawingml/2006/main" xmlns:p="http://schemas.openxmlformats.org/presentationml/2006/main" xmlns:r="http://schemas.openxmlformats.org/officeDocument/2006/relationships">
+  <p:cSld>
+    <p:spTree>
+      <p:nvGrpSpPr>
+        <p:cNvPr id="1" name=""/>
+        <p:cNvGrpSpPr/>
+        <p:nvPr/>
+      </p:nvGrpSpPr>
+      <p:grpSpPr/>
+      <p:sp>
+        <p:nvSpPr>
+          <p:cNvPr id="2" name="Rectangle 1"/>
+          <p:cNvSpPr/>
+          <p:nvPr/>
+        </p:nvSpPr>
+        <p:spPr>
+          <a:xfrm>
+            <a:off x="0" y="0"/>
+            <a:ext cx="12191695" cy="6858000"/>
+          </a:xfrm>
+          <a:prstGeom prst="rect">
+            <a:avLst/>
+          </a:prstGeom>
+          <a:solidFill>
+            <a:srgbClr val="0B0C10"/>
+          </a:solidFill>
+          <a:ln>
+            <a:noFill/>
+          </a:ln>
+        </p:spPr>
+        <p:style>
+          <a:lnRef idx="1">
+            <a:schemeClr val="accent1"/>
+          </a:lnRef>
+          <a:fillRef idx="3">
+            <a:schemeClr val="accent1"/>
+          </a:fillRef>
+          <a:effectRef idx="2">
+            <a:schemeClr val="accent1"/>
+          </a:effectRef>
+          <a:fontRef idx="minor">
+            <a:schemeClr val="lt1"/>
+          </a:fontRef>
+        </p:style>
+        <p:txBody>
+          <a:bodyPr rtlCol="0" anchor="ctr"/>
+          <a:lstStyle/>
+          <a:p>
+            <a:pPr algn="ctr"/>
+          </a:p>
+        </p:txBody>
+      </p:sp>
+      <p:sp>
+        <p:nvSpPr>
+          <p:cNvPr id="3" name="Rectangle 2"/>
+          <p:cNvSpPr/>
+          <p:nvPr/>
+        </p:nvSpPr>
+        <p:spPr>
+          <a:xfrm>
+            <a:off x="731520" y="365760"/>
+            <a:ext cx="365760" cy="54864"/>
+          </a:xfrm>
+          <a:prstGeom prst="rect">
+            <a:avLst/>
+          </a:prstGeom>
+          <a:solidFill>
+            <a:srgbClr val="FF0033"/>
+          </a:solidFill>
+          <a:ln>
+            <a:noFill/>
+          </a:ln>
+        </p:spPr>
+        <p:style>
+          <a:lnRef idx="1">
+            <a:schemeClr val="accent1"/>
+          </a:lnRef>
+          <a:fillRef idx="3">
+            <a:schemeClr val="accent1"/>
+          </a:fillRef>
+          <a:effectRef idx="2">
+            <a:schemeClr val="accent1"/>
+          </a:effectRef>
+          <a:fontRef idx="minor">
+            <a:schemeClr val="lt1"/>
+          </a:fontRef>
+        </p:style>
+        <p:txBody>
+          <a:bodyPr rtlCol="0" anchor="ctr"/>
+          <a:lstStyle/>
+          <a:p>
+            <a:pPr algn="ctr"/>
+          </a:p>
+        </p:txBody>
+      </p:sp>
+      <p:sp>
+        <p:nvSpPr>
+          <p:cNvPr id="4" name="TextBox 3"/>
+          <p:cNvSpPr txBox="1"/>
+          <p:nvPr/>
+        </p:nvSpPr>
+        <p:spPr>
+          <a:xfrm>
+            <a:off x="1188720" y="292608"/>
+            <a:ext cx="10241280" cy="274320"/>
+          </a:xfrm>
+          <a:prstGeom prst="rect">
+            <a:avLst/>
+          </a:prstGeom>
+          <a:noFill/>
+        </p:spPr>
+        <p:txBody>
+          <a:bodyPr wrap="none">
+            <a:spAutoFit/>
+          </a:bodyPr>
+          <a:lstStyle/>
+          <a:p>
+            <a:pPr>
+              <a:defRPr sz="1150" b="1">
+                <a:solidFill>
+                  <a:srgbClr val="3EA6FF"/>
+                </a:solidFill>
+              </a:defRPr>
+            </a:pPr>
+            <a:r>
+              <a:t>GROUP G15  •  PROJECT ID: G15-PID-17 (P-17)  •  EVALUATION-II</a:t>
+            </a:r>
+          </a:p>
+        </p:txBody>
+      </p:sp>
+      <p:sp>
+        <p:nvSpPr>
+          <p:cNvPr id="5" name="TextBox 4"/>
+          <p:cNvSpPr txBox="1"/>
+          <p:nvPr/>
+        </p:nvSpPr>
+        <p:spPr>
+          <a:xfrm>
+            <a:off x="731520" y="621792"/>
+            <a:ext cx="10728655" cy="594360"/>
+          </a:xfrm>
+          <a:prstGeom prst="rect">
+            <a:avLst/>
+          </a:prstGeom>
+          <a:noFill/>
+        </p:spPr>
+        <p:txBody>
+          <a:bodyPr wrap="square">
+            <a:spAutoFit/>
+          </a:bodyPr>
+          <a:lstStyle/>
+          <a:p>
+            <a:pPr>
+              <a:defRPr sz="2300" b="1">
+                <a:solidFill>
+                  <a:srgbClr val="FFFFFF"/>
+                </a:solidFill>
+              </a:defRPr>
+            </a:pPr>
+            <a:r>
+              <a:t>Summary, Live Demonstration &amp; Viva Readiness</a:t>
+            </a:r>
+          </a:p>
+        </p:txBody>
+      </p:sp>
+      <p:sp>
+        <p:nvSpPr>
+          <p:cNvPr id="6" name="TextBox 5"/>
+          <p:cNvSpPr txBox="1"/>
+          <p:nvPr/>
+        </p:nvSpPr>
+        <p:spPr>
+          <a:xfrm>
+            <a:off x="731520" y="6327648"/>
+            <a:ext cx="10728655" cy="274320"/>
+          </a:xfrm>
+          <a:prstGeom prst="rect">
+            <a:avLst/>
+          </a:prstGeom>
+          <a:noFill/>
+        </p:spPr>
+        <p:txBody>
+          <a:bodyPr wrap="none">
+            <a:spAutoFit/>
+          </a:bodyPr>
+          <a:lstStyle/>
+          <a:p>
+            <a:pPr>
+              <a:defRPr sz="1000">
+                <a:solidFill>
+                  <a:srgbClr val="8C94A5"/>
+                </a:solidFill>
+              </a:defRPr>
+            </a:pPr>
+            <a:r>
+              <a:t>PheW TuBe: Video Streaming Platform (G15-PID-17)  |  Chitkara University FEE-II  |  Page 14</a:t>
+            </a:r>
+          </a:p>
+        </p:txBody>
+      </p:sp>
+      <p:sp>
+        <p:nvSpPr>
+          <p:cNvPr id="7" name="Rounded Rectangle 6"/>
+          <p:cNvSpPr/>
+          <p:nvPr/>
+        </p:nvSpPr>
+        <p:spPr>
+          <a:xfrm>
+            <a:off x="731520" y="1371600"/>
+            <a:ext cx="5212080" cy="4754880"/>
+          </a:xfrm>
+          <a:prstGeom prst="roundRect">
+            <a:avLst/>
+          </a:prstGeom>
+          <a:solidFill>
+            <a:srgbClr val="161922"/>
+          </a:solidFill>
+          <a:ln w="16510">
+            <a:solidFill>
+              <a:srgbClr val="2E3445"/>
+            </a:solidFill>
+          </a:ln>
+        </p:spPr>
+        <p:style>
+          <a:lnRef idx="1">
+            <a:schemeClr val="accent1"/>
+          </a:lnRef>
+          <a:fillRef idx="3">
+            <a:schemeClr val="accent1"/>
+          </a:fillRef>
+          <a:effectRef idx="2">
+            <a:schemeClr val="accent1"/>
+          </a:effectRef>
+          <a:fontRef idx="minor">
+            <a:schemeClr val="lt1"/>
+          </a:fontRef>
+        </p:style>
+        <p:txBody>
+          <a:bodyPr rtlCol="0" anchor="ctr"/>
+          <a:lstStyle/>
+          <a:p>
+            <a:pPr algn="ctr"/>
+          </a:p>
+        </p:txBody>
+      </p:sp>
+      <p:sp>
+        <p:nvSpPr>
+          <p:cNvPr id="8" name="TextBox 7"/>
+          <p:cNvSpPr txBox="1"/>
+          <p:nvPr/>
+        </p:nvSpPr>
+        <p:spPr>
+          <a:xfrm>
+            <a:off x="914400" y="1517904"/>
+            <a:ext cx="4846320" cy="4462272"/>
+          </a:xfrm>
+          <a:prstGeom prst="rect">
+            <a:avLst/>
+          </a:prstGeom>
+          <a:noFill/>
+        </p:spPr>
+        <p:txBody>
+          <a:bodyPr wrap="square" tIns="0" bIns="0" lIns="0" rIns="0">
+            <a:spAutoFit/>
+          </a:bodyPr>
+          <a:lstStyle/>
+          <a:p>
+            <a:pPr>
+              <a:spcAft>
+                <a:spcPts val="800"/>
+              </a:spcAft>
+              <a:defRPr sz="1550" b="1">
+                <a:solidFill>
+                  <a:srgbClr val="FF0033"/>
+                </a:solidFill>
+              </a:defRPr>
+            </a:pPr>
+            <a:r>
+              <a:t>Phase 2 Engineering Achievements</a:t>
+            </a:r>
+          </a:p>
+          <a:p>
+            <a:pPr>
+              <a:spcAft>
+                <a:spcPts val="600"/>
+              </a:spcAft>
+            </a:pPr>
+            <a:r>
+              <a:rPr b="1" sz="1200">
+                <a:solidFill>
+                  <a:srgbClr val="FF0033"/>
+                </a:solidFill>
+              </a:rPr>
+              <a:t>• </a:t>
+            </a:r>
+            <a:r>
+              <a:rPr b="1" sz="1200">
+                <a:solidFill>
+                  <a:srgbClr val="FFFFFF"/>
+                </a:solidFill>
+              </a:rPr>
+              <a:t>Zero Bounce In-App Streaming: </a:t>
+            </a:r>
+            <a:r>
+              <a:rPr sz="1200">
+                <a:solidFill>
+                  <a:srgbClr val="CDD2DC"/>
+                </a:solidFill>
+              </a:rPr>
+              <a:t>Fully functional /watch/:id route replacing external YouTube link-outs.</a:t>
+            </a:r>
+          </a:p>
+          <a:p>
+            <a:pPr>
+              <a:spcAft>
+                <a:spcPts val="600"/>
+              </a:spcAft>
+            </a:pPr>
+            <a:r>
+              <a:rPr b="1" sz="1200">
+                <a:solidFill>
+                  <a:srgbClr val="FF0033"/>
+                </a:solidFill>
+              </a:rPr>
+              <a:t>• </a:t>
+            </a:r>
+            <a:r>
+              <a:rPr b="1" sz="1200">
+                <a:solidFill>
+                  <a:srgbClr val="FFFFFF"/>
+                </a:solidFill>
+              </a:rPr>
+              <a:t>Strategic DOM Control: </a:t>
+            </a:r>
+            <a:r>
+              <a:rPr sz="1200">
+                <a:solidFill>
+                  <a:srgbClr val="CDD2DC"/>
+                </a:solidFill>
+              </a:rPr>
+              <a:t>useRef applied for auto-focusing comments and smooth scroll transitions.</a:t>
+            </a:r>
+          </a:p>
+          <a:p>
+            <a:pPr>
+              <a:spcAft>
+                <a:spcPts val="600"/>
+              </a:spcAft>
+            </a:pPr>
+            <a:r>
+              <a:rPr b="1" sz="1200">
+                <a:solidFill>
+                  <a:srgbClr val="FF0033"/>
+                </a:solidFill>
+              </a:rPr>
+              <a:t>• </a:t>
+            </a:r>
+            <a:r>
+              <a:rPr b="1" sz="1200">
+                <a:solidFill>
+                  <a:srgbClr val="FFFFFF"/>
+                </a:solidFill>
+              </a:rPr>
+              <a:t>Security &amp; Route Guarding: </a:t>
+            </a:r>
+            <a:r>
+              <a:rPr sz="1200">
+                <a:solidFill>
+                  <a:srgbClr val="CDD2DC"/>
+                </a:solidFill>
+              </a:rPr>
+              <a:t>ProtectedRoute wrapper securing private user feeds.</a:t>
+            </a:r>
+          </a:p>
+          <a:p>
+            <a:pPr>
+              <a:spcAft>
+                <a:spcPts val="600"/>
+              </a:spcAft>
+            </a:pPr>
+            <a:r>
+              <a:rPr b="1" sz="1200">
+                <a:solidFill>
+                  <a:srgbClr val="FF0033"/>
+                </a:solidFill>
+              </a:rPr>
+              <a:t>• </a:t>
+            </a:r>
+            <a:r>
+              <a:rPr b="1" sz="1200">
+                <a:solidFill>
+                  <a:srgbClr val="FFFFFF"/>
+                </a:solidFill>
+              </a:rPr>
+              <a:t>Classroom Alignment: </a:t>
+            </a:r>
+            <a:r>
+              <a:rPr sz="1200">
+                <a:solidFill>
+                  <a:srgbClr val="CDD2DC"/>
+                </a:solidFill>
+              </a:rPr>
+              <a:t>Infinite scroll (react-infinite-scroll) matching Mr. Shubham Kumar's syllabus.</a:t>
+            </a:r>
+          </a:p>
+          <a:p>
+            <a:pPr>
+              <a:spcAft>
+                <a:spcPts val="600"/>
+              </a:spcAft>
+            </a:pPr>
+            <a:r>
+              <a:rPr b="1" sz="1200">
+                <a:solidFill>
+                  <a:srgbClr val="FF0033"/>
+                </a:solidFill>
+              </a:rPr>
+              <a:t>• </a:t>
+            </a:r>
+            <a:r>
+              <a:rPr b="1" sz="1200">
+                <a:solidFill>
+                  <a:srgbClr val="FFFFFF"/>
+                </a:solidFill>
+              </a:rPr>
+              <a:t>Dual API Architecture: </a:t>
+            </a:r>
+            <a:r>
+              <a:rPr sz="1200">
+                <a:solidFill>
+                  <a:srgbClr val="CDD2DC"/>
+                </a:solidFill>
+              </a:rPr>
+              <a:t>YouTube Data API v3 with offline fallback guarantee.</a:t>
+            </a:r>
+          </a:p>
+        </p:txBody>
+      </p:sp>
+      <p:sp>
+        <p:nvSpPr>
+          <p:cNvPr id="9" name="Rounded Rectangle 8"/>
+          <p:cNvSpPr/>
+          <p:nvPr/>
+        </p:nvSpPr>
+        <p:spPr>
+          <a:xfrm>
+            <a:off x="6217920" y="1371600"/>
+            <a:ext cx="5212080" cy="4754880"/>
+          </a:xfrm>
+          <a:prstGeom prst="roundRect">
+            <a:avLst/>
+          </a:prstGeom>
+          <a:solidFill>
+            <a:srgbClr val="161922"/>
+          </a:solidFill>
+          <a:ln w="16510">
+            <a:solidFill>
+              <a:srgbClr val="2E3445"/>
+            </a:solidFill>
+          </a:ln>
+        </p:spPr>
+        <p:style>
+          <a:lnRef idx="1">
+            <a:schemeClr val="accent1"/>
+          </a:lnRef>
+          <a:fillRef idx="3">
+            <a:schemeClr val="accent1"/>
+          </a:fillRef>
+          <a:effectRef idx="2">
+            <a:schemeClr val="accent1"/>
+          </a:effectRef>
+          <a:fontRef idx="minor">
+            <a:schemeClr val="lt1"/>
+          </a:fontRef>
+        </p:style>
+        <p:txBody>
+          <a:bodyPr rtlCol="0" anchor="ctr"/>
+          <a:lstStyle/>
+          <a:p>
+            <a:pPr algn="ctr"/>
+          </a:p>
+        </p:txBody>
+      </p:sp>
+      <p:sp>
+        <p:nvSpPr>
+          <p:cNvPr id="10" name="TextBox 9"/>
+          <p:cNvSpPr txBox="1"/>
+          <p:nvPr/>
+        </p:nvSpPr>
+        <p:spPr>
+          <a:xfrm>
+            <a:off x="6400800" y="1517904"/>
+            <a:ext cx="4846320" cy="4462272"/>
+          </a:xfrm>
+          <a:prstGeom prst="rect">
+            <a:avLst/>
+          </a:prstGeom>
+          <a:noFill/>
+        </p:spPr>
+        <p:txBody>
+          <a:bodyPr wrap="square" tIns="0" bIns="0" lIns="0" rIns="0">
+            <a:spAutoFit/>
+          </a:bodyPr>
+          <a:lstStyle/>
+          <a:p>
+            <a:pPr>
+              <a:spcAft>
+                <a:spcPts val="800"/>
+              </a:spcAft>
+              <a:defRPr sz="1550" b="1">
+                <a:solidFill>
+                  <a:srgbClr val="2BA640"/>
+                </a:solidFill>
+              </a:defRPr>
+            </a:pPr>
+            <a:r>
               <a:t>Live Application Demonstration Highlights</a:t>
             </a:r>
           </a:p>
           <a:p>
             <a:pPr>
               <a:spcAft>
-                <a:spcPts val="800"/>
-              </a:spcAft>
-            </a:pPr>
-            <a:r>
-              <a:rPr b="1" sz="1500">
+                <a:spcPts val="600"/>
+              </a:spcAft>
+            </a:pPr>
+            <a:r>
+              <a:rPr b="1" sz="1200">
                 <a:solidFill>
                   <a:srgbClr val="2BA640"/>
                 </a:solidFill>
@@ -5383,7 +7251,7 @@
               <a:t>• </a:t>
             </a:r>
             <a:r>
-              <a:rPr b="1" sz="1400">
+              <a:rPr b="1" sz="1200">
                 <a:solidFill>
                   <a:srgbClr val="FFFFFF"/>
                 </a:solidFill>
@@ -5391,22 +7259,22 @@
               <a:t>Seamless Navigation: </a:t>
             </a:r>
             <a:r>
-              <a:rPr sz="1400">
+              <a:rPr sz="1200">
                 <a:solidFill>
                   <a:srgbClr val="CDD2DC"/>
                 </a:solidFill>
               </a:rPr>
-              <a:t>Switching channels, categories, and up-next recommendations with zero page flushes.</a:t>
-            </a:r>
-          </a:p>
-          <a:p>
-            <a:pPr>
-              <a:spcAft>
-                <a:spcPts val="800"/>
-              </a:spcAft>
-            </a:pPr>
-            <a:r>
-              <a:rPr b="1" sz="1500">
+              <a:t>Instant client-side transitions between Home, Shorts, Watch, and Channels.</a:t>
+            </a:r>
+          </a:p>
+          <a:p>
+            <a:pPr>
+              <a:spcAft>
+                <a:spcPts val="600"/>
+              </a:spcAft>
+            </a:pPr>
+            <a:r>
+              <a:rPr b="1" sz="1200">
                 <a:solidFill>
                   <a:srgbClr val="2BA640"/>
                 </a:solidFill>
@@ -5414,7 +7282,38 @@
               <a:t>• </a:t>
             </a:r>
             <a:r>
-              <a:rPr b="1" sz="1400">
+              <a:rPr b="1" sz="1200">
+                <a:solidFill>
+                  <a:srgbClr val="FFFFFF"/>
+                </a:solidFill>
+              </a:rPr>
+              <a:t>Live Demonstration Plan: </a:t>
+            </a:r>
+            <a:r>
+              <a:rPr sz="1200">
+                <a:solidFill>
+                  <a:srgbClr val="CDD2DC"/>
+                </a:solidFill>
+              </a:rPr>
+              <a:t>Demonstrating Infinite Scroll, Protected Route lock screen, and API toggle.</a:t>
+            </a:r>
+          </a:p>
+          <a:p>
+            <a:pPr>
+              <a:spcAft>
+                <a:spcPts val="600"/>
+              </a:spcAft>
+            </a:pPr>
+            <a:r>
+              <a:rPr b="1" sz="1200">
+                <a:solidFill>
+                  <a:srgbClr val="2BA640"/>
+                </a:solidFill>
+              </a:rPr>
+              <a:t>• </a:t>
+            </a:r>
+            <a:r>
+              <a:rPr b="1" sz="1200">
                 <a:solidFill>
                   <a:srgbClr val="FFFFFF"/>
                 </a:solidFill>
@@ -5422,22 +7321,22 @@
               <a:t>Multi-Device Adaptability: </a:t>
             </a:r>
             <a:r>
-              <a:rPr sz="1400">
+              <a:rPr sz="1200">
                 <a:solidFill>
                   <a:srgbClr val="CDD2DC"/>
                 </a:solidFill>
               </a:rPr>
-              <a:t>Tested across 375px mobile, 768px tablet, and 1440px desktop resolutions.</a:t>
-            </a:r>
-          </a:p>
-          <a:p>
-            <a:pPr>
-              <a:spcAft>
-                <a:spcPts val="800"/>
-              </a:spcAft>
-            </a:pPr>
-            <a:r>
-              <a:rPr b="1" sz="1500">
+              <a:t>Verified across 375px mobile, 1024px iPad Mini, and 1440px desktop screens.</a:t>
+            </a:r>
+          </a:p>
+          <a:p>
+            <a:pPr>
+              <a:spcAft>
+                <a:spcPts val="600"/>
+              </a:spcAft>
+            </a:pPr>
+            <a:r>
+              <a:rPr b="1" sz="1200">
                 <a:solidFill>
                   <a:srgbClr val="2BA640"/>
                 </a:solidFill>
@@ -5445,7 +7344,7 @@
               <a:t>• </a:t>
             </a:r>
             <a:r>
-              <a:rPr b="1" sz="1400">
+              <a:rPr b="1" sz="1200">
                 <a:solidFill>
                   <a:srgbClr val="FFFFFF"/>
                 </a:solidFill>
@@ -5453,22 +7352,22 @@
               <a:t>Production Verification: </a:t>
             </a:r>
             <a:r>
-              <a:rPr sz="1400">
+              <a:rPr sz="1200">
                 <a:solidFill>
                   <a:srgbClr val="CDD2DC"/>
                 </a:solidFill>
               </a:rPr>
-              <a:t>100% Vite build success (sub-350ms bundle time) with 0 errors.</a:t>
-            </a:r>
-          </a:p>
-          <a:p>
-            <a:pPr>
-              <a:spcAft>
-                <a:spcPts val="800"/>
-              </a:spcAft>
-            </a:pPr>
-            <a:r>
-              <a:rPr b="1" sz="1500">
+              <a:t>100% Vite build success (sub-1.2s bundle time) with 0 errors.</a:t>
+            </a:r>
+          </a:p>
+          <a:p>
+            <a:pPr>
+              <a:spcAft>
+                <a:spcPts val="600"/>
+              </a:spcAft>
+            </a:pPr>
+            <a:r>
+              <a:rPr b="1" sz="1200">
                 <a:solidFill>
                   <a:srgbClr val="2BA640"/>
                 </a:solidFill>
@@ -5476,15 +7375,15 @@
               <a:t>• </a:t>
             </a:r>
             <a:r>
-              <a:rPr b="1" sz="1400">
-                <a:solidFill>
-                  <a:srgbClr val="FFFFFF"/>
-                </a:solidFill>
-              </a:rPr>
-              <a:t>Q&amp;A Readiness: </a:t>
-            </a:r>
-            <a:r>
-              <a:rPr sz="1400">
+              <a:rPr b="1" sz="1200">
+                <a:solidFill>
+                  <a:srgbClr val="FFFFFF"/>
+                </a:solidFill>
+              </a:rPr>
+              <a:t>Viva Defense Readiness: </a:t>
+            </a:r>
+            <a:r>
+              <a:rPr sz="1200">
                 <a:solidFill>
                   <a:srgbClr val="CDD2DC"/>
                 </a:solidFill>
@@ -5624,7 +7523,7 @@
           <a:lstStyle/>
           <a:p>
             <a:pPr>
-              <a:defRPr sz="1200" b="1">
+              <a:defRPr sz="1150" b="1">
                 <a:solidFill>
                   <a:srgbClr val="3EA6FF"/>
                 </a:solidFill>
@@ -5645,7 +7544,42 @@
         <p:spPr>
           <a:xfrm>
             <a:off x="731520" y="621792"/>
-            <a:ext cx="10728655" cy="640080"/>
+            <a:ext cx="10728655" cy="594360"/>
+          </a:xfrm>
+          <a:prstGeom prst="rect">
+            <a:avLst/>
+          </a:prstGeom>
+          <a:noFill/>
+        </p:spPr>
+        <p:txBody>
+          <a:bodyPr wrap="square">
+            <a:spAutoFit/>
+          </a:bodyPr>
+          <a:lstStyle/>
+          <a:p>
+            <a:pPr>
+              <a:defRPr sz="2300" b="1">
+                <a:solidFill>
+                  <a:srgbClr val="FFFFFF"/>
+                </a:solidFill>
+              </a:defRPr>
+            </a:pPr>
+            <a:r>
+              <a:t>Table of Content</a:t>
+            </a:r>
+          </a:p>
+        </p:txBody>
+      </p:sp>
+      <p:sp>
+        <p:nvSpPr>
+          <p:cNvPr id="6" name="TextBox 5"/>
+          <p:cNvSpPr txBox="1"/>
+          <p:nvPr/>
+        </p:nvSpPr>
+        <p:spPr>
+          <a:xfrm>
+            <a:off x="731520" y="6327648"/>
+            <a:ext cx="10728655" cy="274320"/>
           </a:xfrm>
           <a:prstGeom prst="rect">
             <a:avLst/>
@@ -5659,49 +7593,14 @@
           <a:lstStyle/>
           <a:p>
             <a:pPr>
-              <a:defRPr sz="2500" b="1">
-                <a:solidFill>
-                  <a:srgbClr val="FFFFFF"/>
+              <a:defRPr sz="1000">
+                <a:solidFill>
+                  <a:srgbClr val="8C94A5"/>
                 </a:solidFill>
               </a:defRPr>
             </a:pPr>
             <a:r>
-              <a:t>Table of Content</a:t>
-            </a:r>
-          </a:p>
-        </p:txBody>
-      </p:sp>
-      <p:sp>
-        <p:nvSpPr>
-          <p:cNvPr id="6" name="TextBox 5"/>
-          <p:cNvSpPr txBox="1"/>
-          <p:nvPr/>
-        </p:nvSpPr>
-        <p:spPr>
-          <a:xfrm>
-            <a:off x="731520" y="6309360"/>
-            <a:ext cx="10728655" cy="320040"/>
-          </a:xfrm>
-          <a:prstGeom prst="rect">
-            <a:avLst/>
-          </a:prstGeom>
-          <a:noFill/>
-        </p:spPr>
-        <p:txBody>
-          <a:bodyPr wrap="none">
-            <a:spAutoFit/>
-          </a:bodyPr>
-          <a:lstStyle/>
-          <a:p>
-            <a:pPr>
-              <a:defRPr sz="1050">
-                <a:solidFill>
-                  <a:srgbClr val="828A9B"/>
-                </a:solidFill>
-              </a:defRPr>
-            </a:pPr>
-            <a:r>
-              <a:t>PheW TuBe: Video Streaming Platform (G15-PID-17)  |  Evaluation-II  |  Page 02</a:t>
+              <a:t>PheW TuBe: Video Streaming Platform (G15-PID-17)  |  Chitkara University FEE-II  |  Page 02</a:t>
             </a:r>
           </a:p>
         </p:txBody>
@@ -5715,7 +7614,7 @@
         <p:spPr>
           <a:xfrm>
             <a:off x="731520" y="1371600"/>
-            <a:ext cx="5212080" cy="4663440"/>
+            <a:ext cx="5212080" cy="4754880"/>
           </a:xfrm>
           <a:prstGeom prst="roundRect">
             <a:avLst/>
@@ -5723,7 +7622,7 @@
           <a:solidFill>
             <a:srgbClr val="161922"/>
           </a:solidFill>
-          <a:ln w="17780">
+          <a:ln w="16510">
             <a:solidFill>
               <a:srgbClr val="2E3445"/>
             </a:solidFill>
@@ -5759,8 +7658,8 @@
         </p:nvSpPr>
         <p:spPr>
           <a:xfrm>
-            <a:off x="914400" y="1554480"/>
-            <a:ext cx="4846320" cy="4297680"/>
+            <a:off x="914400" y="1536192"/>
+            <a:ext cx="4846320" cy="4389120"/>
           </a:xfrm>
           <a:prstGeom prst="rect">
             <a:avLst/>
@@ -5768,18 +7667,18 @@
           <a:noFill/>
         </p:spPr>
         <p:txBody>
-          <a:bodyPr wrap="none">
+          <a:bodyPr wrap="square">
             <a:spAutoFit/>
           </a:bodyPr>
           <a:lstStyle/>
           <a:p>
             <a:pPr>
               <a:spcAft>
-                <a:spcPts val="1800"/>
-              </a:spcAft>
-            </a:pPr>
-            <a:r>
-              <a:rPr b="1" sz="1500">
+                <a:spcPts val="1000"/>
+              </a:spcAft>
+            </a:pPr>
+            <a:r>
+              <a:rPr b="1" sz="1300">
                 <a:solidFill>
                   <a:srgbClr val="FF0033"/>
                 </a:solidFill>
@@ -5787,7 +7686,7 @@
               <a:t>01. </a:t>
             </a:r>
             <a:r>
-              <a:rPr sz="1400" b="1">
+              <a:rPr sz="1200" b="1">
                 <a:solidFill>
                   <a:srgbClr val="FFFFFF"/>
                 </a:solidFill>
@@ -5798,11 +7697,11 @@
           <a:p>
             <a:pPr>
               <a:spcAft>
-                <a:spcPts val="1800"/>
-              </a:spcAft>
-            </a:pPr>
-            <a:r>
-              <a:rPr b="1" sz="1500">
+                <a:spcPts val="1000"/>
+              </a:spcAft>
+            </a:pPr>
+            <a:r>
+              <a:rPr b="1" sz="1300">
                 <a:solidFill>
                   <a:srgbClr val="FF0033"/>
                 </a:solidFill>
@@ -5810,22 +7709,22 @@
               <a:t>02. </a:t>
             </a:r>
             <a:r>
-              <a:rPr sz="1400" b="1">
-                <a:solidFill>
-                  <a:srgbClr val="FFFFFF"/>
-                </a:solidFill>
-              </a:rPr>
-              <a:t>Syllabus-Aligned Technology Stack &amp; Architecture (Page 04)</a:t>
-            </a:r>
-          </a:p>
-          <a:p>
-            <a:pPr>
-              <a:spcAft>
-                <a:spcPts val="1800"/>
-              </a:spcAft>
-            </a:pPr>
-            <a:r>
-              <a:rPr b="1" sz="1500">
+              <a:rPr sz="1200" b="1">
+                <a:solidFill>
+                  <a:srgbClr val="FFFFFF"/>
+                </a:solidFill>
+              </a:rPr>
+              <a:t>Syllabus-Aligned Tech Stack &amp; Architecture (Page 04)</a:t>
+            </a:r>
+          </a:p>
+          <a:p>
+            <a:pPr>
+              <a:spcAft>
+                <a:spcPts val="1000"/>
+              </a:spcAft>
+            </a:pPr>
+            <a:r>
+              <a:rPr b="1" sz="1300">
                 <a:solidFill>
                   <a:srgbClr val="FF0033"/>
                 </a:solidFill>
@@ -5833,22 +7732,22 @@
               <a:t>03. </a:t>
             </a:r>
             <a:r>
-              <a:rPr sz="1400" b="1">
-                <a:solidFill>
-                  <a:srgbClr val="FFFFFF"/>
-                </a:solidFill>
-              </a:rPr>
-              <a:t>Core Component Architecture &amp; Modularity (Page 05)</a:t>
-            </a:r>
-          </a:p>
-          <a:p>
-            <a:pPr>
-              <a:spcAft>
-                <a:spcPts val="1800"/>
-              </a:spcAft>
-            </a:pPr>
-            <a:r>
-              <a:rPr b="1" sz="1500">
+              <a:rPr sz="1200" b="1">
+                <a:solidFill>
+                  <a:srgbClr val="FFFFFF"/>
+                </a:solidFill>
+              </a:rPr>
+              <a:t>Component Tree &amp; Unidirectional State Bus (Page 05)</a:t>
+            </a:r>
+          </a:p>
+          <a:p>
+            <a:pPr>
+              <a:spcAft>
+                <a:spcPts val="1000"/>
+              </a:spcAft>
+            </a:pPr>
+            <a:r>
+              <a:rPr b="1" sz="1300">
                 <a:solidFill>
                   <a:srgbClr val="FF0033"/>
                 </a:solidFill>
@@ -5856,22 +7755,22 @@
               <a:t>04. </a:t>
             </a:r>
             <a:r>
-              <a:rPr sz="1400" b="1">
-                <a:solidFill>
-                  <a:srgbClr val="FFFFFF"/>
-                </a:solidFill>
-              </a:rPr>
-              <a:t>Dynamic Watch Route &amp; Embedded Video Engine (/watch/:id) (Page 06)</a:t>
-            </a:r>
-          </a:p>
-          <a:p>
-            <a:pPr>
-              <a:spcAft>
-                <a:spcPts val="1800"/>
-              </a:spcAft>
-            </a:pPr>
-            <a:r>
-              <a:rPr b="1" sz="1500">
+              <a:rPr sz="1200" b="1">
+                <a:solidFill>
+                  <a:srgbClr val="FFFFFF"/>
+                </a:solidFill>
+              </a:rPr>
+              <a:t>Dynamic Watch Route &amp; Player (/watch/:id) (Page 06)</a:t>
+            </a:r>
+          </a:p>
+          <a:p>
+            <a:pPr>
+              <a:spcAft>
+                <a:spcPts val="1000"/>
+              </a:spcAft>
+            </a:pPr>
+            <a:r>
+              <a:rPr b="1" sz="1300">
                 <a:solidFill>
                   <a:srgbClr val="FF0033"/>
                 </a:solidFill>
@@ -5879,12 +7778,35 @@
               <a:t>05. </a:t>
             </a:r>
             <a:r>
-              <a:rPr sz="1400" b="1">
-                <a:solidFill>
-                  <a:srgbClr val="FFFFFF"/>
-                </a:solidFill>
-              </a:rPr>
-              <a:t>Interactive Comments System with useRef &amp; Dynamic Sorting (Page 07)</a:t>
+              <a:rPr sz="1200" b="1">
+                <a:solidFill>
+                  <a:srgbClr val="FFFFFF"/>
+                </a:solidFill>
+              </a:rPr>
+              <a:t>Interactive Comments &amp; DOM Focus (useRef) (Page 07)</a:t>
+            </a:r>
+          </a:p>
+          <a:p>
+            <a:pPr>
+              <a:spcAft>
+                <a:spcPts val="1000"/>
+              </a:spcAft>
+            </a:pPr>
+            <a:r>
+              <a:rPr b="1" sz="1300">
+                <a:solidFill>
+                  <a:srgbClr val="FF0033"/>
+                </a:solidFill>
+              </a:rPr>
+              <a:t>06. </a:t>
+            </a:r>
+            <a:r>
+              <a:rPr sz="1200" b="1">
+                <a:solidFill>
+                  <a:srgbClr val="FFFFFF"/>
+                </a:solidFill>
+              </a:rPr>
+              <a:t>Protected Routing &amp; Auth Guard Architecture (Page 08)</a:t>
             </a:r>
           </a:p>
         </p:txBody>
@@ -5898,7 +7820,7 @@
         <p:spPr>
           <a:xfrm>
             <a:off x="6217920" y="1371600"/>
-            <a:ext cx="5212080" cy="4663440"/>
+            <a:ext cx="5212080" cy="4754880"/>
           </a:xfrm>
           <a:prstGeom prst="roundRect">
             <a:avLst/>
@@ -5906,7 +7828,7 @@
           <a:solidFill>
             <a:srgbClr val="161922"/>
           </a:solidFill>
-          <a:ln w="17780">
+          <a:ln w="16510">
             <a:solidFill>
               <a:srgbClr val="2E3445"/>
             </a:solidFill>
@@ -5942,8 +7864,8 @@
         </p:nvSpPr>
         <p:spPr>
           <a:xfrm>
-            <a:off x="6400800" y="1554480"/>
-            <a:ext cx="4846320" cy="4297680"/>
+            <a:off x="6400800" y="1536192"/>
+            <a:ext cx="4846320" cy="4389120"/>
           </a:xfrm>
           <a:prstGeom prst="rect">
             <a:avLst/>
@@ -5951,123 +7873,146 @@
           <a:noFill/>
         </p:spPr>
         <p:txBody>
-          <a:bodyPr wrap="none">
+          <a:bodyPr wrap="square">
             <a:spAutoFit/>
           </a:bodyPr>
           <a:lstStyle/>
           <a:p>
             <a:pPr>
               <a:spcAft>
-                <a:spcPts val="1800"/>
-              </a:spcAft>
-            </a:pPr>
-            <a:r>
-              <a:rPr b="1" sz="1500">
+                <a:spcPts val="1000"/>
+              </a:spcAft>
+            </a:pPr>
+            <a:r>
+              <a:rPr b="1" sz="1300">
                 <a:solidFill>
                   <a:srgbClr val="3EA6FF"/>
                 </a:solidFill>
               </a:rPr>
-              <a:t>06. </a:t>
-            </a:r>
-            <a:r>
-              <a:rPr sz="1400" b="1">
-                <a:solidFill>
-                  <a:srgbClr val="FFFFFF"/>
-                </a:solidFill>
-              </a:rPr>
-              <a:t>Global State Architecture (Context API) &amp; LocalStorage Sync (Page 08)</a:t>
-            </a:r>
-          </a:p>
-          <a:p>
-            <a:pPr>
-              <a:spcAft>
-                <a:spcPts val="1800"/>
-              </a:spcAft>
-            </a:pPr>
-            <a:r>
-              <a:rPr b="1" sz="1500">
+              <a:t>07. </a:t>
+            </a:r>
+            <a:r>
+              <a:rPr sz="1200" b="1">
+                <a:solidFill>
+                  <a:srgbClr val="FFFFFF"/>
+                </a:solidFill>
+              </a:rPr>
+              <a:t>Infinite Scroll Feed Architecture (react-infinite-scroll) (Page 09)</a:t>
+            </a:r>
+          </a:p>
+          <a:p>
+            <a:pPr>
+              <a:spcAft>
+                <a:spcPts val="1000"/>
+              </a:spcAft>
+            </a:pPr>
+            <a:r>
+              <a:rPr b="1" sz="1300">
                 <a:solidFill>
                   <a:srgbClr val="3EA6FF"/>
                 </a:solidFill>
               </a:rPr>
-              <a:t>07. </a:t>
-            </a:r>
-            <a:r>
-              <a:rPr sz="1400" b="1">
-                <a:solidFill>
-                  <a:srgbClr val="FFFFFF"/>
-                </a:solidFill>
-              </a:rPr>
-              <a:t>Creator Ecosystem &amp; Exact 2026 YouTube Metrics (Page 09)</a:t>
-            </a:r>
-          </a:p>
-          <a:p>
-            <a:pPr>
-              <a:spcAft>
-                <a:spcPts val="1800"/>
-              </a:spcAft>
-            </a:pPr>
-            <a:r>
-              <a:rPr b="1" sz="1500">
+              <a:t>08. </a:t>
+            </a:r>
+            <a:r>
+              <a:rPr sz="1200" b="1">
+                <a:solidFill>
+                  <a:srgbClr val="FFFFFF"/>
+                </a:solidFill>
+              </a:rPr>
+              <a:t>YouTube Data API v3 &amp; Resilient Fallback Engine (Page 10)</a:t>
+            </a:r>
+          </a:p>
+          <a:p>
+            <a:pPr>
+              <a:spcAft>
+                <a:spcPts val="1000"/>
+              </a:spcAft>
+            </a:pPr>
+            <a:r>
+              <a:rPr b="1" sz="1300">
                 <a:solidFill>
                   <a:srgbClr val="3EA6FF"/>
                 </a:solidFill>
               </a:rPr>
-              <a:t>08. </a:t>
-            </a:r>
-            <a:r>
-              <a:rPr sz="1400" b="1">
-                <a:solidFill>
-                  <a:srgbClr val="FFFFFF"/>
-                </a:solidFill>
-              </a:rPr>
-              <a:t>Multi-Device Responsive Design &amp; Modern UI/UX Layer (Page 10)</a:t>
-            </a:r>
-          </a:p>
-          <a:p>
-            <a:pPr>
-              <a:spcAft>
-                <a:spcPts val="1800"/>
-              </a:spcAft>
-            </a:pPr>
-            <a:r>
-              <a:rPr b="1" sz="1500">
+              <a:t>09. </a:t>
+            </a:r>
+            <a:r>
+              <a:rPr sz="1200" b="1">
+                <a:solidFill>
+                  <a:srgbClr val="FFFFFF"/>
+                </a:solidFill>
+              </a:rPr>
+              <a:t>Creator Ecosystem &amp; Subscribed Channels Grid (Page 11)</a:t>
+            </a:r>
+          </a:p>
+          <a:p>
+            <a:pPr>
+              <a:spcAft>
+                <a:spcPts val="1000"/>
+              </a:spcAft>
+            </a:pPr>
+            <a:r>
+              <a:rPr b="1" sz="1300">
                 <a:solidFill>
                   <a:srgbClr val="3EA6FF"/>
                 </a:solidFill>
               </a:rPr>
-              <a:t>09. </a:t>
-            </a:r>
-            <a:r>
-              <a:rPr sz="1400" b="1">
-                <a:solidFill>
-                  <a:srgbClr val="FFFFFF"/>
-                </a:solidFill>
-              </a:rPr>
-              <a:t>Technical Roadmap &amp; Scope for Phase 3 (MERN Stack) (Page 11)</a:t>
-            </a:r>
-          </a:p>
-          <a:p>
-            <a:pPr>
-              <a:spcAft>
-                <a:spcPts val="1800"/>
-              </a:spcAft>
-            </a:pPr>
-            <a:r>
-              <a:rPr b="1" sz="1500">
+              <a:t>10. </a:t>
+            </a:r>
+            <a:r>
+              <a:rPr sz="1200" b="1">
+                <a:solidFill>
+                  <a:srgbClr val="FFFFFF"/>
+                </a:solidFill>
+              </a:rPr>
+              <a:t>Multi-Device Responsiveness (iPad 1024px &amp; Mobile) (Page 12)</a:t>
+            </a:r>
+          </a:p>
+          <a:p>
+            <a:pPr>
+              <a:spcAft>
+                <a:spcPts val="1000"/>
+              </a:spcAft>
+            </a:pPr>
+            <a:r>
+              <a:rPr b="1" sz="1300">
                 <a:solidFill>
                   <a:srgbClr val="3EA6FF"/>
                 </a:solidFill>
               </a:rPr>
-              <a:t>10. </a:t>
-            </a:r>
-            <a:r>
-              <a:rPr sz="1400" b="1">
-                <a:solidFill>
-                  <a:srgbClr val="FFFFFF"/>
-                </a:solidFill>
-              </a:rPr>
-              <a:t>Summary, Live Demonstration &amp; Viva Readiness (Page 12)</a:t>
+              <a:t>11. </a:t>
+            </a:r>
+            <a:r>
+              <a:rPr sz="1200" b="1">
+                <a:solidFill>
+                  <a:srgbClr val="FFFFFF"/>
+                </a:solidFill>
+              </a:rPr>
+              <a:t>Technical Roadmap &amp; Scope for Phase 3 (MERN Stack) (Page 13)</a:t>
+            </a:r>
+          </a:p>
+          <a:p>
+            <a:pPr>
+              <a:spcAft>
+                <a:spcPts val="1000"/>
+              </a:spcAft>
+            </a:pPr>
+            <a:r>
+              <a:rPr b="1" sz="1300">
+                <a:solidFill>
+                  <a:srgbClr val="3EA6FF"/>
+                </a:solidFill>
+              </a:rPr>
+              <a:t>12. </a:t>
+            </a:r>
+            <a:r>
+              <a:rPr sz="1200" b="1">
+                <a:solidFill>
+                  <a:srgbClr val="FFFFFF"/>
+                </a:solidFill>
+              </a:rPr>
+              <a:t>Summary, Live Demonstration &amp; Viva Defense (Page 14)</a:t>
             </a:r>
           </a:p>
         </p:txBody>
@@ -6202,7 +8147,7 @@
           <a:lstStyle/>
           <a:p>
             <a:pPr>
-              <a:defRPr sz="1200" b="1">
+              <a:defRPr sz="1150" b="1">
                 <a:solidFill>
                   <a:srgbClr val="3EA6FF"/>
                 </a:solidFill>
@@ -6223,7 +8168,42 @@
         <p:spPr>
           <a:xfrm>
             <a:off x="731520" y="621792"/>
-            <a:ext cx="10728655" cy="640080"/>
+            <a:ext cx="10728655" cy="594360"/>
+          </a:xfrm>
+          <a:prstGeom prst="rect">
+            <a:avLst/>
+          </a:prstGeom>
+          <a:noFill/>
+        </p:spPr>
+        <p:txBody>
+          <a:bodyPr wrap="square">
+            <a:spAutoFit/>
+          </a:bodyPr>
+          <a:lstStyle/>
+          <a:p>
+            <a:pPr>
+              <a:defRPr sz="2300" b="1">
+                <a:solidFill>
+                  <a:srgbClr val="FFFFFF"/>
+                </a:solidFill>
+              </a:defRPr>
+            </a:pPr>
+            <a:r>
+              <a:t>Evaluation-II Vision &amp; Milestone Objectives</a:t>
+            </a:r>
+          </a:p>
+        </p:txBody>
+      </p:sp>
+      <p:sp>
+        <p:nvSpPr>
+          <p:cNvPr id="6" name="TextBox 5"/>
+          <p:cNvSpPr txBox="1"/>
+          <p:nvPr/>
+        </p:nvSpPr>
+        <p:spPr>
+          <a:xfrm>
+            <a:off x="731520" y="6327648"/>
+            <a:ext cx="10728655" cy="274320"/>
           </a:xfrm>
           <a:prstGeom prst="rect">
             <a:avLst/>
@@ -6237,49 +8217,14 @@
           <a:lstStyle/>
           <a:p>
             <a:pPr>
-              <a:defRPr sz="2500" b="1">
-                <a:solidFill>
-                  <a:srgbClr val="FFFFFF"/>
+              <a:defRPr sz="1000">
+                <a:solidFill>
+                  <a:srgbClr val="8C94A5"/>
                 </a:solidFill>
               </a:defRPr>
             </a:pPr>
             <a:r>
-              <a:t>Evaluation-II Vision &amp; Milestone Objectives</a:t>
-            </a:r>
-          </a:p>
-        </p:txBody>
-      </p:sp>
-      <p:sp>
-        <p:nvSpPr>
-          <p:cNvPr id="6" name="TextBox 5"/>
-          <p:cNvSpPr txBox="1"/>
-          <p:nvPr/>
-        </p:nvSpPr>
-        <p:spPr>
-          <a:xfrm>
-            <a:off x="731520" y="6309360"/>
-            <a:ext cx="10728655" cy="320040"/>
-          </a:xfrm>
-          <a:prstGeom prst="rect">
-            <a:avLst/>
-          </a:prstGeom>
-          <a:noFill/>
-        </p:spPr>
-        <p:txBody>
-          <a:bodyPr wrap="none">
-            <a:spAutoFit/>
-          </a:bodyPr>
-          <a:lstStyle/>
-          <a:p>
-            <a:pPr>
-              <a:defRPr sz="1050">
-                <a:solidFill>
-                  <a:srgbClr val="828A9B"/>
-                </a:solidFill>
-              </a:defRPr>
-            </a:pPr>
-            <a:r>
-              <a:t>PheW TuBe: Video Streaming Platform (G15-PID-17)  |  Evaluation-II  |  Page 03</a:t>
+              <a:t>PheW TuBe: Video Streaming Platform (G15-PID-17)  |  Chitkara University FEE-II  |  Page 03</a:t>
             </a:r>
           </a:p>
         </p:txBody>
@@ -6293,7 +8238,7 @@
         <p:spPr>
           <a:xfrm>
             <a:off x="731520" y="1371600"/>
-            <a:ext cx="3383280" cy="4663440"/>
+            <a:ext cx="3383280" cy="4754880"/>
           </a:xfrm>
           <a:prstGeom prst="roundRect">
             <a:avLst/>
@@ -6301,7 +8246,7 @@
           <a:solidFill>
             <a:srgbClr val="161922"/>
           </a:solidFill>
-          <a:ln w="17780">
+          <a:ln w="16510">
             <a:solidFill>
               <a:srgbClr val="2E3445"/>
             </a:solidFill>
@@ -6337,8 +8282,8 @@
         </p:nvSpPr>
         <p:spPr>
           <a:xfrm>
-            <a:off x="932688" y="1536192"/>
-            <a:ext cx="2980944" cy="4334255"/>
+            <a:off x="914400" y="1517904"/>
+            <a:ext cx="3017520" cy="4462272"/>
           </a:xfrm>
           <a:prstGeom prst="rect">
             <a:avLst/>
@@ -6346,16 +8291,16 @@
           <a:noFill/>
         </p:spPr>
         <p:txBody>
-          <a:bodyPr wrap="square">
+          <a:bodyPr wrap="square" tIns="0" bIns="0" lIns="0" rIns="0">
             <a:spAutoFit/>
           </a:bodyPr>
           <a:lstStyle/>
           <a:p>
             <a:pPr>
               <a:spcAft>
-                <a:spcPts val="1000"/>
-              </a:spcAft>
-              <a:defRPr sz="1700" b="1">
+                <a:spcPts val="800"/>
+              </a:spcAft>
+              <a:defRPr sz="1550" b="1">
                 <a:solidFill>
                   <a:srgbClr val="FF0033"/>
                 </a:solidFill>
@@ -6368,11 +8313,11 @@
           <a:p>
             <a:pPr>
               <a:spcAft>
-                <a:spcPts val="800"/>
-              </a:spcAft>
-            </a:pPr>
-            <a:r>
-              <a:rPr b="1" sz="1500">
+                <a:spcPts val="600"/>
+              </a:spcAft>
+            </a:pPr>
+            <a:r>
+              <a:rPr b="1" sz="1200">
                 <a:solidFill>
                   <a:srgbClr val="FF0033"/>
                 </a:solidFill>
@@ -6380,30 +8325,30 @@
               <a:t>• </a:t>
             </a:r>
             <a:r>
-              <a:rPr b="1" sz="1400">
-                <a:solidFill>
-                  <a:srgbClr val="FFFFFF"/>
-                </a:solidFill>
-              </a:rPr>
-              <a:t>Phase 1 Foundation: </a:t>
-            </a:r>
-            <a:r>
-              <a:rPr sz="1400">
+              <a:rPr b="1" sz="1200">
+                <a:solidFill>
+                  <a:srgbClr val="FFFFFF"/>
+                </a:solidFill>
+              </a:rPr>
+              <a:t>Phase 1 Baseline: </a:t>
+            </a:r>
+            <a:r>
+              <a:rPr sz="1200">
                 <a:solidFill>
                   <a:srgbClr val="CDD2DC"/>
                 </a:solidFill>
               </a:rPr>
-              <a:t>Established responsive card grids, category chips, and external YouTube links.</a:t>
-            </a:r>
-          </a:p>
-          <a:p>
-            <a:pPr>
-              <a:spcAft>
-                <a:spcPts val="800"/>
-              </a:spcAft>
-            </a:pPr>
-            <a:r>
-              <a:rPr b="1" sz="1500">
+              <a:t>Established responsive card grids, category chips, and static YouTube links.</a:t>
+            </a:r>
+          </a:p>
+          <a:p>
+            <a:pPr>
+              <a:spcAft>
+                <a:spcPts val="600"/>
+              </a:spcAft>
+            </a:pPr>
+            <a:r>
+              <a:rPr b="1" sz="1200">
                 <a:solidFill>
                   <a:srgbClr val="FF0033"/>
                 </a:solidFill>
@@ -6411,15 +8356,15 @@
               <a:t>• </a:t>
             </a:r>
             <a:r>
-              <a:rPr b="1" sz="1400">
-                <a:solidFill>
-                  <a:srgbClr val="FFFFFF"/>
-                </a:solidFill>
-              </a:rPr>
-              <a:t>Phase 2 Transition: </a:t>
-            </a:r>
-            <a:r>
-              <a:rPr sz="1400">
+              <a:rPr b="1" sz="1200">
+                <a:solidFill>
+                  <a:srgbClr val="FFFFFF"/>
+                </a:solidFill>
+              </a:rPr>
+              <a:t>Phase 2 Evolution: </a:t>
+            </a:r>
+            <a:r>
+              <a:rPr sz="1200">
                 <a:solidFill>
                   <a:srgbClr val="CDD2DC"/>
                 </a:solidFill>
@@ -6430,11 +8375,11 @@
           <a:p>
             <a:pPr>
               <a:spcAft>
-                <a:spcPts val="800"/>
-              </a:spcAft>
-            </a:pPr>
-            <a:r>
-              <a:rPr b="1" sz="1500">
+                <a:spcPts val="600"/>
+              </a:spcAft>
+            </a:pPr>
+            <a:r>
+              <a:rPr b="1" sz="1200">
                 <a:solidFill>
                   <a:srgbClr val="FF0033"/>
                 </a:solidFill>
@@ -6442,7 +8387,7 @@
               <a:t>• </a:t>
             </a:r>
             <a:r>
-              <a:rPr b="1" sz="1400">
+              <a:rPr b="1" sz="1200">
                 <a:solidFill>
                   <a:srgbClr val="FFFFFF"/>
                 </a:solidFill>
@@ -6450,12 +8395,43 @@
               <a:t>Zero Page Reloads: </a:t>
             </a:r>
             <a:r>
-              <a:rPr sz="1400">
+              <a:rPr sz="1200">
                 <a:solidFill>
                   <a:srgbClr val="CDD2DC"/>
                 </a:solidFill>
               </a:rPr>
-              <a:t>Client-side routing via React Router DOM ensures instant state reactivity without full flushes.</a:t>
+              <a:t>Client-side routing via React Router DOM ensures instant state reactivity.</a:t>
+            </a:r>
+          </a:p>
+          <a:p>
+            <a:pPr>
+              <a:spcAft>
+                <a:spcPts val="600"/>
+              </a:spcAft>
+            </a:pPr>
+            <a:r>
+              <a:rPr b="1" sz="1200">
+                <a:solidFill>
+                  <a:srgbClr val="FF0033"/>
+                </a:solidFill>
+              </a:rPr>
+              <a:t>• </a:t>
+            </a:r>
+            <a:r>
+              <a:rPr b="1" sz="1200">
+                <a:solidFill>
+                  <a:srgbClr val="FFFFFF"/>
+                </a:solidFill>
+              </a:rPr>
+              <a:t>High User Retention: </a:t>
+            </a:r>
+            <a:r>
+              <a:rPr sz="1200">
+                <a:solidFill>
+                  <a:srgbClr val="CDD2DC"/>
+                </a:solidFill>
+              </a:rPr>
+              <a:t>Ad-free playback and instant search filters maximize student study focus.</a:t>
             </a:r>
           </a:p>
         </p:txBody>
@@ -6469,7 +8445,7 @@
         <p:spPr>
           <a:xfrm>
             <a:off x="4389120" y="1371600"/>
-            <a:ext cx="3383280" cy="4663440"/>
+            <a:ext cx="3383280" cy="4754880"/>
           </a:xfrm>
           <a:prstGeom prst="roundRect">
             <a:avLst/>
@@ -6477,7 +8453,7 @@
           <a:solidFill>
             <a:srgbClr val="161922"/>
           </a:solidFill>
-          <a:ln w="17780">
+          <a:ln w="16510">
             <a:solidFill>
               <a:srgbClr val="2E3445"/>
             </a:solidFill>
@@ -6513,8 +8489,8 @@
         </p:nvSpPr>
         <p:spPr>
           <a:xfrm>
-            <a:off x="4590288" y="1536192"/>
-            <a:ext cx="2980944" cy="4334255"/>
+            <a:off x="4572000" y="1517904"/>
+            <a:ext cx="3017520" cy="4462272"/>
           </a:xfrm>
           <a:prstGeom prst="rect">
             <a:avLst/>
@@ -6522,16 +8498,16 @@
           <a:noFill/>
         </p:spPr>
         <p:txBody>
-          <a:bodyPr wrap="square">
+          <a:bodyPr wrap="square" tIns="0" bIns="0" lIns="0" rIns="0">
             <a:spAutoFit/>
           </a:bodyPr>
           <a:lstStyle/>
           <a:p>
             <a:pPr>
               <a:spcAft>
-                <a:spcPts val="1000"/>
-              </a:spcAft>
-              <a:defRPr sz="1700" b="1">
+                <a:spcPts val="800"/>
+              </a:spcAft>
+              <a:defRPr sz="1550" b="1">
                 <a:solidFill>
                   <a:srgbClr val="3EA6FF"/>
                 </a:solidFill>
@@ -6544,11 +8520,11 @@
           <a:p>
             <a:pPr>
               <a:spcAft>
-                <a:spcPts val="800"/>
-              </a:spcAft>
-            </a:pPr>
-            <a:r>
-              <a:rPr b="1" sz="1500">
+                <a:spcPts val="600"/>
+              </a:spcAft>
+            </a:pPr>
+            <a:r>
+              <a:rPr b="1" sz="1200">
                 <a:solidFill>
                   <a:srgbClr val="3EA6FF"/>
                 </a:solidFill>
@@ -6556,7 +8532,7 @@
               <a:t>• </a:t>
             </a:r>
             <a:r>
-              <a:rPr b="1" sz="1400">
+              <a:rPr b="1" sz="1200">
                 <a:solidFill>
                   <a:srgbClr val="FFFFFF"/>
                 </a:solidFill>
@@ -6564,7 +8540,7 @@
               <a:t>Dynamic Route: </a:t>
             </a:r>
             <a:r>
-              <a:rPr sz="1400">
+              <a:rPr sz="1200">
                 <a:solidFill>
                   <a:srgbClr val="CDD2DC"/>
                 </a:solidFill>
@@ -6575,11 +8551,11 @@
           <a:p>
             <a:pPr>
               <a:spcAft>
-                <a:spcPts val="800"/>
-              </a:spcAft>
-            </a:pPr>
-            <a:r>
-              <a:rPr b="1" sz="1500">
+                <a:spcPts val="600"/>
+              </a:spcAft>
+            </a:pPr>
+            <a:r>
+              <a:rPr b="1" sz="1200">
                 <a:solidFill>
                   <a:srgbClr val="3EA6FF"/>
                 </a:solidFill>
@@ -6587,7 +8563,7 @@
               <a:t>• </a:t>
             </a:r>
             <a:r>
-              <a:rPr b="1" sz="1400">
+              <a:rPr b="1" sz="1200">
                 <a:solidFill>
                   <a:srgbClr val="FFFFFF"/>
                 </a:solidFill>
@@ -6595,7 +8571,7 @@
               <a:t>DOM Control via useRef: </a:t>
             </a:r>
             <a:r>
-              <a:rPr sz="1400">
+              <a:rPr sz="1200">
                 <a:solidFill>
                   <a:srgbClr val="CDD2DC"/>
                 </a:solidFill>
@@ -6606,11 +8582,11 @@
           <a:p>
             <a:pPr>
               <a:spcAft>
-                <a:spcPts val="800"/>
-              </a:spcAft>
-            </a:pPr>
-            <a:r>
-              <a:rPr b="1" sz="1500">
+                <a:spcPts val="600"/>
+              </a:spcAft>
+            </a:pPr>
+            <a:r>
+              <a:rPr b="1" sz="1200">
                 <a:solidFill>
                   <a:srgbClr val="3EA6FF"/>
                 </a:solidFill>
@@ -6618,20 +8594,51 @@
               <a:t>• </a:t>
             </a:r>
             <a:r>
-              <a:rPr b="1" sz="1400">
-                <a:solidFill>
-                  <a:srgbClr val="FFFFFF"/>
-                </a:solidFill>
-              </a:rPr>
-              <a:t>Global Context API: </a:t>
-            </a:r>
-            <a:r>
-              <a:rPr sz="1400">
+              <a:rPr b="1" sz="1200">
+                <a:solidFill>
+                  <a:srgbClr val="FFFFFF"/>
+                </a:solidFill>
+              </a:rPr>
+              <a:t>Protected Routing: </a:t>
+            </a:r>
+            <a:r>
+              <a:rPr sz="1200">
                 <a:solidFill>
                   <a:srgbClr val="CDD2DC"/>
                 </a:solidFill>
               </a:rPr>
-              <a:t>Centralized multi-state bus eliminating prop drilling across nested component trees.</a:t>
+              <a:t>Guards sensitive user sections (Subscriptions, History, Library) for authenticated users only.</a:t>
+            </a:r>
+          </a:p>
+          <a:p>
+            <a:pPr>
+              <a:spcAft>
+                <a:spcPts val="600"/>
+              </a:spcAft>
+            </a:pPr>
+            <a:r>
+              <a:rPr b="1" sz="1200">
+                <a:solidFill>
+                  <a:srgbClr val="3EA6FF"/>
+                </a:solidFill>
+              </a:rPr>
+              <a:t>• </a:t>
+            </a:r>
+            <a:r>
+              <a:rPr b="1" sz="1200">
+                <a:solidFill>
+                  <a:srgbClr val="FFFFFF"/>
+                </a:solidFill>
+              </a:rPr>
+              <a:t>Infinite Pagination: </a:t>
+            </a:r>
+            <a:r>
+              <a:rPr sz="1200">
+                <a:solidFill>
+                  <a:srgbClr val="CDD2DC"/>
+                </a:solidFill>
+              </a:rPr>
+              <a:t>Non-blocking feed expansion matching modern web performance standards.</a:t>
             </a:r>
           </a:p>
         </p:txBody>
@@ -6645,7 +8652,7 @@
         <p:spPr>
           <a:xfrm>
             <a:off x="8046720" y="1371600"/>
-            <a:ext cx="3383280" cy="4663440"/>
+            <a:ext cx="3383280" cy="4754880"/>
           </a:xfrm>
           <a:prstGeom prst="roundRect">
             <a:avLst/>
@@ -6653,7 +8660,7 @@
           <a:solidFill>
             <a:srgbClr val="161922"/>
           </a:solidFill>
-          <a:ln w="17780">
+          <a:ln w="16510">
             <a:solidFill>
               <a:srgbClr val="2E3445"/>
             </a:solidFill>
@@ -6689,8 +8696,8 @@
         </p:nvSpPr>
         <p:spPr>
           <a:xfrm>
-            <a:off x="8247888" y="1536192"/>
-            <a:ext cx="2980944" cy="4334255"/>
+            <a:off x="8229600" y="1517904"/>
+            <a:ext cx="3017520" cy="4462272"/>
           </a:xfrm>
           <a:prstGeom prst="rect">
             <a:avLst/>
@@ -6698,16 +8705,16 @@
           <a:noFill/>
         </p:spPr>
         <p:txBody>
-          <a:bodyPr wrap="square">
+          <a:bodyPr wrap="square" tIns="0" bIns="0" lIns="0" rIns="0">
             <a:spAutoFit/>
           </a:bodyPr>
           <a:lstStyle/>
           <a:p>
             <a:pPr>
               <a:spcAft>
-                <a:spcPts val="1000"/>
-              </a:spcAft>
-              <a:defRPr sz="1700" b="1">
+                <a:spcPts val="800"/>
+              </a:spcAft>
+              <a:defRPr sz="1550" b="1">
                 <a:solidFill>
                   <a:srgbClr val="2BA640"/>
                 </a:solidFill>
@@ -6720,11 +8727,11 @@
           <a:p>
             <a:pPr>
               <a:spcAft>
-                <a:spcPts val="800"/>
-              </a:spcAft>
-            </a:pPr>
-            <a:r>
-              <a:rPr b="1" sz="1500">
+                <a:spcPts val="600"/>
+              </a:spcAft>
+            </a:pPr>
+            <a:r>
+              <a:rPr b="1" sz="1200">
                 <a:solidFill>
                   <a:srgbClr val="2BA640"/>
                 </a:solidFill>
@@ -6732,7 +8739,7 @@
               <a:t>• </a:t>
             </a:r>
             <a:r>
-              <a:rPr b="1" sz="1400">
+              <a:rPr b="1" sz="1200">
                 <a:solidFill>
                   <a:srgbClr val="FFFFFF"/>
                 </a:solidFill>
@@ -6740,7 +8747,7 @@
               <a:t>Up-Next Queue: </a:t>
             </a:r>
             <a:r>
-              <a:rPr sz="1400">
+              <a:rPr sz="1200">
                 <a:solidFill>
                   <a:srgbClr val="CDD2DC"/>
                 </a:solidFill>
@@ -6751,11 +8758,11 @@
           <a:p>
             <a:pPr>
               <a:spcAft>
-                <a:spcPts val="800"/>
-              </a:spcAft>
-            </a:pPr>
-            <a:r>
-              <a:rPr b="1" sz="1500">
+                <a:spcPts val="600"/>
+              </a:spcAft>
+            </a:pPr>
+            <a:r>
+              <a:rPr b="1" sz="1200">
                 <a:solidFill>
                   <a:srgbClr val="2BA640"/>
                 </a:solidFill>
@@ -6763,15 +8770,15 @@
               <a:t>• </a:t>
             </a:r>
             <a:r>
-              <a:rPr b="1" sz="1400">
-                <a:solidFill>
-                  <a:srgbClr val="FFFFFF"/>
-                </a:solidFill>
-              </a:rPr>
-              <a:t>Toast Bus: </a:t>
-            </a:r>
-            <a:r>
-              <a:rPr sz="1400">
+              <a:rPr b="1" sz="1200">
+                <a:solidFill>
+                  <a:srgbClr val="FFFFFF"/>
+                </a:solidFill>
+              </a:rPr>
+              <a:t>Toast Feedback: </a:t>
+            </a:r>
+            <a:r>
+              <a:rPr sz="1200">
                 <a:solidFill>
                   <a:srgbClr val="CDD2DC"/>
                 </a:solidFill>
@@ -6782,11 +8789,11 @@
           <a:p>
             <a:pPr>
               <a:spcAft>
-                <a:spcPts val="800"/>
-              </a:spcAft>
-            </a:pPr>
-            <a:r>
-              <a:rPr b="1" sz="1500">
+                <a:spcPts val="600"/>
+              </a:spcAft>
+            </a:pPr>
+            <a:r>
+              <a:rPr b="1" sz="1200">
                 <a:solidFill>
                   <a:srgbClr val="2BA640"/>
                 </a:solidFill>
@@ -6794,7 +8801,7 @@
               <a:t>• </a:t>
             </a:r>
             <a:r>
-              <a:rPr b="1" sz="1400">
+              <a:rPr b="1" sz="1200">
                 <a:solidFill>
                   <a:srgbClr val="FFFFFF"/>
                 </a:solidFill>
@@ -6802,12 +8809,43 @@
               <a:t>Responsive Parity: </a:t>
             </a:r>
             <a:r>
-              <a:rPr sz="1400">
+              <a:rPr sz="1200">
                 <a:solidFill>
                   <a:srgbClr val="CDD2DC"/>
                 </a:solidFill>
               </a:rPr>
-              <a:t>Fluid scaling across 375px mobile, 768px tablet, and 1440px desktop screens.</a:t>
+              <a:t>Fluid scaling across 375px mobile, 1024px iPad Mini, and 1440px desktop screens.</a:t>
+            </a:r>
+          </a:p>
+          <a:p>
+            <a:pPr>
+              <a:spcAft>
+                <a:spcPts val="600"/>
+              </a:spcAft>
+            </a:pPr>
+            <a:r>
+              <a:rPr b="1" sz="1200">
+                <a:solidFill>
+                  <a:srgbClr val="2BA640"/>
+                </a:solidFill>
+              </a:rPr>
+              <a:t>• </a:t>
+            </a:r>
+            <a:r>
+              <a:rPr b="1" sz="1200">
+                <a:solidFill>
+                  <a:srgbClr val="FFFFFF"/>
+                </a:solidFill>
+              </a:rPr>
+              <a:t>Durability: </a:t>
+            </a:r>
+            <a:r>
+              <a:rPr sz="1200">
+                <a:solidFill>
+                  <a:srgbClr val="CDD2DC"/>
+                </a:solidFill>
+              </a:rPr>
+              <a:t>Persistent state synced across browser sessions via localStorage.</a:t>
             </a:r>
           </a:p>
         </p:txBody>
@@ -6942,7 +8980,7 @@
           <a:lstStyle/>
           <a:p>
             <a:pPr>
-              <a:defRPr sz="1200" b="1">
+              <a:defRPr sz="1150" b="1">
                 <a:solidFill>
                   <a:srgbClr val="3EA6FF"/>
                 </a:solidFill>
@@ -6963,7 +9001,42 @@
         <p:spPr>
           <a:xfrm>
             <a:off x="731520" y="621792"/>
-            <a:ext cx="10728655" cy="640080"/>
+            <a:ext cx="10728655" cy="594360"/>
+          </a:xfrm>
+          <a:prstGeom prst="rect">
+            <a:avLst/>
+          </a:prstGeom>
+          <a:noFill/>
+        </p:spPr>
+        <p:txBody>
+          <a:bodyPr wrap="square">
+            <a:spAutoFit/>
+          </a:bodyPr>
+          <a:lstStyle/>
+          <a:p>
+            <a:pPr>
+              <a:defRPr sz="2300" b="1">
+                <a:solidFill>
+                  <a:srgbClr val="FFFFFF"/>
+                </a:solidFill>
+              </a:defRPr>
+            </a:pPr>
+            <a:r>
+              <a:t>Syllabus-Aligned Technology Stack &amp; Architecture</a:t>
+            </a:r>
+          </a:p>
+        </p:txBody>
+      </p:sp>
+      <p:sp>
+        <p:nvSpPr>
+          <p:cNvPr id="6" name="TextBox 5"/>
+          <p:cNvSpPr txBox="1"/>
+          <p:nvPr/>
+        </p:nvSpPr>
+        <p:spPr>
+          <a:xfrm>
+            <a:off x="731520" y="6327648"/>
+            <a:ext cx="10728655" cy="274320"/>
           </a:xfrm>
           <a:prstGeom prst="rect">
             <a:avLst/>
@@ -6977,49 +9050,14 @@
           <a:lstStyle/>
           <a:p>
             <a:pPr>
-              <a:defRPr sz="2500" b="1">
-                <a:solidFill>
-                  <a:srgbClr val="FFFFFF"/>
+              <a:defRPr sz="1000">
+                <a:solidFill>
+                  <a:srgbClr val="8C94A5"/>
                 </a:solidFill>
               </a:defRPr>
             </a:pPr>
             <a:r>
-              <a:t>Syllabus-Aligned Technology Stack &amp; Architecture</a:t>
-            </a:r>
-          </a:p>
-        </p:txBody>
-      </p:sp>
-      <p:sp>
-        <p:nvSpPr>
-          <p:cNvPr id="6" name="TextBox 5"/>
-          <p:cNvSpPr txBox="1"/>
-          <p:nvPr/>
-        </p:nvSpPr>
-        <p:spPr>
-          <a:xfrm>
-            <a:off x="731520" y="6309360"/>
-            <a:ext cx="10728655" cy="320040"/>
-          </a:xfrm>
-          <a:prstGeom prst="rect">
-            <a:avLst/>
-          </a:prstGeom>
-          <a:noFill/>
-        </p:spPr>
-        <p:txBody>
-          <a:bodyPr wrap="none">
-            <a:spAutoFit/>
-          </a:bodyPr>
-          <a:lstStyle/>
-          <a:p>
-            <a:pPr>
-              <a:defRPr sz="1050">
-                <a:solidFill>
-                  <a:srgbClr val="828A9B"/>
-                </a:solidFill>
-              </a:defRPr>
-            </a:pPr>
-            <a:r>
-              <a:t>PheW TuBe: Video Streaming Platform (G15-PID-17)  |  Evaluation-II  |  Page 04</a:t>
+              <a:t>PheW TuBe: Video Streaming Platform (G15-PID-17)  |  Chitkara University FEE-II  |  Page 04</a:t>
             </a:r>
           </a:p>
         </p:txBody>
@@ -7033,7 +9071,7 @@
         <p:spPr>
           <a:xfrm>
             <a:off x="731520" y="1371600"/>
-            <a:ext cx="3383280" cy="4663440"/>
+            <a:ext cx="3383280" cy="4754880"/>
           </a:xfrm>
           <a:prstGeom prst="roundRect">
             <a:avLst/>
@@ -7041,7 +9079,7 @@
           <a:solidFill>
             <a:srgbClr val="161922"/>
           </a:solidFill>
-          <a:ln w="17780">
+          <a:ln w="16510">
             <a:solidFill>
               <a:srgbClr val="2E3445"/>
             </a:solidFill>
@@ -7077,8 +9115,8 @@
         </p:nvSpPr>
         <p:spPr>
           <a:xfrm>
-            <a:off x="932688" y="1536192"/>
-            <a:ext cx="2980944" cy="4334255"/>
+            <a:off x="914400" y="1517904"/>
+            <a:ext cx="3017520" cy="4462272"/>
           </a:xfrm>
           <a:prstGeom prst="rect">
             <a:avLst/>
@@ -7086,33 +9124,33 @@
           <a:noFill/>
         </p:spPr>
         <p:txBody>
-          <a:bodyPr wrap="square">
+          <a:bodyPr wrap="square" tIns="0" bIns="0" lIns="0" rIns="0">
             <a:spAutoFit/>
           </a:bodyPr>
           <a:lstStyle/>
           <a:p>
             <a:pPr>
               <a:spcAft>
-                <a:spcPts val="1000"/>
-              </a:spcAft>
-              <a:defRPr sz="1700" b="1">
+                <a:spcPts val="800"/>
+              </a:spcAft>
+              <a:defRPr sz="1550" b="1">
                 <a:solidFill>
                   <a:srgbClr val="FF0033"/>
                 </a:solidFill>
               </a:defRPr>
             </a:pPr>
             <a:r>
-              <a:t>React 19 &amp; Routing</a:t>
-            </a:r>
-          </a:p>
-          <a:p>
-            <a:pPr>
-              <a:spcAft>
-                <a:spcPts val="800"/>
-              </a:spcAft>
-            </a:pPr>
-            <a:r>
-              <a:rPr b="1" sz="1500">
+              <a:t>React 19 &amp; Routing Layer</a:t>
+            </a:r>
+          </a:p>
+          <a:p>
+            <a:pPr>
+              <a:spcAft>
+                <a:spcPts val="600"/>
+              </a:spcAft>
+            </a:pPr>
+            <a:r>
+              <a:rPr b="1" sz="1200">
                 <a:solidFill>
                   <a:srgbClr val="FF0033"/>
                 </a:solidFill>
@@ -7120,7 +9158,7 @@
               <a:t>• </a:t>
             </a:r>
             <a:r>
-              <a:rPr b="1" sz="1400">
+              <a:rPr b="1" sz="1200">
                 <a:solidFill>
                   <a:srgbClr val="FFFFFF"/>
                 </a:solidFill>
@@ -7128,7 +9166,7 @@
               <a:t>Functional Components: </a:t>
             </a:r>
             <a:r>
-              <a:rPr sz="1400">
+              <a:rPr sz="1200">
                 <a:solidFill>
                   <a:srgbClr val="CDD2DC"/>
                 </a:solidFill>
@@ -7139,11 +9177,11 @@
           <a:p>
             <a:pPr>
               <a:spcAft>
-                <a:spcPts val="800"/>
-              </a:spcAft>
-            </a:pPr>
-            <a:r>
-              <a:rPr b="1" sz="1500">
+                <a:spcPts val="600"/>
+              </a:spcAft>
+            </a:pPr>
+            <a:r>
+              <a:rPr b="1" sz="1200">
                 <a:solidFill>
                   <a:srgbClr val="FF0033"/>
                 </a:solidFill>
@@ -7151,7 +9189,7 @@
               <a:t>• </a:t>
             </a:r>
             <a:r>
-              <a:rPr b="1" sz="1400">
+              <a:rPr b="1" sz="1200">
                 <a:solidFill>
                   <a:srgbClr val="FFFFFF"/>
                 </a:solidFill>
@@ -7159,22 +9197,22 @@
               <a:t>React Router DOM v6: </a:t>
             </a:r>
             <a:r>
-              <a:rPr sz="1400">
+              <a:rPr sz="1200">
                 <a:solidFill>
                   <a:srgbClr val="CDD2DC"/>
                 </a:solidFill>
               </a:rPr>
-              <a:t>Declarative routing engine featuring parameterized dynamic routes (/watch/:id).</a:t>
-            </a:r>
-          </a:p>
-          <a:p>
-            <a:pPr>
-              <a:spcAft>
-                <a:spcPts val="800"/>
-              </a:spcAft>
-            </a:pPr>
-            <a:r>
-              <a:rPr b="1" sz="1500">
+              <a:t>Declarative routing engine with parameterized dynamic routes (/watch/:id).</a:t>
+            </a:r>
+          </a:p>
+          <a:p>
+            <a:pPr>
+              <a:spcAft>
+                <a:spcPts val="600"/>
+              </a:spcAft>
+            </a:pPr>
+            <a:r>
+              <a:rPr b="1" sz="1200">
                 <a:solidFill>
                   <a:srgbClr val="FF0033"/>
                 </a:solidFill>
@@ -7182,7 +9220,7 @@
               <a:t>• </a:t>
             </a:r>
             <a:r>
-              <a:rPr b="1" sz="1400">
+              <a:rPr b="1" sz="1200">
                 <a:solidFill>
                   <a:srgbClr val="FFFFFF"/>
                 </a:solidFill>
@@ -7190,12 +9228,43 @@
               <a:t>Vite 8 Build Tooling: </a:t>
             </a:r>
             <a:r>
-              <a:rPr sz="1400">
+              <a:rPr sz="1200">
                 <a:solidFill>
                   <a:srgbClr val="CDD2DC"/>
                 </a:solidFill>
               </a:rPr>
               <a:t>Lightning-fast ESM bundling delivering sub-350ms hot module replacement (HMR).</a:t>
+            </a:r>
+          </a:p>
+          <a:p>
+            <a:pPr>
+              <a:spcAft>
+                <a:spcPts val="600"/>
+              </a:spcAft>
+            </a:pPr>
+            <a:r>
+              <a:rPr b="1" sz="1200">
+                <a:solidFill>
+                  <a:srgbClr val="FF0033"/>
+                </a:solidFill>
+              </a:rPr>
+              <a:t>• </a:t>
+            </a:r>
+            <a:r>
+              <a:rPr b="1" sz="1200">
+                <a:solidFill>
+                  <a:srgbClr val="FFFFFF"/>
+                </a:solidFill>
+              </a:rPr>
+              <a:t>Production Build: </a:t>
+            </a:r>
+            <a:r>
+              <a:rPr sz="1200">
+                <a:solidFill>
+                  <a:srgbClr val="CDD2DC"/>
+                </a:solidFill>
+              </a:rPr>
+              <a:t>Compiles cleanly in ~1.16s into optimized, tree-shaken static bundles.</a:t>
             </a:r>
           </a:p>
         </p:txBody>
@@ -7209,7 +9278,7 @@
         <p:spPr>
           <a:xfrm>
             <a:off x="4389120" y="1371600"/>
-            <a:ext cx="3383280" cy="4663440"/>
+            <a:ext cx="3383280" cy="4754880"/>
           </a:xfrm>
           <a:prstGeom prst="roundRect">
             <a:avLst/>
@@ -7217,7 +9286,7 @@
           <a:solidFill>
             <a:srgbClr val="161922"/>
           </a:solidFill>
-          <a:ln w="17780">
+          <a:ln w="16510">
             <a:solidFill>
               <a:srgbClr val="2E3445"/>
             </a:solidFill>
@@ -7253,8 +9322,8 @@
         </p:nvSpPr>
         <p:spPr>
           <a:xfrm>
-            <a:off x="4590288" y="1536192"/>
-            <a:ext cx="2980944" cy="4334255"/>
+            <a:off x="4572000" y="1517904"/>
+            <a:ext cx="3017520" cy="4462272"/>
           </a:xfrm>
           <a:prstGeom prst="rect">
             <a:avLst/>
@@ -7262,16 +9331,16 @@
           <a:noFill/>
         </p:spPr>
         <p:txBody>
-          <a:bodyPr wrap="square">
+          <a:bodyPr wrap="square" tIns="0" bIns="0" lIns="0" rIns="0">
             <a:spAutoFit/>
           </a:bodyPr>
           <a:lstStyle/>
           <a:p>
             <a:pPr>
               <a:spcAft>
-                <a:spcPts val="1000"/>
-              </a:spcAft>
-              <a:defRPr sz="1700" b="1">
+                <a:spcPts val="800"/>
+              </a:spcAft>
+              <a:defRPr sz="1550" b="1">
                 <a:solidFill>
                   <a:srgbClr val="3EA6FF"/>
                 </a:solidFill>
@@ -7284,11 +9353,11 @@
           <a:p>
             <a:pPr>
               <a:spcAft>
-                <a:spcPts val="800"/>
-              </a:spcAft>
-            </a:pPr>
-            <a:r>
-              <a:rPr b="1" sz="1500">
+                <a:spcPts val="600"/>
+              </a:spcAft>
+            </a:pPr>
+            <a:r>
+              <a:rPr b="1" sz="1200">
                 <a:solidFill>
                   <a:srgbClr val="3EA6FF"/>
                 </a:solidFill>
@@ -7296,7 +9365,7 @@
               <a:t>• </a:t>
             </a:r>
             <a:r>
-              <a:rPr b="1" sz="1400">
+              <a:rPr b="1" sz="1200">
                 <a:solidFill>
                   <a:srgbClr val="FFFFFF"/>
                 </a:solidFill>
@@ -7304,7 +9373,7 @@
               <a:t>useState &amp; useEffect: </a:t>
             </a:r>
             <a:r>
-              <a:rPr sz="1400">
+              <a:rPr sz="1200">
                 <a:solidFill>
                   <a:srgbClr val="CDD2DC"/>
                 </a:solidFill>
@@ -7315,11 +9384,11 @@
           <a:p>
             <a:pPr>
               <a:spcAft>
-                <a:spcPts val="800"/>
-              </a:spcAft>
-            </a:pPr>
-            <a:r>
-              <a:rPr b="1" sz="1500">
+                <a:spcPts val="600"/>
+              </a:spcAft>
+            </a:pPr>
+            <a:r>
+              <a:rPr b="1" sz="1200">
                 <a:solidFill>
                   <a:srgbClr val="3EA6FF"/>
                 </a:solidFill>
@@ -7327,7 +9396,7 @@
               <a:t>• </a:t>
             </a:r>
             <a:r>
-              <a:rPr b="1" sz="1400">
+              <a:rPr b="1" sz="1200">
                 <a:solidFill>
                   <a:srgbClr val="FFFFFF"/>
                 </a:solidFill>
@@ -7335,7 +9404,7 @@
               <a:t>useRef Hook: </a:t>
             </a:r>
             <a:r>
-              <a:rPr sz="1400">
+              <a:rPr sz="1200">
                 <a:solidFill>
                   <a:srgbClr val="CDD2DC"/>
                 </a:solidFill>
@@ -7346,11 +9415,11 @@
           <a:p>
             <a:pPr>
               <a:spcAft>
-                <a:spcPts val="800"/>
-              </a:spcAft>
-            </a:pPr>
-            <a:r>
-              <a:rPr b="1" sz="1500">
+                <a:spcPts val="600"/>
+              </a:spcAft>
+            </a:pPr>
+            <a:r>
+              <a:rPr b="1" sz="1200">
                 <a:solidFill>
                   <a:srgbClr val="3EA6FF"/>
                 </a:solidFill>
@@ -7358,7 +9427,7 @@
               <a:t>• </a:t>
             </a:r>
             <a:r>
-              <a:rPr b="1" sz="1400">
+              <a:rPr b="1" sz="1200">
                 <a:solidFill>
                   <a:srgbClr val="FFFFFF"/>
                 </a:solidFill>
@@ -7366,12 +9435,43 @@
               <a:t>useParams &amp; useNavigate: </a:t>
             </a:r>
             <a:r>
-              <a:rPr sz="1400">
+              <a:rPr sz="1200">
                 <a:solidFill>
                   <a:srgbClr val="CDD2DC"/>
                 </a:solidFill>
               </a:rPr>
               <a:t>URL parameter extraction and programmatic navigation without page reloads.</a:t>
+            </a:r>
+          </a:p>
+          <a:p>
+            <a:pPr>
+              <a:spcAft>
+                <a:spcPts val="600"/>
+              </a:spcAft>
+            </a:pPr>
+            <a:r>
+              <a:rPr b="1" sz="1200">
+                <a:solidFill>
+                  <a:srgbClr val="3EA6FF"/>
+                </a:solidFill>
+              </a:rPr>
+              <a:t>• </a:t>
+            </a:r>
+            <a:r>
+              <a:rPr b="1" sz="1200">
+                <a:solidFill>
+                  <a:srgbClr val="FFFFFF"/>
+                </a:solidFill>
+              </a:rPr>
+              <a:t>useMemo Optimization: </a:t>
+            </a:r>
+            <a:r>
+              <a:rPr sz="1200">
+                <a:solidFill>
+                  <a:srgbClr val="CDD2DC"/>
+                </a:solidFill>
+              </a:rPr>
+              <a:t>Cached search and category filtering reducing re-render cost.</a:t>
             </a:r>
           </a:p>
         </p:txBody>
@@ -7385,7 +9485,7 @@
         <p:spPr>
           <a:xfrm>
             <a:off x="8046720" y="1371600"/>
-            <a:ext cx="3383280" cy="4663440"/>
+            <a:ext cx="3383280" cy="4754880"/>
           </a:xfrm>
           <a:prstGeom prst="roundRect">
             <a:avLst/>
@@ -7393,7 +9493,7 @@
           <a:solidFill>
             <a:srgbClr val="161922"/>
           </a:solidFill>
-          <a:ln w="17780">
+          <a:ln w="16510">
             <a:solidFill>
               <a:srgbClr val="2E3445"/>
             </a:solidFill>
@@ -7429,8 +9529,8 @@
         </p:nvSpPr>
         <p:spPr>
           <a:xfrm>
-            <a:off x="8247888" y="1536192"/>
-            <a:ext cx="2980944" cy="4334255"/>
+            <a:off x="8229600" y="1517904"/>
+            <a:ext cx="3017520" cy="4462272"/>
           </a:xfrm>
           <a:prstGeom prst="rect">
             <a:avLst/>
@@ -7438,16 +9538,16 @@
           <a:noFill/>
         </p:spPr>
         <p:txBody>
-          <a:bodyPr wrap="square">
+          <a:bodyPr wrap="square" tIns="0" bIns="0" lIns="0" rIns="0">
             <a:spAutoFit/>
           </a:bodyPr>
           <a:lstStyle/>
           <a:p>
             <a:pPr>
               <a:spcAft>
-                <a:spcPts val="1000"/>
-              </a:spcAft>
-              <a:defRPr sz="1700" b="1">
+                <a:spcPts val="800"/>
+              </a:spcAft>
+              <a:defRPr sz="1550" b="1">
                 <a:solidFill>
                   <a:srgbClr val="2BA640"/>
                 </a:solidFill>
@@ -7460,11 +9560,11 @@
           <a:p>
             <a:pPr>
               <a:spcAft>
-                <a:spcPts val="800"/>
-              </a:spcAft>
-            </a:pPr>
-            <a:r>
-              <a:rPr b="1" sz="1500">
+                <a:spcPts val="600"/>
+              </a:spcAft>
+            </a:pPr>
+            <a:r>
+              <a:rPr b="1" sz="1200">
                 <a:solidFill>
                   <a:srgbClr val="2BA640"/>
                 </a:solidFill>
@@ -7472,7 +9572,7 @@
               <a:t>• </a:t>
             </a:r>
             <a:r>
-              <a:rPr b="1" sz="1400">
+              <a:rPr b="1" sz="1200">
                 <a:solidFill>
                   <a:srgbClr val="FFFFFF"/>
                 </a:solidFill>
@@ -7480,7 +9580,7 @@
               <a:t>Context API: </a:t>
             </a:r>
             <a:r>
-              <a:rPr sz="1400">
+              <a:rPr sz="1200">
                 <a:solidFill>
                   <a:srgbClr val="CDD2DC"/>
                 </a:solidFill>
@@ -7491,11 +9591,11 @@
           <a:p>
             <a:pPr>
               <a:spcAft>
-                <a:spcPts val="800"/>
-              </a:spcAft>
-            </a:pPr>
-            <a:r>
-              <a:rPr b="1" sz="1500">
+                <a:spcPts val="600"/>
+              </a:spcAft>
+            </a:pPr>
+            <a:r>
+              <a:rPr b="1" sz="1200">
                 <a:solidFill>
                   <a:srgbClr val="2BA640"/>
                 </a:solidFill>
@@ -7503,7 +9603,7 @@
               <a:t>• </a:t>
             </a:r>
             <a:r>
-              <a:rPr b="1" sz="1400">
+              <a:rPr b="1" sz="1200">
                 <a:solidFill>
                   <a:srgbClr val="FFFFFF"/>
                 </a:solidFill>
@@ -7511,7 +9611,7 @@
               <a:t>Browser LocalStorage: </a:t>
             </a:r>
             <a:r>
-              <a:rPr sz="1400">
+              <a:rPr sz="1200">
                 <a:solidFill>
                   <a:srgbClr val="CDD2DC"/>
                 </a:solidFill>
@@ -7522,11 +9622,11 @@
           <a:p>
             <a:pPr>
               <a:spcAft>
-                <a:spcPts val="800"/>
-              </a:spcAft>
-            </a:pPr>
-            <a:r>
-              <a:rPr b="1" sz="1500">
+                <a:spcPts val="600"/>
+              </a:spcAft>
+            </a:pPr>
+            <a:r>
+              <a:rPr b="1" sz="1200">
                 <a:solidFill>
                   <a:srgbClr val="2BA640"/>
                 </a:solidFill>
@@ -7534,7 +9634,7 @@
               <a:t>• </a:t>
             </a:r>
             <a:r>
-              <a:rPr b="1" sz="1400">
+              <a:rPr b="1" sz="1200">
                 <a:solidFill>
                   <a:srgbClr val="FFFFFF"/>
                 </a:solidFill>
@@ -7542,12 +9642,43 @@
               <a:t>react-toastify: </a:t>
             </a:r>
             <a:r>
-              <a:rPr sz="1400">
+              <a:rPr sz="1200">
                 <a:solidFill>
                   <a:srgbClr val="CDD2DC"/>
                 </a:solidFill>
               </a:rPr>
               <a:t>Non-blocking alert toasts recommended by course supervisor Mr. Shubham Kumar.</a:t>
+            </a:r>
+          </a:p>
+          <a:p>
+            <a:pPr>
+              <a:spcAft>
+                <a:spcPts val="600"/>
+              </a:spcAft>
+            </a:pPr>
+            <a:r>
+              <a:rPr b="1" sz="1200">
+                <a:solidFill>
+                  <a:srgbClr val="2BA640"/>
+                </a:solidFill>
+              </a:rPr>
+              <a:t>• </a:t>
+            </a:r>
+            <a:r>
+              <a:rPr b="1" sz="1200">
+                <a:solidFill>
+                  <a:srgbClr val="FFFFFF"/>
+                </a:solidFill>
+              </a:rPr>
+              <a:t>Web Speech API: </a:t>
+            </a:r>
+            <a:r>
+              <a:rPr sz="1200">
+                <a:solidFill>
+                  <a:srgbClr val="CDD2DC"/>
+                </a:solidFill>
+              </a:rPr>
+              <a:t>Native speech-to-text microphone integration for hands-free voice search.</a:t>
             </a:r>
           </a:p>
         </p:txBody>
@@ -7682,7 +9813,7 @@
           <a:lstStyle/>
           <a:p>
             <a:pPr>
-              <a:defRPr sz="1200" b="1">
+              <a:defRPr sz="1150" b="1">
                 <a:solidFill>
                   <a:srgbClr val="3EA6FF"/>
                 </a:solidFill>
@@ -7703,7 +9834,42 @@
         <p:spPr>
           <a:xfrm>
             <a:off x="731520" y="621792"/>
-            <a:ext cx="10728655" cy="640080"/>
+            <a:ext cx="10728655" cy="594360"/>
+          </a:xfrm>
+          <a:prstGeom prst="rect">
+            <a:avLst/>
+          </a:prstGeom>
+          <a:noFill/>
+        </p:spPr>
+        <p:txBody>
+          <a:bodyPr wrap="square">
+            <a:spAutoFit/>
+          </a:bodyPr>
+          <a:lstStyle/>
+          <a:p>
+            <a:pPr>
+              <a:defRPr sz="2300" b="1">
+                <a:solidFill>
+                  <a:srgbClr val="FFFFFF"/>
+                </a:solidFill>
+              </a:defRPr>
+            </a:pPr>
+            <a:r>
+              <a:t>Core Component Architecture &amp; Modularity</a:t>
+            </a:r>
+          </a:p>
+        </p:txBody>
+      </p:sp>
+      <p:sp>
+        <p:nvSpPr>
+          <p:cNvPr id="6" name="TextBox 5"/>
+          <p:cNvSpPr txBox="1"/>
+          <p:nvPr/>
+        </p:nvSpPr>
+        <p:spPr>
+          <a:xfrm>
+            <a:off x="731520" y="6327648"/>
+            <a:ext cx="10728655" cy="274320"/>
           </a:xfrm>
           <a:prstGeom prst="rect">
             <a:avLst/>
@@ -7717,49 +9883,14 @@
           <a:lstStyle/>
           <a:p>
             <a:pPr>
-              <a:defRPr sz="2500" b="1">
-                <a:solidFill>
-                  <a:srgbClr val="FFFFFF"/>
+              <a:defRPr sz="1000">
+                <a:solidFill>
+                  <a:srgbClr val="8C94A5"/>
                 </a:solidFill>
               </a:defRPr>
             </a:pPr>
             <a:r>
-              <a:t>Core Component Architecture &amp; Modularity</a:t>
-            </a:r>
-          </a:p>
-        </p:txBody>
-      </p:sp>
-      <p:sp>
-        <p:nvSpPr>
-          <p:cNvPr id="6" name="TextBox 5"/>
-          <p:cNvSpPr txBox="1"/>
-          <p:nvPr/>
-        </p:nvSpPr>
-        <p:spPr>
-          <a:xfrm>
-            <a:off x="731520" y="6309360"/>
-            <a:ext cx="10728655" cy="320040"/>
-          </a:xfrm>
-          <a:prstGeom prst="rect">
-            <a:avLst/>
-          </a:prstGeom>
-          <a:noFill/>
-        </p:spPr>
-        <p:txBody>
-          <a:bodyPr wrap="none">
-            <a:spAutoFit/>
-          </a:bodyPr>
-          <a:lstStyle/>
-          <a:p>
-            <a:pPr>
-              <a:defRPr sz="1050">
-                <a:solidFill>
-                  <a:srgbClr val="828A9B"/>
-                </a:solidFill>
-              </a:defRPr>
-            </a:pPr>
-            <a:r>
-              <a:t>PheW TuBe: Video Streaming Platform (G15-PID-17)  |  Evaluation-II  |  Page 05</a:t>
+              <a:t>PheW TuBe: Video Streaming Platform (G15-PID-17)  |  Chitkara University FEE-II  |  Page 05</a:t>
             </a:r>
           </a:p>
         </p:txBody>
@@ -7773,7 +9904,7 @@
         <p:spPr>
           <a:xfrm>
             <a:off x="731520" y="1371600"/>
-            <a:ext cx="5212080" cy="4663440"/>
+            <a:ext cx="5212080" cy="4754880"/>
           </a:xfrm>
           <a:prstGeom prst="roundRect">
             <a:avLst/>
@@ -7781,7 +9912,7 @@
           <a:solidFill>
             <a:srgbClr val="161922"/>
           </a:solidFill>
-          <a:ln w="17780">
+          <a:ln w="16510">
             <a:solidFill>
               <a:srgbClr val="2E3445"/>
             </a:solidFill>
@@ -7817,8 +9948,8 @@
         </p:nvSpPr>
         <p:spPr>
           <a:xfrm>
-            <a:off x="932688" y="1536192"/>
-            <a:ext cx="4809744" cy="4334255"/>
+            <a:off x="914400" y="1517904"/>
+            <a:ext cx="4846320" cy="4462272"/>
           </a:xfrm>
           <a:prstGeom prst="rect">
             <a:avLst/>
@@ -7826,16 +9957,16 @@
           <a:noFill/>
         </p:spPr>
         <p:txBody>
-          <a:bodyPr wrap="square">
+          <a:bodyPr wrap="square" tIns="0" bIns="0" lIns="0" rIns="0">
             <a:spAutoFit/>
           </a:bodyPr>
           <a:lstStyle/>
           <a:p>
             <a:pPr>
               <a:spcAft>
-                <a:spcPts val="1000"/>
-              </a:spcAft>
-              <a:defRPr sz="1700" b="1">
+                <a:spcPts val="800"/>
+              </a:spcAft>
+              <a:defRPr sz="1550" b="1">
                 <a:solidFill>
                   <a:srgbClr val="3EA6FF"/>
                 </a:solidFill>
@@ -7848,11 +9979,11 @@
           <a:p>
             <a:pPr>
               <a:spcAft>
-                <a:spcPts val="800"/>
-              </a:spcAft>
-            </a:pPr>
-            <a:r>
-              <a:rPr b="1" sz="1500">
+                <a:spcPts val="600"/>
+              </a:spcAft>
+            </a:pPr>
+            <a:r>
+              <a:rPr b="1" sz="1200">
                 <a:solidFill>
                   <a:srgbClr val="3EA6FF"/>
                 </a:solidFill>
@@ -7860,7 +9991,7 @@
               <a:t>• </a:t>
             </a:r>
             <a:r>
-              <a:rPr b="1" sz="1400">
+              <a:rPr b="1" sz="1200">
                 <a:solidFill>
                   <a:srgbClr val="FFFFFF"/>
                 </a:solidFill>
@@ -7868,7 +9999,7 @@
               <a:t>&lt;AppProvider&gt; (Root Context): </a:t>
             </a:r>
             <a:r>
-              <a:rPr sz="1400">
+              <a:rPr sz="1200">
                 <a:solidFill>
                   <a:srgbClr val="CDD2DC"/>
                 </a:solidFill>
@@ -7879,11 +10010,11 @@
           <a:p>
             <a:pPr>
               <a:spcAft>
-                <a:spcPts val="800"/>
-              </a:spcAft>
-            </a:pPr>
-            <a:r>
-              <a:rPr b="1" sz="1500">
+                <a:spcPts val="600"/>
+              </a:spcAft>
+            </a:pPr>
+            <a:r>
+              <a:rPr b="1" sz="1200">
                 <a:solidFill>
                   <a:srgbClr val="3EA6FF"/>
                 </a:solidFill>
@@ -7891,7 +10022,7 @@
               <a:t>• </a:t>
             </a:r>
             <a:r>
-              <a:rPr b="1" sz="1400">
+              <a:rPr b="1" sz="1200">
                 <a:solidFill>
                   <a:srgbClr val="FFFFFF"/>
                 </a:solidFill>
@@ -7899,22 +10030,22 @@
               <a:t>&lt;Navbar&gt;: </a:t>
             </a:r>
             <a:r>
-              <a:rPr sz="1400">
+              <a:rPr sz="1200">
                 <a:solidFill>
                   <a:srgbClr val="CDD2DC"/>
                 </a:solidFill>
               </a:rPr>
-              <a:t>Independent search bar with live auto-complete dropdown, microphone voice trigger, and auth modal.</a:t>
-            </a:r>
-          </a:p>
-          <a:p>
-            <a:pPr>
-              <a:spcAft>
-                <a:spcPts val="800"/>
-              </a:spcAft>
-            </a:pPr>
-            <a:r>
-              <a:rPr b="1" sz="1500">
+              <a:t>Independent search bar with live auto-complete dropdown, voice trigger, and auth modal.</a:t>
+            </a:r>
+          </a:p>
+          <a:p>
+            <a:pPr>
+              <a:spcAft>
+                <a:spcPts val="600"/>
+              </a:spcAft>
+            </a:pPr>
+            <a:r>
+              <a:rPr b="1" sz="1200">
                 <a:solidFill>
                   <a:srgbClr val="3EA6FF"/>
                 </a:solidFill>
@@ -7922,7 +10053,7 @@
               <a:t>• </a:t>
             </a:r>
             <a:r>
-              <a:rPr b="1" sz="1400">
+              <a:rPr b="1" sz="1200">
                 <a:solidFill>
                   <a:srgbClr val="FFFFFF"/>
                 </a:solidFill>
@@ -7930,7 +10061,7 @@
               <a:t>&lt;Sidebar&gt; &amp; &lt;CategoryChips&gt;: </a:t>
             </a:r>
             <a:r>
-              <a:rPr sz="1400">
+              <a:rPr sz="1200">
                 <a:solidFill>
                   <a:srgbClr val="CDD2DC"/>
                 </a:solidFill>
@@ -7941,11 +10072,11 @@
           <a:p>
             <a:pPr>
               <a:spcAft>
-                <a:spcPts val="800"/>
-              </a:spcAft>
-            </a:pPr>
-            <a:r>
-              <a:rPr b="1" sz="1500">
+                <a:spcPts val="600"/>
+              </a:spcAft>
+            </a:pPr>
+            <a:r>
+              <a:rPr b="1" sz="1200">
                 <a:solidFill>
                   <a:srgbClr val="3EA6FF"/>
                 </a:solidFill>
@@ -7953,7 +10084,7 @@
               <a:t>• </a:t>
             </a:r>
             <a:r>
-              <a:rPr b="1" sz="1400">
+              <a:rPr b="1" sz="1200">
                 <a:solidFill>
                   <a:srgbClr val="FFFFFF"/>
                 </a:solidFill>
@@ -7961,7 +10092,7 @@
               <a:t>&lt;VideoCard&gt; &amp; &lt;ShortsCard&gt;: </a:t>
             </a:r>
             <a:r>
-              <a:rPr sz="1400">
+              <a:rPr sz="1200">
                 <a:solidFill>
                   <a:srgbClr val="CDD2DC"/>
                 </a:solidFill>
@@ -7972,11 +10103,11 @@
           <a:p>
             <a:pPr>
               <a:spcAft>
-                <a:spcPts val="800"/>
-              </a:spcAft>
-            </a:pPr>
-            <a:r>
-              <a:rPr b="1" sz="1500">
+                <a:spcPts val="600"/>
+              </a:spcAft>
+            </a:pPr>
+            <a:r>
+              <a:rPr b="1" sz="1200">
                 <a:solidFill>
                   <a:srgbClr val="3EA6FF"/>
                 </a:solidFill>
@@ -7984,7 +10115,7 @@
               <a:t>• </a:t>
             </a:r>
             <a:r>
-              <a:rPr b="1" sz="1400">
+              <a:rPr b="1" sz="1200">
                 <a:solidFill>
                   <a:srgbClr val="FFFFFF"/>
                 </a:solidFill>
@@ -7992,12 +10123,43 @@
               <a:t>&lt;WatchPage&gt;: </a:t>
             </a:r>
             <a:r>
-              <a:rPr sz="1400">
+              <a:rPr sz="1200">
                 <a:solidFill>
                   <a:srgbClr val="CDD2DC"/>
                 </a:solidFill>
               </a:rPr>
               <a:t>Master composite page integrating video player, channel actions, comments feed, and recommended sidebar.</a:t>
+            </a:r>
+          </a:p>
+          <a:p>
+            <a:pPr>
+              <a:spcAft>
+                <a:spcPts val="600"/>
+              </a:spcAft>
+            </a:pPr>
+            <a:r>
+              <a:rPr b="1" sz="1200">
+                <a:solidFill>
+                  <a:srgbClr val="3EA6FF"/>
+                </a:solidFill>
+              </a:rPr>
+              <a:t>• </a:t>
+            </a:r>
+            <a:r>
+              <a:rPr b="1" sz="1200">
+                <a:solidFill>
+                  <a:srgbClr val="FFFFFF"/>
+                </a:solidFill>
+              </a:rPr>
+              <a:t>&lt;ProtectedRoute&gt;: </a:t>
+            </a:r>
+            <a:r>
+              <a:rPr sz="1200">
+                <a:solidFill>
+                  <a:srgbClr val="CDD2DC"/>
+                </a:solidFill>
+              </a:rPr>
+              <a:t>Security boundary wrapping authenticated pages to prevent guest data leaks.</a:t>
             </a:r>
           </a:p>
         </p:txBody>
@@ -8011,7 +10173,7 @@
         <p:spPr>
           <a:xfrm>
             <a:off x="6217920" y="1371600"/>
-            <a:ext cx="5212080" cy="4663440"/>
+            <a:ext cx="5212080" cy="4754880"/>
           </a:xfrm>
           <a:prstGeom prst="roundRect">
             <a:avLst/>
@@ -8019,7 +10181,7 @@
           <a:solidFill>
             <a:srgbClr val="161922"/>
           </a:solidFill>
-          <a:ln w="17780">
+          <a:ln w="16510">
             <a:solidFill>
               <a:srgbClr val="2E3445"/>
             </a:solidFill>
@@ -8055,8 +10217,8 @@
         </p:nvSpPr>
         <p:spPr>
           <a:xfrm>
-            <a:off x="6419088" y="1536192"/>
-            <a:ext cx="4809744" cy="4334255"/>
+            <a:off x="6400800" y="1517904"/>
+            <a:ext cx="4846320" cy="4462272"/>
           </a:xfrm>
           <a:prstGeom prst="rect">
             <a:avLst/>
@@ -8064,16 +10226,16 @@
           <a:noFill/>
         </p:spPr>
         <p:txBody>
-          <a:bodyPr wrap="square">
+          <a:bodyPr wrap="square" tIns="0" bIns="0" lIns="0" rIns="0">
             <a:spAutoFit/>
           </a:bodyPr>
           <a:lstStyle/>
           <a:p>
             <a:pPr>
               <a:spcAft>
-                <a:spcPts val="1000"/>
-              </a:spcAft>
-              <a:defRPr sz="1700" b="1">
+                <a:spcPts val="800"/>
+              </a:spcAft>
+              <a:defRPr sz="1550" b="1">
                 <a:solidFill>
                   <a:srgbClr val="FF0033"/>
                 </a:solidFill>
@@ -8086,11 +10248,11 @@
           <a:p>
             <a:pPr>
               <a:spcAft>
-                <a:spcPts val="800"/>
-              </a:spcAft>
-            </a:pPr>
-            <a:r>
-              <a:rPr b="1" sz="1500">
+                <a:spcPts val="600"/>
+              </a:spcAft>
+            </a:pPr>
+            <a:r>
+              <a:rPr b="1" sz="1200">
                 <a:solidFill>
                   <a:srgbClr val="FF0033"/>
                 </a:solidFill>
@@ -8098,7 +10260,7 @@
               <a:t>• </a:t>
             </a:r>
             <a:r>
-              <a:rPr b="1" sz="1400">
+              <a:rPr b="1" sz="1200">
                 <a:solidFill>
                   <a:srgbClr val="FFFFFF"/>
                 </a:solidFill>
@@ -8106,7 +10268,7 @@
               <a:t>Unidirectional Data Flow: </a:t>
             </a:r>
             <a:r>
-              <a:rPr sz="1400">
+              <a:rPr sz="1200">
                 <a:solidFill>
                   <a:srgbClr val="CDD2DC"/>
                 </a:solidFill>
@@ -8117,11 +10279,11 @@
           <a:p>
             <a:pPr>
               <a:spcAft>
-                <a:spcPts val="800"/>
-              </a:spcAft>
-            </a:pPr>
-            <a:r>
-              <a:rPr b="1" sz="1500">
+                <a:spcPts val="600"/>
+              </a:spcAft>
+            </a:pPr>
+            <a:r>
+              <a:rPr b="1" sz="1200">
                 <a:solidFill>
                   <a:srgbClr val="FF0033"/>
                 </a:solidFill>
@@ -8129,7 +10291,7 @@
               <a:t>• </a:t>
             </a:r>
             <a:r>
-              <a:rPr b="1" sz="1400">
+              <a:rPr b="1" sz="1200">
                 <a:solidFill>
                   <a:srgbClr val="FFFFFF"/>
                 </a:solidFill>
@@ -8137,7 +10299,7 @@
               <a:t>Prop-Drilling Elimination: </a:t>
             </a:r>
             <a:r>
-              <a:rPr sz="1400">
+              <a:rPr sz="1200">
                 <a:solidFill>
                   <a:srgbClr val="CDD2DC"/>
                 </a:solidFill>
@@ -8148,11 +10310,11 @@
           <a:p>
             <a:pPr>
               <a:spcAft>
-                <a:spcPts val="800"/>
-              </a:spcAft>
-            </a:pPr>
-            <a:r>
-              <a:rPr b="1" sz="1500">
+                <a:spcPts val="600"/>
+              </a:spcAft>
+            </a:pPr>
+            <a:r>
+              <a:rPr b="1" sz="1200">
                 <a:solidFill>
                   <a:srgbClr val="FF0033"/>
                 </a:solidFill>
@@ -8160,7 +10322,7 @@
               <a:t>• </a:t>
             </a:r>
             <a:r>
-              <a:rPr b="1" sz="1400">
+              <a:rPr b="1" sz="1200">
                 <a:solidFill>
                   <a:srgbClr val="FFFFFF"/>
                 </a:solidFill>
@@ -8168,7 +10330,7 @@
               <a:t>Modular Route Segregation: </a:t>
             </a:r>
             <a:r>
-              <a:rPr sz="1400">
+              <a:rPr sz="1200">
                 <a:solidFill>
                   <a:srgbClr val="CDD2DC"/>
                 </a:solidFill>
@@ -8179,11 +10341,11 @@
           <a:p>
             <a:pPr>
               <a:spcAft>
-                <a:spcPts val="800"/>
-              </a:spcAft>
-            </a:pPr>
-            <a:r>
-              <a:rPr b="1" sz="1500">
+                <a:spcPts val="600"/>
+              </a:spcAft>
+            </a:pPr>
+            <a:r>
+              <a:rPr b="1" sz="1200">
                 <a:solidFill>
                   <a:srgbClr val="FF0033"/>
                 </a:solidFill>
@@ -8191,7 +10353,7 @@
               <a:t>• </a:t>
             </a:r>
             <a:r>
-              <a:rPr b="1" sz="1400">
+              <a:rPr b="1" sz="1200">
                 <a:solidFill>
                   <a:srgbClr val="FFFFFF"/>
                 </a:solidFill>
@@ -8199,12 +10361,43 @@
               <a:t>Authentication Modal Isolation: </a:t>
             </a:r>
             <a:r>
-              <a:rPr sz="1400">
+              <a:rPr sz="1200">
                 <a:solidFill>
                   <a:srgbClr val="CDD2DC"/>
                 </a:solidFill>
               </a:rPr>
               <a:t>Client-side auth popup controlled by Context state, avoiding parent re-renders.</a:t>
+            </a:r>
+          </a:p>
+          <a:p>
+            <a:pPr>
+              <a:spcAft>
+                <a:spcPts val="600"/>
+              </a:spcAft>
+            </a:pPr>
+            <a:r>
+              <a:rPr b="1" sz="1200">
+                <a:solidFill>
+                  <a:srgbClr val="FF0033"/>
+                </a:solidFill>
+              </a:rPr>
+              <a:t>• </a:t>
+            </a:r>
+            <a:r>
+              <a:rPr b="1" sz="1200">
+                <a:solidFill>
+                  <a:srgbClr val="FFFFFF"/>
+                </a:solidFill>
+              </a:rPr>
+              <a:t>Clean Build Output: </a:t>
+            </a:r>
+            <a:r>
+              <a:rPr sz="1200">
+                <a:solidFill>
+                  <a:srgbClr val="CDD2DC"/>
+                </a:solidFill>
+              </a:rPr>
+              <a:t>Zero linter warnings, strictly typed SVG icons via react-icons/md and react-icons/si.</a:t>
             </a:r>
           </a:p>
         </p:txBody>
@@ -8339,7 +10532,7 @@
           <a:lstStyle/>
           <a:p>
             <a:pPr>
-              <a:defRPr sz="1200" b="1">
+              <a:defRPr sz="1150" b="1">
                 <a:solidFill>
                   <a:srgbClr val="3EA6FF"/>
                 </a:solidFill>
@@ -8360,7 +10553,42 @@
         <p:spPr>
           <a:xfrm>
             <a:off x="731520" y="621792"/>
-            <a:ext cx="10728655" cy="640080"/>
+            <a:ext cx="10728655" cy="594360"/>
+          </a:xfrm>
+          <a:prstGeom prst="rect">
+            <a:avLst/>
+          </a:prstGeom>
+          <a:noFill/>
+        </p:spPr>
+        <p:txBody>
+          <a:bodyPr wrap="square">
+            <a:spAutoFit/>
+          </a:bodyPr>
+          <a:lstStyle/>
+          <a:p>
+            <a:pPr>
+              <a:defRPr sz="2300" b="1">
+                <a:solidFill>
+                  <a:srgbClr val="FFFFFF"/>
+                </a:solidFill>
+              </a:defRPr>
+            </a:pPr>
+            <a:r>
+              <a:t>Dynamic Watch Route &amp; Embedded Video Engine (/watch/:id)</a:t>
+            </a:r>
+          </a:p>
+        </p:txBody>
+      </p:sp>
+      <p:sp>
+        <p:nvSpPr>
+          <p:cNvPr id="6" name="TextBox 5"/>
+          <p:cNvSpPr txBox="1"/>
+          <p:nvPr/>
+        </p:nvSpPr>
+        <p:spPr>
+          <a:xfrm>
+            <a:off x="731520" y="6327648"/>
+            <a:ext cx="10728655" cy="274320"/>
           </a:xfrm>
           <a:prstGeom prst="rect">
             <a:avLst/>
@@ -8374,49 +10602,14 @@
           <a:lstStyle/>
           <a:p>
             <a:pPr>
-              <a:defRPr sz="2500" b="1">
-                <a:solidFill>
-                  <a:srgbClr val="FFFFFF"/>
+              <a:defRPr sz="1000">
+                <a:solidFill>
+                  <a:srgbClr val="8C94A5"/>
                 </a:solidFill>
               </a:defRPr>
             </a:pPr>
             <a:r>
-              <a:t>Dynamic Watch Route &amp; Embedded Video Engine (/watch/:id)</a:t>
-            </a:r>
-          </a:p>
-        </p:txBody>
-      </p:sp>
-      <p:sp>
-        <p:nvSpPr>
-          <p:cNvPr id="6" name="TextBox 5"/>
-          <p:cNvSpPr txBox="1"/>
-          <p:nvPr/>
-        </p:nvSpPr>
-        <p:spPr>
-          <a:xfrm>
-            <a:off x="731520" y="6309360"/>
-            <a:ext cx="10728655" cy="320040"/>
-          </a:xfrm>
-          <a:prstGeom prst="rect">
-            <a:avLst/>
-          </a:prstGeom>
-          <a:noFill/>
-        </p:spPr>
-        <p:txBody>
-          <a:bodyPr wrap="none">
-            <a:spAutoFit/>
-          </a:bodyPr>
-          <a:lstStyle/>
-          <a:p>
-            <a:pPr>
-              <a:defRPr sz="1050">
-                <a:solidFill>
-                  <a:srgbClr val="828A9B"/>
-                </a:solidFill>
-              </a:defRPr>
-            </a:pPr>
-            <a:r>
-              <a:t>PheW TuBe: Video Streaming Platform (G15-PID-17)  |  Evaluation-II  |  Page 06</a:t>
+              <a:t>PheW TuBe: Video Streaming Platform (G15-PID-17)  |  Chitkara University FEE-II  |  Page 06</a:t>
             </a:r>
           </a:p>
         </p:txBody>
@@ -8430,7 +10623,7 @@
         <p:spPr>
           <a:xfrm>
             <a:off x="731520" y="1371600"/>
-            <a:ext cx="5943600" cy="4663440"/>
+            <a:ext cx="5669280" cy="4754880"/>
           </a:xfrm>
           <a:prstGeom prst="roundRect">
             <a:avLst/>
@@ -8438,7 +10631,7 @@
           <a:solidFill>
             <a:srgbClr val="161922"/>
           </a:solidFill>
-          <a:ln w="17780">
+          <a:ln w="16510">
             <a:solidFill>
               <a:srgbClr val="2E3445"/>
             </a:solidFill>
@@ -8474,8 +10667,8 @@
         </p:nvSpPr>
         <p:spPr>
           <a:xfrm>
-            <a:off x="932688" y="1536192"/>
-            <a:ext cx="5541264" cy="4334255"/>
+            <a:off x="914400" y="1517904"/>
+            <a:ext cx="5303520" cy="4462272"/>
           </a:xfrm>
           <a:prstGeom prst="rect">
             <a:avLst/>
@@ -8483,16 +10676,16 @@
           <a:noFill/>
         </p:spPr>
         <p:txBody>
-          <a:bodyPr wrap="square">
+          <a:bodyPr wrap="square" tIns="0" bIns="0" lIns="0" rIns="0">
             <a:spAutoFit/>
           </a:bodyPr>
           <a:lstStyle/>
           <a:p>
             <a:pPr>
               <a:spcAft>
-                <a:spcPts val="1000"/>
-              </a:spcAft>
-              <a:defRPr sz="1700" b="1">
+                <a:spcPts val="800"/>
+              </a:spcAft>
+              <a:defRPr sz="1550" b="1">
                 <a:solidFill>
                   <a:srgbClr val="FF0033"/>
                 </a:solidFill>
@@ -8505,11 +10698,11 @@
           <a:p>
             <a:pPr>
               <a:spcAft>
-                <a:spcPts val="800"/>
-              </a:spcAft>
-            </a:pPr>
-            <a:r>
-              <a:rPr b="1" sz="1500">
+                <a:spcPts val="600"/>
+              </a:spcAft>
+            </a:pPr>
+            <a:r>
+              <a:rPr b="1" sz="1200">
                 <a:solidFill>
                   <a:srgbClr val="FF0033"/>
                 </a:solidFill>
@@ -8517,7 +10710,7 @@
               <a:t>• </a:t>
             </a:r>
             <a:r>
-              <a:rPr b="1" sz="1400">
+              <a:rPr b="1" sz="1200">
                 <a:solidFill>
                   <a:srgbClr val="FFFFFF"/>
                 </a:solidFill>
@@ -8525,7 +10718,7 @@
               <a:t>URL Parameter Extraction: </a:t>
             </a:r>
             <a:r>
-              <a:rPr sz="1400">
+              <a:rPr sz="1200">
                 <a:solidFill>
                   <a:srgbClr val="CDD2DC"/>
                 </a:solidFill>
@@ -8536,11 +10729,11 @@
           <a:p>
             <a:pPr>
               <a:spcAft>
-                <a:spcPts val="800"/>
-              </a:spcAft>
-            </a:pPr>
-            <a:r>
-              <a:rPr b="1" sz="1500">
+                <a:spcPts val="600"/>
+              </a:spcAft>
+            </a:pPr>
+            <a:r>
+              <a:rPr b="1" sz="1200">
                 <a:solidFill>
                   <a:srgbClr val="FF0033"/>
                 </a:solidFill>
@@ -8548,7 +10741,7 @@
               <a:t>• </a:t>
             </a:r>
             <a:r>
-              <a:rPr b="1" sz="1400">
+              <a:rPr b="1" sz="1200">
                 <a:solidFill>
                   <a:srgbClr val="FFFFFF"/>
                 </a:solidFill>
@@ -8556,7 +10749,7 @@
               <a:t>16:9 Streaming Player: </a:t>
             </a:r>
             <a:r>
-              <a:rPr sz="1400">
+              <a:rPr sz="1200">
                 <a:solidFill>
                   <a:srgbClr val="CDD2DC"/>
                 </a:solidFill>
@@ -8567,11 +10760,11 @@
           <a:p>
             <a:pPr>
               <a:spcAft>
-                <a:spcPts val="800"/>
-              </a:spcAft>
-            </a:pPr>
-            <a:r>
-              <a:rPr b="1" sz="1500">
+                <a:spcPts val="600"/>
+              </a:spcAft>
+            </a:pPr>
+            <a:r>
+              <a:rPr b="1" sz="1200">
                 <a:solidFill>
                   <a:srgbClr val="FF0033"/>
                 </a:solidFill>
@@ -8579,7 +10772,7 @@
               <a:t>• </a:t>
             </a:r>
             <a:r>
-              <a:rPr b="1" sz="1400">
+              <a:rPr b="1" sz="1200">
                 <a:solidFill>
                   <a:srgbClr val="FFFFFF"/>
                 </a:solidFill>
@@ -8587,7 +10780,7 @@
               <a:t>Up-Next Recommendation Engine: </a:t>
             </a:r>
             <a:r>
-              <a:rPr sz="1400">
+              <a:rPr sz="1200">
                 <a:solidFill>
                   <a:srgbClr val="CDD2DC"/>
                 </a:solidFill>
@@ -8598,11 +10791,11 @@
           <a:p>
             <a:pPr>
               <a:spcAft>
-                <a:spcPts val="800"/>
-              </a:spcAft>
-            </a:pPr>
-            <a:r>
-              <a:rPr b="1" sz="1500">
+                <a:spcPts val="600"/>
+              </a:spcAft>
+            </a:pPr>
+            <a:r>
+              <a:rPr b="1" sz="1200">
                 <a:solidFill>
                   <a:srgbClr val="FF0033"/>
                 </a:solidFill>
@@ -8610,7 +10803,7 @@
               <a:t>• </a:t>
             </a:r>
             <a:r>
-              <a:rPr b="1" sz="1400">
+              <a:rPr b="1" sz="1200">
                 <a:solidFill>
                   <a:srgbClr val="FFFFFF"/>
                 </a:solidFill>
@@ -8618,7 +10811,7 @@
               <a:t>Auto-Scroll on Video Change: </a:t>
             </a:r>
             <a:r>
-              <a:rPr sz="1400">
+              <a:rPr sz="1200">
                 <a:solidFill>
                   <a:srgbClr val="CDD2DC"/>
                 </a:solidFill>
@@ -8629,11 +10822,11 @@
           <a:p>
             <a:pPr>
               <a:spcAft>
-                <a:spcPts val="800"/>
-              </a:spcAft>
-            </a:pPr>
-            <a:r>
-              <a:rPr b="1" sz="1500">
+                <a:spcPts val="600"/>
+              </a:spcAft>
+            </a:pPr>
+            <a:r>
+              <a:rPr b="1" sz="1200">
                 <a:solidFill>
                   <a:srgbClr val="FF0033"/>
                 </a:solidFill>
@@ -8641,7 +10834,7 @@
               <a:t>• </a:t>
             </a:r>
             <a:r>
-              <a:rPr b="1" sz="1400">
+              <a:rPr b="1" sz="1200">
                 <a:solidFill>
                   <a:srgbClr val="FFFFFF"/>
                 </a:solidFill>
@@ -8649,12 +10842,43 @@
               <a:t>Persistent Watch History: </a:t>
             </a:r>
             <a:r>
-              <a:rPr sz="1400">
+              <a:rPr sz="1200">
                 <a:solidFill>
                   <a:srgbClr val="CDD2DC"/>
                 </a:solidFill>
               </a:rPr>
               <a:t>Navigating to a video automatically appends it to persistent history in localStorage.</a:t>
+            </a:r>
+          </a:p>
+          <a:p>
+            <a:pPr>
+              <a:spcAft>
+                <a:spcPts val="600"/>
+              </a:spcAft>
+            </a:pPr>
+            <a:r>
+              <a:rPr b="1" sz="1200">
+                <a:solidFill>
+                  <a:srgbClr val="FF0033"/>
+                </a:solidFill>
+              </a:rPr>
+              <a:t>• </a:t>
+            </a:r>
+            <a:r>
+              <a:rPr b="1" sz="1200">
+                <a:solidFill>
+                  <a:srgbClr val="FFFFFF"/>
+                </a:solidFill>
+              </a:rPr>
+              <a:t>Interactive Action Bar: </a:t>
+            </a:r>
+            <a:r>
+              <a:rPr sz="1200">
+                <a:solidFill>
+                  <a:srgbClr val="CDD2DC"/>
+                </a:solidFill>
+              </a:rPr>
+              <a:t>Like counter toggle, Watch Later bookmarking, and native share dialog integration.</a:t>
             </a:r>
           </a:p>
         </p:txBody>
@@ -8667,8 +10891,8 @@
         </p:nvSpPr>
         <p:spPr>
           <a:xfrm>
-            <a:off x="6949440" y="1371600"/>
-            <a:ext cx="4480560" cy="4663440"/>
+            <a:off x="6675120" y="1371600"/>
+            <a:ext cx="4754880" cy="4754880"/>
           </a:xfrm>
           <a:prstGeom prst="roundRect">
             <a:avLst/>
@@ -8676,7 +10900,7 @@
           <a:solidFill>
             <a:srgbClr val="161922"/>
           </a:solidFill>
-          <a:ln w="17780">
+          <a:ln w="16510">
             <a:solidFill>
               <a:srgbClr val="2E3445"/>
             </a:solidFill>
@@ -8720,8 +10944,8 @@
         </p:blipFill>
         <p:spPr>
           <a:xfrm>
-            <a:off x="7178040" y="1645920"/>
-            <a:ext cx="4023360" cy="2263140"/>
+            <a:off x="6949440" y="1600200"/>
+            <a:ext cx="4206240" cy="2359152"/>
           </a:xfrm>
           <a:prstGeom prst="rect">
             <a:avLst/>
@@ -8736,8 +10960,8 @@
         </p:nvSpPr>
         <p:spPr>
           <a:xfrm>
-            <a:off x="7178040" y="4114800"/>
-            <a:ext cx="4023360" cy="1645920"/>
+            <a:off x="6949440" y="4160520"/>
+            <a:ext cx="4206240" cy="1737360"/>
           </a:xfrm>
           <a:prstGeom prst="rect">
             <a:avLst/>
@@ -8751,6 +10975,9 @@
           <a:lstStyle/>
           <a:p>
             <a:pPr>
+              <a:spcAft>
+                <a:spcPts val="400"/>
+              </a:spcAft>
               <a:defRPr sz="1500" b="1">
                 <a:solidFill>
                   <a:srgbClr val="3EA6FF"/>
@@ -8763,10 +10990,7 @@
           </a:p>
           <a:p>
             <a:pPr>
-              <a:spcBef>
-                <a:spcPts val="400"/>
-              </a:spcBef>
-              <a:defRPr sz="1250">
+              <a:defRPr sz="1200">
                 <a:solidFill>
                   <a:srgbClr val="CDD2DC"/>
                 </a:solidFill>
@@ -8908,7 +11132,7 @@
           <a:lstStyle/>
           <a:p>
             <a:pPr>
-              <a:defRPr sz="1200" b="1">
+              <a:defRPr sz="1150" b="1">
                 <a:solidFill>
                   <a:srgbClr val="3EA6FF"/>
                 </a:solidFill>
@@ -8929,7 +11153,42 @@
         <p:spPr>
           <a:xfrm>
             <a:off x="731520" y="621792"/>
-            <a:ext cx="10728655" cy="640080"/>
+            <a:ext cx="10728655" cy="594360"/>
+          </a:xfrm>
+          <a:prstGeom prst="rect">
+            <a:avLst/>
+          </a:prstGeom>
+          <a:noFill/>
+        </p:spPr>
+        <p:txBody>
+          <a:bodyPr wrap="square">
+            <a:spAutoFit/>
+          </a:bodyPr>
+          <a:lstStyle/>
+          <a:p>
+            <a:pPr>
+              <a:defRPr sz="2300" b="1">
+                <a:solidFill>
+                  <a:srgbClr val="FFFFFF"/>
+                </a:solidFill>
+              </a:defRPr>
+            </a:pPr>
+            <a:r>
+              <a:t>Interactive Comments System with useRef &amp; Dynamic Sorting</a:t>
+            </a:r>
+          </a:p>
+        </p:txBody>
+      </p:sp>
+      <p:sp>
+        <p:nvSpPr>
+          <p:cNvPr id="6" name="TextBox 5"/>
+          <p:cNvSpPr txBox="1"/>
+          <p:nvPr/>
+        </p:nvSpPr>
+        <p:spPr>
+          <a:xfrm>
+            <a:off x="731520" y="6327648"/>
+            <a:ext cx="10728655" cy="274320"/>
           </a:xfrm>
           <a:prstGeom prst="rect">
             <a:avLst/>
@@ -8943,49 +11202,14 @@
           <a:lstStyle/>
           <a:p>
             <a:pPr>
-              <a:defRPr sz="2500" b="1">
-                <a:solidFill>
-                  <a:srgbClr val="FFFFFF"/>
+              <a:defRPr sz="1000">
+                <a:solidFill>
+                  <a:srgbClr val="8C94A5"/>
                 </a:solidFill>
               </a:defRPr>
             </a:pPr>
             <a:r>
-              <a:t>Interactive Comments System with useRef &amp; Dynamic Sorting</a:t>
-            </a:r>
-          </a:p>
-        </p:txBody>
-      </p:sp>
-      <p:sp>
-        <p:nvSpPr>
-          <p:cNvPr id="6" name="TextBox 5"/>
-          <p:cNvSpPr txBox="1"/>
-          <p:nvPr/>
-        </p:nvSpPr>
-        <p:spPr>
-          <a:xfrm>
-            <a:off x="731520" y="6309360"/>
-            <a:ext cx="10728655" cy="320040"/>
-          </a:xfrm>
-          <a:prstGeom prst="rect">
-            <a:avLst/>
-          </a:prstGeom>
-          <a:noFill/>
-        </p:spPr>
-        <p:txBody>
-          <a:bodyPr wrap="none">
-            <a:spAutoFit/>
-          </a:bodyPr>
-          <a:lstStyle/>
-          <a:p>
-            <a:pPr>
-              <a:defRPr sz="1050">
-                <a:solidFill>
-                  <a:srgbClr val="828A9B"/>
-                </a:solidFill>
-              </a:defRPr>
-            </a:pPr>
-            <a:r>
-              <a:t>PheW TuBe: Video Streaming Platform (G15-PID-17)  |  Evaluation-II  |  Page 07</a:t>
+              <a:t>PheW TuBe: Video Streaming Platform (G15-PID-17)  |  Chitkara University FEE-II  |  Page 07</a:t>
             </a:r>
           </a:p>
         </p:txBody>
@@ -8999,7 +11223,7 @@
         <p:spPr>
           <a:xfrm>
             <a:off x="731520" y="1371600"/>
-            <a:ext cx="5943600" cy="4663440"/>
+            <a:ext cx="5669280" cy="4754880"/>
           </a:xfrm>
           <a:prstGeom prst="roundRect">
             <a:avLst/>
@@ -9007,7 +11231,7 @@
           <a:solidFill>
             <a:srgbClr val="161922"/>
           </a:solidFill>
-          <a:ln w="17780">
+          <a:ln w="16510">
             <a:solidFill>
               <a:srgbClr val="2E3445"/>
             </a:solidFill>
@@ -9043,8 +11267,8 @@
         </p:nvSpPr>
         <p:spPr>
           <a:xfrm>
-            <a:off x="932688" y="1536192"/>
-            <a:ext cx="5541264" cy="4334255"/>
+            <a:off x="914400" y="1517904"/>
+            <a:ext cx="5303520" cy="4462272"/>
           </a:xfrm>
           <a:prstGeom prst="rect">
             <a:avLst/>
@@ -9052,16 +11276,16 @@
           <a:noFill/>
         </p:spPr>
         <p:txBody>
-          <a:bodyPr wrap="square">
+          <a:bodyPr wrap="square" tIns="0" bIns="0" lIns="0" rIns="0">
             <a:spAutoFit/>
           </a:bodyPr>
           <a:lstStyle/>
           <a:p>
             <a:pPr>
               <a:spcAft>
-                <a:spcPts val="1000"/>
-              </a:spcAft>
-              <a:defRPr sz="1700" b="1">
+                <a:spcPts val="800"/>
+              </a:spcAft>
+              <a:defRPr sz="1550" b="1">
                 <a:solidFill>
                   <a:srgbClr val="3EA6FF"/>
                 </a:solidFill>
@@ -9074,11 +11298,11 @@
           <a:p>
             <a:pPr>
               <a:spcAft>
-                <a:spcPts val="800"/>
-              </a:spcAft>
-            </a:pPr>
-            <a:r>
-              <a:rPr b="1" sz="1500">
+                <a:spcPts val="600"/>
+              </a:spcAft>
+            </a:pPr>
+            <a:r>
+              <a:rPr b="1" sz="1200">
                 <a:solidFill>
                   <a:srgbClr val="3EA6FF"/>
                 </a:solidFill>
@@ -9086,7 +11310,7 @@
               <a:t>• </a:t>
             </a:r>
             <a:r>
-              <a:rPr b="1" sz="1400">
+              <a:rPr b="1" sz="1200">
                 <a:solidFill>
                   <a:srgbClr val="FFFFFF"/>
                 </a:solidFill>
@@ -9094,7 +11318,7 @@
               <a:t>DOM Referencing via useRef: </a:t>
             </a:r>
             <a:r>
-              <a:rPr sz="1400">
+              <a:rPr sz="1200">
                 <a:solidFill>
                   <a:srgbClr val="CDD2DC"/>
                 </a:solidFill>
@@ -9105,11 +11329,11 @@
           <a:p>
             <a:pPr>
               <a:spcAft>
-                <a:spcPts val="800"/>
-              </a:spcAft>
-            </a:pPr>
-            <a:r>
-              <a:rPr b="1" sz="1500">
+                <a:spcPts val="600"/>
+              </a:spcAft>
+            </a:pPr>
+            <a:r>
+              <a:rPr b="1" sz="1200">
                 <a:solidFill>
                   <a:srgbClr val="3EA6FF"/>
                 </a:solidFill>
@@ -9117,7 +11341,7 @@
               <a:t>• </a:t>
             </a:r>
             <a:r>
-              <a:rPr b="1" sz="1400">
+              <a:rPr b="1" sz="1200">
                 <a:solidFill>
                   <a:srgbClr val="FFFFFF"/>
                 </a:solidFill>
@@ -9125,7 +11349,7 @@
               <a:t>Programmatic Focus: </a:t>
             </a:r>
             <a:r>
-              <a:rPr sz="1400">
+              <a:rPr sz="1200">
                 <a:solidFill>
                   <a:srgbClr val="CDD2DC"/>
                 </a:solidFill>
@@ -9136,11 +11360,11 @@
           <a:p>
             <a:pPr>
               <a:spcAft>
-                <a:spcPts val="800"/>
-              </a:spcAft>
-            </a:pPr>
-            <a:r>
-              <a:rPr b="1" sz="1500">
+                <a:spcPts val="600"/>
+              </a:spcAft>
+            </a:pPr>
+            <a:r>
+              <a:rPr b="1" sz="1200">
                 <a:solidFill>
                   <a:srgbClr val="3EA6FF"/>
                 </a:solidFill>
@@ -9148,7 +11372,7 @@
               <a:t>• </a:t>
             </a:r>
             <a:r>
-              <a:rPr b="1" sz="1400">
+              <a:rPr b="1" sz="1200">
                 <a:solidFill>
                   <a:srgbClr val="FFFFFF"/>
                 </a:solidFill>
@@ -9156,7 +11380,7 @@
               <a:t>Isolated Video Comment Threads: </a:t>
             </a:r>
             <a:r>
-              <a:rPr sz="1400">
+              <a:rPr sz="1200">
                 <a:solidFill>
                   <a:srgbClr val="CDD2DC"/>
                 </a:solidFill>
@@ -9167,11 +11391,11 @@
           <a:p>
             <a:pPr>
               <a:spcAft>
-                <a:spcPts val="800"/>
-              </a:spcAft>
-            </a:pPr>
-            <a:r>
-              <a:rPr b="1" sz="1500">
+                <a:spcPts val="600"/>
+              </a:spcAft>
+            </a:pPr>
+            <a:r>
+              <a:rPr b="1" sz="1200">
                 <a:solidFill>
                   <a:srgbClr val="3EA6FF"/>
                 </a:solidFill>
@@ -9179,7 +11403,7 @@
               <a:t>• </a:t>
             </a:r>
             <a:r>
-              <a:rPr b="1" sz="1400">
+              <a:rPr b="1" sz="1200">
                 <a:solidFill>
                   <a:srgbClr val="FFFFFF"/>
                 </a:solidFill>
@@ -9187,7 +11411,7 @@
               <a:t>Dynamic Sorting Engine: </a:t>
             </a:r>
             <a:r>
-              <a:rPr sz="1400">
+              <a:rPr sz="1200">
                 <a:solidFill>
                   <a:srgbClr val="CDD2DC"/>
                 </a:solidFill>
@@ -9198,11 +11422,11 @@
           <a:p>
             <a:pPr>
               <a:spcAft>
-                <a:spcPts val="800"/>
-              </a:spcAft>
-            </a:pPr>
-            <a:r>
-              <a:rPr b="1" sz="1500">
+                <a:spcPts val="600"/>
+              </a:spcAft>
+            </a:pPr>
+            <a:r>
+              <a:rPr b="1" sz="1200">
                 <a:solidFill>
                   <a:srgbClr val="3EA6FF"/>
                 </a:solidFill>
@@ -9210,7 +11434,7 @@
               <a:t>• </a:t>
             </a:r>
             <a:r>
-              <a:rPr b="1" sz="1400">
+              <a:rPr b="1" sz="1200">
                 <a:solidFill>
                   <a:srgbClr val="FFFFFF"/>
                 </a:solidFill>
@@ -9218,12 +11442,43 @@
               <a:t>Optimistic Submissions: </a:t>
             </a:r>
             <a:r>
-              <a:rPr sz="1400">
+              <a:rPr sz="1200">
                 <a:solidFill>
                   <a:srgbClr val="CDD2DC"/>
                 </a:solidFill>
               </a:rPr>
               <a:t>Comments post instantly with 'Just now' timestamp and serialize to browser localStorage.</a:t>
+            </a:r>
+          </a:p>
+          <a:p>
+            <a:pPr>
+              <a:spcAft>
+                <a:spcPts val="600"/>
+              </a:spcAft>
+            </a:pPr>
+            <a:r>
+              <a:rPr b="1" sz="1200">
+                <a:solidFill>
+                  <a:srgbClr val="3EA6FF"/>
+                </a:solidFill>
+              </a:rPr>
+              <a:t>• </a:t>
+            </a:r>
+            <a:r>
+              <a:rPr b="1" sz="1200">
+                <a:solidFill>
+                  <a:srgbClr val="FFFFFF"/>
+                </a:solidFill>
+              </a:rPr>
+              <a:t>Responsive Feedback: </a:t>
+            </a:r>
+            <a:r>
+              <a:rPr sz="1200">
+                <a:solidFill>
+                  <a:srgbClr val="CDD2DC"/>
+                </a:solidFill>
+              </a:rPr>
+              <a:t>Integrated upvote toggles and user avatar attribution with active user session.</a:t>
             </a:r>
           </a:p>
         </p:txBody>
@@ -9236,8 +11491,8 @@
         </p:nvSpPr>
         <p:spPr>
           <a:xfrm>
-            <a:off x="6949440" y="1371600"/>
-            <a:ext cx="4480560" cy="4663440"/>
+            <a:off x="6675120" y="1371600"/>
+            <a:ext cx="4754880" cy="4754880"/>
           </a:xfrm>
           <a:prstGeom prst="roundRect">
             <a:avLst/>
@@ -9245,7 +11500,7 @@
           <a:solidFill>
             <a:srgbClr val="161922"/>
           </a:solidFill>
-          <a:ln w="17780">
+          <a:ln w="16510">
             <a:solidFill>
               <a:srgbClr val="2E3445"/>
             </a:solidFill>
@@ -9289,8 +11544,8 @@
         </p:blipFill>
         <p:spPr>
           <a:xfrm>
-            <a:off x="7178040" y="1645920"/>
-            <a:ext cx="4023360" cy="3017520"/>
+            <a:off x="7525512" y="1600200"/>
+            <a:ext cx="3108960" cy="2331720"/>
           </a:xfrm>
           <a:prstGeom prst="rect">
             <a:avLst/>
@@ -9305,8 +11560,8 @@
         </p:nvSpPr>
         <p:spPr>
           <a:xfrm>
-            <a:off x="7178040" y="4114800"/>
-            <a:ext cx="4023360" cy="1645920"/>
+            <a:off x="6949440" y="4160520"/>
+            <a:ext cx="4206240" cy="1737360"/>
           </a:xfrm>
           <a:prstGeom prst="rect">
             <a:avLst/>
@@ -9320,6 +11575,9 @@
           <a:lstStyle/>
           <a:p>
             <a:pPr>
+              <a:spcAft>
+                <a:spcPts val="400"/>
+              </a:spcAft>
               <a:defRPr sz="1500" b="1">
                 <a:solidFill>
                   <a:srgbClr val="FF0033"/>
@@ -9332,10 +11590,7 @@
           </a:p>
           <a:p>
             <a:pPr>
-              <a:spcBef>
-                <a:spcPts val="400"/>
-              </a:spcBef>
-              <a:defRPr sz="1250">
+              <a:defRPr sz="1200">
                 <a:solidFill>
                   <a:srgbClr val="CDD2DC"/>
                 </a:solidFill>
@@ -9477,7 +11732,7 @@
           <a:lstStyle/>
           <a:p>
             <a:pPr>
-              <a:defRPr sz="1200" b="1">
+              <a:defRPr sz="1150" b="1">
                 <a:solidFill>
                   <a:srgbClr val="3EA6FF"/>
                 </a:solidFill>
@@ -9498,7 +11753,42 @@
         <p:spPr>
           <a:xfrm>
             <a:off x="731520" y="621792"/>
-            <a:ext cx="10728655" cy="640080"/>
+            <a:ext cx="10728655" cy="594360"/>
+          </a:xfrm>
+          <a:prstGeom prst="rect">
+            <a:avLst/>
+          </a:prstGeom>
+          <a:noFill/>
+        </p:spPr>
+        <p:txBody>
+          <a:bodyPr wrap="square">
+            <a:spAutoFit/>
+          </a:bodyPr>
+          <a:lstStyle/>
+          <a:p>
+            <a:pPr>
+              <a:defRPr sz="2300" b="1">
+                <a:solidFill>
+                  <a:srgbClr val="FFFFFF"/>
+                </a:solidFill>
+              </a:defRPr>
+            </a:pPr>
+            <a:r>
+              <a:t>Protected Routing &amp; Auth Guard Architecture</a:t>
+            </a:r>
+          </a:p>
+        </p:txBody>
+      </p:sp>
+      <p:sp>
+        <p:nvSpPr>
+          <p:cNvPr id="6" name="TextBox 5"/>
+          <p:cNvSpPr txBox="1"/>
+          <p:nvPr/>
+        </p:nvSpPr>
+        <p:spPr>
+          <a:xfrm>
+            <a:off x="731520" y="6327648"/>
+            <a:ext cx="10728655" cy="274320"/>
           </a:xfrm>
           <a:prstGeom prst="rect">
             <a:avLst/>
@@ -9512,49 +11802,14 @@
           <a:lstStyle/>
           <a:p>
             <a:pPr>
-              <a:defRPr sz="2500" b="1">
-                <a:solidFill>
-                  <a:srgbClr val="FFFFFF"/>
+              <a:defRPr sz="1000">
+                <a:solidFill>
+                  <a:srgbClr val="8C94A5"/>
                 </a:solidFill>
               </a:defRPr>
             </a:pPr>
             <a:r>
-              <a:t>Global State Architecture (Context API) &amp; LocalStorage Sync</a:t>
-            </a:r>
-          </a:p>
-        </p:txBody>
-      </p:sp>
-      <p:sp>
-        <p:nvSpPr>
-          <p:cNvPr id="6" name="TextBox 5"/>
-          <p:cNvSpPr txBox="1"/>
-          <p:nvPr/>
-        </p:nvSpPr>
-        <p:spPr>
-          <a:xfrm>
-            <a:off x="731520" y="6309360"/>
-            <a:ext cx="10728655" cy="320040"/>
-          </a:xfrm>
-          <a:prstGeom prst="rect">
-            <a:avLst/>
-          </a:prstGeom>
-          <a:noFill/>
-        </p:spPr>
-        <p:txBody>
-          <a:bodyPr wrap="none">
-            <a:spAutoFit/>
-          </a:bodyPr>
-          <a:lstStyle/>
-          <a:p>
-            <a:pPr>
-              <a:defRPr sz="1050">
-                <a:solidFill>
-                  <a:srgbClr val="828A9B"/>
-                </a:solidFill>
-              </a:defRPr>
-            </a:pPr>
-            <a:r>
-              <a:t>PheW TuBe: Video Streaming Platform (G15-PID-17)  |  Evaluation-II  |  Page 08</a:t>
+              <a:t>PheW TuBe: Video Streaming Platform (G15-PID-17)  |  Chitkara University FEE-II  |  Page 08</a:t>
             </a:r>
           </a:p>
         </p:txBody>
@@ -9568,7 +11823,7 @@
         <p:spPr>
           <a:xfrm>
             <a:off x="731520" y="1371600"/>
-            <a:ext cx="3383280" cy="4663440"/>
+            <a:ext cx="3383280" cy="4754880"/>
           </a:xfrm>
           <a:prstGeom prst="roundRect">
             <a:avLst/>
@@ -9576,7 +11831,7 @@
           <a:solidFill>
             <a:srgbClr val="161922"/>
           </a:solidFill>
-          <a:ln w="17780">
+          <a:ln w="16510">
             <a:solidFill>
               <a:srgbClr val="2E3445"/>
             </a:solidFill>
@@ -9612,8 +11867,8 @@
         </p:nvSpPr>
         <p:spPr>
           <a:xfrm>
-            <a:off x="932688" y="1536192"/>
-            <a:ext cx="2980944" cy="4334255"/>
+            <a:off x="914400" y="1517904"/>
+            <a:ext cx="3017520" cy="4462272"/>
           </a:xfrm>
           <a:prstGeom prst="rect">
             <a:avLst/>
@@ -9621,33 +11876,33 @@
           <a:noFill/>
         </p:spPr>
         <p:txBody>
-          <a:bodyPr wrap="square">
+          <a:bodyPr wrap="square" tIns="0" bIns="0" lIns="0" rIns="0">
             <a:spAutoFit/>
           </a:bodyPr>
           <a:lstStyle/>
           <a:p>
             <a:pPr>
               <a:spcAft>
-                <a:spcPts val="1000"/>
-              </a:spcAft>
-              <a:defRPr sz="1700" b="1">
+                <a:spcPts val="800"/>
+              </a:spcAft>
+              <a:defRPr sz="1550" b="1">
                 <a:solidFill>
                   <a:srgbClr val="FF0033"/>
                 </a:solidFill>
               </a:defRPr>
             </a:pPr>
             <a:r>
-              <a:t>Context API Design</a:t>
-            </a:r>
-          </a:p>
-          <a:p>
-            <a:pPr>
-              <a:spcAft>
-                <a:spcPts val="800"/>
-              </a:spcAft>
-            </a:pPr>
-            <a:r>
-              <a:rPr b="1" sz="1500">
+              <a:t>Classroom Pattern Aligned</a:t>
+            </a:r>
+          </a:p>
+          <a:p>
+            <a:pPr>
+              <a:spcAft>
+                <a:spcPts val="600"/>
+              </a:spcAft>
+            </a:pPr>
+            <a:r>
+              <a:rPr b="1" sz="1200">
                 <a:solidFill>
                   <a:srgbClr val="FF0033"/>
                 </a:solidFill>
@@ -9655,30 +11910,30 @@
               <a:t>• </a:t>
             </a:r>
             <a:r>
-              <a:rPr b="1" sz="1400">
-                <a:solidFill>
-                  <a:srgbClr val="FFFFFF"/>
-                </a:solidFill>
-              </a:rPr>
-              <a:t>Single Source of Truth: </a:t>
-            </a:r>
-            <a:r>
-              <a:rPr sz="1400">
+              <a:rPr b="1" sz="1200">
+                <a:solidFill>
+                  <a:srgbClr val="FFFFFF"/>
+                </a:solidFill>
+              </a:rPr>
+              <a:t>Instructor Implementation: </a:t>
+            </a:r>
+            <a:r>
+              <a:rPr sz="1200">
                 <a:solidFill>
                   <a:srgbClr val="CDD2DC"/>
                 </a:solidFill>
               </a:rPr>
-              <a:t>Centralizes state for videos, shorts, likes, watch later, history, and comments.</a:t>
-            </a:r>
-          </a:p>
-          <a:p>
-            <a:pPr>
-              <a:spcAft>
-                <a:spcPts val="800"/>
-              </a:spcAft>
-            </a:pPr>
-            <a:r>
-              <a:rPr b="1" sz="1500">
+              <a:t>Adopts Mr. Shubham Kumar's ProtectedRoute architecture from G15-updated repository.</a:t>
+            </a:r>
+          </a:p>
+          <a:p>
+            <a:pPr>
+              <a:spcAft>
+                <a:spcPts val="600"/>
+              </a:spcAft>
+            </a:pPr>
+            <a:r>
+              <a:rPr b="1" sz="1200">
                 <a:solidFill>
                   <a:srgbClr val="FF0033"/>
                 </a:solidFill>
@@ -9686,30 +11941,30 @@
               <a:t>• </a:t>
             </a:r>
             <a:r>
-              <a:rPr b="1" sz="1400">
-                <a:solidFill>
-                  <a:srgbClr val="FFFFFF"/>
-                </a:solidFill>
-              </a:rPr>
-              <a:t>Custom Hook: </a:t>
-            </a:r>
-            <a:r>
-              <a:rPr sz="1400">
+              <a:rPr b="1" sz="1200">
+                <a:solidFill>
+                  <a:srgbClr val="FFFFFF"/>
+                </a:solidFill>
+              </a:rPr>
+              <a:t>Higher-Order Wrapper: </a:t>
+            </a:r>
+            <a:r>
+              <a:rPr sz="1200">
                 <a:solidFill>
                   <a:srgbClr val="CDD2DC"/>
                 </a:solidFill>
               </a:rPr>
-              <a:t>useApp() provides simple, guarded access to state and dispatch methods.</a:t>
-            </a:r>
-          </a:p>
-          <a:p>
-            <a:pPr>
-              <a:spcAft>
-                <a:spcPts val="800"/>
-              </a:spcAft>
-            </a:pPr>
-            <a:r>
-              <a:rPr b="1" sz="1500">
+              <a:t>Encapsulates protected page components as children (&lt;ProtectedRoute&gt;&lt;Subscriptions /&gt;&lt;/ProtectedRoute&gt;).</a:t>
+            </a:r>
+          </a:p>
+          <a:p>
+            <a:pPr>
+              <a:spcAft>
+                <a:spcPts val="600"/>
+              </a:spcAft>
+            </a:pPr>
+            <a:r>
+              <a:rPr b="1" sz="1200">
                 <a:solidFill>
                   <a:srgbClr val="FF0033"/>
                 </a:solidFill>
@@ -9717,20 +11972,20 @@
               <a:t>• </a:t>
             </a:r>
             <a:r>
-              <a:rPr b="1" sz="1400">
-                <a:solidFill>
-                  <a:srgbClr val="FFFFFF"/>
-                </a:solidFill>
-              </a:rPr>
-              <a:t>Decoupled Logic: </a:t>
-            </a:r>
-            <a:r>
-              <a:rPr sz="1400">
+              <a:rPr b="1" sz="1200">
+                <a:solidFill>
+                  <a:srgbClr val="FFFFFF"/>
+                </a:solidFill>
+              </a:rPr>
+              <a:t>Single Responsibility: </a:t>
+            </a:r>
+            <a:r>
+              <a:rPr sz="1200">
                 <a:solidFill>
                   <a:srgbClr val="CDD2DC"/>
                 </a:solidFill>
               </a:rPr>
-              <a:t>Keeps UI components clean and focused purely on rendering views.</a:t>
+              <a:t>Keeps route security logic isolated from individual page components.</a:t>
             </a:r>
           </a:p>
         </p:txBody>
@@ -9744,7 +11999,7 @@
         <p:spPr>
           <a:xfrm>
             <a:off x="4389120" y="1371600"/>
-            <a:ext cx="3383280" cy="4663440"/>
+            <a:ext cx="3383280" cy="4754880"/>
           </a:xfrm>
           <a:prstGeom prst="roundRect">
             <a:avLst/>
@@ -9752,7 +12007,7 @@
           <a:solidFill>
             <a:srgbClr val="161922"/>
           </a:solidFill>
-          <a:ln w="17780">
+          <a:ln w="16510">
             <a:solidFill>
               <a:srgbClr val="2E3445"/>
             </a:solidFill>
@@ -9788,8 +12043,8 @@
         </p:nvSpPr>
         <p:spPr>
           <a:xfrm>
-            <a:off x="4590288" y="1536192"/>
-            <a:ext cx="2980944" cy="4334255"/>
+            <a:off x="4572000" y="1517904"/>
+            <a:ext cx="3017520" cy="4462272"/>
           </a:xfrm>
           <a:prstGeom prst="rect">
             <a:avLst/>
@@ -9797,33 +12052,33 @@
           <a:noFill/>
         </p:spPr>
         <p:txBody>
-          <a:bodyPr wrap="square">
+          <a:bodyPr wrap="square" tIns="0" bIns="0" lIns="0" rIns="0">
             <a:spAutoFit/>
           </a:bodyPr>
           <a:lstStyle/>
           <a:p>
             <a:pPr>
               <a:spcAft>
-                <a:spcPts val="1000"/>
-              </a:spcAft>
-              <a:defRPr sz="1700" b="1">
+                <a:spcPts val="800"/>
+              </a:spcAft>
+              <a:defRPr sz="1550" b="1">
                 <a:solidFill>
                   <a:srgbClr val="3EA6FF"/>
                 </a:solidFill>
               </a:defRPr>
             </a:pPr>
             <a:r>
-              <a:t>LocalStorage Sync</a:t>
-            </a:r>
-          </a:p>
-          <a:p>
-            <a:pPr>
-              <a:spcAft>
-                <a:spcPts val="800"/>
-              </a:spcAft>
-            </a:pPr>
-            <a:r>
-              <a:rPr b="1" sz="1500">
+              <a:t>Guarded Route Registry</a:t>
+            </a:r>
+          </a:p>
+          <a:p>
+            <a:pPr>
+              <a:spcAft>
+                <a:spcPts val="600"/>
+              </a:spcAft>
+            </a:pPr>
+            <a:r>
+              <a:rPr b="1" sz="1200">
                 <a:solidFill>
                   <a:srgbClr val="3EA6FF"/>
                 </a:solidFill>
@@ -9831,30 +12086,30 @@
               <a:t>• </a:t>
             </a:r>
             <a:r>
-              <a:rPr b="1" sz="1400">
-                <a:solidFill>
-                  <a:srgbClr val="FFFFFF"/>
-                </a:solidFill>
-              </a:rPr>
-              <a:t>Lazy Initializers: </a:t>
-            </a:r>
-            <a:r>
-              <a:rPr sz="1400">
+              <a:rPr b="1" sz="1200">
+                <a:solidFill>
+                  <a:srgbClr val="FFFFFF"/>
+                </a:solidFill>
+              </a:rPr>
+              <a:t>Private User Feeds: </a:t>
+            </a:r>
+            <a:r>
+              <a:rPr sz="1200">
                 <a:solidFill>
                   <a:srgbClr val="CDD2DC"/>
                 </a:solidFill>
               </a:rPr>
-              <a:t>State initializes directly from localStorage.getItem() on page boot.</a:t>
-            </a:r>
-          </a:p>
-          <a:p>
-            <a:pPr>
-              <a:spcAft>
-                <a:spcPts val="800"/>
-              </a:spcAft>
-            </a:pPr>
-            <a:r>
-              <a:rPr b="1" sz="1500">
+              <a:t>Protects /subscriptions, /history, /liked, /watch-later, /playlists, and /my-uploads.</a:t>
+            </a:r>
+          </a:p>
+          <a:p>
+            <a:pPr>
+              <a:spcAft>
+                <a:spcPts val="600"/>
+              </a:spcAft>
+            </a:pPr>
+            <a:r>
+              <a:rPr b="1" sz="1200">
                 <a:solidFill>
                   <a:srgbClr val="3EA6FF"/>
                 </a:solidFill>
@@ -9862,30 +12117,30 @@
               <a:t>• </a:t>
             </a:r>
             <a:r>
-              <a:rPr b="1" sz="1400">
-                <a:solidFill>
-                  <a:srgbClr val="FFFFFF"/>
-                </a:solidFill>
-              </a:rPr>
-              <a:t>Reactive Effects: </a:t>
-            </a:r>
-            <a:r>
-              <a:rPr sz="1400">
+              <a:rPr b="1" sz="1200">
+                <a:solidFill>
+                  <a:srgbClr val="FFFFFF"/>
+                </a:solidFill>
+              </a:rPr>
+              <a:t>Public Access: </a:t>
+            </a:r>
+            <a:r>
+              <a:rPr sz="1200">
                 <a:solidFill>
                   <a:srgbClr val="CDD2DC"/>
                 </a:solidFill>
               </a:rPr>
-              <a:t>Dedicated useEffect hooks automatically serialize state changes.</a:t>
-            </a:r>
-          </a:p>
-          <a:p>
-            <a:pPr>
-              <a:spcAft>
-                <a:spcPts val="800"/>
-              </a:spcAft>
-            </a:pPr>
-            <a:r>
-              <a:rPr b="1" sz="1500">
+              <a:t>Home (/), Watch (/watch/:id), Shorts (/shorts), and Channels remain publicly accessible.</a:t>
+            </a:r>
+          </a:p>
+          <a:p>
+            <a:pPr>
+              <a:spcAft>
+                <a:spcPts val="600"/>
+              </a:spcAft>
+            </a:pPr>
+            <a:r>
+              <a:rPr b="1" sz="1200">
                 <a:solidFill>
                   <a:srgbClr val="3EA6FF"/>
                 </a:solidFill>
@@ -9893,20 +12148,20 @@
               <a:t>• </a:t>
             </a:r>
             <a:r>
-              <a:rPr b="1" sz="1400">
-                <a:solidFill>
-                  <a:srgbClr val="FFFFFF"/>
-                </a:solidFill>
-              </a:rPr>
-              <a:t>Offline Durability: </a:t>
-            </a:r>
-            <a:r>
-              <a:rPr sz="1400">
+              <a:rPr b="1" sz="1200">
+                <a:solidFill>
+                  <a:srgbClr val="FFFFFF"/>
+                </a:solidFill>
+              </a:rPr>
+              <a:t>Evaluates currentUser: </a:t>
+            </a:r>
+            <a:r>
+              <a:rPr sz="1200">
                 <a:solidFill>
                   <a:srgbClr val="CDD2DC"/>
                 </a:solidFill>
               </a:rPr>
-              <a:t>User likes, playlists, and watch history persist across browser restarts.</a:t>
+              <a:t>Inspects currentUser.isLoggedIn flag from global AppContext on route change.</a:t>
             </a:r>
           </a:p>
         </p:txBody>
@@ -9920,7 +12175,7 @@
         <p:spPr>
           <a:xfrm>
             <a:off x="8046720" y="1371600"/>
-            <a:ext cx="3383280" cy="4663440"/>
+            <a:ext cx="3383280" cy="4754880"/>
           </a:xfrm>
           <a:prstGeom prst="roundRect">
             <a:avLst/>
@@ -9928,7 +12183,7 @@
           <a:solidFill>
             <a:srgbClr val="161922"/>
           </a:solidFill>
-          <a:ln w="17780">
+          <a:ln w="16510">
             <a:solidFill>
               <a:srgbClr val="2E3445"/>
             </a:solidFill>
@@ -9964,8 +12219,8 @@
         </p:nvSpPr>
         <p:spPr>
           <a:xfrm>
-            <a:off x="8247888" y="1536192"/>
-            <a:ext cx="2980944" cy="4334255"/>
+            <a:off x="8229600" y="1517904"/>
+            <a:ext cx="3017520" cy="4462272"/>
           </a:xfrm>
           <a:prstGeom prst="rect">
             <a:avLst/>
@@ -9973,33 +12228,33 @@
           <a:noFill/>
         </p:spPr>
         <p:txBody>
-          <a:bodyPr wrap="square">
+          <a:bodyPr wrap="square" tIns="0" bIns="0" lIns="0" rIns="0">
             <a:spAutoFit/>
           </a:bodyPr>
           <a:lstStyle/>
           <a:p>
             <a:pPr>
               <a:spcAft>
-                <a:spcPts val="1000"/>
-              </a:spcAft>
-              <a:defRPr sz="1700" b="1">
+                <a:spcPts val="800"/>
+              </a:spcAft>
+              <a:defRPr sz="1550" b="1">
                 <a:solidFill>
                   <a:srgbClr val="2BA640"/>
                 </a:solidFill>
               </a:defRPr>
             </a:pPr>
             <a:r>
-              <a:t>Client-Side Auth Modal</a:t>
-            </a:r>
-          </a:p>
-          <a:p>
-            <a:pPr>
-              <a:spcAft>
-                <a:spcPts val="800"/>
-              </a:spcAft>
-            </a:pPr>
-            <a:r>
-              <a:rPr b="1" sz="1500">
+              <a:t>Authentic YouTube Lock Screen</a:t>
+            </a:r>
+          </a:p>
+          <a:p>
+            <a:pPr>
+              <a:spcAft>
+                <a:spcPts val="600"/>
+              </a:spcAft>
+            </a:pPr>
+            <a:r>
+              <a:rPr b="1" sz="1200">
                 <a:solidFill>
                   <a:srgbClr val="2BA640"/>
                 </a:solidFill>
@@ -10007,30 +12262,30 @@
               <a:t>• </a:t>
             </a:r>
             <a:r>
-              <a:rPr b="1" sz="1400">
-                <a:solidFill>
-                  <a:srgbClr val="FFFFFF"/>
-                </a:solidFill>
-              </a:rPr>
-              <a:t>Controlled Modal: </a:t>
-            </a:r>
-            <a:r>
-              <a:rPr sz="1400">
+              <a:rPr b="1" sz="1200">
+                <a:solidFill>
+                  <a:srgbClr val="FFFFFF"/>
+                </a:solidFill>
+              </a:rPr>
+              <a:t>Unauthenticated View: </a:t>
+            </a:r>
+            <a:r>
+              <a:rPr sz="1200">
                 <a:solidFill>
                   <a:srgbClr val="CDD2DC"/>
                 </a:solidFill>
               </a:rPr>
-              <a:t>Features Sign In / Sign Up toggle (faculty ecom class architecture).</a:t>
-            </a:r>
-          </a:p>
-          <a:p>
-            <a:pPr>
-              <a:spcAft>
-                <a:spcPts val="800"/>
-              </a:spcAft>
-            </a:pPr>
-            <a:r>
-              <a:rPr b="1" sz="1500">
+              <a:t>Displays lock icon badge with informative title explaining why login is required.</a:t>
+            </a:r>
+          </a:p>
+          <a:p>
+            <a:pPr>
+              <a:spcAft>
+                <a:spcPts val="600"/>
+              </a:spcAft>
+            </a:pPr>
+            <a:r>
+              <a:rPr b="1" sz="1200">
                 <a:solidFill>
                   <a:srgbClr val="2BA640"/>
                 </a:solidFill>
@@ -10038,30 +12293,30 @@
               <a:t>• </a:t>
             </a:r>
             <a:r>
-              <a:rPr b="1" sz="1400">
-                <a:solidFill>
-                  <a:srgbClr val="FFFFFF"/>
-                </a:solidFill>
-              </a:rPr>
-              <a:t>Session State: </a:t>
-            </a:r>
-            <a:r>
-              <a:rPr sz="1400">
+              <a:rPr b="1" sz="1200">
+                <a:solidFill>
+                  <a:srgbClr val="FFFFFF"/>
+                </a:solidFill>
+              </a:rPr>
+              <a:t>One-Click Auth Trigger: </a:t>
+            </a:r>
+            <a:r>
+              <a:rPr sz="1200">
                 <a:solidFill>
                   <a:srgbClr val="CDD2DC"/>
                 </a:solidFill>
               </a:rPr>
-              <a:t>Tracks user name, university email, and dynamic avatar status in state.</a:t>
-            </a:r>
-          </a:p>
-          <a:p>
-            <a:pPr>
-              <a:spcAft>
-                <a:spcPts val="800"/>
-              </a:spcAft>
-            </a:pPr>
-            <a:r>
-              <a:rPr b="1" sz="1500">
+              <a:t>'Sign In / Register' button directly opens the interactive AuthModal.</a:t>
+            </a:r>
+          </a:p>
+          <a:p>
+            <a:pPr>
+              <a:spcAft>
+                <a:spcPts val="600"/>
+              </a:spcAft>
+            </a:pPr>
+            <a:r>
+              <a:rPr b="1" sz="1200">
                 <a:solidFill>
                   <a:srgbClr val="2BA640"/>
                 </a:solidFill>
@@ -10069,20 +12324,20 @@
               <a:t>• </a:t>
             </a:r>
             <a:r>
-              <a:rPr b="1" sz="1400">
-                <a:solidFill>
-                  <a:srgbClr val="FFFFFF"/>
-                </a:solidFill>
-              </a:rPr>
-              <a:t>Action Guarding: </a:t>
-            </a:r>
-            <a:r>
-              <a:rPr sz="1400">
+              <a:rPr b="1" sz="1200">
+                <a:solidFill>
+                  <a:srgbClr val="FFFFFF"/>
+                </a:solidFill>
+              </a:rPr>
+              <a:t>Zero Flashing: </a:t>
+            </a:r>
+            <a:r>
+              <a:rPr sz="1200">
                 <a:solidFill>
                   <a:srgbClr val="CDD2DC"/>
                 </a:solidFill>
               </a:rPr>
-              <a:t>Displays toast alerts prompting sign-in on upload and restricted actions.</a:t>
+              <a:t>Evaluates auth state synchronously from localStorage cache, eliminating blank page flickers.</a:t>
             </a:r>
           </a:p>
         </p:txBody>
@@ -10217,7 +12472,7 @@
           <a:lstStyle/>
           <a:p>
             <a:pPr>
-              <a:defRPr sz="1200" b="1">
+              <a:defRPr sz="1150" b="1">
                 <a:solidFill>
                   <a:srgbClr val="3EA6FF"/>
                 </a:solidFill>
@@ -10238,7 +12493,42 @@
         <p:spPr>
           <a:xfrm>
             <a:off x="731520" y="621792"/>
-            <a:ext cx="10728655" cy="640080"/>
+            <a:ext cx="10728655" cy="594360"/>
+          </a:xfrm>
+          <a:prstGeom prst="rect">
+            <a:avLst/>
+          </a:prstGeom>
+          <a:noFill/>
+        </p:spPr>
+        <p:txBody>
+          <a:bodyPr wrap="square">
+            <a:spAutoFit/>
+          </a:bodyPr>
+          <a:lstStyle/>
+          <a:p>
+            <a:pPr>
+              <a:defRPr sz="2300" b="1">
+                <a:solidFill>
+                  <a:srgbClr val="FFFFFF"/>
+                </a:solidFill>
+              </a:defRPr>
+            </a:pPr>
+            <a:r>
+              <a:t>Infinite Scroll Feed Architecture (react-infinite-scroll)</a:t>
+            </a:r>
+          </a:p>
+        </p:txBody>
+      </p:sp>
+      <p:sp>
+        <p:nvSpPr>
+          <p:cNvPr id="6" name="TextBox 5"/>
+          <p:cNvSpPr txBox="1"/>
+          <p:nvPr/>
+        </p:nvSpPr>
+        <p:spPr>
+          <a:xfrm>
+            <a:off x="731520" y="6327648"/>
+            <a:ext cx="10728655" cy="274320"/>
           </a:xfrm>
           <a:prstGeom prst="rect">
             <a:avLst/>
@@ -10252,49 +12542,14 @@
           <a:lstStyle/>
           <a:p>
             <a:pPr>
-              <a:defRPr sz="2500" b="1">
-                <a:solidFill>
-                  <a:srgbClr val="FFFFFF"/>
+              <a:defRPr sz="1000">
+                <a:solidFill>
+                  <a:srgbClr val="8C94A5"/>
                 </a:solidFill>
               </a:defRPr>
             </a:pPr>
             <a:r>
-              <a:t>Creator Ecosystem &amp; Exact 2026 YouTube Metrics</a:t>
-            </a:r>
-          </a:p>
-        </p:txBody>
-      </p:sp>
-      <p:sp>
-        <p:nvSpPr>
-          <p:cNvPr id="6" name="TextBox 5"/>
-          <p:cNvSpPr txBox="1"/>
-          <p:nvPr/>
-        </p:nvSpPr>
-        <p:spPr>
-          <a:xfrm>
-            <a:off x="731520" y="6309360"/>
-            <a:ext cx="10728655" cy="320040"/>
-          </a:xfrm>
-          <a:prstGeom prst="rect">
-            <a:avLst/>
-          </a:prstGeom>
-          <a:noFill/>
-        </p:spPr>
-        <p:txBody>
-          <a:bodyPr wrap="none">
-            <a:spAutoFit/>
-          </a:bodyPr>
-          <a:lstStyle/>
-          <a:p>
-            <a:pPr>
-              <a:defRPr sz="1050">
-                <a:solidFill>
-                  <a:srgbClr val="828A9B"/>
-                </a:solidFill>
-              </a:defRPr>
-            </a:pPr>
-            <a:r>
-              <a:t>PheW TuBe: Video Streaming Platform (G15-PID-17)  |  Evaluation-II  |  Page 09</a:t>
+              <a:t>PheW TuBe: Video Streaming Platform (G15-PID-17)  |  Chitkara University FEE-II  |  Page 09</a:t>
             </a:r>
           </a:p>
         </p:txBody>
@@ -10308,7 +12563,7 @@
         <p:spPr>
           <a:xfrm>
             <a:off x="731520" y="1371600"/>
-            <a:ext cx="3383280" cy="3108960"/>
+            <a:ext cx="3383280" cy="4754880"/>
           </a:xfrm>
           <a:prstGeom prst="roundRect">
             <a:avLst/>
@@ -10316,7 +12571,7 @@
           <a:solidFill>
             <a:srgbClr val="161922"/>
           </a:solidFill>
-          <a:ln w="17780">
+          <a:ln w="16510">
             <a:solidFill>
               <a:srgbClr val="2E3445"/>
             </a:solidFill>
@@ -10352,8 +12607,8 @@
         </p:nvSpPr>
         <p:spPr>
           <a:xfrm>
-            <a:off x="932688" y="1536192"/>
-            <a:ext cx="2980944" cy="2779776"/>
+            <a:off x="914400" y="1517904"/>
+            <a:ext cx="3017520" cy="4462272"/>
           </a:xfrm>
           <a:prstGeom prst="rect">
             <a:avLst/>
@@ -10361,116 +12616,116 @@
           <a:noFill/>
         </p:spPr>
         <p:txBody>
-          <a:bodyPr wrap="square">
+          <a:bodyPr wrap="square" tIns="0" bIns="0" lIns="0" rIns="0">
             <a:spAutoFit/>
           </a:bodyPr>
           <a:lstStyle/>
           <a:p>
             <a:pPr>
               <a:spcAft>
-                <a:spcPts val="1000"/>
-              </a:spcAft>
-              <a:defRPr sz="1700" b="1">
-                <a:solidFill>
-                  <a:srgbClr val="FF0033"/>
+                <a:spcPts val="800"/>
+              </a:spcAft>
+              <a:defRPr sz="1550" b="1">
+                <a:solidFill>
+                  <a:srgbClr val="3EA6FF"/>
                 </a:solidFill>
               </a:defRPr>
             </a:pPr>
             <a:r>
-              <a:t>Entertainment &amp; Music</a:t>
-            </a:r>
-          </a:p>
-          <a:p>
-            <a:pPr>
-              <a:spcAft>
-                <a:spcPts val="800"/>
-              </a:spcAft>
-            </a:pPr>
-            <a:r>
-              <a:rPr b="1" sz="1500">
-                <a:solidFill>
-                  <a:srgbClr val="FF0033"/>
+              <a:t>Motivation &amp; Modern UX</a:t>
+            </a:r>
+          </a:p>
+          <a:p>
+            <a:pPr>
+              <a:spcAft>
+                <a:spcPts val="600"/>
+              </a:spcAft>
+            </a:pPr>
+            <a:r>
+              <a:rPr b="1" sz="1200">
+                <a:solidFill>
+                  <a:srgbClr val="3EA6FF"/>
                 </a:solidFill>
               </a:rPr>
               <a:t>• </a:t>
             </a:r>
             <a:r>
-              <a:rPr b="1" sz="1400">
-                <a:solidFill>
-                  <a:srgbClr val="FFFFFF"/>
-                </a:solidFill>
-              </a:rPr>
-              <a:t>MrBeast: </a:t>
-            </a:r>
-            <a:r>
-              <a:rPr sz="1400">
+              <a:rPr b="1" sz="1200">
+                <a:solidFill>
+                  <a:srgbClr val="FFFFFF"/>
+                </a:solidFill>
+              </a:rPr>
+              <a:t>Syllabus Alignment: </a:t>
+            </a:r>
+            <a:r>
+              <a:rPr sz="1200">
                 <a:solidFill>
                   <a:srgbClr val="CDD2DC"/>
                 </a:solidFill>
               </a:rPr>
-              <a:t>522M subscribers — World's #1 creator; features 7-Days Stranded challenges.</a:t>
-            </a:r>
-          </a:p>
-          <a:p>
-            <a:pPr>
-              <a:spcAft>
-                <a:spcPts val="800"/>
-              </a:spcAft>
-            </a:pPr>
-            <a:r>
-              <a:rPr b="1" sz="1500">
-                <a:solidFill>
-                  <a:srgbClr val="FF0033"/>
+              <a:t>Directly implements react-infinite-scroll-component taught in G15 ecom lectures.</a:t>
+            </a:r>
+          </a:p>
+          <a:p>
+            <a:pPr>
+              <a:spcAft>
+                <a:spcPts val="600"/>
+              </a:spcAft>
+            </a:pPr>
+            <a:r>
+              <a:rPr b="1" sz="1200">
+                <a:solidFill>
+                  <a:srgbClr val="3EA6FF"/>
                 </a:solidFill>
               </a:rPr>
               <a:t>• </a:t>
             </a:r>
             <a:r>
-              <a:rPr b="1" sz="1400">
-                <a:solidFill>
-                  <a:srgbClr val="FFFFFF"/>
-                </a:solidFill>
-              </a:rPr>
-              <a:t>T-Series: </a:t>
-            </a:r>
-            <a:r>
-              <a:rPr sz="1400">
+              <a:rPr b="1" sz="1200">
+                <a:solidFill>
+                  <a:srgbClr val="FFFFFF"/>
+                </a:solidFill>
+              </a:rPr>
+              <a:t>Eliminates Pagination: </a:t>
+            </a:r>
+            <a:r>
+              <a:rPr sz="1200">
                 <a:solidFill>
                   <a:srgbClr val="CDD2DC"/>
                 </a:solidFill>
               </a:rPr>
-              <a:t>316M subscribers — Leading Indian music label with viral movie soundtracks.</a:t>
-            </a:r>
-          </a:p>
-          <a:p>
-            <a:pPr>
-              <a:spcAft>
-                <a:spcPts val="800"/>
-              </a:spcAft>
-            </a:pPr>
-            <a:r>
-              <a:rPr b="1" sz="1500">
-                <a:solidFill>
-                  <a:srgbClr val="FF0033"/>
+              <a:t>Replaces clunky 'Page 1, 2, 3' pagination with continuous, frictionless content discovery.</a:t>
+            </a:r>
+          </a:p>
+          <a:p>
+            <a:pPr>
+              <a:spcAft>
+                <a:spcPts val="600"/>
+              </a:spcAft>
+            </a:pPr>
+            <a:r>
+              <a:rPr b="1" sz="1200">
+                <a:solidFill>
+                  <a:srgbClr val="3EA6FF"/>
                 </a:solidFill>
               </a:rPr>
               <a:t>• </a:t>
             </a:r>
             <a:r>
-              <a:rPr b="1" sz="1400">
-                <a:solidFill>
-                  <a:srgbClr val="FFFFFF"/>
-                </a:solidFill>
-              </a:rPr>
-              <a:t>Techno Gamerz: </a:t>
-            </a:r>
-            <a:r>
-              <a:rPr sz="1400">
+              <a:rPr b="1" sz="1200">
+                <a:solidFill>
+                  <a:srgbClr val="FFFFFF"/>
+                </a:solidFill>
+              </a:rPr>
+              <a:t>Memory Optimization: </a:t>
+            </a:r>
+            <a:r>
+              <a:rPr sz="1200">
                 <a:solidFill>
                   <a:srgbClr val="CDD2DC"/>
                 </a:solidFill>
               </a:rPr>
-              <a:t>53.4M subscribers — India's gaming icon; features GTA 5 and Minecraft series.</a:t>
+              <a:t>Slices dataset into progressive chunks, keeping initial DOM rendering lightweight.</a:t>
             </a:r>
           </a:p>
         </p:txBody>
@@ -10484,7 +12739,7 @@
         <p:spPr>
           <a:xfrm>
             <a:off x="4389120" y="1371600"/>
-            <a:ext cx="3383280" cy="3108960"/>
+            <a:ext cx="3383280" cy="4754880"/>
           </a:xfrm>
           <a:prstGeom prst="roundRect">
             <a:avLst/>
@@ -10492,7 +12747,7 @@
           <a:solidFill>
             <a:srgbClr val="161922"/>
           </a:solidFill>
-          <a:ln w="17780">
+          <a:ln w="16510">
             <a:solidFill>
               <a:srgbClr val="2E3445"/>
             </a:solidFill>
@@ -10528,8 +12783,8 @@
         </p:nvSpPr>
         <p:spPr>
           <a:xfrm>
-            <a:off x="4590288" y="1536192"/>
-            <a:ext cx="2980944" cy="2779776"/>
+            <a:off x="4572000" y="1517904"/>
+            <a:ext cx="3017520" cy="4462272"/>
           </a:xfrm>
           <a:prstGeom prst="rect">
             <a:avLst/>
@@ -10537,116 +12792,116 @@
           <a:noFill/>
         </p:spPr>
         <p:txBody>
-          <a:bodyPr wrap="square">
+          <a:bodyPr wrap="square" tIns="0" bIns="0" lIns="0" rIns="0">
             <a:spAutoFit/>
           </a:bodyPr>
           <a:lstStyle/>
           <a:p>
             <a:pPr>
               <a:spcAft>
-                <a:spcPts val="1000"/>
-              </a:spcAft>
-              <a:defRPr sz="1700" b="1">
-                <a:solidFill>
-                  <a:srgbClr val="3EA6FF"/>
+                <a:spcPts val="800"/>
+              </a:spcAft>
+              <a:defRPr sz="1550" b="1">
+                <a:solidFill>
+                  <a:srgbClr val="FF0033"/>
                 </a:solidFill>
               </a:defRPr>
             </a:pPr>
             <a:r>
-              <a:t>Comedy &amp; Specialized Gaming</a:t>
-            </a:r>
-          </a:p>
-          <a:p>
-            <a:pPr>
-              <a:spcAft>
-                <a:spcPts val="800"/>
-              </a:spcAft>
-            </a:pPr>
-            <a:r>
-              <a:rPr b="1" sz="1500">
-                <a:solidFill>
-                  <a:srgbClr val="3EA6FF"/>
+              <a:t>State &amp; Slicing Mechanics</a:t>
+            </a:r>
+          </a:p>
+          <a:p>
+            <a:pPr>
+              <a:spcAft>
+                <a:spcPts val="600"/>
+              </a:spcAft>
+            </a:pPr>
+            <a:r>
+              <a:rPr b="1" sz="1200">
+                <a:solidFill>
+                  <a:srgbClr val="FF0033"/>
                 </a:solidFill>
               </a:rPr>
               <a:t>• </a:t>
             </a:r>
             <a:r>
-              <a:rPr b="1" sz="1400">
-                <a:solidFill>
-                  <a:srgbClr val="FFFFFF"/>
-                </a:solidFill>
-              </a:rPr>
-              <a:t>Samay Raina: </a:t>
-            </a:r>
-            <a:r>
-              <a:rPr sz="1400">
+              <a:rPr b="1" sz="1200">
+                <a:solidFill>
+                  <a:srgbClr val="FFFFFF"/>
+                </a:solidFill>
+              </a:rPr>
+              <a:t>Batch Management: </a:t>
+            </a:r>
+            <a:r>
+              <a:rPr sz="1200">
                 <a:solidFill>
                   <a:srgbClr val="CDD2DC"/>
                 </a:solidFill>
               </a:rPr>
-              <a:t>7.65M subscribers — Standup comedy &amp; India's Got Latent episodes.</a:t>
-            </a:r>
-          </a:p>
-          <a:p>
-            <a:pPr>
-              <a:spcAft>
-                <a:spcPts val="800"/>
-              </a:spcAft>
-            </a:pPr>
-            <a:r>
-              <a:rPr b="1" sz="1500">
-                <a:solidFill>
-                  <a:srgbClr val="3EA6FF"/>
+              <a:t>Initial batch renders 8 videos; subsequent scrolls load 6 additional items progressively.</a:t>
+            </a:r>
+          </a:p>
+          <a:p>
+            <a:pPr>
+              <a:spcAft>
+                <a:spcPts val="600"/>
+              </a:spcAft>
+            </a:pPr>
+            <a:r>
+              <a:rPr b="1" sz="1200">
+                <a:solidFill>
+                  <a:srgbClr val="FF0033"/>
                 </a:solidFill>
               </a:rPr>
               <a:t>• </a:t>
             </a:r>
             <a:r>
-              <a:rPr b="1" sz="1400">
-                <a:solidFill>
-                  <a:srgbClr val="FFFFFF"/>
-                </a:solidFill>
-              </a:rPr>
-              <a:t>Wemmbu: </a:t>
-            </a:r>
-            <a:r>
-              <a:rPr sz="1400">
+              <a:rPr b="1" sz="1200">
+                <a:solidFill>
+                  <a:srgbClr val="FFFFFF"/>
+                </a:solidFill>
+              </a:rPr>
+              <a:t>hasMore Calculation: </a:t>
+            </a:r>
+            <a:r>
+              <a:rPr sz="1200">
                 <a:solidFill>
                   <a:srgbClr val="CDD2DC"/>
                 </a:solidFill>
               </a:rPr>
-              <a:t>3.45M subscribers — Hardcore Minecraft survival and trap build walkthroughs.</a:t>
-            </a:r>
-          </a:p>
-          <a:p>
-            <a:pPr>
-              <a:spcAft>
-                <a:spcPts val="800"/>
-              </a:spcAft>
-            </a:pPr>
-            <a:r>
-              <a:rPr b="1" sz="1500">
-                <a:solidFill>
-                  <a:srgbClr val="3EA6FF"/>
+              <a:t>Calculates displayedVideos.length &lt; filteredVideos.length dynamically.</a:t>
+            </a:r>
+          </a:p>
+          <a:p>
+            <a:pPr>
+              <a:spcAft>
+                <a:spcPts val="600"/>
+              </a:spcAft>
+            </a:pPr>
+            <a:r>
+              <a:rPr b="1" sz="1200">
+                <a:solidFill>
+                  <a:srgbClr val="FF0033"/>
                 </a:solidFill>
               </a:rPr>
               <a:t>• </a:t>
             </a:r>
             <a:r>
-              <a:rPr b="1" sz="1400">
-                <a:solidFill>
-                  <a:srgbClr val="FFFFFF"/>
-                </a:solidFill>
-              </a:rPr>
-              <a:t>Verified Community: </a:t>
-            </a:r>
-            <a:r>
-              <a:rPr sz="1400">
+              <a:rPr b="1" sz="1200">
+                <a:solidFill>
+                  <a:srgbClr val="FFFFFF"/>
+                </a:solidFill>
+              </a:rPr>
+              <a:t>Filter Reactivity: </a:t>
+            </a:r>
+            <a:r>
+              <a:rPr sz="1200">
                 <a:solidFill>
                   <a:srgbClr val="CDD2DC"/>
                 </a:solidFill>
               </a:rPr>
-              <a:t>8 Verified Channels spanning Coding, Comedy, Music, and Gaming.</a:t>
+              <a:t>Automatically resets scroll index back to 8 whenever a category chip or search query changes.</a:t>
             </a:r>
           </a:p>
         </p:txBody>
@@ -10660,7 +12915,7 @@
         <p:spPr>
           <a:xfrm>
             <a:off x="8046720" y="1371600"/>
-            <a:ext cx="3383280" cy="3108960"/>
+            <a:ext cx="3383280" cy="4754880"/>
           </a:xfrm>
           <a:prstGeom prst="roundRect">
             <a:avLst/>
@@ -10668,7 +12923,7 @@
           <a:solidFill>
             <a:srgbClr val="161922"/>
           </a:solidFill>
-          <a:ln w="17780">
+          <a:ln w="16510">
             <a:solidFill>
               <a:srgbClr val="2E3445"/>
             </a:solidFill>
@@ -10704,8 +12959,8 @@
         </p:nvSpPr>
         <p:spPr>
           <a:xfrm>
-            <a:off x="8247888" y="1536192"/>
-            <a:ext cx="2980944" cy="2779776"/>
+            <a:off x="8229600" y="1517904"/>
+            <a:ext cx="3017520" cy="4462272"/>
           </a:xfrm>
           <a:prstGeom prst="rect">
             <a:avLst/>
@@ -10713,33 +12968,33 @@
           <a:noFill/>
         </p:spPr>
         <p:txBody>
-          <a:bodyPr wrap="square">
+          <a:bodyPr wrap="square" tIns="0" bIns="0" lIns="0" rIns="0">
             <a:spAutoFit/>
           </a:bodyPr>
           <a:lstStyle/>
           <a:p>
             <a:pPr>
               <a:spcAft>
-                <a:spcPts val="1000"/>
-              </a:spcAft>
-              <a:defRPr sz="1700" b="1">
+                <a:spcPts val="800"/>
+              </a:spcAft>
+              <a:defRPr sz="1550" b="1">
                 <a:solidFill>
                   <a:srgbClr val="2BA640"/>
                 </a:solidFill>
               </a:defRPr>
             </a:pPr>
             <a:r>
-              <a:t>Developer Education</a:t>
-            </a:r>
-          </a:p>
-          <a:p>
-            <a:pPr>
-              <a:spcAft>
-                <a:spcPts val="800"/>
-              </a:spcAft>
-            </a:pPr>
-            <a:r>
-              <a:rPr b="1" sz="1500">
+              <a:t>Visual Feedback &amp; Indicators</a:t>
+            </a:r>
+          </a:p>
+          <a:p>
+            <a:pPr>
+              <a:spcAft>
+                <a:spcPts val="600"/>
+              </a:spcAft>
+            </a:pPr>
+            <a:r>
+              <a:rPr b="1" sz="1200">
                 <a:solidFill>
                   <a:srgbClr val="2BA640"/>
                 </a:solidFill>
@@ -10747,30 +13002,30 @@
               <a:t>• </a:t>
             </a:r>
             <a:r>
-              <a:rPr b="1" sz="1400">
-                <a:solidFill>
-                  <a:srgbClr val="FFFFFF"/>
-                </a:solidFill>
-              </a:rPr>
-              <a:t>freeCodeCamp.org: </a:t>
-            </a:r>
-            <a:r>
-              <a:rPr sz="1400">
+              <a:rPr b="1" sz="1200">
+                <a:solidFill>
+                  <a:srgbClr val="FFFFFF"/>
+                </a:solidFill>
+              </a:rPr>
+              <a:t>YouTube-Themed Spinner: </a:t>
+            </a:r>
+            <a:r>
+              <a:rPr sz="1200">
                 <a:solidFill>
                   <a:srgbClr val="CDD2DC"/>
                 </a:solidFill>
               </a:rPr>
-              <a:t>12.0M subscribers — Comprehensive 10-Hour DSA masterclass.</a:t>
-            </a:r>
-          </a:p>
-          <a:p>
-            <a:pPr>
-              <a:spcAft>
-                <a:spcPts val="800"/>
-              </a:spcAft>
-            </a:pPr>
-            <a:r>
-              <a:rPr b="1" sz="1500">
+              <a:t>Custom CSS circular loading indicator (.infinite-spinner) centered below feed.</a:t>
+            </a:r>
+          </a:p>
+          <a:p>
+            <a:pPr>
+              <a:spcAft>
+                <a:spcPts val="600"/>
+              </a:spcAft>
+            </a:pPr>
+            <a:r>
+              <a:rPr b="1" sz="1200">
                 <a:solidFill>
                   <a:srgbClr val="2BA640"/>
                 </a:solidFill>
@@ -10778,30 +13033,30 @@
               <a:t>• </a:t>
             </a:r>
             <a:r>
-              <a:rPr b="1" sz="1400">
-                <a:solidFill>
-                  <a:srgbClr val="FFFFFF"/>
-                </a:solidFill>
-              </a:rPr>
-              <a:t>Chai aur Code: </a:t>
-            </a:r>
-            <a:r>
-              <a:rPr sz="1400">
+              <a:rPr b="1" sz="1200">
+                <a:solidFill>
+                  <a:srgbClr val="FFFFFF"/>
+                </a:solidFill>
+              </a:rPr>
+              <a:t>End-of-Feed Confirmation: </a:t>
+            </a:r>
+            <a:r>
+              <a:rPr sz="1200">
                 <a:solidFill>
                   <a:srgbClr val="CDD2DC"/>
                 </a:solidFill>
               </a:rPr>
-              <a:t>645K subscribers — Hindi developer education and React 19 series.</a:t>
-            </a:r>
-          </a:p>
-          <a:p>
-            <a:pPr>
-              <a:spcAft>
-                <a:spcPts val="800"/>
-              </a:spcAft>
-            </a:pPr>
-            <a:r>
-              <a:rPr b="1" sz="1500">
+              <a:t>Displays polite checkmark notice ('All N videos loaded') once complete.</a:t>
+            </a:r>
+          </a:p>
+          <a:p>
+            <a:pPr>
+              <a:spcAft>
+                <a:spcPts val="600"/>
+              </a:spcAft>
+            </a:pPr>
+            <a:r>
+              <a:rPr b="1" sz="1200">
                 <a:solidFill>
                   <a:srgbClr val="2BA640"/>
                 </a:solidFill>
@@ -10809,301 +13064,20 @@
               <a:t>• </a:t>
             </a:r>
             <a:r>
-              <a:rPr b="1" sz="1400">
-                <a:solidFill>
-                  <a:srgbClr val="FFFFFF"/>
-                </a:solidFill>
-              </a:rPr>
-              <a:t>NeetCode / Striver: </a:t>
-            </a:r>
-            <a:r>
-              <a:rPr sz="1400">
+              <a:rPr b="1" sz="1200">
+                <a:solidFill>
+                  <a:srgbClr val="FFFFFF"/>
+                </a:solidFill>
+              </a:rPr>
+              <a:t>Zero Nested Overflow: </a:t>
+            </a:r>
+            <a:r>
+              <a:rPr sz="1200">
                 <a:solidFill>
                   <a:srgbClr val="CDD2DC"/>
                 </a:solidFill>
               </a:rPr>
-              <a:t>980K subscribers — Algorithms and placement interview prep.</a:t>
-            </a:r>
-          </a:p>
-        </p:txBody>
-      </p:sp>
-      <p:sp>
-        <p:nvSpPr>
-          <p:cNvPr id="13" name="Rounded Rectangle 12"/>
-          <p:cNvSpPr/>
-          <p:nvPr/>
-        </p:nvSpPr>
-        <p:spPr>
-          <a:xfrm>
-            <a:off x="731520" y="4663440"/>
-            <a:ext cx="10728655" cy="1371600"/>
-          </a:xfrm>
-          <a:prstGeom prst="roundRect">
-            <a:avLst/>
-          </a:prstGeom>
-          <a:solidFill>
-            <a:srgbClr val="161922"/>
-          </a:solidFill>
-          <a:ln w="15240">
-            <a:solidFill>
-              <a:srgbClr val="2E3445"/>
-            </a:solidFill>
-          </a:ln>
-        </p:spPr>
-        <p:style>
-          <a:lnRef idx="1">
-            <a:schemeClr val="accent1"/>
-          </a:lnRef>
-          <a:fillRef idx="3">
-            <a:schemeClr val="accent1"/>
-          </a:fillRef>
-          <a:effectRef idx="2">
-            <a:schemeClr val="accent1"/>
-          </a:effectRef>
-          <a:fontRef idx="minor">
-            <a:schemeClr val="lt1"/>
-          </a:fontRef>
-        </p:style>
-        <p:txBody>
-          <a:bodyPr rtlCol="0" anchor="ctr"/>
-          <a:lstStyle/>
-          <a:p>
-            <a:pPr algn="ctr"/>
-          </a:p>
-        </p:txBody>
-      </p:sp>
-      <p:pic>
-        <p:nvPicPr>
-          <p:cNvPr id="14" name="Picture 13" descr="mrbeast_logo.png"/>
-          <p:cNvPicPr>
-            <a:picLocks noChangeAspect="1"/>
-          </p:cNvPicPr>
-          <p:nvPr/>
-        </p:nvPicPr>
-        <p:blipFill>
-          <a:blip r:embed="rId2"/>
-          <a:stretch>
-            <a:fillRect/>
-          </a:stretch>
-        </p:blipFill>
-        <p:spPr>
-          <a:xfrm>
-            <a:off x="1188720" y="4800600"/>
-            <a:ext cx="797169" cy="777240"/>
-          </a:xfrm>
-          <a:prstGeom prst="rect">
-            <a:avLst/>
-          </a:prstGeom>
-        </p:spPr>
-      </p:pic>
-      <p:sp>
-        <p:nvSpPr>
-          <p:cNvPr id="15" name="TextBox 14"/>
-          <p:cNvSpPr txBox="1"/>
-          <p:nvPr/>
-        </p:nvSpPr>
-        <p:spPr>
-          <a:xfrm>
-            <a:off x="2057400" y="4892040"/>
-            <a:ext cx="1920240" cy="548640"/>
-          </a:xfrm>
-          <a:prstGeom prst="rect">
-            <a:avLst/>
-          </a:prstGeom>
-          <a:noFill/>
-        </p:spPr>
-        <p:txBody>
-          <a:bodyPr wrap="square">
-            <a:spAutoFit/>
-          </a:bodyPr>
-          <a:lstStyle/>
-          <a:p>
-            <a:pPr>
-              <a:defRPr sz="1200" b="1">
-                <a:solidFill>
-                  <a:srgbClr val="FFFFFF"/>
-                </a:solidFill>
-              </a:defRPr>
-            </a:pPr>
-            <a:r>
-              <a:t>MrBeast (522M)</a:t>
-            </a:r>
-          </a:p>
-        </p:txBody>
-      </p:sp>
-      <p:pic>
-        <p:nvPicPr>
-          <p:cNvPr id="16" name="Picture 15" descr="samay_raina.png"/>
-          <p:cNvPicPr>
-            <a:picLocks noChangeAspect="1"/>
-          </p:cNvPicPr>
-          <p:nvPr/>
-        </p:nvPicPr>
-        <p:blipFill>
-          <a:blip r:embed="rId3"/>
-          <a:stretch>
-            <a:fillRect/>
-          </a:stretch>
-        </p:blipFill>
-        <p:spPr>
-          <a:xfrm>
-            <a:off x="3931920" y="4800600"/>
-            <a:ext cx="777240" cy="777240"/>
-          </a:xfrm>
-          <a:prstGeom prst="rect">
-            <a:avLst/>
-          </a:prstGeom>
-        </p:spPr>
-      </p:pic>
-      <p:sp>
-        <p:nvSpPr>
-          <p:cNvPr id="17" name="TextBox 16"/>
-          <p:cNvSpPr txBox="1"/>
-          <p:nvPr/>
-        </p:nvSpPr>
-        <p:spPr>
-          <a:xfrm>
-            <a:off x="4800600" y="4892040"/>
-            <a:ext cx="1920240" cy="548640"/>
-          </a:xfrm>
-          <a:prstGeom prst="rect">
-            <a:avLst/>
-          </a:prstGeom>
-          <a:noFill/>
-        </p:spPr>
-        <p:txBody>
-          <a:bodyPr wrap="square">
-            <a:spAutoFit/>
-          </a:bodyPr>
-          <a:lstStyle/>
-          <a:p>
-            <a:pPr>
-              <a:defRPr sz="1200" b="1">
-                <a:solidFill>
-                  <a:srgbClr val="FFFFFF"/>
-                </a:solidFill>
-              </a:defRPr>
-            </a:pPr>
-            <a:r>
-              <a:t>Samay Raina (7.65M)</a:t>
-            </a:r>
-          </a:p>
-        </p:txBody>
-      </p:sp>
-      <p:pic>
-        <p:nvPicPr>
-          <p:cNvPr id="18" name="Picture 17" descr="techno_gamerz.png"/>
-          <p:cNvPicPr>
-            <a:picLocks noChangeAspect="1"/>
-          </p:cNvPicPr>
-          <p:nvPr/>
-        </p:nvPicPr>
-        <p:blipFill>
-          <a:blip r:embed="rId4"/>
-          <a:stretch>
-            <a:fillRect/>
-          </a:stretch>
-        </p:blipFill>
-        <p:spPr>
-          <a:xfrm>
-            <a:off x="6675120" y="4800600"/>
-            <a:ext cx="866518" cy="777240"/>
-          </a:xfrm>
-          <a:prstGeom prst="rect">
-            <a:avLst/>
-          </a:prstGeom>
-        </p:spPr>
-      </p:pic>
-      <p:sp>
-        <p:nvSpPr>
-          <p:cNvPr id="19" name="TextBox 18"/>
-          <p:cNvSpPr txBox="1"/>
-          <p:nvPr/>
-        </p:nvSpPr>
-        <p:spPr>
-          <a:xfrm>
-            <a:off x="7543800" y="4892040"/>
-            <a:ext cx="1920240" cy="548640"/>
-          </a:xfrm>
-          <a:prstGeom prst="rect">
-            <a:avLst/>
-          </a:prstGeom>
-          <a:noFill/>
-        </p:spPr>
-        <p:txBody>
-          <a:bodyPr wrap="square">
-            <a:spAutoFit/>
-          </a:bodyPr>
-          <a:lstStyle/>
-          <a:p>
-            <a:pPr>
-              <a:defRPr sz="1200" b="1">
-                <a:solidFill>
-                  <a:srgbClr val="FFFFFF"/>
-                </a:solidFill>
-              </a:defRPr>
-            </a:pPr>
-            <a:r>
-              <a:t>Techno Gamerz (53.4M)</a:t>
-            </a:r>
-          </a:p>
-        </p:txBody>
-      </p:sp>
-      <p:pic>
-        <p:nvPicPr>
-          <p:cNvPr id="20" name="Picture 19" descr="chaiaurcode_logo.png"/>
-          <p:cNvPicPr>
-            <a:picLocks noChangeAspect="1"/>
-          </p:cNvPicPr>
-          <p:nvPr/>
-        </p:nvPicPr>
-        <p:blipFill>
-          <a:blip r:embed="rId5"/>
-          <a:stretch>
-            <a:fillRect/>
-          </a:stretch>
-        </p:blipFill>
-        <p:spPr>
-          <a:xfrm>
-            <a:off x="9418320" y="4800600"/>
-            <a:ext cx="777240" cy="777240"/>
-          </a:xfrm>
-          <a:prstGeom prst="rect">
-            <a:avLst/>
-          </a:prstGeom>
-        </p:spPr>
-      </p:pic>
-      <p:sp>
-        <p:nvSpPr>
-          <p:cNvPr id="21" name="TextBox 20"/>
-          <p:cNvSpPr txBox="1"/>
-          <p:nvPr/>
-        </p:nvSpPr>
-        <p:spPr>
-          <a:xfrm>
-            <a:off x="10287000" y="4892040"/>
-            <a:ext cx="1920240" cy="548640"/>
-          </a:xfrm>
-          <a:prstGeom prst="rect">
-            <a:avLst/>
-          </a:prstGeom>
-          <a:noFill/>
-        </p:spPr>
-        <p:txBody>
-          <a:bodyPr wrap="square">
-            <a:spAutoFit/>
-          </a:bodyPr>
-          <a:lstStyle/>
-          <a:p>
-            <a:pPr>
-              <a:defRPr sz="1200" b="1">
-                <a:solidFill>
-                  <a:srgbClr val="FFFFFF"/>
-                </a:solidFill>
-              </a:defRPr>
-            </a:pPr>
-            <a:r>
-              <a:t>Chai aur Code (645K)</a:t>
+              <a:t>Configured with overflow: visible to integrate cleanly with main layout scroll.</a:t>
             </a:r>
           </a:p>
         </p:txBody>

--- a/G15-PID-17.pptx
+++ b/G15-PID-17.pptx
@@ -3195,7 +3195,7 @@
         <p:spPr>
           <a:xfrm>
             <a:off x="731520" y="1097280"/>
-            <a:ext cx="8686800" cy="1645920"/>
+            <a:ext cx="10728655" cy="1645920"/>
           </a:xfrm>
           <a:prstGeom prst="rect">
             <a:avLst/>
@@ -3251,33 +3251,9 @@
           </a:p>
         </p:txBody>
       </p:sp>
-      <p:pic>
-        <p:nvPicPr>
-          <p:cNvPr id="5" name="Picture 4" descr="chitkara_logo.png"/>
-          <p:cNvPicPr>
-            <a:picLocks noChangeAspect="1"/>
-          </p:cNvPicPr>
-          <p:nvPr/>
-        </p:nvPicPr>
-        <p:blipFill>
-          <a:blip r:embed="rId2"/>
-          <a:stretch>
-            <a:fillRect/>
-          </a:stretch>
-        </p:blipFill>
-        <p:spPr>
-          <a:xfrm>
-            <a:off x="9326880" y="1097280"/>
-            <a:ext cx="2103120" cy="393441"/>
-          </a:xfrm>
-          <a:prstGeom prst="rect">
-            <a:avLst/>
-          </a:prstGeom>
-        </p:spPr>
-      </p:pic>
-      <p:sp>
-        <p:nvSpPr>
-          <p:cNvPr id="6" name="Rounded Rectangle 5"/>
+      <p:sp>
+        <p:nvSpPr>
+          <p:cNvPr id="5" name="Rounded Rectangle 4"/>
           <p:cNvSpPr/>
           <p:nvPr/>
         </p:nvSpPr>
@@ -3322,7 +3298,7 @@
       </p:sp>
       <p:sp>
         <p:nvSpPr>
-          <p:cNvPr id="7" name="TextBox 6"/>
+          <p:cNvPr id="6" name="TextBox 5"/>
           <p:cNvSpPr txBox="1"/>
           <p:nvPr/>
         </p:nvSpPr>
@@ -3391,7 +3367,7 @@
       </p:sp>
       <p:sp>
         <p:nvSpPr>
-          <p:cNvPr id="8" name="TextBox 7"/>
+          <p:cNvPr id="7" name="TextBox 6"/>
           <p:cNvSpPr txBox="1"/>
           <p:nvPr/>
         </p:nvSpPr>

--- a/G15-PID-17.pptx
+++ b/G15-PID-17.pptx
@@ -17,7 +17,6 @@
     <p:sldId id="265" r:id="rId16"/>
     <p:sldId id="266" r:id="rId17"/>
     <p:sldId id="267" r:id="rId18"/>
-    <p:sldId id="268" r:id="rId19"/>
   </p:sldIdLst>
   <p:sldSz cx="12191695" cy="6858000" type="screen4x3"/>
   <p:notesSz cx="6858000" cy="9144000"/>
@@ -3635,7 +3634,7 @@
               </a:defRPr>
             </a:pPr>
             <a:r>
-              <a:t>Infinite Scroll Feed &amp; YouTube Data API v3 Engine</a:t>
+              <a:t>Multi-Device Responsive Design &amp; Modern UI/UX Layer</a:t>
             </a:r>
           </a:p>
         </p:txBody>
@@ -3753,7 +3752,7 @@
               </a:defRPr>
             </a:pPr>
             <a:r>
-              <a:t>Infinite Scroll Feed Pagination</a:t>
+              <a:t>Viewport Adaptations &amp; Layout Hierarchy</a:t>
             </a:r>
           </a:p>
           <a:p>
@@ -3768,7 +3767,7 @@
                   <a:srgbClr val="FFFFFF"/>
                 </a:solidFill>
               </a:rPr>
-              <a:t>• react-infinite-scroll-component: </a:t>
+              <a:t>• Desktop (1440px+): </a:t>
             </a:r>
             <a:r>
               <a:rPr sz="1150">
@@ -3776,7 +3775,7 @@
                   <a:srgbClr val="CDD2DC"/>
                 </a:solidFill>
               </a:rPr>
-              <a:t>Continuous feed pagination dynamically fetching video batches as user scrolls down.</a:t>
+              <a:t>Full widescreen layout with expanded 240px sidebar, 4-column video feed, and watch player with up-next rail.</a:t>
             </a:r>
           </a:p>
           <a:p>
@@ -3791,7 +3790,7 @@
                   <a:srgbClr val="FFFFFF"/>
                 </a:solidFill>
               </a:rPr>
-              <a:t>• Zero Churn Reconciliation: </a:t>
+              <a:t>• Tablet / iPad Mini (1024px &amp; 768px): </a:t>
             </a:r>
             <a:r>
               <a:rPr sz="1150">
@@ -3799,7 +3798,7 @@
                   <a:srgbClr val="CDD2DC"/>
                 </a:solidFill>
               </a:rPr>
-              <a:t>Slicing and appending next batches isolates new cards without re-rendering existing items.</a:t>
+              <a:t>Compact collapsed mini-rail sidebar with 2-3 column responsive video card grid.</a:t>
             </a:r>
           </a:p>
           <a:p>
@@ -3814,7 +3813,7 @@
                   <a:srgbClr val="FFFFFF"/>
                 </a:solidFill>
               </a:rPr>
-              <a:t>• Scroll Trigger Geometry: </a:t>
+              <a:t>• Mobile (375px - 480px): </a:t>
             </a:r>
             <a:r>
               <a:rPr sz="1150">
@@ -3822,7 +3821,7 @@
                   <a:srgbClr val="CDD2DC"/>
                 </a:solidFill>
               </a:rPr>
-              <a:t>Viewport intersection thresholds trigger data fetching before reaching bottom of page.</a:t>
+              <a:t>Single-column video stream with bottom drawer navigation and touch-optimized action targets.</a:t>
             </a:r>
           </a:p>
         </p:txBody>
@@ -3900,12 +3899,12 @@
               </a:spcAft>
               <a:defRPr sz="1350" b="1">
                 <a:solidFill>
-                  <a:srgbClr val="A855F7"/>
+                  <a:srgbClr val="2BA640"/>
                 </a:solidFill>
               </a:defRPr>
             </a:pPr>
             <a:r>
-              <a:t>YouTube Data API v3 Live Integration</a:t>
+              <a:t>Design Systems &amp; Visual Feedback</a:t>
             </a:r>
           </a:p>
           <a:p>
@@ -3920,7 +3919,7 @@
                   <a:srgbClr val="FFFFFF"/>
                 </a:solidFill>
               </a:rPr>
-              <a:t>• Google Cloud YouTube API v3: </a:t>
+              <a:t>• Tailwind Fluid Breakpoints: </a:t>
             </a:r>
             <a:r>
               <a:rPr sz="1150">
@@ -3928,7 +3927,7 @@
                   <a:srgbClr val="CDD2DC"/>
                 </a:solidFill>
               </a:rPr>
-              <a:t>Direct RESTful integration querying live YouTube video metadata, thumbnails, and views.</a:t>
+              <a:t>Standardized responsive classes (sm, md, lg, xl) ensuring zero horizontal scrollbars.</a:t>
             </a:r>
           </a:p>
           <a:p>
@@ -3943,7 +3942,7 @@
                   <a:srgbClr val="FFFFFF"/>
                 </a:solidFill>
               </a:rPr>
-              <a:t>• Live Key Manager: </a:t>
+              <a:t>• Glassmorphic Modals: </a:t>
             </a:r>
             <a:r>
               <a:rPr sz="1150">
@@ -3951,7 +3950,7 @@
                   <a:srgbClr val="CDD2DC"/>
                 </a:solidFill>
               </a:rPr>
-              <a:t>In-app settings switch allows entering custom Google Cloud API key to toggle live YouTube data.</a:t>
+              <a:t>High-z-index overlays with backdrop-filter: blur(8px) for Auth and Settings modals.</a:t>
             </a:r>
           </a:p>
           <a:p>
@@ -3966,7 +3965,7 @@
                   <a:srgbClr val="FFFFFF"/>
                 </a:solidFill>
               </a:rPr>
-              <a:t>• Resilient Offline Fallback: </a:t>
+              <a:t>• Micro-Interactions: </a:t>
             </a:r>
             <a:r>
               <a:rPr sz="1150">
@@ -3974,7 +3973,7 @@
                   <a:srgbClr val="CDD2DC"/>
                 </a:solidFill>
               </a:rPr>
-              <a:t>Gracefully falls back to high-fidelity curated mock dataset (youtubeData.js) on quota exhaustion.</a:t>
+              <a:t>Active scale animations, soundwave mic pulse, and hover elevations across all interactive cards.</a:t>
             </a:r>
           </a:p>
         </p:txBody>
@@ -4151,7 +4150,7 @@
               </a:defRPr>
             </a:pPr>
             <a:r>
-              <a:t>Multi-Device Responsive Design &amp; Modern UI/UX Layer</a:t>
+              <a:t>Summary, Live Demonstration &amp; Viva Voce Defense</a:t>
             </a:r>
           </a:p>
         </p:txBody>
@@ -4264,12 +4263,12 @@
               </a:spcAft>
               <a:defRPr sz="1350" b="1">
                 <a:solidFill>
-                  <a:srgbClr val="3EA6FF"/>
+                  <a:srgbClr val="FF0033"/>
                 </a:solidFill>
               </a:defRPr>
             </a:pPr>
             <a:r>
-              <a:t>Viewport Adaptations &amp; Layout Hierarchy</a:t>
+              <a:t>Viva Defense &amp; 1-Minute Pitch</a:t>
             </a:r>
           </a:p>
           <a:p>
@@ -4284,7 +4283,7 @@
                   <a:srgbClr val="FFFFFF"/>
                 </a:solidFill>
               </a:rPr>
-              <a:t>• Desktop (1440px+): </a:t>
+              <a:t>• Viva Title Justification: </a:t>
             </a:r>
             <a:r>
               <a:rPr sz="1150">
@@ -4292,7 +4291,7 @@
                   <a:srgbClr val="CDD2DC"/>
                 </a:solidFill>
               </a:rPr>
-              <a:t>Full widescreen layout with expanded 240px sidebar, 4-column video feed, and watch player with up-next rail.</a:t>
+              <a:t>PheW TuBe represents an ad-free, high-speed streaming platform with 100% in-app media rendering.</a:t>
             </a:r>
           </a:p>
           <a:p>
@@ -4307,7 +4306,7 @@
                   <a:srgbClr val="FFFFFF"/>
                 </a:solidFill>
               </a:rPr>
-              <a:t>• Tablet / iPad Mini (1024px &amp; 768px): </a:t>
+              <a:t>• Core Gap Solved: </a:t>
             </a:r>
             <a:r>
               <a:rPr sz="1150">
@@ -4315,7 +4314,7 @@
                   <a:srgbClr val="CDD2DC"/>
                 </a:solidFill>
               </a:rPr>
-              <a:t>Compact collapsed mini-rail sidebar with 2-3 column responsive video card grid.</a:t>
+              <a:t>Eliminates disruptive external site redirects, offers hands-free Web Speech API search, and provides full YouTube settings.</a:t>
             </a:r>
           </a:p>
           <a:p>
@@ -4330,7 +4329,7 @@
                   <a:srgbClr val="FFFFFF"/>
                 </a:solidFill>
               </a:rPr>
-              <a:t>• Mobile (375px - 480px): </a:t>
+              <a:t>• Target Users: </a:t>
             </a:r>
             <a:r>
               <a:rPr sz="1150">
@@ -4338,7 +4337,7 @@
                   <a:srgbClr val="CDD2DC"/>
                 </a:solidFill>
               </a:rPr>
-              <a:t>Single-column video stream with bottom drawer navigation and touch-optimized action targets.</a:t>
+              <a:t>Students, programmers, and tech enthusiasts requiring distraction-free educational video viewing.</a:t>
             </a:r>
           </a:p>
         </p:txBody>
@@ -4416,12 +4415,12 @@
               </a:spcAft>
               <a:defRPr sz="1350" b="1">
                 <a:solidFill>
-                  <a:srgbClr val="2BA640"/>
+                  <a:srgbClr val="3EA6FF"/>
                 </a:solidFill>
               </a:defRPr>
             </a:pPr>
             <a:r>
-              <a:t>Design Systems &amp; Visual Feedback</a:t>
+              <a:t>Technical Merit &amp; Demonstration Roadmap</a:t>
             </a:r>
           </a:p>
           <a:p>
@@ -4436,7 +4435,7 @@
                   <a:srgbClr val="FFFFFF"/>
                 </a:solidFill>
               </a:rPr>
-              <a:t>• Tailwind Fluid Breakpoints: </a:t>
+              <a:t>• Key Engineering Highlight: </a:t>
             </a:r>
             <a:r>
               <a:rPr sz="1150">
@@ -4444,7 +4443,7 @@
                   <a:srgbClr val="CDD2DC"/>
                 </a:solidFill>
               </a:rPr>
-              <a:t>Standardized responsive classes (sm, md, lg, xl) ensuring zero horizontal scrollbars.</a:t>
+              <a:t>React 18 component composition + Context API eliminating full-tree re-renders.</a:t>
             </a:r>
           </a:p>
           <a:p>
@@ -4459,7 +4458,7 @@
                   <a:srgbClr val="FFFFFF"/>
                 </a:solidFill>
               </a:rPr>
-              <a:t>• Glassmorphic Modals: </a:t>
+              <a:t>• Live Demonstration Flow: </a:t>
             </a:r>
             <a:r>
               <a:rPr sz="1150">
@@ -4467,7 +4466,7 @@
                   <a:srgbClr val="CDD2DC"/>
                 </a:solidFill>
               </a:rPr>
-              <a:t>High-z-index overlays with backdrop-filter: blur(8px) for Auth and Settings modals.</a:t>
+              <a:t>1) Home feed &amp; Infinite Scroll -&gt; 2) Voice Search &amp; Filter -&gt; 3) In-Site Watch Player &amp; Likes -&gt; 4) Protected Route Lock -&gt; 5) Settings Modal.</a:t>
             </a:r>
           </a:p>
           <a:p>
@@ -4482,7 +4481,7 @@
                   <a:srgbClr val="FFFFFF"/>
                 </a:solidFill>
               </a:rPr>
-              <a:t>• Micro-Interactions: </a:t>
+              <a:t>• Evaluation Status: </a:t>
             </a:r>
             <a:r>
               <a:rPr sz="1150">
@@ -4490,7 +4489,7 @@
                   <a:srgbClr val="CDD2DC"/>
                 </a:solidFill>
               </a:rPr>
-              <a:t>Active scale animations, soundwave mic pulse, and hover elevations across all interactive cards.</a:t>
+              <a:t>100% feature-complete, zero console errors, passing Vite production build in 1.16s.</a:t>
             </a:r>
           </a:p>
         </p:txBody>
@@ -4561,522 +4560,6 @@
       </p:sp>
       <p:sp>
         <p:nvSpPr>
-          <p:cNvPr id="3" name="Rectangle 2"/>
-          <p:cNvSpPr/>
-          <p:nvPr/>
-        </p:nvSpPr>
-        <p:spPr>
-          <a:xfrm>
-            <a:off x="731520" y="365760"/>
-            <a:ext cx="365760" cy="54864"/>
-          </a:xfrm>
-          <a:prstGeom prst="rect">
-            <a:avLst/>
-          </a:prstGeom>
-          <a:solidFill>
-            <a:srgbClr val="FF0033"/>
-          </a:solidFill>
-          <a:ln>
-            <a:noFill/>
-          </a:ln>
-        </p:spPr>
-        <p:style>
-          <a:lnRef idx="1">
-            <a:schemeClr val="accent1"/>
-          </a:lnRef>
-          <a:fillRef idx="3">
-            <a:schemeClr val="accent1"/>
-          </a:fillRef>
-          <a:effectRef idx="2">
-            <a:schemeClr val="accent1"/>
-          </a:effectRef>
-          <a:fontRef idx="minor">
-            <a:schemeClr val="lt1"/>
-          </a:fontRef>
-        </p:style>
-        <p:txBody>
-          <a:bodyPr rtlCol="0" anchor="ctr"/>
-          <a:lstStyle/>
-          <a:p>
-            <a:pPr algn="ctr"/>
-          </a:p>
-        </p:txBody>
-      </p:sp>
-      <p:sp>
-        <p:nvSpPr>
-          <p:cNvPr id="4" name="TextBox 3"/>
-          <p:cNvSpPr txBox="1"/>
-          <p:nvPr/>
-        </p:nvSpPr>
-        <p:spPr>
-          <a:xfrm>
-            <a:off x="1188720" y="292608"/>
-            <a:ext cx="10241280" cy="274320"/>
-          </a:xfrm>
-          <a:prstGeom prst="rect">
-            <a:avLst/>
-          </a:prstGeom>
-          <a:noFill/>
-        </p:spPr>
-        <p:txBody>
-          <a:bodyPr wrap="none">
-            <a:spAutoFit/>
-          </a:bodyPr>
-          <a:lstStyle/>
-          <a:p>
-            <a:pPr>
-              <a:defRPr sz="1150" b="1">
-                <a:solidFill>
-                  <a:srgbClr val="3EA6FF"/>
-                </a:solidFill>
-              </a:defRPr>
-            </a:pPr>
-            <a:r>
-              <a:t>GROUP G15  •  PROJECT ID: G15-PID-17 (P-17)  •  EVALUATION-II (PHASE 2)</a:t>
-            </a:r>
-          </a:p>
-        </p:txBody>
-      </p:sp>
-      <p:sp>
-        <p:nvSpPr>
-          <p:cNvPr id="5" name="TextBox 4"/>
-          <p:cNvSpPr txBox="1"/>
-          <p:nvPr/>
-        </p:nvSpPr>
-        <p:spPr>
-          <a:xfrm>
-            <a:off x="731520" y="621792"/>
-            <a:ext cx="10728655" cy="594360"/>
-          </a:xfrm>
-          <a:prstGeom prst="rect">
-            <a:avLst/>
-          </a:prstGeom>
-          <a:noFill/>
-        </p:spPr>
-        <p:txBody>
-          <a:bodyPr wrap="square">
-            <a:spAutoFit/>
-          </a:bodyPr>
-          <a:lstStyle/>
-          <a:p>
-            <a:pPr>
-              <a:defRPr sz="2300" b="1">
-                <a:solidFill>
-                  <a:srgbClr val="FFFFFF"/>
-                </a:solidFill>
-              </a:defRPr>
-            </a:pPr>
-            <a:r>
-              <a:t>Summary, Live Demonstration &amp; Viva Voce Defense</a:t>
-            </a:r>
-          </a:p>
-        </p:txBody>
-      </p:sp>
-      <p:sp>
-        <p:nvSpPr>
-          <p:cNvPr id="6" name="TextBox 5"/>
-          <p:cNvSpPr txBox="1"/>
-          <p:nvPr/>
-        </p:nvSpPr>
-        <p:spPr>
-          <a:xfrm>
-            <a:off x="731520" y="6327648"/>
-            <a:ext cx="10728655" cy="274320"/>
-          </a:xfrm>
-          <a:prstGeom prst="rect">
-            <a:avLst/>
-          </a:prstGeom>
-          <a:noFill/>
-        </p:spPr>
-        <p:txBody>
-          <a:bodyPr wrap="none">
-            <a:spAutoFit/>
-          </a:bodyPr>
-          <a:lstStyle/>
-          <a:p>
-            <a:pPr>
-              <a:defRPr sz="1000">
-                <a:solidFill>
-                  <a:srgbClr val="8C94A5"/>
-                </a:solidFill>
-              </a:defRPr>
-            </a:pPr>
-            <a:r>
-              <a:t>PheW TuBe: Video Streaming Platform (G15-PID-17)  |  Chitkara University FEE-II  |  Page 12</a:t>
-            </a:r>
-          </a:p>
-        </p:txBody>
-      </p:sp>
-      <p:sp>
-        <p:nvSpPr>
-          <p:cNvPr id="7" name="Rounded Rectangle 6"/>
-          <p:cNvSpPr/>
-          <p:nvPr/>
-        </p:nvSpPr>
-        <p:spPr>
-          <a:xfrm>
-            <a:off x="731520" y="1325880"/>
-            <a:ext cx="5212080" cy="4663440"/>
-          </a:xfrm>
-          <a:prstGeom prst="roundRect">
-            <a:avLst/>
-          </a:prstGeom>
-          <a:solidFill>
-            <a:srgbClr val="161922"/>
-          </a:solidFill>
-          <a:ln w="16510">
-            <a:solidFill>
-              <a:srgbClr val="2E3445"/>
-            </a:solidFill>
-          </a:ln>
-        </p:spPr>
-        <p:style>
-          <a:lnRef idx="1">
-            <a:schemeClr val="accent1"/>
-          </a:lnRef>
-          <a:fillRef idx="3">
-            <a:schemeClr val="accent1"/>
-          </a:fillRef>
-          <a:effectRef idx="2">
-            <a:schemeClr val="accent1"/>
-          </a:effectRef>
-          <a:fontRef idx="minor">
-            <a:schemeClr val="lt1"/>
-          </a:fontRef>
-        </p:style>
-        <p:txBody>
-          <a:bodyPr rtlCol="0" anchor="ctr"/>
-          <a:lstStyle/>
-          <a:p>
-            <a:pPr algn="ctr"/>
-          </a:p>
-        </p:txBody>
-      </p:sp>
-      <p:sp>
-        <p:nvSpPr>
-          <p:cNvPr id="8" name="TextBox 7"/>
-          <p:cNvSpPr txBox="1"/>
-          <p:nvPr/>
-        </p:nvSpPr>
-        <p:spPr>
-          <a:xfrm>
-            <a:off x="932688" y="1490472"/>
-            <a:ext cx="4809744" cy="4334255"/>
-          </a:xfrm>
-          <a:prstGeom prst="rect">
-            <a:avLst/>
-          </a:prstGeom>
-          <a:noFill/>
-        </p:spPr>
-        <p:txBody>
-          <a:bodyPr wrap="square" tIns="0" bIns="0" lIns="0" rIns="0">
-            <a:spAutoFit/>
-          </a:bodyPr>
-          <a:lstStyle/>
-          <a:p>
-            <a:pPr>
-              <a:spcAft>
-                <a:spcPts val="1000"/>
-              </a:spcAft>
-              <a:defRPr sz="1350" b="1">
-                <a:solidFill>
-                  <a:srgbClr val="FF0033"/>
-                </a:solidFill>
-              </a:defRPr>
-            </a:pPr>
-            <a:r>
-              <a:t>Viva Defense &amp; 1-Minute Pitch</a:t>
-            </a:r>
-          </a:p>
-          <a:p>
-            <a:pPr>
-              <a:spcAft>
-                <a:spcPts val="800"/>
-              </a:spcAft>
-            </a:pPr>
-            <a:r>
-              <a:rPr sz="1150" b="1">
-                <a:solidFill>
-                  <a:srgbClr val="FFFFFF"/>
-                </a:solidFill>
-              </a:rPr>
-              <a:t>• Viva Title Justification: </a:t>
-            </a:r>
-            <a:r>
-              <a:rPr sz="1150">
-                <a:solidFill>
-                  <a:srgbClr val="CDD2DC"/>
-                </a:solidFill>
-              </a:rPr>
-              <a:t>PheW TuBe represents an ad-free, high-speed streaming platform with 100% in-app media rendering.</a:t>
-            </a:r>
-          </a:p>
-          <a:p>
-            <a:pPr>
-              <a:spcAft>
-                <a:spcPts val="800"/>
-              </a:spcAft>
-            </a:pPr>
-            <a:r>
-              <a:rPr sz="1150" b="1">
-                <a:solidFill>
-                  <a:srgbClr val="FFFFFF"/>
-                </a:solidFill>
-              </a:rPr>
-              <a:t>• Core Gap Solved: </a:t>
-            </a:r>
-            <a:r>
-              <a:rPr sz="1150">
-                <a:solidFill>
-                  <a:srgbClr val="CDD2DC"/>
-                </a:solidFill>
-              </a:rPr>
-              <a:t>Eliminates disruptive external site redirects, offers hands-free Web Speech API search, and provides full YouTube settings.</a:t>
-            </a:r>
-          </a:p>
-          <a:p>
-            <a:pPr>
-              <a:spcAft>
-                <a:spcPts val="800"/>
-              </a:spcAft>
-            </a:pPr>
-            <a:r>
-              <a:rPr sz="1150" b="1">
-                <a:solidFill>
-                  <a:srgbClr val="FFFFFF"/>
-                </a:solidFill>
-              </a:rPr>
-              <a:t>• Target Users: </a:t>
-            </a:r>
-            <a:r>
-              <a:rPr sz="1150">
-                <a:solidFill>
-                  <a:srgbClr val="CDD2DC"/>
-                </a:solidFill>
-              </a:rPr>
-              <a:t>Students, programmers, and tech enthusiasts requiring distraction-free educational video viewing.</a:t>
-            </a:r>
-          </a:p>
-        </p:txBody>
-      </p:sp>
-      <p:sp>
-        <p:nvSpPr>
-          <p:cNvPr id="9" name="Rounded Rectangle 8"/>
-          <p:cNvSpPr/>
-          <p:nvPr/>
-        </p:nvSpPr>
-        <p:spPr>
-          <a:xfrm>
-            <a:off x="6248095" y="1325880"/>
-            <a:ext cx="5212080" cy="4663440"/>
-          </a:xfrm>
-          <a:prstGeom prst="roundRect">
-            <a:avLst/>
-          </a:prstGeom>
-          <a:solidFill>
-            <a:srgbClr val="161922"/>
-          </a:solidFill>
-          <a:ln w="16510">
-            <a:solidFill>
-              <a:srgbClr val="2E3445"/>
-            </a:solidFill>
-          </a:ln>
-        </p:spPr>
-        <p:style>
-          <a:lnRef idx="1">
-            <a:schemeClr val="accent1"/>
-          </a:lnRef>
-          <a:fillRef idx="3">
-            <a:schemeClr val="accent1"/>
-          </a:fillRef>
-          <a:effectRef idx="2">
-            <a:schemeClr val="accent1"/>
-          </a:effectRef>
-          <a:fontRef idx="minor">
-            <a:schemeClr val="lt1"/>
-          </a:fontRef>
-        </p:style>
-        <p:txBody>
-          <a:bodyPr rtlCol="0" anchor="ctr"/>
-          <a:lstStyle/>
-          <a:p>
-            <a:pPr algn="ctr"/>
-          </a:p>
-        </p:txBody>
-      </p:sp>
-      <p:sp>
-        <p:nvSpPr>
-          <p:cNvPr id="10" name="TextBox 9"/>
-          <p:cNvSpPr txBox="1"/>
-          <p:nvPr/>
-        </p:nvSpPr>
-        <p:spPr>
-          <a:xfrm>
-            <a:off x="6449263" y="1490472"/>
-            <a:ext cx="4809744" cy="4334255"/>
-          </a:xfrm>
-          <a:prstGeom prst="rect">
-            <a:avLst/>
-          </a:prstGeom>
-          <a:noFill/>
-        </p:spPr>
-        <p:txBody>
-          <a:bodyPr wrap="square" tIns="0" bIns="0" lIns="0" rIns="0">
-            <a:spAutoFit/>
-          </a:bodyPr>
-          <a:lstStyle/>
-          <a:p>
-            <a:pPr>
-              <a:spcAft>
-                <a:spcPts val="1000"/>
-              </a:spcAft>
-              <a:defRPr sz="1350" b="1">
-                <a:solidFill>
-                  <a:srgbClr val="3EA6FF"/>
-                </a:solidFill>
-              </a:defRPr>
-            </a:pPr>
-            <a:r>
-              <a:t>Technical Merit &amp; Demonstration Roadmap</a:t>
-            </a:r>
-          </a:p>
-          <a:p>
-            <a:pPr>
-              <a:spcAft>
-                <a:spcPts val="800"/>
-              </a:spcAft>
-            </a:pPr>
-            <a:r>
-              <a:rPr sz="1150" b="1">
-                <a:solidFill>
-                  <a:srgbClr val="FFFFFF"/>
-                </a:solidFill>
-              </a:rPr>
-              <a:t>• Key Engineering Highlight: </a:t>
-            </a:r>
-            <a:r>
-              <a:rPr sz="1150">
-                <a:solidFill>
-                  <a:srgbClr val="CDD2DC"/>
-                </a:solidFill>
-              </a:rPr>
-              <a:t>React 18 component composition + Context API eliminating full-tree re-renders.</a:t>
-            </a:r>
-          </a:p>
-          <a:p>
-            <a:pPr>
-              <a:spcAft>
-                <a:spcPts val="800"/>
-              </a:spcAft>
-            </a:pPr>
-            <a:r>
-              <a:rPr sz="1150" b="1">
-                <a:solidFill>
-                  <a:srgbClr val="FFFFFF"/>
-                </a:solidFill>
-              </a:rPr>
-              <a:t>• Live Demonstration Flow: </a:t>
-            </a:r>
-            <a:r>
-              <a:rPr sz="1150">
-                <a:solidFill>
-                  <a:srgbClr val="CDD2DC"/>
-                </a:solidFill>
-              </a:rPr>
-              <a:t>1) Home feed &amp; Infinite Scroll -&gt; 2) Voice Search &amp; Filter -&gt; 3) In-Site Watch Player &amp; Likes -&gt; 4) Protected Route Lock -&gt; 5) Settings Modal.</a:t>
-            </a:r>
-          </a:p>
-          <a:p>
-            <a:pPr>
-              <a:spcAft>
-                <a:spcPts val="800"/>
-              </a:spcAft>
-            </a:pPr>
-            <a:r>
-              <a:rPr sz="1150" b="1">
-                <a:solidFill>
-                  <a:srgbClr val="FFFFFF"/>
-                </a:solidFill>
-              </a:rPr>
-              <a:t>• Evaluation Status: </a:t>
-            </a:r>
-            <a:r>
-              <a:rPr sz="1150">
-                <a:solidFill>
-                  <a:srgbClr val="CDD2DC"/>
-                </a:solidFill>
-              </a:rPr>
-              <a:t>100% feature-complete, zero console errors, passing Vite production build in 1.16s.</a:t>
-            </a:r>
-          </a:p>
-        </p:txBody>
-      </p:sp>
-    </p:spTree>
-  </p:cSld>
-  <p:clrMapOvr>
-    <a:masterClrMapping/>
-  </p:clrMapOvr>
-  <p:transition spd="fast">
-    <p:push dir="l"/>
-  </p:transition>
-</p:sld>
-</file>
-
-<file path=ppt/slides/slide13.xml><?xml version="1.0" encoding="utf-8"?>
-<p:sld xmlns:a="http://schemas.openxmlformats.org/drawingml/2006/main" xmlns:p="http://schemas.openxmlformats.org/presentationml/2006/main" xmlns:r="http://schemas.openxmlformats.org/officeDocument/2006/relationships">
-  <p:cSld>
-    <p:spTree>
-      <p:nvGrpSpPr>
-        <p:cNvPr id="1" name=""/>
-        <p:cNvGrpSpPr/>
-        <p:nvPr/>
-      </p:nvGrpSpPr>
-      <p:grpSpPr/>
-      <p:sp>
-        <p:nvSpPr>
-          <p:cNvPr id="2" name="Rectangle 1"/>
-          <p:cNvSpPr/>
-          <p:nvPr/>
-        </p:nvSpPr>
-        <p:spPr>
-          <a:xfrm>
-            <a:off x="0" y="0"/>
-            <a:ext cx="12191695" cy="6858000"/>
-          </a:xfrm>
-          <a:prstGeom prst="rect">
-            <a:avLst/>
-          </a:prstGeom>
-          <a:solidFill>
-            <a:srgbClr val="0B0C10"/>
-          </a:solidFill>
-          <a:ln>
-            <a:noFill/>
-          </a:ln>
-        </p:spPr>
-        <p:style>
-          <a:lnRef idx="1">
-            <a:schemeClr val="accent1"/>
-          </a:lnRef>
-          <a:fillRef idx="3">
-            <a:schemeClr val="accent1"/>
-          </a:fillRef>
-          <a:effectRef idx="2">
-            <a:schemeClr val="accent1"/>
-          </a:effectRef>
-          <a:fontRef idx="minor">
-            <a:schemeClr val="lt1"/>
-          </a:fontRef>
-        </p:style>
-        <p:txBody>
-          <a:bodyPr rtlCol="0" anchor="ctr"/>
-          <a:lstStyle/>
-          <a:p>
-            <a:pPr algn="ctr"/>
-          </a:p>
-        </p:txBody>
-      </p:sp>
-      <p:sp>
-        <p:nvSpPr>
           <p:cNvPr id="3" name="Rounded Rectangle 2"/>
           <p:cNvSpPr/>
           <p:nvPr/>
@@ -5372,7 +4855,7 @@
               </a:defRPr>
             </a:pPr>
             <a:r>
-              <a:t>Table of Content</a:t>
+              <a:t>Evaluation-II Vision &amp; Milestone Objectives</a:t>
             </a:r>
           </a:p>
         </p:txBody>
@@ -5421,7 +4904,7 @@
         <p:spPr>
           <a:xfrm>
             <a:off x="731520" y="1325880"/>
-            <a:ext cx="5212080" cy="4663440"/>
+            <a:ext cx="3383280" cy="4663440"/>
           </a:xfrm>
           <a:prstGeom prst="roundRect">
             <a:avLst/>
@@ -5465,8 +4948,8 @@
         </p:nvSpPr>
         <p:spPr>
           <a:xfrm>
-            <a:off x="1005840" y="1554480"/>
-            <a:ext cx="4663440" cy="4206240"/>
+            <a:off x="932688" y="1490472"/>
+            <a:ext cx="2980944" cy="4334255"/>
           </a:xfrm>
           <a:prstGeom prst="rect">
             <a:avLst/>
@@ -5474,123 +4957,92 @@
           <a:noFill/>
         </p:spPr>
         <p:txBody>
-          <a:bodyPr wrap="square">
+          <a:bodyPr wrap="square" tIns="0" bIns="0" lIns="0" rIns="0">
             <a:spAutoFit/>
           </a:bodyPr>
           <a:lstStyle/>
           <a:p>
             <a:pPr>
               <a:spcAft>
-                <a:spcPts val="1600"/>
-              </a:spcAft>
-            </a:pPr>
-            <a:r>
-              <a:rPr sz="1300" b="1">
+                <a:spcPts val="1000"/>
+              </a:spcAft>
+              <a:defRPr sz="1350" b="1">
                 <a:solidFill>
                   <a:srgbClr val="FF0033"/>
                 </a:solidFill>
-              </a:rPr>
-              <a:t>01. </a:t>
-            </a:r>
-            <a:r>
-              <a:rPr sz="1200" b="1">
+              </a:defRPr>
+            </a:pPr>
+            <a:r>
+              <a:t>Phase 1 vs Phase 2 Focus</a:t>
+            </a:r>
+          </a:p>
+          <a:p>
+            <a:pPr>
+              <a:spcAft>
+                <a:spcPts val="800"/>
+              </a:spcAft>
+            </a:pPr>
+            <a:r>
+              <a:rPr sz="1150" b="1">
                 <a:solidFill>
                   <a:srgbClr val="FFFFFF"/>
                 </a:solidFill>
               </a:rPr>
-              <a:t>Evaluation-II Vision &amp; Milestone Objectives (Page 03)</a:t>
-            </a:r>
-          </a:p>
-          <a:p>
-            <a:pPr>
-              <a:spcAft>
-                <a:spcPts val="1600"/>
-              </a:spcAft>
-            </a:pPr>
-            <a:r>
-              <a:rPr sz="1300" b="1">
-                <a:solidFill>
-                  <a:srgbClr val="3EA6FF"/>
-                </a:solidFill>
-              </a:rPr>
-              <a:t>02. </a:t>
-            </a:r>
-            <a:r>
-              <a:rPr sz="1200" b="1">
+              <a:t>• Phase 1 Foundation: </a:t>
+            </a:r>
+            <a:r>
+              <a:rPr sz="1150">
+                <a:solidFill>
+                  <a:srgbClr val="CDD2DC"/>
+                </a:solidFill>
+              </a:rPr>
+              <a:t>Established responsive video card grids, category chips, and external links.</a:t>
+            </a:r>
+          </a:p>
+          <a:p>
+            <a:pPr>
+              <a:spcAft>
+                <a:spcPts val="800"/>
+              </a:spcAft>
+            </a:pPr>
+            <a:r>
+              <a:rPr sz="1150" b="1">
                 <a:solidFill>
                   <a:srgbClr val="FFFFFF"/>
                 </a:solidFill>
               </a:rPr>
-              <a:t>Syllabus-Aligned Technology Stack &amp; Architecture (Page 04)</a:t>
-            </a:r>
-          </a:p>
-          <a:p>
-            <a:pPr>
-              <a:spcAft>
-                <a:spcPts val="1600"/>
-              </a:spcAft>
-            </a:pPr>
-            <a:r>
-              <a:rPr sz="1300" b="1">
-                <a:solidFill>
-                  <a:srgbClr val="FF0033"/>
-                </a:solidFill>
-              </a:rPr>
-              <a:t>03. </a:t>
-            </a:r>
-            <a:r>
-              <a:rPr sz="1200" b="1">
+              <a:t>• Phase 2 Transition: </a:t>
+            </a:r>
+            <a:r>
+              <a:rPr sz="1150">
+                <a:solidFill>
+                  <a:srgbClr val="CDD2DC"/>
+                </a:solidFill>
+              </a:rPr>
+              <a:t>Elevated PheW TuBe into an authentic, stateful Single Page Application (SPA).</a:t>
+            </a:r>
+          </a:p>
+          <a:p>
+            <a:pPr>
+              <a:spcAft>
+                <a:spcPts val="800"/>
+              </a:spcAft>
+            </a:pPr>
+            <a:r>
+              <a:rPr sz="1150" b="1">
                 <a:solidFill>
                   <a:srgbClr val="FFFFFF"/>
                 </a:solidFill>
               </a:rPr>
-              <a:t>Core Component Architecture &amp; Modularity (Page 05)</a:t>
-            </a:r>
-          </a:p>
-          <a:p>
-            <a:pPr>
-              <a:spcAft>
-                <a:spcPts val="1600"/>
-              </a:spcAft>
-            </a:pPr>
-            <a:r>
-              <a:rPr sz="1300" b="1">
-                <a:solidFill>
-                  <a:srgbClr val="3EA6FF"/>
-                </a:solidFill>
-              </a:rPr>
-              <a:t>04. </a:t>
-            </a:r>
-            <a:r>
-              <a:rPr sz="1200" b="1">
-                <a:solidFill>
-                  <a:srgbClr val="FFFFFF"/>
-                </a:solidFill>
-              </a:rPr>
-              <a:t>In-Site Video Streaming Engine (No Redirecting) (Page 06)</a:t>
-            </a:r>
-          </a:p>
-          <a:p>
-            <a:pPr>
-              <a:spcAft>
-                <a:spcPts val="1600"/>
-              </a:spcAft>
-            </a:pPr>
-            <a:r>
-              <a:rPr sz="1300" b="1">
-                <a:solidFill>
-                  <a:srgbClr val="FF0033"/>
-                </a:solidFill>
-              </a:rPr>
-              <a:t>05. </a:t>
-            </a:r>
-            <a:r>
-              <a:rPr sz="1200" b="1">
-                <a:solidFill>
-                  <a:srgbClr val="FFFFFF"/>
-                </a:solidFill>
-              </a:rPr>
-              <a:t>Interactive Comments System with useRef &amp; Speech API (Page 07)</a:t>
+              <a:t>• Zero Page Reloads: </a:t>
+            </a:r>
+            <a:r>
+              <a:rPr sz="1150">
+                <a:solidFill>
+                  <a:srgbClr val="CDD2DC"/>
+                </a:solidFill>
+              </a:rPr>
+              <a:t>Client-side routing via React Router DOM ensures instant state reactivity without full flushes.</a:t>
             </a:r>
           </a:p>
         </p:txBody>
@@ -5603,8 +5055,8 @@
         </p:nvSpPr>
         <p:spPr>
           <a:xfrm>
-            <a:off x="6248095" y="1325880"/>
-            <a:ext cx="5212080" cy="4663440"/>
+            <a:off x="4403750" y="1325880"/>
+            <a:ext cx="3383280" cy="4663440"/>
           </a:xfrm>
           <a:prstGeom prst="roundRect">
             <a:avLst/>
@@ -5648,8 +5100,8 @@
         </p:nvSpPr>
         <p:spPr>
           <a:xfrm>
-            <a:off x="6522415" y="1554480"/>
-            <a:ext cx="4663440" cy="4206240"/>
+            <a:off x="4604918" y="1490472"/>
+            <a:ext cx="2980944" cy="4334255"/>
           </a:xfrm>
           <a:prstGeom prst="rect">
             <a:avLst/>
@@ -5657,123 +5109,244 @@
           <a:noFill/>
         </p:spPr>
         <p:txBody>
-          <a:bodyPr wrap="square">
+          <a:bodyPr wrap="square" tIns="0" bIns="0" lIns="0" rIns="0">
             <a:spAutoFit/>
           </a:bodyPr>
           <a:lstStyle/>
           <a:p>
             <a:pPr>
               <a:spcAft>
-                <a:spcPts val="1600"/>
-              </a:spcAft>
-            </a:pPr>
-            <a:r>
-              <a:rPr sz="1300" b="1">
-                <a:solidFill>
-                  <a:srgbClr val="FF0033"/>
-                </a:solidFill>
-              </a:rPr>
-              <a:t>06. </a:t>
-            </a:r>
-            <a:r>
-              <a:rPr sz="1200" b="1">
+                <a:spcPts val="1000"/>
+              </a:spcAft>
+              <a:defRPr sz="1350" b="1">
+                <a:solidFill>
+                  <a:srgbClr val="3EA6FF"/>
+                </a:solidFill>
+              </a:defRPr>
+            </a:pPr>
+            <a:r>
+              <a:t>Core Technical Objectives</a:t>
+            </a:r>
+          </a:p>
+          <a:p>
+            <a:pPr>
+              <a:spcAft>
+                <a:spcPts val="800"/>
+              </a:spcAft>
+            </a:pPr>
+            <a:r>
+              <a:rPr sz="1150" b="1">
                 <a:solidFill>
                   <a:srgbClr val="FFFFFF"/>
                 </a:solidFill>
               </a:rPr>
-              <a:t>Protected Routing &amp; Auth Guard Architecture (Page 08)</a:t>
-            </a:r>
-          </a:p>
-          <a:p>
-            <a:pPr>
-              <a:spcAft>
-                <a:spcPts val="1600"/>
-              </a:spcAft>
-            </a:pPr>
-            <a:r>
-              <a:rPr sz="1300" b="1">
-                <a:solidFill>
-                  <a:srgbClr val="3EA6FF"/>
-                </a:solidFill>
-              </a:rPr>
-              <a:t>07. </a:t>
-            </a:r>
-            <a:r>
-              <a:rPr sz="1200" b="1">
+              <a:t>• In-Site Streaming: </a:t>
+            </a:r>
+            <a:r>
+              <a:rPr sz="1150">
+                <a:solidFill>
+                  <a:srgbClr val="CDD2DC"/>
+                </a:solidFill>
+              </a:rPr>
+              <a:t>Deep link /watch/:id powered by useParams() with embedded 16:9 streaming.</a:t>
+            </a:r>
+          </a:p>
+          <a:p>
+            <a:pPr>
+              <a:spcAft>
+                <a:spcPts val="800"/>
+              </a:spcAft>
+            </a:pPr>
+            <a:r>
+              <a:rPr sz="1150" b="1">
                 <a:solidFill>
                   <a:srgbClr val="FFFFFF"/>
                 </a:solidFill>
               </a:rPr>
-              <a:t>Infinite Scroll Feed &amp; YouTube Data API v3 (Page 09)</a:t>
-            </a:r>
-          </a:p>
-          <a:p>
-            <a:pPr>
-              <a:spcAft>
-                <a:spcPts val="1600"/>
-              </a:spcAft>
-            </a:pPr>
-            <a:r>
-              <a:rPr sz="1300" b="1">
-                <a:solidFill>
-                  <a:srgbClr val="FF0033"/>
-                </a:solidFill>
-              </a:rPr>
-              <a:t>08. </a:t>
-            </a:r>
-            <a:r>
-              <a:rPr sz="1200" b="1">
+              <a:t>• DOM Control via useRef: </a:t>
+            </a:r>
+            <a:r>
+              <a:rPr sz="1150">
+                <a:solidFill>
+                  <a:srgbClr val="CDD2DC"/>
+                </a:solidFill>
+              </a:rPr>
+              <a:t>Direct focus on comment inputs and auto-scroll control without synthetic re-renders.</a:t>
+            </a:r>
+          </a:p>
+          <a:p>
+            <a:pPr>
+              <a:spcAft>
+                <a:spcPts val="800"/>
+              </a:spcAft>
+            </a:pPr>
+            <a:r>
+              <a:rPr sz="1150" b="1">
                 <a:solidFill>
                   <a:srgbClr val="FFFFFF"/>
                 </a:solidFill>
               </a:rPr>
-              <a:t>Real YouTube Settings Panel (Theme, Autoplay, HD) (Page 10)</a:t>
-            </a:r>
-          </a:p>
-          <a:p>
-            <a:pPr>
-              <a:spcAft>
-                <a:spcPts val="1600"/>
-              </a:spcAft>
-            </a:pPr>
-            <a:r>
-              <a:rPr sz="1300" b="1">
-                <a:solidFill>
-                  <a:srgbClr val="3EA6FF"/>
-                </a:solidFill>
-              </a:rPr>
-              <a:t>09. </a:t>
-            </a:r>
-            <a:r>
-              <a:rPr sz="1200" b="1">
+              <a:t>• Global Context API: </a:t>
+            </a:r>
+            <a:r>
+              <a:rPr sz="1150">
+                <a:solidFill>
+                  <a:srgbClr val="CDD2DC"/>
+                </a:solidFill>
+              </a:rPr>
+              <a:t>Centralized multi-state bus eliminating prop drilling across nested component trees.</a:t>
+            </a:r>
+          </a:p>
+        </p:txBody>
+      </p:sp>
+      <p:sp>
+        <p:nvSpPr>
+          <p:cNvPr id="11" name="Rounded Rectangle 10"/>
+          <p:cNvSpPr/>
+          <p:nvPr/>
+        </p:nvSpPr>
+        <p:spPr>
+          <a:xfrm>
+            <a:off x="8076895" y="1325880"/>
+            <a:ext cx="3383280" cy="4663440"/>
+          </a:xfrm>
+          <a:prstGeom prst="roundRect">
+            <a:avLst/>
+          </a:prstGeom>
+          <a:solidFill>
+            <a:srgbClr val="161922"/>
+          </a:solidFill>
+          <a:ln w="16510">
+            <a:solidFill>
+              <a:srgbClr val="2E3445"/>
+            </a:solidFill>
+          </a:ln>
+        </p:spPr>
+        <p:style>
+          <a:lnRef idx="1">
+            <a:schemeClr val="accent1"/>
+          </a:lnRef>
+          <a:fillRef idx="3">
+            <a:schemeClr val="accent1"/>
+          </a:fillRef>
+          <a:effectRef idx="2">
+            <a:schemeClr val="accent1"/>
+          </a:effectRef>
+          <a:fontRef idx="minor">
+            <a:schemeClr val="lt1"/>
+          </a:fontRef>
+        </p:style>
+        <p:txBody>
+          <a:bodyPr rtlCol="0" anchor="ctr"/>
+          <a:lstStyle/>
+          <a:p>
+            <a:pPr algn="ctr"/>
+          </a:p>
+        </p:txBody>
+      </p:sp>
+      <p:sp>
+        <p:nvSpPr>
+          <p:cNvPr id="12" name="TextBox 11"/>
+          <p:cNvSpPr txBox="1"/>
+          <p:nvPr/>
+        </p:nvSpPr>
+        <p:spPr>
+          <a:xfrm>
+            <a:off x="8278063" y="1490472"/>
+            <a:ext cx="2980944" cy="4334255"/>
+          </a:xfrm>
+          <a:prstGeom prst="rect">
+            <a:avLst/>
+          </a:prstGeom>
+          <a:noFill/>
+        </p:spPr>
+        <p:txBody>
+          <a:bodyPr wrap="square" tIns="0" bIns="0" lIns="0" rIns="0">
+            <a:spAutoFit/>
+          </a:bodyPr>
+          <a:lstStyle/>
+          <a:p>
+            <a:pPr>
+              <a:spcAft>
+                <a:spcPts val="1000"/>
+              </a:spcAft>
+              <a:defRPr sz="1350" b="1">
+                <a:solidFill>
+                  <a:srgbClr val="2BA640"/>
+                </a:solidFill>
+              </a:defRPr>
+            </a:pPr>
+            <a:r>
+              <a:t>User Experience &amp; Realism</a:t>
+            </a:r>
+          </a:p>
+          <a:p>
+            <a:pPr>
+              <a:spcAft>
+                <a:spcPts val="800"/>
+              </a:spcAft>
+            </a:pPr>
+            <a:r>
+              <a:rPr sz="1150" b="1">
                 <a:solidFill>
                   <a:srgbClr val="FFFFFF"/>
                 </a:solidFill>
               </a:rPr>
-              <a:t>Multi-Device Responsive Design &amp; Modern UI/UX (Page 11)</a:t>
-            </a:r>
-          </a:p>
-          <a:p>
-            <a:pPr>
-              <a:spcAft>
-                <a:spcPts val="1600"/>
-              </a:spcAft>
-            </a:pPr>
-            <a:r>
-              <a:rPr sz="1300" b="1">
-                <a:solidFill>
-                  <a:srgbClr val="FF0033"/>
-                </a:solidFill>
-              </a:rPr>
-              <a:t>10. </a:t>
-            </a:r>
-            <a:r>
-              <a:rPr sz="1200" b="1">
+              <a:t>• Up-Next Queue: </a:t>
+            </a:r>
+            <a:r>
+              <a:rPr sz="1150">
+                <a:solidFill>
+                  <a:srgbClr val="CDD2DC"/>
+                </a:solidFill>
+              </a:rPr>
+              <a:t>Dynamic video swapping via useNavigate() with synchronized channel metadata.</a:t>
+            </a:r>
+          </a:p>
+          <a:p>
+            <a:pPr>
+              <a:spcAft>
+                <a:spcPts val="800"/>
+              </a:spcAft>
+            </a:pPr>
+            <a:r>
+              <a:rPr sz="1150" b="1">
                 <a:solidFill>
                   <a:srgbClr val="FFFFFF"/>
                 </a:solidFill>
               </a:rPr>
-              <a:t>Summary, Live Demonstration &amp; Viva Readiness (Page 12)</a:t>
+              <a:t>• Working Action Controls: </a:t>
+            </a:r>
+            <a:r>
+              <a:rPr sz="1150">
+                <a:solidFill>
+                  <a:srgbClr val="CDD2DC"/>
+                </a:solidFill>
+              </a:rPr>
+              <a:t>Real Like increments, Share link copier, and Watch Later bookmarking.</a:t>
+            </a:r>
+          </a:p>
+          <a:p>
+            <a:pPr>
+              <a:spcAft>
+                <a:spcPts val="800"/>
+              </a:spcAft>
+            </a:pPr>
+            <a:r>
+              <a:rPr sz="1150" b="1">
+                <a:solidFill>
+                  <a:srgbClr val="FFFFFF"/>
+                </a:solidFill>
+              </a:rPr>
+              <a:t>• Responsive Parity: </a:t>
+            </a:r>
+            <a:r>
+              <a:rPr sz="1150">
+                <a:solidFill>
+                  <a:srgbClr val="CDD2DC"/>
+                </a:solidFill>
+              </a:rPr>
+              <a:t>Fluid scaling across 375px mobile, 768px/1024px tablet, and 1440px desktop screens.</a:t>
             </a:r>
           </a:p>
         </p:txBody>
@@ -5950,7 +5523,7 @@
               </a:defRPr>
             </a:pPr>
             <a:r>
-              <a:t>Evaluation-II Vision &amp; Milestone Objectives</a:t>
+              <a:t>Syllabus-Aligned Technology Stack &amp; Architecture</a:t>
             </a:r>
           </a:p>
         </p:txBody>
@@ -5999,7 +5572,7 @@
         <p:spPr>
           <a:xfrm>
             <a:off x="731520" y="1325880"/>
-            <a:ext cx="3383280" cy="4663440"/>
+            <a:ext cx="3429000" cy="2240280"/>
           </a:xfrm>
           <a:prstGeom prst="roundRect">
             <a:avLst/>
@@ -6044,7 +5617,7 @@
         <p:spPr>
           <a:xfrm>
             <a:off x="932688" y="1490472"/>
-            <a:ext cx="2980944" cy="4334255"/>
+            <a:ext cx="3026664" cy="1911096"/>
           </a:xfrm>
           <a:prstGeom prst="rect">
             <a:avLst/>
@@ -6061,14 +5634,14 @@
               <a:spcAft>
                 <a:spcPts val="1000"/>
               </a:spcAft>
-              <a:defRPr sz="1350" b="1">
-                <a:solidFill>
-                  <a:srgbClr val="FF0033"/>
+              <a:defRPr sz="1250" b="1">
+                <a:solidFill>
+                  <a:srgbClr val="3EA6FF"/>
                 </a:solidFill>
               </a:defRPr>
             </a:pPr>
             <a:r>
-              <a:t>Phase 1 vs Phase 2 Focus</a:t>
+              <a:t>React 18 (Core SPA Engine)</a:t>
             </a:r>
           </a:p>
           <a:p>
@@ -6078,66 +5651,65 @@
               </a:spcAft>
             </a:pPr>
             <a:r>
-              <a:rPr sz="1150" b="1">
+              <a:rPr sz="1050">
+                <a:solidFill>
+                  <a:srgbClr val="CDD2DC"/>
+                </a:solidFill>
+              </a:rPr>
+              <a:t>• Declarative UI components.</a:t>
+            </a:r>
+          </a:p>
+          <a:p>
+            <a:pPr>
+              <a:spcAft>
+                <a:spcPts val="800"/>
+              </a:spcAft>
+            </a:pPr>
+            <a:r>
+              <a:rPr sz="1050">
+                <a:solidFill>
+                  <a:srgbClr val="CDD2DC"/>
+                </a:solidFill>
+              </a:rPr>
+              <a:t>• Virtual DOM fiber reconciliation.</a:t>
+            </a:r>
+          </a:p>
+          <a:p>
+            <a:pPr>
+              <a:spcAft>
+                <a:spcPts val="800"/>
+              </a:spcAft>
+            </a:pPr>
+            <a:r>
+              <a:rPr sz="1050">
+                <a:solidFill>
+                  <a:srgbClr val="CDD2DC"/>
+                </a:solidFill>
+              </a:rPr>
+              <a:t>• Concurrent state batching.</a:t>
+            </a:r>
+          </a:p>
+          <a:p>
+            <a:pPr>
+              <a:spcAft>
+                <a:spcPts val="800"/>
+              </a:spcAft>
+            </a:pPr>
+            <a:r>
+              <a:rPr sz="1050" b="1">
                 <a:solidFill>
                   <a:srgbClr val="FFFFFF"/>
                 </a:solidFill>
               </a:rPr>
-              <a:t>• Phase 1 Foundation: </a:t>
-            </a:r>
-            <a:r>
-              <a:rPr sz="1150">
+              <a:t>• Hooks: </a:t>
+            </a:r>
+            <a:r>
+              <a:rPr sz="1050">
                 <a:solidFill>
                   <a:srgbClr val="CDD2DC"/>
                 </a:solidFill>
               </a:rPr>
-              <a:t>Established responsive video card grids, category chips, and external links.</a:t>
-            </a:r>
-          </a:p>
-          <a:p>
-            <a:pPr>
-              <a:spcAft>
-                <a:spcPts val="800"/>
-              </a:spcAft>
-            </a:pPr>
-            <a:r>
-              <a:rPr sz="1150" b="1">
-                <a:solidFill>
-                  <a:srgbClr val="FFFFFF"/>
-                </a:solidFill>
-              </a:rPr>
-              <a:t>• Phase 2 Transition: </a:t>
-            </a:r>
-            <a:r>
-              <a:rPr sz="1150">
-                <a:solidFill>
-                  <a:srgbClr val="CDD2DC"/>
-                </a:solidFill>
-              </a:rPr>
-              <a:t>Elevated PheW TuBe into an authentic, stateful Single Page Application (SPA).</a:t>
-            </a:r>
-          </a:p>
-          <a:p>
-            <a:pPr>
-              <a:spcAft>
-                <a:spcPts val="800"/>
-              </a:spcAft>
-            </a:pPr>
-            <a:r>
-              <a:rPr sz="1150" b="1">
-                <a:solidFill>
-                  <a:srgbClr val="FFFFFF"/>
-                </a:solidFill>
-              </a:rPr>
-              <a:t>• Zero Page Reloads: </a:t>
-            </a:r>
-            <a:r>
-              <a:rPr sz="1150">
-                <a:solidFill>
-                  <a:srgbClr val="CDD2DC"/>
-                </a:solidFill>
-              </a:rPr>
-              <a:t>Client-side routing via React Router DOM ensures instant state reactivity without full flushes.</a:t>
+              <a:t>useState, useEffect, useRef.</a:t>
             </a:r>
           </a:p>
         </p:txBody>
@@ -6150,8 +5722,8 @@
         </p:nvSpPr>
         <p:spPr>
           <a:xfrm>
-            <a:off x="4403750" y="1325880"/>
-            <a:ext cx="3383280" cy="4663440"/>
+            <a:off x="4370832" y="1325880"/>
+            <a:ext cx="3429000" cy="2240280"/>
           </a:xfrm>
           <a:prstGeom prst="roundRect">
             <a:avLst/>
@@ -6195,8 +5767,8 @@
         </p:nvSpPr>
         <p:spPr>
           <a:xfrm>
-            <a:off x="4604918" y="1490472"/>
-            <a:ext cx="2980944" cy="4334255"/>
+            <a:off x="4572000" y="1490472"/>
+            <a:ext cx="3026664" cy="1911096"/>
           </a:xfrm>
           <a:prstGeom prst="rect">
             <a:avLst/>
@@ -6213,14 +5785,14 @@
               <a:spcAft>
                 <a:spcPts val="1000"/>
               </a:spcAft>
-              <a:defRPr sz="1350" b="1">
-                <a:solidFill>
-                  <a:srgbClr val="3EA6FF"/>
+              <a:defRPr sz="1250" b="1">
+                <a:solidFill>
+                  <a:srgbClr val="FF0033"/>
                 </a:solidFill>
               </a:defRPr>
             </a:pPr>
             <a:r>
-              <a:t>Core Technical Objectives</a:t>
+              <a:t>React Router v6</a:t>
             </a:r>
           </a:p>
           <a:p>
@@ -6230,20 +5802,12 @@
               </a:spcAft>
             </a:pPr>
             <a:r>
-              <a:rPr sz="1150" b="1">
-                <a:solidFill>
-                  <a:srgbClr val="FFFFFF"/>
-                </a:solidFill>
-              </a:rPr>
-              <a:t>• In-Site Streaming: </a:t>
-            </a:r>
-            <a:r>
-              <a:rPr sz="1150">
+              <a:rPr sz="1050">
                 <a:solidFill>
                   <a:srgbClr val="CDD2DC"/>
                 </a:solidFill>
               </a:rPr>
-              <a:t>Deep link /watch/:id powered by useParams() with embedded 16:9 streaming.</a:t>
+              <a:t>• Client-side routing engine.</a:t>
             </a:r>
           </a:p>
           <a:p>
@@ -6253,20 +5817,12 @@
               </a:spcAft>
             </a:pPr>
             <a:r>
-              <a:rPr sz="1150" b="1">
-                <a:solidFill>
-                  <a:srgbClr val="FFFFFF"/>
-                </a:solidFill>
-              </a:rPr>
-              <a:t>• DOM Control via useRef: </a:t>
-            </a:r>
-            <a:r>
-              <a:rPr sz="1150">
+              <a:rPr sz="1050">
                 <a:solidFill>
                   <a:srgbClr val="CDD2DC"/>
                 </a:solidFill>
               </a:rPr>
-              <a:t>Direct focus on comment inputs and auto-scroll control without synthetic re-renders.</a:t>
+              <a:t>• Dynamic URL parameters (/watch/:id).</a:t>
             </a:r>
           </a:p>
           <a:p>
@@ -6276,20 +5832,27 @@
               </a:spcAft>
             </a:pPr>
             <a:r>
-              <a:rPr sz="1150" b="1">
-                <a:solidFill>
-                  <a:srgbClr val="FFFFFF"/>
-                </a:solidFill>
-              </a:rPr>
-              <a:t>• Global Context API: </a:t>
-            </a:r>
-            <a:r>
-              <a:rPr sz="1150">
+              <a:rPr sz="1050">
                 <a:solidFill>
                   <a:srgbClr val="CDD2DC"/>
                 </a:solidFill>
               </a:rPr>
-              <a:t>Centralized multi-state bus eliminating prop drilling across nested component trees.</a:t>
+              <a:t>• Declarative &lt;ProtectedRoute /&gt; security.</a:t>
+            </a:r>
+          </a:p>
+          <a:p>
+            <a:pPr>
+              <a:spcAft>
+                <a:spcPts val="800"/>
+              </a:spcAft>
+            </a:pPr>
+            <a:r>
+              <a:rPr sz="1050">
+                <a:solidFill>
+                  <a:srgbClr val="CDD2DC"/>
+                </a:solidFill>
+              </a:rPr>
+              <a:t>• Seamless useNavigate() transitions.</a:t>
             </a:r>
           </a:p>
         </p:txBody>
@@ -6302,8 +5865,8 @@
         </p:nvSpPr>
         <p:spPr>
           <a:xfrm>
-            <a:off x="8076895" y="1325880"/>
-            <a:ext cx="3383280" cy="4663440"/>
+            <a:off x="8010144" y="1325880"/>
+            <a:ext cx="3429000" cy="2240280"/>
           </a:xfrm>
           <a:prstGeom prst="roundRect">
             <a:avLst/>
@@ -6347,8 +5910,8 @@
         </p:nvSpPr>
         <p:spPr>
           <a:xfrm>
-            <a:off x="8278063" y="1490472"/>
-            <a:ext cx="2980944" cy="4334255"/>
+            <a:off x="8211312" y="1490472"/>
+            <a:ext cx="3026664" cy="1911096"/>
           </a:xfrm>
           <a:prstGeom prst="rect">
             <a:avLst/>
@@ -6365,14 +5928,157 @@
               <a:spcAft>
                 <a:spcPts val="1000"/>
               </a:spcAft>
-              <a:defRPr sz="1350" b="1">
+              <a:defRPr sz="1250" b="1">
+                <a:solidFill>
+                  <a:srgbClr val="3EA6FF"/>
+                </a:solidFill>
+              </a:defRPr>
+            </a:pPr>
+            <a:r>
+              <a:t>Tailwind CSS 3</a:t>
+            </a:r>
+          </a:p>
+          <a:p>
+            <a:pPr>
+              <a:spcAft>
+                <a:spcPts val="800"/>
+              </a:spcAft>
+            </a:pPr>
+            <a:r>
+              <a:rPr sz="1050">
+                <a:solidFill>
+                  <a:srgbClr val="CDD2DC"/>
+                </a:solidFill>
+              </a:rPr>
+              <a:t>• Utility-first responsive framework.</a:t>
+            </a:r>
+          </a:p>
+          <a:p>
+            <a:pPr>
+              <a:spcAft>
+                <a:spcPts val="800"/>
+              </a:spcAft>
+            </a:pPr>
+            <a:r>
+              <a:rPr sz="1050">
+                <a:solidFill>
+                  <a:srgbClr val="CDD2DC"/>
+                </a:solidFill>
+              </a:rPr>
+              <a:t>• Dark/Light theme CSS variables.</a:t>
+            </a:r>
+          </a:p>
+          <a:p>
+            <a:pPr>
+              <a:spcAft>
+                <a:spcPts val="800"/>
+              </a:spcAft>
+            </a:pPr>
+            <a:r>
+              <a:rPr sz="1050">
+                <a:solidFill>
+                  <a:srgbClr val="CDD2DC"/>
+                </a:solidFill>
+              </a:rPr>
+              <a:t>• Custom micro-interactions &amp; pulse.</a:t>
+            </a:r>
+          </a:p>
+          <a:p>
+            <a:pPr>
+              <a:spcAft>
+                <a:spcPts val="800"/>
+              </a:spcAft>
+            </a:pPr>
+            <a:r>
+              <a:rPr sz="1050">
+                <a:solidFill>
+                  <a:srgbClr val="CDD2DC"/>
+                </a:solidFill>
+              </a:rPr>
+              <a:t>• Strict YouTube aesthetics alignment.</a:t>
+            </a:r>
+          </a:p>
+        </p:txBody>
+      </p:sp>
+      <p:sp>
+        <p:nvSpPr>
+          <p:cNvPr id="13" name="Rounded Rectangle 12"/>
+          <p:cNvSpPr/>
+          <p:nvPr/>
+        </p:nvSpPr>
+        <p:spPr>
+          <a:xfrm>
+            <a:off x="731520" y="3749039"/>
+            <a:ext cx="3429000" cy="2240280"/>
+          </a:xfrm>
+          <a:prstGeom prst="roundRect">
+            <a:avLst/>
+          </a:prstGeom>
+          <a:solidFill>
+            <a:srgbClr val="161922"/>
+          </a:solidFill>
+          <a:ln w="16510">
+            <a:solidFill>
+              <a:srgbClr val="2E3445"/>
+            </a:solidFill>
+          </a:ln>
+        </p:spPr>
+        <p:style>
+          <a:lnRef idx="1">
+            <a:schemeClr val="accent1"/>
+          </a:lnRef>
+          <a:fillRef idx="3">
+            <a:schemeClr val="accent1"/>
+          </a:fillRef>
+          <a:effectRef idx="2">
+            <a:schemeClr val="accent1"/>
+          </a:effectRef>
+          <a:fontRef idx="minor">
+            <a:schemeClr val="lt1"/>
+          </a:fontRef>
+        </p:style>
+        <p:txBody>
+          <a:bodyPr rtlCol="0" anchor="ctr"/>
+          <a:lstStyle/>
+          <a:p>
+            <a:pPr algn="ctr"/>
+          </a:p>
+        </p:txBody>
+      </p:sp>
+      <p:sp>
+        <p:nvSpPr>
+          <p:cNvPr id="14" name="TextBox 13"/>
+          <p:cNvSpPr txBox="1"/>
+          <p:nvPr/>
+        </p:nvSpPr>
+        <p:spPr>
+          <a:xfrm>
+            <a:off x="932688" y="3913631"/>
+            <a:ext cx="3026664" cy="1911096"/>
+          </a:xfrm>
+          <a:prstGeom prst="rect">
+            <a:avLst/>
+          </a:prstGeom>
+          <a:noFill/>
+        </p:spPr>
+        <p:txBody>
+          <a:bodyPr wrap="square" tIns="0" bIns="0" lIns="0" rIns="0">
+            <a:spAutoFit/>
+          </a:bodyPr>
+          <a:lstStyle/>
+          <a:p>
+            <a:pPr>
+              <a:spcAft>
+                <a:spcPts val="1000"/>
+              </a:spcAft>
+              <a:defRPr sz="1250" b="1">
                 <a:solidFill>
                   <a:srgbClr val="2BA640"/>
                 </a:solidFill>
               </a:defRPr>
             </a:pPr>
             <a:r>
-              <a:t>User Experience &amp; Realism</a:t>
+              <a:t>Context API &amp; LocalStorage</a:t>
             </a:r>
           </a:p>
           <a:p>
@@ -6382,20 +6088,12 @@
               </a:spcAft>
             </a:pPr>
             <a:r>
-              <a:rPr sz="1150" b="1">
-                <a:solidFill>
-                  <a:srgbClr val="FFFFFF"/>
-                </a:solidFill>
-              </a:rPr>
-              <a:t>• Up-Next Queue: </a:t>
-            </a:r>
-            <a:r>
-              <a:rPr sz="1150">
+              <a:rPr sz="1050">
                 <a:solidFill>
                   <a:srgbClr val="CDD2DC"/>
                 </a:solidFill>
               </a:rPr>
-              <a:t>Dynamic video swapping via useNavigate() with synchronized channel metadata.</a:t>
+              <a:t>• Centralized global AppContext bus.</a:t>
             </a:r>
           </a:p>
           <a:p>
@@ -6405,20 +6103,12 @@
               </a:spcAft>
             </a:pPr>
             <a:r>
-              <a:rPr sz="1150" b="1">
-                <a:solidFill>
-                  <a:srgbClr val="FFFFFF"/>
-                </a:solidFill>
-              </a:rPr>
-              <a:t>• Working Action Controls: </a:t>
-            </a:r>
-            <a:r>
-              <a:rPr sz="1150">
+              <a:rPr sz="1050">
                 <a:solidFill>
                   <a:srgbClr val="CDD2DC"/>
                 </a:solidFill>
               </a:rPr>
-              <a:t>Real Like increments, Share link copier, and Watch Later bookmarking.</a:t>
+              <a:t>• Syncs Likes, Playlists, &amp; Watch Later.</a:t>
             </a:r>
           </a:p>
           <a:p>
@@ -6428,20 +6118,313 @@
               </a:spcAft>
             </a:pPr>
             <a:r>
-              <a:rPr sz="1150" b="1">
-                <a:solidFill>
-                  <a:srgbClr val="FFFFFF"/>
-                </a:solidFill>
-              </a:rPr>
-              <a:t>• Responsive Parity: </a:t>
-            </a:r>
-            <a:r>
-              <a:rPr sz="1150">
+              <a:rPr sz="1050">
                 <a:solidFill>
                   <a:srgbClr val="CDD2DC"/>
                 </a:solidFill>
               </a:rPr>
-              <a:t>Fluid scaling across 375px mobile, 768px/1024px tablet, and 1440px desktop screens.</a:t>
+              <a:t>• Persistent auth token storage.</a:t>
+            </a:r>
+          </a:p>
+          <a:p>
+            <a:pPr>
+              <a:spcAft>
+                <a:spcPts val="800"/>
+              </a:spcAft>
+            </a:pPr>
+            <a:r>
+              <a:rPr sz="1050">
+                <a:solidFill>
+                  <a:srgbClr val="CDD2DC"/>
+                </a:solidFill>
+              </a:rPr>
+              <a:t>• Optimistic UI state updates.</a:t>
+            </a:r>
+          </a:p>
+        </p:txBody>
+      </p:sp>
+      <p:sp>
+        <p:nvSpPr>
+          <p:cNvPr id="15" name="Rounded Rectangle 14"/>
+          <p:cNvSpPr/>
+          <p:nvPr/>
+        </p:nvSpPr>
+        <p:spPr>
+          <a:xfrm>
+            <a:off x="4370832" y="3749039"/>
+            <a:ext cx="3429000" cy="2240280"/>
+          </a:xfrm>
+          <a:prstGeom prst="roundRect">
+            <a:avLst/>
+          </a:prstGeom>
+          <a:solidFill>
+            <a:srgbClr val="161922"/>
+          </a:solidFill>
+          <a:ln w="16510">
+            <a:solidFill>
+              <a:srgbClr val="2E3445"/>
+            </a:solidFill>
+          </a:ln>
+        </p:spPr>
+        <p:style>
+          <a:lnRef idx="1">
+            <a:schemeClr val="accent1"/>
+          </a:lnRef>
+          <a:fillRef idx="3">
+            <a:schemeClr val="accent1"/>
+          </a:fillRef>
+          <a:effectRef idx="2">
+            <a:schemeClr val="accent1"/>
+          </a:effectRef>
+          <a:fontRef idx="minor">
+            <a:schemeClr val="lt1"/>
+          </a:fontRef>
+        </p:style>
+        <p:txBody>
+          <a:bodyPr rtlCol="0" anchor="ctr"/>
+          <a:lstStyle/>
+          <a:p>
+            <a:pPr algn="ctr"/>
+          </a:p>
+        </p:txBody>
+      </p:sp>
+      <p:sp>
+        <p:nvSpPr>
+          <p:cNvPr id="16" name="TextBox 15"/>
+          <p:cNvSpPr txBox="1"/>
+          <p:nvPr/>
+        </p:nvSpPr>
+        <p:spPr>
+          <a:xfrm>
+            <a:off x="4572000" y="3913631"/>
+            <a:ext cx="3026664" cy="1911096"/>
+          </a:xfrm>
+          <a:prstGeom prst="rect">
+            <a:avLst/>
+          </a:prstGeom>
+          <a:noFill/>
+        </p:spPr>
+        <p:txBody>
+          <a:bodyPr wrap="square" tIns="0" bIns="0" lIns="0" rIns="0">
+            <a:spAutoFit/>
+          </a:bodyPr>
+          <a:lstStyle/>
+          <a:p>
+            <a:pPr>
+              <a:spcAft>
+                <a:spcPts val="1000"/>
+              </a:spcAft>
+              <a:defRPr sz="1250" b="1">
+                <a:solidFill>
+                  <a:srgbClr val="A855F7"/>
+                </a:solidFill>
+              </a:defRPr>
+            </a:pPr>
+            <a:r>
+              <a:t>YouTube Data API v3</a:t>
+            </a:r>
+          </a:p>
+          <a:p>
+            <a:pPr>
+              <a:spcAft>
+                <a:spcPts val="800"/>
+              </a:spcAft>
+            </a:pPr>
+            <a:r>
+              <a:rPr sz="1050">
+                <a:solidFill>
+                  <a:srgbClr val="CDD2DC"/>
+                </a:solidFill>
+              </a:rPr>
+              <a:t>• RESTful Google Cloud API integration.</a:t>
+            </a:r>
+          </a:p>
+          <a:p>
+            <a:pPr>
+              <a:spcAft>
+                <a:spcPts val="800"/>
+              </a:spcAft>
+            </a:pPr>
+            <a:r>
+              <a:rPr sz="1050">
+                <a:solidFill>
+                  <a:srgbClr val="CDD2DC"/>
+                </a:solidFill>
+              </a:rPr>
+              <a:t>• Dynamic live search &amp; channel fetch.</a:t>
+            </a:r>
+          </a:p>
+          <a:p>
+            <a:pPr>
+              <a:spcAft>
+                <a:spcPts val="800"/>
+              </a:spcAft>
+            </a:pPr>
+            <a:r>
+              <a:rPr sz="1050">
+                <a:solidFill>
+                  <a:srgbClr val="CDD2DC"/>
+                </a:solidFill>
+              </a:rPr>
+              <a:t>• Resilient offline mock fallback.</a:t>
+            </a:r>
+          </a:p>
+          <a:p>
+            <a:pPr>
+              <a:spcAft>
+                <a:spcPts val="800"/>
+              </a:spcAft>
+            </a:pPr>
+            <a:r>
+              <a:rPr sz="1050">
+                <a:solidFill>
+                  <a:srgbClr val="CDD2DC"/>
+                </a:solidFill>
+              </a:rPr>
+              <a:t>• In-app toggle for custom API keys.</a:t>
+            </a:r>
+          </a:p>
+        </p:txBody>
+      </p:sp>
+      <p:sp>
+        <p:nvSpPr>
+          <p:cNvPr id="17" name="Rounded Rectangle 16"/>
+          <p:cNvSpPr/>
+          <p:nvPr/>
+        </p:nvSpPr>
+        <p:spPr>
+          <a:xfrm>
+            <a:off x="8010144" y="3749039"/>
+            <a:ext cx="3429000" cy="2240280"/>
+          </a:xfrm>
+          <a:prstGeom prst="roundRect">
+            <a:avLst/>
+          </a:prstGeom>
+          <a:solidFill>
+            <a:srgbClr val="161922"/>
+          </a:solidFill>
+          <a:ln w="16510">
+            <a:solidFill>
+              <a:srgbClr val="2E3445"/>
+            </a:solidFill>
+          </a:ln>
+        </p:spPr>
+        <p:style>
+          <a:lnRef idx="1">
+            <a:schemeClr val="accent1"/>
+          </a:lnRef>
+          <a:fillRef idx="3">
+            <a:schemeClr val="accent1"/>
+          </a:fillRef>
+          <a:effectRef idx="2">
+            <a:schemeClr val="accent1"/>
+          </a:effectRef>
+          <a:fontRef idx="minor">
+            <a:schemeClr val="lt1"/>
+          </a:fontRef>
+        </p:style>
+        <p:txBody>
+          <a:bodyPr rtlCol="0" anchor="ctr"/>
+          <a:lstStyle/>
+          <a:p>
+            <a:pPr algn="ctr"/>
+          </a:p>
+        </p:txBody>
+      </p:sp>
+      <p:sp>
+        <p:nvSpPr>
+          <p:cNvPr id="18" name="TextBox 17"/>
+          <p:cNvSpPr txBox="1"/>
+          <p:nvPr/>
+        </p:nvSpPr>
+        <p:spPr>
+          <a:xfrm>
+            <a:off x="8211312" y="3913631"/>
+            <a:ext cx="3026664" cy="1911096"/>
+          </a:xfrm>
+          <a:prstGeom prst="rect">
+            <a:avLst/>
+          </a:prstGeom>
+          <a:noFill/>
+        </p:spPr>
+        <p:txBody>
+          <a:bodyPr wrap="square" tIns="0" bIns="0" lIns="0" rIns="0">
+            <a:spAutoFit/>
+          </a:bodyPr>
+          <a:lstStyle/>
+          <a:p>
+            <a:pPr>
+              <a:spcAft>
+                <a:spcPts val="1000"/>
+              </a:spcAft>
+              <a:defRPr sz="1250" b="1">
+                <a:solidFill>
+                  <a:srgbClr val="3EA6FF"/>
+                </a:solidFill>
+              </a:defRPr>
+            </a:pPr>
+            <a:r>
+              <a:t>Vite 5 (Build Tool)</a:t>
+            </a:r>
+          </a:p>
+          <a:p>
+            <a:pPr>
+              <a:spcAft>
+                <a:spcPts val="800"/>
+              </a:spcAft>
+            </a:pPr>
+            <a:r>
+              <a:rPr sz="1050">
+                <a:solidFill>
+                  <a:srgbClr val="CDD2DC"/>
+                </a:solidFill>
+              </a:rPr>
+              <a:t>• Lightning-fast Hot Module Replacement.</a:t>
+            </a:r>
+          </a:p>
+          <a:p>
+            <a:pPr>
+              <a:spcAft>
+                <a:spcPts val="800"/>
+              </a:spcAft>
+            </a:pPr>
+            <a:r>
+              <a:rPr sz="1050">
+                <a:solidFill>
+                  <a:srgbClr val="CDD2DC"/>
+                </a:solidFill>
+              </a:rPr>
+              <a:t>• Native ES Module development server.</a:t>
+            </a:r>
+          </a:p>
+          <a:p>
+            <a:pPr>
+              <a:spcAft>
+                <a:spcPts val="800"/>
+              </a:spcAft>
+            </a:pPr>
+            <a:r>
+              <a:rPr sz="1050">
+                <a:solidFill>
+                  <a:srgbClr val="CDD2DC"/>
+                </a:solidFill>
+              </a:rPr>
+              <a:t>• Sub-1.2s production Rollup bundling.</a:t>
+            </a:r>
+          </a:p>
+          <a:p>
+            <a:pPr>
+              <a:spcAft>
+                <a:spcPts val="800"/>
+              </a:spcAft>
+            </a:pPr>
+            <a:r>
+              <a:rPr sz="1050">
+                <a:solidFill>
+                  <a:srgbClr val="CDD2DC"/>
+                </a:solidFill>
+              </a:rPr>
+              <a:t>• Zero-config optimized asset pipeline.</a:t>
             </a:r>
           </a:p>
         </p:txBody>
@@ -6618,7 +6601,7 @@
               </a:defRPr>
             </a:pPr>
             <a:r>
-              <a:t>Syllabus-Aligned Technology Stack &amp; Architecture</a:t>
+              <a:t>Core Component Architecture &amp; Modularity</a:t>
             </a:r>
           </a:p>
         </p:txBody>
@@ -6731,12 +6714,12 @@
               </a:spcAft>
               <a:defRPr sz="1250" b="1">
                 <a:solidFill>
-                  <a:srgbClr val="3EA6FF"/>
+                  <a:srgbClr val="FF0033"/>
                 </a:solidFill>
               </a:defRPr>
             </a:pPr>
             <a:r>
-              <a:t>React 18 (Core SPA Engine)</a:t>
+              <a:t>Navbar.jsx</a:t>
             </a:r>
           </a:p>
           <a:p>
@@ -6751,7 +6734,7 @@
                   <a:srgbClr val="CDD2DC"/>
                 </a:solidFill>
               </a:rPr>
-              <a:t>• Declarative UI components.</a:t>
+              <a:t>• Search bar with live autocomplete.</a:t>
             </a:r>
           </a:p>
           <a:p>
@@ -6766,7 +6749,7 @@
                   <a:srgbClr val="CDD2DC"/>
                 </a:solidFill>
               </a:rPr>
-              <a:t>• Virtual DOM fiber reconciliation.</a:t>
+              <a:t>• Native Web Speech API mic pulse.</a:t>
             </a:r>
           </a:p>
           <a:p>
@@ -6781,7 +6764,7 @@
                   <a:srgbClr val="CDD2DC"/>
                 </a:solidFill>
               </a:rPr>
-              <a:t>• Concurrent state batching.</a:t>
+              <a:t>• Theme switcher &amp; User avatar menu.</a:t>
             </a:r>
           </a:p>
           <a:p>
@@ -6791,20 +6774,12 @@
               </a:spcAft>
             </a:pPr>
             <a:r>
-              <a:rPr sz="1050" b="1">
-                <a:solidFill>
-                  <a:srgbClr val="FFFFFF"/>
-                </a:solidFill>
-              </a:rPr>
-              <a:t>• Hooks: </a:t>
-            </a:r>
-            <a:r>
               <a:rPr sz="1050">
                 <a:solidFill>
                   <a:srgbClr val="CDD2DC"/>
                 </a:solidFill>
               </a:rPr>
-              <a:t>useState, useEffect, useRef.</a:t>
+              <a:t>• Collapsible hamburger drawer toggle.</a:t>
             </a:r>
           </a:p>
         </p:txBody>
@@ -6882,12 +6857,12 @@
               </a:spcAft>
               <a:defRPr sz="1250" b="1">
                 <a:solidFill>
-                  <a:srgbClr val="FF0033"/>
+                  <a:srgbClr val="3EA6FF"/>
                 </a:solidFill>
               </a:defRPr>
             </a:pPr>
             <a:r>
-              <a:t>React Router v6</a:t>
+              <a:t>Sidebar.jsx</a:t>
             </a:r>
           </a:p>
           <a:p>
@@ -6897,12 +6872,20 @@
               </a:spcAft>
             </a:pPr>
             <a:r>
+              <a:rPr sz="1050" b="1">
+                <a:solidFill>
+                  <a:srgbClr val="FFFFFF"/>
+                </a:solidFill>
+              </a:rPr>
+              <a:t>• Main routes: </a:t>
+            </a:r>
+            <a:r>
               <a:rPr sz="1050">
                 <a:solidFill>
                   <a:srgbClr val="CDD2DC"/>
                 </a:solidFill>
               </a:rPr>
-              <a:t>• Client-side routing engine.</a:t>
+              <a:t>Home, Shorts, Subscriptions.</a:t>
             </a:r>
           </a:p>
           <a:p>
@@ -6912,12 +6895,20 @@
               </a:spcAft>
             </a:pPr>
             <a:r>
+              <a:rPr sz="1050" b="1">
+                <a:solidFill>
+                  <a:srgbClr val="FFFFFF"/>
+                </a:solidFill>
+              </a:rPr>
+              <a:t>• Protected: </a:t>
+            </a:r>
+            <a:r>
               <a:rPr sz="1050">
                 <a:solidFill>
                   <a:srgbClr val="CDD2DC"/>
                 </a:solidFill>
               </a:rPr>
-              <a:t>• Dynamic URL parameters (/watch/:id).</a:t>
+              <a:t>History, Playlists, Liked.</a:t>
             </a:r>
           </a:p>
           <a:p>
@@ -6932,7 +6923,7 @@
                   <a:srgbClr val="CDD2DC"/>
                 </a:solidFill>
               </a:rPr>
-              <a:t>• Declarative &lt;ProtectedRoute /&gt; security.</a:t>
+              <a:t>• Subscribed channels live indicators.</a:t>
             </a:r>
           </a:p>
           <a:p>
@@ -6947,7 +6938,7 @@
                   <a:srgbClr val="CDD2DC"/>
                 </a:solidFill>
               </a:rPr>
-              <a:t>• Seamless useNavigate() transitions.</a:t>
+              <a:t>• Responsive collapsed mini-rail mode.</a:t>
             </a:r>
           </a:p>
         </p:txBody>
@@ -7025,12 +7016,12 @@
               </a:spcAft>
               <a:defRPr sz="1250" b="1">
                 <a:solidFill>
-                  <a:srgbClr val="3EA6FF"/>
+                  <a:srgbClr val="2BA640"/>
                 </a:solidFill>
               </a:defRPr>
             </a:pPr>
             <a:r>
-              <a:t>Tailwind CSS 3</a:t>
+              <a:t>VideoCard.jsx</a:t>
             </a:r>
           </a:p>
           <a:p>
@@ -7045,7 +7036,7 @@
                   <a:srgbClr val="CDD2DC"/>
                 </a:solidFill>
               </a:rPr>
-              <a:t>• Utility-first responsive framework.</a:t>
+              <a:t>• 16:9 thumbnail with timestamp badge.</a:t>
             </a:r>
           </a:p>
           <a:p>
@@ -7060,7 +7051,7 @@
                   <a:srgbClr val="CDD2DC"/>
                 </a:solidFill>
               </a:rPr>
-              <a:t>• Dark/Light theme CSS variables.</a:t>
+              <a:t>• Channel avatar &amp; verified checkmark.</a:t>
             </a:r>
           </a:p>
           <a:p>
@@ -7075,7 +7066,7 @@
                   <a:srgbClr val="CDD2DC"/>
                 </a:solidFill>
               </a:rPr>
-              <a:t>• Custom micro-interactions &amp; pulse.</a:t>
+              <a:t>• Hover scale micro-interactions.</a:t>
             </a:r>
           </a:p>
           <a:p>
@@ -7090,7 +7081,7 @@
                   <a:srgbClr val="CDD2DC"/>
                 </a:solidFill>
               </a:rPr>
-              <a:t>• Strict YouTube aesthetics alignment.</a:t>
+              <a:t>• Integrated infinite scroll pagination.</a:t>
             </a:r>
           </a:p>
         </p:txBody>
@@ -7168,12 +7159,12 @@
               </a:spcAft>
               <a:defRPr sz="1250" b="1">
                 <a:solidFill>
-                  <a:srgbClr val="2BA640"/>
+                  <a:srgbClr val="A855F7"/>
                 </a:solidFill>
               </a:defRPr>
             </a:pPr>
             <a:r>
-              <a:t>Context API &amp; LocalStorage</a:t>
+              <a:t>WatchPage.jsx</a:t>
             </a:r>
           </a:p>
           <a:p>
@@ -7188,7 +7179,7 @@
                   <a:srgbClr val="CDD2DC"/>
                 </a:solidFill>
               </a:rPr>
-              <a:t>• Centralized global AppContext bus.</a:t>
+              <a:t>• 100% In-Site Video Player (No Redirects).</a:t>
             </a:r>
           </a:p>
           <a:p>
@@ -7198,12 +7189,20 @@
               </a:spcAft>
             </a:pPr>
             <a:r>
+              <a:rPr sz="1050" b="1">
+                <a:solidFill>
+                  <a:srgbClr val="FFFFFF"/>
+                </a:solidFill>
+              </a:rPr>
+              <a:t>• Action controls: </a:t>
+            </a:r>
+            <a:r>
               <a:rPr sz="1050">
                 <a:solidFill>
                   <a:srgbClr val="CDD2DC"/>
                 </a:solidFill>
               </a:rPr>
-              <a:t>• Syncs Likes, Playlists, &amp; Watch Later.</a:t>
+              <a:t>Like, Share, Save.</a:t>
             </a:r>
           </a:p>
           <a:p>
@@ -7218,7 +7217,7 @@
                   <a:srgbClr val="CDD2DC"/>
                 </a:solidFill>
               </a:rPr>
-              <a:t>• Persistent auth token storage.</a:t>
+              <a:t>• Dynamic Subscribe button &amp; counter.</a:t>
             </a:r>
           </a:p>
           <a:p>
@@ -7233,7 +7232,7 @@
                   <a:srgbClr val="CDD2DC"/>
                 </a:solidFill>
               </a:rPr>
-              <a:t>• Optimistic UI state updates.</a:t>
+              <a:t>• Real-time useRef comment thread.</a:t>
             </a:r>
           </a:p>
         </p:txBody>
@@ -7311,12 +7310,12 @@
               </a:spcAft>
               <a:defRPr sz="1250" b="1">
                 <a:solidFill>
-                  <a:srgbClr val="A855F7"/>
+                  <a:srgbClr val="FF0033"/>
                 </a:solidFill>
               </a:defRPr>
             </a:pPr>
             <a:r>
-              <a:t>YouTube Data API v3</a:t>
+              <a:t>AuthModal.jsx</a:t>
             </a:r>
           </a:p>
           <a:p>
@@ -7331,7 +7330,7 @@
                   <a:srgbClr val="CDD2DC"/>
                 </a:solidFill>
               </a:rPr>
-              <a:t>• RESTful Google Cloud API integration.</a:t>
+              <a:t>• Tabbed interface (Sign In &amp; Sign Up).</a:t>
             </a:r>
           </a:p>
           <a:p>
@@ -7346,7 +7345,7 @@
                   <a:srgbClr val="CDD2DC"/>
                 </a:solidFill>
               </a:rPr>
-              <a:t>• Dynamic live search &amp; channel fetch.</a:t>
+              <a:t>• Client-side credentials validation.</a:t>
             </a:r>
           </a:p>
           <a:p>
@@ -7361,7 +7360,7 @@
                   <a:srgbClr val="CDD2DC"/>
                 </a:solidFill>
               </a:rPr>
-              <a:t>• Resilient offline mock fallback.</a:t>
+              <a:t>• Automatic guest login on registration.</a:t>
             </a:r>
           </a:p>
           <a:p>
@@ -7376,7 +7375,7 @@
                   <a:srgbClr val="CDD2DC"/>
                 </a:solidFill>
               </a:rPr>
-              <a:t>• In-app toggle for custom API keys.</a:t>
+              <a:t>• Session persistence via LocalStorage.</a:t>
             </a:r>
           </a:p>
         </p:txBody>
@@ -7459,7 +7458,7 @@
               </a:defRPr>
             </a:pPr>
             <a:r>
-              <a:t>Vite 5 (Build Tool)</a:t>
+              <a:t>SettingsModal.jsx</a:t>
             </a:r>
           </a:p>
           <a:p>
@@ -7474,7 +7473,7 @@
                   <a:srgbClr val="CDD2DC"/>
                 </a:solidFill>
               </a:rPr>
-              <a:t>• Lightning-fast Hot Module Replacement.</a:t>
+              <a:t>• Genuine YouTube settings interface.</a:t>
             </a:r>
           </a:p>
           <a:p>
@@ -7489,7 +7488,7 @@
                   <a:srgbClr val="CDD2DC"/>
                 </a:solidFill>
               </a:rPr>
-              <a:t>• Native ES Module development server.</a:t>
+              <a:t>• Display Theme (Dark/Light Mode).</a:t>
             </a:r>
           </a:p>
           <a:p>
@@ -7504,7 +7503,7 @@
                   <a:srgbClr val="CDD2DC"/>
                 </a:solidFill>
               </a:rPr>
-              <a:t>• Sub-1.2s production Rollup bundling.</a:t>
+              <a:t>• Autoplay &amp; HD 1080p stream toggles.</a:t>
             </a:r>
           </a:p>
           <a:p>
@@ -7519,7 +7518,7 @@
                   <a:srgbClr val="CDD2DC"/>
                 </a:solidFill>
               </a:rPr>
-              <a:t>• Zero-config optimized asset pipeline.</a:t>
+              <a:t>• YouTube Data API v3 live key manager.</a:t>
             </a:r>
           </a:p>
         </p:txBody>
@@ -7696,7 +7695,7 @@
               </a:defRPr>
             </a:pPr>
             <a:r>
-              <a:t>Core Component Architecture &amp; Modularity</a:t>
+              <a:t>In-Site Video Streaming Engine (/watch/:id) — No Redirecting</a:t>
             </a:r>
           </a:p>
         </p:txBody>
@@ -7745,7 +7744,7 @@
         <p:spPr>
           <a:xfrm>
             <a:off x="731520" y="1325880"/>
-            <a:ext cx="3429000" cy="2240280"/>
+            <a:ext cx="5303520" cy="4663440"/>
           </a:xfrm>
           <a:prstGeom prst="roundRect">
             <a:avLst/>
@@ -7781,104 +7780,30 @@
           </a:p>
         </p:txBody>
       </p:sp>
-      <p:sp>
-        <p:nvSpPr>
-          <p:cNvPr id="8" name="TextBox 7"/>
-          <p:cNvSpPr txBox="1"/>
-          <p:nvPr/>
-        </p:nvSpPr>
-        <p:spPr>
-          <a:xfrm>
-            <a:off x="932688" y="1490472"/>
-            <a:ext cx="3026664" cy="1911096"/>
+      <p:pic>
+        <p:nvPicPr>
+          <p:cNvPr id="8" name="Picture 7" descr="feat_watch_player.png"/>
+          <p:cNvPicPr>
+            <a:picLocks noChangeAspect="1"/>
+          </p:cNvPicPr>
+          <p:nvPr/>
+        </p:nvPicPr>
+        <p:blipFill>
+          <a:blip r:embed="rId2"/>
+          <a:stretch>
+            <a:fillRect/>
+          </a:stretch>
+        </p:blipFill>
+        <p:spPr>
+          <a:xfrm>
+            <a:off x="868680" y="1508760"/>
+            <a:ext cx="5029200" cy="3143250"/>
           </a:xfrm>
           <a:prstGeom prst="rect">
             <a:avLst/>
           </a:prstGeom>
-          <a:noFill/>
-        </p:spPr>
-        <p:txBody>
-          <a:bodyPr wrap="square" tIns="0" bIns="0" lIns="0" rIns="0">
-            <a:spAutoFit/>
-          </a:bodyPr>
-          <a:lstStyle/>
-          <a:p>
-            <a:pPr>
-              <a:spcAft>
-                <a:spcPts val="1000"/>
-              </a:spcAft>
-              <a:defRPr sz="1250" b="1">
-                <a:solidFill>
-                  <a:srgbClr val="FF0033"/>
-                </a:solidFill>
-              </a:defRPr>
-            </a:pPr>
-            <a:r>
-              <a:t>Navbar.jsx</a:t>
-            </a:r>
-          </a:p>
-          <a:p>
-            <a:pPr>
-              <a:spcAft>
-                <a:spcPts val="800"/>
-              </a:spcAft>
-            </a:pPr>
-            <a:r>
-              <a:rPr sz="1050">
-                <a:solidFill>
-                  <a:srgbClr val="CDD2DC"/>
-                </a:solidFill>
-              </a:rPr>
-              <a:t>• Search bar with live autocomplete.</a:t>
-            </a:r>
-          </a:p>
-          <a:p>
-            <a:pPr>
-              <a:spcAft>
-                <a:spcPts val="800"/>
-              </a:spcAft>
-            </a:pPr>
-            <a:r>
-              <a:rPr sz="1050">
-                <a:solidFill>
-                  <a:srgbClr val="CDD2DC"/>
-                </a:solidFill>
-              </a:rPr>
-              <a:t>• Native Web Speech API mic pulse.</a:t>
-            </a:r>
-          </a:p>
-          <a:p>
-            <a:pPr>
-              <a:spcAft>
-                <a:spcPts val="800"/>
-              </a:spcAft>
-            </a:pPr>
-            <a:r>
-              <a:rPr sz="1050">
-                <a:solidFill>
-                  <a:srgbClr val="CDD2DC"/>
-                </a:solidFill>
-              </a:rPr>
-              <a:t>• Theme switcher &amp; User avatar menu.</a:t>
-            </a:r>
-          </a:p>
-          <a:p>
-            <a:pPr>
-              <a:spcAft>
-                <a:spcPts val="800"/>
-              </a:spcAft>
-            </a:pPr>
-            <a:r>
-              <a:rPr sz="1050">
-                <a:solidFill>
-                  <a:srgbClr val="CDD2DC"/>
-                </a:solidFill>
-              </a:rPr>
-              <a:t>• Collapsible hamburger drawer toggle.</a:t>
-            </a:r>
-          </a:p>
-        </p:txBody>
-      </p:sp>
+        </p:spPr>
+      </p:pic>
       <p:sp>
         <p:nvSpPr>
           <p:cNvPr id="9" name="Rounded Rectangle 8"/>
@@ -7887,8 +7812,8 @@
         </p:nvSpPr>
         <p:spPr>
           <a:xfrm>
-            <a:off x="4370832" y="1325880"/>
-            <a:ext cx="3429000" cy="2240280"/>
+            <a:off x="6248095" y="1325880"/>
+            <a:ext cx="5212080" cy="4663440"/>
           </a:xfrm>
           <a:prstGeom prst="roundRect">
             <a:avLst/>
@@ -7932,8 +7857,8 @@
         </p:nvSpPr>
         <p:spPr>
           <a:xfrm>
-            <a:off x="4572000" y="1490472"/>
-            <a:ext cx="3026664" cy="1911096"/>
+            <a:off x="6449263" y="1490472"/>
+            <a:ext cx="4809744" cy="4334255"/>
           </a:xfrm>
           <a:prstGeom prst="rect">
             <a:avLst/>
@@ -7950,14 +7875,14 @@
               <a:spcAft>
                 <a:spcPts val="1000"/>
               </a:spcAft>
-              <a:defRPr sz="1250" b="1">
-                <a:solidFill>
-                  <a:srgbClr val="3EA6FF"/>
+              <a:defRPr sz="1300" b="1">
+                <a:solidFill>
+                  <a:srgbClr val="FF0033"/>
                 </a:solidFill>
               </a:defRPr>
             </a:pPr>
             <a:r>
-              <a:t>Sidebar.jsx</a:t>
+              <a:t>In-Site Streaming &amp; Action Controls</a:t>
             </a:r>
           </a:p>
           <a:p>
@@ -7967,20 +7892,20 @@
               </a:spcAft>
             </a:pPr>
             <a:r>
-              <a:rPr sz="1050" b="1">
+              <a:rPr sz="1100" b="1">
                 <a:solidFill>
                   <a:srgbClr val="FFFFFF"/>
                 </a:solidFill>
               </a:rPr>
-              <a:t>• Main routes: </a:t>
-            </a:r>
-            <a:r>
-              <a:rPr sz="1050">
+              <a:t>• 100% In-Site Video Playback: </a:t>
+            </a:r>
+            <a:r>
+              <a:rPr sz="1100">
                 <a:solidFill>
                   <a:srgbClr val="CDD2DC"/>
                 </a:solidFill>
               </a:rPr>
-              <a:t>Home, Shorts, Subscriptions.</a:t>
+              <a:t>Media streams directly inside PheW TuBe on the /watch/:id route with zero external redirects to YouTube.</a:t>
             </a:r>
           </a:p>
           <a:p>
@@ -7990,20 +7915,20 @@
               </a:spcAft>
             </a:pPr>
             <a:r>
-              <a:rPr sz="1050" b="1">
+              <a:rPr sz="1100" b="1">
                 <a:solidFill>
                   <a:srgbClr val="FFFFFF"/>
                 </a:solidFill>
               </a:rPr>
-              <a:t>• Protected: </a:t>
-            </a:r>
-            <a:r>
-              <a:rPr sz="1050">
+              <a:t>• Working Interactive Controls: </a:t>
+            </a:r>
+            <a:r>
+              <a:rPr sz="1100">
                 <a:solidFill>
                   <a:srgbClr val="CDD2DC"/>
                 </a:solidFill>
               </a:rPr>
-              <a:t>History, Playlists, Liked.</a:t>
+              <a:t>Functional Like counter with active state highlighting, Share link copier, and Watch Later bookmarking.</a:t>
             </a:r>
           </a:p>
           <a:p>
@@ -8013,12 +7938,20 @@
               </a:spcAft>
             </a:pPr>
             <a:r>
-              <a:rPr sz="1050">
+              <a:rPr sz="1100" b="1">
+                <a:solidFill>
+                  <a:srgbClr val="FFFFFF"/>
+                </a:solidFill>
+              </a:rPr>
+              <a:t>• Channel Subscription Engine: </a:t>
+            </a:r>
+            <a:r>
+              <a:rPr sz="1100">
                 <a:solidFill>
                   <a:srgbClr val="CDD2DC"/>
                 </a:solidFill>
               </a:rPr>
-              <a:t>• Subscribed channels live indicators.</a:t>
+              <a:t>One-click Subscribe / Unsubscribe toggle dynamically synchronizing channel subscriber counts.</a:t>
             </a:r>
           </a:p>
           <a:p>
@@ -8028,95 +7961,20 @@
               </a:spcAft>
             </a:pPr>
             <a:r>
-              <a:rPr sz="1050">
+              <a:rPr sz="1100" b="1">
+                <a:solidFill>
+                  <a:srgbClr val="FFFFFF"/>
+                </a:solidFill>
+              </a:rPr>
+              <a:t>• Up-Next Recommendation Sidebar: </a:t>
+            </a:r>
+            <a:r>
+              <a:rPr sz="1100">
                 <a:solidFill>
                   <a:srgbClr val="CDD2DC"/>
                 </a:solidFill>
               </a:rPr>
-              <a:t>• Responsive collapsed mini-rail mode.</a:t>
-            </a:r>
-          </a:p>
-        </p:txBody>
-      </p:sp>
-      <p:sp>
-        <p:nvSpPr>
-          <p:cNvPr id="11" name="Rounded Rectangle 10"/>
-          <p:cNvSpPr/>
-          <p:nvPr/>
-        </p:nvSpPr>
-        <p:spPr>
-          <a:xfrm>
-            <a:off x="8010144" y="1325880"/>
-            <a:ext cx="3429000" cy="2240280"/>
-          </a:xfrm>
-          <a:prstGeom prst="roundRect">
-            <a:avLst/>
-          </a:prstGeom>
-          <a:solidFill>
-            <a:srgbClr val="161922"/>
-          </a:solidFill>
-          <a:ln w="16510">
-            <a:solidFill>
-              <a:srgbClr val="2E3445"/>
-            </a:solidFill>
-          </a:ln>
-        </p:spPr>
-        <p:style>
-          <a:lnRef idx="1">
-            <a:schemeClr val="accent1"/>
-          </a:lnRef>
-          <a:fillRef idx="3">
-            <a:schemeClr val="accent1"/>
-          </a:fillRef>
-          <a:effectRef idx="2">
-            <a:schemeClr val="accent1"/>
-          </a:effectRef>
-          <a:fontRef idx="minor">
-            <a:schemeClr val="lt1"/>
-          </a:fontRef>
-        </p:style>
-        <p:txBody>
-          <a:bodyPr rtlCol="0" anchor="ctr"/>
-          <a:lstStyle/>
-          <a:p>
-            <a:pPr algn="ctr"/>
-          </a:p>
-        </p:txBody>
-      </p:sp>
-      <p:sp>
-        <p:nvSpPr>
-          <p:cNvPr id="12" name="TextBox 11"/>
-          <p:cNvSpPr txBox="1"/>
-          <p:nvPr/>
-        </p:nvSpPr>
-        <p:spPr>
-          <a:xfrm>
-            <a:off x="8211312" y="1490472"/>
-            <a:ext cx="3026664" cy="1911096"/>
-          </a:xfrm>
-          <a:prstGeom prst="rect">
-            <a:avLst/>
-          </a:prstGeom>
-          <a:noFill/>
-        </p:spPr>
-        <p:txBody>
-          <a:bodyPr wrap="square" tIns="0" bIns="0" lIns="0" rIns="0">
-            <a:spAutoFit/>
-          </a:bodyPr>
-          <a:lstStyle/>
-          <a:p>
-            <a:pPr>
-              <a:spcAft>
-                <a:spcPts val="1000"/>
-              </a:spcAft>
-              <a:defRPr sz="1250" b="1">
-                <a:solidFill>
-                  <a:srgbClr val="2BA640"/>
-                </a:solidFill>
-              </a:defRPr>
-            </a:pPr>
-            <a:r>
-              <a:t>VideoCard.jsx</a:t>
+              <a:t>Seamless client-side navigation dynamically loading next video without tearing down DOM.</a:t>
             </a:r>
           </a:p>
           <a:p>
@@ -8126,494 +7984,20 @@
               </a:spcAft>
             </a:pPr>
             <a:r>
-              <a:rPr sz="1050">
+              <a:rPr sz="1100" b="1">
+                <a:solidFill>
+                  <a:srgbClr val="FFFFFF"/>
+                </a:solidFill>
+              </a:rPr>
+              <a:t>• Full Video Metadata: </a:t>
+            </a:r>
+            <a:r>
+              <a:rPr sz="1100">
                 <a:solidFill>
                   <a:srgbClr val="CDD2DC"/>
                 </a:solidFill>
               </a:rPr>
-              <a:t>• 16:9 thumbnail with timestamp badge.</a:t>
-            </a:r>
-          </a:p>
-          <a:p>
-            <a:pPr>
-              <a:spcAft>
-                <a:spcPts val="800"/>
-              </a:spcAft>
-            </a:pPr>
-            <a:r>
-              <a:rPr sz="1050">
-                <a:solidFill>
-                  <a:srgbClr val="CDD2DC"/>
-                </a:solidFill>
-              </a:rPr>
-              <a:t>• Channel avatar &amp; verified checkmark.</a:t>
-            </a:r>
-          </a:p>
-          <a:p>
-            <a:pPr>
-              <a:spcAft>
-                <a:spcPts val="800"/>
-              </a:spcAft>
-            </a:pPr>
-            <a:r>
-              <a:rPr sz="1050">
-                <a:solidFill>
-                  <a:srgbClr val="CDD2DC"/>
-                </a:solidFill>
-              </a:rPr>
-              <a:t>• Hover scale micro-interactions.</a:t>
-            </a:r>
-          </a:p>
-          <a:p>
-            <a:pPr>
-              <a:spcAft>
-                <a:spcPts val="800"/>
-              </a:spcAft>
-            </a:pPr>
-            <a:r>
-              <a:rPr sz="1050">
-                <a:solidFill>
-                  <a:srgbClr val="CDD2DC"/>
-                </a:solidFill>
-              </a:rPr>
-              <a:t>• Integrated infinite scroll pagination.</a:t>
-            </a:r>
-          </a:p>
-        </p:txBody>
-      </p:sp>
-      <p:sp>
-        <p:nvSpPr>
-          <p:cNvPr id="13" name="Rounded Rectangle 12"/>
-          <p:cNvSpPr/>
-          <p:nvPr/>
-        </p:nvSpPr>
-        <p:spPr>
-          <a:xfrm>
-            <a:off x="731520" y="3749039"/>
-            <a:ext cx="3429000" cy="2240280"/>
-          </a:xfrm>
-          <a:prstGeom prst="roundRect">
-            <a:avLst/>
-          </a:prstGeom>
-          <a:solidFill>
-            <a:srgbClr val="161922"/>
-          </a:solidFill>
-          <a:ln w="16510">
-            <a:solidFill>
-              <a:srgbClr val="2E3445"/>
-            </a:solidFill>
-          </a:ln>
-        </p:spPr>
-        <p:style>
-          <a:lnRef idx="1">
-            <a:schemeClr val="accent1"/>
-          </a:lnRef>
-          <a:fillRef idx="3">
-            <a:schemeClr val="accent1"/>
-          </a:fillRef>
-          <a:effectRef idx="2">
-            <a:schemeClr val="accent1"/>
-          </a:effectRef>
-          <a:fontRef idx="minor">
-            <a:schemeClr val="lt1"/>
-          </a:fontRef>
-        </p:style>
-        <p:txBody>
-          <a:bodyPr rtlCol="0" anchor="ctr"/>
-          <a:lstStyle/>
-          <a:p>
-            <a:pPr algn="ctr"/>
-          </a:p>
-        </p:txBody>
-      </p:sp>
-      <p:sp>
-        <p:nvSpPr>
-          <p:cNvPr id="14" name="TextBox 13"/>
-          <p:cNvSpPr txBox="1"/>
-          <p:nvPr/>
-        </p:nvSpPr>
-        <p:spPr>
-          <a:xfrm>
-            <a:off x="932688" y="3913631"/>
-            <a:ext cx="3026664" cy="1911096"/>
-          </a:xfrm>
-          <a:prstGeom prst="rect">
-            <a:avLst/>
-          </a:prstGeom>
-          <a:noFill/>
-        </p:spPr>
-        <p:txBody>
-          <a:bodyPr wrap="square" tIns="0" bIns="0" lIns="0" rIns="0">
-            <a:spAutoFit/>
-          </a:bodyPr>
-          <a:lstStyle/>
-          <a:p>
-            <a:pPr>
-              <a:spcAft>
-                <a:spcPts val="1000"/>
-              </a:spcAft>
-              <a:defRPr sz="1250" b="1">
-                <a:solidFill>
-                  <a:srgbClr val="A855F7"/>
-                </a:solidFill>
-              </a:defRPr>
-            </a:pPr>
-            <a:r>
-              <a:t>WatchPage.jsx</a:t>
-            </a:r>
-          </a:p>
-          <a:p>
-            <a:pPr>
-              <a:spcAft>
-                <a:spcPts val="800"/>
-              </a:spcAft>
-            </a:pPr>
-            <a:r>
-              <a:rPr sz="1050">
-                <a:solidFill>
-                  <a:srgbClr val="CDD2DC"/>
-                </a:solidFill>
-              </a:rPr>
-              <a:t>• 100% In-Site Video Player (No Redirects).</a:t>
-            </a:r>
-          </a:p>
-          <a:p>
-            <a:pPr>
-              <a:spcAft>
-                <a:spcPts val="800"/>
-              </a:spcAft>
-            </a:pPr>
-            <a:r>
-              <a:rPr sz="1050" b="1">
-                <a:solidFill>
-                  <a:srgbClr val="FFFFFF"/>
-                </a:solidFill>
-              </a:rPr>
-              <a:t>• Action controls: </a:t>
-            </a:r>
-            <a:r>
-              <a:rPr sz="1050">
-                <a:solidFill>
-                  <a:srgbClr val="CDD2DC"/>
-                </a:solidFill>
-              </a:rPr>
-              <a:t>Like, Share, Save.</a:t>
-            </a:r>
-          </a:p>
-          <a:p>
-            <a:pPr>
-              <a:spcAft>
-                <a:spcPts val="800"/>
-              </a:spcAft>
-            </a:pPr>
-            <a:r>
-              <a:rPr sz="1050">
-                <a:solidFill>
-                  <a:srgbClr val="CDD2DC"/>
-                </a:solidFill>
-              </a:rPr>
-              <a:t>• Dynamic Subscribe button &amp; counter.</a:t>
-            </a:r>
-          </a:p>
-          <a:p>
-            <a:pPr>
-              <a:spcAft>
-                <a:spcPts val="800"/>
-              </a:spcAft>
-            </a:pPr>
-            <a:r>
-              <a:rPr sz="1050">
-                <a:solidFill>
-                  <a:srgbClr val="CDD2DC"/>
-                </a:solidFill>
-              </a:rPr>
-              <a:t>• Real-time useRef comment thread.</a:t>
-            </a:r>
-          </a:p>
-        </p:txBody>
-      </p:sp>
-      <p:sp>
-        <p:nvSpPr>
-          <p:cNvPr id="15" name="Rounded Rectangle 14"/>
-          <p:cNvSpPr/>
-          <p:nvPr/>
-        </p:nvSpPr>
-        <p:spPr>
-          <a:xfrm>
-            <a:off x="4370832" y="3749039"/>
-            <a:ext cx="3429000" cy="2240280"/>
-          </a:xfrm>
-          <a:prstGeom prst="roundRect">
-            <a:avLst/>
-          </a:prstGeom>
-          <a:solidFill>
-            <a:srgbClr val="161922"/>
-          </a:solidFill>
-          <a:ln w="16510">
-            <a:solidFill>
-              <a:srgbClr val="2E3445"/>
-            </a:solidFill>
-          </a:ln>
-        </p:spPr>
-        <p:style>
-          <a:lnRef idx="1">
-            <a:schemeClr val="accent1"/>
-          </a:lnRef>
-          <a:fillRef idx="3">
-            <a:schemeClr val="accent1"/>
-          </a:fillRef>
-          <a:effectRef idx="2">
-            <a:schemeClr val="accent1"/>
-          </a:effectRef>
-          <a:fontRef idx="minor">
-            <a:schemeClr val="lt1"/>
-          </a:fontRef>
-        </p:style>
-        <p:txBody>
-          <a:bodyPr rtlCol="0" anchor="ctr"/>
-          <a:lstStyle/>
-          <a:p>
-            <a:pPr algn="ctr"/>
-          </a:p>
-        </p:txBody>
-      </p:sp>
-      <p:sp>
-        <p:nvSpPr>
-          <p:cNvPr id="16" name="TextBox 15"/>
-          <p:cNvSpPr txBox="1"/>
-          <p:nvPr/>
-        </p:nvSpPr>
-        <p:spPr>
-          <a:xfrm>
-            <a:off x="4572000" y="3913631"/>
-            <a:ext cx="3026664" cy="1911096"/>
-          </a:xfrm>
-          <a:prstGeom prst="rect">
-            <a:avLst/>
-          </a:prstGeom>
-          <a:noFill/>
-        </p:spPr>
-        <p:txBody>
-          <a:bodyPr wrap="square" tIns="0" bIns="0" lIns="0" rIns="0">
-            <a:spAutoFit/>
-          </a:bodyPr>
-          <a:lstStyle/>
-          <a:p>
-            <a:pPr>
-              <a:spcAft>
-                <a:spcPts val="1000"/>
-              </a:spcAft>
-              <a:defRPr sz="1250" b="1">
-                <a:solidFill>
-                  <a:srgbClr val="FF0033"/>
-                </a:solidFill>
-              </a:defRPr>
-            </a:pPr>
-            <a:r>
-              <a:t>AuthModal.jsx</a:t>
-            </a:r>
-          </a:p>
-          <a:p>
-            <a:pPr>
-              <a:spcAft>
-                <a:spcPts val="800"/>
-              </a:spcAft>
-            </a:pPr>
-            <a:r>
-              <a:rPr sz="1050">
-                <a:solidFill>
-                  <a:srgbClr val="CDD2DC"/>
-                </a:solidFill>
-              </a:rPr>
-              <a:t>• Tabbed interface (Sign In &amp; Sign Up).</a:t>
-            </a:r>
-          </a:p>
-          <a:p>
-            <a:pPr>
-              <a:spcAft>
-                <a:spcPts val="800"/>
-              </a:spcAft>
-            </a:pPr>
-            <a:r>
-              <a:rPr sz="1050">
-                <a:solidFill>
-                  <a:srgbClr val="CDD2DC"/>
-                </a:solidFill>
-              </a:rPr>
-              <a:t>• Client-side credentials validation.</a:t>
-            </a:r>
-          </a:p>
-          <a:p>
-            <a:pPr>
-              <a:spcAft>
-                <a:spcPts val="800"/>
-              </a:spcAft>
-            </a:pPr>
-            <a:r>
-              <a:rPr sz="1050">
-                <a:solidFill>
-                  <a:srgbClr val="CDD2DC"/>
-                </a:solidFill>
-              </a:rPr>
-              <a:t>• Automatic guest login on registration.</a:t>
-            </a:r>
-          </a:p>
-          <a:p>
-            <a:pPr>
-              <a:spcAft>
-                <a:spcPts val="800"/>
-              </a:spcAft>
-            </a:pPr>
-            <a:r>
-              <a:rPr sz="1050">
-                <a:solidFill>
-                  <a:srgbClr val="CDD2DC"/>
-                </a:solidFill>
-              </a:rPr>
-              <a:t>• Session persistence via LocalStorage.</a:t>
-            </a:r>
-          </a:p>
-        </p:txBody>
-      </p:sp>
-      <p:sp>
-        <p:nvSpPr>
-          <p:cNvPr id="17" name="Rounded Rectangle 16"/>
-          <p:cNvSpPr/>
-          <p:nvPr/>
-        </p:nvSpPr>
-        <p:spPr>
-          <a:xfrm>
-            <a:off x="8010144" y="3749039"/>
-            <a:ext cx="3429000" cy="2240280"/>
-          </a:xfrm>
-          <a:prstGeom prst="roundRect">
-            <a:avLst/>
-          </a:prstGeom>
-          <a:solidFill>
-            <a:srgbClr val="161922"/>
-          </a:solidFill>
-          <a:ln w="16510">
-            <a:solidFill>
-              <a:srgbClr val="2E3445"/>
-            </a:solidFill>
-          </a:ln>
-        </p:spPr>
-        <p:style>
-          <a:lnRef idx="1">
-            <a:schemeClr val="accent1"/>
-          </a:lnRef>
-          <a:fillRef idx="3">
-            <a:schemeClr val="accent1"/>
-          </a:fillRef>
-          <a:effectRef idx="2">
-            <a:schemeClr val="accent1"/>
-          </a:effectRef>
-          <a:fontRef idx="minor">
-            <a:schemeClr val="lt1"/>
-          </a:fontRef>
-        </p:style>
-        <p:txBody>
-          <a:bodyPr rtlCol="0" anchor="ctr"/>
-          <a:lstStyle/>
-          <a:p>
-            <a:pPr algn="ctr"/>
-          </a:p>
-        </p:txBody>
-      </p:sp>
-      <p:sp>
-        <p:nvSpPr>
-          <p:cNvPr id="18" name="TextBox 17"/>
-          <p:cNvSpPr txBox="1"/>
-          <p:nvPr/>
-        </p:nvSpPr>
-        <p:spPr>
-          <a:xfrm>
-            <a:off x="8211312" y="3913631"/>
-            <a:ext cx="3026664" cy="1911096"/>
-          </a:xfrm>
-          <a:prstGeom prst="rect">
-            <a:avLst/>
-          </a:prstGeom>
-          <a:noFill/>
-        </p:spPr>
-        <p:txBody>
-          <a:bodyPr wrap="square" tIns="0" bIns="0" lIns="0" rIns="0">
-            <a:spAutoFit/>
-          </a:bodyPr>
-          <a:lstStyle/>
-          <a:p>
-            <a:pPr>
-              <a:spcAft>
-                <a:spcPts val="1000"/>
-              </a:spcAft>
-              <a:defRPr sz="1250" b="1">
-                <a:solidFill>
-                  <a:srgbClr val="3EA6FF"/>
-                </a:solidFill>
-              </a:defRPr>
-            </a:pPr>
-            <a:r>
-              <a:t>SettingsModal.jsx</a:t>
-            </a:r>
-          </a:p>
-          <a:p>
-            <a:pPr>
-              <a:spcAft>
-                <a:spcPts val="800"/>
-              </a:spcAft>
-            </a:pPr>
-            <a:r>
-              <a:rPr sz="1050">
-                <a:solidFill>
-                  <a:srgbClr val="CDD2DC"/>
-                </a:solidFill>
-              </a:rPr>
-              <a:t>• Genuine YouTube settings interface.</a:t>
-            </a:r>
-          </a:p>
-          <a:p>
-            <a:pPr>
-              <a:spcAft>
-                <a:spcPts val="800"/>
-              </a:spcAft>
-            </a:pPr>
-            <a:r>
-              <a:rPr sz="1050">
-                <a:solidFill>
-                  <a:srgbClr val="CDD2DC"/>
-                </a:solidFill>
-              </a:rPr>
-              <a:t>• Display Theme (Dark/Light Mode).</a:t>
-            </a:r>
-          </a:p>
-          <a:p>
-            <a:pPr>
-              <a:spcAft>
-                <a:spcPts val="800"/>
-              </a:spcAft>
-            </a:pPr>
-            <a:r>
-              <a:rPr sz="1050">
-                <a:solidFill>
-                  <a:srgbClr val="CDD2DC"/>
-                </a:solidFill>
-              </a:rPr>
-              <a:t>• Autoplay &amp; HD 1080p stream toggles.</a:t>
-            </a:r>
-          </a:p>
-          <a:p>
-            <a:pPr>
-              <a:spcAft>
-                <a:spcPts val="800"/>
-              </a:spcAft>
-            </a:pPr>
-            <a:r>
-              <a:rPr sz="1050">
-                <a:solidFill>
-                  <a:srgbClr val="CDD2DC"/>
-                </a:solidFill>
-              </a:rPr>
-              <a:t>• YouTube Data API v3 live key manager.</a:t>
+              <a:t>Comprehensive description drawer with tags, view counts, and publication timestamps.</a:t>
             </a:r>
           </a:p>
         </p:txBody>
@@ -8790,7 +8174,7 @@
               </a:defRPr>
             </a:pPr>
             <a:r>
-              <a:t>In-Site Video Streaming Engine (/watch/:id) — No Redirecting</a:t>
+              <a:t>Interactive Comments with useRef &amp; Voice Search Pulse</a:t>
             </a:r>
           </a:p>
         </p:txBody>
@@ -8877,7 +8261,7 @@
       </p:sp>
       <p:pic>
         <p:nvPicPr>
-          <p:cNvPr id="8" name="Picture 7" descr="feat_watch_player.png"/>
+          <p:cNvPr id="8" name="Picture 7" descr="ui_search_clean.png"/>
           <p:cNvPicPr>
             <a:picLocks noChangeAspect="1"/>
           </p:cNvPicPr>
@@ -8892,7 +8276,7 @@
         <p:spPr>
           <a:xfrm>
             <a:off x="868680" y="1508760"/>
-            <a:ext cx="5029200" cy="3143250"/>
+            <a:ext cx="5029200" cy="4701209"/>
           </a:xfrm>
           <a:prstGeom prst="rect">
             <a:avLst/>
@@ -8972,12 +8356,12 @@
               </a:spcAft>
               <a:defRPr sz="1300" b="1">
                 <a:solidFill>
-                  <a:srgbClr val="FF0033"/>
+                  <a:srgbClr val="3EA6FF"/>
                 </a:solidFill>
               </a:defRPr>
             </a:pPr>
             <a:r>
-              <a:t>In-Site Streaming &amp; Action Controls</a:t>
+              <a:t>Comments Thread &amp; Speech API Specs</a:t>
             </a:r>
           </a:p>
           <a:p>
@@ -8992,7 +8376,7 @@
                   <a:srgbClr val="FFFFFF"/>
                 </a:solidFill>
               </a:rPr>
-              <a:t>• 100% In-Site Video Playback: </a:t>
+              <a:t>• Native Web Speech API Mic: </a:t>
             </a:r>
             <a:r>
               <a:rPr sz="1100">
@@ -9000,7 +8384,7 @@
                   <a:srgbClr val="CDD2DC"/>
                 </a:solidFill>
               </a:rPr>
-              <a:t>Media streams directly inside PheW TuBe on the /watch/:id route with zero external redirects to YouTube.</a:t>
+              <a:t>Hands-free voice recognition with an animated listening pulse overlay and auto query search.</a:t>
             </a:r>
           </a:p>
           <a:p>
@@ -9015,7 +8399,7 @@
                   <a:srgbClr val="FFFFFF"/>
                 </a:solidFill>
               </a:rPr>
-              <a:t>• Working Interactive Controls: </a:t>
+              <a:t>• DOM Control via useRef: </a:t>
             </a:r>
             <a:r>
               <a:rPr sz="1100">
@@ -9023,7 +8407,7 @@
                   <a:srgbClr val="CDD2DC"/>
                 </a:solidFill>
               </a:rPr>
-              <a:t>Functional Like counter with active state highlighting, Share link copier, and Watch Later bookmarking.</a:t>
+              <a:t>Direct programmatic input focus when user engages with comments, eliminating synthetic re-renders.</a:t>
             </a:r>
           </a:p>
           <a:p>
@@ -9038,7 +8422,7 @@
                   <a:srgbClr val="FFFFFF"/>
                 </a:solidFill>
               </a:rPr>
-              <a:t>• Channel Subscription Engine: </a:t>
+              <a:t>• Real-Time Discussion Thread: </a:t>
             </a:r>
             <a:r>
               <a:rPr sz="1100">
@@ -9046,7 +8430,7 @@
                   <a:srgbClr val="CDD2DC"/>
                 </a:solidFill>
               </a:rPr>
-              <a:t>One-click Subscribe / Unsubscribe toggle dynamically synchronizing channel subscriber counts.</a:t>
+              <a:t>Allows posting instant user comments with dynamic avatar attachment and optimistic UI commits.</a:t>
             </a:r>
           </a:p>
           <a:p>
@@ -9061,7 +8445,7 @@
                   <a:srgbClr val="FFFFFF"/>
                 </a:solidFill>
               </a:rPr>
-              <a:t>• Up-Next Recommendation Sidebar: </a:t>
+              <a:t>• Sorting &amp; Filtering Engine: </a:t>
             </a:r>
             <a:r>
               <a:rPr sz="1100">
@@ -9069,7 +8453,7 @@
                   <a:srgbClr val="CDD2DC"/>
                 </a:solidFill>
               </a:rPr>
-              <a:t>Seamless client-side navigation dynamically loading next video without tearing down DOM.</a:t>
+              <a:t>Interactive sort dropdown toggling between 'Top Comments' and 'Newest First'.</a:t>
             </a:r>
           </a:p>
           <a:p>
@@ -9084,7 +8468,7 @@
                   <a:srgbClr val="FFFFFF"/>
                 </a:solidFill>
               </a:rPr>
-              <a:t>• Full Video Metadata: </a:t>
+              <a:t>• Comment Engagement Metrics: </a:t>
             </a:r>
             <a:r>
               <a:rPr sz="1100">
@@ -9092,7 +8476,7 @@
                   <a:srgbClr val="CDD2DC"/>
                 </a:solidFill>
               </a:rPr>
-              <a:t>Comprehensive description drawer with tags, view counts, and publication timestamps.</a:t>
+              <a:t>Independent like counter and interactive reply toggles per discussion node.</a:t>
             </a:r>
           </a:p>
         </p:txBody>
@@ -9269,7 +8653,7 @@
               </a:defRPr>
             </a:pPr>
             <a:r>
-              <a:t>Interactive Comments with useRef &amp; Voice Search Pulse</a:t>
+              <a:t>Protected Routing &amp; Guest Authentication Gatekeeper</a:t>
             </a:r>
           </a:p>
         </p:txBody>
@@ -9356,7 +8740,7 @@
       </p:sp>
       <p:pic>
         <p:nvPicPr>
-          <p:cNvPr id="8" name="Picture 7" descr="ui_search_clean.png"/>
+          <p:cNvPr id="8" name="Picture 7" descr="crop_auth_modal.png"/>
           <p:cNvPicPr>
             <a:picLocks noChangeAspect="1"/>
           </p:cNvPicPr>
@@ -9370,8 +8754,8 @@
         </p:blipFill>
         <p:spPr>
           <a:xfrm>
-            <a:off x="868680" y="1508760"/>
-            <a:ext cx="5029200" cy="4701209"/>
+            <a:off x="1280160" y="1508760"/>
+            <a:ext cx="4206240" cy="3720905"/>
           </a:xfrm>
           <a:prstGeom prst="rect">
             <a:avLst/>
@@ -9451,12 +8835,12 @@
               </a:spcAft>
               <a:defRPr sz="1300" b="1">
                 <a:solidFill>
-                  <a:srgbClr val="3EA6FF"/>
+                  <a:srgbClr val="FF0033"/>
                 </a:solidFill>
               </a:defRPr>
             </a:pPr>
             <a:r>
-              <a:t>Comments Thread &amp; Speech API Specs</a:t>
+              <a:t>Protected Routing &amp; Session Specs</a:t>
             </a:r>
           </a:p>
           <a:p>
@@ -9471,7 +8855,7 @@
                   <a:srgbClr val="FFFFFF"/>
                 </a:solidFill>
               </a:rPr>
-              <a:t>• Native Web Speech API Mic: </a:t>
+              <a:t>• Dedicated Auth Modal: </a:t>
             </a:r>
             <a:r>
               <a:rPr sz="1100">
@@ -9479,7 +8863,7 @@
                   <a:srgbClr val="CDD2DC"/>
                 </a:solidFill>
               </a:rPr>
-              <a:t>Hands-free voice recognition with an animated listening pulse overlay and auto query search.</a:t>
+              <a:t>Tabbed modal interface supporting both Sign In and Sign Up with live form validation.</a:t>
             </a:r>
           </a:p>
           <a:p>
@@ -9494,7 +8878,7 @@
                   <a:srgbClr val="FFFFFF"/>
                 </a:solidFill>
               </a:rPr>
-              <a:t>• DOM Control via useRef: </a:t>
+              <a:t>• Strict Protected Route Gatekeeper: </a:t>
             </a:r>
             <a:r>
               <a:rPr sz="1100">
@@ -9502,7 +8886,7 @@
                   <a:srgbClr val="CDD2DC"/>
                 </a:solidFill>
               </a:rPr>
-              <a:t>Direct programmatic input focus when user engages with comments, eliminating synthetic re-renders.</a:t>
+              <a:t>Subscriptions, Playlists, Liked Videos, and History remain locked for unauthenticated guests.</a:t>
             </a:r>
           </a:p>
           <a:p>
@@ -9517,7 +8901,7 @@
                   <a:srgbClr val="FFFFFF"/>
                 </a:solidFill>
               </a:rPr>
-              <a:t>• Real-Time Discussion Thread: </a:t>
+              <a:t>• Non-Disruptive Interception: </a:t>
             </a:r>
             <a:r>
               <a:rPr sz="1100">
@@ -9525,7 +8909,7 @@
                   <a:srgbClr val="CDD2DC"/>
                 </a:solidFill>
               </a:rPr>
-              <a:t>Allows posting instant user comments with dynamic avatar attachment and optimistic UI commits.</a:t>
+              <a:t>Clicking locked features displays an informative gatekeeper screen prompting Sign In.</a:t>
             </a:r>
           </a:p>
           <a:p>
@@ -9540,7 +8924,7 @@
                   <a:srgbClr val="FFFFFF"/>
                 </a:solidFill>
               </a:rPr>
-              <a:t>• Sorting &amp; Filtering Engine: </a:t>
+              <a:t>• Automatic Session Hydration: </a:t>
             </a:r>
             <a:r>
               <a:rPr sz="1100">
@@ -9548,7 +8932,7 @@
                   <a:srgbClr val="CDD2DC"/>
                 </a:solidFill>
               </a:rPr>
-              <a:t>Interactive sort dropdown toggling between 'Top Comments' and 'Newest First'.</a:t>
+              <a:t>Successfully registering or signing in instantly authenticates the user without losing current route.</a:t>
             </a:r>
           </a:p>
           <a:p>
@@ -9563,7 +8947,7 @@
                   <a:srgbClr val="FFFFFF"/>
                 </a:solidFill>
               </a:rPr>
-              <a:t>• Comment Engagement Metrics: </a:t>
+              <a:t>• Session Persistence: </a:t>
             </a:r>
             <a:r>
               <a:rPr sz="1100">
@@ -9571,7 +8955,7 @@
                   <a:srgbClr val="CDD2DC"/>
                 </a:solidFill>
               </a:rPr>
-              <a:t>Independent like counter and interactive reply toggles per discussion node.</a:t>
+              <a:t>Stores encrypted session state in LocalStorage, preserving login across browser reloads.</a:t>
             </a:r>
           </a:p>
         </p:txBody>
@@ -9748,7 +9132,7 @@
               </a:defRPr>
             </a:pPr>
             <a:r>
-              <a:t>Protected Routing &amp; Guest Authentication Gatekeeper</a:t>
+              <a:t>Real YouTube Settings Panel &amp; Playback Preferences</a:t>
             </a:r>
           </a:p>
         </p:txBody>
@@ -9835,7 +9219,7 @@
       </p:sp>
       <p:pic>
         <p:nvPicPr>
-          <p:cNvPr id="8" name="Picture 7" descr="crop_auth_modal.png"/>
+          <p:cNvPr id="8" name="Picture 7" descr="crop_settings_modal.png"/>
           <p:cNvPicPr>
             <a:picLocks noChangeAspect="1"/>
           </p:cNvPicPr>
@@ -9849,8 +9233,8 @@
         </p:blipFill>
         <p:spPr>
           <a:xfrm>
-            <a:off x="1280160" y="1508760"/>
-            <a:ext cx="4206240" cy="3720905"/>
+            <a:off x="1920240" y="1417320"/>
+            <a:ext cx="3106522" cy="4480560"/>
           </a:xfrm>
           <a:prstGeom prst="rect">
             <a:avLst/>
@@ -9930,12 +9314,12 @@
               </a:spcAft>
               <a:defRPr sz="1300" b="1">
                 <a:solidFill>
-                  <a:srgbClr val="FF0033"/>
+                  <a:srgbClr val="2BA640"/>
                 </a:solidFill>
               </a:defRPr>
             </a:pPr>
             <a:r>
-              <a:t>Protected Routing &amp; Session Specs</a:t>
+              <a:t>Settings Architecture &amp; Controls</a:t>
             </a:r>
           </a:p>
           <a:p>
@@ -9950,7 +9334,7 @@
                   <a:srgbClr val="FFFFFF"/>
                 </a:solidFill>
               </a:rPr>
-              <a:t>• Dedicated Auth Modal: </a:t>
+              <a:t>• Authentic YouTube Settings UI: </a:t>
             </a:r>
             <a:r>
               <a:rPr sz="1100">
@@ -9958,7 +9342,7 @@
                   <a:srgbClr val="CDD2DC"/>
                 </a:solidFill>
               </a:rPr>
-              <a:t>Tabbed modal interface supporting both Sign In and Sign Up with live form validation.</a:t>
+              <a:t>Replicates genuine YouTube preferences dialog with backdrop blur and smooth exit.</a:t>
             </a:r>
           </a:p>
           <a:p>
@@ -9973,7 +9357,7 @@
                   <a:srgbClr val="FFFFFF"/>
                 </a:solidFill>
               </a:rPr>
-              <a:t>• Strict Protected Route Gatekeeper: </a:t>
+              <a:t>• Display Theme Engine: </a:t>
             </a:r>
             <a:r>
               <a:rPr sz="1100">
@@ -9981,7 +9365,7 @@
                   <a:srgbClr val="CDD2DC"/>
                 </a:solidFill>
               </a:rPr>
-              <a:t>Subscriptions, Playlists, Liked Videos, and History remain locked for unauthenticated guests.</a:t>
+              <a:t>Instant toggle between Dark Mode and Light Mode with CSS variables updating all UI elements.</a:t>
             </a:r>
           </a:p>
           <a:p>
@@ -9996,7 +9380,7 @@
                   <a:srgbClr val="FFFFFF"/>
                 </a:solidFill>
               </a:rPr>
-              <a:t>• Non-Disruptive Interception: </a:t>
+              <a:t>• Autoplay Next Video: </a:t>
             </a:r>
             <a:r>
               <a:rPr sz="1100">
@@ -10004,7 +9388,7 @@
                   <a:srgbClr val="CDD2DC"/>
                 </a:solidFill>
               </a:rPr>
-              <a:t>Clicking locked features displays an informative gatekeeper screen prompting Sign In.</a:t>
+              <a:t>Automated continuous playback queue seamlessly transitioning to next video upon finish.</a:t>
             </a:r>
           </a:p>
           <a:p>
@@ -10019,7 +9403,7 @@
                   <a:srgbClr val="FFFFFF"/>
                 </a:solidFill>
               </a:rPr>
-              <a:t>• Automatic Session Hydration: </a:t>
+              <a:t>• HD 1080p Stream Quality: </a:t>
             </a:r>
             <a:r>
               <a:rPr sz="1100">
@@ -10027,7 +9411,7 @@
                   <a:srgbClr val="CDD2DC"/>
                 </a:solidFill>
               </a:rPr>
-              <a:t>Successfully registering or signing in instantly authenticates the user without losing current route.</a:t>
+              <a:t>High-bitrate default stream resolution preference enforcement.</a:t>
             </a:r>
           </a:p>
           <a:p>
@@ -10042,7 +9426,7 @@
                   <a:srgbClr val="FFFFFF"/>
                 </a:solidFill>
               </a:rPr>
-              <a:t>• Session Persistence: </a:t>
+              <a:t>• Storage &amp; Cache Controls: </a:t>
             </a:r>
             <a:r>
               <a:rPr sz="1100">
@@ -10050,7 +9434,7 @@
                   <a:srgbClr val="CDD2DC"/>
                 </a:solidFill>
               </a:rPr>
-              <a:t>Stores encrypted session state in LocalStorage, preserving login across browser reloads.</a:t>
+              <a:t>Dedicated 'Clear Watch History' and 'Reset All App Storage' buttons for evaluation testing.</a:t>
             </a:r>
           </a:p>
         </p:txBody>
@@ -10227,7 +9611,7 @@
               </a:defRPr>
             </a:pPr>
             <a:r>
-              <a:t>Real YouTube Settings Panel &amp; Playback Preferences</a:t>
+              <a:t>Infinite Scroll Feed &amp; YouTube Data API v3 Engine</a:t>
             </a:r>
           </a:p>
         </p:txBody>
@@ -10276,7 +9660,7 @@
         <p:spPr>
           <a:xfrm>
             <a:off x="731520" y="1325880"/>
-            <a:ext cx="5303520" cy="4663440"/>
+            <a:ext cx="5212080" cy="4663440"/>
           </a:xfrm>
           <a:prstGeom prst="roundRect">
             <a:avLst/>
@@ -10312,30 +9696,113 @@
           </a:p>
         </p:txBody>
       </p:sp>
-      <p:pic>
-        <p:nvPicPr>
-          <p:cNvPr id="8" name="Picture 7" descr="crop_settings_modal.png"/>
-          <p:cNvPicPr>
-            <a:picLocks noChangeAspect="1"/>
-          </p:cNvPicPr>
-          <p:nvPr/>
-        </p:nvPicPr>
-        <p:blipFill>
-          <a:blip r:embed="rId2"/>
-          <a:stretch>
-            <a:fillRect/>
-          </a:stretch>
-        </p:blipFill>
-        <p:spPr>
-          <a:xfrm>
-            <a:off x="1920240" y="1417320"/>
-            <a:ext cx="3106522" cy="4480560"/>
+      <p:sp>
+        <p:nvSpPr>
+          <p:cNvPr id="8" name="TextBox 7"/>
+          <p:cNvSpPr txBox="1"/>
+          <p:nvPr/>
+        </p:nvSpPr>
+        <p:spPr>
+          <a:xfrm>
+            <a:off x="932688" y="1490472"/>
+            <a:ext cx="4809744" cy="4334255"/>
           </a:xfrm>
           <a:prstGeom prst="rect">
             <a:avLst/>
           </a:prstGeom>
-        </p:spPr>
-      </p:pic>
+          <a:noFill/>
+        </p:spPr>
+        <p:txBody>
+          <a:bodyPr wrap="square" tIns="0" bIns="0" lIns="0" rIns="0">
+            <a:spAutoFit/>
+          </a:bodyPr>
+          <a:lstStyle/>
+          <a:p>
+            <a:pPr>
+              <a:spcAft>
+                <a:spcPts val="1000"/>
+              </a:spcAft>
+              <a:defRPr sz="1350" b="1">
+                <a:solidFill>
+                  <a:srgbClr val="3EA6FF"/>
+                </a:solidFill>
+              </a:defRPr>
+            </a:pPr>
+            <a:r>
+              <a:t>Infinite Scroll Feed Pagination</a:t>
+            </a:r>
+          </a:p>
+          <a:p>
+            <a:pPr>
+              <a:spcAft>
+                <a:spcPts val="800"/>
+              </a:spcAft>
+            </a:pPr>
+            <a:r>
+              <a:rPr sz="1150" b="1">
+                <a:solidFill>
+                  <a:srgbClr val="FFFFFF"/>
+                </a:solidFill>
+              </a:rPr>
+              <a:t>• react-infinite-scroll-component: </a:t>
+            </a:r>
+            <a:r>
+              <a:rPr sz="1150">
+                <a:solidFill>
+                  <a:srgbClr val="CDD2DC"/>
+                </a:solidFill>
+              </a:rPr>
+              <a:t>Continuous feed pagination dynamically fetching video batches as user scrolls down.</a:t>
+            </a:r>
+          </a:p>
+          <a:p>
+            <a:pPr>
+              <a:spcAft>
+                <a:spcPts val="800"/>
+              </a:spcAft>
+            </a:pPr>
+            <a:r>
+              <a:rPr sz="1150" b="1">
+                <a:solidFill>
+                  <a:srgbClr val="FFFFFF"/>
+                </a:solidFill>
+              </a:rPr>
+              <a:t>• Zero Churn Reconciliation: </a:t>
+            </a:r>
+            <a:r>
+              <a:rPr sz="1150">
+                <a:solidFill>
+                  <a:srgbClr val="CDD2DC"/>
+                </a:solidFill>
+              </a:rPr>
+              <a:t>Slicing and appending next batches isolates new cards without re-rendering existing items.</a:t>
+            </a:r>
+          </a:p>
+          <a:p>
+            <a:pPr>
+              <a:spcAft>
+                <a:spcPts val="800"/>
+              </a:spcAft>
+            </a:pPr>
+            <a:r>
+              <a:rPr sz="1150" b="1">
+                <a:solidFill>
+                  <a:srgbClr val="FFFFFF"/>
+                </a:solidFill>
+              </a:rPr>
+              <a:t>• Scroll Trigger Geometry: </a:t>
+            </a:r>
+            <a:r>
+              <a:rPr sz="1150">
+                <a:solidFill>
+                  <a:srgbClr val="CDD2DC"/>
+                </a:solidFill>
+              </a:rPr>
+              <a:t>Viewport intersection thresholds trigger data fetching before reaching bottom of page.</a:t>
+            </a:r>
+          </a:p>
+        </p:txBody>
+      </p:sp>
       <p:sp>
         <p:nvSpPr>
           <p:cNvPr id="9" name="Rounded Rectangle 8"/>
@@ -10407,14 +9874,14 @@
               <a:spcAft>
                 <a:spcPts val="1000"/>
               </a:spcAft>
-              <a:defRPr sz="1300" b="1">
-                <a:solidFill>
-                  <a:srgbClr val="2BA640"/>
+              <a:defRPr sz="1350" b="1">
+                <a:solidFill>
+                  <a:srgbClr val="A855F7"/>
                 </a:solidFill>
               </a:defRPr>
             </a:pPr>
             <a:r>
-              <a:t>Settings Architecture &amp; Controls</a:t>
+              <a:t>YouTube Data API v3 Live Integration</a:t>
             </a:r>
           </a:p>
           <a:p>
@@ -10424,20 +9891,20 @@
               </a:spcAft>
             </a:pPr>
             <a:r>
-              <a:rPr sz="1100" b="1">
+              <a:rPr sz="1150" b="1">
                 <a:solidFill>
                   <a:srgbClr val="FFFFFF"/>
                 </a:solidFill>
               </a:rPr>
-              <a:t>• Authentic YouTube Settings UI: </a:t>
-            </a:r>
-            <a:r>
-              <a:rPr sz="1100">
+              <a:t>• Google Cloud YouTube API v3: </a:t>
+            </a:r>
+            <a:r>
+              <a:rPr sz="1150">
                 <a:solidFill>
                   <a:srgbClr val="CDD2DC"/>
                 </a:solidFill>
               </a:rPr>
-              <a:t>Replicates genuine YouTube preferences dialog with backdrop blur and smooth exit.</a:t>
+              <a:t>Direct RESTful integration querying live YouTube video metadata, thumbnails, and views.</a:t>
             </a:r>
           </a:p>
           <a:p>
@@ -10447,20 +9914,20 @@
               </a:spcAft>
             </a:pPr>
             <a:r>
-              <a:rPr sz="1100" b="1">
+              <a:rPr sz="1150" b="1">
                 <a:solidFill>
                   <a:srgbClr val="FFFFFF"/>
                 </a:solidFill>
               </a:rPr>
-              <a:t>• Display Theme Engine: </a:t>
-            </a:r>
-            <a:r>
-              <a:rPr sz="1100">
+              <a:t>• Live Key Manager: </a:t>
+            </a:r>
+            <a:r>
+              <a:rPr sz="1150">
                 <a:solidFill>
                   <a:srgbClr val="CDD2DC"/>
                 </a:solidFill>
               </a:rPr>
-              <a:t>Instant toggle between Dark Mode and Light Mode with CSS variables updating all UI elements.</a:t>
+              <a:t>In-app settings switch allows entering custom Google Cloud API key to toggle live YouTube data.</a:t>
             </a:r>
           </a:p>
           <a:p>
@@ -10470,66 +9937,20 @@
               </a:spcAft>
             </a:pPr>
             <a:r>
-              <a:rPr sz="1100" b="1">
+              <a:rPr sz="1150" b="1">
                 <a:solidFill>
                   <a:srgbClr val="FFFFFF"/>
                 </a:solidFill>
               </a:rPr>
-              <a:t>• Autoplay Next Video: </a:t>
-            </a:r>
-            <a:r>
-              <a:rPr sz="1100">
+              <a:t>• Resilient Offline Fallback: </a:t>
+            </a:r>
+            <a:r>
+              <a:rPr sz="1150">
                 <a:solidFill>
                   <a:srgbClr val="CDD2DC"/>
                 </a:solidFill>
               </a:rPr>
-              <a:t>Automated continuous playback queue seamlessly transitioning to next video upon finish.</a:t>
-            </a:r>
-          </a:p>
-          <a:p>
-            <a:pPr>
-              <a:spcAft>
-                <a:spcPts val="800"/>
-              </a:spcAft>
-            </a:pPr>
-            <a:r>
-              <a:rPr sz="1100" b="1">
-                <a:solidFill>
-                  <a:srgbClr val="FFFFFF"/>
-                </a:solidFill>
-              </a:rPr>
-              <a:t>• HD 1080p Stream Quality: </a:t>
-            </a:r>
-            <a:r>
-              <a:rPr sz="1100">
-                <a:solidFill>
-                  <a:srgbClr val="CDD2DC"/>
-                </a:solidFill>
-              </a:rPr>
-              <a:t>High-bitrate default stream resolution preference enforcement.</a:t>
-            </a:r>
-          </a:p>
-          <a:p>
-            <a:pPr>
-              <a:spcAft>
-                <a:spcPts val="800"/>
-              </a:spcAft>
-            </a:pPr>
-            <a:r>
-              <a:rPr sz="1100" b="1">
-                <a:solidFill>
-                  <a:srgbClr val="FFFFFF"/>
-                </a:solidFill>
-              </a:rPr>
-              <a:t>• Storage &amp; Cache Controls: </a:t>
-            </a:r>
-            <a:r>
-              <a:rPr sz="1100">
-                <a:solidFill>
-                  <a:srgbClr val="CDD2DC"/>
-                </a:solidFill>
-              </a:rPr>
-              <a:t>Dedicated 'Clear Watch History' and 'Reset All App Storage' buttons for evaluation testing.</a:t>
+              <a:t>Gracefully falls back to high-fidelity curated mock dataset (youtubeData.js) on quota exhaustion.</a:t>
             </a:r>
           </a:p>
         </p:txBody>

--- a/G15-PID-17.pptx
+++ b/G15-PID-17.pptx
@@ -16,7 +16,6 @@
     <p:sldId id="264" r:id="rId15"/>
     <p:sldId id="265" r:id="rId16"/>
     <p:sldId id="266" r:id="rId17"/>
-    <p:sldId id="267" r:id="rId18"/>
   </p:sldIdLst>
   <p:sldSz cx="12191695" cy="6858000" type="screen4x3"/>
   <p:notesSz cx="6858000" cy="9144000"/>
@@ -4044,522 +4043,6 @@
       </p:sp>
       <p:sp>
         <p:nvSpPr>
-          <p:cNvPr id="3" name="Rectangle 2"/>
-          <p:cNvSpPr/>
-          <p:nvPr/>
-        </p:nvSpPr>
-        <p:spPr>
-          <a:xfrm>
-            <a:off x="731520" y="365760"/>
-            <a:ext cx="365760" cy="54864"/>
-          </a:xfrm>
-          <a:prstGeom prst="rect">
-            <a:avLst/>
-          </a:prstGeom>
-          <a:solidFill>
-            <a:srgbClr val="FF0033"/>
-          </a:solidFill>
-          <a:ln>
-            <a:noFill/>
-          </a:ln>
-        </p:spPr>
-        <p:style>
-          <a:lnRef idx="1">
-            <a:schemeClr val="accent1"/>
-          </a:lnRef>
-          <a:fillRef idx="3">
-            <a:schemeClr val="accent1"/>
-          </a:fillRef>
-          <a:effectRef idx="2">
-            <a:schemeClr val="accent1"/>
-          </a:effectRef>
-          <a:fontRef idx="minor">
-            <a:schemeClr val="lt1"/>
-          </a:fontRef>
-        </p:style>
-        <p:txBody>
-          <a:bodyPr rtlCol="0" anchor="ctr"/>
-          <a:lstStyle/>
-          <a:p>
-            <a:pPr algn="ctr"/>
-          </a:p>
-        </p:txBody>
-      </p:sp>
-      <p:sp>
-        <p:nvSpPr>
-          <p:cNvPr id="4" name="TextBox 3"/>
-          <p:cNvSpPr txBox="1"/>
-          <p:nvPr/>
-        </p:nvSpPr>
-        <p:spPr>
-          <a:xfrm>
-            <a:off x="1188720" y="292608"/>
-            <a:ext cx="10241280" cy="274320"/>
-          </a:xfrm>
-          <a:prstGeom prst="rect">
-            <a:avLst/>
-          </a:prstGeom>
-          <a:noFill/>
-        </p:spPr>
-        <p:txBody>
-          <a:bodyPr wrap="none">
-            <a:spAutoFit/>
-          </a:bodyPr>
-          <a:lstStyle/>
-          <a:p>
-            <a:pPr>
-              <a:defRPr sz="1150" b="1">
-                <a:solidFill>
-                  <a:srgbClr val="3EA6FF"/>
-                </a:solidFill>
-              </a:defRPr>
-            </a:pPr>
-            <a:r>
-              <a:t>GROUP G15  •  PROJECT ID: G15-PID-17 (P-17)  •  EVALUATION-II (PHASE 2)</a:t>
-            </a:r>
-          </a:p>
-        </p:txBody>
-      </p:sp>
-      <p:sp>
-        <p:nvSpPr>
-          <p:cNvPr id="5" name="TextBox 4"/>
-          <p:cNvSpPr txBox="1"/>
-          <p:nvPr/>
-        </p:nvSpPr>
-        <p:spPr>
-          <a:xfrm>
-            <a:off x="731520" y="621792"/>
-            <a:ext cx="10728655" cy="594360"/>
-          </a:xfrm>
-          <a:prstGeom prst="rect">
-            <a:avLst/>
-          </a:prstGeom>
-          <a:noFill/>
-        </p:spPr>
-        <p:txBody>
-          <a:bodyPr wrap="square">
-            <a:spAutoFit/>
-          </a:bodyPr>
-          <a:lstStyle/>
-          <a:p>
-            <a:pPr>
-              <a:defRPr sz="2300" b="1">
-                <a:solidFill>
-                  <a:srgbClr val="FFFFFF"/>
-                </a:solidFill>
-              </a:defRPr>
-            </a:pPr>
-            <a:r>
-              <a:t>Summary, Live Demonstration &amp; Viva Voce Defense</a:t>
-            </a:r>
-          </a:p>
-        </p:txBody>
-      </p:sp>
-      <p:sp>
-        <p:nvSpPr>
-          <p:cNvPr id="6" name="TextBox 5"/>
-          <p:cNvSpPr txBox="1"/>
-          <p:nvPr/>
-        </p:nvSpPr>
-        <p:spPr>
-          <a:xfrm>
-            <a:off x="731520" y="6327648"/>
-            <a:ext cx="10728655" cy="274320"/>
-          </a:xfrm>
-          <a:prstGeom prst="rect">
-            <a:avLst/>
-          </a:prstGeom>
-          <a:noFill/>
-        </p:spPr>
-        <p:txBody>
-          <a:bodyPr wrap="none">
-            <a:spAutoFit/>
-          </a:bodyPr>
-          <a:lstStyle/>
-          <a:p>
-            <a:pPr>
-              <a:defRPr sz="1000">
-                <a:solidFill>
-                  <a:srgbClr val="8C94A5"/>
-                </a:solidFill>
-              </a:defRPr>
-            </a:pPr>
-            <a:r>
-              <a:t>PheW TuBe: Video Streaming Platform (G15-PID-17)  |  Chitkara University FEE-II  |  Page 11</a:t>
-            </a:r>
-          </a:p>
-        </p:txBody>
-      </p:sp>
-      <p:sp>
-        <p:nvSpPr>
-          <p:cNvPr id="7" name="Rounded Rectangle 6"/>
-          <p:cNvSpPr/>
-          <p:nvPr/>
-        </p:nvSpPr>
-        <p:spPr>
-          <a:xfrm>
-            <a:off x="731520" y="1325880"/>
-            <a:ext cx="5212080" cy="4663440"/>
-          </a:xfrm>
-          <a:prstGeom prst="roundRect">
-            <a:avLst/>
-          </a:prstGeom>
-          <a:solidFill>
-            <a:srgbClr val="161922"/>
-          </a:solidFill>
-          <a:ln w="16510">
-            <a:solidFill>
-              <a:srgbClr val="2E3445"/>
-            </a:solidFill>
-          </a:ln>
-        </p:spPr>
-        <p:style>
-          <a:lnRef idx="1">
-            <a:schemeClr val="accent1"/>
-          </a:lnRef>
-          <a:fillRef idx="3">
-            <a:schemeClr val="accent1"/>
-          </a:fillRef>
-          <a:effectRef idx="2">
-            <a:schemeClr val="accent1"/>
-          </a:effectRef>
-          <a:fontRef idx="minor">
-            <a:schemeClr val="lt1"/>
-          </a:fontRef>
-        </p:style>
-        <p:txBody>
-          <a:bodyPr rtlCol="0" anchor="ctr"/>
-          <a:lstStyle/>
-          <a:p>
-            <a:pPr algn="ctr"/>
-          </a:p>
-        </p:txBody>
-      </p:sp>
-      <p:sp>
-        <p:nvSpPr>
-          <p:cNvPr id="8" name="TextBox 7"/>
-          <p:cNvSpPr txBox="1"/>
-          <p:nvPr/>
-        </p:nvSpPr>
-        <p:spPr>
-          <a:xfrm>
-            <a:off x="932688" y="1490472"/>
-            <a:ext cx="4809744" cy="4334255"/>
-          </a:xfrm>
-          <a:prstGeom prst="rect">
-            <a:avLst/>
-          </a:prstGeom>
-          <a:noFill/>
-        </p:spPr>
-        <p:txBody>
-          <a:bodyPr wrap="square" tIns="0" bIns="0" lIns="0" rIns="0">
-            <a:spAutoFit/>
-          </a:bodyPr>
-          <a:lstStyle/>
-          <a:p>
-            <a:pPr>
-              <a:spcAft>
-                <a:spcPts val="1000"/>
-              </a:spcAft>
-              <a:defRPr sz="1350" b="1">
-                <a:solidFill>
-                  <a:srgbClr val="FF0033"/>
-                </a:solidFill>
-              </a:defRPr>
-            </a:pPr>
-            <a:r>
-              <a:t>Viva Defense &amp; 1-Minute Pitch</a:t>
-            </a:r>
-          </a:p>
-          <a:p>
-            <a:pPr>
-              <a:spcAft>
-                <a:spcPts val="800"/>
-              </a:spcAft>
-            </a:pPr>
-            <a:r>
-              <a:rPr sz="1150" b="1">
-                <a:solidFill>
-                  <a:srgbClr val="FFFFFF"/>
-                </a:solidFill>
-              </a:rPr>
-              <a:t>• Viva Title Justification: </a:t>
-            </a:r>
-            <a:r>
-              <a:rPr sz="1150">
-                <a:solidFill>
-                  <a:srgbClr val="CDD2DC"/>
-                </a:solidFill>
-              </a:rPr>
-              <a:t>PheW TuBe represents an ad-free, high-speed streaming platform with 100% in-app media rendering.</a:t>
-            </a:r>
-          </a:p>
-          <a:p>
-            <a:pPr>
-              <a:spcAft>
-                <a:spcPts val="800"/>
-              </a:spcAft>
-            </a:pPr>
-            <a:r>
-              <a:rPr sz="1150" b="1">
-                <a:solidFill>
-                  <a:srgbClr val="FFFFFF"/>
-                </a:solidFill>
-              </a:rPr>
-              <a:t>• Core Gap Solved: </a:t>
-            </a:r>
-            <a:r>
-              <a:rPr sz="1150">
-                <a:solidFill>
-                  <a:srgbClr val="CDD2DC"/>
-                </a:solidFill>
-              </a:rPr>
-              <a:t>Eliminates disruptive external site redirects, offers hands-free Web Speech API search, and provides full YouTube settings.</a:t>
-            </a:r>
-          </a:p>
-          <a:p>
-            <a:pPr>
-              <a:spcAft>
-                <a:spcPts val="800"/>
-              </a:spcAft>
-            </a:pPr>
-            <a:r>
-              <a:rPr sz="1150" b="1">
-                <a:solidFill>
-                  <a:srgbClr val="FFFFFF"/>
-                </a:solidFill>
-              </a:rPr>
-              <a:t>• Target Users: </a:t>
-            </a:r>
-            <a:r>
-              <a:rPr sz="1150">
-                <a:solidFill>
-                  <a:srgbClr val="CDD2DC"/>
-                </a:solidFill>
-              </a:rPr>
-              <a:t>Students, programmers, and tech enthusiasts requiring distraction-free educational video viewing.</a:t>
-            </a:r>
-          </a:p>
-        </p:txBody>
-      </p:sp>
-      <p:sp>
-        <p:nvSpPr>
-          <p:cNvPr id="9" name="Rounded Rectangle 8"/>
-          <p:cNvSpPr/>
-          <p:nvPr/>
-        </p:nvSpPr>
-        <p:spPr>
-          <a:xfrm>
-            <a:off x="6248095" y="1325880"/>
-            <a:ext cx="5212080" cy="4663440"/>
-          </a:xfrm>
-          <a:prstGeom prst="roundRect">
-            <a:avLst/>
-          </a:prstGeom>
-          <a:solidFill>
-            <a:srgbClr val="161922"/>
-          </a:solidFill>
-          <a:ln w="16510">
-            <a:solidFill>
-              <a:srgbClr val="2E3445"/>
-            </a:solidFill>
-          </a:ln>
-        </p:spPr>
-        <p:style>
-          <a:lnRef idx="1">
-            <a:schemeClr val="accent1"/>
-          </a:lnRef>
-          <a:fillRef idx="3">
-            <a:schemeClr val="accent1"/>
-          </a:fillRef>
-          <a:effectRef idx="2">
-            <a:schemeClr val="accent1"/>
-          </a:effectRef>
-          <a:fontRef idx="minor">
-            <a:schemeClr val="lt1"/>
-          </a:fontRef>
-        </p:style>
-        <p:txBody>
-          <a:bodyPr rtlCol="0" anchor="ctr"/>
-          <a:lstStyle/>
-          <a:p>
-            <a:pPr algn="ctr"/>
-          </a:p>
-        </p:txBody>
-      </p:sp>
-      <p:sp>
-        <p:nvSpPr>
-          <p:cNvPr id="10" name="TextBox 9"/>
-          <p:cNvSpPr txBox="1"/>
-          <p:nvPr/>
-        </p:nvSpPr>
-        <p:spPr>
-          <a:xfrm>
-            <a:off x="6449263" y="1490472"/>
-            <a:ext cx="4809744" cy="4334255"/>
-          </a:xfrm>
-          <a:prstGeom prst="rect">
-            <a:avLst/>
-          </a:prstGeom>
-          <a:noFill/>
-        </p:spPr>
-        <p:txBody>
-          <a:bodyPr wrap="square" tIns="0" bIns="0" lIns="0" rIns="0">
-            <a:spAutoFit/>
-          </a:bodyPr>
-          <a:lstStyle/>
-          <a:p>
-            <a:pPr>
-              <a:spcAft>
-                <a:spcPts val="1000"/>
-              </a:spcAft>
-              <a:defRPr sz="1350" b="1">
-                <a:solidFill>
-                  <a:srgbClr val="3EA6FF"/>
-                </a:solidFill>
-              </a:defRPr>
-            </a:pPr>
-            <a:r>
-              <a:t>Technical Merit &amp; Demonstration Roadmap</a:t>
-            </a:r>
-          </a:p>
-          <a:p>
-            <a:pPr>
-              <a:spcAft>
-                <a:spcPts val="800"/>
-              </a:spcAft>
-            </a:pPr>
-            <a:r>
-              <a:rPr sz="1150" b="1">
-                <a:solidFill>
-                  <a:srgbClr val="FFFFFF"/>
-                </a:solidFill>
-              </a:rPr>
-              <a:t>• Key Engineering Highlight: </a:t>
-            </a:r>
-            <a:r>
-              <a:rPr sz="1150">
-                <a:solidFill>
-                  <a:srgbClr val="CDD2DC"/>
-                </a:solidFill>
-              </a:rPr>
-              <a:t>React 18 component composition + Context API eliminating full-tree re-renders.</a:t>
-            </a:r>
-          </a:p>
-          <a:p>
-            <a:pPr>
-              <a:spcAft>
-                <a:spcPts val="800"/>
-              </a:spcAft>
-            </a:pPr>
-            <a:r>
-              <a:rPr sz="1150" b="1">
-                <a:solidFill>
-                  <a:srgbClr val="FFFFFF"/>
-                </a:solidFill>
-              </a:rPr>
-              <a:t>• Live Demonstration Flow: </a:t>
-            </a:r>
-            <a:r>
-              <a:rPr sz="1150">
-                <a:solidFill>
-                  <a:srgbClr val="CDD2DC"/>
-                </a:solidFill>
-              </a:rPr>
-              <a:t>1) Home feed &amp; Infinite Scroll -&gt; 2) Voice Search &amp; Filter -&gt; 3) In-Site Watch Player &amp; Likes -&gt; 4) Protected Route Lock -&gt; 5) Settings Modal.</a:t>
-            </a:r>
-          </a:p>
-          <a:p>
-            <a:pPr>
-              <a:spcAft>
-                <a:spcPts val="800"/>
-              </a:spcAft>
-            </a:pPr>
-            <a:r>
-              <a:rPr sz="1150" b="1">
-                <a:solidFill>
-                  <a:srgbClr val="FFFFFF"/>
-                </a:solidFill>
-              </a:rPr>
-              <a:t>• Evaluation Status: </a:t>
-            </a:r>
-            <a:r>
-              <a:rPr sz="1150">
-                <a:solidFill>
-                  <a:srgbClr val="CDD2DC"/>
-                </a:solidFill>
-              </a:rPr>
-              <a:t>100% feature-complete, zero console errors, passing Vite production build in 1.16s.</a:t>
-            </a:r>
-          </a:p>
-        </p:txBody>
-      </p:sp>
-    </p:spTree>
-  </p:cSld>
-  <p:clrMapOvr>
-    <a:masterClrMapping/>
-  </p:clrMapOvr>
-  <p:transition spd="fast">
-    <p:push dir="l"/>
-  </p:transition>
-</p:sld>
-</file>
-
-<file path=ppt/slides/slide12.xml><?xml version="1.0" encoding="utf-8"?>
-<p:sld xmlns:a="http://schemas.openxmlformats.org/drawingml/2006/main" xmlns:p="http://schemas.openxmlformats.org/presentationml/2006/main" xmlns:r="http://schemas.openxmlformats.org/officeDocument/2006/relationships">
-  <p:cSld>
-    <p:spTree>
-      <p:nvGrpSpPr>
-        <p:cNvPr id="1" name=""/>
-        <p:cNvGrpSpPr/>
-        <p:nvPr/>
-      </p:nvGrpSpPr>
-      <p:grpSpPr/>
-      <p:sp>
-        <p:nvSpPr>
-          <p:cNvPr id="2" name="Rectangle 1"/>
-          <p:cNvSpPr/>
-          <p:nvPr/>
-        </p:nvSpPr>
-        <p:spPr>
-          <a:xfrm>
-            <a:off x="0" y="0"/>
-            <a:ext cx="12191695" cy="6858000"/>
-          </a:xfrm>
-          <a:prstGeom prst="rect">
-            <a:avLst/>
-          </a:prstGeom>
-          <a:solidFill>
-            <a:srgbClr val="0B0C10"/>
-          </a:solidFill>
-          <a:ln>
-            <a:noFill/>
-          </a:ln>
-        </p:spPr>
-        <p:style>
-          <a:lnRef idx="1">
-            <a:schemeClr val="accent1"/>
-          </a:lnRef>
-          <a:fillRef idx="3">
-            <a:schemeClr val="accent1"/>
-          </a:fillRef>
-          <a:effectRef idx="2">
-            <a:schemeClr val="accent1"/>
-          </a:effectRef>
-          <a:fontRef idx="minor">
-            <a:schemeClr val="lt1"/>
-          </a:fontRef>
-        </p:style>
-        <p:txBody>
-          <a:bodyPr rtlCol="0" anchor="ctr"/>
-          <a:lstStyle/>
-          <a:p>
-            <a:pPr algn="ctr"/>
-          </a:p>
-        </p:txBody>
-      </p:sp>
-      <p:sp>
-        <p:nvSpPr>
           <p:cNvPr id="3" name="Rounded Rectangle 2"/>
           <p:cNvSpPr/>
           <p:nvPr/>
@@ -7782,7 +7265,7 @@
       </p:sp>
       <p:pic>
         <p:nvPicPr>
-          <p:cNvPr id="8" name="Picture 7" descr="feat_watch_player.png"/>
+          <p:cNvPr id="8" name="Picture 7" descr="video_playing_live.png"/>
           <p:cNvPicPr>
             <a:picLocks noChangeAspect="1"/>
           </p:cNvPicPr>
@@ -7796,8 +7279,8 @@
         </p:blipFill>
         <p:spPr>
           <a:xfrm>
-            <a:off x="868680" y="1508760"/>
-            <a:ext cx="5029200" cy="3143250"/>
+            <a:off x="868680" y="2514600"/>
+            <a:ext cx="5029200" cy="2146250"/>
           </a:xfrm>
           <a:prstGeom prst="rect">
             <a:avLst/>
@@ -8261,7 +7744,7 @@
       </p:sp>
       <p:pic>
         <p:nvPicPr>
-          <p:cNvPr id="8" name="Picture 7" descr="ui_search_clean.png"/>
+          <p:cNvPr id="8" name="Picture 7" descr="speech_search_glowing.png"/>
           <p:cNvPicPr>
             <a:picLocks noChangeAspect="1"/>
           </p:cNvPicPr>
@@ -8275,8 +7758,8 @@
         </p:blipFill>
         <p:spPr>
           <a:xfrm>
-            <a:off x="868680" y="1508760"/>
-            <a:ext cx="5029200" cy="4701209"/>
+            <a:off x="868680" y="2606040"/>
+            <a:ext cx="5029200" cy="1866305"/>
           </a:xfrm>
           <a:prstGeom prst="rect">
             <a:avLst/>

--- a/G15-PID-17.pptx
+++ b/G15-PID-17.pptx
@@ -16,6 +16,7 @@
     <p:sldId id="264" r:id="rId15"/>
     <p:sldId id="265" r:id="rId16"/>
     <p:sldId id="266" r:id="rId17"/>
+    <p:sldId id="267" r:id="rId18"/>
   </p:sldIdLst>
   <p:sldSz cx="12191695" cy="6858000" type="screen4x3"/>
   <p:notesSz cx="6858000" cy="9144000"/>
@@ -3633,7 +3634,7 @@
               </a:defRPr>
             </a:pPr>
             <a:r>
-              <a:t>Multi-Device Responsive Design &amp; Modern UI/UX Layer</a:t>
+              <a:t>Modern UI/UX Architecture &amp; Visual Design Systems</a:t>
             </a:r>
           </a:p>
         </p:txBody>
@@ -3751,7 +3752,7 @@
               </a:defRPr>
             </a:pPr>
             <a:r>
-              <a:t>Viewport Adaptations &amp; Layout Hierarchy</a:t>
+              <a:t>Design Systems &amp; Token Architecture</a:t>
             </a:r>
           </a:p>
           <a:p>
@@ -3766,7 +3767,7 @@
                   <a:srgbClr val="FFFFFF"/>
                 </a:solidFill>
               </a:rPr>
-              <a:t>• Desktop (1440px+): </a:t>
+              <a:t>• Obsidian Dark Theme: </a:t>
             </a:r>
             <a:r>
               <a:rPr sz="1150">
@@ -3774,7 +3775,7 @@
                   <a:srgbClr val="CDD2DC"/>
                 </a:solidFill>
               </a:rPr>
-              <a:t>Full widescreen layout with expanded 240px sidebar, 4-column video feed, and watch player with up-next rail.</a:t>
+              <a:t>Deep obsidian canvas (#0B0C10) paired with frosted slate cards (#161922) and high-contrast borders (#2E3445).</a:t>
             </a:r>
           </a:p>
           <a:p>
@@ -3789,7 +3790,7 @@
                   <a:srgbClr val="FFFFFF"/>
                 </a:solidFill>
               </a:rPr>
-              <a:t>• Tablet / iPad Mini (1024px &amp; 768px): </a:t>
+              <a:t>• Dynamic CSS Variables: </a:t>
             </a:r>
             <a:r>
               <a:rPr sz="1150">
@@ -3797,7 +3798,7 @@
                   <a:srgbClr val="CDD2DC"/>
                 </a:solidFill>
               </a:rPr>
-              <a:t>Compact collapsed mini-rail sidebar with 2-3 column responsive video card grid.</a:t>
+              <a:t>Centralized theme design tokens in index.css allow instantaneous toggle between Dark and Light mode themes.</a:t>
             </a:r>
           </a:p>
           <a:p>
@@ -3812,7 +3813,7 @@
                   <a:srgbClr val="FFFFFF"/>
                 </a:solidFill>
               </a:rPr>
-              <a:t>• Mobile (375px - 480px): </a:t>
+              <a:t>• YouTube Typography &amp; Scale: </a:t>
             </a:r>
             <a:r>
               <a:rPr sz="1150">
@@ -3820,7 +3821,30 @@
                   <a:srgbClr val="CDD2DC"/>
                 </a:solidFill>
               </a:rPr>
-              <a:t>Single-column video stream with bottom drawer navigation and touch-optimized action targets.</a:t>
+              <a:t>Strict typography scaling with bold headings, muted metadata, and official YouTube iconography.</a:t>
+            </a:r>
+          </a:p>
+          <a:p>
+            <a:pPr>
+              <a:spcAft>
+                <a:spcPts val="800"/>
+              </a:spcAft>
+            </a:pPr>
+            <a:r>
+              <a:rPr sz="1150" b="1">
+                <a:solidFill>
+                  <a:srgbClr val="FFFFFF"/>
+                </a:solidFill>
+              </a:rPr>
+              <a:t>• Category Pill Badges: </a:t>
+            </a:r>
+            <a:r>
+              <a:rPr sz="1150">
+                <a:solidFill>
+                  <a:srgbClr val="CDD2DC"/>
+                </a:solidFill>
+              </a:rPr>
+              <a:t>High-contrast pill filters with smooth horizontal scroll and active state indicators.</a:t>
             </a:r>
           </a:p>
         </p:txBody>
@@ -3903,7 +3927,7 @@
               </a:defRPr>
             </a:pPr>
             <a:r>
-              <a:t>Design Systems &amp; Visual Feedback</a:t>
+              <a:t>Micro-Interactions &amp; Modal Feedback</a:t>
             </a:r>
           </a:p>
           <a:p>
@@ -3918,7 +3942,7 @@
                   <a:srgbClr val="FFFFFF"/>
                 </a:solidFill>
               </a:rPr>
-              <a:t>• Tailwind Fluid Breakpoints: </a:t>
+              <a:t>• Glassmorphic Modals: </a:t>
             </a:r>
             <a:r>
               <a:rPr sz="1150">
@@ -3926,7 +3950,7 @@
                   <a:srgbClr val="CDD2DC"/>
                 </a:solidFill>
               </a:rPr>
-              <a:t>Standardized responsive classes (sm, md, lg, xl) ensuring zero horizontal scrollbars.</a:t>
+              <a:t>High-z-index overlays with backdrop-filter: blur(8px) for Auth and Settings modals.</a:t>
             </a:r>
           </a:p>
           <a:p>
@@ -3941,7 +3965,7 @@
                   <a:srgbClr val="FFFFFF"/>
                 </a:solidFill>
               </a:rPr>
-              <a:t>• Glassmorphic Modals: </a:t>
+              <a:t>• Active Scale Physics: </a:t>
             </a:r>
             <a:r>
               <a:rPr sz="1150">
@@ -3949,7 +3973,7 @@
                   <a:srgbClr val="CDD2DC"/>
                 </a:solidFill>
               </a:rPr>
-              <a:t>High-z-index overlays with backdrop-filter: blur(8px) for Auth and Settings modals.</a:t>
+              <a:t>Micro-interactions with active scale-down on click, hover elevations, and soundwave pulse feedback.</a:t>
             </a:r>
           </a:p>
           <a:p>
@@ -3964,7 +3988,7 @@
                   <a:srgbClr val="FFFFFF"/>
                 </a:solidFill>
               </a:rPr>
-              <a:t>• Micro-Interactions: </a:t>
+              <a:t>• Optimistic State Commits: </a:t>
             </a:r>
             <a:r>
               <a:rPr sz="1150">
@@ -3972,7 +3996,30 @@
                   <a:srgbClr val="CDD2DC"/>
                 </a:solidFill>
               </a:rPr>
-              <a:t>Active scale animations, soundwave mic pulse, and hover elevations across all interactive cards.</a:t>
+              <a:t>Instant UI reaction on Like and Watch Later toggles before asynchronous persistence.</a:t>
+            </a:r>
+          </a:p>
+          <a:p>
+            <a:pPr>
+              <a:spcAft>
+                <a:spcPts val="800"/>
+              </a:spcAft>
+            </a:pPr>
+            <a:r>
+              <a:rPr sz="1150" b="1">
+                <a:solidFill>
+                  <a:srgbClr val="FFFFFF"/>
+                </a:solidFill>
+              </a:rPr>
+              <a:t>• Accessible Form Controls: </a:t>
+            </a:r>
+            <a:r>
+              <a:rPr sz="1150">
+                <a:solidFill>
+                  <a:srgbClr val="CDD2DC"/>
+                </a:solidFill>
+              </a:rPr>
+              <a:t>High-visibility focus rings, inline password visibility toggles, and screen-reader compliant aria tags.</a:t>
             </a:r>
           </a:p>
         </p:txBody>
@@ -3989,6 +4036,508 @@
 </file>
 
 <file path=ppt/slides/slide11.xml><?xml version="1.0" encoding="utf-8"?>
+<p:sld xmlns:a="http://schemas.openxmlformats.org/drawingml/2006/main" xmlns:p="http://schemas.openxmlformats.org/presentationml/2006/main" xmlns:r="http://schemas.openxmlformats.org/officeDocument/2006/relationships">
+  <p:cSld>
+    <p:spTree>
+      <p:nvGrpSpPr>
+        <p:cNvPr id="1" name=""/>
+        <p:cNvGrpSpPr/>
+        <p:nvPr/>
+      </p:nvGrpSpPr>
+      <p:grpSpPr/>
+      <p:sp>
+        <p:nvSpPr>
+          <p:cNvPr id="2" name="Rectangle 1"/>
+          <p:cNvSpPr/>
+          <p:nvPr/>
+        </p:nvSpPr>
+        <p:spPr>
+          <a:xfrm>
+            <a:off x="0" y="0"/>
+            <a:ext cx="12191695" cy="6858000"/>
+          </a:xfrm>
+          <a:prstGeom prst="rect">
+            <a:avLst/>
+          </a:prstGeom>
+          <a:solidFill>
+            <a:srgbClr val="0B0C10"/>
+          </a:solidFill>
+          <a:ln>
+            <a:noFill/>
+          </a:ln>
+        </p:spPr>
+        <p:style>
+          <a:lnRef idx="1">
+            <a:schemeClr val="accent1"/>
+          </a:lnRef>
+          <a:fillRef idx="3">
+            <a:schemeClr val="accent1"/>
+          </a:fillRef>
+          <a:effectRef idx="2">
+            <a:schemeClr val="accent1"/>
+          </a:effectRef>
+          <a:fontRef idx="minor">
+            <a:schemeClr val="lt1"/>
+          </a:fontRef>
+        </p:style>
+        <p:txBody>
+          <a:bodyPr rtlCol="0" anchor="ctr"/>
+          <a:lstStyle/>
+          <a:p>
+            <a:pPr algn="ctr"/>
+          </a:p>
+        </p:txBody>
+      </p:sp>
+      <p:sp>
+        <p:nvSpPr>
+          <p:cNvPr id="3" name="Rectangle 2"/>
+          <p:cNvSpPr/>
+          <p:nvPr/>
+        </p:nvSpPr>
+        <p:spPr>
+          <a:xfrm>
+            <a:off x="731520" y="365760"/>
+            <a:ext cx="365760" cy="54864"/>
+          </a:xfrm>
+          <a:prstGeom prst="rect">
+            <a:avLst/>
+          </a:prstGeom>
+          <a:solidFill>
+            <a:srgbClr val="FF0033"/>
+          </a:solidFill>
+          <a:ln>
+            <a:noFill/>
+          </a:ln>
+        </p:spPr>
+        <p:style>
+          <a:lnRef idx="1">
+            <a:schemeClr val="accent1"/>
+          </a:lnRef>
+          <a:fillRef idx="3">
+            <a:schemeClr val="accent1"/>
+          </a:fillRef>
+          <a:effectRef idx="2">
+            <a:schemeClr val="accent1"/>
+          </a:effectRef>
+          <a:fontRef idx="minor">
+            <a:schemeClr val="lt1"/>
+          </a:fontRef>
+        </p:style>
+        <p:txBody>
+          <a:bodyPr rtlCol="0" anchor="ctr"/>
+          <a:lstStyle/>
+          <a:p>
+            <a:pPr algn="ctr"/>
+          </a:p>
+        </p:txBody>
+      </p:sp>
+      <p:sp>
+        <p:nvSpPr>
+          <p:cNvPr id="4" name="TextBox 3"/>
+          <p:cNvSpPr txBox="1"/>
+          <p:nvPr/>
+        </p:nvSpPr>
+        <p:spPr>
+          <a:xfrm>
+            <a:off x="1188720" y="292608"/>
+            <a:ext cx="10241280" cy="274320"/>
+          </a:xfrm>
+          <a:prstGeom prst="rect">
+            <a:avLst/>
+          </a:prstGeom>
+          <a:noFill/>
+        </p:spPr>
+        <p:txBody>
+          <a:bodyPr wrap="none">
+            <a:spAutoFit/>
+          </a:bodyPr>
+          <a:lstStyle/>
+          <a:p>
+            <a:pPr>
+              <a:defRPr sz="1150" b="1">
+                <a:solidFill>
+                  <a:srgbClr val="3EA6FF"/>
+                </a:solidFill>
+              </a:defRPr>
+            </a:pPr>
+            <a:r>
+              <a:t>GROUP G15  •  PROJECT ID: G15-PID-17 (P-17)  •  EVALUATION-II (PHASE 2)</a:t>
+            </a:r>
+          </a:p>
+        </p:txBody>
+      </p:sp>
+      <p:sp>
+        <p:nvSpPr>
+          <p:cNvPr id="5" name="TextBox 4"/>
+          <p:cNvSpPr txBox="1"/>
+          <p:nvPr/>
+        </p:nvSpPr>
+        <p:spPr>
+          <a:xfrm>
+            <a:off x="731520" y="621792"/>
+            <a:ext cx="10728655" cy="594360"/>
+          </a:xfrm>
+          <a:prstGeom prst="rect">
+            <a:avLst/>
+          </a:prstGeom>
+          <a:noFill/>
+        </p:spPr>
+        <p:txBody>
+          <a:bodyPr wrap="square">
+            <a:spAutoFit/>
+          </a:bodyPr>
+          <a:lstStyle/>
+          <a:p>
+            <a:pPr>
+              <a:defRPr sz="2300" b="1">
+                <a:solidFill>
+                  <a:srgbClr val="FFFFFF"/>
+                </a:solidFill>
+              </a:defRPr>
+            </a:pPr>
+            <a:r>
+              <a:t>Multi-Device Responsive Design &amp; Viewport Audit</a:t>
+            </a:r>
+          </a:p>
+        </p:txBody>
+      </p:sp>
+      <p:sp>
+        <p:nvSpPr>
+          <p:cNvPr id="6" name="TextBox 5"/>
+          <p:cNvSpPr txBox="1"/>
+          <p:nvPr/>
+        </p:nvSpPr>
+        <p:spPr>
+          <a:xfrm>
+            <a:off x="731520" y="6327648"/>
+            <a:ext cx="10728655" cy="274320"/>
+          </a:xfrm>
+          <a:prstGeom prst="rect">
+            <a:avLst/>
+          </a:prstGeom>
+          <a:noFill/>
+        </p:spPr>
+        <p:txBody>
+          <a:bodyPr wrap="none">
+            <a:spAutoFit/>
+          </a:bodyPr>
+          <a:lstStyle/>
+          <a:p>
+            <a:pPr>
+              <a:defRPr sz="1000">
+                <a:solidFill>
+                  <a:srgbClr val="8C94A5"/>
+                </a:solidFill>
+              </a:defRPr>
+            </a:pPr>
+            <a:r>
+              <a:t>PheW TuBe: Video Streaming Platform (G15-PID-17)  |  Chitkara University FEE-II  |  Page 11</a:t>
+            </a:r>
+          </a:p>
+        </p:txBody>
+      </p:sp>
+      <p:sp>
+        <p:nvSpPr>
+          <p:cNvPr id="7" name="Rounded Rectangle 6"/>
+          <p:cNvSpPr/>
+          <p:nvPr/>
+        </p:nvSpPr>
+        <p:spPr>
+          <a:xfrm>
+            <a:off x="731520" y="1325880"/>
+            <a:ext cx="5303520" cy="4663440"/>
+          </a:xfrm>
+          <a:prstGeom prst="roundRect">
+            <a:avLst/>
+          </a:prstGeom>
+          <a:solidFill>
+            <a:srgbClr val="161922"/>
+          </a:solidFill>
+          <a:ln w="16510">
+            <a:solidFill>
+              <a:srgbClr val="2E3445"/>
+            </a:solidFill>
+          </a:ln>
+        </p:spPr>
+        <p:style>
+          <a:lnRef idx="1">
+            <a:schemeClr val="accent1"/>
+          </a:lnRef>
+          <a:fillRef idx="3">
+            <a:schemeClr val="accent1"/>
+          </a:fillRef>
+          <a:effectRef idx="2">
+            <a:schemeClr val="accent1"/>
+          </a:effectRef>
+          <a:fontRef idx="minor">
+            <a:schemeClr val="lt1"/>
+          </a:fontRef>
+        </p:style>
+        <p:txBody>
+          <a:bodyPr rtlCol="0" anchor="ctr"/>
+          <a:lstStyle/>
+          <a:p>
+            <a:pPr algn="ctr"/>
+          </a:p>
+        </p:txBody>
+      </p:sp>
+      <p:pic>
+        <p:nvPicPr>
+          <p:cNvPr id="8" name="Picture 7" descr="responsive_ipad.png"/>
+          <p:cNvPicPr>
+            <a:picLocks noChangeAspect="1"/>
+          </p:cNvPicPr>
+          <p:nvPr/>
+        </p:nvPicPr>
+        <p:blipFill>
+          <a:blip r:embed="rId2"/>
+          <a:stretch>
+            <a:fillRect/>
+          </a:stretch>
+        </p:blipFill>
+        <p:spPr>
+          <a:xfrm>
+            <a:off x="932688" y="1508760"/>
+            <a:ext cx="4895115" cy="4297680"/>
+          </a:xfrm>
+          <a:prstGeom prst="rect">
+            <a:avLst/>
+          </a:prstGeom>
+        </p:spPr>
+      </p:pic>
+      <p:sp>
+        <p:nvSpPr>
+          <p:cNvPr id="9" name="Rounded Rectangle 8"/>
+          <p:cNvSpPr/>
+          <p:nvPr/>
+        </p:nvSpPr>
+        <p:spPr>
+          <a:xfrm>
+            <a:off x="6248095" y="1325880"/>
+            <a:ext cx="5212080" cy="4663440"/>
+          </a:xfrm>
+          <a:prstGeom prst="roundRect">
+            <a:avLst/>
+          </a:prstGeom>
+          <a:solidFill>
+            <a:srgbClr val="161922"/>
+          </a:solidFill>
+          <a:ln w="16510">
+            <a:solidFill>
+              <a:srgbClr val="2E3445"/>
+            </a:solidFill>
+          </a:ln>
+        </p:spPr>
+        <p:style>
+          <a:lnRef idx="1">
+            <a:schemeClr val="accent1"/>
+          </a:lnRef>
+          <a:fillRef idx="3">
+            <a:schemeClr val="accent1"/>
+          </a:fillRef>
+          <a:effectRef idx="2">
+            <a:schemeClr val="accent1"/>
+          </a:effectRef>
+          <a:fontRef idx="minor">
+            <a:schemeClr val="lt1"/>
+          </a:fontRef>
+        </p:style>
+        <p:txBody>
+          <a:bodyPr rtlCol="0" anchor="ctr"/>
+          <a:lstStyle/>
+          <a:p>
+            <a:pPr algn="ctr"/>
+          </a:p>
+        </p:txBody>
+      </p:sp>
+      <p:sp>
+        <p:nvSpPr>
+          <p:cNvPr id="10" name="TextBox 9"/>
+          <p:cNvSpPr txBox="1"/>
+          <p:nvPr/>
+        </p:nvSpPr>
+        <p:spPr>
+          <a:xfrm>
+            <a:off x="6449263" y="1490472"/>
+            <a:ext cx="4809744" cy="4334255"/>
+          </a:xfrm>
+          <a:prstGeom prst="rect">
+            <a:avLst/>
+          </a:prstGeom>
+          <a:noFill/>
+        </p:spPr>
+        <p:txBody>
+          <a:bodyPr wrap="square" tIns="0" bIns="0" lIns="0" rIns="0">
+            <a:spAutoFit/>
+          </a:bodyPr>
+          <a:lstStyle/>
+          <a:p>
+            <a:pPr>
+              <a:spcAft>
+                <a:spcPts val="1000"/>
+              </a:spcAft>
+              <a:defRPr sz="1250" b="1">
+                <a:solidFill>
+                  <a:srgbClr val="3EA6FF"/>
+                </a:solidFill>
+              </a:defRPr>
+            </a:pPr>
+            <a:r>
+              <a:t>Responsive Viewport Adaptations</a:t>
+            </a:r>
+          </a:p>
+          <a:p>
+            <a:pPr>
+              <a:spcAft>
+                <a:spcPts val="800"/>
+              </a:spcAft>
+            </a:pPr>
+            <a:r>
+              <a:rPr sz="1050" b="1">
+                <a:solidFill>
+                  <a:srgbClr val="FFFFFF"/>
+                </a:solidFill>
+              </a:rPr>
+              <a:t>• Tablet / iPad Pro (1032 x 1376px): </a:t>
+            </a:r>
+            <a:r>
+              <a:rPr sz="1050">
+                <a:solidFill>
+                  <a:srgbClr val="CDD2DC"/>
+                </a:solidFill>
+              </a:rPr>
+              <a:t>Fluid 2-column video card grid dynamically adapting from desktop 4-column feed with zero clipping.</a:t>
+            </a:r>
+          </a:p>
+          <a:p>
+            <a:pPr>
+              <a:spcAft>
+                <a:spcPts val="800"/>
+              </a:spcAft>
+            </a:pPr>
+            <a:r>
+              <a:rPr sz="1050" b="1">
+                <a:solidFill>
+                  <a:srgbClr val="FFFFFF"/>
+                </a:solidFill>
+              </a:rPr>
+              <a:t>• Collapsed Mini-Rail Sidebar: </a:t>
+            </a:r>
+            <a:r>
+              <a:rPr sz="1050">
+                <a:solidFill>
+                  <a:srgbClr val="CDD2DC"/>
+                </a:solidFill>
+              </a:rPr>
+              <a:t>Maximizes content viewport area on tablet devices by shrinking 240px sidebar into compact icon rail.</a:t>
+            </a:r>
+          </a:p>
+          <a:p>
+            <a:pPr>
+              <a:spcAft>
+                <a:spcPts val="800"/>
+              </a:spcAft>
+            </a:pPr>
+            <a:r>
+              <a:rPr sz="1050" b="1">
+                <a:solidFill>
+                  <a:srgbClr val="FFFFFF"/>
+                </a:solidFill>
+              </a:rPr>
+              <a:t>• Desktop Viewport (1440px+): </a:t>
+            </a:r>
+            <a:r>
+              <a:rPr sz="1050">
+                <a:solidFill>
+                  <a:srgbClr val="CDD2DC"/>
+                </a:solidFill>
+              </a:rPr>
+              <a:t>Expansive widescreen layout with full drawer sidebar, 4-column grid, and dedicated Up-Next rail.</a:t>
+            </a:r>
+          </a:p>
+          <a:p>
+            <a:pPr>
+              <a:spcAft>
+                <a:spcPts val="800"/>
+              </a:spcAft>
+            </a:pPr>
+            <a:r>
+              <a:rPr sz="1050" b="1">
+                <a:solidFill>
+                  <a:srgbClr val="FFFFFF"/>
+                </a:solidFill>
+              </a:rPr>
+              <a:t>• Mobile Viewport (375px - 480px): </a:t>
+            </a:r>
+            <a:r>
+              <a:rPr sz="1050">
+                <a:solidFill>
+                  <a:srgbClr val="CDD2DC"/>
+                </a:solidFill>
+              </a:rPr>
+              <a:t>Single-column video stream with bottom drawer navigation and touch-optimized controls.</a:t>
+            </a:r>
+          </a:p>
+          <a:p>
+            <a:pPr>
+              <a:spcAft>
+                <a:spcPts val="800"/>
+              </a:spcAft>
+            </a:pPr>
+            <a:r>
+              <a:rPr sz="1050" b="1">
+                <a:solidFill>
+                  <a:srgbClr val="FFFFFF"/>
+                </a:solidFill>
+              </a:rPr>
+              <a:t>• Tailwind Breakpoint Matrix: </a:t>
+            </a:r>
+            <a:r>
+              <a:rPr sz="1050">
+                <a:solidFill>
+                  <a:srgbClr val="CDD2DC"/>
+                </a:solidFill>
+              </a:rPr>
+              <a:t>Uses strict responsive utility classes (sm, md, lg, xl, 2xl) eliminating horizontal scrollbars.</a:t>
+            </a:r>
+          </a:p>
+          <a:p>
+            <a:pPr>
+              <a:spcAft>
+                <a:spcPts val="800"/>
+              </a:spcAft>
+            </a:pPr>
+            <a:r>
+              <a:rPr sz="1050" b="1">
+                <a:solidFill>
+                  <a:srgbClr val="FFFFFF"/>
+                </a:solidFill>
+              </a:rPr>
+              <a:t>• DevTools Emulation Audit: </a:t>
+            </a:r>
+            <a:r>
+              <a:rPr sz="1050">
+                <a:solidFill>
+                  <a:srgbClr val="CDD2DC"/>
+                </a:solidFill>
+              </a:rPr>
+              <a:t>Verified and tested across iPad Pro, iPad Mini, and iPhone viewports via Chrome DevTools.</a:t>
+            </a:r>
+          </a:p>
+        </p:txBody>
+      </p:sp>
+    </p:spTree>
+  </p:cSld>
+  <p:clrMapOvr>
+    <a:masterClrMapping/>
+  </p:clrMapOvr>
+  <p:transition spd="fast">
+    <p:push dir="l"/>
+  </p:transition>
+</p:sld>
+</file>
+
+<file path=ppt/slides/slide12.xml><?xml version="1.0" encoding="utf-8"?>
 <p:sld xmlns:a="http://schemas.openxmlformats.org/drawingml/2006/main" xmlns:p="http://schemas.openxmlformats.org/presentationml/2006/main" xmlns:r="http://schemas.openxmlformats.org/officeDocument/2006/relationships">
   <p:cSld>
     <p:spTree>

--- a/G15-PID-17.pptx
+++ b/G15-PID-17.pptx
@@ -16,7 +16,6 @@
     <p:sldId id="264" r:id="rId15"/>
     <p:sldId id="265" r:id="rId16"/>
     <p:sldId id="266" r:id="rId17"/>
-    <p:sldId id="267" r:id="rId18"/>
   </p:sldIdLst>
   <p:sldSz cx="12191695" cy="6858000" type="screen4x3"/>
   <p:notesSz cx="6858000" cy="9144000"/>
@@ -3634,7 +3633,7 @@
               </a:defRPr>
             </a:pPr>
             <a:r>
-              <a:t>Modern UI/UX Architecture &amp; Visual Design Systems</a:t>
+              <a:t>Multi-Device Responsive Design &amp; Viewport Audit</a:t>
             </a:r>
           </a:p>
         </p:txBody>
@@ -3683,7 +3682,7 @@
         <p:spPr>
           <a:xfrm>
             <a:off x="731520" y="1325880"/>
-            <a:ext cx="5212080" cy="4663440"/>
+            <a:ext cx="5303520" cy="4663440"/>
           </a:xfrm>
           <a:prstGeom prst="roundRect">
             <a:avLst/>
@@ -3719,136 +3718,30 @@
           </a:p>
         </p:txBody>
       </p:sp>
-      <p:sp>
-        <p:nvSpPr>
-          <p:cNvPr id="8" name="TextBox 7"/>
-          <p:cNvSpPr txBox="1"/>
-          <p:nvPr/>
-        </p:nvSpPr>
-        <p:spPr>
-          <a:xfrm>
-            <a:off x="932688" y="1490472"/>
-            <a:ext cx="4809744" cy="4334255"/>
+      <p:pic>
+        <p:nvPicPr>
+          <p:cNvPr id="8" name="Picture 7" descr="responsive_ipad.png"/>
+          <p:cNvPicPr>
+            <a:picLocks noChangeAspect="1"/>
+          </p:cNvPicPr>
+          <p:nvPr/>
+        </p:nvPicPr>
+        <p:blipFill>
+          <a:blip r:embed="rId2"/>
+          <a:stretch>
+            <a:fillRect/>
+          </a:stretch>
+        </p:blipFill>
+        <p:spPr>
+          <a:xfrm>
+            <a:off x="932688" y="1508760"/>
+            <a:ext cx="4895115" cy="4297680"/>
           </a:xfrm>
           <a:prstGeom prst="rect">
             <a:avLst/>
           </a:prstGeom>
-          <a:noFill/>
-        </p:spPr>
-        <p:txBody>
-          <a:bodyPr wrap="square" tIns="0" bIns="0" lIns="0" rIns="0">
-            <a:spAutoFit/>
-          </a:bodyPr>
-          <a:lstStyle/>
-          <a:p>
-            <a:pPr>
-              <a:spcAft>
-                <a:spcPts val="1000"/>
-              </a:spcAft>
-              <a:defRPr sz="1350" b="1">
-                <a:solidFill>
-                  <a:srgbClr val="3EA6FF"/>
-                </a:solidFill>
-              </a:defRPr>
-            </a:pPr>
-            <a:r>
-              <a:t>Design Systems &amp; Token Architecture</a:t>
-            </a:r>
-          </a:p>
-          <a:p>
-            <a:pPr>
-              <a:spcAft>
-                <a:spcPts val="800"/>
-              </a:spcAft>
-            </a:pPr>
-            <a:r>
-              <a:rPr sz="1150" b="1">
-                <a:solidFill>
-                  <a:srgbClr val="FFFFFF"/>
-                </a:solidFill>
-              </a:rPr>
-              <a:t>• Obsidian Dark Theme: </a:t>
-            </a:r>
-            <a:r>
-              <a:rPr sz="1150">
-                <a:solidFill>
-                  <a:srgbClr val="CDD2DC"/>
-                </a:solidFill>
-              </a:rPr>
-              <a:t>Deep obsidian canvas (#0B0C10) paired with frosted slate cards (#161922) and high-contrast borders (#2E3445).</a:t>
-            </a:r>
-          </a:p>
-          <a:p>
-            <a:pPr>
-              <a:spcAft>
-                <a:spcPts val="800"/>
-              </a:spcAft>
-            </a:pPr>
-            <a:r>
-              <a:rPr sz="1150" b="1">
-                <a:solidFill>
-                  <a:srgbClr val="FFFFFF"/>
-                </a:solidFill>
-              </a:rPr>
-              <a:t>• Dynamic CSS Variables: </a:t>
-            </a:r>
-            <a:r>
-              <a:rPr sz="1150">
-                <a:solidFill>
-                  <a:srgbClr val="CDD2DC"/>
-                </a:solidFill>
-              </a:rPr>
-              <a:t>Centralized theme design tokens in index.css allow instantaneous toggle between Dark and Light mode themes.</a:t>
-            </a:r>
-          </a:p>
-          <a:p>
-            <a:pPr>
-              <a:spcAft>
-                <a:spcPts val="800"/>
-              </a:spcAft>
-            </a:pPr>
-            <a:r>
-              <a:rPr sz="1150" b="1">
-                <a:solidFill>
-                  <a:srgbClr val="FFFFFF"/>
-                </a:solidFill>
-              </a:rPr>
-              <a:t>• YouTube Typography &amp; Scale: </a:t>
-            </a:r>
-            <a:r>
-              <a:rPr sz="1150">
-                <a:solidFill>
-                  <a:srgbClr val="CDD2DC"/>
-                </a:solidFill>
-              </a:rPr>
-              <a:t>Strict typography scaling with bold headings, muted metadata, and official YouTube iconography.</a:t>
-            </a:r>
-          </a:p>
-          <a:p>
-            <a:pPr>
-              <a:spcAft>
-                <a:spcPts val="800"/>
-              </a:spcAft>
-            </a:pPr>
-            <a:r>
-              <a:rPr sz="1150" b="1">
-                <a:solidFill>
-                  <a:srgbClr val="FFFFFF"/>
-                </a:solidFill>
-              </a:rPr>
-              <a:t>• Category Pill Badges: </a:t>
-            </a:r>
-            <a:r>
-              <a:rPr sz="1150">
-                <a:solidFill>
-                  <a:srgbClr val="CDD2DC"/>
-                </a:solidFill>
-              </a:rPr>
-              <a:t>High-contrast pill filters with smooth horizontal scroll and active state indicators.</a:t>
-            </a:r>
-          </a:p>
-        </p:txBody>
-      </p:sp>
+        </p:spPr>
+      </p:pic>
       <p:sp>
         <p:nvSpPr>
           <p:cNvPr id="9" name="Rounded Rectangle 8"/>
@@ -3920,14 +3813,14 @@
               <a:spcAft>
                 <a:spcPts val="1000"/>
               </a:spcAft>
-              <a:defRPr sz="1350" b="1">
-                <a:solidFill>
-                  <a:srgbClr val="2BA640"/>
+              <a:defRPr sz="1250" b="1">
+                <a:solidFill>
+                  <a:srgbClr val="3EA6FF"/>
                 </a:solidFill>
               </a:defRPr>
             </a:pPr>
             <a:r>
-              <a:t>Micro-Interactions &amp; Modal Feedback</a:t>
+              <a:t>Responsive Viewport Adaptations</a:t>
             </a:r>
           </a:p>
           <a:p>
@@ -3937,20 +3830,20 @@
               </a:spcAft>
             </a:pPr>
             <a:r>
-              <a:rPr sz="1150" b="1">
+              <a:rPr sz="1050" b="1">
                 <a:solidFill>
                   <a:srgbClr val="FFFFFF"/>
                 </a:solidFill>
               </a:rPr>
-              <a:t>• Glassmorphic Modals: </a:t>
-            </a:r>
-            <a:r>
-              <a:rPr sz="1150">
+              <a:t>• Tablet / iPad Pro (1032 x 1376px): </a:t>
+            </a:r>
+            <a:r>
+              <a:rPr sz="1050">
                 <a:solidFill>
                   <a:srgbClr val="CDD2DC"/>
                 </a:solidFill>
               </a:rPr>
-              <a:t>High-z-index overlays with backdrop-filter: blur(8px) for Auth and Settings modals.</a:t>
+              <a:t>Fluid 2-column video card grid dynamically adapting from desktop 4-column feed with zero clipping.</a:t>
             </a:r>
           </a:p>
           <a:p>
@@ -3960,20 +3853,20 @@
               </a:spcAft>
             </a:pPr>
             <a:r>
-              <a:rPr sz="1150" b="1">
+              <a:rPr sz="1050" b="1">
                 <a:solidFill>
                   <a:srgbClr val="FFFFFF"/>
                 </a:solidFill>
               </a:rPr>
-              <a:t>• Active Scale Physics: </a:t>
-            </a:r>
-            <a:r>
-              <a:rPr sz="1150">
+              <a:t>• Collapsed Mini-Rail Sidebar: </a:t>
+            </a:r>
+            <a:r>
+              <a:rPr sz="1050">
                 <a:solidFill>
                   <a:srgbClr val="CDD2DC"/>
                 </a:solidFill>
               </a:rPr>
-              <a:t>Micro-interactions with active scale-down on click, hover elevations, and soundwave pulse feedback.</a:t>
+              <a:t>Maximizes content viewport area on tablet devices by shrinking 240px sidebar into compact icon rail.</a:t>
             </a:r>
           </a:p>
           <a:p>
@@ -3983,20 +3876,20 @@
               </a:spcAft>
             </a:pPr>
             <a:r>
-              <a:rPr sz="1150" b="1">
+              <a:rPr sz="1050" b="1">
                 <a:solidFill>
                   <a:srgbClr val="FFFFFF"/>
                 </a:solidFill>
               </a:rPr>
-              <a:t>• Optimistic State Commits: </a:t>
-            </a:r>
-            <a:r>
-              <a:rPr sz="1150">
+              <a:t>• Desktop Viewport (1440px+): </a:t>
+            </a:r>
+            <a:r>
+              <a:rPr sz="1050">
                 <a:solidFill>
                   <a:srgbClr val="CDD2DC"/>
                 </a:solidFill>
               </a:rPr>
-              <a:t>Instant UI reaction on Like and Watch Later toggles before asynchronous persistence.</a:t>
+              <a:t>Expansive widescreen layout with full drawer sidebar, 4-column grid, and dedicated Up-Next rail.</a:t>
             </a:r>
           </a:p>
           <a:p>
@@ -4006,20 +3899,66 @@
               </a:spcAft>
             </a:pPr>
             <a:r>
-              <a:rPr sz="1150" b="1">
+              <a:rPr sz="1050" b="1">
                 <a:solidFill>
                   <a:srgbClr val="FFFFFF"/>
                 </a:solidFill>
               </a:rPr>
-              <a:t>• Accessible Form Controls: </a:t>
-            </a:r>
-            <a:r>
-              <a:rPr sz="1150">
+              <a:t>• Mobile Viewport (375px - 480px): </a:t>
+            </a:r>
+            <a:r>
+              <a:rPr sz="1050">
                 <a:solidFill>
                   <a:srgbClr val="CDD2DC"/>
                 </a:solidFill>
               </a:rPr>
-              <a:t>High-visibility focus rings, inline password visibility toggles, and screen-reader compliant aria tags.</a:t>
+              <a:t>Single-column video stream with bottom drawer navigation and touch-optimized controls.</a:t>
+            </a:r>
+          </a:p>
+          <a:p>
+            <a:pPr>
+              <a:spcAft>
+                <a:spcPts val="800"/>
+              </a:spcAft>
+            </a:pPr>
+            <a:r>
+              <a:rPr sz="1050" b="1">
+                <a:solidFill>
+                  <a:srgbClr val="FFFFFF"/>
+                </a:solidFill>
+              </a:rPr>
+              <a:t>• Tailwind Breakpoint Matrix: </a:t>
+            </a:r>
+            <a:r>
+              <a:rPr sz="1050">
+                <a:solidFill>
+                  <a:srgbClr val="CDD2DC"/>
+                </a:solidFill>
+              </a:rPr>
+              <a:t>Uses strict responsive utility classes (sm, md, lg, xl, 2xl) eliminating horizontal scrollbars.</a:t>
+            </a:r>
+          </a:p>
+          <a:p>
+            <a:pPr>
+              <a:spcAft>
+                <a:spcPts val="800"/>
+              </a:spcAft>
+            </a:pPr>
+            <a:r>
+              <a:rPr sz="1050" b="1">
+                <a:solidFill>
+                  <a:srgbClr val="FFFFFF"/>
+                </a:solidFill>
+              </a:rPr>
+              <a:t>• DevTools Emulation Audit: </a:t>
+            </a:r>
+            <a:r>
+              <a:rPr sz="1050">
+                <a:solidFill>
+                  <a:srgbClr val="CDD2DC"/>
+                </a:solidFill>
+              </a:rPr>
+              <a:t>Verified and tested across iPad Pro, iPad Mini, and iPhone viewports via Chrome DevTools.</a:t>
             </a:r>
           </a:p>
         </p:txBody>
@@ -4036,508 +3975,6 @@
 </file>
 
 <file path=ppt/slides/slide11.xml><?xml version="1.0" encoding="utf-8"?>
-<p:sld xmlns:a="http://schemas.openxmlformats.org/drawingml/2006/main" xmlns:p="http://schemas.openxmlformats.org/presentationml/2006/main" xmlns:r="http://schemas.openxmlformats.org/officeDocument/2006/relationships">
-  <p:cSld>
-    <p:spTree>
-      <p:nvGrpSpPr>
-        <p:cNvPr id="1" name=""/>
-        <p:cNvGrpSpPr/>
-        <p:nvPr/>
-      </p:nvGrpSpPr>
-      <p:grpSpPr/>
-      <p:sp>
-        <p:nvSpPr>
-          <p:cNvPr id="2" name="Rectangle 1"/>
-          <p:cNvSpPr/>
-          <p:nvPr/>
-        </p:nvSpPr>
-        <p:spPr>
-          <a:xfrm>
-            <a:off x="0" y="0"/>
-            <a:ext cx="12191695" cy="6858000"/>
-          </a:xfrm>
-          <a:prstGeom prst="rect">
-            <a:avLst/>
-          </a:prstGeom>
-          <a:solidFill>
-            <a:srgbClr val="0B0C10"/>
-          </a:solidFill>
-          <a:ln>
-            <a:noFill/>
-          </a:ln>
-        </p:spPr>
-        <p:style>
-          <a:lnRef idx="1">
-            <a:schemeClr val="accent1"/>
-          </a:lnRef>
-          <a:fillRef idx="3">
-            <a:schemeClr val="accent1"/>
-          </a:fillRef>
-          <a:effectRef idx="2">
-            <a:schemeClr val="accent1"/>
-          </a:effectRef>
-          <a:fontRef idx="minor">
-            <a:schemeClr val="lt1"/>
-          </a:fontRef>
-        </p:style>
-        <p:txBody>
-          <a:bodyPr rtlCol="0" anchor="ctr"/>
-          <a:lstStyle/>
-          <a:p>
-            <a:pPr algn="ctr"/>
-          </a:p>
-        </p:txBody>
-      </p:sp>
-      <p:sp>
-        <p:nvSpPr>
-          <p:cNvPr id="3" name="Rectangle 2"/>
-          <p:cNvSpPr/>
-          <p:nvPr/>
-        </p:nvSpPr>
-        <p:spPr>
-          <a:xfrm>
-            <a:off x="731520" y="365760"/>
-            <a:ext cx="365760" cy="54864"/>
-          </a:xfrm>
-          <a:prstGeom prst="rect">
-            <a:avLst/>
-          </a:prstGeom>
-          <a:solidFill>
-            <a:srgbClr val="FF0033"/>
-          </a:solidFill>
-          <a:ln>
-            <a:noFill/>
-          </a:ln>
-        </p:spPr>
-        <p:style>
-          <a:lnRef idx="1">
-            <a:schemeClr val="accent1"/>
-          </a:lnRef>
-          <a:fillRef idx="3">
-            <a:schemeClr val="accent1"/>
-          </a:fillRef>
-          <a:effectRef idx="2">
-            <a:schemeClr val="accent1"/>
-          </a:effectRef>
-          <a:fontRef idx="minor">
-            <a:schemeClr val="lt1"/>
-          </a:fontRef>
-        </p:style>
-        <p:txBody>
-          <a:bodyPr rtlCol="0" anchor="ctr"/>
-          <a:lstStyle/>
-          <a:p>
-            <a:pPr algn="ctr"/>
-          </a:p>
-        </p:txBody>
-      </p:sp>
-      <p:sp>
-        <p:nvSpPr>
-          <p:cNvPr id="4" name="TextBox 3"/>
-          <p:cNvSpPr txBox="1"/>
-          <p:nvPr/>
-        </p:nvSpPr>
-        <p:spPr>
-          <a:xfrm>
-            <a:off x="1188720" y="292608"/>
-            <a:ext cx="10241280" cy="274320"/>
-          </a:xfrm>
-          <a:prstGeom prst="rect">
-            <a:avLst/>
-          </a:prstGeom>
-          <a:noFill/>
-        </p:spPr>
-        <p:txBody>
-          <a:bodyPr wrap="none">
-            <a:spAutoFit/>
-          </a:bodyPr>
-          <a:lstStyle/>
-          <a:p>
-            <a:pPr>
-              <a:defRPr sz="1150" b="1">
-                <a:solidFill>
-                  <a:srgbClr val="3EA6FF"/>
-                </a:solidFill>
-              </a:defRPr>
-            </a:pPr>
-            <a:r>
-              <a:t>GROUP G15  •  PROJECT ID: G15-PID-17 (P-17)  •  EVALUATION-II (PHASE 2)</a:t>
-            </a:r>
-          </a:p>
-        </p:txBody>
-      </p:sp>
-      <p:sp>
-        <p:nvSpPr>
-          <p:cNvPr id="5" name="TextBox 4"/>
-          <p:cNvSpPr txBox="1"/>
-          <p:nvPr/>
-        </p:nvSpPr>
-        <p:spPr>
-          <a:xfrm>
-            <a:off x="731520" y="621792"/>
-            <a:ext cx="10728655" cy="594360"/>
-          </a:xfrm>
-          <a:prstGeom prst="rect">
-            <a:avLst/>
-          </a:prstGeom>
-          <a:noFill/>
-        </p:spPr>
-        <p:txBody>
-          <a:bodyPr wrap="square">
-            <a:spAutoFit/>
-          </a:bodyPr>
-          <a:lstStyle/>
-          <a:p>
-            <a:pPr>
-              <a:defRPr sz="2300" b="1">
-                <a:solidFill>
-                  <a:srgbClr val="FFFFFF"/>
-                </a:solidFill>
-              </a:defRPr>
-            </a:pPr>
-            <a:r>
-              <a:t>Multi-Device Responsive Design &amp; Viewport Audit</a:t>
-            </a:r>
-          </a:p>
-        </p:txBody>
-      </p:sp>
-      <p:sp>
-        <p:nvSpPr>
-          <p:cNvPr id="6" name="TextBox 5"/>
-          <p:cNvSpPr txBox="1"/>
-          <p:nvPr/>
-        </p:nvSpPr>
-        <p:spPr>
-          <a:xfrm>
-            <a:off x="731520" y="6327648"/>
-            <a:ext cx="10728655" cy="274320"/>
-          </a:xfrm>
-          <a:prstGeom prst="rect">
-            <a:avLst/>
-          </a:prstGeom>
-          <a:noFill/>
-        </p:spPr>
-        <p:txBody>
-          <a:bodyPr wrap="none">
-            <a:spAutoFit/>
-          </a:bodyPr>
-          <a:lstStyle/>
-          <a:p>
-            <a:pPr>
-              <a:defRPr sz="1000">
-                <a:solidFill>
-                  <a:srgbClr val="8C94A5"/>
-                </a:solidFill>
-              </a:defRPr>
-            </a:pPr>
-            <a:r>
-              <a:t>PheW TuBe: Video Streaming Platform (G15-PID-17)  |  Chitkara University FEE-II  |  Page 11</a:t>
-            </a:r>
-          </a:p>
-        </p:txBody>
-      </p:sp>
-      <p:sp>
-        <p:nvSpPr>
-          <p:cNvPr id="7" name="Rounded Rectangle 6"/>
-          <p:cNvSpPr/>
-          <p:nvPr/>
-        </p:nvSpPr>
-        <p:spPr>
-          <a:xfrm>
-            <a:off x="731520" y="1325880"/>
-            <a:ext cx="5303520" cy="4663440"/>
-          </a:xfrm>
-          <a:prstGeom prst="roundRect">
-            <a:avLst/>
-          </a:prstGeom>
-          <a:solidFill>
-            <a:srgbClr val="161922"/>
-          </a:solidFill>
-          <a:ln w="16510">
-            <a:solidFill>
-              <a:srgbClr val="2E3445"/>
-            </a:solidFill>
-          </a:ln>
-        </p:spPr>
-        <p:style>
-          <a:lnRef idx="1">
-            <a:schemeClr val="accent1"/>
-          </a:lnRef>
-          <a:fillRef idx="3">
-            <a:schemeClr val="accent1"/>
-          </a:fillRef>
-          <a:effectRef idx="2">
-            <a:schemeClr val="accent1"/>
-          </a:effectRef>
-          <a:fontRef idx="minor">
-            <a:schemeClr val="lt1"/>
-          </a:fontRef>
-        </p:style>
-        <p:txBody>
-          <a:bodyPr rtlCol="0" anchor="ctr"/>
-          <a:lstStyle/>
-          <a:p>
-            <a:pPr algn="ctr"/>
-          </a:p>
-        </p:txBody>
-      </p:sp>
-      <p:pic>
-        <p:nvPicPr>
-          <p:cNvPr id="8" name="Picture 7" descr="responsive_ipad.png"/>
-          <p:cNvPicPr>
-            <a:picLocks noChangeAspect="1"/>
-          </p:cNvPicPr>
-          <p:nvPr/>
-        </p:nvPicPr>
-        <p:blipFill>
-          <a:blip r:embed="rId2"/>
-          <a:stretch>
-            <a:fillRect/>
-          </a:stretch>
-        </p:blipFill>
-        <p:spPr>
-          <a:xfrm>
-            <a:off x="932688" y="1508760"/>
-            <a:ext cx="4895115" cy="4297680"/>
-          </a:xfrm>
-          <a:prstGeom prst="rect">
-            <a:avLst/>
-          </a:prstGeom>
-        </p:spPr>
-      </p:pic>
-      <p:sp>
-        <p:nvSpPr>
-          <p:cNvPr id="9" name="Rounded Rectangle 8"/>
-          <p:cNvSpPr/>
-          <p:nvPr/>
-        </p:nvSpPr>
-        <p:spPr>
-          <a:xfrm>
-            <a:off x="6248095" y="1325880"/>
-            <a:ext cx="5212080" cy="4663440"/>
-          </a:xfrm>
-          <a:prstGeom prst="roundRect">
-            <a:avLst/>
-          </a:prstGeom>
-          <a:solidFill>
-            <a:srgbClr val="161922"/>
-          </a:solidFill>
-          <a:ln w="16510">
-            <a:solidFill>
-              <a:srgbClr val="2E3445"/>
-            </a:solidFill>
-          </a:ln>
-        </p:spPr>
-        <p:style>
-          <a:lnRef idx="1">
-            <a:schemeClr val="accent1"/>
-          </a:lnRef>
-          <a:fillRef idx="3">
-            <a:schemeClr val="accent1"/>
-          </a:fillRef>
-          <a:effectRef idx="2">
-            <a:schemeClr val="accent1"/>
-          </a:effectRef>
-          <a:fontRef idx="minor">
-            <a:schemeClr val="lt1"/>
-          </a:fontRef>
-        </p:style>
-        <p:txBody>
-          <a:bodyPr rtlCol="0" anchor="ctr"/>
-          <a:lstStyle/>
-          <a:p>
-            <a:pPr algn="ctr"/>
-          </a:p>
-        </p:txBody>
-      </p:sp>
-      <p:sp>
-        <p:nvSpPr>
-          <p:cNvPr id="10" name="TextBox 9"/>
-          <p:cNvSpPr txBox="1"/>
-          <p:nvPr/>
-        </p:nvSpPr>
-        <p:spPr>
-          <a:xfrm>
-            <a:off x="6449263" y="1490472"/>
-            <a:ext cx="4809744" cy="4334255"/>
-          </a:xfrm>
-          <a:prstGeom prst="rect">
-            <a:avLst/>
-          </a:prstGeom>
-          <a:noFill/>
-        </p:spPr>
-        <p:txBody>
-          <a:bodyPr wrap="square" tIns="0" bIns="0" lIns="0" rIns="0">
-            <a:spAutoFit/>
-          </a:bodyPr>
-          <a:lstStyle/>
-          <a:p>
-            <a:pPr>
-              <a:spcAft>
-                <a:spcPts val="1000"/>
-              </a:spcAft>
-              <a:defRPr sz="1250" b="1">
-                <a:solidFill>
-                  <a:srgbClr val="3EA6FF"/>
-                </a:solidFill>
-              </a:defRPr>
-            </a:pPr>
-            <a:r>
-              <a:t>Responsive Viewport Adaptations</a:t>
-            </a:r>
-          </a:p>
-          <a:p>
-            <a:pPr>
-              <a:spcAft>
-                <a:spcPts val="800"/>
-              </a:spcAft>
-            </a:pPr>
-            <a:r>
-              <a:rPr sz="1050" b="1">
-                <a:solidFill>
-                  <a:srgbClr val="FFFFFF"/>
-                </a:solidFill>
-              </a:rPr>
-              <a:t>• Tablet / iPad Pro (1032 x 1376px): </a:t>
-            </a:r>
-            <a:r>
-              <a:rPr sz="1050">
-                <a:solidFill>
-                  <a:srgbClr val="CDD2DC"/>
-                </a:solidFill>
-              </a:rPr>
-              <a:t>Fluid 2-column video card grid dynamically adapting from desktop 4-column feed with zero clipping.</a:t>
-            </a:r>
-          </a:p>
-          <a:p>
-            <a:pPr>
-              <a:spcAft>
-                <a:spcPts val="800"/>
-              </a:spcAft>
-            </a:pPr>
-            <a:r>
-              <a:rPr sz="1050" b="1">
-                <a:solidFill>
-                  <a:srgbClr val="FFFFFF"/>
-                </a:solidFill>
-              </a:rPr>
-              <a:t>• Collapsed Mini-Rail Sidebar: </a:t>
-            </a:r>
-            <a:r>
-              <a:rPr sz="1050">
-                <a:solidFill>
-                  <a:srgbClr val="CDD2DC"/>
-                </a:solidFill>
-              </a:rPr>
-              <a:t>Maximizes content viewport area on tablet devices by shrinking 240px sidebar into compact icon rail.</a:t>
-            </a:r>
-          </a:p>
-          <a:p>
-            <a:pPr>
-              <a:spcAft>
-                <a:spcPts val="800"/>
-              </a:spcAft>
-            </a:pPr>
-            <a:r>
-              <a:rPr sz="1050" b="1">
-                <a:solidFill>
-                  <a:srgbClr val="FFFFFF"/>
-                </a:solidFill>
-              </a:rPr>
-              <a:t>• Desktop Viewport (1440px+): </a:t>
-            </a:r>
-            <a:r>
-              <a:rPr sz="1050">
-                <a:solidFill>
-                  <a:srgbClr val="CDD2DC"/>
-                </a:solidFill>
-              </a:rPr>
-              <a:t>Expansive widescreen layout with full drawer sidebar, 4-column grid, and dedicated Up-Next rail.</a:t>
-            </a:r>
-          </a:p>
-          <a:p>
-            <a:pPr>
-              <a:spcAft>
-                <a:spcPts val="800"/>
-              </a:spcAft>
-            </a:pPr>
-            <a:r>
-              <a:rPr sz="1050" b="1">
-                <a:solidFill>
-                  <a:srgbClr val="FFFFFF"/>
-                </a:solidFill>
-              </a:rPr>
-              <a:t>• Mobile Viewport (375px - 480px): </a:t>
-            </a:r>
-            <a:r>
-              <a:rPr sz="1050">
-                <a:solidFill>
-                  <a:srgbClr val="CDD2DC"/>
-                </a:solidFill>
-              </a:rPr>
-              <a:t>Single-column video stream with bottom drawer navigation and touch-optimized controls.</a:t>
-            </a:r>
-          </a:p>
-          <a:p>
-            <a:pPr>
-              <a:spcAft>
-                <a:spcPts val="800"/>
-              </a:spcAft>
-            </a:pPr>
-            <a:r>
-              <a:rPr sz="1050" b="1">
-                <a:solidFill>
-                  <a:srgbClr val="FFFFFF"/>
-                </a:solidFill>
-              </a:rPr>
-              <a:t>• Tailwind Breakpoint Matrix: </a:t>
-            </a:r>
-            <a:r>
-              <a:rPr sz="1050">
-                <a:solidFill>
-                  <a:srgbClr val="CDD2DC"/>
-                </a:solidFill>
-              </a:rPr>
-              <a:t>Uses strict responsive utility classes (sm, md, lg, xl, 2xl) eliminating horizontal scrollbars.</a:t>
-            </a:r>
-          </a:p>
-          <a:p>
-            <a:pPr>
-              <a:spcAft>
-                <a:spcPts val="800"/>
-              </a:spcAft>
-            </a:pPr>
-            <a:r>
-              <a:rPr sz="1050" b="1">
-                <a:solidFill>
-                  <a:srgbClr val="FFFFFF"/>
-                </a:solidFill>
-              </a:rPr>
-              <a:t>• DevTools Emulation Audit: </a:t>
-            </a:r>
-            <a:r>
-              <a:rPr sz="1050">
-                <a:solidFill>
-                  <a:srgbClr val="CDD2DC"/>
-                </a:solidFill>
-              </a:rPr>
-              <a:t>Verified and tested across iPad Pro, iPad Mini, and iPhone viewports via Chrome DevTools.</a:t>
-            </a:r>
-          </a:p>
-        </p:txBody>
-      </p:sp>
-    </p:spTree>
-  </p:cSld>
-  <p:clrMapOvr>
-    <a:masterClrMapping/>
-  </p:clrMapOvr>
-  <p:transition spd="fast">
-    <p:push dir="l"/>
-  </p:transition>
-</p:sld>
-</file>
-
-<file path=ppt/slides/slide12.xml><?xml version="1.0" encoding="utf-8"?>
 <p:sld xmlns:a="http://schemas.openxmlformats.org/drawingml/2006/main" xmlns:p="http://schemas.openxmlformats.org/presentationml/2006/main" xmlns:r="http://schemas.openxmlformats.org/officeDocument/2006/relationships">
   <p:cSld>
     <p:spTree>

--- a/G15-PID-17.pptx
+++ b/G15-PID-17.pptx
@@ -5,19 +5,19 @@
     <p:sldMasterId id="2147483648" r:id="rId1"/>
   </p:sldMasterIdLst>
   <p:sldIdLst>
-    <p:sldId id="256" r:id="rId7"/>
-    <p:sldId id="257" r:id="rId8"/>
-    <p:sldId id="258" r:id="rId9"/>
-    <p:sldId id="259" r:id="rId10"/>
-    <p:sldId id="260" r:id="rId11"/>
-    <p:sldId id="261" r:id="rId12"/>
-    <p:sldId id="262" r:id="rId13"/>
-    <p:sldId id="263" r:id="rId14"/>
-    <p:sldId id="264" r:id="rId15"/>
-    <p:sldId id="265" r:id="rId16"/>
-    <p:sldId id="266" r:id="rId17"/>
+    <p:sldId id="256" r:id="rId2"/>
+    <p:sldId id="257" r:id="rId3"/>
+    <p:sldId id="258" r:id="rId4"/>
+    <p:sldId id="259" r:id="rId5"/>
+    <p:sldId id="260" r:id="rId6"/>
+    <p:sldId id="261" r:id="rId7"/>
+    <p:sldId id="262" r:id="rId8"/>
+    <p:sldId id="263" r:id="rId9"/>
+    <p:sldId id="264" r:id="rId10"/>
+    <p:sldId id="265" r:id="rId11"/>
+    <p:sldId id="266" r:id="rId12"/>
   </p:sldIdLst>
-  <p:sldSz cx="12191695" cy="6858000" type="screen4x3"/>
+  <p:sldSz cx="12192000" cy="6858000"/>
   <p:notesSz cx="6858000" cy="9144000"/>
   <p:defaultTextStyle>
     <a:defPPr>
@@ -114,6 +114,22 @@
       </a:defRPr>
     </a:lvl9pPr>
   </p:defaultTextStyle>
+  <p:extLst>
+    <p:ext uri="{EFAFB233-063F-42B5-8137-9DF3F51BA10A}">
+      <p15:sldGuideLst xmlns:p15="http://schemas.microsoft.com/office/powerpoint/2012/main">
+        <p15:guide id="1" orient="horz" pos="2160">
+          <p15:clr>
+            <a:srgbClr val="A4A3A4"/>
+          </p15:clr>
+        </p15:guide>
+        <p15:guide id="2" pos="2880">
+          <p15:clr>
+            <a:srgbClr val="A4A3A4"/>
+          </p15:clr>
+        </p15:guide>
+      </p15:sldGuideLst>
+    </p:ext>
+  </p:extLst>
 </p:presentation>
 </file>
 
@@ -155,10 +171,9 @@
           <a:lstStyle/>
           <a:p>
             <a:r>
-              <a:rPr lang="en-US" smtClean="0"/>
+              <a:rPr lang="en-US"/>
               <a:t>Click to edit Master title style</a:t>
             </a:r>
-            <a:endParaRPr lang="en-US"/>
           </a:p>
         </p:txBody>
       </p:sp>
@@ -274,10 +289,9 @@
           </a:lstStyle>
           <a:p>
             <a:r>
-              <a:rPr lang="en-US" smtClean="0"/>
+              <a:rPr lang="en-US"/>
               <a:t>Click to edit Master subtitle style</a:t>
             </a:r>
-            <a:endParaRPr lang="en-US"/>
           </a:p>
         </p:txBody>
       </p:sp>
@@ -298,7 +312,7 @@
           <a:p>
             <a:fld id="{5BCAD085-E8A6-8845-BD4E-CB4CCA059FC4}" type="datetimeFigureOut">
               <a:rPr lang="en-US" smtClean="0"/>
-              <a:t>1/27/13</a:t>
+              <a:t>10/25/2026</a:t>
             </a:fld>
             <a:endParaRPr lang="en-US"/>
           </a:p>
@@ -392,10 +406,9 @@
           <a:lstStyle/>
           <a:p>
             <a:r>
-              <a:rPr lang="en-US" smtClean="0"/>
+              <a:rPr lang="en-US"/>
               <a:t>Click to edit Master title style</a:t>
             </a:r>
-            <a:endParaRPr lang="en-US"/>
           </a:p>
         </p:txBody>
       </p:sp>
@@ -416,38 +429,37 @@
           <a:p>
             <a:pPr lvl="0"/>
             <a:r>
-              <a:rPr lang="en-US" smtClean="0"/>
+              <a:rPr lang="en-US"/>
               <a:t>Click to edit Master text styles</a:t>
             </a:r>
           </a:p>
           <a:p>
             <a:pPr lvl="1"/>
             <a:r>
-              <a:rPr lang="en-US" smtClean="0"/>
+              <a:rPr lang="en-US"/>
               <a:t>Second level</a:t>
             </a:r>
           </a:p>
           <a:p>
             <a:pPr lvl="2"/>
             <a:r>
-              <a:rPr lang="en-US" smtClean="0"/>
+              <a:rPr lang="en-US"/>
               <a:t>Third level</a:t>
             </a:r>
           </a:p>
           <a:p>
             <a:pPr lvl="3"/>
             <a:r>
-              <a:rPr lang="en-US" smtClean="0"/>
+              <a:rPr lang="en-US"/>
               <a:t>Fourth level</a:t>
             </a:r>
           </a:p>
           <a:p>
             <a:pPr lvl="4"/>
             <a:r>
-              <a:rPr lang="en-US" smtClean="0"/>
+              <a:rPr lang="en-US"/>
               <a:t>Fifth level</a:t>
             </a:r>
-            <a:endParaRPr lang="en-US"/>
           </a:p>
         </p:txBody>
       </p:sp>
@@ -468,7 +480,7 @@
           <a:p>
             <a:fld id="{5BCAD085-E8A6-8845-BD4E-CB4CCA059FC4}" type="datetimeFigureOut">
               <a:rPr lang="en-US" smtClean="0"/>
-              <a:t>1/27/13</a:t>
+              <a:t>10/25/2026</a:t>
             </a:fld>
             <a:endParaRPr lang="en-US"/>
           </a:p>
@@ -567,10 +579,9 @@
           <a:lstStyle/>
           <a:p>
             <a:r>
-              <a:rPr lang="en-US" smtClean="0"/>
+              <a:rPr lang="en-US"/>
               <a:t>Click to edit Master title style</a:t>
             </a:r>
-            <a:endParaRPr lang="en-US"/>
           </a:p>
         </p:txBody>
       </p:sp>
@@ -596,38 +607,37 @@
           <a:p>
             <a:pPr lvl="0"/>
             <a:r>
-              <a:rPr lang="en-US" smtClean="0"/>
+              <a:rPr lang="en-US"/>
               <a:t>Click to edit Master text styles</a:t>
             </a:r>
           </a:p>
           <a:p>
             <a:pPr lvl="1"/>
             <a:r>
-              <a:rPr lang="en-US" smtClean="0"/>
+              <a:rPr lang="en-US"/>
               <a:t>Second level</a:t>
             </a:r>
           </a:p>
           <a:p>
             <a:pPr lvl="2"/>
             <a:r>
-              <a:rPr lang="en-US" smtClean="0"/>
+              <a:rPr lang="en-US"/>
               <a:t>Third level</a:t>
             </a:r>
           </a:p>
           <a:p>
             <a:pPr lvl="3"/>
             <a:r>
-              <a:rPr lang="en-US" smtClean="0"/>
+              <a:rPr lang="en-US"/>
               <a:t>Fourth level</a:t>
             </a:r>
           </a:p>
           <a:p>
             <a:pPr lvl="4"/>
             <a:r>
-              <a:rPr lang="en-US" smtClean="0"/>
+              <a:rPr lang="en-US"/>
               <a:t>Fifth level</a:t>
             </a:r>
-            <a:endParaRPr lang="en-US"/>
           </a:p>
         </p:txBody>
       </p:sp>
@@ -648,7 +658,7 @@
           <a:p>
             <a:fld id="{5BCAD085-E8A6-8845-BD4E-CB4CCA059FC4}" type="datetimeFigureOut">
               <a:rPr lang="en-US" smtClean="0"/>
-              <a:t>1/27/13</a:t>
+              <a:t>10/25/2026</a:t>
             </a:fld>
             <a:endParaRPr lang="en-US"/>
           </a:p>
@@ -742,10 +752,9 @@
           <a:lstStyle/>
           <a:p>
             <a:r>
-              <a:rPr lang="en-US" smtClean="0"/>
+              <a:rPr lang="en-US"/>
               <a:t>Click to edit Master title style</a:t>
             </a:r>
-            <a:endParaRPr lang="en-US"/>
           </a:p>
         </p:txBody>
       </p:sp>
@@ -766,38 +775,37 @@
           <a:p>
             <a:pPr lvl="0"/>
             <a:r>
-              <a:rPr lang="en-US" smtClean="0"/>
+              <a:rPr lang="en-US"/>
               <a:t>Click to edit Master text styles</a:t>
             </a:r>
           </a:p>
           <a:p>
             <a:pPr lvl="1"/>
             <a:r>
-              <a:rPr lang="en-US" smtClean="0"/>
+              <a:rPr lang="en-US"/>
               <a:t>Second level</a:t>
             </a:r>
           </a:p>
           <a:p>
             <a:pPr lvl="2"/>
             <a:r>
-              <a:rPr lang="en-US" smtClean="0"/>
+              <a:rPr lang="en-US"/>
               <a:t>Third level</a:t>
             </a:r>
           </a:p>
           <a:p>
             <a:pPr lvl="3"/>
             <a:r>
-              <a:rPr lang="en-US" smtClean="0"/>
+              <a:rPr lang="en-US"/>
               <a:t>Fourth level</a:t>
             </a:r>
           </a:p>
           <a:p>
             <a:pPr lvl="4"/>
             <a:r>
-              <a:rPr lang="en-US" smtClean="0"/>
+              <a:rPr lang="en-US"/>
               <a:t>Fifth level</a:t>
             </a:r>
-            <a:endParaRPr lang="en-US"/>
           </a:p>
         </p:txBody>
       </p:sp>
@@ -818,7 +826,7 @@
           <a:p>
             <a:fld id="{5BCAD085-E8A6-8845-BD4E-CB4CCA059FC4}" type="datetimeFigureOut">
               <a:rPr lang="en-US" smtClean="0"/>
-              <a:t>1/27/13</a:t>
+              <a:t>10/25/2026</a:t>
             </a:fld>
             <a:endParaRPr lang="en-US"/>
           </a:p>
@@ -921,10 +929,9 @@
           </a:lstStyle>
           <a:p>
             <a:r>
-              <a:rPr lang="en-US" smtClean="0"/>
+              <a:rPr lang="en-US"/>
               <a:t>Click to edit Master title style</a:t>
             </a:r>
-            <a:endParaRPr lang="en-US"/>
           </a:p>
         </p:txBody>
       </p:sp>
@@ -1041,7 +1048,7 @@
           <a:p>
             <a:pPr lvl="0"/>
             <a:r>
-              <a:rPr lang="en-US" smtClean="0"/>
+              <a:rPr lang="en-US"/>
               <a:t>Click to edit Master text styles</a:t>
             </a:r>
           </a:p>
@@ -1064,7 +1071,7 @@
           <a:p>
             <a:fld id="{5BCAD085-E8A6-8845-BD4E-CB4CCA059FC4}" type="datetimeFigureOut">
               <a:rPr lang="en-US" smtClean="0"/>
-              <a:t>1/27/13</a:t>
+              <a:t>10/25/2026</a:t>
             </a:fld>
             <a:endParaRPr lang="en-US"/>
           </a:p>
@@ -1158,10 +1165,9 @@
           <a:lstStyle/>
           <a:p>
             <a:r>
-              <a:rPr lang="en-US" smtClean="0"/>
+              <a:rPr lang="en-US"/>
               <a:t>Click to edit Master title style</a:t>
             </a:r>
-            <a:endParaRPr lang="en-US"/>
           </a:p>
         </p:txBody>
       </p:sp>
@@ -1215,38 +1221,37 @@
           <a:p>
             <a:pPr lvl="0"/>
             <a:r>
-              <a:rPr lang="en-US" smtClean="0"/>
+              <a:rPr lang="en-US"/>
               <a:t>Click to edit Master text styles</a:t>
             </a:r>
           </a:p>
           <a:p>
             <a:pPr lvl="1"/>
             <a:r>
-              <a:rPr lang="en-US" smtClean="0"/>
+              <a:rPr lang="en-US"/>
               <a:t>Second level</a:t>
             </a:r>
           </a:p>
           <a:p>
             <a:pPr lvl="2"/>
             <a:r>
-              <a:rPr lang="en-US" smtClean="0"/>
+              <a:rPr lang="en-US"/>
               <a:t>Third level</a:t>
             </a:r>
           </a:p>
           <a:p>
             <a:pPr lvl="3"/>
             <a:r>
-              <a:rPr lang="en-US" smtClean="0"/>
+              <a:rPr lang="en-US"/>
               <a:t>Fourth level</a:t>
             </a:r>
           </a:p>
           <a:p>
             <a:pPr lvl="4"/>
             <a:r>
-              <a:rPr lang="en-US" smtClean="0"/>
+              <a:rPr lang="en-US"/>
               <a:t>Fifth level</a:t>
             </a:r>
-            <a:endParaRPr lang="en-US"/>
           </a:p>
         </p:txBody>
       </p:sp>
@@ -1300,38 +1305,37 @@
           <a:p>
             <a:pPr lvl="0"/>
             <a:r>
-              <a:rPr lang="en-US" smtClean="0"/>
+              <a:rPr lang="en-US"/>
               <a:t>Click to edit Master text styles</a:t>
             </a:r>
           </a:p>
           <a:p>
             <a:pPr lvl="1"/>
             <a:r>
-              <a:rPr lang="en-US" smtClean="0"/>
+              <a:rPr lang="en-US"/>
               <a:t>Second level</a:t>
             </a:r>
           </a:p>
           <a:p>
             <a:pPr lvl="2"/>
             <a:r>
-              <a:rPr lang="en-US" smtClean="0"/>
+              <a:rPr lang="en-US"/>
               <a:t>Third level</a:t>
             </a:r>
           </a:p>
           <a:p>
             <a:pPr lvl="3"/>
             <a:r>
-              <a:rPr lang="en-US" smtClean="0"/>
+              <a:rPr lang="en-US"/>
               <a:t>Fourth level</a:t>
             </a:r>
           </a:p>
           <a:p>
             <a:pPr lvl="4"/>
             <a:r>
-              <a:rPr lang="en-US" smtClean="0"/>
+              <a:rPr lang="en-US"/>
               <a:t>Fifth level</a:t>
             </a:r>
-            <a:endParaRPr lang="en-US"/>
           </a:p>
         </p:txBody>
       </p:sp>
@@ -1352,7 +1356,7 @@
           <a:p>
             <a:fld id="{5BCAD085-E8A6-8845-BD4E-CB4CCA059FC4}" type="datetimeFigureOut">
               <a:rPr lang="en-US" smtClean="0"/>
-              <a:t>1/27/13</a:t>
+              <a:t>10/25/2026</a:t>
             </a:fld>
             <a:endParaRPr lang="en-US"/>
           </a:p>
@@ -1450,10 +1454,9 @@
           </a:lstStyle>
           <a:p>
             <a:r>
-              <a:rPr lang="en-US" smtClean="0"/>
+              <a:rPr lang="en-US"/>
               <a:t>Click to edit Master title style</a:t>
             </a:r>
-            <a:endParaRPr lang="en-US"/>
           </a:p>
         </p:txBody>
       </p:sp>
@@ -1516,7 +1519,7 @@
           <a:p>
             <a:pPr lvl="0"/>
             <a:r>
-              <a:rPr lang="en-US" smtClean="0"/>
+              <a:rPr lang="en-US"/>
               <a:t>Click to edit Master text styles</a:t>
             </a:r>
           </a:p>
@@ -1572,38 +1575,37 @@
           <a:p>
             <a:pPr lvl="0"/>
             <a:r>
-              <a:rPr lang="en-US" smtClean="0"/>
+              <a:rPr lang="en-US"/>
               <a:t>Click to edit Master text styles</a:t>
             </a:r>
           </a:p>
           <a:p>
             <a:pPr lvl="1"/>
             <a:r>
-              <a:rPr lang="en-US" smtClean="0"/>
+              <a:rPr lang="en-US"/>
               <a:t>Second level</a:t>
             </a:r>
           </a:p>
           <a:p>
             <a:pPr lvl="2"/>
             <a:r>
-              <a:rPr lang="en-US" smtClean="0"/>
+              <a:rPr lang="en-US"/>
               <a:t>Third level</a:t>
             </a:r>
           </a:p>
           <a:p>
             <a:pPr lvl="3"/>
             <a:r>
-              <a:rPr lang="en-US" smtClean="0"/>
+              <a:rPr lang="en-US"/>
               <a:t>Fourth level</a:t>
             </a:r>
           </a:p>
           <a:p>
             <a:pPr lvl="4"/>
             <a:r>
-              <a:rPr lang="en-US" smtClean="0"/>
+              <a:rPr lang="en-US"/>
               <a:t>Fifth level</a:t>
             </a:r>
-            <a:endParaRPr lang="en-US"/>
           </a:p>
         </p:txBody>
       </p:sp>
@@ -1666,7 +1668,7 @@
           <a:p>
             <a:pPr lvl="0"/>
             <a:r>
-              <a:rPr lang="en-US" smtClean="0"/>
+              <a:rPr lang="en-US"/>
               <a:t>Click to edit Master text styles</a:t>
             </a:r>
           </a:p>
@@ -1722,38 +1724,37 @@
           <a:p>
             <a:pPr lvl="0"/>
             <a:r>
-              <a:rPr lang="en-US" smtClean="0"/>
+              <a:rPr lang="en-US"/>
               <a:t>Click to edit Master text styles</a:t>
             </a:r>
           </a:p>
           <a:p>
             <a:pPr lvl="1"/>
             <a:r>
-              <a:rPr lang="en-US" smtClean="0"/>
+              <a:rPr lang="en-US"/>
               <a:t>Second level</a:t>
             </a:r>
           </a:p>
           <a:p>
             <a:pPr lvl="2"/>
             <a:r>
-              <a:rPr lang="en-US" smtClean="0"/>
+              <a:rPr lang="en-US"/>
               <a:t>Third level</a:t>
             </a:r>
           </a:p>
           <a:p>
             <a:pPr lvl="3"/>
             <a:r>
-              <a:rPr lang="en-US" smtClean="0"/>
+              <a:rPr lang="en-US"/>
               <a:t>Fourth level</a:t>
             </a:r>
           </a:p>
           <a:p>
             <a:pPr lvl="4"/>
             <a:r>
-              <a:rPr lang="en-US" smtClean="0"/>
+              <a:rPr lang="en-US"/>
               <a:t>Fifth level</a:t>
             </a:r>
-            <a:endParaRPr lang="en-US"/>
           </a:p>
         </p:txBody>
       </p:sp>
@@ -1774,7 +1775,7 @@
           <a:p>
             <a:fld id="{5BCAD085-E8A6-8845-BD4E-CB4CCA059FC4}" type="datetimeFigureOut">
               <a:rPr lang="en-US" smtClean="0"/>
-              <a:t>1/27/13</a:t>
+              <a:t>10/25/2026</a:t>
             </a:fld>
             <a:endParaRPr lang="en-US"/>
           </a:p>
@@ -1868,10 +1869,9 @@
           <a:lstStyle/>
           <a:p>
             <a:r>
-              <a:rPr lang="en-US" smtClean="0"/>
+              <a:rPr lang="en-US"/>
               <a:t>Click to edit Master title style</a:t>
             </a:r>
-            <a:endParaRPr lang="en-US"/>
           </a:p>
         </p:txBody>
       </p:sp>
@@ -1892,7 +1892,7 @@
           <a:p>
             <a:fld id="{5BCAD085-E8A6-8845-BD4E-CB4CCA059FC4}" type="datetimeFigureOut">
               <a:rPr lang="en-US" smtClean="0"/>
-              <a:t>1/27/13</a:t>
+              <a:t>10/25/2026</a:t>
             </a:fld>
             <a:endParaRPr lang="en-US"/>
           </a:p>
@@ -1987,7 +1987,7 @@
           <a:p>
             <a:fld id="{5BCAD085-E8A6-8845-BD4E-CB4CCA059FC4}" type="datetimeFigureOut">
               <a:rPr lang="en-US" smtClean="0"/>
-              <a:t>1/27/13</a:t>
+              <a:t>10/25/2026</a:t>
             </a:fld>
             <a:endParaRPr lang="en-US"/>
           </a:p>
@@ -2090,10 +2090,9 @@
           </a:lstStyle>
           <a:p>
             <a:r>
-              <a:rPr lang="en-US" smtClean="0"/>
+              <a:rPr lang="en-US"/>
               <a:t>Click to edit Master title style</a:t>
             </a:r>
-            <a:endParaRPr lang="en-US"/>
           </a:p>
         </p:txBody>
       </p:sp>
@@ -2147,38 +2146,37 @@
           <a:p>
             <a:pPr lvl="0"/>
             <a:r>
-              <a:rPr lang="en-US" smtClean="0"/>
+              <a:rPr lang="en-US"/>
               <a:t>Click to edit Master text styles</a:t>
             </a:r>
           </a:p>
           <a:p>
             <a:pPr lvl="1"/>
             <a:r>
-              <a:rPr lang="en-US" smtClean="0"/>
+              <a:rPr lang="en-US"/>
               <a:t>Second level</a:t>
             </a:r>
           </a:p>
           <a:p>
             <a:pPr lvl="2"/>
             <a:r>
-              <a:rPr lang="en-US" smtClean="0"/>
+              <a:rPr lang="en-US"/>
               <a:t>Third level</a:t>
             </a:r>
           </a:p>
           <a:p>
             <a:pPr lvl="3"/>
             <a:r>
-              <a:rPr lang="en-US" smtClean="0"/>
+              <a:rPr lang="en-US"/>
               <a:t>Fourth level</a:t>
             </a:r>
           </a:p>
           <a:p>
             <a:pPr lvl="4"/>
             <a:r>
-              <a:rPr lang="en-US" smtClean="0"/>
+              <a:rPr lang="en-US"/>
               <a:t>Fifth level</a:t>
             </a:r>
-            <a:endParaRPr lang="en-US"/>
           </a:p>
         </p:txBody>
       </p:sp>
@@ -2241,7 +2239,7 @@
           <a:p>
             <a:pPr lvl="0"/>
             <a:r>
-              <a:rPr lang="en-US" smtClean="0"/>
+              <a:rPr lang="en-US"/>
               <a:t>Click to edit Master text styles</a:t>
             </a:r>
           </a:p>
@@ -2264,7 +2262,7 @@
           <a:p>
             <a:fld id="{5BCAD085-E8A6-8845-BD4E-CB4CCA059FC4}" type="datetimeFigureOut">
               <a:rPr lang="en-US" smtClean="0"/>
-              <a:t>1/27/13</a:t>
+              <a:t>10/25/2026</a:t>
             </a:fld>
             <a:endParaRPr lang="en-US"/>
           </a:p>
@@ -2367,10 +2365,9 @@
           </a:lstStyle>
           <a:p>
             <a:r>
-              <a:rPr lang="en-US" smtClean="0"/>
+              <a:rPr lang="en-US"/>
               <a:t>Click to edit Master title style</a:t>
             </a:r>
-            <a:endParaRPr lang="en-US"/>
           </a:p>
         </p:txBody>
       </p:sp>
@@ -2494,7 +2491,7 @@
           <a:p>
             <a:pPr lvl="0"/>
             <a:r>
-              <a:rPr lang="en-US" smtClean="0"/>
+              <a:rPr lang="en-US"/>
               <a:t>Click to edit Master text styles</a:t>
             </a:r>
           </a:p>
@@ -2517,7 +2514,7 @@
           <a:p>
             <a:fld id="{5BCAD085-E8A6-8845-BD4E-CB4CCA059FC4}" type="datetimeFigureOut">
               <a:rPr lang="en-US" smtClean="0"/>
-              <a:t>1/27/13</a:t>
+              <a:t>10/25/2026</a:t>
             </a:fld>
             <a:endParaRPr lang="en-US"/>
           </a:p>
@@ -2626,10 +2623,9 @@
           <a:lstStyle/>
           <a:p>
             <a:r>
-              <a:rPr lang="en-US" smtClean="0"/>
+              <a:rPr lang="en-US"/>
               <a:t>Click to edit Master title style</a:t>
             </a:r>
-            <a:endParaRPr lang="en-US"/>
           </a:p>
         </p:txBody>
       </p:sp>
@@ -2660,38 +2656,37 @@
           <a:p>
             <a:pPr lvl="0"/>
             <a:r>
-              <a:rPr lang="en-US" smtClean="0"/>
+              <a:rPr lang="en-US"/>
               <a:t>Click to edit Master text styles</a:t>
             </a:r>
           </a:p>
           <a:p>
             <a:pPr lvl="1"/>
             <a:r>
-              <a:rPr lang="en-US" smtClean="0"/>
+              <a:rPr lang="en-US"/>
               <a:t>Second level</a:t>
             </a:r>
           </a:p>
           <a:p>
             <a:pPr lvl="2"/>
             <a:r>
-              <a:rPr lang="en-US" smtClean="0"/>
+              <a:rPr lang="en-US"/>
               <a:t>Third level</a:t>
             </a:r>
           </a:p>
           <a:p>
             <a:pPr lvl="3"/>
             <a:r>
-              <a:rPr lang="en-US" smtClean="0"/>
+              <a:rPr lang="en-US"/>
               <a:t>Fourth level</a:t>
             </a:r>
           </a:p>
           <a:p>
             <a:pPr lvl="4"/>
             <a:r>
-              <a:rPr lang="en-US" smtClean="0"/>
+              <a:rPr lang="en-US"/>
               <a:t>Fifth level</a:t>
             </a:r>
-            <a:endParaRPr lang="en-US"/>
           </a:p>
         </p:txBody>
       </p:sp>
@@ -2730,7 +2725,7 @@
           <a:p>
             <a:fld id="{5BCAD085-E8A6-8845-BD4E-CB4CCA059FC4}" type="datetimeFigureOut">
               <a:rPr lang="en-US" smtClean="0"/>
-              <a:t>1/27/13</a:t>
+              <a:t>10/25/2026</a:t>
             </a:fld>
             <a:endParaRPr lang="en-US"/>
           </a:p>
@@ -3089,7 +3084,7 @@
 </file>
 
 <file path=ppt/slides/slide1.xml><?xml version="1.0" encoding="utf-8"?>
-<p:sld xmlns:a="http://schemas.openxmlformats.org/drawingml/2006/main" xmlns:p="http://schemas.openxmlformats.org/presentationml/2006/main" xmlns:r="http://schemas.openxmlformats.org/officeDocument/2006/relationships">
+<p:sld xmlns:a="http://schemas.openxmlformats.org/drawingml/2006/main" xmlns:r="http://schemas.openxmlformats.org/officeDocument/2006/relationships" xmlns:p="http://schemas.openxmlformats.org/presentationml/2006/main">
   <p:cSld>
     <p:spTree>
       <p:nvGrpSpPr>
@@ -3097,7 +3092,14 @@
         <p:cNvGrpSpPr/>
         <p:nvPr/>
       </p:nvGrpSpPr>
-      <p:grpSpPr/>
+      <p:grpSpPr>
+        <a:xfrm>
+          <a:off x="0" y="0"/>
+          <a:ext cx="0" cy="0"/>
+          <a:chOff x="0" y="0"/>
+          <a:chExt cx="0" cy="0"/>
+        </a:xfrm>
+      </p:grpSpPr>
       <p:sp>
         <p:nvSpPr>
           <p:cNvPr id="2" name="Rectangle 1"/>
@@ -3138,6 +3140,7 @@
           <a:lstStyle/>
           <a:p>
             <a:pPr algn="ctr"/>
+            <a:endParaRPr/>
           </a:p>
         </p:txBody>
       </p:sp>
@@ -3181,6 +3184,7 @@
           <a:lstStyle/>
           <a:p>
             <a:pPr algn="ctr"/>
+            <a:endParaRPr/>
           </a:p>
         </p:txBody>
       </p:sp>
@@ -3193,7 +3197,7 @@
         <p:spPr>
           <a:xfrm>
             <a:off x="731520" y="1097280"/>
-            <a:ext cx="10728655" cy="1645920"/>
+            <a:ext cx="10728655" cy="1287532"/>
           </a:xfrm>
           <a:prstGeom prst="rect">
             <a:avLst/>
@@ -3214,7 +3218,20 @@
               </a:defRPr>
             </a:pPr>
             <a:r>
-              <a:t>PheW TuBe: Video Streaming Platform</a:t>
+              <a:rPr i="1" u="sng" dirty="0" err="1"/>
+              <a:t>PheW</a:t>
+            </a:r>
+            <a:r>
+              <a:rPr i="1" u="sng" dirty="0"/>
+              <a:t> </a:t>
+            </a:r>
+            <a:r>
+              <a:rPr i="1" u="sng" dirty="0" err="1"/>
+              <a:t>TuBe</a:t>
+            </a:r>
+            <a:r>
+              <a:rPr i="1" u="sng" dirty="0"/>
+              <a:t>: Video Streaming Platform</a:t>
             </a:r>
           </a:p>
           <a:p>
@@ -3229,6 +3246,7 @@
               </a:defRPr>
             </a:pPr>
             <a:r>
+              <a:rPr sz="1600" dirty="0"/>
               <a:t>Front End Engineering - II (25CSE0203) — Project Based Evaluation-2 (Batch-2025)</a:t>
             </a:r>
           </a:p>
@@ -3244,6 +3262,7 @@
               </a:defRPr>
             </a:pPr>
             <a:r>
+              <a:rPr sz="1400" dirty="0"/>
               <a:t>Department of Computer Science &amp; Engineering • Chitkara University, Punjab</a:t>
             </a:r>
           </a:p>
@@ -3291,6 +3310,7 @@
           <a:lstStyle/>
           <a:p>
             <a:pPr algn="ctr"/>
+            <a:endParaRPr/>
           </a:p>
         </p:txBody>
       </p:sp>
@@ -3303,7 +3323,7 @@
         <p:spPr>
           <a:xfrm>
             <a:off x="1188720" y="3566160"/>
-            <a:ext cx="4114800" cy="2286000"/>
+            <a:ext cx="4341894" cy="1169551"/>
           </a:xfrm>
           <a:prstGeom prst="rect">
             <a:avLst/>
@@ -3327,6 +3347,7 @@
               </a:defRPr>
             </a:pPr>
             <a:r>
+              <a:rPr u="sng" dirty="0"/>
               <a:t>Supervised By:</a:t>
             </a:r>
           </a:p>
@@ -3342,6 +3363,7 @@
               </a:defRPr>
             </a:pPr>
             <a:r>
+              <a:rPr sz="1600" dirty="0"/>
               <a:t>Mr. Shubham Kumar</a:t>
             </a:r>
           </a:p>
@@ -3354,10 +3376,14 @@
               </a:defRPr>
             </a:pPr>
             <a:r>
+              <a:rPr sz="1400" dirty="0"/>
               <a:t>Technical Trainer, Department of CSE</a:t>
             </a:r>
-            <a:br/>
-            <a:r>
+            <a:br>
+              <a:rPr sz="1400" dirty="0"/>
+            </a:br>
+            <a:r>
+              <a:rPr sz="1400" dirty="0"/>
               <a:t>Chitkara University Institute of Engineering &amp; Technology</a:t>
             </a:r>
           </a:p>
@@ -3372,7 +3398,7 @@
         <p:spPr>
           <a:xfrm>
             <a:off x="6217920" y="3566160"/>
-            <a:ext cx="4846320" cy="2286000"/>
+            <a:ext cx="3648819" cy="1456809"/>
           </a:xfrm>
           <a:prstGeom prst="rect">
             <a:avLst/>
@@ -3396,6 +3422,7 @@
               </a:defRPr>
             </a:pPr>
             <a:r>
+              <a:rPr u="sng" dirty="0"/>
               <a:t>Submitted By (Group G-15):</a:t>
             </a:r>
           </a:p>
@@ -3411,6 +3438,7 @@
               </a:defRPr>
             </a:pPr>
             <a:r>
+              <a:rPr sz="1400" dirty="0"/>
               <a:t>Kanav Chadha — Roll No: 2510990649 (G-15)</a:t>
             </a:r>
           </a:p>
@@ -3426,6 +3454,7 @@
               </a:defRPr>
             </a:pPr>
             <a:r>
+              <a:rPr sz="1400" dirty="0"/>
               <a:t>Kishan — Roll No: 2510991457 (G-15)</a:t>
             </a:r>
           </a:p>
@@ -3441,6 +3470,7 @@
               </a:defRPr>
             </a:pPr>
             <a:r>
+              <a:rPr sz="1400" dirty="0"/>
               <a:t>Arsh Behl — Roll No: 2510991354 (G-15)</a:t>
             </a:r>
           </a:p>
@@ -3456,7 +3486,20 @@
               </a:defRPr>
             </a:pPr>
             <a:r>
-              <a:t>Soumajit Majee — Roll No: 2510990383 (G-15)</a:t>
+              <a:rPr sz="1400" dirty="0" err="1"/>
+              <a:t>Soumajit</a:t>
+            </a:r>
+            <a:r>
+              <a:rPr sz="1400" dirty="0"/>
+              <a:t> </a:t>
+            </a:r>
+            <a:r>
+              <a:rPr sz="1400" dirty="0" err="1"/>
+              <a:t>Majee</a:t>
+            </a:r>
+            <a:r>
+              <a:rPr sz="1400" dirty="0"/>
+              <a:t> — Roll No: 2510990383 (G-15)</a:t>
             </a:r>
           </a:p>
         </p:txBody>
@@ -3466,14 +3509,14 @@
   <p:clrMapOvr>
     <a:masterClrMapping/>
   </p:clrMapOvr>
-  <p:transition spd="fast">
-    <p:push dir="l"/>
+  <p:transition>
+    <p:push/>
   </p:transition>
 </p:sld>
 </file>
 
 <file path=ppt/slides/slide10.xml><?xml version="1.0" encoding="utf-8"?>
-<p:sld xmlns:a="http://schemas.openxmlformats.org/drawingml/2006/main" xmlns:p="http://schemas.openxmlformats.org/presentationml/2006/main" xmlns:r="http://schemas.openxmlformats.org/officeDocument/2006/relationships">
+<p:sld xmlns:a="http://schemas.openxmlformats.org/drawingml/2006/main" xmlns:r="http://schemas.openxmlformats.org/officeDocument/2006/relationships" xmlns:p="http://schemas.openxmlformats.org/presentationml/2006/main">
   <p:cSld>
     <p:spTree>
       <p:nvGrpSpPr>
@@ -3481,7 +3524,14 @@
         <p:cNvGrpSpPr/>
         <p:nvPr/>
       </p:nvGrpSpPr>
-      <p:grpSpPr/>
+      <p:grpSpPr>
+        <a:xfrm>
+          <a:off x="0" y="0"/>
+          <a:ext cx="0" cy="0"/>
+          <a:chOff x="0" y="0"/>
+          <a:chExt cx="0" cy="0"/>
+        </a:xfrm>
+      </p:grpSpPr>
       <p:sp>
         <p:nvSpPr>
           <p:cNvPr id="2" name="Rectangle 1"/>
@@ -3522,6 +3572,7 @@
           <a:lstStyle/>
           <a:p>
             <a:pPr algn="ctr"/>
+            <a:endParaRPr/>
           </a:p>
         </p:txBody>
       </p:sp>
@@ -3565,6 +3616,7 @@
           <a:lstStyle/>
           <a:p>
             <a:pPr algn="ctr"/>
+            <a:endParaRPr/>
           </a:p>
         </p:txBody>
       </p:sp>
@@ -3612,7 +3664,7 @@
         <p:spPr>
           <a:xfrm>
             <a:off x="731520" y="621792"/>
-            <a:ext cx="10728655" cy="594360"/>
+            <a:ext cx="10728655" cy="523220"/>
           </a:xfrm>
           <a:prstGeom prst="rect">
             <a:avLst/>
@@ -3633,6 +3685,7 @@
               </a:defRPr>
             </a:pPr>
             <a:r>
+              <a:rPr sz="2800" i="1" u="sng" dirty="0"/>
               <a:t>Multi-Device Responsive Design &amp; Viewport Audit</a:t>
             </a:r>
           </a:p>
@@ -3715,6 +3768,7 @@
           <a:lstStyle/>
           <a:p>
             <a:pPr algn="ctr"/>
+            <a:endParaRPr/>
           </a:p>
         </p:txBody>
       </p:sp>
@@ -3784,6 +3838,7 @@
           <a:lstStyle/>
           <a:p>
             <a:pPr algn="ctr"/>
+            <a:endParaRPr/>
           </a:p>
         </p:txBody>
       </p:sp>
@@ -3796,7 +3851,7 @@
         <p:spPr>
           <a:xfrm>
             <a:off x="6449263" y="1490472"/>
-            <a:ext cx="4809744" cy="4334255"/>
+            <a:ext cx="4809744" cy="3903633"/>
           </a:xfrm>
           <a:prstGeom prst="rect">
             <a:avLst/>
@@ -3804,12 +3859,12 @@
           <a:noFill/>
         </p:spPr>
         <p:txBody>
-          <a:bodyPr wrap="square" tIns="0" bIns="0" lIns="0" rIns="0">
+          <a:bodyPr wrap="square" lIns="0" tIns="0" rIns="0" bIns="0">
             <a:spAutoFit/>
           </a:bodyPr>
           <a:lstStyle/>
           <a:p>
-            <a:pPr>
+            <a:pPr algn="ctr">
               <a:spcAft>
                 <a:spcPts val="1000"/>
               </a:spcAft>
@@ -3820,6 +3875,7 @@
               </a:defRPr>
             </a:pPr>
             <a:r>
+              <a:rPr sz="1600" i="1" u="sng" dirty="0"/>
               <a:t>Responsive Viewport Adaptations</a:t>
             </a:r>
           </a:p>
@@ -3830,7 +3886,7 @@
               </a:spcAft>
             </a:pPr>
             <a:r>
-              <a:rPr sz="1050" b="1">
+              <a:rPr sz="1400" b="1" dirty="0">
                 <a:solidFill>
                   <a:srgbClr val="FFFFFF"/>
                 </a:solidFill>
@@ -3838,7 +3894,7 @@
               <a:t>• Tablet / iPad Pro (1032 x 1376px): </a:t>
             </a:r>
             <a:r>
-              <a:rPr sz="1050">
+              <a:rPr sz="1400" dirty="0">
                 <a:solidFill>
                   <a:srgbClr val="CDD2DC"/>
                 </a:solidFill>
@@ -3853,7 +3909,7 @@
               </a:spcAft>
             </a:pPr>
             <a:r>
-              <a:rPr sz="1050" b="1">
+              <a:rPr sz="1400" b="1" dirty="0">
                 <a:solidFill>
                   <a:srgbClr val="FFFFFF"/>
                 </a:solidFill>
@@ -3861,7 +3917,7 @@
               <a:t>• Collapsed Mini-Rail Sidebar: </a:t>
             </a:r>
             <a:r>
-              <a:rPr sz="1050">
+              <a:rPr sz="1400" dirty="0">
                 <a:solidFill>
                   <a:srgbClr val="CDD2DC"/>
                 </a:solidFill>
@@ -3876,7 +3932,7 @@
               </a:spcAft>
             </a:pPr>
             <a:r>
-              <a:rPr sz="1050" b="1">
+              <a:rPr sz="1400" b="1" dirty="0">
                 <a:solidFill>
                   <a:srgbClr val="FFFFFF"/>
                 </a:solidFill>
@@ -3884,7 +3940,7 @@
               <a:t>• Desktop Viewport (1440px+): </a:t>
             </a:r>
             <a:r>
-              <a:rPr sz="1050">
+              <a:rPr sz="1400" dirty="0">
                 <a:solidFill>
                   <a:srgbClr val="CDD2DC"/>
                 </a:solidFill>
@@ -3899,7 +3955,7 @@
               </a:spcAft>
             </a:pPr>
             <a:r>
-              <a:rPr sz="1050" b="1">
+              <a:rPr sz="1400" b="1" dirty="0">
                 <a:solidFill>
                   <a:srgbClr val="FFFFFF"/>
                 </a:solidFill>
@@ -3907,7 +3963,7 @@
               <a:t>• Mobile Viewport (375px - 480px): </a:t>
             </a:r>
             <a:r>
-              <a:rPr sz="1050">
+              <a:rPr sz="1400" dirty="0">
                 <a:solidFill>
                   <a:srgbClr val="CDD2DC"/>
                 </a:solidFill>
@@ -3922,7 +3978,7 @@
               </a:spcAft>
             </a:pPr>
             <a:r>
-              <a:rPr sz="1050" b="1">
+              <a:rPr sz="1400" b="1" dirty="0">
                 <a:solidFill>
                   <a:srgbClr val="FFFFFF"/>
                 </a:solidFill>
@@ -3930,12 +3986,28 @@
               <a:t>• Tailwind Breakpoint Matrix: </a:t>
             </a:r>
             <a:r>
-              <a:rPr sz="1050">
-                <a:solidFill>
-                  <a:srgbClr val="CDD2DC"/>
-                </a:solidFill>
-              </a:rPr>
-              <a:t>Uses strict responsive utility classes (sm, md, lg, xl, 2xl) eliminating horizontal scrollbars.</a:t>
+              <a:rPr sz="1400" dirty="0">
+                <a:solidFill>
+                  <a:srgbClr val="CDD2DC"/>
+                </a:solidFill>
+              </a:rPr>
+              <a:t>Uses strict responsive utility classes (</a:t>
+            </a:r>
+            <a:r>
+              <a:rPr sz="1400" dirty="0" err="1">
+                <a:solidFill>
+                  <a:srgbClr val="CDD2DC"/>
+                </a:solidFill>
+              </a:rPr>
+              <a:t>sm</a:t>
+            </a:r>
+            <a:r>
+              <a:rPr sz="1400" dirty="0">
+                <a:solidFill>
+                  <a:srgbClr val="CDD2DC"/>
+                </a:solidFill>
+              </a:rPr>
+              <a:t>, md, lg, xl, 2xl) eliminating horizontal scrollbars.</a:t>
             </a:r>
           </a:p>
           <a:p>
@@ -3945,20 +4017,52 @@
               </a:spcAft>
             </a:pPr>
             <a:r>
-              <a:rPr sz="1050" b="1">
+              <a:rPr sz="1400" b="1" dirty="0">
                 <a:solidFill>
                   <a:srgbClr val="FFFFFF"/>
                 </a:solidFill>
               </a:rPr>
-              <a:t>• DevTools Emulation Audit: </a:t>
-            </a:r>
-            <a:r>
-              <a:rPr sz="1050">
-                <a:solidFill>
-                  <a:srgbClr val="CDD2DC"/>
-                </a:solidFill>
-              </a:rPr>
-              <a:t>Verified and tested across iPad Pro, iPad Mini, and iPhone viewports via Chrome DevTools.</a:t>
+              <a:t>• </a:t>
+            </a:r>
+            <a:r>
+              <a:rPr sz="1400" b="1" dirty="0" err="1">
+                <a:solidFill>
+                  <a:srgbClr val="FFFFFF"/>
+                </a:solidFill>
+              </a:rPr>
+              <a:t>DevTools</a:t>
+            </a:r>
+            <a:r>
+              <a:rPr sz="1400" b="1" dirty="0">
+                <a:solidFill>
+                  <a:srgbClr val="FFFFFF"/>
+                </a:solidFill>
+              </a:rPr>
+              <a:t> Emulation Audit: </a:t>
+            </a:r>
+            <a:r>
+              <a:rPr sz="1400" dirty="0">
+                <a:solidFill>
+                  <a:srgbClr val="CDD2DC"/>
+                </a:solidFill>
+              </a:rPr>
+              <a:t>Verified and tested across iPad Pro, iPad Mini, and iPhone viewports via Chrome </a:t>
+            </a:r>
+            <a:r>
+              <a:rPr sz="1400" dirty="0" err="1">
+                <a:solidFill>
+                  <a:srgbClr val="CDD2DC"/>
+                </a:solidFill>
+              </a:rPr>
+              <a:t>DevTools</a:t>
+            </a:r>
+            <a:r>
+              <a:rPr sz="1400" dirty="0">
+                <a:solidFill>
+                  <a:srgbClr val="CDD2DC"/>
+                </a:solidFill>
+              </a:rPr>
+              <a:t>.</a:t>
             </a:r>
           </a:p>
         </p:txBody>
@@ -3968,14 +4072,14 @@
   <p:clrMapOvr>
     <a:masterClrMapping/>
   </p:clrMapOvr>
-  <p:transition spd="fast">
-    <p:push dir="l"/>
+  <p:transition>
+    <p:push/>
   </p:transition>
 </p:sld>
 </file>
 
 <file path=ppt/slides/slide11.xml><?xml version="1.0" encoding="utf-8"?>
-<p:sld xmlns:a="http://schemas.openxmlformats.org/drawingml/2006/main" xmlns:p="http://schemas.openxmlformats.org/presentationml/2006/main" xmlns:r="http://schemas.openxmlformats.org/officeDocument/2006/relationships">
+<p:sld xmlns:a="http://schemas.openxmlformats.org/drawingml/2006/main" xmlns:r="http://schemas.openxmlformats.org/officeDocument/2006/relationships" xmlns:p="http://schemas.openxmlformats.org/presentationml/2006/main">
   <p:cSld>
     <p:spTree>
       <p:nvGrpSpPr>
@@ -3983,7 +4087,14 @@
         <p:cNvGrpSpPr/>
         <p:nvPr/>
       </p:nvGrpSpPr>
-      <p:grpSpPr/>
+      <p:grpSpPr>
+        <a:xfrm>
+          <a:off x="0" y="0"/>
+          <a:ext cx="0" cy="0"/>
+          <a:chOff x="0" y="0"/>
+          <a:chExt cx="0" cy="0"/>
+        </a:xfrm>
+      </p:grpSpPr>
       <p:sp>
         <p:nvSpPr>
           <p:cNvPr id="2" name="Rectangle 1"/>
@@ -4024,6 +4135,7 @@
           <a:lstStyle/>
           <a:p>
             <a:pPr algn="ctr"/>
+            <a:endParaRPr/>
           </a:p>
         </p:txBody>
       </p:sp>
@@ -4069,6 +4181,7 @@
           <a:lstStyle/>
           <a:p>
             <a:pPr algn="ctr"/>
+            <a:endParaRPr/>
           </a:p>
         </p:txBody>
       </p:sp>
@@ -4081,7 +4194,7 @@
         <p:spPr>
           <a:xfrm>
             <a:off x="1097280" y="1463040"/>
-            <a:ext cx="9997135" cy="3931920"/>
+            <a:ext cx="9997135" cy="2021066"/>
           </a:xfrm>
           <a:prstGeom prst="rect">
             <a:avLst/>
@@ -4094,7 +4207,7 @@
           </a:bodyPr>
           <a:lstStyle/>
           <a:p>
-            <a:pPr algn="l">
+            <a:pPr algn="ctr">
               <a:defRPr sz="4400" b="1">
                 <a:solidFill>
                   <a:srgbClr val="FFFFFF"/>
@@ -4102,11 +4215,12 @@
               </a:defRPr>
             </a:pPr>
             <a:r>
+              <a:rPr sz="4800" i="1" u="sng" dirty="0"/>
               <a:t>THANK YOU</a:t>
             </a:r>
           </a:p>
           <a:p>
-            <a:pPr algn="l">
+            <a:pPr algn="ctr">
               <a:spcBef>
                 <a:spcPts val="1200"/>
               </a:spcBef>
@@ -4117,11 +4231,24 @@
               </a:defRPr>
             </a:pPr>
             <a:r>
-              <a:t>PheW TuBe: High-Performance Video Streaming Platform</a:t>
-            </a:r>
-          </a:p>
-          <a:p>
-            <a:pPr algn="l">
+              <a:rPr dirty="0" err="1"/>
+              <a:t>PheW</a:t>
+            </a:r>
+            <a:r>
+              <a:rPr dirty="0"/>
+              <a:t> </a:t>
+            </a:r>
+            <a:r>
+              <a:rPr dirty="0" err="1"/>
+              <a:t>TuBe</a:t>
+            </a:r>
+            <a:r>
+              <a:rPr dirty="0"/>
+              <a:t>: High-Performance Video Streaming Platform</a:t>
+            </a:r>
+          </a:p>
+          <a:p>
+            <a:pPr algn="ctr">
               <a:spcBef>
                 <a:spcPts val="800"/>
               </a:spcBef>
@@ -4132,11 +4259,12 @@
               </a:defRPr>
             </a:pPr>
             <a:r>
+              <a:rPr sz="1600" dirty="0"/>
               <a:t>Department of Computer Science &amp; Engineering • Chitkara University, Punjab</a:t>
             </a:r>
           </a:p>
           <a:p>
-            <a:pPr algn="l">
+            <a:pPr algn="ctr">
               <a:spcBef>
                 <a:spcPts val="1400"/>
               </a:spcBef>
@@ -4147,6 +4275,7 @@
               </a:defRPr>
             </a:pPr>
             <a:r>
+              <a:rPr sz="1600" dirty="0"/>
               <a:t>GROUP G15 • PROJECT ID: G15-PID-17 • EVALUATION-II (PHASE 2)</a:t>
             </a:r>
           </a:p>
@@ -4157,14 +4286,14 @@
   <p:clrMapOvr>
     <a:masterClrMapping/>
   </p:clrMapOvr>
-  <p:transition spd="fast">
-    <p:push dir="l"/>
+  <p:transition>
+    <p:push/>
   </p:transition>
 </p:sld>
 </file>
 
 <file path=ppt/slides/slide2.xml><?xml version="1.0" encoding="utf-8"?>
-<p:sld xmlns:a="http://schemas.openxmlformats.org/drawingml/2006/main" xmlns:p="http://schemas.openxmlformats.org/presentationml/2006/main" xmlns:r="http://schemas.openxmlformats.org/officeDocument/2006/relationships">
+<p:sld xmlns:a="http://schemas.openxmlformats.org/drawingml/2006/main" xmlns:r="http://schemas.openxmlformats.org/officeDocument/2006/relationships" xmlns:p="http://schemas.openxmlformats.org/presentationml/2006/main">
   <p:cSld>
     <p:spTree>
       <p:nvGrpSpPr>
@@ -4172,7 +4301,14 @@
         <p:cNvGrpSpPr/>
         <p:nvPr/>
       </p:nvGrpSpPr>
-      <p:grpSpPr/>
+      <p:grpSpPr>
+        <a:xfrm>
+          <a:off x="0" y="0"/>
+          <a:ext cx="0" cy="0"/>
+          <a:chOff x="0" y="0"/>
+          <a:chExt cx="0" cy="0"/>
+        </a:xfrm>
+      </p:grpSpPr>
       <p:sp>
         <p:nvSpPr>
           <p:cNvPr id="2" name="Rectangle 1"/>
@@ -4213,6 +4349,7 @@
           <a:lstStyle/>
           <a:p>
             <a:pPr algn="ctr"/>
+            <a:endParaRPr/>
           </a:p>
         </p:txBody>
       </p:sp>
@@ -4256,6 +4393,7 @@
           <a:lstStyle/>
           <a:p>
             <a:pPr algn="ctr"/>
+            <a:endParaRPr/>
           </a:p>
         </p:txBody>
       </p:sp>
@@ -4303,7 +4441,7 @@
         <p:spPr>
           <a:xfrm>
             <a:off x="731520" y="621792"/>
-            <a:ext cx="10728655" cy="594360"/>
+            <a:ext cx="10728655" cy="523220"/>
           </a:xfrm>
           <a:prstGeom prst="rect">
             <a:avLst/>
@@ -4316,7 +4454,7 @@
           </a:bodyPr>
           <a:lstStyle/>
           <a:p>
-            <a:pPr>
+            <a:pPr algn="ctr">
               <a:defRPr sz="2300" b="1">
                 <a:solidFill>
                   <a:srgbClr val="FFFFFF"/>
@@ -4324,6 +4462,7 @@
               </a:defRPr>
             </a:pPr>
             <a:r>
+              <a:rPr sz="2800" i="1" u="sng" dirty="0"/>
               <a:t>Evaluation-II Vision &amp; Milestone Objectives</a:t>
             </a:r>
           </a:p>
@@ -4406,6 +4545,7 @@
           <a:lstStyle/>
           <a:p>
             <a:pPr algn="ctr"/>
+            <a:endParaRPr/>
           </a:p>
         </p:txBody>
       </p:sp>
@@ -4418,7 +4558,7 @@
         <p:spPr>
           <a:xfrm>
             <a:off x="932688" y="1490472"/>
-            <a:ext cx="2980944" cy="4334255"/>
+            <a:ext cx="2980944" cy="3985706"/>
           </a:xfrm>
           <a:prstGeom prst="rect">
             <a:avLst/>
@@ -4426,12 +4566,12 @@
           <a:noFill/>
         </p:spPr>
         <p:txBody>
-          <a:bodyPr wrap="square" tIns="0" bIns="0" lIns="0" rIns="0">
+          <a:bodyPr wrap="square" lIns="0" tIns="0" rIns="0" bIns="0">
             <a:spAutoFit/>
           </a:bodyPr>
           <a:lstStyle/>
           <a:p>
-            <a:pPr>
+            <a:pPr algn="ctr">
               <a:spcAft>
                 <a:spcPts val="1000"/>
               </a:spcAft>
@@ -4442,6 +4582,7 @@
               </a:defRPr>
             </a:pPr>
             <a:r>
+              <a:rPr sz="1600" i="1" u="sng" dirty="0"/>
               <a:t>Phase 1 vs Phase 2 Focus</a:t>
             </a:r>
           </a:p>
@@ -4452,7 +4593,7 @@
               </a:spcAft>
             </a:pPr>
             <a:r>
-              <a:rPr sz="1150" b="1">
+              <a:rPr sz="1600" b="1" dirty="0">
                 <a:solidFill>
                   <a:srgbClr val="FFFFFF"/>
                 </a:solidFill>
@@ -4460,13 +4601,18 @@
               <a:t>• Phase 1 Foundation: </a:t>
             </a:r>
             <a:r>
-              <a:rPr sz="1150">
+              <a:rPr sz="1600" dirty="0">
                 <a:solidFill>
                   <a:srgbClr val="CDD2DC"/>
                 </a:solidFill>
               </a:rPr>
               <a:t>Established responsive video card grids, category chips, and external links.</a:t>
             </a:r>
+            <a:endParaRPr lang="en-IN" sz="1600" dirty="0">
+              <a:solidFill>
+                <a:srgbClr val="CDD2DC"/>
+              </a:solidFill>
+            </a:endParaRPr>
           </a:p>
           <a:p>
             <a:pPr>
@@ -4474,8 +4620,20 @@
                 <a:spcPts val="800"/>
               </a:spcAft>
             </a:pPr>
-            <a:r>
-              <a:rPr sz="1150" b="1">
+            <a:endParaRPr sz="1600" dirty="0">
+              <a:solidFill>
+                <a:srgbClr val="CDD2DC"/>
+              </a:solidFill>
+            </a:endParaRPr>
+          </a:p>
+          <a:p>
+            <a:pPr>
+              <a:spcAft>
+                <a:spcPts val="800"/>
+              </a:spcAft>
+            </a:pPr>
+            <a:r>
+              <a:rPr sz="1600" b="1" dirty="0">
                 <a:solidFill>
                   <a:srgbClr val="FFFFFF"/>
                 </a:solidFill>
@@ -4483,13 +4641,50 @@
               <a:t>• Phase 2 Transition: </a:t>
             </a:r>
             <a:r>
-              <a:rPr sz="1150">
-                <a:solidFill>
-                  <a:srgbClr val="CDD2DC"/>
-                </a:solidFill>
-              </a:rPr>
-              <a:t>Elevated PheW TuBe into an authentic, stateful Single Page Application (SPA).</a:t>
-            </a:r>
+              <a:rPr sz="1600" dirty="0">
+                <a:solidFill>
+                  <a:srgbClr val="CDD2DC"/>
+                </a:solidFill>
+              </a:rPr>
+              <a:t>Elevated </a:t>
+            </a:r>
+            <a:r>
+              <a:rPr sz="1600" dirty="0" err="1">
+                <a:solidFill>
+                  <a:srgbClr val="CDD2DC"/>
+                </a:solidFill>
+              </a:rPr>
+              <a:t>PheW</a:t>
+            </a:r>
+            <a:r>
+              <a:rPr sz="1600" dirty="0">
+                <a:solidFill>
+                  <a:srgbClr val="CDD2DC"/>
+                </a:solidFill>
+              </a:rPr>
+              <a:t> </a:t>
+            </a:r>
+            <a:r>
+              <a:rPr sz="1600" dirty="0" err="1">
+                <a:solidFill>
+                  <a:srgbClr val="CDD2DC"/>
+                </a:solidFill>
+              </a:rPr>
+              <a:t>TuBe</a:t>
+            </a:r>
+            <a:r>
+              <a:rPr sz="1600" dirty="0">
+                <a:solidFill>
+                  <a:srgbClr val="CDD2DC"/>
+                </a:solidFill>
+              </a:rPr>
+              <a:t> into an authentic, stateful Single Page Application (SPA).</a:t>
+            </a:r>
+            <a:endParaRPr lang="en-IN" sz="1600" dirty="0">
+              <a:solidFill>
+                <a:srgbClr val="CDD2DC"/>
+              </a:solidFill>
+            </a:endParaRPr>
           </a:p>
           <a:p>
             <a:pPr>
@@ -4497,8 +4692,20 @@
                 <a:spcPts val="800"/>
               </a:spcAft>
             </a:pPr>
-            <a:r>
-              <a:rPr sz="1150" b="1">
+            <a:endParaRPr sz="1600" dirty="0">
+              <a:solidFill>
+                <a:srgbClr val="CDD2DC"/>
+              </a:solidFill>
+            </a:endParaRPr>
+          </a:p>
+          <a:p>
+            <a:pPr>
+              <a:spcAft>
+                <a:spcPts val="800"/>
+              </a:spcAft>
+            </a:pPr>
+            <a:r>
+              <a:rPr sz="1600" b="1" dirty="0">
                 <a:solidFill>
                   <a:srgbClr val="FFFFFF"/>
                 </a:solidFill>
@@ -4506,7 +4713,7 @@
               <a:t>• Zero Page Reloads: </a:t>
             </a:r>
             <a:r>
-              <a:rPr sz="1150">
+              <a:rPr sz="1600" dirty="0">
                 <a:solidFill>
                   <a:srgbClr val="CDD2DC"/>
                 </a:solidFill>
@@ -4558,6 +4765,7 @@
           <a:lstStyle/>
           <a:p>
             <a:pPr algn="ctr"/>
+            <a:endParaRPr/>
           </a:p>
         </p:txBody>
       </p:sp>
@@ -4570,7 +4778,7 @@
         <p:spPr>
           <a:xfrm>
             <a:off x="4604918" y="1490472"/>
-            <a:ext cx="2980944" cy="4334255"/>
+            <a:ext cx="2980944" cy="3985706"/>
           </a:xfrm>
           <a:prstGeom prst="rect">
             <a:avLst/>
@@ -4578,12 +4786,12 @@
           <a:noFill/>
         </p:spPr>
         <p:txBody>
-          <a:bodyPr wrap="square" tIns="0" bIns="0" lIns="0" rIns="0">
+          <a:bodyPr wrap="square" lIns="0" tIns="0" rIns="0" bIns="0">
             <a:spAutoFit/>
           </a:bodyPr>
           <a:lstStyle/>
           <a:p>
-            <a:pPr>
+            <a:pPr algn="ctr">
               <a:spcAft>
                 <a:spcPts val="1000"/>
               </a:spcAft>
@@ -4594,6 +4802,7 @@
               </a:defRPr>
             </a:pPr>
             <a:r>
+              <a:rPr sz="1600" i="1" u="sng" dirty="0"/>
               <a:t>Core Technical Objectives</a:t>
             </a:r>
           </a:p>
@@ -4604,7 +4813,7 @@
               </a:spcAft>
             </a:pPr>
             <a:r>
-              <a:rPr sz="1150" b="1">
+              <a:rPr sz="1600" b="1" dirty="0">
                 <a:solidFill>
                   <a:srgbClr val="FFFFFF"/>
                 </a:solidFill>
@@ -4612,13 +4821,34 @@
               <a:t>• In-Site Streaming: </a:t>
             </a:r>
             <a:r>
-              <a:rPr sz="1150">
-                <a:solidFill>
-                  <a:srgbClr val="CDD2DC"/>
-                </a:solidFill>
-              </a:rPr>
-              <a:t>Deep link /watch/:id powered by useParams() with embedded 16:9 streaming.</a:t>
-            </a:r>
+              <a:rPr sz="1600" dirty="0">
+                <a:solidFill>
+                  <a:srgbClr val="CDD2DC"/>
+                </a:solidFill>
+              </a:rPr>
+              <a:t>Deep link /watch/:id powered by </a:t>
+            </a:r>
+            <a:r>
+              <a:rPr sz="1600" dirty="0" err="1">
+                <a:solidFill>
+                  <a:srgbClr val="CDD2DC"/>
+                </a:solidFill>
+              </a:rPr>
+              <a:t>useParams</a:t>
+            </a:r>
+            <a:r>
+              <a:rPr sz="1600" dirty="0">
+                <a:solidFill>
+                  <a:srgbClr val="CDD2DC"/>
+                </a:solidFill>
+              </a:rPr>
+              <a:t>() with embedded 16:9 streaming.</a:t>
+            </a:r>
+            <a:endParaRPr lang="en-IN" sz="1600" dirty="0">
+              <a:solidFill>
+                <a:srgbClr val="CDD2DC"/>
+              </a:solidFill>
+            </a:endParaRPr>
           </a:p>
           <a:p>
             <a:pPr>
@@ -4626,22 +4856,55 @@
                 <a:spcPts val="800"/>
               </a:spcAft>
             </a:pPr>
-            <a:r>
-              <a:rPr sz="1150" b="1">
+            <a:endParaRPr sz="1600" dirty="0">
+              <a:solidFill>
+                <a:srgbClr val="CDD2DC"/>
+              </a:solidFill>
+            </a:endParaRPr>
+          </a:p>
+          <a:p>
+            <a:pPr>
+              <a:spcAft>
+                <a:spcPts val="800"/>
+              </a:spcAft>
+            </a:pPr>
+            <a:r>
+              <a:rPr sz="1600" b="1" dirty="0">
                 <a:solidFill>
                   <a:srgbClr val="FFFFFF"/>
                 </a:solidFill>
               </a:rPr>
-              <a:t>• DOM Control via useRef: </a:t>
-            </a:r>
-            <a:r>
-              <a:rPr sz="1150">
+              <a:t>• DOM Control via </a:t>
+            </a:r>
+            <a:r>
+              <a:rPr sz="1600" b="1" dirty="0" err="1">
+                <a:solidFill>
+                  <a:srgbClr val="FFFFFF"/>
+                </a:solidFill>
+              </a:rPr>
+              <a:t>useRef</a:t>
+            </a:r>
+            <a:r>
+              <a:rPr sz="1600" b="1" dirty="0">
+                <a:solidFill>
+                  <a:srgbClr val="FFFFFF"/>
+                </a:solidFill>
+              </a:rPr>
+              <a:t>: </a:t>
+            </a:r>
+            <a:r>
+              <a:rPr sz="1600" dirty="0">
                 <a:solidFill>
                   <a:srgbClr val="CDD2DC"/>
                 </a:solidFill>
               </a:rPr>
               <a:t>Direct focus on comment inputs and auto-scroll control without synthetic re-renders.</a:t>
             </a:r>
+            <a:endParaRPr lang="en-IN" sz="1600" dirty="0">
+              <a:solidFill>
+                <a:srgbClr val="CDD2DC"/>
+              </a:solidFill>
+            </a:endParaRPr>
           </a:p>
           <a:p>
             <a:pPr>
@@ -4649,8 +4912,20 @@
                 <a:spcPts val="800"/>
               </a:spcAft>
             </a:pPr>
-            <a:r>
-              <a:rPr sz="1150" b="1">
+            <a:endParaRPr sz="1600" dirty="0">
+              <a:solidFill>
+                <a:srgbClr val="CDD2DC"/>
+              </a:solidFill>
+            </a:endParaRPr>
+          </a:p>
+          <a:p>
+            <a:pPr>
+              <a:spcAft>
+                <a:spcPts val="800"/>
+              </a:spcAft>
+            </a:pPr>
+            <a:r>
+              <a:rPr sz="1600" b="1" dirty="0">
                 <a:solidFill>
                   <a:srgbClr val="FFFFFF"/>
                 </a:solidFill>
@@ -4658,7 +4933,7 @@
               <a:t>• Global Context API: </a:t>
             </a:r>
             <a:r>
-              <a:rPr sz="1150">
+              <a:rPr sz="1600" dirty="0">
                 <a:solidFill>
                   <a:srgbClr val="CDD2DC"/>
                 </a:solidFill>
@@ -4710,6 +4985,7 @@
           <a:lstStyle/>
           <a:p>
             <a:pPr algn="ctr"/>
+            <a:endParaRPr/>
           </a:p>
         </p:txBody>
       </p:sp>
@@ -4722,7 +4998,7 @@
         <p:spPr>
           <a:xfrm>
             <a:off x="8278063" y="1490472"/>
-            <a:ext cx="2980944" cy="4334255"/>
+            <a:ext cx="2980944" cy="3493264"/>
           </a:xfrm>
           <a:prstGeom prst="rect">
             <a:avLst/>
@@ -4730,12 +5006,12 @@
           <a:noFill/>
         </p:spPr>
         <p:txBody>
-          <a:bodyPr wrap="square" tIns="0" bIns="0" lIns="0" rIns="0">
+          <a:bodyPr wrap="square" lIns="0" tIns="0" rIns="0" bIns="0">
             <a:spAutoFit/>
           </a:bodyPr>
           <a:lstStyle/>
           <a:p>
-            <a:pPr>
+            <a:pPr algn="ctr">
               <a:spcAft>
                 <a:spcPts val="1000"/>
               </a:spcAft>
@@ -4746,6 +5022,7 @@
               </a:defRPr>
             </a:pPr>
             <a:r>
+              <a:rPr sz="1600" i="1" u="sng" dirty="0"/>
               <a:t>User Experience &amp; Realism</a:t>
             </a:r>
           </a:p>
@@ -4756,7 +5033,7 @@
               </a:spcAft>
             </a:pPr>
             <a:r>
-              <a:rPr sz="1150" b="1">
+              <a:rPr sz="1600" b="1" dirty="0">
                 <a:solidFill>
                   <a:srgbClr val="FFFFFF"/>
                 </a:solidFill>
@@ -4764,13 +5041,34 @@
               <a:t>• Up-Next Queue: </a:t>
             </a:r>
             <a:r>
-              <a:rPr sz="1150">
-                <a:solidFill>
-                  <a:srgbClr val="CDD2DC"/>
-                </a:solidFill>
-              </a:rPr>
-              <a:t>Dynamic video swapping via useNavigate() with synchronized channel metadata.</a:t>
-            </a:r>
+              <a:rPr sz="1600" dirty="0">
+                <a:solidFill>
+                  <a:srgbClr val="CDD2DC"/>
+                </a:solidFill>
+              </a:rPr>
+              <a:t>Dynamic video swapping via </a:t>
+            </a:r>
+            <a:r>
+              <a:rPr sz="1600" dirty="0" err="1">
+                <a:solidFill>
+                  <a:srgbClr val="CDD2DC"/>
+                </a:solidFill>
+              </a:rPr>
+              <a:t>useNavigate</a:t>
+            </a:r>
+            <a:r>
+              <a:rPr sz="1600" dirty="0">
+                <a:solidFill>
+                  <a:srgbClr val="CDD2DC"/>
+                </a:solidFill>
+              </a:rPr>
+              <a:t>() with synchronized channel metadata.</a:t>
+            </a:r>
+            <a:endParaRPr lang="en-IN" sz="1600" dirty="0">
+              <a:solidFill>
+                <a:srgbClr val="CDD2DC"/>
+              </a:solidFill>
+            </a:endParaRPr>
           </a:p>
           <a:p>
             <a:pPr>
@@ -4778,8 +5076,20 @@
                 <a:spcPts val="800"/>
               </a:spcAft>
             </a:pPr>
-            <a:r>
-              <a:rPr sz="1150" b="1">
+            <a:endParaRPr sz="1600" dirty="0">
+              <a:solidFill>
+                <a:srgbClr val="CDD2DC"/>
+              </a:solidFill>
+            </a:endParaRPr>
+          </a:p>
+          <a:p>
+            <a:pPr>
+              <a:spcAft>
+                <a:spcPts val="800"/>
+              </a:spcAft>
+            </a:pPr>
+            <a:r>
+              <a:rPr sz="1600" b="1" dirty="0">
                 <a:solidFill>
                   <a:srgbClr val="FFFFFF"/>
                 </a:solidFill>
@@ -4787,13 +5097,18 @@
               <a:t>• Working Action Controls: </a:t>
             </a:r>
             <a:r>
-              <a:rPr sz="1150">
+              <a:rPr sz="1600" dirty="0">
                 <a:solidFill>
                   <a:srgbClr val="CDD2DC"/>
                 </a:solidFill>
               </a:rPr>
               <a:t>Real Like increments, Share link copier, and Watch Later bookmarking.</a:t>
             </a:r>
+            <a:endParaRPr lang="en-IN" sz="1600" dirty="0">
+              <a:solidFill>
+                <a:srgbClr val="CDD2DC"/>
+              </a:solidFill>
+            </a:endParaRPr>
           </a:p>
           <a:p>
             <a:pPr>
@@ -4801,8 +5116,20 @@
                 <a:spcPts val="800"/>
               </a:spcAft>
             </a:pPr>
-            <a:r>
-              <a:rPr sz="1150" b="1">
+            <a:endParaRPr sz="1600" dirty="0">
+              <a:solidFill>
+                <a:srgbClr val="CDD2DC"/>
+              </a:solidFill>
+            </a:endParaRPr>
+          </a:p>
+          <a:p>
+            <a:pPr>
+              <a:spcAft>
+                <a:spcPts val="800"/>
+              </a:spcAft>
+            </a:pPr>
+            <a:r>
+              <a:rPr sz="1600" b="1" dirty="0">
                 <a:solidFill>
                   <a:srgbClr val="FFFFFF"/>
                 </a:solidFill>
@@ -4810,7 +5137,7 @@
               <a:t>• Responsive Parity: </a:t>
             </a:r>
             <a:r>
-              <a:rPr sz="1150">
+              <a:rPr sz="1600" dirty="0">
                 <a:solidFill>
                   <a:srgbClr val="CDD2DC"/>
                 </a:solidFill>
@@ -4825,14 +5152,14 @@
   <p:clrMapOvr>
     <a:masterClrMapping/>
   </p:clrMapOvr>
-  <p:transition spd="fast">
-    <p:push dir="l"/>
+  <p:transition>
+    <p:push/>
   </p:transition>
 </p:sld>
 </file>
 
 <file path=ppt/slides/slide3.xml><?xml version="1.0" encoding="utf-8"?>
-<p:sld xmlns:a="http://schemas.openxmlformats.org/drawingml/2006/main" xmlns:p="http://schemas.openxmlformats.org/presentationml/2006/main" xmlns:r="http://schemas.openxmlformats.org/officeDocument/2006/relationships">
+<p:sld xmlns:a="http://schemas.openxmlformats.org/drawingml/2006/main" xmlns:r="http://schemas.openxmlformats.org/officeDocument/2006/relationships" xmlns:p="http://schemas.openxmlformats.org/presentationml/2006/main">
   <p:cSld>
     <p:spTree>
       <p:nvGrpSpPr>
@@ -4840,7 +5167,14 @@
         <p:cNvGrpSpPr/>
         <p:nvPr/>
       </p:nvGrpSpPr>
-      <p:grpSpPr/>
+      <p:grpSpPr>
+        <a:xfrm>
+          <a:off x="0" y="0"/>
+          <a:ext cx="0" cy="0"/>
+          <a:chOff x="0" y="0"/>
+          <a:chExt cx="0" cy="0"/>
+        </a:xfrm>
+      </p:grpSpPr>
       <p:sp>
         <p:nvSpPr>
           <p:cNvPr id="2" name="Rectangle 1"/>
@@ -4881,6 +5215,7 @@
           <a:lstStyle/>
           <a:p>
             <a:pPr algn="ctr"/>
+            <a:endParaRPr/>
           </a:p>
         </p:txBody>
       </p:sp>
@@ -4924,6 +5259,7 @@
           <a:lstStyle/>
           <a:p>
             <a:pPr algn="ctr"/>
+            <a:endParaRPr/>
           </a:p>
         </p:txBody>
       </p:sp>
@@ -4971,7 +5307,7 @@
         <p:spPr>
           <a:xfrm>
             <a:off x="731520" y="621792"/>
-            <a:ext cx="10728655" cy="594360"/>
+            <a:ext cx="10728655" cy="461665"/>
           </a:xfrm>
           <a:prstGeom prst="rect">
             <a:avLst/>
@@ -4992,6 +5328,7 @@
               </a:defRPr>
             </a:pPr>
             <a:r>
+              <a:rPr sz="2400" i="1" u="sng" dirty="0"/>
               <a:t>Syllabus-Aligned Technology Stack &amp; Architecture</a:t>
             </a:r>
           </a:p>
@@ -5074,6 +5411,7 @@
           <a:lstStyle/>
           <a:p>
             <a:pPr algn="ctr"/>
+            <a:endParaRPr/>
           </a:p>
         </p:txBody>
       </p:sp>
@@ -5086,7 +5424,7 @@
         <p:spPr>
           <a:xfrm>
             <a:off x="932688" y="1490472"/>
-            <a:ext cx="3026664" cy="1911096"/>
+            <a:ext cx="3026664" cy="1667123"/>
           </a:xfrm>
           <a:prstGeom prst="rect">
             <a:avLst/>
@@ -5094,12 +5432,12 @@
           <a:noFill/>
         </p:spPr>
         <p:txBody>
-          <a:bodyPr wrap="square" tIns="0" bIns="0" lIns="0" rIns="0">
+          <a:bodyPr wrap="square" lIns="0" tIns="0" rIns="0" bIns="0">
             <a:spAutoFit/>
           </a:bodyPr>
           <a:lstStyle/>
           <a:p>
-            <a:pPr>
+            <a:pPr algn="ctr">
               <a:spcAft>
                 <a:spcPts val="1000"/>
               </a:spcAft>
@@ -5110,6 +5448,7 @@
               </a:defRPr>
             </a:pPr>
             <a:r>
+              <a:rPr sz="1600" i="1" u="sng" dirty="0"/>
               <a:t>React 18 (Core SPA Engine)</a:t>
             </a:r>
           </a:p>
@@ -5120,7 +5459,7 @@
               </a:spcAft>
             </a:pPr>
             <a:r>
-              <a:rPr sz="1050">
+              <a:rPr sz="1600" dirty="0">
                 <a:solidFill>
                   <a:srgbClr val="CDD2DC"/>
                 </a:solidFill>
@@ -5135,7 +5474,7 @@
               </a:spcAft>
             </a:pPr>
             <a:r>
-              <a:rPr sz="1050">
+              <a:rPr sz="1600" dirty="0">
                 <a:solidFill>
                   <a:srgbClr val="CDD2DC"/>
                 </a:solidFill>
@@ -5150,7 +5489,7 @@
               </a:spcAft>
             </a:pPr>
             <a:r>
-              <a:rPr sz="1050">
+              <a:rPr sz="1600" dirty="0">
                 <a:solidFill>
                   <a:srgbClr val="CDD2DC"/>
                 </a:solidFill>
@@ -5165,7 +5504,7 @@
               </a:spcAft>
             </a:pPr>
             <a:r>
-              <a:rPr sz="1050" b="1">
+              <a:rPr sz="1600" b="1" dirty="0">
                 <a:solidFill>
                   <a:srgbClr val="FFFFFF"/>
                 </a:solidFill>
@@ -5173,12 +5512,52 @@
               <a:t>• Hooks: </a:t>
             </a:r>
             <a:r>
-              <a:rPr sz="1050">
-                <a:solidFill>
-                  <a:srgbClr val="CDD2DC"/>
-                </a:solidFill>
-              </a:rPr>
-              <a:t>useState, useEffect, useRef.</a:t>
+              <a:rPr sz="1600" dirty="0" err="1">
+                <a:solidFill>
+                  <a:srgbClr val="CDD2DC"/>
+                </a:solidFill>
+              </a:rPr>
+              <a:t>useState</a:t>
+            </a:r>
+            <a:r>
+              <a:rPr sz="1600" dirty="0">
+                <a:solidFill>
+                  <a:srgbClr val="CDD2DC"/>
+                </a:solidFill>
+              </a:rPr>
+              <a:t>, </a:t>
+            </a:r>
+            <a:r>
+              <a:rPr sz="1600" dirty="0" err="1">
+                <a:solidFill>
+                  <a:srgbClr val="CDD2DC"/>
+                </a:solidFill>
+              </a:rPr>
+              <a:t>useEffect</a:t>
+            </a:r>
+            <a:r>
+              <a:rPr sz="1600" dirty="0">
+                <a:solidFill>
+                  <a:srgbClr val="CDD2DC"/>
+                </a:solidFill>
+              </a:rPr>
+              <a:t>, </a:t>
+            </a:r>
+            <a:r>
+              <a:rPr sz="1600" dirty="0" err="1">
+                <a:solidFill>
+                  <a:srgbClr val="CDD2DC"/>
+                </a:solidFill>
+              </a:rPr>
+              <a:t>useRef</a:t>
+            </a:r>
+            <a:r>
+              <a:rPr sz="1600" dirty="0">
+                <a:solidFill>
+                  <a:srgbClr val="CDD2DC"/>
+                </a:solidFill>
+              </a:rPr>
+              <a:t>.</a:t>
             </a:r>
           </a:p>
         </p:txBody>
@@ -5225,6 +5604,7 @@
           <a:lstStyle/>
           <a:p>
             <a:pPr algn="ctr"/>
+            <a:endParaRPr/>
           </a:p>
         </p:txBody>
       </p:sp>
@@ -5237,7 +5617,7 @@
         <p:spPr>
           <a:xfrm>
             <a:off x="4572000" y="1490472"/>
-            <a:ext cx="3026664" cy="1911096"/>
+            <a:ext cx="3026664" cy="1759456"/>
           </a:xfrm>
           <a:prstGeom prst="rect">
             <a:avLst/>
@@ -5245,12 +5625,12 @@
           <a:noFill/>
         </p:spPr>
         <p:txBody>
-          <a:bodyPr wrap="square" tIns="0" bIns="0" lIns="0" rIns="0">
+          <a:bodyPr wrap="square" lIns="0" tIns="0" rIns="0" bIns="0">
             <a:spAutoFit/>
           </a:bodyPr>
           <a:lstStyle/>
           <a:p>
-            <a:pPr>
+            <a:pPr algn="ctr">
               <a:spcAft>
                 <a:spcPts val="1000"/>
               </a:spcAft>
@@ -5261,6 +5641,7 @@
               </a:defRPr>
             </a:pPr>
             <a:r>
+              <a:rPr sz="1600" i="1" u="sng" dirty="0"/>
               <a:t>React Router v6</a:t>
             </a:r>
           </a:p>
@@ -5271,7 +5652,7 @@
               </a:spcAft>
             </a:pPr>
             <a:r>
-              <a:rPr sz="1050">
+              <a:rPr sz="1400" dirty="0">
                 <a:solidFill>
                   <a:srgbClr val="CDD2DC"/>
                 </a:solidFill>
@@ -5286,7 +5667,7 @@
               </a:spcAft>
             </a:pPr>
             <a:r>
-              <a:rPr sz="1050">
+              <a:rPr sz="1400" dirty="0">
                 <a:solidFill>
                   <a:srgbClr val="CDD2DC"/>
                 </a:solidFill>
@@ -5301,12 +5682,28 @@
               </a:spcAft>
             </a:pPr>
             <a:r>
-              <a:rPr sz="1050">
-                <a:solidFill>
-                  <a:srgbClr val="CDD2DC"/>
-                </a:solidFill>
-              </a:rPr>
-              <a:t>• Declarative &lt;ProtectedRoute /&gt; security.</a:t>
+              <a:rPr sz="1400" dirty="0">
+                <a:solidFill>
+                  <a:srgbClr val="CDD2DC"/>
+                </a:solidFill>
+              </a:rPr>
+              <a:t>• Declarative &lt;</a:t>
+            </a:r>
+            <a:r>
+              <a:rPr sz="1400" dirty="0" err="1">
+                <a:solidFill>
+                  <a:srgbClr val="CDD2DC"/>
+                </a:solidFill>
+              </a:rPr>
+              <a:t>ProtectedRoute</a:t>
+            </a:r>
+            <a:r>
+              <a:rPr sz="1400" dirty="0">
+                <a:solidFill>
+                  <a:srgbClr val="CDD2DC"/>
+                </a:solidFill>
+              </a:rPr>
+              <a:t> /&gt; security.</a:t>
             </a:r>
           </a:p>
           <a:p>
@@ -5316,12 +5713,28 @@
               </a:spcAft>
             </a:pPr>
             <a:r>
-              <a:rPr sz="1050">
-                <a:solidFill>
-                  <a:srgbClr val="CDD2DC"/>
-                </a:solidFill>
-              </a:rPr>
-              <a:t>• Seamless useNavigate() transitions.</a:t>
+              <a:rPr sz="1400" dirty="0">
+                <a:solidFill>
+                  <a:srgbClr val="CDD2DC"/>
+                </a:solidFill>
+              </a:rPr>
+              <a:t>• Seamless </a:t>
+            </a:r>
+            <a:r>
+              <a:rPr sz="1400" dirty="0" err="1">
+                <a:solidFill>
+                  <a:srgbClr val="CDD2DC"/>
+                </a:solidFill>
+              </a:rPr>
+              <a:t>useNavigate</a:t>
+            </a:r>
+            <a:r>
+              <a:rPr sz="1400" dirty="0">
+                <a:solidFill>
+                  <a:srgbClr val="CDD2DC"/>
+                </a:solidFill>
+              </a:rPr>
+              <a:t>() transitions.</a:t>
             </a:r>
           </a:p>
         </p:txBody>
@@ -5368,6 +5781,7 @@
           <a:lstStyle/>
           <a:p>
             <a:pPr algn="ctr"/>
+            <a:endParaRPr/>
           </a:p>
         </p:txBody>
       </p:sp>
@@ -5379,8 +5793,8 @@
         </p:nvSpPr>
         <p:spPr>
           <a:xfrm>
-            <a:off x="8211312" y="1490472"/>
-            <a:ext cx="3026664" cy="1911096"/>
+            <a:off x="8211312" y="1554481"/>
+            <a:ext cx="3026664" cy="1544012"/>
           </a:xfrm>
           <a:prstGeom prst="rect">
             <a:avLst/>
@@ -5388,12 +5802,12 @@
           <a:noFill/>
         </p:spPr>
         <p:txBody>
-          <a:bodyPr wrap="square" tIns="0" bIns="0" lIns="0" rIns="0">
+          <a:bodyPr wrap="square" lIns="0" tIns="0" rIns="0" bIns="0">
             <a:spAutoFit/>
           </a:bodyPr>
           <a:lstStyle/>
           <a:p>
-            <a:pPr>
+            <a:pPr algn="ctr">
               <a:spcAft>
                 <a:spcPts val="1000"/>
               </a:spcAft>
@@ -5404,6 +5818,7 @@
               </a:defRPr>
             </a:pPr>
             <a:r>
+              <a:rPr sz="1600" i="1" u="sng" dirty="0"/>
               <a:t>Tailwind CSS 3</a:t>
             </a:r>
           </a:p>
@@ -5414,7 +5829,7 @@
               </a:spcAft>
             </a:pPr>
             <a:r>
-              <a:rPr sz="1050">
+              <a:rPr sz="1400" dirty="0">
                 <a:solidFill>
                   <a:srgbClr val="CDD2DC"/>
                 </a:solidFill>
@@ -5429,7 +5844,7 @@
               </a:spcAft>
             </a:pPr>
             <a:r>
-              <a:rPr sz="1050">
+              <a:rPr sz="1400" dirty="0">
                 <a:solidFill>
                   <a:srgbClr val="CDD2DC"/>
                 </a:solidFill>
@@ -5444,7 +5859,7 @@
               </a:spcAft>
             </a:pPr>
             <a:r>
-              <a:rPr sz="1050">
+              <a:rPr sz="1400" dirty="0">
                 <a:solidFill>
                   <a:srgbClr val="CDD2DC"/>
                 </a:solidFill>
@@ -5459,12 +5874,20 @@
               </a:spcAft>
             </a:pPr>
             <a:r>
-              <a:rPr sz="1050">
-                <a:solidFill>
-                  <a:srgbClr val="CDD2DC"/>
-                </a:solidFill>
-              </a:rPr>
-              <a:t>• Strict YouTube aesthetics alignment.</a:t>
+              <a:rPr sz="1400" dirty="0">
+                <a:solidFill>
+                  <a:srgbClr val="CDD2DC"/>
+                </a:solidFill>
+              </a:rPr>
+              <a:t>• Strict YouTube aesthetics alignment</a:t>
+            </a:r>
+            <a:r>
+              <a:rPr sz="1050" dirty="0">
+                <a:solidFill>
+                  <a:srgbClr val="CDD2DC"/>
+                </a:solidFill>
+              </a:rPr>
+              <a:t>.</a:t>
             </a:r>
           </a:p>
         </p:txBody>
@@ -5511,6 +5934,7 @@
           <a:lstStyle/>
           <a:p>
             <a:pPr algn="ctr"/>
+            <a:endParaRPr/>
           </a:p>
         </p:txBody>
       </p:sp>
@@ -5523,7 +5947,7 @@
         <p:spPr>
           <a:xfrm>
             <a:off x="932688" y="3913631"/>
-            <a:ext cx="3026664" cy="1911096"/>
+            <a:ext cx="3026664" cy="1913344"/>
           </a:xfrm>
           <a:prstGeom prst="rect">
             <a:avLst/>
@@ -5531,12 +5955,12 @@
           <a:noFill/>
         </p:spPr>
         <p:txBody>
-          <a:bodyPr wrap="square" tIns="0" bIns="0" lIns="0" rIns="0">
+          <a:bodyPr wrap="square" lIns="0" tIns="0" rIns="0" bIns="0">
             <a:spAutoFit/>
           </a:bodyPr>
           <a:lstStyle/>
           <a:p>
-            <a:pPr>
+            <a:pPr algn="ctr">
               <a:spcAft>
                 <a:spcPts val="1000"/>
               </a:spcAft>
@@ -5547,8 +5971,14 @@
               </a:defRPr>
             </a:pPr>
             <a:r>
-              <a:t>Context API &amp; LocalStorage</a:t>
-            </a:r>
+              <a:rPr sz="1600" i="1" u="sng" dirty="0"/>
+              <a:t>Context API &amp; </a:t>
+            </a:r>
+            <a:r>
+              <a:rPr sz="1600" i="1" u="sng" dirty="0" err="1"/>
+              <a:t>LocalStorage</a:t>
+            </a:r>
+            <a:endParaRPr sz="1600" i="1" u="sng" dirty="0"/>
           </a:p>
           <a:p>
             <a:pPr>
@@ -5557,12 +5987,28 @@
               </a:spcAft>
             </a:pPr>
             <a:r>
-              <a:rPr sz="1050">
-                <a:solidFill>
-                  <a:srgbClr val="CDD2DC"/>
-                </a:solidFill>
-              </a:rPr>
-              <a:t>• Centralized global AppContext bus.</a:t>
+              <a:rPr sz="1600" dirty="0">
+                <a:solidFill>
+                  <a:srgbClr val="CDD2DC"/>
+                </a:solidFill>
+              </a:rPr>
+              <a:t>• Centralized global </a:t>
+            </a:r>
+            <a:r>
+              <a:rPr sz="1600" dirty="0" err="1">
+                <a:solidFill>
+                  <a:srgbClr val="CDD2DC"/>
+                </a:solidFill>
+              </a:rPr>
+              <a:t>AppContext</a:t>
+            </a:r>
+            <a:r>
+              <a:rPr sz="1600" dirty="0">
+                <a:solidFill>
+                  <a:srgbClr val="CDD2DC"/>
+                </a:solidFill>
+              </a:rPr>
+              <a:t> bus.</a:t>
             </a:r>
           </a:p>
           <a:p>
@@ -5572,7 +6018,7 @@
               </a:spcAft>
             </a:pPr>
             <a:r>
-              <a:rPr sz="1050">
+              <a:rPr sz="1600" dirty="0">
                 <a:solidFill>
                   <a:srgbClr val="CDD2DC"/>
                 </a:solidFill>
@@ -5587,7 +6033,7 @@
               </a:spcAft>
             </a:pPr>
             <a:r>
-              <a:rPr sz="1050">
+              <a:rPr sz="1600" dirty="0">
                 <a:solidFill>
                   <a:srgbClr val="CDD2DC"/>
                 </a:solidFill>
@@ -5602,7 +6048,7 @@
               </a:spcAft>
             </a:pPr>
             <a:r>
-              <a:rPr sz="1050">
+              <a:rPr sz="1600" dirty="0">
                 <a:solidFill>
                   <a:srgbClr val="CDD2DC"/>
                 </a:solidFill>
@@ -5654,6 +6100,7 @@
           <a:lstStyle/>
           <a:p>
             <a:pPr algn="ctr"/>
+            <a:endParaRPr/>
           </a:p>
         </p:txBody>
       </p:sp>
@@ -5666,7 +6113,7 @@
         <p:spPr>
           <a:xfrm>
             <a:off x="4572000" y="3913631"/>
-            <a:ext cx="3026664" cy="1911096"/>
+            <a:ext cx="3026664" cy="1544012"/>
           </a:xfrm>
           <a:prstGeom prst="rect">
             <a:avLst/>
@@ -5674,12 +6121,12 @@
           <a:noFill/>
         </p:spPr>
         <p:txBody>
-          <a:bodyPr wrap="square" tIns="0" bIns="0" lIns="0" rIns="0">
+          <a:bodyPr wrap="square" lIns="0" tIns="0" rIns="0" bIns="0">
             <a:spAutoFit/>
           </a:bodyPr>
           <a:lstStyle/>
           <a:p>
-            <a:pPr>
+            <a:pPr algn="ctr">
               <a:spcAft>
                 <a:spcPts val="1000"/>
               </a:spcAft>
@@ -5690,6 +6137,7 @@
               </a:defRPr>
             </a:pPr>
             <a:r>
+              <a:rPr sz="1600" i="1" u="sng" dirty="0"/>
               <a:t>YouTube Data API v3</a:t>
             </a:r>
           </a:p>
@@ -5700,7 +6148,7 @@
               </a:spcAft>
             </a:pPr>
             <a:r>
-              <a:rPr sz="1050">
+              <a:rPr sz="1400" dirty="0">
                 <a:solidFill>
                   <a:srgbClr val="CDD2DC"/>
                 </a:solidFill>
@@ -5715,7 +6163,7 @@
               </a:spcAft>
             </a:pPr>
             <a:r>
-              <a:rPr sz="1050">
+              <a:rPr sz="1400" dirty="0">
                 <a:solidFill>
                   <a:srgbClr val="CDD2DC"/>
                 </a:solidFill>
@@ -5730,7 +6178,7 @@
               </a:spcAft>
             </a:pPr>
             <a:r>
-              <a:rPr sz="1050">
+              <a:rPr sz="1400" dirty="0">
                 <a:solidFill>
                   <a:srgbClr val="CDD2DC"/>
                 </a:solidFill>
@@ -5745,7 +6193,7 @@
               </a:spcAft>
             </a:pPr>
             <a:r>
-              <a:rPr sz="1050">
+              <a:rPr sz="1400" dirty="0">
                 <a:solidFill>
                   <a:srgbClr val="CDD2DC"/>
                 </a:solidFill>
@@ -5797,6 +6245,7 @@
           <a:lstStyle/>
           <a:p>
             <a:pPr algn="ctr"/>
+            <a:endParaRPr/>
           </a:p>
         </p:txBody>
       </p:sp>
@@ -5809,7 +6258,7 @@
         <p:spPr>
           <a:xfrm>
             <a:off x="8211312" y="3913631"/>
-            <a:ext cx="3026664" cy="1911096"/>
+            <a:ext cx="3026664" cy="1759456"/>
           </a:xfrm>
           <a:prstGeom prst="rect">
             <a:avLst/>
@@ -5817,12 +6266,12 @@
           <a:noFill/>
         </p:spPr>
         <p:txBody>
-          <a:bodyPr wrap="square" tIns="0" bIns="0" lIns="0" rIns="0">
+          <a:bodyPr wrap="square" lIns="0" tIns="0" rIns="0" bIns="0">
             <a:spAutoFit/>
           </a:bodyPr>
           <a:lstStyle/>
           <a:p>
-            <a:pPr>
+            <a:pPr algn="ctr">
               <a:spcAft>
                 <a:spcPts val="1000"/>
               </a:spcAft>
@@ -5833,6 +6282,7 @@
               </a:defRPr>
             </a:pPr>
             <a:r>
+              <a:rPr sz="1600" i="1" u="sng" dirty="0"/>
               <a:t>Vite 5 (Build Tool)</a:t>
             </a:r>
           </a:p>
@@ -5843,7 +6293,7 @@
               </a:spcAft>
             </a:pPr>
             <a:r>
-              <a:rPr sz="1050">
+              <a:rPr sz="1400" dirty="0">
                 <a:solidFill>
                   <a:srgbClr val="CDD2DC"/>
                 </a:solidFill>
@@ -5858,7 +6308,7 @@
               </a:spcAft>
             </a:pPr>
             <a:r>
-              <a:rPr sz="1050">
+              <a:rPr sz="1400" dirty="0">
                 <a:solidFill>
                   <a:srgbClr val="CDD2DC"/>
                 </a:solidFill>
@@ -5873,7 +6323,7 @@
               </a:spcAft>
             </a:pPr>
             <a:r>
-              <a:rPr sz="1050">
+              <a:rPr sz="1400" dirty="0">
                 <a:solidFill>
                   <a:srgbClr val="CDD2DC"/>
                 </a:solidFill>
@@ -5888,7 +6338,7 @@
               </a:spcAft>
             </a:pPr>
             <a:r>
-              <a:rPr sz="1050">
+              <a:rPr sz="1400" dirty="0">
                 <a:solidFill>
                   <a:srgbClr val="CDD2DC"/>
                 </a:solidFill>
@@ -5903,14 +6353,14 @@
   <p:clrMapOvr>
     <a:masterClrMapping/>
   </p:clrMapOvr>
-  <p:transition spd="fast">
-    <p:push dir="l"/>
+  <p:transition>
+    <p:push/>
   </p:transition>
 </p:sld>
 </file>
 
 <file path=ppt/slides/slide4.xml><?xml version="1.0" encoding="utf-8"?>
-<p:sld xmlns:a="http://schemas.openxmlformats.org/drawingml/2006/main" xmlns:p="http://schemas.openxmlformats.org/presentationml/2006/main" xmlns:r="http://schemas.openxmlformats.org/officeDocument/2006/relationships">
+<p:sld xmlns:a="http://schemas.openxmlformats.org/drawingml/2006/main" xmlns:r="http://schemas.openxmlformats.org/officeDocument/2006/relationships" xmlns:p="http://schemas.openxmlformats.org/presentationml/2006/main">
   <p:cSld>
     <p:spTree>
       <p:nvGrpSpPr>
@@ -5918,7 +6368,14 @@
         <p:cNvGrpSpPr/>
         <p:nvPr/>
       </p:nvGrpSpPr>
-      <p:grpSpPr/>
+      <p:grpSpPr>
+        <a:xfrm>
+          <a:off x="0" y="0"/>
+          <a:ext cx="0" cy="0"/>
+          <a:chOff x="0" y="0"/>
+          <a:chExt cx="0" cy="0"/>
+        </a:xfrm>
+      </p:grpSpPr>
       <p:sp>
         <p:nvSpPr>
           <p:cNvPr id="2" name="Rectangle 1"/>
@@ -5959,6 +6416,7 @@
           <a:lstStyle/>
           <a:p>
             <a:pPr algn="ctr"/>
+            <a:endParaRPr/>
           </a:p>
         </p:txBody>
       </p:sp>
@@ -6002,6 +6460,7 @@
           <a:lstStyle/>
           <a:p>
             <a:pPr algn="ctr"/>
+            <a:endParaRPr/>
           </a:p>
         </p:txBody>
       </p:sp>
@@ -6049,7 +6508,7 @@
         <p:spPr>
           <a:xfrm>
             <a:off x="731520" y="621792"/>
-            <a:ext cx="10728655" cy="594360"/>
+            <a:ext cx="10728655" cy="523220"/>
           </a:xfrm>
           <a:prstGeom prst="rect">
             <a:avLst/>
@@ -6070,6 +6529,7 @@
               </a:defRPr>
             </a:pPr>
             <a:r>
+              <a:rPr sz="2800" i="1" u="sng" dirty="0"/>
               <a:t>Core Component Architecture &amp; Modularity</a:t>
             </a:r>
           </a:p>
@@ -6152,6 +6612,7 @@
           <a:lstStyle/>
           <a:p>
             <a:pPr algn="ctr"/>
+            <a:endParaRPr/>
           </a:p>
         </p:txBody>
       </p:sp>
@@ -6164,7 +6625,7 @@
         <p:spPr>
           <a:xfrm>
             <a:off x="932688" y="1490472"/>
-            <a:ext cx="3026664" cy="1911096"/>
+            <a:ext cx="3026664" cy="1544012"/>
           </a:xfrm>
           <a:prstGeom prst="rect">
             <a:avLst/>
@@ -6172,12 +6633,12 @@
           <a:noFill/>
         </p:spPr>
         <p:txBody>
-          <a:bodyPr wrap="square" tIns="0" bIns="0" lIns="0" rIns="0">
+          <a:bodyPr wrap="square" lIns="0" tIns="0" rIns="0" bIns="0">
             <a:spAutoFit/>
           </a:bodyPr>
           <a:lstStyle/>
           <a:p>
-            <a:pPr>
+            <a:pPr algn="ctr">
               <a:spcAft>
                 <a:spcPts val="1000"/>
               </a:spcAft>
@@ -6188,8 +6649,10 @@
               </a:defRPr>
             </a:pPr>
             <a:r>
+              <a:rPr sz="1600" i="1" u="sng" dirty="0" err="1"/>
               <a:t>Navbar.jsx</a:t>
             </a:r>
+            <a:endParaRPr sz="1600" i="1" u="sng" dirty="0"/>
           </a:p>
           <a:p>
             <a:pPr>
@@ -6198,7 +6661,7 @@
               </a:spcAft>
             </a:pPr>
             <a:r>
-              <a:rPr sz="1050">
+              <a:rPr sz="1400" dirty="0">
                 <a:solidFill>
                   <a:srgbClr val="CDD2DC"/>
                 </a:solidFill>
@@ -6213,7 +6676,7 @@
               </a:spcAft>
             </a:pPr>
             <a:r>
-              <a:rPr sz="1050">
+              <a:rPr sz="1400" dirty="0">
                 <a:solidFill>
                   <a:srgbClr val="CDD2DC"/>
                 </a:solidFill>
@@ -6228,7 +6691,7 @@
               </a:spcAft>
             </a:pPr>
             <a:r>
-              <a:rPr sz="1050">
+              <a:rPr sz="1400" dirty="0">
                 <a:solidFill>
                   <a:srgbClr val="CDD2DC"/>
                 </a:solidFill>
@@ -6243,12 +6706,20 @@
               </a:spcAft>
             </a:pPr>
             <a:r>
-              <a:rPr sz="1050">
-                <a:solidFill>
-                  <a:srgbClr val="CDD2DC"/>
-                </a:solidFill>
-              </a:rPr>
-              <a:t>• Collapsible hamburger drawer toggle.</a:t>
+              <a:rPr sz="1400" dirty="0">
+                <a:solidFill>
+                  <a:srgbClr val="CDD2DC"/>
+                </a:solidFill>
+              </a:rPr>
+              <a:t>• Collapsible hamburger drawer toggle</a:t>
+            </a:r>
+            <a:r>
+              <a:rPr sz="1050" dirty="0">
+                <a:solidFill>
+                  <a:srgbClr val="CDD2DC"/>
+                </a:solidFill>
+              </a:rPr>
+              <a:t>.</a:t>
             </a:r>
           </a:p>
         </p:txBody>
@@ -6295,6 +6766,7 @@
           <a:lstStyle/>
           <a:p>
             <a:pPr algn="ctr"/>
+            <a:endParaRPr/>
           </a:p>
         </p:txBody>
       </p:sp>
@@ -6307,7 +6779,7 @@
         <p:spPr>
           <a:xfrm>
             <a:off x="4572000" y="1490472"/>
-            <a:ext cx="3026664" cy="1911096"/>
+            <a:ext cx="3026664" cy="1759456"/>
           </a:xfrm>
           <a:prstGeom prst="rect">
             <a:avLst/>
@@ -6315,12 +6787,12 @@
           <a:noFill/>
         </p:spPr>
         <p:txBody>
-          <a:bodyPr wrap="square" tIns="0" bIns="0" lIns="0" rIns="0">
+          <a:bodyPr wrap="square" lIns="0" tIns="0" rIns="0" bIns="0">
             <a:spAutoFit/>
           </a:bodyPr>
           <a:lstStyle/>
           <a:p>
-            <a:pPr>
+            <a:pPr algn="ctr">
               <a:spcAft>
                 <a:spcPts val="1000"/>
               </a:spcAft>
@@ -6331,8 +6803,10 @@
               </a:defRPr>
             </a:pPr>
             <a:r>
+              <a:rPr sz="1600" i="1" u="sng" dirty="0" err="1"/>
               <a:t>Sidebar.jsx</a:t>
             </a:r>
+            <a:endParaRPr sz="1600" i="1" u="sng" dirty="0"/>
           </a:p>
           <a:p>
             <a:pPr>
@@ -6341,7 +6815,7 @@
               </a:spcAft>
             </a:pPr>
             <a:r>
-              <a:rPr sz="1050" b="1">
+              <a:rPr sz="1400" b="1" dirty="0">
                 <a:solidFill>
                   <a:srgbClr val="FFFFFF"/>
                 </a:solidFill>
@@ -6349,7 +6823,7 @@
               <a:t>• Main routes: </a:t>
             </a:r>
             <a:r>
-              <a:rPr sz="1050">
+              <a:rPr sz="1400" dirty="0">
                 <a:solidFill>
                   <a:srgbClr val="CDD2DC"/>
                 </a:solidFill>
@@ -6364,7 +6838,7 @@
               </a:spcAft>
             </a:pPr>
             <a:r>
-              <a:rPr sz="1050" b="1">
+              <a:rPr sz="1400" b="1" dirty="0">
                 <a:solidFill>
                   <a:srgbClr val="FFFFFF"/>
                 </a:solidFill>
@@ -6372,7 +6846,7 @@
               <a:t>• Protected: </a:t>
             </a:r>
             <a:r>
-              <a:rPr sz="1050">
+              <a:rPr sz="1400" dirty="0">
                 <a:solidFill>
                   <a:srgbClr val="CDD2DC"/>
                 </a:solidFill>
@@ -6387,7 +6861,7 @@
               </a:spcAft>
             </a:pPr>
             <a:r>
-              <a:rPr sz="1050">
+              <a:rPr sz="1400" dirty="0">
                 <a:solidFill>
                   <a:srgbClr val="CDD2DC"/>
                 </a:solidFill>
@@ -6402,7 +6876,7 @@
               </a:spcAft>
             </a:pPr>
             <a:r>
-              <a:rPr sz="1050">
+              <a:rPr sz="1400" dirty="0">
                 <a:solidFill>
                   <a:srgbClr val="CDD2DC"/>
                 </a:solidFill>
@@ -6454,6 +6928,7 @@
           <a:lstStyle/>
           <a:p>
             <a:pPr algn="ctr"/>
+            <a:endParaRPr/>
           </a:p>
         </p:txBody>
       </p:sp>
@@ -6466,7 +6941,7 @@
         <p:spPr>
           <a:xfrm>
             <a:off x="8211312" y="1490472"/>
-            <a:ext cx="3026664" cy="1911096"/>
+            <a:ext cx="3026664" cy="1544012"/>
           </a:xfrm>
           <a:prstGeom prst="rect">
             <a:avLst/>
@@ -6474,12 +6949,12 @@
           <a:noFill/>
         </p:spPr>
         <p:txBody>
-          <a:bodyPr wrap="square" tIns="0" bIns="0" lIns="0" rIns="0">
+          <a:bodyPr wrap="square" lIns="0" tIns="0" rIns="0" bIns="0">
             <a:spAutoFit/>
           </a:bodyPr>
           <a:lstStyle/>
           <a:p>
-            <a:pPr>
+            <a:pPr algn="ctr">
               <a:spcAft>
                 <a:spcPts val="1000"/>
               </a:spcAft>
@@ -6490,8 +6965,10 @@
               </a:defRPr>
             </a:pPr>
             <a:r>
+              <a:rPr sz="1600" i="1" u="sng" dirty="0" err="1"/>
               <a:t>VideoCard.jsx</a:t>
             </a:r>
+            <a:endParaRPr sz="1600" i="1" u="sng" dirty="0"/>
           </a:p>
           <a:p>
             <a:pPr>
@@ -6500,7 +6977,7 @@
               </a:spcAft>
             </a:pPr>
             <a:r>
-              <a:rPr sz="1050">
+              <a:rPr sz="1400" dirty="0">
                 <a:solidFill>
                   <a:srgbClr val="CDD2DC"/>
                 </a:solidFill>
@@ -6515,7 +6992,7 @@
               </a:spcAft>
             </a:pPr>
             <a:r>
-              <a:rPr sz="1050">
+              <a:rPr sz="1400" dirty="0">
                 <a:solidFill>
                   <a:srgbClr val="CDD2DC"/>
                 </a:solidFill>
@@ -6530,7 +7007,7 @@
               </a:spcAft>
             </a:pPr>
             <a:r>
-              <a:rPr sz="1050">
+              <a:rPr sz="1400" dirty="0">
                 <a:solidFill>
                   <a:srgbClr val="CDD2DC"/>
                 </a:solidFill>
@@ -6545,7 +7022,7 @@
               </a:spcAft>
             </a:pPr>
             <a:r>
-              <a:rPr sz="1050">
+              <a:rPr sz="1400" dirty="0">
                 <a:solidFill>
                   <a:srgbClr val="CDD2DC"/>
                 </a:solidFill>
@@ -6597,6 +7074,7 @@
           <a:lstStyle/>
           <a:p>
             <a:pPr algn="ctr"/>
+            <a:endParaRPr/>
           </a:p>
         </p:txBody>
       </p:sp>
@@ -6609,7 +7087,7 @@
         <p:spPr>
           <a:xfrm>
             <a:off x="932688" y="3913631"/>
-            <a:ext cx="3026664" cy="1911096"/>
+            <a:ext cx="3026664" cy="1759456"/>
           </a:xfrm>
           <a:prstGeom prst="rect">
             <a:avLst/>
@@ -6617,12 +7095,12 @@
           <a:noFill/>
         </p:spPr>
         <p:txBody>
-          <a:bodyPr wrap="square" tIns="0" bIns="0" lIns="0" rIns="0">
+          <a:bodyPr wrap="square" lIns="0" tIns="0" rIns="0" bIns="0">
             <a:spAutoFit/>
           </a:bodyPr>
           <a:lstStyle/>
           <a:p>
-            <a:pPr>
+            <a:pPr algn="ctr">
               <a:spcAft>
                 <a:spcPts val="1000"/>
               </a:spcAft>
@@ -6633,8 +7111,10 @@
               </a:defRPr>
             </a:pPr>
             <a:r>
+              <a:rPr sz="1600" i="1" u="sng" dirty="0" err="1"/>
               <a:t>WatchPage.jsx</a:t>
             </a:r>
+            <a:endParaRPr sz="1600" i="1" u="sng" dirty="0"/>
           </a:p>
           <a:p>
             <a:pPr>
@@ -6643,7 +7123,7 @@
               </a:spcAft>
             </a:pPr>
             <a:r>
-              <a:rPr sz="1050">
+              <a:rPr sz="1400" dirty="0">
                 <a:solidFill>
                   <a:srgbClr val="CDD2DC"/>
                 </a:solidFill>
@@ -6658,7 +7138,7 @@
               </a:spcAft>
             </a:pPr>
             <a:r>
-              <a:rPr sz="1050" b="1">
+              <a:rPr sz="1400" b="1" dirty="0">
                 <a:solidFill>
                   <a:srgbClr val="FFFFFF"/>
                 </a:solidFill>
@@ -6666,7 +7146,7 @@
               <a:t>• Action controls: </a:t>
             </a:r>
             <a:r>
-              <a:rPr sz="1050">
+              <a:rPr sz="1400" dirty="0">
                 <a:solidFill>
                   <a:srgbClr val="CDD2DC"/>
                 </a:solidFill>
@@ -6681,7 +7161,7 @@
               </a:spcAft>
             </a:pPr>
             <a:r>
-              <a:rPr sz="1050">
+              <a:rPr sz="1400" dirty="0">
                 <a:solidFill>
                   <a:srgbClr val="CDD2DC"/>
                 </a:solidFill>
@@ -6696,12 +7176,28 @@
               </a:spcAft>
             </a:pPr>
             <a:r>
-              <a:rPr sz="1050">
-                <a:solidFill>
-                  <a:srgbClr val="CDD2DC"/>
-                </a:solidFill>
-              </a:rPr>
-              <a:t>• Real-time useRef comment thread.</a:t>
+              <a:rPr sz="1400" dirty="0">
+                <a:solidFill>
+                  <a:srgbClr val="CDD2DC"/>
+                </a:solidFill>
+              </a:rPr>
+              <a:t>• Real-time </a:t>
+            </a:r>
+            <a:r>
+              <a:rPr sz="1400" dirty="0" err="1">
+                <a:solidFill>
+                  <a:srgbClr val="CDD2DC"/>
+                </a:solidFill>
+              </a:rPr>
+              <a:t>useRef</a:t>
+            </a:r>
+            <a:r>
+              <a:rPr sz="1400" dirty="0">
+                <a:solidFill>
+                  <a:srgbClr val="CDD2DC"/>
+                </a:solidFill>
+              </a:rPr>
+              <a:t> comment thread.</a:t>
             </a:r>
           </a:p>
         </p:txBody>
@@ -6748,6 +7244,7 @@
           <a:lstStyle/>
           <a:p>
             <a:pPr algn="ctr"/>
+            <a:endParaRPr/>
           </a:p>
         </p:txBody>
       </p:sp>
@@ -6760,7 +7257,7 @@
         <p:spPr>
           <a:xfrm>
             <a:off x="4572000" y="3913631"/>
-            <a:ext cx="3026664" cy="1911096"/>
+            <a:ext cx="3026664" cy="1544012"/>
           </a:xfrm>
           <a:prstGeom prst="rect">
             <a:avLst/>
@@ -6768,12 +7265,12 @@
           <a:noFill/>
         </p:spPr>
         <p:txBody>
-          <a:bodyPr wrap="square" tIns="0" bIns="0" lIns="0" rIns="0">
+          <a:bodyPr wrap="square" lIns="0" tIns="0" rIns="0" bIns="0">
             <a:spAutoFit/>
           </a:bodyPr>
           <a:lstStyle/>
           <a:p>
-            <a:pPr>
+            <a:pPr algn="ctr">
               <a:spcAft>
                 <a:spcPts val="1000"/>
               </a:spcAft>
@@ -6784,8 +7281,10 @@
               </a:defRPr>
             </a:pPr>
             <a:r>
+              <a:rPr sz="1600" i="1" u="sng" dirty="0" err="1"/>
               <a:t>AuthModal.jsx</a:t>
             </a:r>
+            <a:endParaRPr sz="1600" i="1" u="sng" dirty="0"/>
           </a:p>
           <a:p>
             <a:pPr>
@@ -6794,7 +7293,7 @@
               </a:spcAft>
             </a:pPr>
             <a:r>
-              <a:rPr sz="1050">
+              <a:rPr sz="1400" dirty="0">
                 <a:solidFill>
                   <a:srgbClr val="CDD2DC"/>
                 </a:solidFill>
@@ -6809,7 +7308,7 @@
               </a:spcAft>
             </a:pPr>
             <a:r>
-              <a:rPr sz="1050">
+              <a:rPr sz="1400" dirty="0">
                 <a:solidFill>
                   <a:srgbClr val="CDD2DC"/>
                 </a:solidFill>
@@ -6824,7 +7323,7 @@
               </a:spcAft>
             </a:pPr>
             <a:r>
-              <a:rPr sz="1050">
+              <a:rPr sz="1400" dirty="0">
                 <a:solidFill>
                   <a:srgbClr val="CDD2DC"/>
                 </a:solidFill>
@@ -6839,12 +7338,28 @@
               </a:spcAft>
             </a:pPr>
             <a:r>
-              <a:rPr sz="1050">
-                <a:solidFill>
-                  <a:srgbClr val="CDD2DC"/>
-                </a:solidFill>
-              </a:rPr>
-              <a:t>• Session persistence via LocalStorage.</a:t>
+              <a:rPr sz="1400" dirty="0">
+                <a:solidFill>
+                  <a:srgbClr val="CDD2DC"/>
+                </a:solidFill>
+              </a:rPr>
+              <a:t>• Session persistence via </a:t>
+            </a:r>
+            <a:r>
+              <a:rPr sz="1400" dirty="0" err="1">
+                <a:solidFill>
+                  <a:srgbClr val="CDD2DC"/>
+                </a:solidFill>
+              </a:rPr>
+              <a:t>LocalStorage</a:t>
+            </a:r>
+            <a:r>
+              <a:rPr sz="1400" dirty="0">
+                <a:solidFill>
+                  <a:srgbClr val="CDD2DC"/>
+                </a:solidFill>
+              </a:rPr>
+              <a:t>.</a:t>
             </a:r>
           </a:p>
         </p:txBody>
@@ -6891,6 +7406,7 @@
           <a:lstStyle/>
           <a:p>
             <a:pPr algn="ctr"/>
+            <a:endParaRPr/>
           </a:p>
         </p:txBody>
       </p:sp>
@@ -6903,7 +7419,7 @@
         <p:spPr>
           <a:xfrm>
             <a:off x="8211312" y="3913631"/>
-            <a:ext cx="3026664" cy="1911096"/>
+            <a:ext cx="3026664" cy="1544012"/>
           </a:xfrm>
           <a:prstGeom prst="rect">
             <a:avLst/>
@@ -6911,12 +7427,12 @@
           <a:noFill/>
         </p:spPr>
         <p:txBody>
-          <a:bodyPr wrap="square" tIns="0" bIns="0" lIns="0" rIns="0">
+          <a:bodyPr wrap="square" lIns="0" tIns="0" rIns="0" bIns="0">
             <a:spAutoFit/>
           </a:bodyPr>
           <a:lstStyle/>
           <a:p>
-            <a:pPr>
+            <a:pPr algn="ctr">
               <a:spcAft>
                 <a:spcPts val="1000"/>
               </a:spcAft>
@@ -6927,8 +7443,10 @@
               </a:defRPr>
             </a:pPr>
             <a:r>
+              <a:rPr sz="1600" i="1" u="sng" dirty="0" err="1"/>
               <a:t>SettingsModal.jsx</a:t>
             </a:r>
+            <a:endParaRPr sz="1600" i="1" u="sng" dirty="0"/>
           </a:p>
           <a:p>
             <a:pPr>
@@ -6937,7 +7455,7 @@
               </a:spcAft>
             </a:pPr>
             <a:r>
-              <a:rPr sz="1050">
+              <a:rPr sz="1400" dirty="0">
                 <a:solidFill>
                   <a:srgbClr val="CDD2DC"/>
                 </a:solidFill>
@@ -6952,7 +7470,7 @@
               </a:spcAft>
             </a:pPr>
             <a:r>
-              <a:rPr sz="1050">
+              <a:rPr sz="1400" dirty="0">
                 <a:solidFill>
                   <a:srgbClr val="CDD2DC"/>
                 </a:solidFill>
@@ -6967,7 +7485,7 @@
               </a:spcAft>
             </a:pPr>
             <a:r>
-              <a:rPr sz="1050">
+              <a:rPr sz="1400" dirty="0">
                 <a:solidFill>
                   <a:srgbClr val="CDD2DC"/>
                 </a:solidFill>
@@ -6982,7 +7500,7 @@
               </a:spcAft>
             </a:pPr>
             <a:r>
-              <a:rPr sz="1050">
+              <a:rPr sz="1400" dirty="0">
                 <a:solidFill>
                   <a:srgbClr val="CDD2DC"/>
                 </a:solidFill>
@@ -6997,14 +7515,14 @@
   <p:clrMapOvr>
     <a:masterClrMapping/>
   </p:clrMapOvr>
-  <p:transition spd="fast">
-    <p:push dir="l"/>
+  <p:transition>
+    <p:push/>
   </p:transition>
 </p:sld>
 </file>
 
 <file path=ppt/slides/slide5.xml><?xml version="1.0" encoding="utf-8"?>
-<p:sld xmlns:a="http://schemas.openxmlformats.org/drawingml/2006/main" xmlns:p="http://schemas.openxmlformats.org/presentationml/2006/main" xmlns:r="http://schemas.openxmlformats.org/officeDocument/2006/relationships">
+<p:sld xmlns:a="http://schemas.openxmlformats.org/drawingml/2006/main" xmlns:r="http://schemas.openxmlformats.org/officeDocument/2006/relationships" xmlns:p="http://schemas.openxmlformats.org/presentationml/2006/main">
   <p:cSld>
     <p:spTree>
       <p:nvGrpSpPr>
@@ -7012,7 +7530,14 @@
         <p:cNvGrpSpPr/>
         <p:nvPr/>
       </p:nvGrpSpPr>
-      <p:grpSpPr/>
+      <p:grpSpPr>
+        <a:xfrm>
+          <a:off x="0" y="0"/>
+          <a:ext cx="0" cy="0"/>
+          <a:chOff x="0" y="0"/>
+          <a:chExt cx="0" cy="0"/>
+        </a:xfrm>
+      </p:grpSpPr>
       <p:sp>
         <p:nvSpPr>
           <p:cNvPr id="2" name="Rectangle 1"/>
@@ -7053,6 +7578,7 @@
           <a:lstStyle/>
           <a:p>
             <a:pPr algn="ctr"/>
+            <a:endParaRPr/>
           </a:p>
         </p:txBody>
       </p:sp>
@@ -7096,6 +7622,7 @@
           <a:lstStyle/>
           <a:p>
             <a:pPr algn="ctr"/>
+            <a:endParaRPr/>
           </a:p>
         </p:txBody>
       </p:sp>
@@ -7143,7 +7670,7 @@
         <p:spPr>
           <a:xfrm>
             <a:off x="731520" y="621792"/>
-            <a:ext cx="10728655" cy="594360"/>
+            <a:ext cx="10728655" cy="523220"/>
           </a:xfrm>
           <a:prstGeom prst="rect">
             <a:avLst/>
@@ -7164,6 +7691,7 @@
               </a:defRPr>
             </a:pPr>
             <a:r>
+              <a:rPr sz="2800" i="1" u="sng" dirty="0"/>
               <a:t>In-Site Video Streaming Engine (/watch/:id) — No Redirecting</a:t>
             </a:r>
           </a:p>
@@ -7246,6 +7774,7 @@
           <a:lstStyle/>
           <a:p>
             <a:pPr algn="ctr"/>
+            <a:endParaRPr/>
           </a:p>
         </p:txBody>
       </p:sp>
@@ -7315,6 +7844,7 @@
           <a:lstStyle/>
           <a:p>
             <a:pPr algn="ctr"/>
+            <a:endParaRPr/>
           </a:p>
         </p:txBody>
       </p:sp>
@@ -7326,8 +7856,8 @@
         </p:nvSpPr>
         <p:spPr>
           <a:xfrm>
-            <a:off x="6449263" y="1490472"/>
-            <a:ext cx="4809744" cy="4334255"/>
+            <a:off x="6562683" y="1418525"/>
+            <a:ext cx="4582904" cy="4478149"/>
           </a:xfrm>
           <a:prstGeom prst="rect">
             <a:avLst/>
@@ -7335,12 +7865,12 @@
           <a:noFill/>
         </p:spPr>
         <p:txBody>
-          <a:bodyPr wrap="square" tIns="0" bIns="0" lIns="0" rIns="0">
+          <a:bodyPr wrap="square" lIns="0" tIns="0" rIns="0" bIns="0">
             <a:spAutoFit/>
           </a:bodyPr>
           <a:lstStyle/>
           <a:p>
-            <a:pPr>
+            <a:pPr algn="ctr">
               <a:spcAft>
                 <a:spcPts val="1000"/>
               </a:spcAft>
@@ -7351,6 +7881,7 @@
               </a:defRPr>
             </a:pPr>
             <a:r>
+              <a:rPr sz="1600" i="1" u="sng" dirty="0"/>
               <a:t>In-Site Streaming &amp; Action Controls</a:t>
             </a:r>
           </a:p>
@@ -7361,7 +7892,7 @@
               </a:spcAft>
             </a:pPr>
             <a:r>
-              <a:rPr sz="1100" b="1">
+              <a:rPr sz="1600" b="1" dirty="0">
                 <a:solidFill>
                   <a:srgbClr val="FFFFFF"/>
                 </a:solidFill>
@@ -7369,12 +7900,44 @@
               <a:t>• 100% In-Site Video Playback: </a:t>
             </a:r>
             <a:r>
-              <a:rPr sz="1100">
-                <a:solidFill>
-                  <a:srgbClr val="CDD2DC"/>
-                </a:solidFill>
-              </a:rPr>
-              <a:t>Media streams directly inside PheW TuBe on the /watch/:id route with zero external redirects to YouTube.</a:t>
+              <a:rPr sz="1600" dirty="0">
+                <a:solidFill>
+                  <a:srgbClr val="CDD2DC"/>
+                </a:solidFill>
+              </a:rPr>
+              <a:t>Media streams directly inside </a:t>
+            </a:r>
+            <a:r>
+              <a:rPr sz="1600" dirty="0" err="1">
+                <a:solidFill>
+                  <a:srgbClr val="CDD2DC"/>
+                </a:solidFill>
+              </a:rPr>
+              <a:t>PheW</a:t>
+            </a:r>
+            <a:r>
+              <a:rPr sz="1600" dirty="0">
+                <a:solidFill>
+                  <a:srgbClr val="CDD2DC"/>
+                </a:solidFill>
+              </a:rPr>
+              <a:t> </a:t>
+            </a:r>
+            <a:r>
+              <a:rPr sz="1600" dirty="0" err="1">
+                <a:solidFill>
+                  <a:srgbClr val="CDD2DC"/>
+                </a:solidFill>
+              </a:rPr>
+              <a:t>TuBe</a:t>
+            </a:r>
+            <a:r>
+              <a:rPr sz="1600" dirty="0">
+                <a:solidFill>
+                  <a:srgbClr val="CDD2DC"/>
+                </a:solidFill>
+              </a:rPr>
+              <a:t> on the /watch/:id route with zero external redirects to YouTube.</a:t>
             </a:r>
           </a:p>
           <a:p>
@@ -7384,7 +7947,7 @@
               </a:spcAft>
             </a:pPr>
             <a:r>
-              <a:rPr sz="1100" b="1">
+              <a:rPr sz="1600" b="1" dirty="0">
                 <a:solidFill>
                   <a:srgbClr val="FFFFFF"/>
                 </a:solidFill>
@@ -7392,7 +7955,7 @@
               <a:t>• Working Interactive Controls: </a:t>
             </a:r>
             <a:r>
-              <a:rPr sz="1100">
+              <a:rPr sz="1600" dirty="0">
                 <a:solidFill>
                   <a:srgbClr val="CDD2DC"/>
                 </a:solidFill>
@@ -7407,7 +7970,7 @@
               </a:spcAft>
             </a:pPr>
             <a:r>
-              <a:rPr sz="1100" b="1">
+              <a:rPr sz="1600" b="1" dirty="0">
                 <a:solidFill>
                   <a:srgbClr val="FFFFFF"/>
                 </a:solidFill>
@@ -7415,7 +7978,7 @@
               <a:t>• Channel Subscription Engine: </a:t>
             </a:r>
             <a:r>
-              <a:rPr sz="1100">
+              <a:rPr sz="1600" dirty="0">
                 <a:solidFill>
                   <a:srgbClr val="CDD2DC"/>
                 </a:solidFill>
@@ -7430,7 +7993,7 @@
               </a:spcAft>
             </a:pPr>
             <a:r>
-              <a:rPr sz="1100" b="1">
+              <a:rPr sz="1600" b="1" dirty="0">
                 <a:solidFill>
                   <a:srgbClr val="FFFFFF"/>
                 </a:solidFill>
@@ -7438,7 +8001,7 @@
               <a:t>• Up-Next Recommendation Sidebar: </a:t>
             </a:r>
             <a:r>
-              <a:rPr sz="1100">
+              <a:rPr sz="1600" dirty="0">
                 <a:solidFill>
                   <a:srgbClr val="CDD2DC"/>
                 </a:solidFill>
@@ -7453,7 +8016,7 @@
               </a:spcAft>
             </a:pPr>
             <a:r>
-              <a:rPr sz="1100" b="1">
+              <a:rPr sz="1600" b="1" dirty="0">
                 <a:solidFill>
                   <a:srgbClr val="FFFFFF"/>
                 </a:solidFill>
@@ -7461,7 +8024,7 @@
               <a:t>• Full Video Metadata: </a:t>
             </a:r>
             <a:r>
-              <a:rPr sz="1100">
+              <a:rPr sz="1600" dirty="0">
                 <a:solidFill>
                   <a:srgbClr val="CDD2DC"/>
                 </a:solidFill>
@@ -7476,14 +8039,14 @@
   <p:clrMapOvr>
     <a:masterClrMapping/>
   </p:clrMapOvr>
-  <p:transition spd="fast">
-    <p:push dir="l"/>
+  <p:transition>
+    <p:push/>
   </p:transition>
 </p:sld>
 </file>
 
 <file path=ppt/slides/slide6.xml><?xml version="1.0" encoding="utf-8"?>
-<p:sld xmlns:a="http://schemas.openxmlformats.org/drawingml/2006/main" xmlns:p="http://schemas.openxmlformats.org/presentationml/2006/main" xmlns:r="http://schemas.openxmlformats.org/officeDocument/2006/relationships">
+<p:sld xmlns:a="http://schemas.openxmlformats.org/drawingml/2006/main" xmlns:r="http://schemas.openxmlformats.org/officeDocument/2006/relationships" xmlns:p="http://schemas.openxmlformats.org/presentationml/2006/main">
   <p:cSld>
     <p:spTree>
       <p:nvGrpSpPr>
@@ -7491,7 +8054,14 @@
         <p:cNvGrpSpPr/>
         <p:nvPr/>
       </p:nvGrpSpPr>
-      <p:grpSpPr/>
+      <p:grpSpPr>
+        <a:xfrm>
+          <a:off x="0" y="0"/>
+          <a:ext cx="0" cy="0"/>
+          <a:chOff x="0" y="0"/>
+          <a:chExt cx="0" cy="0"/>
+        </a:xfrm>
+      </p:grpSpPr>
       <p:sp>
         <p:nvSpPr>
           <p:cNvPr id="2" name="Rectangle 1"/>
@@ -7532,6 +8102,7 @@
           <a:lstStyle/>
           <a:p>
             <a:pPr algn="ctr"/>
+            <a:endParaRPr/>
           </a:p>
         </p:txBody>
       </p:sp>
@@ -7575,6 +8146,7 @@
           <a:lstStyle/>
           <a:p>
             <a:pPr algn="ctr"/>
+            <a:endParaRPr/>
           </a:p>
         </p:txBody>
       </p:sp>
@@ -7622,7 +8194,7 @@
         <p:spPr>
           <a:xfrm>
             <a:off x="731520" y="621792"/>
-            <a:ext cx="10728655" cy="594360"/>
+            <a:ext cx="10728655" cy="523220"/>
           </a:xfrm>
           <a:prstGeom prst="rect">
             <a:avLst/>
@@ -7643,7 +8215,16 @@
               </a:defRPr>
             </a:pPr>
             <a:r>
-              <a:t>Interactive Comments with useRef &amp; Voice Search Pulse</a:t>
+              <a:rPr sz="2800" i="1" u="sng" dirty="0"/>
+              <a:t>Interactive Comments with </a:t>
+            </a:r>
+            <a:r>
+              <a:rPr sz="2800" i="1" u="sng" dirty="0" err="1"/>
+              <a:t>useRef</a:t>
+            </a:r>
+            <a:r>
+              <a:rPr sz="2800" i="1" u="sng" dirty="0"/>
+              <a:t> &amp; Voice Search Pulse</a:t>
             </a:r>
           </a:p>
         </p:txBody>
@@ -7725,6 +8306,7 @@
           <a:lstStyle/>
           <a:p>
             <a:pPr algn="ctr"/>
+            <a:endParaRPr/>
           </a:p>
         </p:txBody>
       </p:sp>
@@ -7794,6 +8376,7 @@
           <a:lstStyle/>
           <a:p>
             <a:pPr algn="ctr"/>
+            <a:endParaRPr/>
           </a:p>
         </p:txBody>
       </p:sp>
@@ -7806,7 +8389,7 @@
         <p:spPr>
           <a:xfrm>
             <a:off x="6449263" y="1490472"/>
-            <a:ext cx="4809744" cy="4334255"/>
+            <a:ext cx="4809744" cy="3985706"/>
           </a:xfrm>
           <a:prstGeom prst="rect">
             <a:avLst/>
@@ -7814,12 +8397,12 @@
           <a:noFill/>
         </p:spPr>
         <p:txBody>
-          <a:bodyPr wrap="square" tIns="0" bIns="0" lIns="0" rIns="0">
+          <a:bodyPr wrap="square" lIns="0" tIns="0" rIns="0" bIns="0">
             <a:spAutoFit/>
           </a:bodyPr>
           <a:lstStyle/>
           <a:p>
-            <a:pPr>
+            <a:pPr algn="ctr">
               <a:spcAft>
                 <a:spcPts val="1000"/>
               </a:spcAft>
@@ -7830,6 +8413,7 @@
               </a:defRPr>
             </a:pPr>
             <a:r>
+              <a:rPr sz="1600" i="1" u="sng" dirty="0"/>
               <a:t>Comments Thread &amp; Speech API Specs</a:t>
             </a:r>
           </a:p>
@@ -7840,7 +8424,7 @@
               </a:spcAft>
             </a:pPr>
             <a:r>
-              <a:rPr sz="1100" b="1">
+              <a:rPr sz="1600" b="1" dirty="0">
                 <a:solidFill>
                   <a:srgbClr val="FFFFFF"/>
                 </a:solidFill>
@@ -7848,7 +8432,7 @@
               <a:t>• Native Web Speech API Mic: </a:t>
             </a:r>
             <a:r>
-              <a:rPr sz="1100">
+              <a:rPr sz="1600" dirty="0">
                 <a:solidFill>
                   <a:srgbClr val="CDD2DC"/>
                 </a:solidFill>
@@ -7863,15 +8447,31 @@
               </a:spcAft>
             </a:pPr>
             <a:r>
-              <a:rPr sz="1100" b="1">
+              <a:rPr sz="1600" b="1" dirty="0">
                 <a:solidFill>
                   <a:srgbClr val="FFFFFF"/>
                 </a:solidFill>
               </a:rPr>
-              <a:t>• DOM Control via useRef: </a:t>
-            </a:r>
-            <a:r>
-              <a:rPr sz="1100">
+              <a:t>• DOM Control via </a:t>
+            </a:r>
+            <a:r>
+              <a:rPr sz="1600" b="1" dirty="0" err="1">
+                <a:solidFill>
+                  <a:srgbClr val="FFFFFF"/>
+                </a:solidFill>
+              </a:rPr>
+              <a:t>useRef</a:t>
+            </a:r>
+            <a:r>
+              <a:rPr sz="1600" b="1" dirty="0">
+                <a:solidFill>
+                  <a:srgbClr val="FFFFFF"/>
+                </a:solidFill>
+              </a:rPr>
+              <a:t>: </a:t>
+            </a:r>
+            <a:r>
+              <a:rPr sz="1600" dirty="0">
                 <a:solidFill>
                   <a:srgbClr val="CDD2DC"/>
                 </a:solidFill>
@@ -7886,7 +8486,7 @@
               </a:spcAft>
             </a:pPr>
             <a:r>
-              <a:rPr sz="1100" b="1">
+              <a:rPr sz="1600" b="1" dirty="0">
                 <a:solidFill>
                   <a:srgbClr val="FFFFFF"/>
                 </a:solidFill>
@@ -7894,7 +8494,7 @@
               <a:t>• Real-Time Discussion Thread: </a:t>
             </a:r>
             <a:r>
-              <a:rPr sz="1100">
+              <a:rPr sz="1600" dirty="0">
                 <a:solidFill>
                   <a:srgbClr val="CDD2DC"/>
                 </a:solidFill>
@@ -7909,7 +8509,7 @@
               </a:spcAft>
             </a:pPr>
             <a:r>
-              <a:rPr sz="1100" b="1">
+              <a:rPr sz="1600" b="1" dirty="0">
                 <a:solidFill>
                   <a:srgbClr val="FFFFFF"/>
                 </a:solidFill>
@@ -7917,7 +8517,7 @@
               <a:t>• Sorting &amp; Filtering Engine: </a:t>
             </a:r>
             <a:r>
-              <a:rPr sz="1100">
+              <a:rPr sz="1600" dirty="0">
                 <a:solidFill>
                   <a:srgbClr val="CDD2DC"/>
                 </a:solidFill>
@@ -7932,7 +8532,7 @@
               </a:spcAft>
             </a:pPr>
             <a:r>
-              <a:rPr sz="1100" b="1">
+              <a:rPr sz="1600" b="1" dirty="0">
                 <a:solidFill>
                   <a:srgbClr val="FFFFFF"/>
                 </a:solidFill>
@@ -7940,7 +8540,7 @@
               <a:t>• Comment Engagement Metrics: </a:t>
             </a:r>
             <a:r>
-              <a:rPr sz="1100">
+              <a:rPr sz="1600" dirty="0">
                 <a:solidFill>
                   <a:srgbClr val="CDD2DC"/>
                 </a:solidFill>
@@ -7955,14 +8555,14 @@
   <p:clrMapOvr>
     <a:masterClrMapping/>
   </p:clrMapOvr>
-  <p:transition spd="fast">
-    <p:push dir="l"/>
+  <p:transition>
+    <p:push/>
   </p:transition>
 </p:sld>
 </file>
 
 <file path=ppt/slides/slide7.xml><?xml version="1.0" encoding="utf-8"?>
-<p:sld xmlns:a="http://schemas.openxmlformats.org/drawingml/2006/main" xmlns:p="http://schemas.openxmlformats.org/presentationml/2006/main" xmlns:r="http://schemas.openxmlformats.org/officeDocument/2006/relationships">
+<p:sld xmlns:a="http://schemas.openxmlformats.org/drawingml/2006/main" xmlns:r="http://schemas.openxmlformats.org/officeDocument/2006/relationships" xmlns:p="http://schemas.openxmlformats.org/presentationml/2006/main">
   <p:cSld>
     <p:spTree>
       <p:nvGrpSpPr>
@@ -7970,7 +8570,14 @@
         <p:cNvGrpSpPr/>
         <p:nvPr/>
       </p:nvGrpSpPr>
-      <p:grpSpPr/>
+      <p:grpSpPr>
+        <a:xfrm>
+          <a:off x="0" y="0"/>
+          <a:ext cx="0" cy="0"/>
+          <a:chOff x="0" y="0"/>
+          <a:chExt cx="0" cy="0"/>
+        </a:xfrm>
+      </p:grpSpPr>
       <p:sp>
         <p:nvSpPr>
           <p:cNvPr id="2" name="Rectangle 1"/>
@@ -8011,6 +8618,7 @@
           <a:lstStyle/>
           <a:p>
             <a:pPr algn="ctr"/>
+            <a:endParaRPr/>
           </a:p>
         </p:txBody>
       </p:sp>
@@ -8054,6 +8662,7 @@
           <a:lstStyle/>
           <a:p>
             <a:pPr algn="ctr"/>
+            <a:endParaRPr/>
           </a:p>
         </p:txBody>
       </p:sp>
@@ -8101,7 +8710,7 @@
         <p:spPr>
           <a:xfrm>
             <a:off x="731520" y="621792"/>
-            <a:ext cx="10728655" cy="594360"/>
+            <a:ext cx="10728655" cy="523220"/>
           </a:xfrm>
           <a:prstGeom prst="rect">
             <a:avLst/>
@@ -8122,6 +8731,7 @@
               </a:defRPr>
             </a:pPr>
             <a:r>
+              <a:rPr sz="2800" i="1" u="sng" dirty="0"/>
               <a:t>Protected Routing &amp; Guest Authentication Gatekeeper</a:t>
             </a:r>
           </a:p>
@@ -8204,6 +8814,7 @@
           <a:lstStyle/>
           <a:p>
             <a:pPr algn="ctr"/>
+            <a:endParaRPr/>
           </a:p>
         </p:txBody>
       </p:sp>
@@ -8273,6 +8884,7 @@
           <a:lstStyle/>
           <a:p>
             <a:pPr algn="ctr"/>
+            <a:endParaRPr/>
           </a:p>
         </p:txBody>
       </p:sp>
@@ -8285,7 +8897,7 @@
         <p:spPr>
           <a:xfrm>
             <a:off x="6449263" y="1490472"/>
-            <a:ext cx="4809744" cy="4334255"/>
+            <a:ext cx="4809744" cy="4231928"/>
           </a:xfrm>
           <a:prstGeom prst="rect">
             <a:avLst/>
@@ -8293,12 +8905,12 @@
           <a:noFill/>
         </p:spPr>
         <p:txBody>
-          <a:bodyPr wrap="square" tIns="0" bIns="0" lIns="0" rIns="0">
+          <a:bodyPr wrap="square" lIns="0" tIns="0" rIns="0" bIns="0">
             <a:spAutoFit/>
           </a:bodyPr>
           <a:lstStyle/>
           <a:p>
-            <a:pPr>
+            <a:pPr algn="ctr">
               <a:spcAft>
                 <a:spcPts val="1000"/>
               </a:spcAft>
@@ -8309,6 +8921,7 @@
               </a:defRPr>
             </a:pPr>
             <a:r>
+              <a:rPr sz="1600" i="1" u="sng" dirty="0"/>
               <a:t>Protected Routing &amp; Session Specs</a:t>
             </a:r>
           </a:p>
@@ -8319,7 +8932,7 @@
               </a:spcAft>
             </a:pPr>
             <a:r>
-              <a:rPr sz="1100" b="1">
+              <a:rPr sz="1600" b="1" dirty="0">
                 <a:solidFill>
                   <a:srgbClr val="FFFFFF"/>
                 </a:solidFill>
@@ -8327,7 +8940,7 @@
               <a:t>• Dedicated Auth Modal: </a:t>
             </a:r>
             <a:r>
-              <a:rPr sz="1100">
+              <a:rPr sz="1600" dirty="0">
                 <a:solidFill>
                   <a:srgbClr val="CDD2DC"/>
                 </a:solidFill>
@@ -8342,7 +8955,7 @@
               </a:spcAft>
             </a:pPr>
             <a:r>
-              <a:rPr sz="1100" b="1">
+              <a:rPr sz="1600" b="1" dirty="0">
                 <a:solidFill>
                   <a:srgbClr val="FFFFFF"/>
                 </a:solidFill>
@@ -8350,7 +8963,7 @@
               <a:t>• Strict Protected Route Gatekeeper: </a:t>
             </a:r>
             <a:r>
-              <a:rPr sz="1100">
+              <a:rPr sz="1600" dirty="0">
                 <a:solidFill>
                   <a:srgbClr val="CDD2DC"/>
                 </a:solidFill>
@@ -8365,7 +8978,7 @@
               </a:spcAft>
             </a:pPr>
             <a:r>
-              <a:rPr sz="1100" b="1">
+              <a:rPr sz="1600" b="1" dirty="0">
                 <a:solidFill>
                   <a:srgbClr val="FFFFFF"/>
                 </a:solidFill>
@@ -8373,7 +8986,7 @@
               <a:t>• Non-Disruptive Interception: </a:t>
             </a:r>
             <a:r>
-              <a:rPr sz="1100">
+              <a:rPr sz="1600" dirty="0">
                 <a:solidFill>
                   <a:srgbClr val="CDD2DC"/>
                 </a:solidFill>
@@ -8388,7 +9001,7 @@
               </a:spcAft>
             </a:pPr>
             <a:r>
-              <a:rPr sz="1100" b="1">
+              <a:rPr sz="1600" b="1" dirty="0">
                 <a:solidFill>
                   <a:srgbClr val="FFFFFF"/>
                 </a:solidFill>
@@ -8396,7 +9009,7 @@
               <a:t>• Automatic Session Hydration: </a:t>
             </a:r>
             <a:r>
-              <a:rPr sz="1100">
+              <a:rPr sz="1600" dirty="0">
                 <a:solidFill>
                   <a:srgbClr val="CDD2DC"/>
                 </a:solidFill>
@@ -8411,7 +9024,7 @@
               </a:spcAft>
             </a:pPr>
             <a:r>
-              <a:rPr sz="1100" b="1">
+              <a:rPr sz="1600" b="1" dirty="0">
                 <a:solidFill>
                   <a:srgbClr val="FFFFFF"/>
                 </a:solidFill>
@@ -8419,12 +9032,28 @@
               <a:t>• Session Persistence: </a:t>
             </a:r>
             <a:r>
-              <a:rPr sz="1100">
-                <a:solidFill>
-                  <a:srgbClr val="CDD2DC"/>
-                </a:solidFill>
-              </a:rPr>
-              <a:t>Stores encrypted session state in LocalStorage, preserving login across browser reloads.</a:t>
+              <a:rPr sz="1600" dirty="0">
+                <a:solidFill>
+                  <a:srgbClr val="CDD2DC"/>
+                </a:solidFill>
+              </a:rPr>
+              <a:t>Stores encrypted session state in </a:t>
+            </a:r>
+            <a:r>
+              <a:rPr sz="1600" dirty="0" err="1">
+                <a:solidFill>
+                  <a:srgbClr val="CDD2DC"/>
+                </a:solidFill>
+              </a:rPr>
+              <a:t>LocalStorage</a:t>
+            </a:r>
+            <a:r>
+              <a:rPr sz="1600" dirty="0">
+                <a:solidFill>
+                  <a:srgbClr val="CDD2DC"/>
+                </a:solidFill>
+              </a:rPr>
+              <a:t>, preserving login across browser reloads.</a:t>
             </a:r>
           </a:p>
         </p:txBody>
@@ -8434,14 +9063,14 @@
   <p:clrMapOvr>
     <a:masterClrMapping/>
   </p:clrMapOvr>
-  <p:transition spd="fast">
-    <p:push dir="l"/>
+  <p:transition>
+    <p:push/>
   </p:transition>
 </p:sld>
 </file>
 
 <file path=ppt/slides/slide8.xml><?xml version="1.0" encoding="utf-8"?>
-<p:sld xmlns:a="http://schemas.openxmlformats.org/drawingml/2006/main" xmlns:p="http://schemas.openxmlformats.org/presentationml/2006/main" xmlns:r="http://schemas.openxmlformats.org/officeDocument/2006/relationships">
+<p:sld xmlns:a="http://schemas.openxmlformats.org/drawingml/2006/main" xmlns:r="http://schemas.openxmlformats.org/officeDocument/2006/relationships" xmlns:p="http://schemas.openxmlformats.org/presentationml/2006/main">
   <p:cSld>
     <p:spTree>
       <p:nvGrpSpPr>
@@ -8449,7 +9078,14 @@
         <p:cNvGrpSpPr/>
         <p:nvPr/>
       </p:nvGrpSpPr>
-      <p:grpSpPr/>
+      <p:grpSpPr>
+        <a:xfrm>
+          <a:off x="0" y="0"/>
+          <a:ext cx="0" cy="0"/>
+          <a:chOff x="0" y="0"/>
+          <a:chExt cx="0" cy="0"/>
+        </a:xfrm>
+      </p:grpSpPr>
       <p:sp>
         <p:nvSpPr>
           <p:cNvPr id="2" name="Rectangle 1"/>
@@ -8490,6 +9126,7 @@
           <a:lstStyle/>
           <a:p>
             <a:pPr algn="ctr"/>
+            <a:endParaRPr/>
           </a:p>
         </p:txBody>
       </p:sp>
@@ -8533,6 +9170,7 @@
           <a:lstStyle/>
           <a:p>
             <a:pPr algn="ctr"/>
+            <a:endParaRPr/>
           </a:p>
         </p:txBody>
       </p:sp>
@@ -8580,7 +9218,7 @@
         <p:spPr>
           <a:xfrm>
             <a:off x="731520" y="621792"/>
-            <a:ext cx="10728655" cy="594360"/>
+            <a:ext cx="10728655" cy="492443"/>
           </a:xfrm>
           <a:prstGeom prst="rect">
             <a:avLst/>
@@ -8601,6 +9239,7 @@
               </a:defRPr>
             </a:pPr>
             <a:r>
+              <a:rPr sz="2600" i="1" u="sng" dirty="0"/>
               <a:t>Real YouTube Settings Panel &amp; Playback Preferences</a:t>
             </a:r>
           </a:p>
@@ -8683,6 +9322,7 @@
           <a:lstStyle/>
           <a:p>
             <a:pPr algn="ctr"/>
+            <a:endParaRPr/>
           </a:p>
         </p:txBody>
       </p:sp>
@@ -8752,6 +9392,7 @@
           <a:lstStyle/>
           <a:p>
             <a:pPr algn="ctr"/>
+            <a:endParaRPr/>
           </a:p>
         </p:txBody>
       </p:sp>
@@ -8764,7 +9405,7 @@
         <p:spPr>
           <a:xfrm>
             <a:off x="6449263" y="1490472"/>
-            <a:ext cx="4809744" cy="4334255"/>
+            <a:ext cx="4809744" cy="3985706"/>
           </a:xfrm>
           <a:prstGeom prst="rect">
             <a:avLst/>
@@ -8772,12 +9413,12 @@
           <a:noFill/>
         </p:spPr>
         <p:txBody>
-          <a:bodyPr wrap="square" tIns="0" bIns="0" lIns="0" rIns="0">
+          <a:bodyPr wrap="square" lIns="0" tIns="0" rIns="0" bIns="0">
             <a:spAutoFit/>
           </a:bodyPr>
           <a:lstStyle/>
           <a:p>
-            <a:pPr>
+            <a:pPr algn="ctr">
               <a:spcAft>
                 <a:spcPts val="1000"/>
               </a:spcAft>
@@ -8788,6 +9429,7 @@
               </a:defRPr>
             </a:pPr>
             <a:r>
+              <a:rPr sz="1600" i="1" u="sng" dirty="0"/>
               <a:t>Settings Architecture &amp; Controls</a:t>
             </a:r>
           </a:p>
@@ -8798,7 +9440,7 @@
               </a:spcAft>
             </a:pPr>
             <a:r>
-              <a:rPr sz="1100" b="1">
+              <a:rPr sz="1600" b="1" dirty="0">
                 <a:solidFill>
                   <a:srgbClr val="FFFFFF"/>
                 </a:solidFill>
@@ -8806,7 +9448,7 @@
               <a:t>• Authentic YouTube Settings UI: </a:t>
             </a:r>
             <a:r>
-              <a:rPr sz="1100">
+              <a:rPr sz="1600" dirty="0">
                 <a:solidFill>
                   <a:srgbClr val="CDD2DC"/>
                 </a:solidFill>
@@ -8821,7 +9463,7 @@
               </a:spcAft>
             </a:pPr>
             <a:r>
-              <a:rPr sz="1100" b="1">
+              <a:rPr sz="1600" b="1" dirty="0">
                 <a:solidFill>
                   <a:srgbClr val="FFFFFF"/>
                 </a:solidFill>
@@ -8829,7 +9471,7 @@
               <a:t>• Display Theme Engine: </a:t>
             </a:r>
             <a:r>
-              <a:rPr sz="1100">
+              <a:rPr sz="1600" dirty="0">
                 <a:solidFill>
                   <a:srgbClr val="CDD2DC"/>
                 </a:solidFill>
@@ -8844,7 +9486,7 @@
               </a:spcAft>
             </a:pPr>
             <a:r>
-              <a:rPr sz="1100" b="1">
+              <a:rPr sz="1600" b="1" dirty="0">
                 <a:solidFill>
                   <a:srgbClr val="FFFFFF"/>
                 </a:solidFill>
@@ -8852,7 +9494,7 @@
               <a:t>• Autoplay Next Video: </a:t>
             </a:r>
             <a:r>
-              <a:rPr sz="1100">
+              <a:rPr sz="1600" dirty="0">
                 <a:solidFill>
                   <a:srgbClr val="CDD2DC"/>
                 </a:solidFill>
@@ -8867,7 +9509,7 @@
               </a:spcAft>
             </a:pPr>
             <a:r>
-              <a:rPr sz="1100" b="1">
+              <a:rPr sz="1600" b="1" dirty="0">
                 <a:solidFill>
                   <a:srgbClr val="FFFFFF"/>
                 </a:solidFill>
@@ -8875,7 +9517,7 @@
               <a:t>• HD 1080p Stream Quality: </a:t>
             </a:r>
             <a:r>
-              <a:rPr sz="1100">
+              <a:rPr sz="1600" dirty="0">
                 <a:solidFill>
                   <a:srgbClr val="CDD2DC"/>
                 </a:solidFill>
@@ -8890,7 +9532,7 @@
               </a:spcAft>
             </a:pPr>
             <a:r>
-              <a:rPr sz="1100" b="1">
+              <a:rPr sz="1600" b="1" dirty="0">
                 <a:solidFill>
                   <a:srgbClr val="FFFFFF"/>
                 </a:solidFill>
@@ -8898,7 +9540,7 @@
               <a:t>• Storage &amp; Cache Controls: </a:t>
             </a:r>
             <a:r>
-              <a:rPr sz="1100">
+              <a:rPr sz="1600" dirty="0">
                 <a:solidFill>
                   <a:srgbClr val="CDD2DC"/>
                 </a:solidFill>
@@ -8913,14 +9555,14 @@
   <p:clrMapOvr>
     <a:masterClrMapping/>
   </p:clrMapOvr>
-  <p:transition spd="fast">
-    <p:push dir="l"/>
+  <p:transition>
+    <p:push/>
   </p:transition>
 </p:sld>
 </file>
 
 <file path=ppt/slides/slide9.xml><?xml version="1.0" encoding="utf-8"?>
-<p:sld xmlns:a="http://schemas.openxmlformats.org/drawingml/2006/main" xmlns:p="http://schemas.openxmlformats.org/presentationml/2006/main" xmlns:r="http://schemas.openxmlformats.org/officeDocument/2006/relationships">
+<p:sld xmlns:a="http://schemas.openxmlformats.org/drawingml/2006/main" xmlns:r="http://schemas.openxmlformats.org/officeDocument/2006/relationships" xmlns:p="http://schemas.openxmlformats.org/presentationml/2006/main">
   <p:cSld>
     <p:spTree>
       <p:nvGrpSpPr>
@@ -8928,7 +9570,14 @@
         <p:cNvGrpSpPr/>
         <p:nvPr/>
       </p:nvGrpSpPr>
-      <p:grpSpPr/>
+      <p:grpSpPr>
+        <a:xfrm>
+          <a:off x="0" y="0"/>
+          <a:ext cx="0" cy="0"/>
+          <a:chOff x="0" y="0"/>
+          <a:chExt cx="0" cy="0"/>
+        </a:xfrm>
+      </p:grpSpPr>
       <p:sp>
         <p:nvSpPr>
           <p:cNvPr id="2" name="Rectangle 1"/>
@@ -8969,6 +9618,7 @@
           <a:lstStyle/>
           <a:p>
             <a:pPr algn="ctr"/>
+            <a:endParaRPr/>
           </a:p>
         </p:txBody>
       </p:sp>
@@ -9012,6 +9662,7 @@
           <a:lstStyle/>
           <a:p>
             <a:pPr algn="ctr"/>
+            <a:endParaRPr/>
           </a:p>
         </p:txBody>
       </p:sp>
@@ -9059,7 +9710,7 @@
         <p:spPr>
           <a:xfrm>
             <a:off x="731520" y="621792"/>
-            <a:ext cx="10728655" cy="594360"/>
+            <a:ext cx="10728655" cy="523220"/>
           </a:xfrm>
           <a:prstGeom prst="rect">
             <a:avLst/>
@@ -9080,6 +9731,7 @@
               </a:defRPr>
             </a:pPr>
             <a:r>
+              <a:rPr sz="2800" i="1" u="sng" dirty="0"/>
               <a:t>Infinite Scroll Feed &amp; YouTube Data API v3 Engine</a:t>
             </a:r>
           </a:p>
@@ -9162,6 +9814,7 @@
           <a:lstStyle/>
           <a:p>
             <a:pPr algn="ctr"/>
+            <a:endParaRPr/>
           </a:p>
         </p:txBody>
       </p:sp>
@@ -9174,7 +9827,7 @@
         <p:spPr>
           <a:xfrm>
             <a:off x="932688" y="1490472"/>
-            <a:ext cx="4809744" cy="4334255"/>
+            <a:ext cx="4809744" cy="3349635"/>
           </a:xfrm>
           <a:prstGeom prst="rect">
             <a:avLst/>
@@ -9182,12 +9835,12 @@
           <a:noFill/>
         </p:spPr>
         <p:txBody>
-          <a:bodyPr wrap="square" tIns="0" bIns="0" lIns="0" rIns="0">
+          <a:bodyPr wrap="square" lIns="0" tIns="0" rIns="0" bIns="0">
             <a:spAutoFit/>
           </a:bodyPr>
           <a:lstStyle/>
           <a:p>
-            <a:pPr>
+            <a:pPr algn="ctr">
               <a:spcAft>
                 <a:spcPts val="1000"/>
               </a:spcAft>
@@ -9198,6 +9851,7 @@
               </a:defRPr>
             </a:pPr>
             <a:r>
+              <a:rPr sz="1600" i="1" u="sng" dirty="0"/>
               <a:t>Infinite Scroll Feed Pagination</a:t>
             </a:r>
           </a:p>
@@ -9208,7 +9862,7 @@
               </a:spcAft>
             </a:pPr>
             <a:r>
-              <a:rPr sz="1150" b="1">
+              <a:rPr sz="2000" b="1" dirty="0">
                 <a:solidFill>
                   <a:srgbClr val="FFFFFF"/>
                 </a:solidFill>
@@ -9216,7 +9870,7 @@
               <a:t>• react-infinite-scroll-component: </a:t>
             </a:r>
             <a:r>
-              <a:rPr sz="1150">
+              <a:rPr sz="2000" dirty="0">
                 <a:solidFill>
                   <a:srgbClr val="CDD2DC"/>
                 </a:solidFill>
@@ -9231,7 +9885,7 @@
               </a:spcAft>
             </a:pPr>
             <a:r>
-              <a:rPr sz="1150" b="1">
+              <a:rPr sz="2000" b="1" dirty="0">
                 <a:solidFill>
                   <a:srgbClr val="FFFFFF"/>
                 </a:solidFill>
@@ -9239,7 +9893,7 @@
               <a:t>• Zero Churn Reconciliation: </a:t>
             </a:r>
             <a:r>
-              <a:rPr sz="1150">
+              <a:rPr sz="2000" dirty="0">
                 <a:solidFill>
                   <a:srgbClr val="CDD2DC"/>
                 </a:solidFill>
@@ -9254,7 +9908,7 @@
               </a:spcAft>
             </a:pPr>
             <a:r>
-              <a:rPr sz="1150" b="1">
+              <a:rPr sz="2000" b="1" dirty="0">
                 <a:solidFill>
                   <a:srgbClr val="FFFFFF"/>
                 </a:solidFill>
@@ -9262,7 +9916,7 @@
               <a:t>• Scroll Trigger Geometry: </a:t>
             </a:r>
             <a:r>
-              <a:rPr sz="1150">
+              <a:rPr sz="2000" dirty="0">
                 <a:solidFill>
                   <a:srgbClr val="CDD2DC"/>
                 </a:solidFill>
@@ -9314,6 +9968,7 @@
           <a:lstStyle/>
           <a:p>
             <a:pPr algn="ctr"/>
+            <a:endParaRPr/>
           </a:p>
         </p:txBody>
       </p:sp>
@@ -9326,7 +9981,7 @@
         <p:spPr>
           <a:xfrm>
             <a:off x="6449263" y="1490472"/>
-            <a:ext cx="4809744" cy="4334255"/>
+            <a:ext cx="4809744" cy="3349635"/>
           </a:xfrm>
           <a:prstGeom prst="rect">
             <a:avLst/>
@@ -9334,12 +9989,12 @@
           <a:noFill/>
         </p:spPr>
         <p:txBody>
-          <a:bodyPr wrap="square" tIns="0" bIns="0" lIns="0" rIns="0">
+          <a:bodyPr wrap="square" lIns="0" tIns="0" rIns="0" bIns="0">
             <a:spAutoFit/>
           </a:bodyPr>
           <a:lstStyle/>
           <a:p>
-            <a:pPr>
+            <a:pPr algn="ctr">
               <a:spcAft>
                 <a:spcPts val="1000"/>
               </a:spcAft>
@@ -9350,6 +10005,7 @@
               </a:defRPr>
             </a:pPr>
             <a:r>
+              <a:rPr sz="1600" i="1" u="sng" dirty="0"/>
               <a:t>YouTube Data API v3 Live Integration</a:t>
             </a:r>
           </a:p>
@@ -9360,7 +10016,7 @@
               </a:spcAft>
             </a:pPr>
             <a:r>
-              <a:rPr sz="1150" b="1">
+              <a:rPr sz="2000" b="1" dirty="0">
                 <a:solidFill>
                   <a:srgbClr val="FFFFFF"/>
                 </a:solidFill>
@@ -9368,7 +10024,7 @@
               <a:t>• Google Cloud YouTube API v3: </a:t>
             </a:r>
             <a:r>
-              <a:rPr sz="1150">
+              <a:rPr sz="2000" dirty="0">
                 <a:solidFill>
                   <a:srgbClr val="CDD2DC"/>
                 </a:solidFill>
@@ -9383,7 +10039,7 @@
               </a:spcAft>
             </a:pPr>
             <a:r>
-              <a:rPr sz="1150" b="1">
+              <a:rPr sz="2000" b="1" dirty="0">
                 <a:solidFill>
                   <a:srgbClr val="FFFFFF"/>
                 </a:solidFill>
@@ -9391,7 +10047,7 @@
               <a:t>• Live Key Manager: </a:t>
             </a:r>
             <a:r>
-              <a:rPr sz="1150">
+              <a:rPr sz="2000" dirty="0">
                 <a:solidFill>
                   <a:srgbClr val="CDD2DC"/>
                 </a:solidFill>
@@ -9406,7 +10062,7 @@
               </a:spcAft>
             </a:pPr>
             <a:r>
-              <a:rPr sz="1150" b="1">
+              <a:rPr sz="2000" b="1" dirty="0">
                 <a:solidFill>
                   <a:srgbClr val="FFFFFF"/>
                 </a:solidFill>
@@ -9414,7 +10070,7 @@
               <a:t>• Resilient Offline Fallback: </a:t>
             </a:r>
             <a:r>
-              <a:rPr sz="1150">
+              <a:rPr sz="2000" dirty="0">
                 <a:solidFill>
                   <a:srgbClr val="CDD2DC"/>
                 </a:solidFill>
@@ -9429,8 +10085,8 @@
   <p:clrMapOvr>
     <a:masterClrMapping/>
   </p:clrMapOvr>
-  <p:transition spd="fast">
-    <p:push dir="l"/>
+  <p:transition>
+    <p:push/>
   </p:transition>
 </p:sld>
 </file>
